--- a/재정학/01_Lectures/재정학_Chapter_10.pptx
+++ b/재정학/01_Lectures/재정학_Chapter_10.pptx
@@ -5,7 +5,7 @@
     <p:sldMasterId id="2147483648" r:id="rId1"/>
   </p:sldMasterIdLst>
   <p:notesMasterIdLst>
-    <p:notesMasterId r:id="rId52"/>
+    <p:notesMasterId r:id="rId56"/>
   </p:notesMasterIdLst>
   <p:sldIdLst>
     <p:sldId id="375" r:id="rId2"/>
@@ -27,37 +27,41 @@
     <p:sldId id="768" r:id="rId18"/>
     <p:sldId id="769" r:id="rId19"/>
     <p:sldId id="770" r:id="rId20"/>
-    <p:sldId id="754" r:id="rId21"/>
-    <p:sldId id="755" r:id="rId22"/>
-    <p:sldId id="756" r:id="rId23"/>
-    <p:sldId id="757" r:id="rId24"/>
-    <p:sldId id="729" r:id="rId25"/>
-    <p:sldId id="730" r:id="rId26"/>
-    <p:sldId id="731" r:id="rId27"/>
-    <p:sldId id="726" r:id="rId28"/>
-    <p:sldId id="732" r:id="rId29"/>
-    <p:sldId id="733" r:id="rId30"/>
-    <p:sldId id="734" r:id="rId31"/>
-    <p:sldId id="735" r:id="rId32"/>
-    <p:sldId id="736" r:id="rId33"/>
-    <p:sldId id="737" r:id="rId34"/>
-    <p:sldId id="738" r:id="rId35"/>
-    <p:sldId id="739" r:id="rId36"/>
-    <p:sldId id="740" r:id="rId37"/>
-    <p:sldId id="741" r:id="rId38"/>
-    <p:sldId id="742" r:id="rId39"/>
-    <p:sldId id="743" r:id="rId40"/>
-    <p:sldId id="744" r:id="rId41"/>
-    <p:sldId id="745" r:id="rId42"/>
-    <p:sldId id="727" r:id="rId43"/>
-    <p:sldId id="746" r:id="rId44"/>
-    <p:sldId id="747" r:id="rId45"/>
-    <p:sldId id="748" r:id="rId46"/>
-    <p:sldId id="749" r:id="rId47"/>
-    <p:sldId id="750" r:id="rId48"/>
-    <p:sldId id="728" r:id="rId49"/>
-    <p:sldId id="751" r:id="rId50"/>
-    <p:sldId id="364" r:id="rId51"/>
+    <p:sldId id="771" r:id="rId21"/>
+    <p:sldId id="772" r:id="rId22"/>
+    <p:sldId id="773" r:id="rId23"/>
+    <p:sldId id="774" r:id="rId24"/>
+    <p:sldId id="754" r:id="rId25"/>
+    <p:sldId id="755" r:id="rId26"/>
+    <p:sldId id="756" r:id="rId27"/>
+    <p:sldId id="757" r:id="rId28"/>
+    <p:sldId id="729" r:id="rId29"/>
+    <p:sldId id="730" r:id="rId30"/>
+    <p:sldId id="731" r:id="rId31"/>
+    <p:sldId id="726" r:id="rId32"/>
+    <p:sldId id="732" r:id="rId33"/>
+    <p:sldId id="733" r:id="rId34"/>
+    <p:sldId id="734" r:id="rId35"/>
+    <p:sldId id="735" r:id="rId36"/>
+    <p:sldId id="736" r:id="rId37"/>
+    <p:sldId id="737" r:id="rId38"/>
+    <p:sldId id="738" r:id="rId39"/>
+    <p:sldId id="739" r:id="rId40"/>
+    <p:sldId id="740" r:id="rId41"/>
+    <p:sldId id="741" r:id="rId42"/>
+    <p:sldId id="742" r:id="rId43"/>
+    <p:sldId id="743" r:id="rId44"/>
+    <p:sldId id="744" r:id="rId45"/>
+    <p:sldId id="745" r:id="rId46"/>
+    <p:sldId id="727" r:id="rId47"/>
+    <p:sldId id="746" r:id="rId48"/>
+    <p:sldId id="747" r:id="rId49"/>
+    <p:sldId id="748" r:id="rId50"/>
+    <p:sldId id="749" r:id="rId51"/>
+    <p:sldId id="750" r:id="rId52"/>
+    <p:sldId id="728" r:id="rId53"/>
+    <p:sldId id="751" r:id="rId54"/>
+    <p:sldId id="364" r:id="rId55"/>
   </p:sldIdLst>
   <p:sldSz cx="12192000" cy="6858000"/>
   <p:notesSz cx="6858000" cy="9144000"/>
@@ -268,7 +272,7 @@
           <a:p>
             <a:fld id="{4A5E00EF-AEA4-43E2-9451-8F9C59A39471}" type="datetimeFigureOut">
               <a:rPr lang="ko-KR" altLang="en-US" smtClean="0"/>
-              <a:t>2026-04-01</a:t>
+              <a:t>2026-04-02</a:t>
             </a:fld>
             <a:endParaRPr lang="ko-KR" altLang="en-US"/>
           </a:p>
@@ -690,7 +694,7 @@
           <a:p>
             <a:fld id="{CD32C56F-BD27-4999-9E6D-D4EACE3DA9F4}" type="datetime1">
               <a:rPr lang="ko-KR" altLang="en-US" smtClean="0"/>
-              <a:t>2026-04-01</a:t>
+              <a:t>2026-04-02</a:t>
             </a:fld>
             <a:endParaRPr lang="ko-KR" altLang="en-US"/>
           </a:p>
@@ -904,7 +908,7 @@
           <a:p>
             <a:fld id="{8EF4A19C-72C8-45CA-8E3F-68A7FA345D6C}" type="datetime1">
               <a:rPr lang="ko-KR" altLang="en-US" smtClean="0"/>
-              <a:t>2026-04-01</a:t>
+              <a:t>2026-04-02</a:t>
             </a:fld>
             <a:endParaRPr lang="ko-KR" altLang="en-US"/>
           </a:p>
@@ -1128,7 +1132,7 @@
           <a:p>
             <a:fld id="{56A175B2-010B-4341-954C-5F8F5C70B124}" type="datetime1">
               <a:rPr lang="ko-KR" altLang="en-US" smtClean="0"/>
-              <a:t>2026-04-01</a:t>
+              <a:t>2026-04-02</a:t>
             </a:fld>
             <a:endParaRPr lang="ko-KR" altLang="en-US"/>
           </a:p>
@@ -1342,7 +1346,7 @@
           <a:p>
             <a:fld id="{16B83F9E-22C9-45CA-9E85-070F1D3EF530}" type="datetime1">
               <a:rPr lang="ko-KR" altLang="en-US" smtClean="0"/>
-              <a:t>2026-04-01</a:t>
+              <a:t>2026-04-02</a:t>
             </a:fld>
             <a:endParaRPr lang="ko-KR" altLang="en-US"/>
           </a:p>
@@ -1633,7 +1637,7 @@
           <a:p>
             <a:fld id="{03278F45-FB3C-4C4D-B89A-7BC3F5F229F6}" type="datetime1">
               <a:rPr lang="ko-KR" altLang="en-US" smtClean="0"/>
-              <a:t>2026-04-01</a:t>
+              <a:t>2026-04-02</a:t>
             </a:fld>
             <a:endParaRPr lang="ko-KR" altLang="en-US"/>
           </a:p>
@@ -2026,7 +2030,7 @@
           <a:p>
             <a:fld id="{38FDAC3C-35A6-415C-9F03-738A6AC328B1}" type="datetime1">
               <a:rPr lang="ko-KR" altLang="en-US" smtClean="0"/>
-              <a:t>2026-04-01</a:t>
+              <a:t>2026-04-02</a:t>
             </a:fld>
             <a:endParaRPr lang="ko-KR" altLang="en-US"/>
           </a:p>
@@ -3620,7 +3624,7 @@
           <a:p>
             <a:fld id="{507A0DF1-AEE6-4B0D-89D2-351E7B3EF65C}" type="datetime1">
               <a:rPr lang="ko-KR" altLang="en-US" smtClean="0"/>
-              <a:t>2026-04-01</a:t>
+              <a:t>2026-04-02</a:t>
             </a:fld>
             <a:endParaRPr lang="ko-KR" altLang="en-US"/>
           </a:p>
@@ -4048,7 +4052,7 @@
           <a:p>
             <a:fld id="{CA93B8C9-630F-4D57-944D-04FD37CECCD3}" type="datetime1">
               <a:rPr lang="ko-KR" altLang="en-US" smtClean="0"/>
-              <a:t>2026-04-01</a:t>
+              <a:t>2026-04-02</a:t>
             </a:fld>
             <a:endParaRPr lang="ko-KR" altLang="en-US"/>
           </a:p>
@@ -4205,7 +4209,7 @@
           <a:p>
             <a:fld id="{E986165A-AC43-4902-9541-874ECD310BA3}" type="datetime1">
               <a:rPr lang="ko-KR" altLang="en-US" smtClean="0"/>
-              <a:t>2026-04-01</a:t>
+              <a:t>2026-04-02</a:t>
             </a:fld>
             <a:endParaRPr lang="ko-KR" altLang="en-US"/>
           </a:p>
@@ -4532,7 +4536,7 @@
           <a:p>
             <a:fld id="{47E6EE6D-2B0E-43A9-87A2-7354CDB998F4}" type="datetime1">
               <a:rPr lang="ko-KR" altLang="en-US" smtClean="0"/>
-              <a:t>2026-04-01</a:t>
+              <a:t>2026-04-02</a:t>
             </a:fld>
             <a:endParaRPr lang="ko-KR" altLang="en-US"/>
           </a:p>
@@ -4836,7 +4840,7 @@
           <a:p>
             <a:fld id="{5CC5944E-0BC8-4FAA-9F94-6B4B05834E10}" type="datetime1">
               <a:rPr lang="ko-KR" altLang="en-US" smtClean="0"/>
-              <a:t>2026-04-01</a:t>
+              <a:t>2026-04-02</a:t>
             </a:fld>
             <a:endParaRPr lang="ko-KR" altLang="en-US"/>
           </a:p>
@@ -10111,61 +10115,896 @@
           </a:p>
         </p:txBody>
       </p:sp>
-      <p:sp>
-        <p:nvSpPr>
-          <p:cNvPr id="3" name="TextBox 2">
-            <a:extLst>
-              <a:ext uri="{FF2B5EF4-FFF2-40B4-BE49-F238E27FC236}">
-                <a16:creationId xmlns:a16="http://schemas.microsoft.com/office/drawing/2014/main" id="{D48287E9-0F06-6876-32E3-446ABC9C246E}"/>
-              </a:ext>
-            </a:extLst>
-          </p:cNvPr>
-          <p:cNvSpPr txBox="1"/>
-          <p:nvPr/>
-        </p:nvSpPr>
-        <p:spPr>
-          <a:xfrm>
-            <a:off x="288790" y="958844"/>
-            <a:ext cx="11250267" cy="414024"/>
-          </a:xfrm>
-          <a:prstGeom prst="rect">
-            <a:avLst/>
-          </a:prstGeom>
-          <a:noFill/>
-        </p:spPr>
-        <p:txBody>
-          <a:bodyPr wrap="square" rtlCol="0" anchor="t">
-            <a:spAutoFit/>
-          </a:bodyPr>
-          <a:lstStyle/>
-          <a:p>
-            <a:pPr marL="377825" indent="-285750">
-              <a:lnSpc>
-                <a:spcPct val="150000"/>
-              </a:lnSpc>
-              <a:buFont typeface="Arial" panose="020B0604020202020204" pitchFamily="34" charset="0"/>
-              <a:buChar char="•"/>
-            </a:pPr>
-            <a:r>
-              <a:rPr lang="ko-KR" altLang="en-US" sz="1600" spc="-50" dirty="0"/>
-              <a:t>우리나라를 포함하여 전 세계적으로 인구 고령화가 나타나고 있는 가운데</a:t>
-            </a:r>
-            <a:r>
-              <a:rPr lang="en-US" altLang="ko-KR" sz="1600" spc="-50" dirty="0"/>
-              <a:t>, </a:t>
-            </a:r>
-            <a:r>
-              <a:rPr lang="ko-KR" altLang="en-US" sz="1600" spc="-50" dirty="0"/>
-              <a:t>적립방식의 상대적 이점이 두드러진다</a:t>
-            </a:r>
-            <a:r>
-              <a:rPr lang="en-US" altLang="ko-KR" sz="1600" spc="-50"/>
-              <a:t>.</a:t>
-            </a:r>
-            <a:endParaRPr lang="en-US" altLang="ko-KR" sz="1600" spc="-50" dirty="0"/>
-          </a:p>
-        </p:txBody>
-      </p:sp>
+      <mc:AlternateContent xmlns:mc="http://schemas.openxmlformats.org/markup-compatibility/2006">
+        <mc:Choice xmlns:a14="http://schemas.microsoft.com/office/drawing/2010/main" Requires="a14">
+          <p:sp>
+            <p:nvSpPr>
+              <p:cNvPr id="3" name="TextBox 2">
+                <a:extLst>
+                  <a:ext uri="{FF2B5EF4-FFF2-40B4-BE49-F238E27FC236}">
+                    <a16:creationId xmlns:a16="http://schemas.microsoft.com/office/drawing/2014/main" id="{D48287E9-0F06-6876-32E3-446ABC9C246E}"/>
+                  </a:ext>
+                </a:extLst>
+              </p:cNvPr>
+              <p:cNvSpPr txBox="1"/>
+              <p:nvPr/>
+            </p:nvSpPr>
+            <p:spPr>
+              <a:xfrm>
+                <a:off x="288790" y="958844"/>
+                <a:ext cx="11250267" cy="5584670"/>
+              </a:xfrm>
+              <a:prstGeom prst="rect">
+                <a:avLst/>
+              </a:prstGeom>
+              <a:noFill/>
+            </p:spPr>
+            <p:txBody>
+              <a:bodyPr wrap="square" rtlCol="0" anchor="t">
+                <a:spAutoFit/>
+              </a:bodyPr>
+              <a:lstStyle/>
+              <a:p>
+                <a:pPr marL="377825" indent="-285750">
+                  <a:lnSpc>
+                    <a:spcPct val="150000"/>
+                  </a:lnSpc>
+                  <a:buFont typeface="Arial" panose="020B0604020202020204" pitchFamily="34" charset="0"/>
+                  <a:buChar char="•"/>
+                </a:pPr>
+                <a:r>
+                  <a:rPr lang="ko-KR" altLang="en-US" sz="1600" spc="-50" dirty="0"/>
+                  <a:t>우리나라를 포함하여 전 세계적으로 인구 고령화가 나타나고 있는 가운데</a:t>
+                </a:r>
+                <a:r>
+                  <a:rPr lang="en-US" altLang="ko-KR" sz="1600" spc="-50" dirty="0"/>
+                  <a:t>, </a:t>
+                </a:r>
+                <a:r>
+                  <a:rPr lang="ko-KR" altLang="en-US" sz="1600" spc="-50" dirty="0"/>
+                  <a:t>적립방식의 상대적 이점이 두드러진다</a:t>
+                </a:r>
+                <a:r>
+                  <a:rPr lang="en-US" altLang="ko-KR" sz="1600" spc="-50" dirty="0"/>
+                  <a:t>.</a:t>
+                </a:r>
+              </a:p>
+              <a:p>
+                <a:pPr marL="835025" lvl="1" indent="-285750">
+                  <a:lnSpc>
+                    <a:spcPct val="150000"/>
+                  </a:lnSpc>
+                  <a:buFont typeface="Wingdings" panose="05000000000000000000" pitchFamily="2" charset="2"/>
+                  <a:buChar char="ü"/>
+                </a:pPr>
+                <a:r>
+                  <a:rPr lang="ko-KR" altLang="en-US" sz="1600" spc="-50" dirty="0"/>
+                  <a:t>고령화는 일하는 사람들 대비 은퇴한 사람들이 상대적으로 많다는 것을 뜻한다</a:t>
+                </a:r>
+                <a:r>
+                  <a:rPr lang="en-US" altLang="ko-KR" sz="1600" spc="-50" dirty="0"/>
+                  <a:t>.</a:t>
+                </a:r>
+              </a:p>
+              <a:p>
+                <a:pPr marL="835025" lvl="1" indent="-285750">
+                  <a:lnSpc>
+                    <a:spcPct val="150000"/>
+                  </a:lnSpc>
+                  <a:buFont typeface="Wingdings" panose="05000000000000000000" pitchFamily="2" charset="2"/>
+                  <a:buChar char="ü"/>
+                </a:pPr>
+                <a:r>
+                  <a:rPr lang="ko-KR" altLang="en-US" sz="1600" spc="-50" dirty="0"/>
+                  <a:t>적립방식의 경우 축적된 기금이 완충작용을 해줄 수 있는 한편</a:t>
+                </a:r>
+                <a:r>
+                  <a:rPr lang="en-US" altLang="ko-KR" sz="1600" spc="-50" dirty="0"/>
+                  <a:t>, </a:t>
+                </a:r>
+                <a:r>
+                  <a:rPr lang="ko-KR" altLang="en-US" sz="1600" spc="-50" dirty="0"/>
+                  <a:t>부과방식의 경우 일하는 사람이 추가적인 부담을 </a:t>
+                </a:r>
+                <a:r>
+                  <a:rPr lang="ko-KR" altLang="en-US" sz="1600" spc="-50" dirty="0" err="1"/>
+                  <a:t>떠안야</a:t>
+                </a:r>
+                <a:r>
+                  <a:rPr lang="ko-KR" altLang="en-US" sz="1600" spc="-50" dirty="0"/>
+                  <a:t> 하기 때문이다</a:t>
+                </a:r>
+                <a:r>
+                  <a:rPr lang="en-US" altLang="ko-KR" sz="1600" spc="-50" dirty="0"/>
+                  <a:t>.</a:t>
+                </a:r>
+              </a:p>
+              <a:p>
+                <a:pPr marL="377825" indent="-285750">
+                  <a:lnSpc>
+                    <a:spcPct val="150000"/>
+                  </a:lnSpc>
+                  <a:buFont typeface="Arial" panose="020B0604020202020204" pitchFamily="34" charset="0"/>
+                  <a:buChar char="•"/>
+                </a:pPr>
+                <a:r>
+                  <a:rPr lang="ko-KR" altLang="en-US" sz="1600" spc="-50" dirty="0" err="1"/>
+                  <a:t>부과방식하에서</a:t>
+                </a:r>
+                <a:r>
+                  <a:rPr lang="ko-KR" altLang="en-US" sz="1600" spc="-50" dirty="0"/>
+                  <a:t> </a:t>
+                </a:r>
+                <a:r>
+                  <a:rPr lang="ko-KR" altLang="en-US" sz="1600" spc="-50" dirty="0" err="1"/>
+                  <a:t>국민염금재정의</a:t>
+                </a:r>
+                <a:r>
+                  <a:rPr lang="ko-KR" altLang="en-US" sz="1600" spc="-50" dirty="0"/>
+                  <a:t> 수입과 지출은 아래의 공식에 의해 균형을 이루는데</a:t>
+                </a:r>
+                <a:r>
+                  <a:rPr lang="en-US" altLang="ko-KR" sz="1600" spc="-50" dirty="0"/>
+                  <a:t>, </a:t>
+                </a:r>
+                <a:r>
+                  <a:rPr lang="ko-KR" altLang="en-US" sz="1600" spc="-50" dirty="0"/>
+                  <a:t>이 식을 통해 고령화가 국민연금재정에 어떤 문제를 가져오는 알아보자</a:t>
+                </a:r>
+                <a:r>
+                  <a:rPr lang="en-US" altLang="ko-KR" sz="1600" spc="-50" dirty="0"/>
+                  <a:t>.</a:t>
+                </a:r>
+              </a:p>
+              <a:p>
+                <a:pPr marL="377825" indent="-285750">
+                  <a:lnSpc>
+                    <a:spcPct val="150000"/>
+                  </a:lnSpc>
+                  <a:buFont typeface="Arial" panose="020B0604020202020204" pitchFamily="34" charset="0"/>
+                  <a:buChar char="•"/>
+                </a:pPr>
+                <a:endParaRPr lang="en-US" altLang="ko-KR" sz="1600" spc="-50" dirty="0"/>
+              </a:p>
+              <a:p>
+                <a:pPr marL="377825" indent="-285750">
+                  <a:lnSpc>
+                    <a:spcPct val="150000"/>
+                  </a:lnSpc>
+                  <a:buFont typeface="Arial" panose="020B0604020202020204" pitchFamily="34" charset="0"/>
+                  <a:buChar char="•"/>
+                </a:pPr>
+                <a:endParaRPr lang="en-US" altLang="ko-KR" sz="1600" spc="-50" dirty="0"/>
+              </a:p>
+              <a:p>
+                <a:pPr marL="835025" lvl="1" indent="-285750">
+                  <a:lnSpc>
+                    <a:spcPct val="150000"/>
+                  </a:lnSpc>
+                  <a:buFont typeface="Wingdings" panose="05000000000000000000" pitchFamily="2" charset="2"/>
+                  <a:buChar char="ü"/>
+                </a:pPr>
+                <a14:m>
+                  <m:oMath xmlns:m="http://schemas.openxmlformats.org/officeDocument/2006/math">
+                    <m:r>
+                      <a:rPr lang="en-US" altLang="ko-KR" sz="1600" i="1">
+                        <a:latin typeface="Cambria Math" panose="02040503050406030204" pitchFamily="18" charset="0"/>
+                      </a:rPr>
+                      <m:t>𝑡</m:t>
+                    </m:r>
+                  </m:oMath>
+                </a14:m>
+                <a:r>
+                  <a:rPr lang="ko-KR" altLang="en-US" sz="1600" spc="-50" dirty="0"/>
+                  <a:t>는 보험료율</a:t>
+                </a:r>
+                <a:r>
+                  <a:rPr lang="en-US" altLang="ko-KR" sz="1600" spc="-50" dirty="0"/>
+                  <a:t>, </a:t>
+                </a:r>
+                <a14:m>
+                  <m:oMath xmlns:m="http://schemas.openxmlformats.org/officeDocument/2006/math">
+                    <m:sSub>
+                      <m:sSubPr>
+                        <m:ctrlPr>
+                          <a:rPr lang="en-US" altLang="ko-KR" sz="1600" i="1">
+                            <a:latin typeface="Cambria Math" panose="02040503050406030204" pitchFamily="18" charset="0"/>
+                            <a:ea typeface="Cambria Math" panose="02040503050406030204" pitchFamily="18" charset="0"/>
+                          </a:rPr>
+                        </m:ctrlPr>
+                      </m:sSubPr>
+                      <m:e>
+                        <m:r>
+                          <a:rPr lang="en-US" altLang="ko-KR" sz="1600" i="1">
+                            <a:latin typeface="Cambria Math" panose="02040503050406030204" pitchFamily="18" charset="0"/>
+                            <a:ea typeface="Cambria Math" panose="02040503050406030204" pitchFamily="18" charset="0"/>
+                          </a:rPr>
+                          <m:t>𝑁</m:t>
+                        </m:r>
+                      </m:e>
+                      <m:sub>
+                        <m:r>
+                          <a:rPr lang="en-US" altLang="ko-KR" sz="1600" i="1">
+                            <a:latin typeface="Cambria Math" panose="02040503050406030204" pitchFamily="18" charset="0"/>
+                            <a:ea typeface="Cambria Math" panose="02040503050406030204" pitchFamily="18" charset="0"/>
+                          </a:rPr>
+                          <m:t>𝑤</m:t>
+                        </m:r>
+                      </m:sub>
+                    </m:sSub>
+                  </m:oMath>
+                </a14:m>
+                <a:r>
+                  <a:rPr lang="ko-KR" altLang="en-US" sz="1600" spc="-50" dirty="0"/>
+                  <a:t>는 보험료를 내는 사람의 수</a:t>
+                </a:r>
+                <a:r>
+                  <a:rPr lang="en-US" altLang="ko-KR" sz="1600" spc="-50" dirty="0"/>
+                  <a:t>, </a:t>
+                </a:r>
+                <a14:m>
+                  <m:oMath xmlns:m="http://schemas.openxmlformats.org/officeDocument/2006/math">
+                    <m:bar>
+                      <m:barPr>
+                        <m:pos m:val="top"/>
+                        <m:ctrlPr>
+                          <a:rPr lang="en-US" altLang="ko-KR" sz="1600" i="1">
+                            <a:latin typeface="Cambria Math" panose="02040503050406030204" pitchFamily="18" charset="0"/>
+                            <a:ea typeface="Cambria Math" panose="02040503050406030204" pitchFamily="18" charset="0"/>
+                          </a:rPr>
+                        </m:ctrlPr>
+                      </m:barPr>
+                      <m:e>
+                        <m:r>
+                          <a:rPr lang="en-US" altLang="ko-KR" sz="1600" i="1">
+                            <a:latin typeface="Cambria Math" panose="02040503050406030204" pitchFamily="18" charset="0"/>
+                            <a:ea typeface="Cambria Math" panose="02040503050406030204" pitchFamily="18" charset="0"/>
+                          </a:rPr>
+                          <m:t>𝑤</m:t>
+                        </m:r>
+                      </m:e>
+                    </m:bar>
+                  </m:oMath>
+                </a14:m>
+                <a:r>
+                  <a:rPr lang="ko-KR" altLang="en-US" sz="1600" spc="-50" dirty="0"/>
+                  <a:t>는 평균임금을 나타내고</a:t>
+                </a:r>
+                <a:r>
+                  <a:rPr lang="en-US" altLang="ko-KR" sz="1600" spc="-50" dirty="0"/>
+                  <a:t>,</a:t>
+                </a:r>
+              </a:p>
+              <a:p>
+                <a:pPr marL="835025" lvl="1" indent="-285750">
+                  <a:lnSpc>
+                    <a:spcPct val="150000"/>
+                  </a:lnSpc>
+                  <a:buFont typeface="Wingdings" panose="05000000000000000000" pitchFamily="2" charset="2"/>
+                  <a:buChar char="ü"/>
+                </a:pPr>
+                <a14:m>
+                  <m:oMath xmlns:m="http://schemas.openxmlformats.org/officeDocument/2006/math">
+                    <m:sSub>
+                      <m:sSubPr>
+                        <m:ctrlPr>
+                          <a:rPr lang="en-US" altLang="ko-KR" sz="1600" i="1">
+                            <a:latin typeface="Cambria Math" panose="02040503050406030204" pitchFamily="18" charset="0"/>
+                            <a:ea typeface="Cambria Math" panose="02040503050406030204" pitchFamily="18" charset="0"/>
+                          </a:rPr>
+                        </m:ctrlPr>
+                      </m:sSubPr>
+                      <m:e>
+                        <m:r>
+                          <a:rPr lang="en-US" altLang="ko-KR" sz="1600" i="1">
+                            <a:latin typeface="Cambria Math" panose="02040503050406030204" pitchFamily="18" charset="0"/>
+                            <a:ea typeface="Cambria Math" panose="02040503050406030204" pitchFamily="18" charset="0"/>
+                          </a:rPr>
+                          <m:t>𝑁</m:t>
+                        </m:r>
+                      </m:e>
+                      <m:sub>
+                        <m:r>
+                          <a:rPr lang="en-US" altLang="ko-KR" sz="1600" i="1">
+                            <a:latin typeface="Cambria Math" panose="02040503050406030204" pitchFamily="18" charset="0"/>
+                            <a:ea typeface="Cambria Math" panose="02040503050406030204" pitchFamily="18" charset="0"/>
+                          </a:rPr>
+                          <m:t>𝑏</m:t>
+                        </m:r>
+                      </m:sub>
+                    </m:sSub>
+                  </m:oMath>
+                </a14:m>
+                <a:r>
+                  <a:rPr lang="ko-KR" altLang="en-US" sz="1600" spc="-50" dirty="0"/>
+                  <a:t>는 연금 혜택을 받는 사람의 수</a:t>
+                </a:r>
+                <a:r>
+                  <a:rPr lang="en-US" altLang="ko-KR" sz="1600" spc="-50" dirty="0"/>
+                  <a:t>, </a:t>
+                </a:r>
+                <a14:m>
+                  <m:oMath xmlns:m="http://schemas.openxmlformats.org/officeDocument/2006/math">
+                    <m:r>
+                      <a:rPr lang="en-US" altLang="ko-KR" sz="1600" i="1">
+                        <a:latin typeface="Cambria Math" panose="02040503050406030204" pitchFamily="18" charset="0"/>
+                        <a:ea typeface="Cambria Math" panose="02040503050406030204" pitchFamily="18" charset="0"/>
+                      </a:rPr>
+                      <m:t>𝐵</m:t>
+                    </m:r>
+                  </m:oMath>
+                </a14:m>
+                <a:r>
+                  <a:rPr lang="ko-KR" altLang="en-US" sz="1600" spc="-50" dirty="0"/>
+                  <a:t>는 평균 연금 수준을 나타낸다</a:t>
+                </a:r>
+                <a:r>
+                  <a:rPr lang="en-US" altLang="ko-KR" sz="1600" spc="-50" dirty="0"/>
+                  <a:t>. </a:t>
+                </a:r>
+              </a:p>
+              <a:p>
+                <a:pPr marL="835025" lvl="1" indent="-285750">
+                  <a:lnSpc>
+                    <a:spcPct val="150000"/>
+                  </a:lnSpc>
+                  <a:buFont typeface="Wingdings" panose="05000000000000000000" pitchFamily="2" charset="2"/>
+                  <a:buChar char="ü"/>
+                </a:pPr>
+                <a:endParaRPr lang="en-US" altLang="ko-KR" sz="1600" spc="-50" dirty="0"/>
+              </a:p>
+              <a:p>
+                <a:pPr marL="377825" indent="-285750">
+                  <a:lnSpc>
+                    <a:spcPct val="150000"/>
+                  </a:lnSpc>
+                  <a:buFont typeface="Arial" panose="020B0604020202020204" pitchFamily="34" charset="0"/>
+                  <a:buChar char="•"/>
+                </a:pPr>
+                <a:r>
+                  <a:rPr lang="ko-KR" altLang="en-US" sz="1600" spc="-50" dirty="0"/>
+                  <a:t>위 식을 </a:t>
+                </a:r>
+                <a14:m>
+                  <m:oMath xmlns:m="http://schemas.openxmlformats.org/officeDocument/2006/math">
+                    <m:r>
+                      <a:rPr lang="en-US" altLang="ko-KR" sz="1600" i="1">
+                        <a:latin typeface="Cambria Math" panose="02040503050406030204" pitchFamily="18" charset="0"/>
+                      </a:rPr>
+                      <m:t>𝑡</m:t>
+                    </m:r>
+                  </m:oMath>
+                </a14:m>
+                <a:r>
+                  <a:rPr lang="ko-KR" altLang="en-US" sz="1600" spc="-50" dirty="0"/>
+                  <a:t>에 대해 풀면 아래의 식으로 만들 수 있는데</a:t>
+                </a:r>
+                <a:r>
+                  <a:rPr lang="en-US" altLang="ko-KR" sz="1600" spc="-50" dirty="0"/>
+                  <a:t>, </a:t>
+                </a:r>
+                <a:r>
+                  <a:rPr lang="ko-KR" altLang="en-US" sz="1600" spc="-50" dirty="0"/>
+                  <a:t>아래 식을 통해 보험료 부담이 어떤 요인에 영향을 받는지 알아보자</a:t>
+                </a:r>
+                <a:r>
+                  <a:rPr lang="en-US" altLang="ko-KR" sz="1600" spc="-50" dirty="0"/>
+                  <a:t>.</a:t>
+                </a:r>
+              </a:p>
+              <a:p>
+                <a:pPr marL="377825" indent="-285750">
+                  <a:lnSpc>
+                    <a:spcPct val="150000"/>
+                  </a:lnSpc>
+                  <a:buFont typeface="Arial" panose="020B0604020202020204" pitchFamily="34" charset="0"/>
+                  <a:buChar char="•"/>
+                </a:pPr>
+                <a:endParaRPr lang="en-US" altLang="ko-KR" sz="1600" spc="-50" dirty="0"/>
+              </a:p>
+              <a:p>
+                <a:pPr marL="377825" indent="-285750">
+                  <a:lnSpc>
+                    <a:spcPct val="150000"/>
+                  </a:lnSpc>
+                  <a:buFont typeface="Arial" panose="020B0604020202020204" pitchFamily="34" charset="0"/>
+                  <a:buChar char="•"/>
+                </a:pPr>
+                <a:endParaRPr lang="en-US" altLang="ko-KR" sz="1600" spc="-50" dirty="0"/>
+              </a:p>
+              <a:p>
+                <a:pPr marL="377825" indent="-285750">
+                  <a:lnSpc>
+                    <a:spcPct val="150000"/>
+                  </a:lnSpc>
+                  <a:buFont typeface="Arial" panose="020B0604020202020204" pitchFamily="34" charset="0"/>
+                  <a:buChar char="•"/>
+                </a:pPr>
+                <a:r>
+                  <a:rPr lang="en-US" altLang="ko-KR" sz="1600" spc="-50" dirty="0"/>
+                  <a:t>(</a:t>
+                </a:r>
+                <a:r>
+                  <a:rPr lang="ko-KR" altLang="en-US" sz="1600" spc="-50" dirty="0"/>
+                  <a:t>뒷장 계속</a:t>
+                </a:r>
+                <a:r>
+                  <a:rPr lang="en-US" altLang="ko-KR" sz="1600" spc="-50" dirty="0"/>
+                  <a:t>)</a:t>
+                </a:r>
+              </a:p>
+            </p:txBody>
+          </p:sp>
+        </mc:Choice>
+        <mc:Fallback>
+          <p:sp>
+            <p:nvSpPr>
+              <p:cNvPr id="3" name="TextBox 2">
+                <a:extLst>
+                  <a:ext uri="{FF2B5EF4-FFF2-40B4-BE49-F238E27FC236}">
+                    <a16:creationId xmlns:a16="http://schemas.microsoft.com/office/drawing/2014/main" id="{D48287E9-0F06-6876-32E3-446ABC9C246E}"/>
+                  </a:ext>
+                </a:extLst>
+              </p:cNvPr>
+              <p:cNvSpPr txBox="1">
+                <a:spLocks noRot="1" noChangeAspect="1" noMove="1" noResize="1" noEditPoints="1" noAdjustHandles="1" noChangeArrowheads="1" noChangeShapeType="1" noTextEdit="1"/>
+              </p:cNvSpPr>
+              <p:nvPr/>
+            </p:nvSpPr>
+            <p:spPr>
+              <a:xfrm>
+                <a:off x="288790" y="958844"/>
+                <a:ext cx="11250267" cy="5584670"/>
+              </a:xfrm>
+              <a:prstGeom prst="rect">
+                <a:avLst/>
+              </a:prstGeom>
+              <a:blipFill>
+                <a:blip r:embed="rId2"/>
+                <a:stretch>
+                  <a:fillRect b="-437"/>
+                </a:stretch>
+              </a:blipFill>
+            </p:spPr>
+            <p:txBody>
+              <a:bodyPr/>
+              <a:lstStyle/>
+              <a:p>
+                <a:r>
+                  <a:rPr lang="ko-KR" altLang="en-US">
+                    <a:noFill/>
+                  </a:rPr>
+                  <a:t> </a:t>
+                </a:r>
+              </a:p>
+            </p:txBody>
+          </p:sp>
+        </mc:Fallback>
+      </mc:AlternateContent>
+      <mc:AlternateContent xmlns:mc="http://schemas.openxmlformats.org/markup-compatibility/2006">
+        <mc:Choice xmlns:a14="http://schemas.microsoft.com/office/drawing/2010/main" Requires="a14">
+          <p:sp>
+            <p:nvSpPr>
+              <p:cNvPr id="5" name="TextBox 4">
+                <a:extLst>
+                  <a:ext uri="{FF2B5EF4-FFF2-40B4-BE49-F238E27FC236}">
+                    <a16:creationId xmlns:a16="http://schemas.microsoft.com/office/drawing/2014/main" id="{4BDA0237-4774-0C44-6313-144F4D5247E7}"/>
+                  </a:ext>
+                </a:extLst>
+              </p:cNvPr>
+              <p:cNvSpPr txBox="1"/>
+              <p:nvPr/>
+            </p:nvSpPr>
+            <p:spPr>
+              <a:xfrm>
+                <a:off x="2472743" y="3363532"/>
+                <a:ext cx="2286010" cy="276999"/>
+              </a:xfrm>
+              <a:prstGeom prst="rect">
+                <a:avLst/>
+              </a:prstGeom>
+              <a:noFill/>
+            </p:spPr>
+            <p:txBody>
+              <a:bodyPr wrap="none" lIns="0" tIns="0" rIns="0" bIns="0" rtlCol="0">
+                <a:spAutoFit/>
+              </a:bodyPr>
+              <a:lstStyle/>
+              <a:p>
+                <a14:m>
+                  <m:oMathPara xmlns:m="http://schemas.openxmlformats.org/officeDocument/2006/math">
+                    <m:oMathParaPr>
+                      <m:jc m:val="centerGroup"/>
+                    </m:oMathParaPr>
+                    <m:oMath xmlns:m="http://schemas.openxmlformats.org/officeDocument/2006/math">
+                      <m:r>
+                        <a:rPr lang="en-US" altLang="ko-KR" b="0" i="1" smtClean="0">
+                          <a:latin typeface="Cambria Math" panose="02040503050406030204" pitchFamily="18" charset="0"/>
+                        </a:rPr>
+                        <m:t>𝑡</m:t>
+                      </m:r>
+                      <m:r>
+                        <a:rPr lang="en-US" altLang="ko-KR" b="0" i="1" smtClean="0">
+                          <a:latin typeface="Cambria Math" panose="02040503050406030204" pitchFamily="18" charset="0"/>
+                        </a:rPr>
+                        <m:t> ×</m:t>
+                      </m:r>
+                      <m:sSub>
+                        <m:sSubPr>
+                          <m:ctrlPr>
+                            <a:rPr lang="en-US" altLang="ko-KR" b="0" i="1" smtClean="0">
+                              <a:latin typeface="Cambria Math" panose="02040503050406030204" pitchFamily="18" charset="0"/>
+                              <a:ea typeface="Cambria Math" panose="02040503050406030204" pitchFamily="18" charset="0"/>
+                            </a:rPr>
+                          </m:ctrlPr>
+                        </m:sSubPr>
+                        <m:e>
+                          <m:r>
+                            <a:rPr lang="en-US" altLang="ko-KR" b="0" i="1" smtClean="0">
+                              <a:latin typeface="Cambria Math" panose="02040503050406030204" pitchFamily="18" charset="0"/>
+                              <a:ea typeface="Cambria Math" panose="02040503050406030204" pitchFamily="18" charset="0"/>
+                            </a:rPr>
+                            <m:t>𝑁</m:t>
+                          </m:r>
+                        </m:e>
+                        <m:sub>
+                          <m:r>
+                            <a:rPr lang="en-US" altLang="ko-KR" b="0" i="1" smtClean="0">
+                              <a:latin typeface="Cambria Math" panose="02040503050406030204" pitchFamily="18" charset="0"/>
+                              <a:ea typeface="Cambria Math" panose="02040503050406030204" pitchFamily="18" charset="0"/>
+                            </a:rPr>
+                            <m:t>𝑤</m:t>
+                          </m:r>
+                        </m:sub>
+                      </m:sSub>
+                      <m:r>
+                        <a:rPr lang="en-US" altLang="ko-KR" b="0" i="1" smtClean="0">
+                          <a:latin typeface="Cambria Math" panose="02040503050406030204" pitchFamily="18" charset="0"/>
+                          <a:ea typeface="Cambria Math" panose="02040503050406030204" pitchFamily="18" charset="0"/>
+                        </a:rPr>
+                        <m:t>×</m:t>
+                      </m:r>
+                      <m:bar>
+                        <m:barPr>
+                          <m:pos m:val="top"/>
+                          <m:ctrlPr>
+                            <a:rPr lang="en-US" altLang="ko-KR" b="0" i="1" smtClean="0">
+                              <a:latin typeface="Cambria Math" panose="02040503050406030204" pitchFamily="18" charset="0"/>
+                              <a:ea typeface="Cambria Math" panose="02040503050406030204" pitchFamily="18" charset="0"/>
+                            </a:rPr>
+                          </m:ctrlPr>
+                        </m:barPr>
+                        <m:e>
+                          <m:r>
+                            <a:rPr lang="en-US" altLang="ko-KR" b="0" i="1" smtClean="0">
+                              <a:latin typeface="Cambria Math" panose="02040503050406030204" pitchFamily="18" charset="0"/>
+                              <a:ea typeface="Cambria Math" panose="02040503050406030204" pitchFamily="18" charset="0"/>
+                            </a:rPr>
+                            <m:t>𝑤</m:t>
+                          </m:r>
+                        </m:e>
+                      </m:bar>
+                      <m:r>
+                        <a:rPr lang="en-US" altLang="ko-KR" b="0" i="1" smtClean="0">
+                          <a:latin typeface="Cambria Math" panose="02040503050406030204" pitchFamily="18" charset="0"/>
+                          <a:ea typeface="Cambria Math" panose="02040503050406030204" pitchFamily="18" charset="0"/>
+                        </a:rPr>
+                        <m:t>= </m:t>
+                      </m:r>
+                      <m:sSub>
+                        <m:sSubPr>
+                          <m:ctrlPr>
+                            <a:rPr lang="en-US" altLang="ko-KR" i="1">
+                              <a:latin typeface="Cambria Math" panose="02040503050406030204" pitchFamily="18" charset="0"/>
+                              <a:ea typeface="Cambria Math" panose="02040503050406030204" pitchFamily="18" charset="0"/>
+                            </a:rPr>
+                          </m:ctrlPr>
+                        </m:sSubPr>
+                        <m:e>
+                          <m:r>
+                            <a:rPr lang="en-US" altLang="ko-KR" i="1">
+                              <a:latin typeface="Cambria Math" panose="02040503050406030204" pitchFamily="18" charset="0"/>
+                              <a:ea typeface="Cambria Math" panose="02040503050406030204" pitchFamily="18" charset="0"/>
+                            </a:rPr>
+                            <m:t>𝑁</m:t>
+                          </m:r>
+                        </m:e>
+                        <m:sub>
+                          <m:r>
+                            <a:rPr lang="en-US" altLang="ko-KR" b="0" i="1" smtClean="0">
+                              <a:latin typeface="Cambria Math" panose="02040503050406030204" pitchFamily="18" charset="0"/>
+                              <a:ea typeface="Cambria Math" panose="02040503050406030204" pitchFamily="18" charset="0"/>
+                            </a:rPr>
+                            <m:t>𝑏</m:t>
+                          </m:r>
+                        </m:sub>
+                      </m:sSub>
+                      <m:r>
+                        <a:rPr lang="en-US" altLang="ko-KR" i="1">
+                          <a:latin typeface="Cambria Math" panose="02040503050406030204" pitchFamily="18" charset="0"/>
+                          <a:ea typeface="Cambria Math" panose="02040503050406030204" pitchFamily="18" charset="0"/>
+                        </a:rPr>
+                        <m:t>×</m:t>
+                      </m:r>
+                      <m:r>
+                        <a:rPr lang="en-US" altLang="ko-KR" b="0" i="1" smtClean="0">
+                          <a:latin typeface="Cambria Math" panose="02040503050406030204" pitchFamily="18" charset="0"/>
+                          <a:ea typeface="Cambria Math" panose="02040503050406030204" pitchFamily="18" charset="0"/>
+                        </a:rPr>
+                        <m:t>𝐵</m:t>
+                      </m:r>
+                    </m:oMath>
+                  </m:oMathPara>
+                </a14:m>
+                <a:endParaRPr lang="ko-KR" altLang="en-US" dirty="0"/>
+              </a:p>
+            </p:txBody>
+          </p:sp>
+        </mc:Choice>
+        <mc:Fallback>
+          <p:sp>
+            <p:nvSpPr>
+              <p:cNvPr id="5" name="TextBox 4">
+                <a:extLst>
+                  <a:ext uri="{FF2B5EF4-FFF2-40B4-BE49-F238E27FC236}">
+                    <a16:creationId xmlns:a16="http://schemas.microsoft.com/office/drawing/2014/main" id="{4BDA0237-4774-0C44-6313-144F4D5247E7}"/>
+                  </a:ext>
+                </a:extLst>
+              </p:cNvPr>
+              <p:cNvSpPr txBox="1">
+                <a:spLocks noRot="1" noChangeAspect="1" noMove="1" noResize="1" noEditPoints="1" noAdjustHandles="1" noChangeArrowheads="1" noChangeShapeType="1" noTextEdit="1"/>
+              </p:cNvSpPr>
+              <p:nvPr/>
+            </p:nvSpPr>
+            <p:spPr>
+              <a:xfrm>
+                <a:off x="2472743" y="3363532"/>
+                <a:ext cx="2286010" cy="276999"/>
+              </a:xfrm>
+              <a:prstGeom prst="rect">
+                <a:avLst/>
+              </a:prstGeom>
+              <a:blipFill>
+                <a:blip r:embed="rId3"/>
+                <a:stretch>
+                  <a:fillRect l="-1333" r="-1067" b="-20000"/>
+                </a:stretch>
+              </a:blipFill>
+            </p:spPr>
+            <p:txBody>
+              <a:bodyPr/>
+              <a:lstStyle/>
+              <a:p>
+                <a:r>
+                  <a:rPr lang="ko-KR" altLang="en-US">
+                    <a:noFill/>
+                  </a:rPr>
+                  <a:t> </a:t>
+                </a:r>
+              </a:p>
+            </p:txBody>
+          </p:sp>
+        </mc:Fallback>
+      </mc:AlternateContent>
+      <mc:AlternateContent xmlns:mc="http://schemas.openxmlformats.org/markup-compatibility/2006">
+        <mc:Choice xmlns:a14="http://schemas.microsoft.com/office/drawing/2010/main" Requires="a14">
+          <p:sp>
+            <p:nvSpPr>
+              <p:cNvPr id="6" name="TextBox 5">
+                <a:extLst>
+                  <a:ext uri="{FF2B5EF4-FFF2-40B4-BE49-F238E27FC236}">
+                    <a16:creationId xmlns:a16="http://schemas.microsoft.com/office/drawing/2014/main" id="{8F45E843-6697-1B61-E5BC-98D9B65738B8}"/>
+                  </a:ext>
+                </a:extLst>
+              </p:cNvPr>
+              <p:cNvSpPr txBox="1"/>
+              <p:nvPr/>
+            </p:nvSpPr>
+            <p:spPr>
+              <a:xfrm>
+                <a:off x="2472743" y="5622157"/>
+                <a:ext cx="1414169" cy="565219"/>
+              </a:xfrm>
+              <a:prstGeom prst="rect">
+                <a:avLst/>
+              </a:prstGeom>
+              <a:noFill/>
+            </p:spPr>
+            <p:txBody>
+              <a:bodyPr wrap="none" lIns="0" tIns="0" rIns="0" bIns="0" rtlCol="0">
+                <a:spAutoFit/>
+              </a:bodyPr>
+              <a:lstStyle/>
+              <a:p>
+                <a14:m>
+                  <m:oMathPara xmlns:m="http://schemas.openxmlformats.org/officeDocument/2006/math">
+                    <m:oMathParaPr>
+                      <m:jc m:val="centerGroup"/>
+                    </m:oMathParaPr>
+                    <m:oMath xmlns:m="http://schemas.openxmlformats.org/officeDocument/2006/math">
+                      <m:r>
+                        <a:rPr lang="en-US" altLang="ko-KR" b="0" i="1" smtClean="0">
+                          <a:latin typeface="Cambria Math" panose="02040503050406030204" pitchFamily="18" charset="0"/>
+                        </a:rPr>
+                        <m:t>𝑡</m:t>
+                      </m:r>
+                      <m:r>
+                        <a:rPr lang="en-US" altLang="ko-KR" b="0" i="1" smtClean="0">
+                          <a:latin typeface="Cambria Math" panose="02040503050406030204" pitchFamily="18" charset="0"/>
+                        </a:rPr>
+                        <m:t> = </m:t>
+                      </m:r>
+                      <m:f>
+                        <m:fPr>
+                          <m:ctrlPr>
+                            <a:rPr lang="en-US" altLang="ko-KR" b="0" i="1" smtClean="0">
+                              <a:latin typeface="Cambria Math" panose="02040503050406030204" pitchFamily="18" charset="0"/>
+                              <a:ea typeface="Cambria Math" panose="02040503050406030204" pitchFamily="18" charset="0"/>
+                            </a:rPr>
+                          </m:ctrlPr>
+                        </m:fPr>
+                        <m:num>
+                          <m:sSub>
+                            <m:sSubPr>
+                              <m:ctrlPr>
+                                <a:rPr lang="en-US" altLang="ko-KR" i="1">
+                                  <a:latin typeface="Cambria Math" panose="02040503050406030204" pitchFamily="18" charset="0"/>
+                                  <a:ea typeface="Cambria Math" panose="02040503050406030204" pitchFamily="18" charset="0"/>
+                                </a:rPr>
+                              </m:ctrlPr>
+                            </m:sSubPr>
+                            <m:e>
+                              <m:r>
+                                <a:rPr lang="en-US" altLang="ko-KR" i="1">
+                                  <a:latin typeface="Cambria Math" panose="02040503050406030204" pitchFamily="18" charset="0"/>
+                                  <a:ea typeface="Cambria Math" panose="02040503050406030204" pitchFamily="18" charset="0"/>
+                                </a:rPr>
+                                <m:t>𝑁</m:t>
+                              </m:r>
+                            </m:e>
+                            <m:sub>
+                              <m:r>
+                                <a:rPr lang="en-US" altLang="ko-KR" i="1">
+                                  <a:latin typeface="Cambria Math" panose="02040503050406030204" pitchFamily="18" charset="0"/>
+                                  <a:ea typeface="Cambria Math" panose="02040503050406030204" pitchFamily="18" charset="0"/>
+                                </a:rPr>
+                                <m:t>𝑏</m:t>
+                              </m:r>
+                            </m:sub>
+                          </m:sSub>
+                        </m:num>
+                        <m:den>
+                          <m:sSub>
+                            <m:sSubPr>
+                              <m:ctrlPr>
+                                <a:rPr lang="en-US" altLang="ko-KR" i="1">
+                                  <a:latin typeface="Cambria Math" panose="02040503050406030204" pitchFamily="18" charset="0"/>
+                                  <a:ea typeface="Cambria Math" panose="02040503050406030204" pitchFamily="18" charset="0"/>
+                                </a:rPr>
+                              </m:ctrlPr>
+                            </m:sSubPr>
+                            <m:e>
+                              <m:r>
+                                <a:rPr lang="en-US" altLang="ko-KR" i="1">
+                                  <a:latin typeface="Cambria Math" panose="02040503050406030204" pitchFamily="18" charset="0"/>
+                                  <a:ea typeface="Cambria Math" panose="02040503050406030204" pitchFamily="18" charset="0"/>
+                                </a:rPr>
+                                <m:t>𝑁</m:t>
+                              </m:r>
+                            </m:e>
+                            <m:sub>
+                              <m:r>
+                                <a:rPr lang="en-US" altLang="ko-KR" i="1">
+                                  <a:latin typeface="Cambria Math" panose="02040503050406030204" pitchFamily="18" charset="0"/>
+                                  <a:ea typeface="Cambria Math" panose="02040503050406030204" pitchFamily="18" charset="0"/>
+                                </a:rPr>
+                                <m:t>𝑤</m:t>
+                              </m:r>
+                            </m:sub>
+                          </m:sSub>
+                        </m:den>
+                      </m:f>
+                      <m:r>
+                        <a:rPr lang="en-US" altLang="ko-KR" b="0" i="1" smtClean="0">
+                          <a:latin typeface="Cambria Math" panose="02040503050406030204" pitchFamily="18" charset="0"/>
+                          <a:ea typeface="Cambria Math" panose="02040503050406030204" pitchFamily="18" charset="0"/>
+                        </a:rPr>
+                        <m:t> ×</m:t>
+                      </m:r>
+                      <m:f>
+                        <m:fPr>
+                          <m:ctrlPr>
+                            <a:rPr lang="en-US" altLang="ko-KR" i="1">
+                              <a:latin typeface="Cambria Math" panose="02040503050406030204" pitchFamily="18" charset="0"/>
+                              <a:ea typeface="Cambria Math" panose="02040503050406030204" pitchFamily="18" charset="0"/>
+                            </a:rPr>
+                          </m:ctrlPr>
+                        </m:fPr>
+                        <m:num>
+                          <m:r>
+                            <a:rPr lang="en-US" altLang="ko-KR" b="0" i="1" smtClean="0">
+                              <a:latin typeface="Cambria Math" panose="02040503050406030204" pitchFamily="18" charset="0"/>
+                              <a:ea typeface="Cambria Math" panose="02040503050406030204" pitchFamily="18" charset="0"/>
+                            </a:rPr>
+                            <m:t>𝐵</m:t>
+                          </m:r>
+                        </m:num>
+                        <m:den>
+                          <m:bar>
+                            <m:barPr>
+                              <m:pos m:val="top"/>
+                              <m:ctrlPr>
+                                <a:rPr lang="en-US" altLang="ko-KR" i="1">
+                                  <a:latin typeface="Cambria Math" panose="02040503050406030204" pitchFamily="18" charset="0"/>
+                                  <a:ea typeface="Cambria Math" panose="02040503050406030204" pitchFamily="18" charset="0"/>
+                                </a:rPr>
+                              </m:ctrlPr>
+                            </m:barPr>
+                            <m:e>
+                              <m:r>
+                                <a:rPr lang="en-US" altLang="ko-KR" i="1">
+                                  <a:latin typeface="Cambria Math" panose="02040503050406030204" pitchFamily="18" charset="0"/>
+                                  <a:ea typeface="Cambria Math" panose="02040503050406030204" pitchFamily="18" charset="0"/>
+                                </a:rPr>
+                                <m:t>𝑤</m:t>
+                              </m:r>
+                            </m:e>
+                          </m:bar>
+                        </m:den>
+                      </m:f>
+                    </m:oMath>
+                  </m:oMathPara>
+                </a14:m>
+                <a:endParaRPr lang="ko-KR" altLang="en-US" dirty="0"/>
+              </a:p>
+            </p:txBody>
+          </p:sp>
+        </mc:Choice>
+        <mc:Fallback>
+          <p:sp>
+            <p:nvSpPr>
+              <p:cNvPr id="6" name="TextBox 5">
+                <a:extLst>
+                  <a:ext uri="{FF2B5EF4-FFF2-40B4-BE49-F238E27FC236}">
+                    <a16:creationId xmlns:a16="http://schemas.microsoft.com/office/drawing/2014/main" id="{8F45E843-6697-1B61-E5BC-98D9B65738B8}"/>
+                  </a:ext>
+                </a:extLst>
+              </p:cNvPr>
+              <p:cNvSpPr txBox="1">
+                <a:spLocks noRot="1" noChangeAspect="1" noMove="1" noResize="1" noEditPoints="1" noAdjustHandles="1" noChangeArrowheads="1" noChangeShapeType="1" noTextEdit="1"/>
+              </p:cNvSpPr>
+              <p:nvPr/>
+            </p:nvSpPr>
+            <p:spPr>
+              <a:xfrm>
+                <a:off x="2472743" y="5622157"/>
+                <a:ext cx="1414169" cy="565219"/>
+              </a:xfrm>
+              <a:prstGeom prst="rect">
+                <a:avLst/>
+              </a:prstGeom>
+              <a:blipFill>
+                <a:blip r:embed="rId4"/>
+                <a:stretch>
+                  <a:fillRect/>
+                </a:stretch>
+              </a:blipFill>
+            </p:spPr>
+            <p:txBody>
+              <a:bodyPr/>
+              <a:lstStyle/>
+              <a:p>
+                <a:r>
+                  <a:rPr lang="ko-KR" altLang="en-US">
+                    <a:noFill/>
+                  </a:rPr>
+                  <a:t> </a:t>
+                </a:r>
+              </a:p>
+            </p:txBody>
+          </p:sp>
+        </mc:Fallback>
+      </mc:AlternateContent>
     </p:spTree>
     <p:extLst>
       <p:ext uri="{BB962C8B-B14F-4D97-AF65-F5344CB8AC3E}">
@@ -10336,6 +11175,1741 @@
         <p:cNvPr id="1" name="">
           <a:extLst>
             <a:ext uri="{FF2B5EF4-FFF2-40B4-BE49-F238E27FC236}">
+              <a16:creationId xmlns:a16="http://schemas.microsoft.com/office/drawing/2014/main" id="{69DC6A29-C83F-F0D3-88CA-0904B9351F7D}"/>
+            </a:ext>
+          </a:extLst>
+        </p:cNvPr>
+        <p:cNvGrpSpPr/>
+        <p:nvPr/>
+      </p:nvGrpSpPr>
+      <p:grpSpPr>
+        <a:xfrm>
+          <a:off x="0" y="0"/>
+          <a:ext cx="0" cy="0"/>
+          <a:chOff x="0" y="0"/>
+          <a:chExt cx="0" cy="0"/>
+        </a:xfrm>
+      </p:grpSpPr>
+      <p:sp>
+        <p:nvSpPr>
+          <p:cNvPr id="2" name="제목 1">
+            <a:extLst>
+              <a:ext uri="{FF2B5EF4-FFF2-40B4-BE49-F238E27FC236}">
+                <a16:creationId xmlns:a16="http://schemas.microsoft.com/office/drawing/2014/main" id="{923593BC-E2B8-33AE-011C-D15E60FE52AB}"/>
+              </a:ext>
+            </a:extLst>
+          </p:cNvPr>
+          <p:cNvSpPr>
+            <a:spLocks noGrp="1"/>
+          </p:cNvSpPr>
+          <p:nvPr>
+            <p:ph type="title"/>
+          </p:nvPr>
+        </p:nvSpPr>
+        <p:spPr/>
+        <p:txBody>
+          <a:bodyPr/>
+          <a:lstStyle/>
+          <a:p>
+            <a:r>
+              <a:rPr lang="ko-KR" altLang="en-US" dirty="0"/>
+              <a:t>적립방식과 부과방식</a:t>
+            </a:r>
+          </a:p>
+        </p:txBody>
+      </p:sp>
+      <p:sp>
+        <p:nvSpPr>
+          <p:cNvPr id="4" name="슬라이드 번호 개체 틀 3">
+            <a:extLst>
+              <a:ext uri="{FF2B5EF4-FFF2-40B4-BE49-F238E27FC236}">
+                <a16:creationId xmlns:a16="http://schemas.microsoft.com/office/drawing/2014/main" id="{5873C217-9F2D-42DE-ADD5-F2B87220D912}"/>
+              </a:ext>
+            </a:extLst>
+          </p:cNvPr>
+          <p:cNvSpPr>
+            <a:spLocks noGrp="1"/>
+          </p:cNvSpPr>
+          <p:nvPr>
+            <p:ph type="sldNum" sz="quarter" idx="12"/>
+          </p:nvPr>
+        </p:nvSpPr>
+        <p:spPr/>
+        <p:txBody>
+          <a:bodyPr/>
+          <a:lstStyle/>
+          <a:p>
+            <a:fld id="{109C872D-39A9-4065-8BF3-6A613116E2A1}" type="slidenum">
+              <a:rPr lang="ko-KR" altLang="en-US" smtClean="0"/>
+              <a:t>20</a:t>
+            </a:fld>
+            <a:endParaRPr lang="ko-KR" altLang="en-US"/>
+          </a:p>
+        </p:txBody>
+      </p:sp>
+      <mc:AlternateContent xmlns:mc="http://schemas.openxmlformats.org/markup-compatibility/2006">
+        <mc:Choice xmlns:a14="http://schemas.microsoft.com/office/drawing/2010/main" Requires="a14">
+          <p:sp>
+            <p:nvSpPr>
+              <p:cNvPr id="3" name="TextBox 2">
+                <a:extLst>
+                  <a:ext uri="{FF2B5EF4-FFF2-40B4-BE49-F238E27FC236}">
+                    <a16:creationId xmlns:a16="http://schemas.microsoft.com/office/drawing/2014/main" id="{48FB1D3B-DC40-7E46-26F4-18FB18B8CC51}"/>
+                  </a:ext>
+                </a:extLst>
+              </p:cNvPr>
+              <p:cNvSpPr txBox="1"/>
+              <p:nvPr/>
+            </p:nvSpPr>
+            <p:spPr>
+              <a:xfrm>
+                <a:off x="288790" y="958844"/>
+                <a:ext cx="11250267" cy="5570564"/>
+              </a:xfrm>
+              <a:prstGeom prst="rect">
+                <a:avLst/>
+              </a:prstGeom>
+              <a:noFill/>
+            </p:spPr>
+            <p:txBody>
+              <a:bodyPr wrap="square" rtlCol="0" anchor="t">
+                <a:spAutoFit/>
+              </a:bodyPr>
+              <a:lstStyle/>
+              <a:p>
+                <a:pPr marL="377825" indent="-285750">
+                  <a:lnSpc>
+                    <a:spcPct val="150000"/>
+                  </a:lnSpc>
+                  <a:buFont typeface="Arial" panose="020B0604020202020204" pitchFamily="34" charset="0"/>
+                  <a:buChar char="•"/>
+                </a:pPr>
+                <a:endParaRPr lang="en-US" altLang="ko-KR" sz="1600" spc="-50" dirty="0"/>
+              </a:p>
+              <a:p>
+                <a:pPr marL="377825" indent="-285750">
+                  <a:lnSpc>
+                    <a:spcPct val="150000"/>
+                  </a:lnSpc>
+                  <a:buFont typeface="Arial" panose="020B0604020202020204" pitchFamily="34" charset="0"/>
+                  <a:buChar char="•"/>
+                </a:pPr>
+                <a:endParaRPr lang="en-US" altLang="ko-KR" sz="1600" spc="-50" dirty="0"/>
+              </a:p>
+              <a:p>
+                <a:pPr marL="377825" indent="-285750">
+                  <a:lnSpc>
+                    <a:spcPct val="150000"/>
+                  </a:lnSpc>
+                  <a:buFont typeface="Arial" panose="020B0604020202020204" pitchFamily="34" charset="0"/>
+                  <a:buChar char="•"/>
+                </a:pPr>
+                <a:r>
+                  <a:rPr lang="ko-KR" altLang="en-US" sz="1600" spc="-50" dirty="0"/>
+                  <a:t>위 식에서 </a:t>
+                </a:r>
+                <a14:m>
+                  <m:oMath xmlns:m="http://schemas.openxmlformats.org/officeDocument/2006/math">
+                    <m:f>
+                      <m:fPr>
+                        <m:ctrlPr>
+                          <a:rPr lang="en-US" altLang="ko-KR" sz="1600" i="1">
+                            <a:latin typeface="Cambria Math" panose="02040503050406030204" pitchFamily="18" charset="0"/>
+                            <a:ea typeface="Cambria Math" panose="02040503050406030204" pitchFamily="18" charset="0"/>
+                          </a:rPr>
+                        </m:ctrlPr>
+                      </m:fPr>
+                      <m:num>
+                        <m:sSub>
+                          <m:sSubPr>
+                            <m:ctrlPr>
+                              <a:rPr lang="en-US" altLang="ko-KR" sz="1600" i="1">
+                                <a:latin typeface="Cambria Math" panose="02040503050406030204" pitchFamily="18" charset="0"/>
+                                <a:ea typeface="Cambria Math" panose="02040503050406030204" pitchFamily="18" charset="0"/>
+                              </a:rPr>
+                            </m:ctrlPr>
+                          </m:sSubPr>
+                          <m:e>
+                            <m:r>
+                              <a:rPr lang="en-US" altLang="ko-KR" sz="1600" i="1">
+                                <a:latin typeface="Cambria Math" panose="02040503050406030204" pitchFamily="18" charset="0"/>
+                                <a:ea typeface="Cambria Math" panose="02040503050406030204" pitchFamily="18" charset="0"/>
+                              </a:rPr>
+                              <m:t>𝑁</m:t>
+                            </m:r>
+                          </m:e>
+                          <m:sub>
+                            <m:r>
+                              <a:rPr lang="en-US" altLang="ko-KR" sz="1600" i="1">
+                                <a:latin typeface="Cambria Math" panose="02040503050406030204" pitchFamily="18" charset="0"/>
+                                <a:ea typeface="Cambria Math" panose="02040503050406030204" pitchFamily="18" charset="0"/>
+                              </a:rPr>
+                              <m:t>𝑏</m:t>
+                            </m:r>
+                          </m:sub>
+                        </m:sSub>
+                      </m:num>
+                      <m:den>
+                        <m:sSub>
+                          <m:sSubPr>
+                            <m:ctrlPr>
+                              <a:rPr lang="en-US" altLang="ko-KR" sz="1600" i="1">
+                                <a:latin typeface="Cambria Math" panose="02040503050406030204" pitchFamily="18" charset="0"/>
+                                <a:ea typeface="Cambria Math" panose="02040503050406030204" pitchFamily="18" charset="0"/>
+                              </a:rPr>
+                            </m:ctrlPr>
+                          </m:sSubPr>
+                          <m:e>
+                            <m:r>
+                              <a:rPr lang="en-US" altLang="ko-KR" sz="1600" i="1">
+                                <a:latin typeface="Cambria Math" panose="02040503050406030204" pitchFamily="18" charset="0"/>
+                                <a:ea typeface="Cambria Math" panose="02040503050406030204" pitchFamily="18" charset="0"/>
+                              </a:rPr>
+                              <m:t>𝑁</m:t>
+                            </m:r>
+                          </m:e>
+                          <m:sub>
+                            <m:r>
+                              <a:rPr lang="en-US" altLang="ko-KR" sz="1600" i="1">
+                                <a:latin typeface="Cambria Math" panose="02040503050406030204" pitchFamily="18" charset="0"/>
+                                <a:ea typeface="Cambria Math" panose="02040503050406030204" pitchFamily="18" charset="0"/>
+                              </a:rPr>
+                              <m:t>𝑤</m:t>
+                            </m:r>
+                          </m:sub>
+                        </m:sSub>
+                      </m:den>
+                    </m:f>
+                  </m:oMath>
+                </a14:m>
+                <a:r>
+                  <a:rPr lang="en-US" altLang="ko-KR" sz="1600" spc="-50" dirty="0"/>
+                  <a:t> </a:t>
+                </a:r>
+                <a:r>
+                  <a:rPr lang="ko-KR" altLang="en-US" sz="1600" spc="-50" dirty="0"/>
+                  <a:t>는 연금 수혜자 수를 일하는 사람의 수로 나눈 비율로 </a:t>
+                </a:r>
+                <a:r>
+                  <a:rPr lang="en-US" altLang="ko-KR" sz="1600" spc="-50" dirty="0"/>
+                  <a:t>‘</a:t>
+                </a:r>
+                <a:r>
+                  <a:rPr lang="ko-KR" altLang="en-US" sz="1600" spc="-50" dirty="0"/>
+                  <a:t>의존비율</a:t>
+                </a:r>
+                <a:r>
+                  <a:rPr lang="en-US" altLang="ko-KR" sz="1600" spc="-50" dirty="0"/>
+                  <a:t>’ </a:t>
+                </a:r>
+                <a:r>
+                  <a:rPr lang="ko-KR" altLang="en-US" sz="1600" spc="-50" dirty="0"/>
+                  <a:t>이라고 할 수 있다</a:t>
+                </a:r>
+                <a:r>
+                  <a:rPr lang="en-US" altLang="ko-KR" sz="1600" spc="-50" dirty="0"/>
+                  <a:t>.</a:t>
+                </a:r>
+              </a:p>
+              <a:p>
+                <a:pPr marL="835025" lvl="1" indent="-285750">
+                  <a:lnSpc>
+                    <a:spcPct val="150000"/>
+                  </a:lnSpc>
+                  <a:buFont typeface="Wingdings" panose="05000000000000000000" pitchFamily="2" charset="2"/>
+                  <a:buChar char="ü"/>
+                </a:pPr>
+                <a:r>
+                  <a:rPr lang="ko-KR" altLang="en-US" sz="1600" spc="-50" dirty="0"/>
+                  <a:t>고령화가 진행될 수록</a:t>
+                </a:r>
+                <a:r>
+                  <a:rPr lang="en-US" altLang="ko-KR" sz="1600" spc="-50" dirty="0"/>
+                  <a:t>, </a:t>
+                </a:r>
+                <a:r>
+                  <a:rPr lang="ko-KR" altLang="en-US" sz="1600" spc="-50" dirty="0"/>
+                  <a:t>이 값은 자연히 올라가게 되고</a:t>
+                </a:r>
+                <a:r>
+                  <a:rPr lang="en-US" altLang="ko-KR" sz="1600" spc="-50" dirty="0"/>
+                  <a:t>, </a:t>
+                </a:r>
+                <a:r>
+                  <a:rPr lang="ko-KR" altLang="en-US" sz="1600" spc="-50" dirty="0"/>
+                  <a:t>따라서 보험료율</a:t>
+                </a:r>
+                <a:r>
+                  <a:rPr lang="en-US" altLang="ko-KR" sz="1600" spc="-50" dirty="0"/>
+                  <a:t>(</a:t>
+                </a:r>
+                <a14:m>
+                  <m:oMath xmlns:m="http://schemas.openxmlformats.org/officeDocument/2006/math">
+                    <m:r>
+                      <a:rPr lang="en-US" altLang="ko-KR" sz="1600" i="1">
+                        <a:latin typeface="Cambria Math" panose="02040503050406030204" pitchFamily="18" charset="0"/>
+                      </a:rPr>
+                      <m:t>𝑡</m:t>
+                    </m:r>
+                  </m:oMath>
+                </a14:m>
+                <a:r>
+                  <a:rPr lang="en-US" altLang="ko-KR" sz="1600" spc="-50" dirty="0"/>
+                  <a:t>)</a:t>
+                </a:r>
+                <a:r>
+                  <a:rPr lang="ko-KR" altLang="en-US" sz="1600" spc="-50" dirty="0"/>
+                  <a:t>의 인상이 불가피해진다는 것을 알 수 있다</a:t>
+                </a:r>
+                <a:r>
+                  <a:rPr lang="en-US" altLang="ko-KR" sz="1600" spc="-50" dirty="0"/>
+                  <a:t>.</a:t>
+                </a:r>
+              </a:p>
+              <a:p>
+                <a:pPr marL="377825" indent="-285750">
+                  <a:lnSpc>
+                    <a:spcPct val="150000"/>
+                  </a:lnSpc>
+                  <a:buFont typeface="Arial" panose="020B0604020202020204" pitchFamily="34" charset="0"/>
+                  <a:buChar char="•"/>
+                </a:pPr>
+                <a:r>
+                  <a:rPr lang="ko-KR" altLang="en-US" sz="1600" spc="-50" dirty="0"/>
+                  <a:t>둘째 항인</a:t>
+                </a:r>
+                <a:r>
+                  <a:rPr lang="en-US" altLang="ko-KR" sz="1600" dirty="0">
+                    <a:ea typeface="Cambria Math" panose="02040503050406030204" pitchFamily="18" charset="0"/>
+                  </a:rPr>
+                  <a:t> </a:t>
+                </a:r>
+                <a14:m>
+                  <m:oMath xmlns:m="http://schemas.openxmlformats.org/officeDocument/2006/math">
+                    <m:f>
+                      <m:fPr>
+                        <m:ctrlPr>
+                          <a:rPr lang="en-US" altLang="ko-KR" sz="1600" i="1">
+                            <a:latin typeface="Cambria Math" panose="02040503050406030204" pitchFamily="18" charset="0"/>
+                            <a:ea typeface="Cambria Math" panose="02040503050406030204" pitchFamily="18" charset="0"/>
+                          </a:rPr>
+                        </m:ctrlPr>
+                      </m:fPr>
+                      <m:num>
+                        <m:r>
+                          <a:rPr lang="en-US" altLang="ko-KR" sz="1600" i="1">
+                            <a:latin typeface="Cambria Math" panose="02040503050406030204" pitchFamily="18" charset="0"/>
+                            <a:ea typeface="Cambria Math" panose="02040503050406030204" pitchFamily="18" charset="0"/>
+                          </a:rPr>
+                          <m:t>𝐵</m:t>
+                        </m:r>
+                      </m:num>
+                      <m:den>
+                        <m:bar>
+                          <m:barPr>
+                            <m:pos m:val="top"/>
+                            <m:ctrlPr>
+                              <a:rPr lang="en-US" altLang="ko-KR" sz="1600" i="1">
+                                <a:latin typeface="Cambria Math" panose="02040503050406030204" pitchFamily="18" charset="0"/>
+                                <a:ea typeface="Cambria Math" panose="02040503050406030204" pitchFamily="18" charset="0"/>
+                              </a:rPr>
+                            </m:ctrlPr>
+                          </m:barPr>
+                          <m:e>
+                            <m:r>
+                              <a:rPr lang="en-US" altLang="ko-KR" sz="1600" i="1">
+                                <a:latin typeface="Cambria Math" panose="02040503050406030204" pitchFamily="18" charset="0"/>
+                                <a:ea typeface="Cambria Math" panose="02040503050406030204" pitchFamily="18" charset="0"/>
+                              </a:rPr>
+                              <m:t>𝑤</m:t>
+                            </m:r>
+                          </m:e>
+                        </m:bar>
+                      </m:den>
+                    </m:f>
+                  </m:oMath>
+                </a14:m>
+                <a:r>
+                  <a:rPr lang="ko-KR" altLang="en-US" sz="1600" spc="-50" dirty="0"/>
+                  <a:t> 은 평균적인 소득대체율을 뜻한다</a:t>
+                </a:r>
+                <a:r>
+                  <a:rPr lang="en-US" altLang="ko-KR" sz="1600" spc="-50" dirty="0"/>
+                  <a:t>.</a:t>
+                </a:r>
+              </a:p>
+              <a:p>
+                <a:pPr marL="835025" lvl="1" indent="-285750">
+                  <a:lnSpc>
+                    <a:spcPct val="150000"/>
+                  </a:lnSpc>
+                  <a:buFont typeface="Wingdings" panose="05000000000000000000" pitchFamily="2" charset="2"/>
+                  <a:buChar char="ü"/>
+                </a:pPr>
+                <a:r>
+                  <a:rPr lang="ko-KR" altLang="en-US" sz="1600" spc="-50" dirty="0"/>
+                  <a:t>고령화로 의존비율이 올라가는 상황에서 보험료율을 일정하게 유지시키려면</a:t>
+                </a:r>
+                <a:r>
+                  <a:rPr lang="en-US" altLang="ko-KR" sz="1600" spc="-50" dirty="0"/>
+                  <a:t>, </a:t>
+                </a:r>
+                <a:r>
+                  <a:rPr lang="ko-KR" altLang="en-US" sz="1600" spc="-50" dirty="0"/>
+                  <a:t>이 비율을 떨어뜨려야 한다</a:t>
+                </a:r>
+                <a:r>
+                  <a:rPr lang="en-US" altLang="ko-KR" sz="1600" spc="-50" dirty="0"/>
+                  <a:t>.</a:t>
+                </a:r>
+              </a:p>
+              <a:p>
+                <a:pPr marL="377825" indent="-285750">
+                  <a:lnSpc>
+                    <a:spcPct val="150000"/>
+                  </a:lnSpc>
+                  <a:buFont typeface="Arial" panose="020B0604020202020204" pitchFamily="34" charset="0"/>
+                  <a:buChar char="•"/>
+                </a:pPr>
+                <a:r>
+                  <a:rPr lang="ko-KR" altLang="en-US" sz="1600" spc="-50" dirty="0"/>
+                  <a:t>결국 부과방식을 채택하는 경우</a:t>
+                </a:r>
+                <a:r>
+                  <a:rPr lang="en-US" altLang="ko-KR" sz="1600" spc="-50" dirty="0"/>
+                  <a:t>, </a:t>
+                </a:r>
+                <a:r>
+                  <a:rPr lang="ko-KR" altLang="en-US" sz="1600" spc="-50" dirty="0"/>
+                  <a:t>일하는 사람의 보험료 부담을 높이거나</a:t>
+                </a:r>
+                <a:r>
+                  <a:rPr lang="en-US" altLang="ko-KR" sz="1600" spc="-50" dirty="0"/>
+                  <a:t>, </a:t>
+                </a:r>
+                <a:r>
+                  <a:rPr lang="ko-KR" altLang="en-US" sz="1600" spc="-50" dirty="0"/>
+                  <a:t>아니면 연금 지급액을 줄이는 것 중 하나를 선택해야 한다</a:t>
+                </a:r>
+                <a:r>
+                  <a:rPr lang="en-US" altLang="ko-KR" sz="1600" spc="-50" dirty="0"/>
+                  <a:t>.</a:t>
+                </a:r>
+              </a:p>
+              <a:p>
+                <a:pPr marL="835025" lvl="1" indent="-285750">
+                  <a:lnSpc>
+                    <a:spcPct val="150000"/>
+                  </a:lnSpc>
+                  <a:buFont typeface="Wingdings" panose="05000000000000000000" pitchFamily="2" charset="2"/>
+                  <a:buChar char="ü"/>
+                </a:pPr>
+                <a:r>
+                  <a:rPr lang="ko-KR" altLang="en-US" sz="1600" spc="-50" dirty="0"/>
+                  <a:t>이와 같은 양자택일 상황에서는 사회적 갈등이 매우 심각해질 수 있다</a:t>
+                </a:r>
+                <a:r>
+                  <a:rPr lang="en-US" altLang="ko-KR" sz="1600" spc="-50" dirty="0"/>
+                  <a:t>.</a:t>
+                </a:r>
+              </a:p>
+              <a:p>
+                <a:pPr marL="835025" lvl="1" indent="-285750">
+                  <a:lnSpc>
+                    <a:spcPct val="150000"/>
+                  </a:lnSpc>
+                  <a:buFont typeface="Wingdings" panose="05000000000000000000" pitchFamily="2" charset="2"/>
+                  <a:buChar char="ü"/>
+                </a:pPr>
+                <a:r>
+                  <a:rPr lang="ko-KR" altLang="en-US" sz="1600" spc="-50" dirty="0"/>
+                  <a:t>그렇다고 어느 조치도 취하지 않으면 연금재정이 파탄지경에 이를 가능성도 있다</a:t>
+                </a:r>
+                <a:r>
+                  <a:rPr lang="en-US" altLang="ko-KR" sz="1600" spc="-50" dirty="0"/>
+                  <a:t>. </a:t>
+                </a:r>
+              </a:p>
+              <a:p>
+                <a:pPr marL="377825" indent="-285750">
+                  <a:lnSpc>
+                    <a:spcPct val="150000"/>
+                  </a:lnSpc>
+                  <a:buFont typeface="Arial" panose="020B0604020202020204" pitchFamily="34" charset="0"/>
+                  <a:buChar char="•"/>
+                </a:pPr>
+                <a:r>
+                  <a:rPr lang="ko-KR" altLang="en-US" sz="1600" spc="-50" dirty="0"/>
+                  <a:t>부과방식은 </a:t>
+                </a:r>
+                <a:r>
+                  <a:rPr lang="en-US" altLang="ko-KR" sz="1600" spc="-50" dirty="0"/>
+                  <a:t>1889</a:t>
+                </a:r>
+                <a:r>
+                  <a:rPr lang="ko-KR" altLang="en-US" sz="1600" spc="-50" dirty="0"/>
+                  <a:t>년에 처음 사회보장제도가 출범할 때 채택한 방식으로</a:t>
+                </a:r>
+                <a:r>
+                  <a:rPr lang="en-US" altLang="ko-KR" sz="1600" spc="-50" dirty="0"/>
+                  <a:t>, </a:t>
+                </a:r>
+                <a:r>
+                  <a:rPr lang="ko-KR" altLang="en-US" sz="1600" spc="-50" dirty="0"/>
+                  <a:t>당시에는 연금 수혜자 보다 일하는 사람이 압도적으로 많았다</a:t>
+                </a:r>
+                <a:r>
+                  <a:rPr lang="en-US" altLang="ko-KR" sz="1600" spc="-50" dirty="0"/>
+                  <a:t>.</a:t>
+                </a:r>
+              </a:p>
+              <a:p>
+                <a:pPr marL="835025" lvl="1" indent="-285750">
+                  <a:lnSpc>
+                    <a:spcPct val="150000"/>
+                  </a:lnSpc>
+                  <a:buFont typeface="Wingdings" panose="05000000000000000000" pitchFamily="2" charset="2"/>
+                  <a:buChar char="ü"/>
+                </a:pPr>
+                <a:r>
+                  <a:rPr lang="ko-KR" altLang="en-US" sz="1600" spc="-50" dirty="0"/>
+                  <a:t>지금은 부과방식을 채택하고 있는 많은 국가들이 연금재정의 위기를 겪고 있다</a:t>
+                </a:r>
+                <a:r>
+                  <a:rPr lang="en-US" altLang="ko-KR" sz="1600" spc="-50" dirty="0"/>
+                  <a:t>.</a:t>
+                </a:r>
+              </a:p>
+              <a:p>
+                <a:pPr marL="377825" indent="-285750">
+                  <a:lnSpc>
+                    <a:spcPct val="150000"/>
+                  </a:lnSpc>
+                  <a:buFont typeface="Arial" panose="020B0604020202020204" pitchFamily="34" charset="0"/>
+                  <a:buChar char="•"/>
+                </a:pPr>
+                <a:endParaRPr lang="en-US" altLang="ko-KR" sz="1600" spc="-50" dirty="0"/>
+              </a:p>
+            </p:txBody>
+          </p:sp>
+        </mc:Choice>
+        <mc:Fallback>
+          <p:sp>
+            <p:nvSpPr>
+              <p:cNvPr id="3" name="TextBox 2">
+                <a:extLst>
+                  <a:ext uri="{FF2B5EF4-FFF2-40B4-BE49-F238E27FC236}">
+                    <a16:creationId xmlns:a16="http://schemas.microsoft.com/office/drawing/2014/main" id="{48FB1D3B-DC40-7E46-26F4-18FB18B8CC51}"/>
+                  </a:ext>
+                </a:extLst>
+              </p:cNvPr>
+              <p:cNvSpPr txBox="1">
+                <a:spLocks noRot="1" noChangeAspect="1" noMove="1" noResize="1" noEditPoints="1" noAdjustHandles="1" noChangeArrowheads="1" noChangeShapeType="1" noTextEdit="1"/>
+              </p:cNvSpPr>
+              <p:nvPr/>
+            </p:nvSpPr>
+            <p:spPr>
+              <a:xfrm>
+                <a:off x="288790" y="958844"/>
+                <a:ext cx="11250267" cy="5570564"/>
+              </a:xfrm>
+              <a:prstGeom prst="rect">
+                <a:avLst/>
+              </a:prstGeom>
+              <a:blipFill>
+                <a:blip r:embed="rId2"/>
+                <a:stretch>
+                  <a:fillRect/>
+                </a:stretch>
+              </a:blipFill>
+            </p:spPr>
+            <p:txBody>
+              <a:bodyPr/>
+              <a:lstStyle/>
+              <a:p>
+                <a:r>
+                  <a:rPr lang="ko-KR" altLang="en-US">
+                    <a:noFill/>
+                  </a:rPr>
+                  <a:t> </a:t>
+                </a:r>
+              </a:p>
+            </p:txBody>
+          </p:sp>
+        </mc:Fallback>
+      </mc:AlternateContent>
+      <mc:AlternateContent xmlns:mc="http://schemas.openxmlformats.org/markup-compatibility/2006">
+        <mc:Choice xmlns:a14="http://schemas.microsoft.com/office/drawing/2010/main" Requires="a14">
+          <p:sp>
+            <p:nvSpPr>
+              <p:cNvPr id="6" name="TextBox 5">
+                <a:extLst>
+                  <a:ext uri="{FF2B5EF4-FFF2-40B4-BE49-F238E27FC236}">
+                    <a16:creationId xmlns:a16="http://schemas.microsoft.com/office/drawing/2014/main" id="{B3C0CE51-DAA1-4BD3-43EC-E9DC3B90402D}"/>
+                  </a:ext>
+                </a:extLst>
+              </p:cNvPr>
+              <p:cNvSpPr txBox="1"/>
+              <p:nvPr/>
+            </p:nvSpPr>
+            <p:spPr>
+              <a:xfrm>
+                <a:off x="2047740" y="958844"/>
+                <a:ext cx="1414169" cy="565219"/>
+              </a:xfrm>
+              <a:prstGeom prst="rect">
+                <a:avLst/>
+              </a:prstGeom>
+              <a:noFill/>
+            </p:spPr>
+            <p:txBody>
+              <a:bodyPr wrap="none" lIns="0" tIns="0" rIns="0" bIns="0" rtlCol="0">
+                <a:spAutoFit/>
+              </a:bodyPr>
+              <a:lstStyle/>
+              <a:p>
+                <a14:m>
+                  <m:oMathPara xmlns:m="http://schemas.openxmlformats.org/officeDocument/2006/math">
+                    <m:oMathParaPr>
+                      <m:jc m:val="centerGroup"/>
+                    </m:oMathParaPr>
+                    <m:oMath xmlns:m="http://schemas.openxmlformats.org/officeDocument/2006/math">
+                      <m:r>
+                        <a:rPr lang="en-US" altLang="ko-KR" b="0" i="1" smtClean="0">
+                          <a:latin typeface="Cambria Math" panose="02040503050406030204" pitchFamily="18" charset="0"/>
+                        </a:rPr>
+                        <m:t>𝑡</m:t>
+                      </m:r>
+                      <m:r>
+                        <a:rPr lang="en-US" altLang="ko-KR" b="0" i="1" smtClean="0">
+                          <a:latin typeface="Cambria Math" panose="02040503050406030204" pitchFamily="18" charset="0"/>
+                        </a:rPr>
+                        <m:t> = </m:t>
+                      </m:r>
+                      <m:f>
+                        <m:fPr>
+                          <m:ctrlPr>
+                            <a:rPr lang="en-US" altLang="ko-KR" b="0" i="1" smtClean="0">
+                              <a:latin typeface="Cambria Math" panose="02040503050406030204" pitchFamily="18" charset="0"/>
+                              <a:ea typeface="Cambria Math" panose="02040503050406030204" pitchFamily="18" charset="0"/>
+                            </a:rPr>
+                          </m:ctrlPr>
+                        </m:fPr>
+                        <m:num>
+                          <m:sSub>
+                            <m:sSubPr>
+                              <m:ctrlPr>
+                                <a:rPr lang="en-US" altLang="ko-KR" i="1">
+                                  <a:latin typeface="Cambria Math" panose="02040503050406030204" pitchFamily="18" charset="0"/>
+                                  <a:ea typeface="Cambria Math" panose="02040503050406030204" pitchFamily="18" charset="0"/>
+                                </a:rPr>
+                              </m:ctrlPr>
+                            </m:sSubPr>
+                            <m:e>
+                              <m:r>
+                                <a:rPr lang="en-US" altLang="ko-KR" i="1">
+                                  <a:latin typeface="Cambria Math" panose="02040503050406030204" pitchFamily="18" charset="0"/>
+                                  <a:ea typeface="Cambria Math" panose="02040503050406030204" pitchFamily="18" charset="0"/>
+                                </a:rPr>
+                                <m:t>𝑁</m:t>
+                              </m:r>
+                            </m:e>
+                            <m:sub>
+                              <m:r>
+                                <a:rPr lang="en-US" altLang="ko-KR" i="1">
+                                  <a:latin typeface="Cambria Math" panose="02040503050406030204" pitchFamily="18" charset="0"/>
+                                  <a:ea typeface="Cambria Math" panose="02040503050406030204" pitchFamily="18" charset="0"/>
+                                </a:rPr>
+                                <m:t>𝑏</m:t>
+                              </m:r>
+                            </m:sub>
+                          </m:sSub>
+                        </m:num>
+                        <m:den>
+                          <m:sSub>
+                            <m:sSubPr>
+                              <m:ctrlPr>
+                                <a:rPr lang="en-US" altLang="ko-KR" i="1">
+                                  <a:latin typeface="Cambria Math" panose="02040503050406030204" pitchFamily="18" charset="0"/>
+                                  <a:ea typeface="Cambria Math" panose="02040503050406030204" pitchFamily="18" charset="0"/>
+                                </a:rPr>
+                              </m:ctrlPr>
+                            </m:sSubPr>
+                            <m:e>
+                              <m:r>
+                                <a:rPr lang="en-US" altLang="ko-KR" i="1">
+                                  <a:latin typeface="Cambria Math" panose="02040503050406030204" pitchFamily="18" charset="0"/>
+                                  <a:ea typeface="Cambria Math" panose="02040503050406030204" pitchFamily="18" charset="0"/>
+                                </a:rPr>
+                                <m:t>𝑁</m:t>
+                              </m:r>
+                            </m:e>
+                            <m:sub>
+                              <m:r>
+                                <a:rPr lang="en-US" altLang="ko-KR" i="1">
+                                  <a:latin typeface="Cambria Math" panose="02040503050406030204" pitchFamily="18" charset="0"/>
+                                  <a:ea typeface="Cambria Math" panose="02040503050406030204" pitchFamily="18" charset="0"/>
+                                </a:rPr>
+                                <m:t>𝑤</m:t>
+                              </m:r>
+                            </m:sub>
+                          </m:sSub>
+                        </m:den>
+                      </m:f>
+                      <m:r>
+                        <a:rPr lang="en-US" altLang="ko-KR" b="0" i="1" smtClean="0">
+                          <a:latin typeface="Cambria Math" panose="02040503050406030204" pitchFamily="18" charset="0"/>
+                          <a:ea typeface="Cambria Math" panose="02040503050406030204" pitchFamily="18" charset="0"/>
+                        </a:rPr>
+                        <m:t> ×</m:t>
+                      </m:r>
+                      <m:f>
+                        <m:fPr>
+                          <m:ctrlPr>
+                            <a:rPr lang="en-US" altLang="ko-KR" i="1">
+                              <a:latin typeface="Cambria Math" panose="02040503050406030204" pitchFamily="18" charset="0"/>
+                              <a:ea typeface="Cambria Math" panose="02040503050406030204" pitchFamily="18" charset="0"/>
+                            </a:rPr>
+                          </m:ctrlPr>
+                        </m:fPr>
+                        <m:num>
+                          <m:r>
+                            <a:rPr lang="en-US" altLang="ko-KR" b="0" i="1" smtClean="0">
+                              <a:latin typeface="Cambria Math" panose="02040503050406030204" pitchFamily="18" charset="0"/>
+                              <a:ea typeface="Cambria Math" panose="02040503050406030204" pitchFamily="18" charset="0"/>
+                            </a:rPr>
+                            <m:t>𝐵</m:t>
+                          </m:r>
+                        </m:num>
+                        <m:den>
+                          <m:bar>
+                            <m:barPr>
+                              <m:pos m:val="top"/>
+                              <m:ctrlPr>
+                                <a:rPr lang="en-US" altLang="ko-KR" i="1">
+                                  <a:latin typeface="Cambria Math" panose="02040503050406030204" pitchFamily="18" charset="0"/>
+                                  <a:ea typeface="Cambria Math" panose="02040503050406030204" pitchFamily="18" charset="0"/>
+                                </a:rPr>
+                              </m:ctrlPr>
+                            </m:barPr>
+                            <m:e>
+                              <m:r>
+                                <a:rPr lang="en-US" altLang="ko-KR" i="1">
+                                  <a:latin typeface="Cambria Math" panose="02040503050406030204" pitchFamily="18" charset="0"/>
+                                  <a:ea typeface="Cambria Math" panose="02040503050406030204" pitchFamily="18" charset="0"/>
+                                </a:rPr>
+                                <m:t>𝑤</m:t>
+                              </m:r>
+                            </m:e>
+                          </m:bar>
+                        </m:den>
+                      </m:f>
+                    </m:oMath>
+                  </m:oMathPara>
+                </a14:m>
+                <a:endParaRPr lang="ko-KR" altLang="en-US" dirty="0"/>
+              </a:p>
+            </p:txBody>
+          </p:sp>
+        </mc:Choice>
+        <mc:Fallback>
+          <p:sp>
+            <p:nvSpPr>
+              <p:cNvPr id="6" name="TextBox 5">
+                <a:extLst>
+                  <a:ext uri="{FF2B5EF4-FFF2-40B4-BE49-F238E27FC236}">
+                    <a16:creationId xmlns:a16="http://schemas.microsoft.com/office/drawing/2014/main" id="{B3C0CE51-DAA1-4BD3-43EC-E9DC3B90402D}"/>
+                  </a:ext>
+                </a:extLst>
+              </p:cNvPr>
+              <p:cNvSpPr txBox="1">
+                <a:spLocks noRot="1" noChangeAspect="1" noMove="1" noResize="1" noEditPoints="1" noAdjustHandles="1" noChangeArrowheads="1" noChangeShapeType="1" noTextEdit="1"/>
+              </p:cNvSpPr>
+              <p:nvPr/>
+            </p:nvSpPr>
+            <p:spPr>
+              <a:xfrm>
+                <a:off x="2047740" y="958844"/>
+                <a:ext cx="1414169" cy="565219"/>
+              </a:xfrm>
+              <a:prstGeom prst="rect">
+                <a:avLst/>
+              </a:prstGeom>
+              <a:blipFill>
+                <a:blip r:embed="rId3"/>
+                <a:stretch>
+                  <a:fillRect/>
+                </a:stretch>
+              </a:blipFill>
+            </p:spPr>
+            <p:txBody>
+              <a:bodyPr/>
+              <a:lstStyle/>
+              <a:p>
+                <a:r>
+                  <a:rPr lang="ko-KR" altLang="en-US">
+                    <a:noFill/>
+                  </a:rPr>
+                  <a:t> </a:t>
+                </a:r>
+              </a:p>
+            </p:txBody>
+          </p:sp>
+        </mc:Fallback>
+      </mc:AlternateContent>
+    </p:spTree>
+    <p:extLst>
+      <p:ext uri="{BB962C8B-B14F-4D97-AF65-F5344CB8AC3E}">
+        <p14:creationId xmlns:p14="http://schemas.microsoft.com/office/powerpoint/2010/main" val="4230416539"/>
+      </p:ext>
+    </p:extLst>
+  </p:cSld>
+  <p:clrMapOvr>
+    <a:masterClrMapping/>
+  </p:clrMapOvr>
+</p:sld>
+</file>
+
+<file path=ppt/slides/slide21.xml><?xml version="1.0" encoding="utf-8"?>
+<p:sld xmlns:a="http://schemas.openxmlformats.org/drawingml/2006/main" xmlns:r="http://schemas.openxmlformats.org/officeDocument/2006/relationships" xmlns:p="http://schemas.openxmlformats.org/presentationml/2006/main">
+  <p:cSld>
+    <p:spTree>
+      <p:nvGrpSpPr>
+        <p:cNvPr id="1" name="">
+          <a:extLst>
+            <a:ext uri="{FF2B5EF4-FFF2-40B4-BE49-F238E27FC236}">
+              <a16:creationId xmlns:a16="http://schemas.microsoft.com/office/drawing/2014/main" id="{8737E220-A81E-59E2-45AD-51567B94ECD8}"/>
+            </a:ext>
+          </a:extLst>
+        </p:cNvPr>
+        <p:cNvGrpSpPr/>
+        <p:nvPr/>
+      </p:nvGrpSpPr>
+      <p:grpSpPr>
+        <a:xfrm>
+          <a:off x="0" y="0"/>
+          <a:ext cx="0" cy="0"/>
+          <a:chOff x="0" y="0"/>
+          <a:chExt cx="0" cy="0"/>
+        </a:xfrm>
+      </p:grpSpPr>
+      <p:sp>
+        <p:nvSpPr>
+          <p:cNvPr id="2" name="제목 1">
+            <a:extLst>
+              <a:ext uri="{FF2B5EF4-FFF2-40B4-BE49-F238E27FC236}">
+                <a16:creationId xmlns:a16="http://schemas.microsoft.com/office/drawing/2014/main" id="{191C141A-B86C-76BE-E885-250C9FF9F045}"/>
+              </a:ext>
+            </a:extLst>
+          </p:cNvPr>
+          <p:cNvSpPr>
+            <a:spLocks noGrp="1"/>
+          </p:cNvSpPr>
+          <p:nvPr>
+            <p:ph type="title"/>
+          </p:nvPr>
+        </p:nvSpPr>
+        <p:spPr/>
+        <p:txBody>
+          <a:bodyPr/>
+          <a:lstStyle/>
+          <a:p>
+            <a:r>
+              <a:rPr lang="ko-KR" altLang="en-US" dirty="0"/>
+              <a:t>재분배적 요소</a:t>
+            </a:r>
+          </a:p>
+        </p:txBody>
+      </p:sp>
+      <p:sp>
+        <p:nvSpPr>
+          <p:cNvPr id="4" name="슬라이드 번호 개체 틀 3">
+            <a:extLst>
+              <a:ext uri="{FF2B5EF4-FFF2-40B4-BE49-F238E27FC236}">
+                <a16:creationId xmlns:a16="http://schemas.microsoft.com/office/drawing/2014/main" id="{42A78BCF-7E4A-FD22-E1B8-64650EB34FB3}"/>
+              </a:ext>
+            </a:extLst>
+          </p:cNvPr>
+          <p:cNvSpPr>
+            <a:spLocks noGrp="1"/>
+          </p:cNvSpPr>
+          <p:nvPr>
+            <p:ph type="sldNum" sz="quarter" idx="12"/>
+          </p:nvPr>
+        </p:nvSpPr>
+        <p:spPr/>
+        <p:txBody>
+          <a:bodyPr/>
+          <a:lstStyle/>
+          <a:p>
+            <a:fld id="{109C872D-39A9-4065-8BF3-6A613116E2A1}" type="slidenum">
+              <a:rPr lang="ko-KR" altLang="en-US" smtClean="0"/>
+              <a:t>21</a:t>
+            </a:fld>
+            <a:endParaRPr lang="ko-KR" altLang="en-US"/>
+          </a:p>
+        </p:txBody>
+      </p:sp>
+      <p:sp>
+        <p:nvSpPr>
+          <p:cNvPr id="3" name="TextBox 2">
+            <a:extLst>
+              <a:ext uri="{FF2B5EF4-FFF2-40B4-BE49-F238E27FC236}">
+                <a16:creationId xmlns:a16="http://schemas.microsoft.com/office/drawing/2014/main" id="{73093FD9-F5CE-2DDA-6919-E0E48EF0F8EB}"/>
+              </a:ext>
+            </a:extLst>
+          </p:cNvPr>
+          <p:cNvSpPr txBox="1"/>
+          <p:nvPr/>
+        </p:nvSpPr>
+        <p:spPr>
+          <a:xfrm>
+            <a:off x="288790" y="958844"/>
+            <a:ext cx="11250267" cy="4107343"/>
+          </a:xfrm>
+          <a:prstGeom prst="rect">
+            <a:avLst/>
+          </a:prstGeom>
+          <a:noFill/>
+        </p:spPr>
+        <p:txBody>
+          <a:bodyPr wrap="square" rtlCol="0" anchor="t">
+            <a:spAutoFit/>
+          </a:bodyPr>
+          <a:lstStyle/>
+          <a:p>
+            <a:pPr marL="377825" indent="-285750">
+              <a:lnSpc>
+                <a:spcPct val="150000"/>
+              </a:lnSpc>
+              <a:buFont typeface="Arial" panose="020B0604020202020204" pitchFamily="34" charset="0"/>
+              <a:buChar char="•"/>
+            </a:pPr>
+            <a:r>
+              <a:rPr lang="ko-KR" altLang="en-US" sz="1600" spc="-50" dirty="0"/>
+              <a:t>앞서 </a:t>
+            </a:r>
+            <a:r>
+              <a:rPr lang="ko-KR" altLang="en-US" sz="1600" spc="-50" dirty="0" err="1"/>
+              <a:t>설명했다시피</a:t>
+            </a:r>
+            <a:r>
+              <a:rPr lang="ko-KR" altLang="en-US" sz="1600" spc="-50" dirty="0"/>
+              <a:t> 국민연금제도를 설계할 때는 사회적 적합성과 개인적 </a:t>
+            </a:r>
+            <a:r>
+              <a:rPr lang="ko-KR" altLang="en-US" sz="1600" spc="-50" dirty="0" err="1"/>
+              <a:t>공평성</a:t>
+            </a:r>
+            <a:r>
+              <a:rPr lang="en-US" altLang="ko-KR" sz="1600" spc="-50" dirty="0"/>
+              <a:t>, </a:t>
+            </a:r>
+            <a:r>
+              <a:rPr lang="ko-KR" altLang="en-US" sz="1600" spc="-50" dirty="0"/>
+              <a:t>이 두 가지 기준을 적절히 타협한 선에서 재분배효과를 가미하게 된다</a:t>
+            </a:r>
+            <a:r>
+              <a:rPr lang="en-US" altLang="ko-KR" sz="1600" spc="-50" dirty="0"/>
+              <a:t>.</a:t>
+            </a:r>
+          </a:p>
+          <a:p>
+            <a:pPr marL="835025" lvl="1" indent="-285750">
+              <a:lnSpc>
+                <a:spcPct val="150000"/>
+              </a:lnSpc>
+              <a:buFont typeface="Wingdings" panose="05000000000000000000" pitchFamily="2" charset="2"/>
+              <a:buChar char="ü"/>
+            </a:pPr>
+            <a:r>
+              <a:rPr lang="ko-KR" altLang="en-US" sz="1600" spc="-50" dirty="0"/>
+              <a:t>민간 보험사와 유사한 운영을 강조한다면 개인적 공평성에 더 큰 비중을 두게 된다</a:t>
+            </a:r>
+            <a:r>
+              <a:rPr lang="en-US" altLang="ko-KR" sz="1600" spc="-50" dirty="0"/>
+              <a:t>.</a:t>
+            </a:r>
+          </a:p>
+          <a:p>
+            <a:pPr marL="835025" lvl="1" indent="-285750">
+              <a:lnSpc>
+                <a:spcPct val="150000"/>
+              </a:lnSpc>
+              <a:buFont typeface="Wingdings" panose="05000000000000000000" pitchFamily="2" charset="2"/>
+              <a:buChar char="ü"/>
+            </a:pPr>
+            <a:r>
+              <a:rPr lang="ko-KR" altLang="en-US" sz="1600" spc="-50" dirty="0"/>
+              <a:t>한편</a:t>
+            </a:r>
+            <a:r>
+              <a:rPr lang="en-US" altLang="ko-KR" sz="1600" spc="-50" dirty="0"/>
+              <a:t>, </a:t>
+            </a:r>
+            <a:r>
+              <a:rPr lang="ko-KR" altLang="en-US" sz="1600" spc="-50" dirty="0"/>
+              <a:t>국민연금제도가 소득재분배 기능도 일부 맡아야 한다고 생각하면</a:t>
+            </a:r>
+            <a:r>
+              <a:rPr lang="en-US" altLang="ko-KR" sz="1600" spc="-50" dirty="0"/>
+              <a:t> </a:t>
+            </a:r>
+            <a:r>
+              <a:rPr lang="ko-KR" altLang="en-US" sz="1600" spc="-50" dirty="0"/>
+              <a:t>사회적 적합성에 더 큰 비중을 두게 된다</a:t>
+            </a:r>
+            <a:r>
+              <a:rPr lang="en-US" altLang="ko-KR" sz="1600" spc="-50" dirty="0"/>
+              <a:t>.</a:t>
+            </a:r>
+          </a:p>
+          <a:p>
+            <a:pPr marL="835025" lvl="1" indent="-285750">
+              <a:lnSpc>
+                <a:spcPct val="150000"/>
+              </a:lnSpc>
+              <a:buFont typeface="Wingdings" panose="05000000000000000000" pitchFamily="2" charset="2"/>
+              <a:buChar char="ü"/>
+            </a:pPr>
+            <a:endParaRPr lang="en-US" altLang="ko-KR" sz="1600" spc="-50" dirty="0"/>
+          </a:p>
+          <a:p>
+            <a:pPr marL="377825" indent="-285750">
+              <a:lnSpc>
+                <a:spcPct val="150000"/>
+              </a:lnSpc>
+              <a:buFont typeface="Arial" panose="020B0604020202020204" pitchFamily="34" charset="0"/>
+              <a:buChar char="•"/>
+            </a:pPr>
+            <a:r>
+              <a:rPr lang="ko-KR" altLang="en-US" sz="1600" spc="-50" dirty="0"/>
+              <a:t>결국 국민연금제도의 성격을 어떻게 </a:t>
+            </a:r>
+            <a:r>
+              <a:rPr lang="ko-KR" altLang="en-US" sz="1600" spc="-50" dirty="0" err="1"/>
+              <a:t>이해하느냐에</a:t>
+            </a:r>
+            <a:r>
+              <a:rPr lang="ko-KR" altLang="en-US" sz="1600" spc="-50" dirty="0"/>
+              <a:t> 따라 위의 두 가지 목표의 상대적 중요성을 평가하게 된다</a:t>
+            </a:r>
+            <a:r>
+              <a:rPr lang="en-US" altLang="ko-KR" sz="1600" spc="-50" dirty="0"/>
+              <a:t>.</a:t>
+            </a:r>
+          </a:p>
+          <a:p>
+            <a:pPr marL="835025" lvl="1" indent="-285750">
+              <a:lnSpc>
+                <a:spcPct val="150000"/>
+              </a:lnSpc>
+              <a:buFont typeface="Wingdings" panose="05000000000000000000" pitchFamily="2" charset="2"/>
+              <a:buChar char="ü"/>
+            </a:pPr>
+            <a:r>
+              <a:rPr lang="ko-KR" altLang="en-US" sz="1600" spc="-50" dirty="0"/>
+              <a:t>다만 분명한 것은 이 제도의 목표는 노후의 생계안정이지</a:t>
+            </a:r>
+            <a:r>
+              <a:rPr lang="en-US" altLang="ko-KR" sz="1600" spc="-50" dirty="0"/>
+              <a:t>, </a:t>
+            </a:r>
+            <a:r>
+              <a:rPr lang="ko-KR" altLang="en-US" sz="1600" spc="-50" dirty="0"/>
+              <a:t>한 세대 안의 소득격차를 줄이는 것이 아니다</a:t>
+            </a:r>
+            <a:r>
+              <a:rPr lang="en-US" altLang="ko-KR" sz="1600" spc="-50" dirty="0"/>
+              <a:t>.</a:t>
+            </a:r>
+          </a:p>
+          <a:p>
+            <a:pPr marL="835025" lvl="1" indent="-285750">
+              <a:lnSpc>
+                <a:spcPct val="150000"/>
+              </a:lnSpc>
+              <a:buFont typeface="Wingdings" panose="05000000000000000000" pitchFamily="2" charset="2"/>
+              <a:buChar char="ü"/>
+            </a:pPr>
+            <a:endParaRPr lang="en-US" altLang="ko-KR" sz="1600" spc="-50" dirty="0"/>
+          </a:p>
+          <a:p>
+            <a:pPr marL="377825" indent="-285750">
+              <a:lnSpc>
+                <a:spcPct val="150000"/>
+              </a:lnSpc>
+              <a:buFont typeface="Arial" panose="020B0604020202020204" pitchFamily="34" charset="0"/>
+              <a:buChar char="•"/>
+            </a:pPr>
+            <a:r>
+              <a:rPr lang="ko-KR" altLang="en-US" sz="1600" spc="-50" dirty="0"/>
+              <a:t>현실에서는 많은 나라들이 재분배효과를 지향하는 국민연금제도를 운영하고 있지 않다</a:t>
+            </a:r>
+            <a:r>
+              <a:rPr lang="en-US" altLang="ko-KR" sz="1600" spc="-50" dirty="0"/>
+              <a:t>.</a:t>
+            </a:r>
+          </a:p>
+          <a:p>
+            <a:pPr marL="835025" lvl="1" indent="-285750">
+              <a:lnSpc>
+                <a:spcPct val="150000"/>
+              </a:lnSpc>
+              <a:buFont typeface="Wingdings" panose="05000000000000000000" pitchFamily="2" charset="2"/>
+              <a:buChar char="ü"/>
+            </a:pPr>
+            <a:r>
+              <a:rPr lang="ko-KR" altLang="en-US" sz="1600" spc="-50" dirty="0"/>
+              <a:t>즉</a:t>
+            </a:r>
+            <a:r>
+              <a:rPr lang="en-US" altLang="ko-KR" sz="1600" spc="-50" dirty="0"/>
+              <a:t>, </a:t>
+            </a:r>
+            <a:r>
+              <a:rPr lang="ko-KR" altLang="en-US" sz="1600" spc="-50" dirty="0"/>
+              <a:t>은퇴 전의 지위를 은퇴 후에도 그대로 유지할 수 있게 만든 기본골격을 채택하는 것이다</a:t>
+            </a:r>
+            <a:r>
+              <a:rPr lang="en-US" altLang="ko-KR" sz="1600" spc="-50" dirty="0"/>
+              <a:t>.</a:t>
+            </a:r>
+          </a:p>
+          <a:p>
+            <a:pPr marL="835025" lvl="1" indent="-285750">
+              <a:lnSpc>
+                <a:spcPct val="150000"/>
+              </a:lnSpc>
+              <a:buFont typeface="Wingdings" panose="05000000000000000000" pitchFamily="2" charset="2"/>
+              <a:buChar char="ü"/>
+            </a:pPr>
+            <a:r>
+              <a:rPr lang="ko-KR" altLang="en-US" sz="1600" spc="-50" dirty="0"/>
+              <a:t>민간 보험사와 비슷하게 운영해야 한다는 사고방식이 현실의 국민연금제도 운영에 큰 영향을 주고 있음을 알 수 있다</a:t>
+            </a:r>
+            <a:r>
+              <a:rPr lang="en-US" altLang="ko-KR" sz="1600" spc="-50" dirty="0"/>
+              <a:t>.</a:t>
+            </a:r>
+          </a:p>
+        </p:txBody>
+      </p:sp>
+    </p:spTree>
+    <p:extLst>
+      <p:ext uri="{BB962C8B-B14F-4D97-AF65-F5344CB8AC3E}">
+        <p14:creationId xmlns:p14="http://schemas.microsoft.com/office/powerpoint/2010/main" val="3095467164"/>
+      </p:ext>
+    </p:extLst>
+  </p:cSld>
+  <p:clrMapOvr>
+    <a:masterClrMapping/>
+  </p:clrMapOvr>
+</p:sld>
+</file>
+
+<file path=ppt/slides/slide22.xml><?xml version="1.0" encoding="utf-8"?>
+<p:sld xmlns:a="http://schemas.openxmlformats.org/drawingml/2006/main" xmlns:r="http://schemas.openxmlformats.org/officeDocument/2006/relationships" xmlns:p="http://schemas.openxmlformats.org/presentationml/2006/main">
+  <p:cSld>
+    <p:spTree>
+      <p:nvGrpSpPr>
+        <p:cNvPr id="1" name="">
+          <a:extLst>
+            <a:ext uri="{FF2B5EF4-FFF2-40B4-BE49-F238E27FC236}">
+              <a16:creationId xmlns:a16="http://schemas.microsoft.com/office/drawing/2014/main" id="{8E6E8A6D-D66B-9EE6-55D8-3AD6FF4025FD}"/>
+            </a:ext>
+          </a:extLst>
+        </p:cNvPr>
+        <p:cNvGrpSpPr/>
+        <p:nvPr/>
+      </p:nvGrpSpPr>
+      <p:grpSpPr>
+        <a:xfrm>
+          <a:off x="0" y="0"/>
+          <a:ext cx="0" cy="0"/>
+          <a:chOff x="0" y="0"/>
+          <a:chExt cx="0" cy="0"/>
+        </a:xfrm>
+      </p:grpSpPr>
+      <p:sp>
+        <p:nvSpPr>
+          <p:cNvPr id="2" name="제목 1">
+            <a:extLst>
+              <a:ext uri="{FF2B5EF4-FFF2-40B4-BE49-F238E27FC236}">
+                <a16:creationId xmlns:a16="http://schemas.microsoft.com/office/drawing/2014/main" id="{65BBC5ED-C3D8-716F-B9E9-C0270BA9B7B1}"/>
+              </a:ext>
+            </a:extLst>
+          </p:cNvPr>
+          <p:cNvSpPr>
+            <a:spLocks noGrp="1"/>
+          </p:cNvSpPr>
+          <p:nvPr>
+            <p:ph type="title"/>
+          </p:nvPr>
+        </p:nvSpPr>
+        <p:spPr/>
+        <p:txBody>
+          <a:bodyPr/>
+          <a:lstStyle/>
+          <a:p>
+            <a:r>
+              <a:rPr lang="ko-KR" altLang="en-US" dirty="0"/>
+              <a:t>목적세 부과의 필요성</a:t>
+            </a:r>
+          </a:p>
+        </p:txBody>
+      </p:sp>
+      <p:sp>
+        <p:nvSpPr>
+          <p:cNvPr id="4" name="슬라이드 번호 개체 틀 3">
+            <a:extLst>
+              <a:ext uri="{FF2B5EF4-FFF2-40B4-BE49-F238E27FC236}">
+                <a16:creationId xmlns:a16="http://schemas.microsoft.com/office/drawing/2014/main" id="{728B7012-7408-96A7-BEDB-140B517079E0}"/>
+              </a:ext>
+            </a:extLst>
+          </p:cNvPr>
+          <p:cNvSpPr>
+            <a:spLocks noGrp="1"/>
+          </p:cNvSpPr>
+          <p:nvPr>
+            <p:ph type="sldNum" sz="quarter" idx="12"/>
+          </p:nvPr>
+        </p:nvSpPr>
+        <p:spPr/>
+        <p:txBody>
+          <a:bodyPr/>
+          <a:lstStyle/>
+          <a:p>
+            <a:fld id="{109C872D-39A9-4065-8BF3-6A613116E2A1}" type="slidenum">
+              <a:rPr lang="ko-KR" altLang="en-US" smtClean="0"/>
+              <a:t>22</a:t>
+            </a:fld>
+            <a:endParaRPr lang="ko-KR" altLang="en-US"/>
+          </a:p>
+        </p:txBody>
+      </p:sp>
+      <p:sp>
+        <p:nvSpPr>
+          <p:cNvPr id="3" name="TextBox 2">
+            <a:extLst>
+              <a:ext uri="{FF2B5EF4-FFF2-40B4-BE49-F238E27FC236}">
+                <a16:creationId xmlns:a16="http://schemas.microsoft.com/office/drawing/2014/main" id="{90FB24A2-5B8C-9D20-734E-DD8816AB550F}"/>
+              </a:ext>
+            </a:extLst>
+          </p:cNvPr>
+          <p:cNvSpPr txBox="1"/>
+          <p:nvPr/>
+        </p:nvSpPr>
+        <p:spPr>
+          <a:xfrm>
+            <a:off x="288790" y="958844"/>
+            <a:ext cx="11250267" cy="3368679"/>
+          </a:xfrm>
+          <a:prstGeom prst="rect">
+            <a:avLst/>
+          </a:prstGeom>
+          <a:noFill/>
+        </p:spPr>
+        <p:txBody>
+          <a:bodyPr wrap="square" rtlCol="0" anchor="t">
+            <a:spAutoFit/>
+          </a:bodyPr>
+          <a:lstStyle/>
+          <a:p>
+            <a:pPr marL="377825" indent="-285750">
+              <a:lnSpc>
+                <a:spcPct val="150000"/>
+              </a:lnSpc>
+              <a:buFont typeface="Arial" panose="020B0604020202020204" pitchFamily="34" charset="0"/>
+              <a:buChar char="•"/>
+            </a:pPr>
+            <a:r>
+              <a:rPr lang="ko-KR" altLang="en-US" sz="1600" spc="-50" dirty="0"/>
+              <a:t>대부분의 나라가 보험료 혹은 사회보장세라고 부르는 목적세를 부과해 국민연금제도의 재원으로 사용하고 있다</a:t>
+            </a:r>
+            <a:r>
+              <a:rPr lang="en-US" altLang="ko-KR" sz="1600" spc="-50" dirty="0"/>
+              <a:t>.</a:t>
+            </a:r>
+          </a:p>
+          <a:p>
+            <a:pPr marL="835025" lvl="1" indent="-285750">
+              <a:lnSpc>
+                <a:spcPct val="150000"/>
+              </a:lnSpc>
+              <a:buFont typeface="Wingdings" panose="05000000000000000000" pitchFamily="2" charset="2"/>
+              <a:buChar char="ü"/>
+            </a:pPr>
+            <a:r>
+              <a:rPr lang="ko-KR" altLang="en-US" sz="1600" spc="-50" dirty="0"/>
+              <a:t>많은 나라들이 목적세를 채택하는 데에는 아래와 같은 이유가 있을 수 있다</a:t>
+            </a:r>
+            <a:r>
+              <a:rPr lang="en-US" altLang="ko-KR" sz="1600" spc="-50" dirty="0"/>
+              <a:t>.</a:t>
+            </a:r>
+          </a:p>
+          <a:p>
+            <a:pPr marL="1292225" lvl="2" indent="-285750">
+              <a:lnSpc>
+                <a:spcPct val="150000"/>
+              </a:lnSpc>
+              <a:buFont typeface="Wingdings" panose="05000000000000000000" pitchFamily="2" charset="2"/>
+              <a:buChar char="Ø"/>
+            </a:pPr>
+            <a:r>
+              <a:rPr lang="ko-KR" altLang="en-US" sz="1600" spc="-50" dirty="0"/>
+              <a:t>정치적이유로서</a:t>
+            </a:r>
+            <a:r>
+              <a:rPr lang="en-US" altLang="ko-KR" sz="1600" spc="-50" dirty="0"/>
+              <a:t>, </a:t>
+            </a:r>
+            <a:r>
+              <a:rPr lang="ko-KR" altLang="en-US" sz="1600" spc="-50" dirty="0"/>
+              <a:t>국민연금제도를 일반 지출 프로그램과 구별해야 할 필요가 있다</a:t>
+            </a:r>
+            <a:endParaRPr lang="en-US" altLang="ko-KR" sz="1600" spc="-50" dirty="0"/>
+          </a:p>
+          <a:p>
+            <a:pPr marL="1292225" lvl="2" indent="-285750">
+              <a:lnSpc>
+                <a:spcPct val="150000"/>
+              </a:lnSpc>
+              <a:buFont typeface="Wingdings" panose="05000000000000000000" pitchFamily="2" charset="2"/>
+              <a:buChar char="Ø"/>
+            </a:pPr>
+            <a:r>
+              <a:rPr lang="ko-KR" altLang="en-US" sz="1600" spc="-50" dirty="0"/>
+              <a:t>기존의 조세만으로는 국민연금제도 운영에 필요한 자금을 조달하기 어려울 수 있다</a:t>
+            </a:r>
+            <a:r>
+              <a:rPr lang="en-US" altLang="ko-KR" sz="1600" spc="-50" dirty="0"/>
+              <a:t>.</a:t>
+            </a:r>
+          </a:p>
+          <a:p>
+            <a:pPr marL="1292225" lvl="2" indent="-285750">
+              <a:lnSpc>
+                <a:spcPct val="150000"/>
+              </a:lnSpc>
+              <a:buFont typeface="Wingdings" panose="05000000000000000000" pitchFamily="2" charset="2"/>
+              <a:buChar char="Ø"/>
+            </a:pPr>
+            <a:r>
+              <a:rPr lang="ko-KR" altLang="en-US" sz="1600" spc="-50" dirty="0"/>
+              <a:t>연금 수혜자가 자신이 낸 돈을 돌려 받게 된다는 자부심을 가질 수 있게끔 한다</a:t>
+            </a:r>
+            <a:r>
+              <a:rPr lang="en-US" altLang="ko-KR" sz="1600" spc="-50" dirty="0"/>
+              <a:t>.</a:t>
+            </a:r>
+          </a:p>
+          <a:p>
+            <a:pPr marL="1292225" lvl="2" indent="-285750">
+              <a:lnSpc>
+                <a:spcPct val="150000"/>
+              </a:lnSpc>
+              <a:buFont typeface="Wingdings" panose="05000000000000000000" pitchFamily="2" charset="2"/>
+              <a:buChar char="Ø"/>
+            </a:pPr>
+            <a:endParaRPr lang="en-US" altLang="ko-KR" sz="1600" spc="-50" dirty="0"/>
+          </a:p>
+          <a:p>
+            <a:pPr marL="377825" indent="-285750">
+              <a:lnSpc>
+                <a:spcPct val="150000"/>
+              </a:lnSpc>
+              <a:buFont typeface="Arial" panose="020B0604020202020204" pitchFamily="34" charset="0"/>
+              <a:buChar char="•"/>
+            </a:pPr>
+            <a:r>
+              <a:rPr lang="ko-KR" altLang="en-US" sz="1600" spc="-50" dirty="0"/>
+              <a:t>보험료 혹은 사회보장세가 갖고 있는 역진성을 줄이고자</a:t>
+            </a:r>
+            <a:r>
+              <a:rPr lang="en-US" altLang="ko-KR" sz="1600" spc="-50" dirty="0"/>
+              <a:t>, </a:t>
+            </a:r>
+            <a:r>
+              <a:rPr lang="ko-KR" altLang="en-US" sz="1600" spc="-50" dirty="0"/>
+              <a:t>정부의 일반적인 세원에 의해 재원을 조달하는 방식으로 전환해야 한다는 주장이 있기는 하다</a:t>
+            </a:r>
+            <a:r>
+              <a:rPr lang="en-US" altLang="ko-KR" sz="1600" spc="-50" dirty="0"/>
+              <a:t>.</a:t>
+            </a:r>
+          </a:p>
+          <a:p>
+            <a:pPr marL="835025" lvl="1" indent="-285750">
+              <a:lnSpc>
+                <a:spcPct val="150000"/>
+              </a:lnSpc>
+              <a:buFont typeface="Wingdings" panose="05000000000000000000" pitchFamily="2" charset="2"/>
+              <a:buChar char="ü"/>
+            </a:pPr>
+            <a:r>
+              <a:rPr lang="ko-KR" altLang="en-US" sz="1600" spc="-50" dirty="0"/>
+              <a:t>이러한 주장은 정치적으로 매우 민감한 문제이며</a:t>
+            </a:r>
+            <a:r>
+              <a:rPr lang="en-US" altLang="ko-KR" sz="1600" spc="-50" dirty="0"/>
+              <a:t>, </a:t>
+            </a:r>
+            <a:r>
+              <a:rPr lang="ko-KR" altLang="en-US" sz="1600" spc="-50" dirty="0"/>
+              <a:t>정부의 비대화를 우려하는 사람들에게 공격의 대상이 된다</a:t>
+            </a:r>
+            <a:r>
+              <a:rPr lang="en-US" altLang="ko-KR" sz="1600" spc="-50" dirty="0"/>
+              <a:t>.</a:t>
+            </a:r>
+          </a:p>
+        </p:txBody>
+      </p:sp>
+    </p:spTree>
+    <p:extLst>
+      <p:ext uri="{BB962C8B-B14F-4D97-AF65-F5344CB8AC3E}">
+        <p14:creationId xmlns:p14="http://schemas.microsoft.com/office/powerpoint/2010/main" val="3828789935"/>
+      </p:ext>
+    </p:extLst>
+  </p:cSld>
+  <p:clrMapOvr>
+    <a:masterClrMapping/>
+  </p:clrMapOvr>
+</p:sld>
+</file>
+
+<file path=ppt/slides/slide23.xml><?xml version="1.0" encoding="utf-8"?>
+<p:sld xmlns:a="http://schemas.openxmlformats.org/drawingml/2006/main" xmlns:r="http://schemas.openxmlformats.org/officeDocument/2006/relationships" xmlns:p="http://schemas.openxmlformats.org/presentationml/2006/main">
+  <p:cSld>
+    <p:spTree>
+      <p:nvGrpSpPr>
+        <p:cNvPr id="1" name="">
+          <a:extLst>
+            <a:ext uri="{FF2B5EF4-FFF2-40B4-BE49-F238E27FC236}">
+              <a16:creationId xmlns:a16="http://schemas.microsoft.com/office/drawing/2014/main" id="{6D737A0C-3619-BA3D-2878-3962F8A9FEB3}"/>
+            </a:ext>
+          </a:extLst>
+        </p:cNvPr>
+        <p:cNvGrpSpPr/>
+        <p:nvPr/>
+      </p:nvGrpSpPr>
+      <p:grpSpPr>
+        <a:xfrm>
+          <a:off x="0" y="0"/>
+          <a:ext cx="0" cy="0"/>
+          <a:chOff x="0" y="0"/>
+          <a:chExt cx="0" cy="0"/>
+        </a:xfrm>
+      </p:grpSpPr>
+      <p:sp>
+        <p:nvSpPr>
+          <p:cNvPr id="2" name="제목 1">
+            <a:extLst>
+              <a:ext uri="{FF2B5EF4-FFF2-40B4-BE49-F238E27FC236}">
+                <a16:creationId xmlns:a16="http://schemas.microsoft.com/office/drawing/2014/main" id="{C2A832AE-6AB0-6847-1F19-D0FA2A968E30}"/>
+              </a:ext>
+            </a:extLst>
+          </p:cNvPr>
+          <p:cNvSpPr>
+            <a:spLocks noGrp="1"/>
+          </p:cNvSpPr>
+          <p:nvPr>
+            <p:ph type="title"/>
+          </p:nvPr>
+        </p:nvSpPr>
+        <p:spPr/>
+        <p:txBody>
+          <a:bodyPr/>
+          <a:lstStyle/>
+          <a:p>
+            <a:r>
+              <a:rPr lang="ko-KR" altLang="en-US" dirty="0"/>
+              <a:t>합리적인 연금 급여수준의 문제</a:t>
+            </a:r>
+          </a:p>
+        </p:txBody>
+      </p:sp>
+      <p:sp>
+        <p:nvSpPr>
+          <p:cNvPr id="4" name="슬라이드 번호 개체 틀 3">
+            <a:extLst>
+              <a:ext uri="{FF2B5EF4-FFF2-40B4-BE49-F238E27FC236}">
+                <a16:creationId xmlns:a16="http://schemas.microsoft.com/office/drawing/2014/main" id="{DCAF8B6E-CFDE-4C10-4CF5-2322E3197C39}"/>
+              </a:ext>
+            </a:extLst>
+          </p:cNvPr>
+          <p:cNvSpPr>
+            <a:spLocks noGrp="1"/>
+          </p:cNvSpPr>
+          <p:nvPr>
+            <p:ph type="sldNum" sz="quarter" idx="12"/>
+          </p:nvPr>
+        </p:nvSpPr>
+        <p:spPr/>
+        <p:txBody>
+          <a:bodyPr/>
+          <a:lstStyle/>
+          <a:p>
+            <a:fld id="{109C872D-39A9-4065-8BF3-6A613116E2A1}" type="slidenum">
+              <a:rPr lang="ko-KR" altLang="en-US" smtClean="0"/>
+              <a:t>23</a:t>
+            </a:fld>
+            <a:endParaRPr lang="ko-KR" altLang="en-US"/>
+          </a:p>
+        </p:txBody>
+      </p:sp>
+      <p:sp>
+        <p:nvSpPr>
+          <p:cNvPr id="3" name="TextBox 2">
+            <a:extLst>
+              <a:ext uri="{FF2B5EF4-FFF2-40B4-BE49-F238E27FC236}">
+                <a16:creationId xmlns:a16="http://schemas.microsoft.com/office/drawing/2014/main" id="{8D96CB00-4240-29C6-1C94-C2631887712C}"/>
+              </a:ext>
+            </a:extLst>
+          </p:cNvPr>
+          <p:cNvSpPr txBox="1"/>
+          <p:nvPr/>
+        </p:nvSpPr>
+        <p:spPr>
+          <a:xfrm>
+            <a:off x="288790" y="958844"/>
+            <a:ext cx="11250267" cy="3738011"/>
+          </a:xfrm>
+          <a:prstGeom prst="rect">
+            <a:avLst/>
+          </a:prstGeom>
+          <a:noFill/>
+        </p:spPr>
+        <p:txBody>
+          <a:bodyPr wrap="square" rtlCol="0" anchor="t">
+            <a:spAutoFit/>
+          </a:bodyPr>
+          <a:lstStyle/>
+          <a:p>
+            <a:pPr marL="377825" indent="-285750">
+              <a:lnSpc>
+                <a:spcPct val="150000"/>
+              </a:lnSpc>
+              <a:buFont typeface="Arial" panose="020B0604020202020204" pitchFamily="34" charset="0"/>
+              <a:buChar char="•"/>
+            </a:pPr>
+            <a:r>
+              <a:rPr lang="ko-KR" altLang="en-US" sz="1600" spc="-50" dirty="0"/>
+              <a:t>끊임 없이 변하는 경제상황 속에서 합리적인 연금의 급여수준을 찾아내는 것은 쉬운 일이 아니다</a:t>
+            </a:r>
+            <a:r>
+              <a:rPr lang="en-US" altLang="ko-KR" sz="1600" spc="-50" dirty="0"/>
+              <a:t>.</a:t>
+            </a:r>
+          </a:p>
+          <a:p>
+            <a:pPr marL="835025" lvl="1" indent="-285750">
+              <a:lnSpc>
+                <a:spcPct val="150000"/>
+              </a:lnSpc>
+              <a:buFont typeface="Wingdings" panose="05000000000000000000" pitchFamily="2" charset="2"/>
+              <a:buChar char="ü"/>
+            </a:pPr>
+            <a:r>
+              <a:rPr lang="ko-KR" altLang="en-US" sz="1600" spc="-50" dirty="0"/>
+              <a:t>노년층에게 단지 생존을 위한 수단을 제공하는 선에서 그쳐야 하는지</a:t>
+            </a:r>
+            <a:endParaRPr lang="en-US" altLang="ko-KR" sz="1600" spc="-50" dirty="0"/>
+          </a:p>
+          <a:p>
+            <a:pPr marL="1292225" lvl="2" indent="-285750">
+              <a:lnSpc>
+                <a:spcPct val="150000"/>
+              </a:lnSpc>
+              <a:buFont typeface="Wingdings" panose="05000000000000000000" pitchFamily="2" charset="2"/>
+              <a:buChar char="Ø"/>
+            </a:pPr>
+            <a:r>
+              <a:rPr lang="ko-KR" altLang="en-US" sz="1600" spc="-50" dirty="0"/>
+              <a:t>이처럼 노년층의 실질소득을 유지해주는 선에서 그치면</a:t>
+            </a:r>
+            <a:r>
+              <a:rPr lang="en-US" altLang="ko-KR" sz="1600" spc="-50" dirty="0"/>
+              <a:t>, </a:t>
+            </a:r>
+            <a:r>
+              <a:rPr lang="ko-KR" altLang="en-US" sz="1600" spc="-50" dirty="0"/>
+              <a:t>노년층의 상대적 지위가 악화 될 수 밖에 없다</a:t>
+            </a:r>
+            <a:r>
+              <a:rPr lang="en-US" altLang="ko-KR" sz="1600" spc="-50" dirty="0"/>
+              <a:t>.</a:t>
+            </a:r>
+          </a:p>
+          <a:p>
+            <a:pPr marL="835025" lvl="1" indent="-285750">
+              <a:lnSpc>
+                <a:spcPct val="150000"/>
+              </a:lnSpc>
+              <a:buFont typeface="Wingdings" panose="05000000000000000000" pitchFamily="2" charset="2"/>
+              <a:buChar char="ü"/>
+            </a:pPr>
+            <a:r>
+              <a:rPr lang="ko-KR" altLang="en-US" sz="1600" spc="-50" dirty="0"/>
+              <a:t>일반 국민이 누리고 있는 생활수준 향상의 혜택을 공유할 수 있도록 배려해야 하는지 선택 해야 한다</a:t>
+            </a:r>
+            <a:r>
+              <a:rPr lang="en-US" altLang="ko-KR" sz="1600" spc="-50" dirty="0"/>
+              <a:t>.</a:t>
+            </a:r>
+          </a:p>
+          <a:p>
+            <a:pPr marL="1292225" lvl="2" indent="-285750">
+              <a:lnSpc>
+                <a:spcPct val="150000"/>
+              </a:lnSpc>
+              <a:buFont typeface="Wingdings" panose="05000000000000000000" pitchFamily="2" charset="2"/>
+              <a:buChar char="Ø"/>
+            </a:pPr>
+            <a:r>
+              <a:rPr lang="ko-KR" altLang="en-US" sz="1600" spc="-50" dirty="0"/>
+              <a:t>이와 같이 관대한 급여수준을 유지하기 위해서는 젊은 세대에 무거운 세금을 부과할 수 밖에 없다</a:t>
+            </a:r>
+            <a:r>
+              <a:rPr lang="en-US" altLang="ko-KR" sz="1600" spc="-50" dirty="0"/>
+              <a:t>.</a:t>
+            </a:r>
+          </a:p>
+          <a:p>
+            <a:pPr marL="1292225" lvl="2" indent="-285750">
+              <a:lnSpc>
+                <a:spcPct val="150000"/>
+              </a:lnSpc>
+              <a:buFont typeface="Wingdings" panose="05000000000000000000" pitchFamily="2" charset="2"/>
+              <a:buChar char="Ø"/>
+            </a:pPr>
+            <a:endParaRPr lang="en-US" altLang="ko-KR" sz="1600" spc="-50" dirty="0"/>
+          </a:p>
+          <a:p>
+            <a:pPr marL="377825" indent="-285750">
+              <a:lnSpc>
+                <a:spcPct val="150000"/>
+              </a:lnSpc>
+              <a:buFont typeface="Arial" panose="020B0604020202020204" pitchFamily="34" charset="0"/>
+              <a:buChar char="•"/>
+            </a:pPr>
+            <a:r>
+              <a:rPr lang="ko-KR" altLang="en-US" sz="1600" spc="-50" dirty="0"/>
+              <a:t>뿐만 아니라 급여수준 조정의 기준이 되는 가격과 소득의 변동을 어느 시기에 기준을 두고 측정해야 할 것인지 문제다</a:t>
+            </a:r>
+            <a:r>
+              <a:rPr lang="en-US" altLang="ko-KR" sz="1600" spc="-50" dirty="0"/>
+              <a:t>.</a:t>
+            </a:r>
+          </a:p>
+          <a:p>
+            <a:pPr marL="835025" lvl="1" indent="-285750">
+              <a:lnSpc>
+                <a:spcPct val="150000"/>
+              </a:lnSpc>
+              <a:buFont typeface="Wingdings" panose="05000000000000000000" pitchFamily="2" charset="2"/>
+              <a:buChar char="ü"/>
+            </a:pPr>
+            <a:r>
+              <a:rPr lang="ko-KR" altLang="en-US" sz="1600" spc="-50" dirty="0"/>
+              <a:t>이미 일어난 변화를 기준으로 하여 급여수준을 조정할 것인지 </a:t>
+            </a:r>
+            <a:r>
+              <a:rPr lang="en-US" altLang="ko-KR" sz="1600" spc="-50" dirty="0"/>
+              <a:t>(</a:t>
+            </a:r>
+            <a:r>
+              <a:rPr lang="ko-KR" altLang="en-US" sz="1600" spc="-50" dirty="0"/>
+              <a:t>역사적 방식</a:t>
+            </a:r>
+            <a:r>
+              <a:rPr lang="en-US" altLang="ko-KR" sz="1600" spc="-50" dirty="0"/>
+              <a:t>)</a:t>
+            </a:r>
+          </a:p>
+          <a:p>
+            <a:pPr marL="835025" lvl="1" indent="-285750">
+              <a:lnSpc>
+                <a:spcPct val="150000"/>
+              </a:lnSpc>
+              <a:buFont typeface="Wingdings" panose="05000000000000000000" pitchFamily="2" charset="2"/>
+              <a:buChar char="ü"/>
+            </a:pPr>
+            <a:r>
+              <a:rPr lang="ko-KR" altLang="en-US" sz="1600" spc="-50" dirty="0"/>
+              <a:t>앞으로 일어날 변화를 예측하여 이를 조정 기준으로 삼아야 하는지 </a:t>
+            </a:r>
+            <a:r>
+              <a:rPr lang="en-US" altLang="ko-KR" sz="1600" spc="-50" dirty="0"/>
+              <a:t>(</a:t>
+            </a:r>
+            <a:r>
+              <a:rPr lang="ko-KR" altLang="en-US" sz="1600" spc="-50" dirty="0"/>
+              <a:t>예측 방식</a:t>
+            </a:r>
+            <a:r>
+              <a:rPr lang="en-US" altLang="ko-KR" sz="1600" spc="-50" dirty="0"/>
+              <a:t>) </a:t>
+            </a:r>
+            <a:r>
+              <a:rPr lang="ko-KR" altLang="en-US" sz="1600" spc="-50" dirty="0"/>
+              <a:t>선택해야 하는 문제가 있다</a:t>
+            </a:r>
+            <a:r>
+              <a:rPr lang="en-US" altLang="ko-KR" sz="1600" spc="-50" dirty="0"/>
+              <a:t>.</a:t>
+            </a:r>
+          </a:p>
+          <a:p>
+            <a:pPr marL="835025" lvl="1" indent="-285750">
+              <a:lnSpc>
+                <a:spcPct val="150000"/>
+              </a:lnSpc>
+              <a:buFont typeface="Wingdings" panose="05000000000000000000" pitchFamily="2" charset="2"/>
+              <a:buChar char="ü"/>
+            </a:pPr>
+            <a:r>
+              <a:rPr lang="ko-KR" altLang="en-US" sz="1600" spc="-50" dirty="0"/>
+              <a:t>논리적으로는 예측 방식이 설득력이 있지만</a:t>
+            </a:r>
+            <a:r>
+              <a:rPr lang="en-US" altLang="ko-KR" sz="1600" spc="-50" dirty="0"/>
+              <a:t>, </a:t>
+            </a:r>
+            <a:r>
+              <a:rPr lang="ko-KR" altLang="en-US" sz="1600" spc="-50" dirty="0"/>
+              <a:t>구체적인 실천에 따르는 문제가 많이 생긴다</a:t>
+            </a:r>
+            <a:r>
+              <a:rPr lang="en-US" altLang="ko-KR" sz="1600" spc="-50" dirty="0"/>
+              <a:t>.</a:t>
+            </a:r>
+          </a:p>
+        </p:txBody>
+      </p:sp>
+    </p:spTree>
+    <p:extLst>
+      <p:ext uri="{BB962C8B-B14F-4D97-AF65-F5344CB8AC3E}">
+        <p14:creationId xmlns:p14="http://schemas.microsoft.com/office/powerpoint/2010/main" val="1980874238"/>
+      </p:ext>
+    </p:extLst>
+  </p:cSld>
+  <p:clrMapOvr>
+    <a:masterClrMapping/>
+  </p:clrMapOvr>
+</p:sld>
+</file>
+
+<file path=ppt/slides/slide24.xml><?xml version="1.0" encoding="utf-8"?>
+<p:sld xmlns:a="http://schemas.openxmlformats.org/drawingml/2006/main" xmlns:r="http://schemas.openxmlformats.org/officeDocument/2006/relationships" xmlns:p="http://schemas.openxmlformats.org/presentationml/2006/main">
+  <p:cSld>
+    <p:spTree>
+      <p:nvGrpSpPr>
+        <p:cNvPr id="1" name="">
+          <a:extLst>
+            <a:ext uri="{FF2B5EF4-FFF2-40B4-BE49-F238E27FC236}">
               <a16:creationId xmlns:a16="http://schemas.microsoft.com/office/drawing/2014/main" id="{768A7D6A-5714-21DE-75FD-2FF792657ADC}"/>
             </a:ext>
           </a:extLst>
@@ -10411,7 +12985,7 @@
           <a:p>
             <a:fld id="{109C872D-39A9-4065-8BF3-6A613116E2A1}" type="slidenum">
               <a:rPr lang="ko-KR" altLang="en-US" smtClean="0"/>
-              <a:t>20</a:t>
+              <a:t>24</a:t>
             </a:fld>
             <a:endParaRPr lang="ko-KR" altLang="en-US"/>
           </a:p>
@@ -10471,7 +13045,7 @@
 </p:sld>
 </file>
 
-<file path=ppt/slides/slide21.xml><?xml version="1.0" encoding="utf-8"?>
+<file path=ppt/slides/slide25.xml><?xml version="1.0" encoding="utf-8"?>
 <p:sld xmlns:a="http://schemas.openxmlformats.org/drawingml/2006/main" xmlns:r="http://schemas.openxmlformats.org/officeDocument/2006/relationships" xmlns:p="http://schemas.openxmlformats.org/presentationml/2006/main">
   <p:cSld>
     <p:spTree>
@@ -10554,7 +13128,7 @@
           <a:p>
             <a:fld id="{109C872D-39A9-4065-8BF3-6A613116E2A1}" type="slidenum">
               <a:rPr lang="ko-KR" altLang="en-US" smtClean="0"/>
-              <a:t>21</a:t>
+              <a:t>25</a:t>
             </a:fld>
             <a:endParaRPr lang="ko-KR" altLang="en-US"/>
           </a:p>
@@ -10614,7 +13188,7 @@
 </p:sld>
 </file>
 
-<file path=ppt/slides/slide22.xml><?xml version="1.0" encoding="utf-8"?>
+<file path=ppt/slides/slide26.xml><?xml version="1.0" encoding="utf-8"?>
 <p:sld xmlns:a="http://schemas.openxmlformats.org/drawingml/2006/main" xmlns:r="http://schemas.openxmlformats.org/officeDocument/2006/relationships" xmlns:p="http://schemas.openxmlformats.org/presentationml/2006/main">
   <p:cSld>
     <p:spTree>
@@ -10697,7 +13271,7 @@
           <a:p>
             <a:fld id="{109C872D-39A9-4065-8BF3-6A613116E2A1}" type="slidenum">
               <a:rPr lang="ko-KR" altLang="en-US" smtClean="0"/>
-              <a:t>22</a:t>
+              <a:t>26</a:t>
             </a:fld>
             <a:endParaRPr lang="ko-KR" altLang="en-US"/>
           </a:p>
@@ -10757,7 +13331,7 @@
 </p:sld>
 </file>
 
-<file path=ppt/slides/slide23.xml><?xml version="1.0" encoding="utf-8"?>
+<file path=ppt/slides/slide27.xml><?xml version="1.0" encoding="utf-8"?>
 <p:sld xmlns:a="http://schemas.openxmlformats.org/drawingml/2006/main" xmlns:r="http://schemas.openxmlformats.org/officeDocument/2006/relationships" xmlns:p="http://schemas.openxmlformats.org/presentationml/2006/main">
   <p:cSld>
     <p:spTree>
@@ -10840,7 +13414,7 @@
           <a:p>
             <a:fld id="{109C872D-39A9-4065-8BF3-6A613116E2A1}" type="slidenum">
               <a:rPr lang="ko-KR" altLang="en-US" smtClean="0"/>
-              <a:t>23</a:t>
+              <a:t>27</a:t>
             </a:fld>
             <a:endParaRPr lang="ko-KR" altLang="en-US"/>
           </a:p>
@@ -10900,7 +13474,7 @@
 </p:sld>
 </file>
 
-<file path=ppt/slides/slide24.xml><?xml version="1.0" encoding="utf-8"?>
+<file path=ppt/slides/slide28.xml><?xml version="1.0" encoding="utf-8"?>
 <p:sld xmlns:a="http://schemas.openxmlformats.org/drawingml/2006/main" xmlns:r="http://schemas.openxmlformats.org/officeDocument/2006/relationships" xmlns:p="http://schemas.openxmlformats.org/presentationml/2006/main">
   <p:cSld>
     <p:spTree>
@@ -10974,7 +13548,7 @@
           <a:p>
             <a:fld id="{109C872D-39A9-4065-8BF3-6A613116E2A1}" type="slidenum">
               <a:rPr lang="ko-KR" altLang="en-US" smtClean="0"/>
-              <a:t>24</a:t>
+              <a:t>28</a:t>
             </a:fld>
             <a:endParaRPr lang="ko-KR" altLang="en-US"/>
           </a:p>
@@ -11260,7 +13834,7 @@
 </p:sld>
 </file>
 
-<file path=ppt/slides/slide25.xml><?xml version="1.0" encoding="utf-8"?>
+<file path=ppt/slides/slide29.xml><?xml version="1.0" encoding="utf-8"?>
 <p:sld xmlns:a="http://schemas.openxmlformats.org/drawingml/2006/main" xmlns:r="http://schemas.openxmlformats.org/officeDocument/2006/relationships" xmlns:p="http://schemas.openxmlformats.org/presentationml/2006/main">
   <p:cSld>
     <p:spTree>
@@ -11334,7 +13908,7 @@
           <a:p>
             <a:fld id="{109C872D-39A9-4065-8BF3-6A613116E2A1}" type="slidenum">
               <a:rPr lang="ko-KR" altLang="en-US" smtClean="0"/>
-              <a:t>25</a:t>
+              <a:t>29</a:t>
             </a:fld>
             <a:endParaRPr lang="ko-KR" altLang="en-US"/>
           </a:p>
@@ -11661,1228 +14235,6 @@
     <p:extLst>
       <p:ext uri="{BB962C8B-B14F-4D97-AF65-F5344CB8AC3E}">
         <p14:creationId xmlns:p14="http://schemas.microsoft.com/office/powerpoint/2010/main" val="1769245089"/>
-      </p:ext>
-    </p:extLst>
-  </p:cSld>
-  <p:clrMapOvr>
-    <a:masterClrMapping/>
-  </p:clrMapOvr>
-</p:sld>
-</file>
-
-<file path=ppt/slides/slide26.xml><?xml version="1.0" encoding="utf-8"?>
-<p:sld xmlns:a="http://schemas.openxmlformats.org/drawingml/2006/main" xmlns:r="http://schemas.openxmlformats.org/officeDocument/2006/relationships" xmlns:p="http://schemas.openxmlformats.org/presentationml/2006/main">
-  <p:cSld>
-    <p:spTree>
-      <p:nvGrpSpPr>
-        <p:cNvPr id="1" name="">
-          <a:extLst>
-            <a:ext uri="{FF2B5EF4-FFF2-40B4-BE49-F238E27FC236}">
-              <a16:creationId xmlns:a16="http://schemas.microsoft.com/office/drawing/2014/main" id="{075FB47C-3726-C9E0-C9E7-FFDDE3209977}"/>
-            </a:ext>
-          </a:extLst>
-        </p:cNvPr>
-        <p:cNvGrpSpPr/>
-        <p:nvPr/>
-      </p:nvGrpSpPr>
-      <p:grpSpPr>
-        <a:xfrm>
-          <a:off x="0" y="0"/>
-          <a:ext cx="0" cy="0"/>
-          <a:chOff x="0" y="0"/>
-          <a:chExt cx="0" cy="0"/>
-        </a:xfrm>
-      </p:grpSpPr>
-      <p:sp>
-        <p:nvSpPr>
-          <p:cNvPr id="2" name="제목 1">
-            <a:extLst>
-              <a:ext uri="{FF2B5EF4-FFF2-40B4-BE49-F238E27FC236}">
-                <a16:creationId xmlns:a16="http://schemas.microsoft.com/office/drawing/2014/main" id="{7C7B97E2-F210-8875-7AB5-10FD09DA1557}"/>
-              </a:ext>
-            </a:extLst>
-          </p:cNvPr>
-          <p:cNvSpPr>
-            <a:spLocks noGrp="1"/>
-          </p:cNvSpPr>
-          <p:nvPr>
-            <p:ph type="title"/>
-          </p:nvPr>
-        </p:nvSpPr>
-        <p:spPr/>
-        <p:txBody>
-          <a:bodyPr/>
-          <a:lstStyle/>
-          <a:p>
-            <a:r>
-              <a:rPr lang="ko-KR" altLang="en-US" dirty="0"/>
-              <a:t>재분배정책에 대한 찬반의견</a:t>
-            </a:r>
-          </a:p>
-        </p:txBody>
-      </p:sp>
-      <p:sp>
-        <p:nvSpPr>
-          <p:cNvPr id="4" name="슬라이드 번호 개체 틀 3">
-            <a:extLst>
-              <a:ext uri="{FF2B5EF4-FFF2-40B4-BE49-F238E27FC236}">
-                <a16:creationId xmlns:a16="http://schemas.microsoft.com/office/drawing/2014/main" id="{72F91DFC-EAD3-E4FF-030C-0E96EA359B8B}"/>
-              </a:ext>
-            </a:extLst>
-          </p:cNvPr>
-          <p:cNvSpPr>
-            <a:spLocks noGrp="1"/>
-          </p:cNvSpPr>
-          <p:nvPr>
-            <p:ph type="sldNum" sz="quarter" idx="12"/>
-          </p:nvPr>
-        </p:nvSpPr>
-        <p:spPr/>
-        <p:txBody>
-          <a:bodyPr/>
-          <a:lstStyle/>
-          <a:p>
-            <a:fld id="{109C872D-39A9-4065-8BF3-6A613116E2A1}" type="slidenum">
-              <a:rPr lang="ko-KR" altLang="en-US" smtClean="0"/>
-              <a:t>26</a:t>
-            </a:fld>
-            <a:endParaRPr lang="ko-KR" altLang="en-US"/>
-          </a:p>
-        </p:txBody>
-      </p:sp>
-      <p:sp>
-        <p:nvSpPr>
-          <p:cNvPr id="3" name="TextBox 2">
-            <a:extLst>
-              <a:ext uri="{FF2B5EF4-FFF2-40B4-BE49-F238E27FC236}">
-                <a16:creationId xmlns:a16="http://schemas.microsoft.com/office/drawing/2014/main" id="{3509C429-DA59-D9FA-5751-536773D5059C}"/>
-              </a:ext>
-            </a:extLst>
-          </p:cNvPr>
-          <p:cNvSpPr txBox="1"/>
-          <p:nvPr/>
-        </p:nvSpPr>
-        <p:spPr>
-          <a:xfrm>
-            <a:off x="288790" y="958844"/>
-            <a:ext cx="11250267" cy="2999347"/>
-          </a:xfrm>
-          <a:prstGeom prst="rect">
-            <a:avLst/>
-          </a:prstGeom>
-          <a:noFill/>
-        </p:spPr>
-        <p:txBody>
-          <a:bodyPr wrap="square" rtlCol="0" anchor="t">
-            <a:spAutoFit/>
-          </a:bodyPr>
-          <a:lstStyle/>
-          <a:p>
-            <a:pPr marL="434975" indent="-342900">
-              <a:lnSpc>
-                <a:spcPct val="150000"/>
-              </a:lnSpc>
-              <a:buFont typeface="+mj-lt"/>
-              <a:buAutoNum type="arabicPeriod" startAt="3"/>
-            </a:pPr>
-            <a:r>
-              <a:rPr lang="ko-KR" altLang="en-US" sz="1600" b="1" spc="-50" dirty="0" err="1"/>
-              <a:t>사회보험으로서의</a:t>
-            </a:r>
-            <a:r>
-              <a:rPr lang="ko-KR" altLang="en-US" sz="1600" b="1" spc="-50" dirty="0"/>
-              <a:t> 재분배</a:t>
-            </a:r>
-            <a:r>
-              <a:rPr lang="en-US" altLang="ko-KR" sz="1600" spc="-50" dirty="0"/>
-              <a:t>: </a:t>
-            </a:r>
-            <a:r>
-              <a:rPr lang="ko-KR" altLang="en-US" sz="1600" spc="-50" dirty="0"/>
-              <a:t>재분배정책을 사회보험이라는 관점에서 정당화하고자 하는 시도도 있다</a:t>
-            </a:r>
-            <a:r>
-              <a:rPr lang="en-US" altLang="ko-KR" sz="1600" spc="-50" dirty="0"/>
-              <a:t>.</a:t>
-            </a:r>
-          </a:p>
-          <a:p>
-            <a:pPr marL="892175" lvl="1" indent="-342900">
-              <a:lnSpc>
-                <a:spcPct val="150000"/>
-              </a:lnSpc>
-              <a:buFont typeface="Wingdings" panose="05000000000000000000" pitchFamily="2" charset="2"/>
-              <a:buChar char="ü"/>
-            </a:pPr>
-            <a:r>
-              <a:rPr lang="ko-KR" altLang="en-US" sz="1600" spc="-50" dirty="0"/>
-              <a:t>우리는 뜻하지 않은 일로</a:t>
-            </a:r>
-            <a:r>
-              <a:rPr lang="en-US" altLang="ko-KR" sz="1600" spc="-50" dirty="0"/>
-              <a:t>, </a:t>
-            </a:r>
-            <a:r>
-              <a:rPr lang="ko-KR" altLang="en-US" sz="1600" spc="-50" dirty="0"/>
-              <a:t>빈곤해질 수 있는 가능성을 항상 가지고 있다</a:t>
-            </a:r>
-            <a:r>
-              <a:rPr lang="en-US" altLang="ko-KR" sz="1600" spc="-50" dirty="0"/>
-              <a:t>.</a:t>
-            </a:r>
-          </a:p>
-          <a:p>
-            <a:pPr marL="892175" lvl="1" indent="-342900">
-              <a:lnSpc>
-                <a:spcPct val="150000"/>
-              </a:lnSpc>
-              <a:buFont typeface="Wingdings" panose="05000000000000000000" pitchFamily="2" charset="2"/>
-              <a:buChar char="ü"/>
-            </a:pPr>
-            <a:r>
-              <a:rPr lang="ko-KR" altLang="en-US" sz="1600" spc="-50" dirty="0"/>
-              <a:t>이런 경우를 대비하는 차원에서 재분배 정책은 일종의 사회적 안전장치를 마련해 놓는 것이다</a:t>
-            </a:r>
-            <a:r>
-              <a:rPr lang="en-US" altLang="ko-KR" sz="1600" spc="-50" dirty="0"/>
-              <a:t>.</a:t>
-            </a:r>
-          </a:p>
-          <a:p>
-            <a:pPr marL="434975" indent="-342900">
-              <a:lnSpc>
-                <a:spcPct val="150000"/>
-              </a:lnSpc>
-              <a:buFont typeface="+mj-lt"/>
-              <a:buAutoNum type="arabicPeriod" startAt="3"/>
-            </a:pPr>
-            <a:endParaRPr lang="en-US" altLang="ko-KR" sz="1600" spc="-50" dirty="0"/>
-          </a:p>
-          <a:p>
-            <a:pPr marL="434975" indent="-342900">
-              <a:lnSpc>
-                <a:spcPct val="150000"/>
-              </a:lnSpc>
-              <a:buFont typeface="+mj-lt"/>
-              <a:buAutoNum type="arabicPeriod" startAt="3"/>
-            </a:pPr>
-            <a:r>
-              <a:rPr lang="ko-KR" altLang="en-US" sz="1600" b="1" spc="-50" dirty="0"/>
-              <a:t>정치적 관점</a:t>
-            </a:r>
-            <a:r>
-              <a:rPr lang="en-US" altLang="ko-KR" sz="1600" spc="-50" dirty="0"/>
-              <a:t>: </a:t>
-            </a:r>
-            <a:r>
-              <a:rPr lang="ko-KR" altLang="en-US" sz="1600" spc="-50" dirty="0"/>
-              <a:t>어떤 사람이 부유하다는 것은 경제적 자원 뿐만 아니라 정치적 권력을 더 많이 갖고 있음을 의미한다</a:t>
-            </a:r>
-            <a:r>
-              <a:rPr lang="en-US" altLang="ko-KR" sz="1600" spc="-50" dirty="0"/>
-              <a:t>.</a:t>
-            </a:r>
-          </a:p>
-          <a:p>
-            <a:pPr marL="892175" lvl="1" indent="-342900">
-              <a:lnSpc>
-                <a:spcPct val="150000"/>
-              </a:lnSpc>
-              <a:buFont typeface="Wingdings" panose="05000000000000000000" pitchFamily="2" charset="2"/>
-              <a:buChar char="ü"/>
-            </a:pPr>
-            <a:r>
-              <a:rPr lang="ko-KR" altLang="en-US" sz="1600" spc="-50" dirty="0"/>
-              <a:t>이를 바탕으로 보면 부가 소수에 집중되어 있을 때 정치적 권력도 소수에 집중되는 결과를 낳게 된다</a:t>
-            </a:r>
-            <a:r>
-              <a:rPr lang="en-US" altLang="ko-KR" sz="1600" spc="-50" dirty="0"/>
-              <a:t>.</a:t>
-            </a:r>
-          </a:p>
-          <a:p>
-            <a:pPr marL="892175" lvl="1" indent="-342900">
-              <a:lnSpc>
-                <a:spcPct val="150000"/>
-              </a:lnSpc>
-              <a:buFont typeface="Wingdings" panose="05000000000000000000" pitchFamily="2" charset="2"/>
-              <a:buChar char="ü"/>
-            </a:pPr>
-            <a:r>
-              <a:rPr lang="ko-KR" altLang="en-US" sz="1600" spc="-50" dirty="0"/>
-              <a:t>부당한 권력의 집중을 방지하기 위해서는 재분배정책을 통해 부를 과감하게 분산시켜 정치적 권력도 함께 분산 시키는 것이 필요하다는 주장이다</a:t>
-            </a:r>
-            <a:r>
-              <a:rPr lang="en-US" altLang="ko-KR" sz="1600" spc="-50" dirty="0"/>
-              <a:t>.</a:t>
-            </a:r>
-          </a:p>
-        </p:txBody>
-      </p:sp>
-    </p:spTree>
-    <p:extLst>
-      <p:ext uri="{BB962C8B-B14F-4D97-AF65-F5344CB8AC3E}">
-        <p14:creationId xmlns:p14="http://schemas.microsoft.com/office/powerpoint/2010/main" val="4018274826"/>
-      </p:ext>
-    </p:extLst>
-  </p:cSld>
-  <p:clrMapOvr>
-    <a:masterClrMapping/>
-  </p:clrMapOvr>
-</p:sld>
-</file>
-
-<file path=ppt/slides/slide27.xml><?xml version="1.0" encoding="utf-8"?>
-<p:sld xmlns:a="http://schemas.openxmlformats.org/drawingml/2006/main" xmlns:r="http://schemas.openxmlformats.org/officeDocument/2006/relationships" xmlns:p="http://schemas.openxmlformats.org/presentationml/2006/main">
-  <p:cSld>
-    <p:spTree>
-      <p:nvGrpSpPr>
-        <p:cNvPr id="1" name="">
-          <a:extLst>
-            <a:ext uri="{FF2B5EF4-FFF2-40B4-BE49-F238E27FC236}">
-              <a16:creationId xmlns:a16="http://schemas.microsoft.com/office/drawing/2014/main" id="{F349E00A-5187-4C65-52E9-63306C3F89D0}"/>
-            </a:ext>
-          </a:extLst>
-        </p:cNvPr>
-        <p:cNvGrpSpPr/>
-        <p:nvPr/>
-      </p:nvGrpSpPr>
-      <p:grpSpPr>
-        <a:xfrm>
-          <a:off x="0" y="0"/>
-          <a:ext cx="0" cy="0"/>
-          <a:chOff x="0" y="0"/>
-          <a:chExt cx="0" cy="0"/>
-        </a:xfrm>
-      </p:grpSpPr>
-      <p:pic>
-        <p:nvPicPr>
-          <p:cNvPr id="6" name="그림 5" descr="텍스트, 로고, 원, 폰트이(가) 표시된 사진&#10;&#10;AI 생성 콘텐츠는 정확하지 않을 수 있습니다.">
-            <a:extLst>
-              <a:ext uri="{FF2B5EF4-FFF2-40B4-BE49-F238E27FC236}">
-                <a16:creationId xmlns:a16="http://schemas.microsoft.com/office/drawing/2014/main" id="{D156AEEF-DA17-2EC9-6260-BC326D47EF02}"/>
-              </a:ext>
-            </a:extLst>
-          </p:cNvPr>
-          <p:cNvPicPr>
-            <a:picLocks noChangeAspect="1"/>
-          </p:cNvPicPr>
-          <p:nvPr/>
-        </p:nvPicPr>
-        <p:blipFill>
-          <a:blip r:embed="rId2">
-            <a:alphaModFix amt="20000"/>
-            <a:extLst>
-              <a:ext uri="{28A0092B-C50C-407E-A947-70E740481C1C}">
-                <a14:useLocalDpi xmlns:a14="http://schemas.microsoft.com/office/drawing/2010/main" val="0"/>
-              </a:ext>
-            </a:extLst>
-          </a:blip>
-          <a:stretch>
-            <a:fillRect/>
-          </a:stretch>
-        </p:blipFill>
-        <p:spPr>
-          <a:xfrm>
-            <a:off x="4012070" y="1673061"/>
-            <a:ext cx="4167861" cy="4167861"/>
-          </a:xfrm>
-          <a:prstGeom prst="rect">
-            <a:avLst/>
-          </a:prstGeom>
-        </p:spPr>
-      </p:pic>
-      <p:sp>
-        <p:nvSpPr>
-          <p:cNvPr id="4" name="슬라이드 번호 개체 틀 3">
-            <a:extLst>
-              <a:ext uri="{FF2B5EF4-FFF2-40B4-BE49-F238E27FC236}">
-                <a16:creationId xmlns:a16="http://schemas.microsoft.com/office/drawing/2014/main" id="{CF954DBE-4BA0-6BBA-7BC4-FDCEDCD57142}"/>
-              </a:ext>
-            </a:extLst>
-          </p:cNvPr>
-          <p:cNvSpPr>
-            <a:spLocks noGrp="1"/>
-          </p:cNvSpPr>
-          <p:nvPr>
-            <p:ph type="sldNum" sz="quarter" idx="12"/>
-          </p:nvPr>
-        </p:nvSpPr>
-        <p:spPr/>
-        <p:txBody>
-          <a:bodyPr/>
-          <a:lstStyle/>
-          <a:p>
-            <a:fld id="{109C872D-39A9-4065-8BF3-6A613116E2A1}" type="slidenum">
-              <a:rPr lang="ko-KR" altLang="en-US" smtClean="0"/>
-              <a:t>27</a:t>
-            </a:fld>
-            <a:endParaRPr lang="ko-KR" altLang="en-US"/>
-          </a:p>
-        </p:txBody>
-      </p:sp>
-      <p:sp>
-        <p:nvSpPr>
-          <p:cNvPr id="7" name="제목 1">
-            <a:extLst>
-              <a:ext uri="{FF2B5EF4-FFF2-40B4-BE49-F238E27FC236}">
-                <a16:creationId xmlns:a16="http://schemas.microsoft.com/office/drawing/2014/main" id="{7DC7C092-9F83-9AEC-2DE6-4EDC5AF822F6}"/>
-              </a:ext>
-            </a:extLst>
-          </p:cNvPr>
-          <p:cNvSpPr>
-            <a:spLocks noGrp="1"/>
-          </p:cNvSpPr>
-          <p:nvPr>
-            <p:ph type="title"/>
-          </p:nvPr>
-        </p:nvSpPr>
-        <p:spPr>
-          <a:xfrm>
-            <a:off x="831850" y="3765550"/>
-            <a:ext cx="11150600" cy="652818"/>
-          </a:xfrm>
-          <a:effectLst>
-            <a:reflection blurRad="50800" stA="45000" endPos="44000" dir="5400000" sy="-100000" algn="bl" rotWithShape="0"/>
-          </a:effectLst>
-        </p:spPr>
-        <p:txBody>
-          <a:bodyPr anchor="b"/>
-          <a:lstStyle/>
-          <a:p>
-            <a:r>
-              <a:rPr lang="en-US" altLang="ko-KR" sz="4000" b="1" i="0" spc="150" dirty="0"/>
-              <a:t>Section 2. </a:t>
-            </a:r>
-            <a:r>
-              <a:rPr lang="ko-KR" altLang="en-US" sz="4000" b="1" i="0" spc="150" dirty="0"/>
-              <a:t>재분배정책의 실례</a:t>
-            </a:r>
-            <a:endParaRPr lang="ko-KR" altLang="en-US" sz="3600" i="0" spc="150" dirty="0"/>
-          </a:p>
-        </p:txBody>
-      </p:sp>
-    </p:spTree>
-    <p:extLst>
-      <p:ext uri="{BB962C8B-B14F-4D97-AF65-F5344CB8AC3E}">
-        <p14:creationId xmlns:p14="http://schemas.microsoft.com/office/powerpoint/2010/main" val="2589408965"/>
-      </p:ext>
-    </p:extLst>
-  </p:cSld>
-  <p:clrMapOvr>
-    <a:masterClrMapping/>
-  </p:clrMapOvr>
-</p:sld>
-</file>
-
-<file path=ppt/slides/slide28.xml><?xml version="1.0" encoding="utf-8"?>
-<p:sld xmlns:a="http://schemas.openxmlformats.org/drawingml/2006/main" xmlns:r="http://schemas.openxmlformats.org/officeDocument/2006/relationships" xmlns:p="http://schemas.openxmlformats.org/presentationml/2006/main">
-  <p:cSld>
-    <p:spTree>
-      <p:nvGrpSpPr>
-        <p:cNvPr id="1" name="">
-          <a:extLst>
-            <a:ext uri="{FF2B5EF4-FFF2-40B4-BE49-F238E27FC236}">
-              <a16:creationId xmlns:a16="http://schemas.microsoft.com/office/drawing/2014/main" id="{E0E281FE-0393-7988-CEC4-F037AB2003E8}"/>
-            </a:ext>
-          </a:extLst>
-        </p:cNvPr>
-        <p:cNvGrpSpPr/>
-        <p:nvPr/>
-      </p:nvGrpSpPr>
-      <p:grpSpPr>
-        <a:xfrm>
-          <a:off x="0" y="0"/>
-          <a:ext cx="0" cy="0"/>
-          <a:chOff x="0" y="0"/>
-          <a:chExt cx="0" cy="0"/>
-        </a:xfrm>
-      </p:grpSpPr>
-      <p:sp>
-        <p:nvSpPr>
-          <p:cNvPr id="2" name="제목 1">
-            <a:extLst>
-              <a:ext uri="{FF2B5EF4-FFF2-40B4-BE49-F238E27FC236}">
-                <a16:creationId xmlns:a16="http://schemas.microsoft.com/office/drawing/2014/main" id="{26D0C283-45F1-D7BE-5488-41999EE3F67C}"/>
-              </a:ext>
-            </a:extLst>
-          </p:cNvPr>
-          <p:cNvSpPr>
-            <a:spLocks noGrp="1"/>
-          </p:cNvSpPr>
-          <p:nvPr>
-            <p:ph type="title"/>
-          </p:nvPr>
-        </p:nvSpPr>
-        <p:spPr/>
-        <p:txBody>
-          <a:bodyPr/>
-          <a:lstStyle/>
-          <a:p>
-            <a:r>
-              <a:rPr lang="ko-KR" altLang="en-US" dirty="0"/>
-              <a:t>일반적 조세제도</a:t>
-            </a:r>
-          </a:p>
-        </p:txBody>
-      </p:sp>
-      <p:sp>
-        <p:nvSpPr>
-          <p:cNvPr id="4" name="슬라이드 번호 개체 틀 3">
-            <a:extLst>
-              <a:ext uri="{FF2B5EF4-FFF2-40B4-BE49-F238E27FC236}">
-                <a16:creationId xmlns:a16="http://schemas.microsoft.com/office/drawing/2014/main" id="{B2C94553-870D-29D7-F5BF-01C75520E338}"/>
-              </a:ext>
-            </a:extLst>
-          </p:cNvPr>
-          <p:cNvSpPr>
-            <a:spLocks noGrp="1"/>
-          </p:cNvSpPr>
-          <p:nvPr>
-            <p:ph type="sldNum" sz="quarter" idx="12"/>
-          </p:nvPr>
-        </p:nvSpPr>
-        <p:spPr/>
-        <p:txBody>
-          <a:bodyPr/>
-          <a:lstStyle/>
-          <a:p>
-            <a:fld id="{109C872D-39A9-4065-8BF3-6A613116E2A1}" type="slidenum">
-              <a:rPr lang="ko-KR" altLang="en-US" smtClean="0"/>
-              <a:t>28</a:t>
-            </a:fld>
-            <a:endParaRPr lang="ko-KR" altLang="en-US"/>
-          </a:p>
-        </p:txBody>
-      </p:sp>
-      <p:sp>
-        <p:nvSpPr>
-          <p:cNvPr id="3" name="TextBox 2">
-            <a:extLst>
-              <a:ext uri="{FF2B5EF4-FFF2-40B4-BE49-F238E27FC236}">
-                <a16:creationId xmlns:a16="http://schemas.microsoft.com/office/drawing/2014/main" id="{7B1167B3-202B-2970-DB6A-4115B053DB54}"/>
-              </a:ext>
-            </a:extLst>
-          </p:cNvPr>
-          <p:cNvSpPr txBox="1"/>
-          <p:nvPr/>
-        </p:nvSpPr>
-        <p:spPr>
-          <a:xfrm>
-            <a:off x="288790" y="958844"/>
-            <a:ext cx="11250267" cy="4846007"/>
-          </a:xfrm>
-          <a:prstGeom prst="rect">
-            <a:avLst/>
-          </a:prstGeom>
-          <a:noFill/>
-        </p:spPr>
-        <p:txBody>
-          <a:bodyPr wrap="square" rtlCol="0" anchor="t">
-            <a:spAutoFit/>
-          </a:bodyPr>
-          <a:lstStyle/>
-          <a:p>
-            <a:pPr marL="377825" indent="-285750">
-              <a:lnSpc>
-                <a:spcPct val="150000"/>
-              </a:lnSpc>
-              <a:buFont typeface="Arial" panose="020B0604020202020204" pitchFamily="34" charset="0"/>
-              <a:buChar char="•"/>
-            </a:pPr>
-            <a:r>
-              <a:rPr lang="ko-KR" altLang="en-US" sz="1600" spc="-50" dirty="0"/>
-              <a:t>다양한 유형의 재분배정책이 있지만</a:t>
-            </a:r>
-            <a:r>
-              <a:rPr lang="en-US" altLang="ko-KR" sz="1600" spc="-50" dirty="0"/>
-              <a:t>,</a:t>
-            </a:r>
-            <a:r>
-              <a:rPr lang="ko-KR" altLang="en-US" sz="1600" spc="-50" dirty="0"/>
-              <a:t> 우리는 아래와 같이 기본적인 정책을 살펴보자</a:t>
-            </a:r>
-            <a:r>
-              <a:rPr lang="en-US" altLang="ko-KR" sz="1600" spc="-50" dirty="0"/>
-              <a:t>.</a:t>
-            </a:r>
-          </a:p>
-          <a:p>
-            <a:pPr marL="835025" lvl="1" indent="-285750">
-              <a:lnSpc>
-                <a:spcPct val="150000"/>
-              </a:lnSpc>
-              <a:buFont typeface="Wingdings" panose="05000000000000000000" pitchFamily="2" charset="2"/>
-              <a:buChar char="ü"/>
-            </a:pPr>
-            <a:r>
-              <a:rPr lang="ko-KR" altLang="en-US" sz="1600" spc="-50" dirty="0"/>
-              <a:t>일반적 조세제도</a:t>
-            </a:r>
-            <a:r>
-              <a:rPr lang="en-US" altLang="ko-KR" sz="1600" spc="-50" dirty="0"/>
-              <a:t>, </a:t>
-            </a:r>
-            <a:r>
-              <a:rPr lang="ko-KR" altLang="en-US" sz="1600" spc="-50" dirty="0"/>
-              <a:t>사회복지제도</a:t>
-            </a:r>
-            <a:r>
-              <a:rPr lang="en-US" altLang="ko-KR" sz="1600" spc="-50" dirty="0"/>
-              <a:t>, </a:t>
-            </a:r>
-            <a:r>
-              <a:rPr lang="ko-KR" altLang="en-US" sz="1600" spc="-50" dirty="0"/>
-              <a:t>부의 소득세제</a:t>
-            </a:r>
-            <a:r>
-              <a:rPr lang="en-US" altLang="ko-KR" sz="1600" spc="-50" dirty="0"/>
-              <a:t>, </a:t>
-            </a:r>
-            <a:r>
-              <a:rPr lang="ko-KR" altLang="en-US" sz="1600" spc="-50" dirty="0"/>
-              <a:t>근로장려세제</a:t>
-            </a:r>
-            <a:r>
-              <a:rPr lang="en-US" altLang="ko-KR" sz="1600" spc="-50" dirty="0"/>
-              <a:t>, </a:t>
-            </a:r>
-            <a:r>
-              <a:rPr lang="ko-KR" altLang="en-US" sz="1600" spc="-50" dirty="0"/>
-              <a:t>기본소득제도</a:t>
-            </a:r>
-            <a:endParaRPr lang="en-US" altLang="ko-KR" sz="1600" spc="-50" dirty="0"/>
-          </a:p>
-          <a:p>
-            <a:pPr marL="377825" indent="-285750">
-              <a:lnSpc>
-                <a:spcPct val="150000"/>
-              </a:lnSpc>
-              <a:buFont typeface="Arial" panose="020B0604020202020204" pitchFamily="34" charset="0"/>
-              <a:buChar char="•"/>
-            </a:pPr>
-            <a:endParaRPr lang="en-US" altLang="ko-KR" sz="1600" spc="-50" dirty="0"/>
-          </a:p>
-          <a:p>
-            <a:pPr marL="377825" indent="-285750">
-              <a:lnSpc>
-                <a:spcPct val="150000"/>
-              </a:lnSpc>
-              <a:buFont typeface="Arial" panose="020B0604020202020204" pitchFamily="34" charset="0"/>
-              <a:buChar char="•"/>
-            </a:pPr>
-            <a:r>
-              <a:rPr lang="ko-KR" altLang="en-US" sz="1600" spc="-50" dirty="0"/>
-              <a:t>조세가 누진성을 갖는다는 것은 납세자의 소득수준이 높을수록</a:t>
-            </a:r>
-            <a:r>
-              <a:rPr lang="en-US" altLang="ko-KR" sz="1600" spc="-50" dirty="0"/>
-              <a:t>, </a:t>
-            </a:r>
-            <a:r>
-              <a:rPr lang="ko-KR" altLang="en-US" sz="1600" spc="-50" dirty="0"/>
-              <a:t>소득의 더 큰 비율을 세금으로 납부하게 된다는 의미다</a:t>
-            </a:r>
-            <a:r>
-              <a:rPr lang="en-US" altLang="ko-KR" sz="1600" spc="-50" dirty="0"/>
-              <a:t>.</a:t>
-            </a:r>
-          </a:p>
-          <a:p>
-            <a:pPr marL="835025" lvl="1" indent="-285750">
-              <a:lnSpc>
-                <a:spcPct val="150000"/>
-              </a:lnSpc>
-              <a:buFont typeface="Wingdings" panose="05000000000000000000" pitchFamily="2" charset="2"/>
-              <a:buChar char="ü"/>
-            </a:pPr>
-            <a:r>
-              <a:rPr lang="ko-KR" altLang="en-US" sz="1600" spc="-50" dirty="0"/>
-              <a:t>누진적 조세를 통해 부유층과 빈곤층 사이에 존재하는 처분가능소득의 격차 감소를 기대할 수 있다</a:t>
-            </a:r>
-            <a:r>
-              <a:rPr lang="en-US" altLang="ko-KR" sz="1600" spc="-50" dirty="0"/>
-              <a:t>.</a:t>
-            </a:r>
-          </a:p>
-          <a:p>
-            <a:pPr marL="835025" lvl="1" indent="-285750">
-              <a:lnSpc>
-                <a:spcPct val="150000"/>
-              </a:lnSpc>
-              <a:buFont typeface="Wingdings" panose="05000000000000000000" pitchFamily="2" charset="2"/>
-              <a:buChar char="ü"/>
-            </a:pPr>
-            <a:r>
-              <a:rPr lang="ko-KR" altLang="en-US" sz="1600" spc="-50" dirty="0"/>
-              <a:t>처분가능소득 격차가 줄어들기는 하지만</a:t>
-            </a:r>
-            <a:r>
-              <a:rPr lang="en-US" altLang="ko-KR" sz="1600" spc="-50" dirty="0"/>
-              <a:t>, </a:t>
-            </a:r>
-            <a:r>
-              <a:rPr lang="ko-KR" altLang="en-US" sz="1600" spc="-50" dirty="0"/>
-              <a:t>빈곤층에게 직접적인 도움을 주는 효과는 기대할 수 없다</a:t>
-            </a:r>
-            <a:r>
-              <a:rPr lang="en-US" altLang="ko-KR" sz="1600" spc="-50" dirty="0"/>
-              <a:t>.</a:t>
-            </a:r>
-          </a:p>
-          <a:p>
-            <a:pPr marL="1292225" lvl="2" indent="-285750">
-              <a:lnSpc>
-                <a:spcPct val="150000"/>
-              </a:lnSpc>
-              <a:buFont typeface="Wingdings" panose="05000000000000000000" pitchFamily="2" charset="2"/>
-              <a:buChar char="Ø"/>
-            </a:pPr>
-            <a:r>
-              <a:rPr lang="ko-KR" altLang="en-US" sz="1600" spc="-50" dirty="0"/>
-              <a:t>다만 조세수입이 정부지출로 전환되는 과정에서 빈곤층에 더 많은 혜택이 돌아가는 정책을 시행하여 빈곤층에게 간접적으로 도움이 되도록 만들 수는 있다</a:t>
-            </a:r>
-            <a:r>
-              <a:rPr lang="en-US" altLang="ko-KR" sz="1600" spc="-50" dirty="0"/>
-              <a:t>.</a:t>
-            </a:r>
-          </a:p>
-          <a:p>
-            <a:pPr marL="377825" indent="-285750">
-              <a:lnSpc>
-                <a:spcPct val="150000"/>
-              </a:lnSpc>
-              <a:buFont typeface="Arial" panose="020B0604020202020204" pitchFamily="34" charset="0"/>
-              <a:buChar char="•"/>
-            </a:pPr>
-            <a:r>
-              <a:rPr lang="ko-KR" altLang="en-US" sz="1600" spc="-50" dirty="0"/>
-              <a:t>조세제도의 특성에 따라 누진성은 달라지는데</a:t>
-            </a:r>
-            <a:r>
-              <a:rPr lang="en-US" altLang="ko-KR" sz="1600" spc="-50" dirty="0"/>
-              <a:t>, </a:t>
-            </a:r>
-            <a:r>
-              <a:rPr lang="ko-KR" altLang="en-US" sz="1600" spc="-50" dirty="0"/>
-              <a:t>누진성이 클수록 더 큰 재분배효과가 나타난다</a:t>
-            </a:r>
-            <a:r>
-              <a:rPr lang="en-US" altLang="ko-KR" sz="1600" spc="-50" dirty="0"/>
-              <a:t>.</a:t>
-            </a:r>
-          </a:p>
-          <a:p>
-            <a:pPr marL="835025" lvl="1" indent="-285750">
-              <a:lnSpc>
-                <a:spcPct val="150000"/>
-              </a:lnSpc>
-              <a:buFont typeface="Wingdings" panose="05000000000000000000" pitchFamily="2" charset="2"/>
-              <a:buChar char="ü"/>
-            </a:pPr>
-            <a:r>
-              <a:rPr lang="ko-KR" altLang="en-US" sz="1600" spc="-50" dirty="0"/>
-              <a:t>조세수입에서 간접세의 비중이 크면 누진성을 기대할 수 없어</a:t>
-            </a:r>
-            <a:r>
-              <a:rPr lang="en-US" altLang="ko-KR" sz="1600" spc="-50" dirty="0"/>
-              <a:t>, </a:t>
-            </a:r>
-            <a:r>
-              <a:rPr lang="ko-KR" altLang="en-US" sz="1600" spc="-50" dirty="0"/>
-              <a:t>재분배효과가 제한적이다</a:t>
-            </a:r>
-            <a:r>
-              <a:rPr lang="en-US" altLang="ko-KR" sz="1600" spc="-50" dirty="0"/>
-              <a:t>.</a:t>
-            </a:r>
-          </a:p>
-          <a:p>
-            <a:pPr marL="1292225" lvl="2" indent="-285750">
-              <a:lnSpc>
-                <a:spcPct val="150000"/>
-              </a:lnSpc>
-              <a:buFont typeface="Wingdings" panose="05000000000000000000" pitchFamily="2" charset="2"/>
-              <a:buChar char="Ø"/>
-            </a:pPr>
-            <a:r>
-              <a:rPr lang="ko-KR" altLang="en-US" sz="1600" spc="-50" dirty="0"/>
-              <a:t>간접세는 납세자의 특성을 고려하지 않기 때문에</a:t>
-            </a:r>
-            <a:r>
-              <a:rPr lang="en-US" altLang="ko-KR" sz="1600" spc="-50" dirty="0"/>
-              <a:t>, </a:t>
-            </a:r>
-            <a:r>
-              <a:rPr lang="ko-KR" altLang="en-US" sz="1600" spc="-50" dirty="0"/>
-              <a:t>고소득자에게 특정하여 무거운 세금 부담을 지울 길이 없다</a:t>
-            </a:r>
-            <a:r>
-              <a:rPr lang="en-US" altLang="ko-KR" sz="1600" spc="-50" dirty="0"/>
-              <a:t>.</a:t>
-            </a:r>
-          </a:p>
-          <a:p>
-            <a:pPr marL="835025" lvl="1" indent="-285750">
-              <a:lnSpc>
-                <a:spcPct val="150000"/>
-              </a:lnSpc>
-              <a:buFont typeface="Wingdings" panose="05000000000000000000" pitchFamily="2" charset="2"/>
-              <a:buChar char="ü"/>
-            </a:pPr>
-            <a:r>
-              <a:rPr lang="ko-KR" altLang="en-US" sz="1600" spc="-50" dirty="0"/>
-              <a:t>따라서 누진성을 높이기 위해서는 납세자 개인의 경제적 능력에 따라 과세할 수 있는 직접세</a:t>
-            </a:r>
-            <a:r>
-              <a:rPr lang="en-US" altLang="ko-KR" sz="1600" spc="-50" dirty="0"/>
-              <a:t>, </a:t>
-            </a:r>
-            <a:r>
-              <a:rPr lang="ko-KR" altLang="en-US" sz="1600" spc="-50" dirty="0"/>
-              <a:t>특히 소득세의 비중이 높아져야 한다</a:t>
-            </a:r>
-            <a:r>
-              <a:rPr lang="en-US" altLang="ko-KR" sz="1600" spc="-50" dirty="0"/>
-              <a:t>.</a:t>
-            </a:r>
-          </a:p>
-        </p:txBody>
-      </p:sp>
-    </p:spTree>
-    <p:extLst>
-      <p:ext uri="{BB962C8B-B14F-4D97-AF65-F5344CB8AC3E}">
-        <p14:creationId xmlns:p14="http://schemas.microsoft.com/office/powerpoint/2010/main" val="1820932550"/>
-      </p:ext>
-    </p:extLst>
-  </p:cSld>
-  <p:clrMapOvr>
-    <a:masterClrMapping/>
-  </p:clrMapOvr>
-</p:sld>
-</file>
-
-<file path=ppt/slides/slide29.xml><?xml version="1.0" encoding="utf-8"?>
-<p:sld xmlns:a="http://schemas.openxmlformats.org/drawingml/2006/main" xmlns:r="http://schemas.openxmlformats.org/officeDocument/2006/relationships" xmlns:p="http://schemas.openxmlformats.org/presentationml/2006/main">
-  <p:cSld>
-    <p:spTree>
-      <p:nvGrpSpPr>
-        <p:cNvPr id="1" name="">
-          <a:extLst>
-            <a:ext uri="{FF2B5EF4-FFF2-40B4-BE49-F238E27FC236}">
-              <a16:creationId xmlns:a16="http://schemas.microsoft.com/office/drawing/2014/main" id="{8A290E10-2542-5AE1-D9DE-830619EB70D3}"/>
-            </a:ext>
-          </a:extLst>
-        </p:cNvPr>
-        <p:cNvGrpSpPr/>
-        <p:nvPr/>
-      </p:nvGrpSpPr>
-      <p:grpSpPr>
-        <a:xfrm>
-          <a:off x="0" y="0"/>
-          <a:ext cx="0" cy="0"/>
-          <a:chOff x="0" y="0"/>
-          <a:chExt cx="0" cy="0"/>
-        </a:xfrm>
-      </p:grpSpPr>
-      <p:sp>
-        <p:nvSpPr>
-          <p:cNvPr id="2" name="제목 1">
-            <a:extLst>
-              <a:ext uri="{FF2B5EF4-FFF2-40B4-BE49-F238E27FC236}">
-                <a16:creationId xmlns:a16="http://schemas.microsoft.com/office/drawing/2014/main" id="{8A4DC9EC-457C-BC16-89BE-73BDE3A83BED}"/>
-              </a:ext>
-            </a:extLst>
-          </p:cNvPr>
-          <p:cNvSpPr>
-            <a:spLocks noGrp="1"/>
-          </p:cNvSpPr>
-          <p:nvPr>
-            <p:ph type="title"/>
-          </p:nvPr>
-        </p:nvSpPr>
-        <p:spPr/>
-        <p:txBody>
-          <a:bodyPr/>
-          <a:lstStyle/>
-          <a:p>
-            <a:r>
-              <a:rPr lang="ko-KR" altLang="en-US" dirty="0"/>
-              <a:t>일반적 조세제도</a:t>
-            </a:r>
-          </a:p>
-        </p:txBody>
-      </p:sp>
-      <p:sp>
-        <p:nvSpPr>
-          <p:cNvPr id="4" name="슬라이드 번호 개체 틀 3">
-            <a:extLst>
-              <a:ext uri="{FF2B5EF4-FFF2-40B4-BE49-F238E27FC236}">
-                <a16:creationId xmlns:a16="http://schemas.microsoft.com/office/drawing/2014/main" id="{B18F1FB6-A978-6487-18EC-1377D9AF5B8D}"/>
-              </a:ext>
-            </a:extLst>
-          </p:cNvPr>
-          <p:cNvSpPr>
-            <a:spLocks noGrp="1"/>
-          </p:cNvSpPr>
-          <p:nvPr>
-            <p:ph type="sldNum" sz="quarter" idx="12"/>
-          </p:nvPr>
-        </p:nvSpPr>
-        <p:spPr/>
-        <p:txBody>
-          <a:bodyPr/>
-          <a:lstStyle/>
-          <a:p>
-            <a:fld id="{109C872D-39A9-4065-8BF3-6A613116E2A1}" type="slidenum">
-              <a:rPr lang="ko-KR" altLang="en-US" smtClean="0"/>
-              <a:t>29</a:t>
-            </a:fld>
-            <a:endParaRPr lang="ko-KR" altLang="en-US"/>
-          </a:p>
-        </p:txBody>
-      </p:sp>
-      <p:sp>
-        <p:nvSpPr>
-          <p:cNvPr id="3" name="TextBox 2">
-            <a:extLst>
-              <a:ext uri="{FF2B5EF4-FFF2-40B4-BE49-F238E27FC236}">
-                <a16:creationId xmlns:a16="http://schemas.microsoft.com/office/drawing/2014/main" id="{1733921C-1B1E-4481-1DE9-E6AFF2F286E6}"/>
-              </a:ext>
-            </a:extLst>
-          </p:cNvPr>
-          <p:cNvSpPr txBox="1"/>
-          <p:nvPr/>
-        </p:nvSpPr>
-        <p:spPr>
-          <a:xfrm>
-            <a:off x="288790" y="958844"/>
-            <a:ext cx="11250267" cy="5584670"/>
-          </a:xfrm>
-          <a:prstGeom prst="rect">
-            <a:avLst/>
-          </a:prstGeom>
-          <a:noFill/>
-        </p:spPr>
-        <p:txBody>
-          <a:bodyPr wrap="square" rtlCol="0" anchor="t">
-            <a:spAutoFit/>
-          </a:bodyPr>
-          <a:lstStyle/>
-          <a:p>
-            <a:pPr marL="377825" indent="-285750">
-              <a:lnSpc>
-                <a:spcPct val="150000"/>
-              </a:lnSpc>
-              <a:buFont typeface="Arial" panose="020B0604020202020204" pitchFamily="34" charset="0"/>
-              <a:buChar char="•"/>
-            </a:pPr>
-            <a:r>
-              <a:rPr lang="ko-KR" altLang="en-US" sz="1600" spc="-50" dirty="0"/>
-              <a:t>하지만 소득세의 비중이 높아진다고</a:t>
-            </a:r>
-            <a:r>
-              <a:rPr lang="en-US" altLang="ko-KR" sz="1600" spc="-50" dirty="0"/>
-              <a:t>, </a:t>
-            </a:r>
-            <a:r>
-              <a:rPr lang="ko-KR" altLang="en-US" sz="1600" spc="-50" dirty="0"/>
-              <a:t>반드시 조세제도 전반의 누진성이 커진다고 말하기는 힘들다</a:t>
-            </a:r>
-            <a:r>
-              <a:rPr lang="en-US" altLang="ko-KR" sz="1600" spc="-50" dirty="0"/>
-              <a:t>.</a:t>
-            </a:r>
-          </a:p>
-          <a:p>
-            <a:pPr marL="377825" indent="-285750">
-              <a:lnSpc>
-                <a:spcPct val="150000"/>
-              </a:lnSpc>
-              <a:buFont typeface="Arial" panose="020B0604020202020204" pitchFamily="34" charset="0"/>
-              <a:buChar char="•"/>
-            </a:pPr>
-            <a:r>
-              <a:rPr lang="ko-KR" altLang="en-US" sz="1600" spc="-50" dirty="0"/>
-              <a:t>실제로 우리나라를 포함한 대부분의 나라는 소득세율 구조가 겉으로 보기엔 상당한 누진성을 갖고 있다</a:t>
-            </a:r>
-            <a:r>
-              <a:rPr lang="en-US" altLang="ko-KR" sz="1600" spc="-50" dirty="0"/>
-              <a:t>.</a:t>
-            </a:r>
-          </a:p>
-          <a:p>
-            <a:pPr marL="377825" indent="-285750">
-              <a:lnSpc>
-                <a:spcPct val="150000"/>
-              </a:lnSpc>
-              <a:buFont typeface="Arial" panose="020B0604020202020204" pitchFamily="34" charset="0"/>
-              <a:buChar char="•"/>
-            </a:pPr>
-            <a:endParaRPr lang="en-US" altLang="ko-KR" sz="1600" spc="-50" dirty="0"/>
-          </a:p>
-          <a:p>
-            <a:pPr marL="377825" indent="-285750">
-              <a:lnSpc>
-                <a:spcPct val="150000"/>
-              </a:lnSpc>
-              <a:buFont typeface="Arial" panose="020B0604020202020204" pitchFamily="34" charset="0"/>
-              <a:buChar char="•"/>
-            </a:pPr>
-            <a:endParaRPr lang="en-US" altLang="ko-KR" sz="1600" spc="-50" dirty="0"/>
-          </a:p>
-          <a:p>
-            <a:pPr marL="377825" indent="-285750">
-              <a:lnSpc>
-                <a:spcPct val="150000"/>
-              </a:lnSpc>
-              <a:buFont typeface="Arial" panose="020B0604020202020204" pitchFamily="34" charset="0"/>
-              <a:buChar char="•"/>
-            </a:pPr>
-            <a:endParaRPr lang="en-US" altLang="ko-KR" sz="1600" spc="-50" dirty="0"/>
-          </a:p>
-          <a:p>
-            <a:pPr marL="377825" indent="-285750">
-              <a:lnSpc>
-                <a:spcPct val="150000"/>
-              </a:lnSpc>
-              <a:buFont typeface="Arial" panose="020B0604020202020204" pitchFamily="34" charset="0"/>
-              <a:buChar char="•"/>
-            </a:pPr>
-            <a:endParaRPr lang="en-US" altLang="ko-KR" sz="1600" spc="-50" dirty="0"/>
-          </a:p>
-          <a:p>
-            <a:pPr marL="377825" indent="-285750">
-              <a:lnSpc>
-                <a:spcPct val="150000"/>
-              </a:lnSpc>
-              <a:buFont typeface="Arial" panose="020B0604020202020204" pitchFamily="34" charset="0"/>
-              <a:buChar char="•"/>
-            </a:pPr>
-            <a:endParaRPr lang="en-US" altLang="ko-KR" sz="1600" spc="-50" dirty="0"/>
-          </a:p>
-          <a:p>
-            <a:pPr marL="377825" indent="-285750">
-              <a:lnSpc>
-                <a:spcPct val="150000"/>
-              </a:lnSpc>
-              <a:buFont typeface="Arial" panose="020B0604020202020204" pitchFamily="34" charset="0"/>
-              <a:buChar char="•"/>
-            </a:pPr>
-            <a:endParaRPr lang="en-US" altLang="ko-KR" sz="1600" spc="-50" dirty="0"/>
-          </a:p>
-          <a:p>
-            <a:pPr marL="835025" lvl="1" indent="-285750">
-              <a:lnSpc>
-                <a:spcPct val="150000"/>
-              </a:lnSpc>
-              <a:buFont typeface="Wingdings" panose="05000000000000000000" pitchFamily="2" charset="2"/>
-              <a:buChar char="ü"/>
-            </a:pPr>
-            <a:r>
-              <a:rPr lang="ko-KR" altLang="en-US" sz="1600" spc="-50" dirty="0"/>
-              <a:t>그러나 실제 소득세 부담은 소득세의 세율 뿐만 아니라 공제제도에 의해서도 영향을 많이 받는다</a:t>
-            </a:r>
-            <a:r>
-              <a:rPr lang="en-US" altLang="ko-KR" sz="1600" spc="-50" dirty="0"/>
-              <a:t>.</a:t>
-            </a:r>
-          </a:p>
-          <a:p>
-            <a:pPr marL="1292225" lvl="2" indent="-285750">
-              <a:lnSpc>
-                <a:spcPct val="150000"/>
-              </a:lnSpc>
-              <a:buFont typeface="Wingdings" panose="05000000000000000000" pitchFamily="2" charset="2"/>
-              <a:buChar char="Ø"/>
-            </a:pPr>
-            <a:r>
-              <a:rPr lang="ko-KR" altLang="en-US" sz="1600" spc="-50" dirty="0"/>
-              <a:t>부유층은 조세를 회피할 수 있는 수단이 많기 때문에</a:t>
-            </a:r>
-            <a:r>
-              <a:rPr lang="en-US" altLang="ko-KR" sz="1600" spc="-50" dirty="0"/>
-              <a:t>, </a:t>
-            </a:r>
-            <a:r>
-              <a:rPr lang="ko-KR" altLang="en-US" sz="1600" spc="-50" dirty="0"/>
-              <a:t>실제로 소득세 부담의 분배는 보통 누진적이지 않다</a:t>
-            </a:r>
-            <a:r>
-              <a:rPr lang="en-US" altLang="ko-KR" sz="1600" spc="-50" dirty="0"/>
-              <a:t>.</a:t>
-            </a:r>
-          </a:p>
-          <a:p>
-            <a:pPr marL="377825" indent="-285750">
-              <a:lnSpc>
-                <a:spcPct val="150000"/>
-              </a:lnSpc>
-              <a:buFont typeface="Arial" panose="020B0604020202020204" pitchFamily="34" charset="0"/>
-              <a:buChar char="•"/>
-            </a:pPr>
-            <a:r>
-              <a:rPr lang="ko-KR" altLang="en-US" sz="1600" spc="-50" dirty="0"/>
-              <a:t>우리나라의 경우</a:t>
-            </a:r>
-            <a:r>
-              <a:rPr lang="en-US" altLang="ko-KR" sz="1600" spc="-50" dirty="0"/>
-              <a:t>, </a:t>
-            </a:r>
-            <a:r>
-              <a:rPr lang="ko-KR" altLang="en-US" sz="1600" spc="-50" dirty="0"/>
-              <a:t>근로소득자들만 세금을 충실히 납부하며</a:t>
-            </a:r>
-            <a:r>
-              <a:rPr lang="en-US" altLang="ko-KR" sz="1600" spc="-50" dirty="0"/>
-              <a:t>, </a:t>
-            </a:r>
-            <a:r>
-              <a:rPr lang="ko-KR" altLang="en-US" sz="1600" spc="-50" dirty="0"/>
-              <a:t>다른 유형의 소득을 얻는 사람들은 탈세하는 정도가 크다고 알려져 있다</a:t>
-            </a:r>
-            <a:r>
-              <a:rPr lang="en-US" altLang="ko-KR" sz="1600" spc="-50" dirty="0"/>
-              <a:t>.</a:t>
-            </a:r>
-          </a:p>
-          <a:p>
-            <a:pPr marL="835025" lvl="1" indent="-285750">
-              <a:lnSpc>
-                <a:spcPct val="150000"/>
-              </a:lnSpc>
-              <a:buFont typeface="Wingdings" panose="05000000000000000000" pitchFamily="2" charset="2"/>
-              <a:buChar char="ü"/>
-            </a:pPr>
-            <a:r>
-              <a:rPr lang="ko-KR" altLang="en-US" sz="1600" spc="-50" dirty="0"/>
-              <a:t>이들 대부분이 부유층이라는 사실을 고려하면</a:t>
-            </a:r>
-            <a:r>
-              <a:rPr lang="en-US" altLang="ko-KR" sz="1600" spc="-50" dirty="0"/>
-              <a:t>, </a:t>
-            </a:r>
-            <a:r>
-              <a:rPr lang="ko-KR" altLang="en-US" sz="1600" spc="-50" dirty="0"/>
-              <a:t>소득세의 누진성은 실질적으로 크지 않다고 볼 수 있다</a:t>
-            </a:r>
-            <a:r>
-              <a:rPr lang="en-US" altLang="ko-KR" sz="1600" spc="-50" dirty="0"/>
-              <a:t>.</a:t>
-            </a:r>
-          </a:p>
-          <a:p>
-            <a:pPr marL="377825" indent="-285750">
-              <a:lnSpc>
-                <a:spcPct val="150000"/>
-              </a:lnSpc>
-              <a:buFont typeface="Arial" panose="020B0604020202020204" pitchFamily="34" charset="0"/>
-              <a:buChar char="•"/>
-            </a:pPr>
-            <a:r>
-              <a:rPr lang="ko-KR" altLang="en-US" sz="1600" spc="-50" dirty="0"/>
-              <a:t>뿐만 아니라 전체 세수에서 소득세가 차지하는 비중이 </a:t>
-            </a:r>
-            <a:r>
-              <a:rPr lang="en-US" altLang="ko-KR" sz="1600" spc="-50" dirty="0"/>
-              <a:t>35%</a:t>
-            </a:r>
-            <a:r>
-              <a:rPr lang="ko-KR" altLang="en-US" sz="1600" spc="-50" dirty="0"/>
-              <a:t>에도 못 미치고 있어</a:t>
-            </a:r>
-            <a:r>
-              <a:rPr lang="en-US" altLang="ko-KR" sz="1600" spc="-50" dirty="0"/>
-              <a:t>, </a:t>
-            </a:r>
-            <a:r>
-              <a:rPr lang="ko-KR" altLang="en-US" sz="1600" spc="-50" dirty="0"/>
-              <a:t>조세제도 전반의 누진성은 그리 크지 못한 실정이다</a:t>
-            </a:r>
-            <a:r>
-              <a:rPr lang="en-US" altLang="ko-KR" sz="1600" spc="-50" dirty="0"/>
-              <a:t>.</a:t>
-            </a:r>
-          </a:p>
-        </p:txBody>
-      </p:sp>
-      <p:pic>
-        <p:nvPicPr>
-          <p:cNvPr id="6" name="그림 5">
-            <a:extLst>
-              <a:ext uri="{FF2B5EF4-FFF2-40B4-BE49-F238E27FC236}">
-                <a16:creationId xmlns:a16="http://schemas.microsoft.com/office/drawing/2014/main" id="{AE8C1D82-B3A8-5F1E-5714-BF87AD4F521E}"/>
-              </a:ext>
-            </a:extLst>
-          </p:cNvPr>
-          <p:cNvPicPr>
-            <a:picLocks noChangeAspect="1"/>
-          </p:cNvPicPr>
-          <p:nvPr/>
-        </p:nvPicPr>
-        <p:blipFill>
-          <a:blip r:embed="rId2"/>
-          <a:stretch>
-            <a:fillRect/>
-          </a:stretch>
-        </p:blipFill>
-        <p:spPr>
-          <a:xfrm>
-            <a:off x="2431781" y="1841679"/>
-            <a:ext cx="5209849" cy="1689426"/>
-          </a:xfrm>
-          <a:prstGeom prst="rect">
-            <a:avLst/>
-          </a:prstGeom>
-        </p:spPr>
-      </p:pic>
-      <p:sp>
-        <p:nvSpPr>
-          <p:cNvPr id="8" name="TextBox 7">
-            <a:extLst>
-              <a:ext uri="{FF2B5EF4-FFF2-40B4-BE49-F238E27FC236}">
-                <a16:creationId xmlns:a16="http://schemas.microsoft.com/office/drawing/2014/main" id="{E06DD46B-01CB-9203-93AF-9438509617C5}"/>
-              </a:ext>
-            </a:extLst>
-          </p:cNvPr>
-          <p:cNvSpPr txBox="1"/>
-          <p:nvPr/>
-        </p:nvSpPr>
-        <p:spPr>
-          <a:xfrm>
-            <a:off x="2431781" y="3537692"/>
-            <a:ext cx="4030014" cy="215444"/>
-          </a:xfrm>
-          <a:prstGeom prst="rect">
-            <a:avLst/>
-          </a:prstGeom>
-          <a:noFill/>
-        </p:spPr>
-        <p:txBody>
-          <a:bodyPr wrap="square">
-            <a:spAutoFit/>
-          </a:bodyPr>
-          <a:lstStyle/>
-          <a:p>
-            <a:r>
-              <a:rPr lang="ko-KR" altLang="en-US" sz="800" dirty="0"/>
-              <a:t>출처</a:t>
-            </a:r>
-            <a:r>
-              <a:rPr lang="en-US" altLang="ko-KR" sz="800" dirty="0"/>
-              <a:t>: </a:t>
-            </a:r>
-            <a:r>
-              <a:rPr lang="ko-KR" altLang="en-US" sz="800" dirty="0"/>
-              <a:t>https://www.nts.go.kr/nts/cm/cntnts/cntntsView.do?mi=2227&amp;cntntsId=7667</a:t>
-            </a:r>
-          </a:p>
-        </p:txBody>
-      </p:sp>
-    </p:spTree>
-    <p:extLst>
-      <p:ext uri="{BB962C8B-B14F-4D97-AF65-F5344CB8AC3E}">
-        <p14:creationId xmlns:p14="http://schemas.microsoft.com/office/powerpoint/2010/main" val="3629519005"/>
       </p:ext>
     </p:extLst>
   </p:cSld>
@@ -13043,6 +14395,1228 @@
         <p:cNvPr id="1" name="">
           <a:extLst>
             <a:ext uri="{FF2B5EF4-FFF2-40B4-BE49-F238E27FC236}">
+              <a16:creationId xmlns:a16="http://schemas.microsoft.com/office/drawing/2014/main" id="{075FB47C-3726-C9E0-C9E7-FFDDE3209977}"/>
+            </a:ext>
+          </a:extLst>
+        </p:cNvPr>
+        <p:cNvGrpSpPr/>
+        <p:nvPr/>
+      </p:nvGrpSpPr>
+      <p:grpSpPr>
+        <a:xfrm>
+          <a:off x="0" y="0"/>
+          <a:ext cx="0" cy="0"/>
+          <a:chOff x="0" y="0"/>
+          <a:chExt cx="0" cy="0"/>
+        </a:xfrm>
+      </p:grpSpPr>
+      <p:sp>
+        <p:nvSpPr>
+          <p:cNvPr id="2" name="제목 1">
+            <a:extLst>
+              <a:ext uri="{FF2B5EF4-FFF2-40B4-BE49-F238E27FC236}">
+                <a16:creationId xmlns:a16="http://schemas.microsoft.com/office/drawing/2014/main" id="{7C7B97E2-F210-8875-7AB5-10FD09DA1557}"/>
+              </a:ext>
+            </a:extLst>
+          </p:cNvPr>
+          <p:cNvSpPr>
+            <a:spLocks noGrp="1"/>
+          </p:cNvSpPr>
+          <p:nvPr>
+            <p:ph type="title"/>
+          </p:nvPr>
+        </p:nvSpPr>
+        <p:spPr/>
+        <p:txBody>
+          <a:bodyPr/>
+          <a:lstStyle/>
+          <a:p>
+            <a:r>
+              <a:rPr lang="ko-KR" altLang="en-US" dirty="0"/>
+              <a:t>재분배정책에 대한 찬반의견</a:t>
+            </a:r>
+          </a:p>
+        </p:txBody>
+      </p:sp>
+      <p:sp>
+        <p:nvSpPr>
+          <p:cNvPr id="4" name="슬라이드 번호 개체 틀 3">
+            <a:extLst>
+              <a:ext uri="{FF2B5EF4-FFF2-40B4-BE49-F238E27FC236}">
+                <a16:creationId xmlns:a16="http://schemas.microsoft.com/office/drawing/2014/main" id="{72F91DFC-EAD3-E4FF-030C-0E96EA359B8B}"/>
+              </a:ext>
+            </a:extLst>
+          </p:cNvPr>
+          <p:cNvSpPr>
+            <a:spLocks noGrp="1"/>
+          </p:cNvSpPr>
+          <p:nvPr>
+            <p:ph type="sldNum" sz="quarter" idx="12"/>
+          </p:nvPr>
+        </p:nvSpPr>
+        <p:spPr/>
+        <p:txBody>
+          <a:bodyPr/>
+          <a:lstStyle/>
+          <a:p>
+            <a:fld id="{109C872D-39A9-4065-8BF3-6A613116E2A1}" type="slidenum">
+              <a:rPr lang="ko-KR" altLang="en-US" smtClean="0"/>
+              <a:t>30</a:t>
+            </a:fld>
+            <a:endParaRPr lang="ko-KR" altLang="en-US"/>
+          </a:p>
+        </p:txBody>
+      </p:sp>
+      <p:sp>
+        <p:nvSpPr>
+          <p:cNvPr id="3" name="TextBox 2">
+            <a:extLst>
+              <a:ext uri="{FF2B5EF4-FFF2-40B4-BE49-F238E27FC236}">
+                <a16:creationId xmlns:a16="http://schemas.microsoft.com/office/drawing/2014/main" id="{3509C429-DA59-D9FA-5751-536773D5059C}"/>
+              </a:ext>
+            </a:extLst>
+          </p:cNvPr>
+          <p:cNvSpPr txBox="1"/>
+          <p:nvPr/>
+        </p:nvSpPr>
+        <p:spPr>
+          <a:xfrm>
+            <a:off x="288790" y="958844"/>
+            <a:ext cx="11250267" cy="2999347"/>
+          </a:xfrm>
+          <a:prstGeom prst="rect">
+            <a:avLst/>
+          </a:prstGeom>
+          <a:noFill/>
+        </p:spPr>
+        <p:txBody>
+          <a:bodyPr wrap="square" rtlCol="0" anchor="t">
+            <a:spAutoFit/>
+          </a:bodyPr>
+          <a:lstStyle/>
+          <a:p>
+            <a:pPr marL="434975" indent="-342900">
+              <a:lnSpc>
+                <a:spcPct val="150000"/>
+              </a:lnSpc>
+              <a:buFont typeface="+mj-lt"/>
+              <a:buAutoNum type="arabicPeriod" startAt="3"/>
+            </a:pPr>
+            <a:r>
+              <a:rPr lang="ko-KR" altLang="en-US" sz="1600" b="1" spc="-50" dirty="0" err="1"/>
+              <a:t>사회보험으로서의</a:t>
+            </a:r>
+            <a:r>
+              <a:rPr lang="ko-KR" altLang="en-US" sz="1600" b="1" spc="-50" dirty="0"/>
+              <a:t> 재분배</a:t>
+            </a:r>
+            <a:r>
+              <a:rPr lang="en-US" altLang="ko-KR" sz="1600" spc="-50" dirty="0"/>
+              <a:t>: </a:t>
+            </a:r>
+            <a:r>
+              <a:rPr lang="ko-KR" altLang="en-US" sz="1600" spc="-50" dirty="0"/>
+              <a:t>재분배정책을 사회보험이라는 관점에서 정당화하고자 하는 시도도 있다</a:t>
+            </a:r>
+            <a:r>
+              <a:rPr lang="en-US" altLang="ko-KR" sz="1600" spc="-50" dirty="0"/>
+              <a:t>.</a:t>
+            </a:r>
+          </a:p>
+          <a:p>
+            <a:pPr marL="892175" lvl="1" indent="-342900">
+              <a:lnSpc>
+                <a:spcPct val="150000"/>
+              </a:lnSpc>
+              <a:buFont typeface="Wingdings" panose="05000000000000000000" pitchFamily="2" charset="2"/>
+              <a:buChar char="ü"/>
+            </a:pPr>
+            <a:r>
+              <a:rPr lang="ko-KR" altLang="en-US" sz="1600" spc="-50" dirty="0"/>
+              <a:t>우리는 뜻하지 않은 일로</a:t>
+            </a:r>
+            <a:r>
+              <a:rPr lang="en-US" altLang="ko-KR" sz="1600" spc="-50" dirty="0"/>
+              <a:t>, </a:t>
+            </a:r>
+            <a:r>
+              <a:rPr lang="ko-KR" altLang="en-US" sz="1600" spc="-50" dirty="0"/>
+              <a:t>빈곤해질 수 있는 가능성을 항상 가지고 있다</a:t>
+            </a:r>
+            <a:r>
+              <a:rPr lang="en-US" altLang="ko-KR" sz="1600" spc="-50" dirty="0"/>
+              <a:t>.</a:t>
+            </a:r>
+          </a:p>
+          <a:p>
+            <a:pPr marL="892175" lvl="1" indent="-342900">
+              <a:lnSpc>
+                <a:spcPct val="150000"/>
+              </a:lnSpc>
+              <a:buFont typeface="Wingdings" panose="05000000000000000000" pitchFamily="2" charset="2"/>
+              <a:buChar char="ü"/>
+            </a:pPr>
+            <a:r>
+              <a:rPr lang="ko-KR" altLang="en-US" sz="1600" spc="-50" dirty="0"/>
+              <a:t>이런 경우를 대비하는 차원에서 재분배 정책은 일종의 사회적 안전장치를 마련해 놓는 것이다</a:t>
+            </a:r>
+            <a:r>
+              <a:rPr lang="en-US" altLang="ko-KR" sz="1600" spc="-50" dirty="0"/>
+              <a:t>.</a:t>
+            </a:r>
+          </a:p>
+          <a:p>
+            <a:pPr marL="434975" indent="-342900">
+              <a:lnSpc>
+                <a:spcPct val="150000"/>
+              </a:lnSpc>
+              <a:buFont typeface="+mj-lt"/>
+              <a:buAutoNum type="arabicPeriod" startAt="3"/>
+            </a:pPr>
+            <a:endParaRPr lang="en-US" altLang="ko-KR" sz="1600" spc="-50" dirty="0"/>
+          </a:p>
+          <a:p>
+            <a:pPr marL="434975" indent="-342900">
+              <a:lnSpc>
+                <a:spcPct val="150000"/>
+              </a:lnSpc>
+              <a:buFont typeface="+mj-lt"/>
+              <a:buAutoNum type="arabicPeriod" startAt="3"/>
+            </a:pPr>
+            <a:r>
+              <a:rPr lang="ko-KR" altLang="en-US" sz="1600" b="1" spc="-50" dirty="0"/>
+              <a:t>정치적 관점</a:t>
+            </a:r>
+            <a:r>
+              <a:rPr lang="en-US" altLang="ko-KR" sz="1600" spc="-50" dirty="0"/>
+              <a:t>: </a:t>
+            </a:r>
+            <a:r>
+              <a:rPr lang="ko-KR" altLang="en-US" sz="1600" spc="-50" dirty="0"/>
+              <a:t>어떤 사람이 부유하다는 것은 경제적 자원 뿐만 아니라 정치적 권력을 더 많이 갖고 있음을 의미한다</a:t>
+            </a:r>
+            <a:r>
+              <a:rPr lang="en-US" altLang="ko-KR" sz="1600" spc="-50" dirty="0"/>
+              <a:t>.</a:t>
+            </a:r>
+          </a:p>
+          <a:p>
+            <a:pPr marL="892175" lvl="1" indent="-342900">
+              <a:lnSpc>
+                <a:spcPct val="150000"/>
+              </a:lnSpc>
+              <a:buFont typeface="Wingdings" panose="05000000000000000000" pitchFamily="2" charset="2"/>
+              <a:buChar char="ü"/>
+            </a:pPr>
+            <a:r>
+              <a:rPr lang="ko-KR" altLang="en-US" sz="1600" spc="-50" dirty="0"/>
+              <a:t>이를 바탕으로 보면 부가 소수에 집중되어 있을 때 정치적 권력도 소수에 집중되는 결과를 낳게 된다</a:t>
+            </a:r>
+            <a:r>
+              <a:rPr lang="en-US" altLang="ko-KR" sz="1600" spc="-50" dirty="0"/>
+              <a:t>.</a:t>
+            </a:r>
+          </a:p>
+          <a:p>
+            <a:pPr marL="892175" lvl="1" indent="-342900">
+              <a:lnSpc>
+                <a:spcPct val="150000"/>
+              </a:lnSpc>
+              <a:buFont typeface="Wingdings" panose="05000000000000000000" pitchFamily="2" charset="2"/>
+              <a:buChar char="ü"/>
+            </a:pPr>
+            <a:r>
+              <a:rPr lang="ko-KR" altLang="en-US" sz="1600" spc="-50" dirty="0"/>
+              <a:t>부당한 권력의 집중을 방지하기 위해서는 재분배정책을 통해 부를 과감하게 분산시켜 정치적 권력도 함께 분산 시키는 것이 필요하다는 주장이다</a:t>
+            </a:r>
+            <a:r>
+              <a:rPr lang="en-US" altLang="ko-KR" sz="1600" spc="-50" dirty="0"/>
+              <a:t>.</a:t>
+            </a:r>
+          </a:p>
+        </p:txBody>
+      </p:sp>
+    </p:spTree>
+    <p:extLst>
+      <p:ext uri="{BB962C8B-B14F-4D97-AF65-F5344CB8AC3E}">
+        <p14:creationId xmlns:p14="http://schemas.microsoft.com/office/powerpoint/2010/main" val="4018274826"/>
+      </p:ext>
+    </p:extLst>
+  </p:cSld>
+  <p:clrMapOvr>
+    <a:masterClrMapping/>
+  </p:clrMapOvr>
+</p:sld>
+</file>
+
+<file path=ppt/slides/slide31.xml><?xml version="1.0" encoding="utf-8"?>
+<p:sld xmlns:a="http://schemas.openxmlformats.org/drawingml/2006/main" xmlns:r="http://schemas.openxmlformats.org/officeDocument/2006/relationships" xmlns:p="http://schemas.openxmlformats.org/presentationml/2006/main">
+  <p:cSld>
+    <p:spTree>
+      <p:nvGrpSpPr>
+        <p:cNvPr id="1" name="">
+          <a:extLst>
+            <a:ext uri="{FF2B5EF4-FFF2-40B4-BE49-F238E27FC236}">
+              <a16:creationId xmlns:a16="http://schemas.microsoft.com/office/drawing/2014/main" id="{F349E00A-5187-4C65-52E9-63306C3F89D0}"/>
+            </a:ext>
+          </a:extLst>
+        </p:cNvPr>
+        <p:cNvGrpSpPr/>
+        <p:nvPr/>
+      </p:nvGrpSpPr>
+      <p:grpSpPr>
+        <a:xfrm>
+          <a:off x="0" y="0"/>
+          <a:ext cx="0" cy="0"/>
+          <a:chOff x="0" y="0"/>
+          <a:chExt cx="0" cy="0"/>
+        </a:xfrm>
+      </p:grpSpPr>
+      <p:pic>
+        <p:nvPicPr>
+          <p:cNvPr id="6" name="그림 5" descr="텍스트, 로고, 원, 폰트이(가) 표시된 사진&#10;&#10;AI 생성 콘텐츠는 정확하지 않을 수 있습니다.">
+            <a:extLst>
+              <a:ext uri="{FF2B5EF4-FFF2-40B4-BE49-F238E27FC236}">
+                <a16:creationId xmlns:a16="http://schemas.microsoft.com/office/drawing/2014/main" id="{D156AEEF-DA17-2EC9-6260-BC326D47EF02}"/>
+              </a:ext>
+            </a:extLst>
+          </p:cNvPr>
+          <p:cNvPicPr>
+            <a:picLocks noChangeAspect="1"/>
+          </p:cNvPicPr>
+          <p:nvPr/>
+        </p:nvPicPr>
+        <p:blipFill>
+          <a:blip r:embed="rId2">
+            <a:alphaModFix amt="20000"/>
+            <a:extLst>
+              <a:ext uri="{28A0092B-C50C-407E-A947-70E740481C1C}">
+                <a14:useLocalDpi xmlns:a14="http://schemas.microsoft.com/office/drawing/2010/main" val="0"/>
+              </a:ext>
+            </a:extLst>
+          </a:blip>
+          <a:stretch>
+            <a:fillRect/>
+          </a:stretch>
+        </p:blipFill>
+        <p:spPr>
+          <a:xfrm>
+            <a:off x="4012070" y="1673061"/>
+            <a:ext cx="4167861" cy="4167861"/>
+          </a:xfrm>
+          <a:prstGeom prst="rect">
+            <a:avLst/>
+          </a:prstGeom>
+        </p:spPr>
+      </p:pic>
+      <p:sp>
+        <p:nvSpPr>
+          <p:cNvPr id="4" name="슬라이드 번호 개체 틀 3">
+            <a:extLst>
+              <a:ext uri="{FF2B5EF4-FFF2-40B4-BE49-F238E27FC236}">
+                <a16:creationId xmlns:a16="http://schemas.microsoft.com/office/drawing/2014/main" id="{CF954DBE-4BA0-6BBA-7BC4-FDCEDCD57142}"/>
+              </a:ext>
+            </a:extLst>
+          </p:cNvPr>
+          <p:cNvSpPr>
+            <a:spLocks noGrp="1"/>
+          </p:cNvSpPr>
+          <p:nvPr>
+            <p:ph type="sldNum" sz="quarter" idx="12"/>
+          </p:nvPr>
+        </p:nvSpPr>
+        <p:spPr/>
+        <p:txBody>
+          <a:bodyPr/>
+          <a:lstStyle/>
+          <a:p>
+            <a:fld id="{109C872D-39A9-4065-8BF3-6A613116E2A1}" type="slidenum">
+              <a:rPr lang="ko-KR" altLang="en-US" smtClean="0"/>
+              <a:t>31</a:t>
+            </a:fld>
+            <a:endParaRPr lang="ko-KR" altLang="en-US"/>
+          </a:p>
+        </p:txBody>
+      </p:sp>
+      <p:sp>
+        <p:nvSpPr>
+          <p:cNvPr id="7" name="제목 1">
+            <a:extLst>
+              <a:ext uri="{FF2B5EF4-FFF2-40B4-BE49-F238E27FC236}">
+                <a16:creationId xmlns:a16="http://schemas.microsoft.com/office/drawing/2014/main" id="{7DC7C092-9F83-9AEC-2DE6-4EDC5AF822F6}"/>
+              </a:ext>
+            </a:extLst>
+          </p:cNvPr>
+          <p:cNvSpPr>
+            <a:spLocks noGrp="1"/>
+          </p:cNvSpPr>
+          <p:nvPr>
+            <p:ph type="title"/>
+          </p:nvPr>
+        </p:nvSpPr>
+        <p:spPr>
+          <a:xfrm>
+            <a:off x="831850" y="3765550"/>
+            <a:ext cx="11150600" cy="652818"/>
+          </a:xfrm>
+          <a:effectLst>
+            <a:reflection blurRad="50800" stA="45000" endPos="44000" dir="5400000" sy="-100000" algn="bl" rotWithShape="0"/>
+          </a:effectLst>
+        </p:spPr>
+        <p:txBody>
+          <a:bodyPr anchor="b"/>
+          <a:lstStyle/>
+          <a:p>
+            <a:r>
+              <a:rPr lang="en-US" altLang="ko-KR" sz="4000" b="1" i="0" spc="150" dirty="0"/>
+              <a:t>Section 2. </a:t>
+            </a:r>
+            <a:r>
+              <a:rPr lang="ko-KR" altLang="en-US" sz="4000" b="1" i="0" spc="150" dirty="0"/>
+              <a:t>재분배정책의 실례</a:t>
+            </a:r>
+            <a:endParaRPr lang="ko-KR" altLang="en-US" sz="3600" i="0" spc="150" dirty="0"/>
+          </a:p>
+        </p:txBody>
+      </p:sp>
+    </p:spTree>
+    <p:extLst>
+      <p:ext uri="{BB962C8B-B14F-4D97-AF65-F5344CB8AC3E}">
+        <p14:creationId xmlns:p14="http://schemas.microsoft.com/office/powerpoint/2010/main" val="2589408965"/>
+      </p:ext>
+    </p:extLst>
+  </p:cSld>
+  <p:clrMapOvr>
+    <a:masterClrMapping/>
+  </p:clrMapOvr>
+</p:sld>
+</file>
+
+<file path=ppt/slides/slide32.xml><?xml version="1.0" encoding="utf-8"?>
+<p:sld xmlns:a="http://schemas.openxmlformats.org/drawingml/2006/main" xmlns:r="http://schemas.openxmlformats.org/officeDocument/2006/relationships" xmlns:p="http://schemas.openxmlformats.org/presentationml/2006/main">
+  <p:cSld>
+    <p:spTree>
+      <p:nvGrpSpPr>
+        <p:cNvPr id="1" name="">
+          <a:extLst>
+            <a:ext uri="{FF2B5EF4-FFF2-40B4-BE49-F238E27FC236}">
+              <a16:creationId xmlns:a16="http://schemas.microsoft.com/office/drawing/2014/main" id="{E0E281FE-0393-7988-CEC4-F037AB2003E8}"/>
+            </a:ext>
+          </a:extLst>
+        </p:cNvPr>
+        <p:cNvGrpSpPr/>
+        <p:nvPr/>
+      </p:nvGrpSpPr>
+      <p:grpSpPr>
+        <a:xfrm>
+          <a:off x="0" y="0"/>
+          <a:ext cx="0" cy="0"/>
+          <a:chOff x="0" y="0"/>
+          <a:chExt cx="0" cy="0"/>
+        </a:xfrm>
+      </p:grpSpPr>
+      <p:sp>
+        <p:nvSpPr>
+          <p:cNvPr id="2" name="제목 1">
+            <a:extLst>
+              <a:ext uri="{FF2B5EF4-FFF2-40B4-BE49-F238E27FC236}">
+                <a16:creationId xmlns:a16="http://schemas.microsoft.com/office/drawing/2014/main" id="{26D0C283-45F1-D7BE-5488-41999EE3F67C}"/>
+              </a:ext>
+            </a:extLst>
+          </p:cNvPr>
+          <p:cNvSpPr>
+            <a:spLocks noGrp="1"/>
+          </p:cNvSpPr>
+          <p:nvPr>
+            <p:ph type="title"/>
+          </p:nvPr>
+        </p:nvSpPr>
+        <p:spPr/>
+        <p:txBody>
+          <a:bodyPr/>
+          <a:lstStyle/>
+          <a:p>
+            <a:r>
+              <a:rPr lang="ko-KR" altLang="en-US" dirty="0"/>
+              <a:t>일반적 조세제도</a:t>
+            </a:r>
+          </a:p>
+        </p:txBody>
+      </p:sp>
+      <p:sp>
+        <p:nvSpPr>
+          <p:cNvPr id="4" name="슬라이드 번호 개체 틀 3">
+            <a:extLst>
+              <a:ext uri="{FF2B5EF4-FFF2-40B4-BE49-F238E27FC236}">
+                <a16:creationId xmlns:a16="http://schemas.microsoft.com/office/drawing/2014/main" id="{B2C94553-870D-29D7-F5BF-01C75520E338}"/>
+              </a:ext>
+            </a:extLst>
+          </p:cNvPr>
+          <p:cNvSpPr>
+            <a:spLocks noGrp="1"/>
+          </p:cNvSpPr>
+          <p:nvPr>
+            <p:ph type="sldNum" sz="quarter" idx="12"/>
+          </p:nvPr>
+        </p:nvSpPr>
+        <p:spPr/>
+        <p:txBody>
+          <a:bodyPr/>
+          <a:lstStyle/>
+          <a:p>
+            <a:fld id="{109C872D-39A9-4065-8BF3-6A613116E2A1}" type="slidenum">
+              <a:rPr lang="ko-KR" altLang="en-US" smtClean="0"/>
+              <a:t>32</a:t>
+            </a:fld>
+            <a:endParaRPr lang="ko-KR" altLang="en-US"/>
+          </a:p>
+        </p:txBody>
+      </p:sp>
+      <p:sp>
+        <p:nvSpPr>
+          <p:cNvPr id="3" name="TextBox 2">
+            <a:extLst>
+              <a:ext uri="{FF2B5EF4-FFF2-40B4-BE49-F238E27FC236}">
+                <a16:creationId xmlns:a16="http://schemas.microsoft.com/office/drawing/2014/main" id="{7B1167B3-202B-2970-DB6A-4115B053DB54}"/>
+              </a:ext>
+            </a:extLst>
+          </p:cNvPr>
+          <p:cNvSpPr txBox="1"/>
+          <p:nvPr/>
+        </p:nvSpPr>
+        <p:spPr>
+          <a:xfrm>
+            <a:off x="288790" y="958844"/>
+            <a:ext cx="11250267" cy="4846007"/>
+          </a:xfrm>
+          <a:prstGeom prst="rect">
+            <a:avLst/>
+          </a:prstGeom>
+          <a:noFill/>
+        </p:spPr>
+        <p:txBody>
+          <a:bodyPr wrap="square" rtlCol="0" anchor="t">
+            <a:spAutoFit/>
+          </a:bodyPr>
+          <a:lstStyle/>
+          <a:p>
+            <a:pPr marL="377825" indent="-285750">
+              <a:lnSpc>
+                <a:spcPct val="150000"/>
+              </a:lnSpc>
+              <a:buFont typeface="Arial" panose="020B0604020202020204" pitchFamily="34" charset="0"/>
+              <a:buChar char="•"/>
+            </a:pPr>
+            <a:r>
+              <a:rPr lang="ko-KR" altLang="en-US" sz="1600" spc="-50" dirty="0"/>
+              <a:t>다양한 유형의 재분배정책이 있지만</a:t>
+            </a:r>
+            <a:r>
+              <a:rPr lang="en-US" altLang="ko-KR" sz="1600" spc="-50" dirty="0"/>
+              <a:t>,</a:t>
+            </a:r>
+            <a:r>
+              <a:rPr lang="ko-KR" altLang="en-US" sz="1600" spc="-50" dirty="0"/>
+              <a:t> 우리는 아래와 같이 기본적인 정책을 살펴보자</a:t>
+            </a:r>
+            <a:r>
+              <a:rPr lang="en-US" altLang="ko-KR" sz="1600" spc="-50" dirty="0"/>
+              <a:t>.</a:t>
+            </a:r>
+          </a:p>
+          <a:p>
+            <a:pPr marL="835025" lvl="1" indent="-285750">
+              <a:lnSpc>
+                <a:spcPct val="150000"/>
+              </a:lnSpc>
+              <a:buFont typeface="Wingdings" panose="05000000000000000000" pitchFamily="2" charset="2"/>
+              <a:buChar char="ü"/>
+            </a:pPr>
+            <a:r>
+              <a:rPr lang="ko-KR" altLang="en-US" sz="1600" spc="-50" dirty="0"/>
+              <a:t>일반적 조세제도</a:t>
+            </a:r>
+            <a:r>
+              <a:rPr lang="en-US" altLang="ko-KR" sz="1600" spc="-50" dirty="0"/>
+              <a:t>, </a:t>
+            </a:r>
+            <a:r>
+              <a:rPr lang="ko-KR" altLang="en-US" sz="1600" spc="-50" dirty="0"/>
+              <a:t>사회복지제도</a:t>
+            </a:r>
+            <a:r>
+              <a:rPr lang="en-US" altLang="ko-KR" sz="1600" spc="-50" dirty="0"/>
+              <a:t>, </a:t>
+            </a:r>
+            <a:r>
+              <a:rPr lang="ko-KR" altLang="en-US" sz="1600" spc="-50" dirty="0"/>
+              <a:t>부의 소득세제</a:t>
+            </a:r>
+            <a:r>
+              <a:rPr lang="en-US" altLang="ko-KR" sz="1600" spc="-50" dirty="0"/>
+              <a:t>, </a:t>
+            </a:r>
+            <a:r>
+              <a:rPr lang="ko-KR" altLang="en-US" sz="1600" spc="-50" dirty="0"/>
+              <a:t>근로장려세제</a:t>
+            </a:r>
+            <a:r>
+              <a:rPr lang="en-US" altLang="ko-KR" sz="1600" spc="-50" dirty="0"/>
+              <a:t>, </a:t>
+            </a:r>
+            <a:r>
+              <a:rPr lang="ko-KR" altLang="en-US" sz="1600" spc="-50" dirty="0"/>
+              <a:t>기본소득제도</a:t>
+            </a:r>
+            <a:endParaRPr lang="en-US" altLang="ko-KR" sz="1600" spc="-50" dirty="0"/>
+          </a:p>
+          <a:p>
+            <a:pPr marL="377825" indent="-285750">
+              <a:lnSpc>
+                <a:spcPct val="150000"/>
+              </a:lnSpc>
+              <a:buFont typeface="Arial" panose="020B0604020202020204" pitchFamily="34" charset="0"/>
+              <a:buChar char="•"/>
+            </a:pPr>
+            <a:endParaRPr lang="en-US" altLang="ko-KR" sz="1600" spc="-50" dirty="0"/>
+          </a:p>
+          <a:p>
+            <a:pPr marL="377825" indent="-285750">
+              <a:lnSpc>
+                <a:spcPct val="150000"/>
+              </a:lnSpc>
+              <a:buFont typeface="Arial" panose="020B0604020202020204" pitchFamily="34" charset="0"/>
+              <a:buChar char="•"/>
+            </a:pPr>
+            <a:r>
+              <a:rPr lang="ko-KR" altLang="en-US" sz="1600" spc="-50" dirty="0"/>
+              <a:t>조세가 누진성을 갖는다는 것은 납세자의 소득수준이 높을수록</a:t>
+            </a:r>
+            <a:r>
+              <a:rPr lang="en-US" altLang="ko-KR" sz="1600" spc="-50" dirty="0"/>
+              <a:t>, </a:t>
+            </a:r>
+            <a:r>
+              <a:rPr lang="ko-KR" altLang="en-US" sz="1600" spc="-50" dirty="0"/>
+              <a:t>소득의 더 큰 비율을 세금으로 납부하게 된다는 의미다</a:t>
+            </a:r>
+            <a:r>
+              <a:rPr lang="en-US" altLang="ko-KR" sz="1600" spc="-50" dirty="0"/>
+              <a:t>.</a:t>
+            </a:r>
+          </a:p>
+          <a:p>
+            <a:pPr marL="835025" lvl="1" indent="-285750">
+              <a:lnSpc>
+                <a:spcPct val="150000"/>
+              </a:lnSpc>
+              <a:buFont typeface="Wingdings" panose="05000000000000000000" pitchFamily="2" charset="2"/>
+              <a:buChar char="ü"/>
+            </a:pPr>
+            <a:r>
+              <a:rPr lang="ko-KR" altLang="en-US" sz="1600" spc="-50" dirty="0"/>
+              <a:t>누진적 조세를 통해 부유층과 빈곤층 사이에 존재하는 처분가능소득의 격차 감소를 기대할 수 있다</a:t>
+            </a:r>
+            <a:r>
+              <a:rPr lang="en-US" altLang="ko-KR" sz="1600" spc="-50" dirty="0"/>
+              <a:t>.</a:t>
+            </a:r>
+          </a:p>
+          <a:p>
+            <a:pPr marL="835025" lvl="1" indent="-285750">
+              <a:lnSpc>
+                <a:spcPct val="150000"/>
+              </a:lnSpc>
+              <a:buFont typeface="Wingdings" panose="05000000000000000000" pitchFamily="2" charset="2"/>
+              <a:buChar char="ü"/>
+            </a:pPr>
+            <a:r>
+              <a:rPr lang="ko-KR" altLang="en-US" sz="1600" spc="-50" dirty="0"/>
+              <a:t>처분가능소득 격차가 줄어들기는 하지만</a:t>
+            </a:r>
+            <a:r>
+              <a:rPr lang="en-US" altLang="ko-KR" sz="1600" spc="-50" dirty="0"/>
+              <a:t>, </a:t>
+            </a:r>
+            <a:r>
+              <a:rPr lang="ko-KR" altLang="en-US" sz="1600" spc="-50" dirty="0"/>
+              <a:t>빈곤층에게 직접적인 도움을 주는 효과는 기대할 수 없다</a:t>
+            </a:r>
+            <a:r>
+              <a:rPr lang="en-US" altLang="ko-KR" sz="1600" spc="-50" dirty="0"/>
+              <a:t>.</a:t>
+            </a:r>
+          </a:p>
+          <a:p>
+            <a:pPr marL="1292225" lvl="2" indent="-285750">
+              <a:lnSpc>
+                <a:spcPct val="150000"/>
+              </a:lnSpc>
+              <a:buFont typeface="Wingdings" panose="05000000000000000000" pitchFamily="2" charset="2"/>
+              <a:buChar char="Ø"/>
+            </a:pPr>
+            <a:r>
+              <a:rPr lang="ko-KR" altLang="en-US" sz="1600" spc="-50" dirty="0"/>
+              <a:t>다만 조세수입이 정부지출로 전환되는 과정에서 빈곤층에 더 많은 혜택이 돌아가는 정책을 시행하여 빈곤층에게 간접적으로 도움이 되도록 만들 수는 있다</a:t>
+            </a:r>
+            <a:r>
+              <a:rPr lang="en-US" altLang="ko-KR" sz="1600" spc="-50" dirty="0"/>
+              <a:t>.</a:t>
+            </a:r>
+          </a:p>
+          <a:p>
+            <a:pPr marL="377825" indent="-285750">
+              <a:lnSpc>
+                <a:spcPct val="150000"/>
+              </a:lnSpc>
+              <a:buFont typeface="Arial" panose="020B0604020202020204" pitchFamily="34" charset="0"/>
+              <a:buChar char="•"/>
+            </a:pPr>
+            <a:r>
+              <a:rPr lang="ko-KR" altLang="en-US" sz="1600" spc="-50" dirty="0"/>
+              <a:t>조세제도의 특성에 따라 누진성은 달라지는데</a:t>
+            </a:r>
+            <a:r>
+              <a:rPr lang="en-US" altLang="ko-KR" sz="1600" spc="-50" dirty="0"/>
+              <a:t>, </a:t>
+            </a:r>
+            <a:r>
+              <a:rPr lang="ko-KR" altLang="en-US" sz="1600" spc="-50" dirty="0"/>
+              <a:t>누진성이 클수록 더 큰 재분배효과가 나타난다</a:t>
+            </a:r>
+            <a:r>
+              <a:rPr lang="en-US" altLang="ko-KR" sz="1600" spc="-50" dirty="0"/>
+              <a:t>.</a:t>
+            </a:r>
+          </a:p>
+          <a:p>
+            <a:pPr marL="835025" lvl="1" indent="-285750">
+              <a:lnSpc>
+                <a:spcPct val="150000"/>
+              </a:lnSpc>
+              <a:buFont typeface="Wingdings" panose="05000000000000000000" pitchFamily="2" charset="2"/>
+              <a:buChar char="ü"/>
+            </a:pPr>
+            <a:r>
+              <a:rPr lang="ko-KR" altLang="en-US" sz="1600" spc="-50" dirty="0"/>
+              <a:t>조세수입에서 간접세의 비중이 크면 누진성을 기대할 수 없어</a:t>
+            </a:r>
+            <a:r>
+              <a:rPr lang="en-US" altLang="ko-KR" sz="1600" spc="-50" dirty="0"/>
+              <a:t>, </a:t>
+            </a:r>
+            <a:r>
+              <a:rPr lang="ko-KR" altLang="en-US" sz="1600" spc="-50" dirty="0"/>
+              <a:t>재분배효과가 제한적이다</a:t>
+            </a:r>
+            <a:r>
+              <a:rPr lang="en-US" altLang="ko-KR" sz="1600" spc="-50" dirty="0"/>
+              <a:t>.</a:t>
+            </a:r>
+          </a:p>
+          <a:p>
+            <a:pPr marL="1292225" lvl="2" indent="-285750">
+              <a:lnSpc>
+                <a:spcPct val="150000"/>
+              </a:lnSpc>
+              <a:buFont typeface="Wingdings" panose="05000000000000000000" pitchFamily="2" charset="2"/>
+              <a:buChar char="Ø"/>
+            </a:pPr>
+            <a:r>
+              <a:rPr lang="ko-KR" altLang="en-US" sz="1600" spc="-50" dirty="0"/>
+              <a:t>간접세는 납세자의 특성을 고려하지 않기 때문에</a:t>
+            </a:r>
+            <a:r>
+              <a:rPr lang="en-US" altLang="ko-KR" sz="1600" spc="-50" dirty="0"/>
+              <a:t>, </a:t>
+            </a:r>
+            <a:r>
+              <a:rPr lang="ko-KR" altLang="en-US" sz="1600" spc="-50" dirty="0"/>
+              <a:t>고소득자에게 특정하여 무거운 세금 부담을 지울 길이 없다</a:t>
+            </a:r>
+            <a:r>
+              <a:rPr lang="en-US" altLang="ko-KR" sz="1600" spc="-50" dirty="0"/>
+              <a:t>.</a:t>
+            </a:r>
+          </a:p>
+          <a:p>
+            <a:pPr marL="835025" lvl="1" indent="-285750">
+              <a:lnSpc>
+                <a:spcPct val="150000"/>
+              </a:lnSpc>
+              <a:buFont typeface="Wingdings" panose="05000000000000000000" pitchFamily="2" charset="2"/>
+              <a:buChar char="ü"/>
+            </a:pPr>
+            <a:r>
+              <a:rPr lang="ko-KR" altLang="en-US" sz="1600" spc="-50" dirty="0"/>
+              <a:t>따라서 누진성을 높이기 위해서는 납세자 개인의 경제적 능력에 따라 과세할 수 있는 직접세</a:t>
+            </a:r>
+            <a:r>
+              <a:rPr lang="en-US" altLang="ko-KR" sz="1600" spc="-50" dirty="0"/>
+              <a:t>, </a:t>
+            </a:r>
+            <a:r>
+              <a:rPr lang="ko-KR" altLang="en-US" sz="1600" spc="-50" dirty="0"/>
+              <a:t>특히 소득세의 비중이 높아져야 한다</a:t>
+            </a:r>
+            <a:r>
+              <a:rPr lang="en-US" altLang="ko-KR" sz="1600" spc="-50" dirty="0"/>
+              <a:t>.</a:t>
+            </a:r>
+          </a:p>
+        </p:txBody>
+      </p:sp>
+    </p:spTree>
+    <p:extLst>
+      <p:ext uri="{BB962C8B-B14F-4D97-AF65-F5344CB8AC3E}">
+        <p14:creationId xmlns:p14="http://schemas.microsoft.com/office/powerpoint/2010/main" val="1820932550"/>
+      </p:ext>
+    </p:extLst>
+  </p:cSld>
+  <p:clrMapOvr>
+    <a:masterClrMapping/>
+  </p:clrMapOvr>
+</p:sld>
+</file>
+
+<file path=ppt/slides/slide33.xml><?xml version="1.0" encoding="utf-8"?>
+<p:sld xmlns:a="http://schemas.openxmlformats.org/drawingml/2006/main" xmlns:r="http://schemas.openxmlformats.org/officeDocument/2006/relationships" xmlns:p="http://schemas.openxmlformats.org/presentationml/2006/main">
+  <p:cSld>
+    <p:spTree>
+      <p:nvGrpSpPr>
+        <p:cNvPr id="1" name="">
+          <a:extLst>
+            <a:ext uri="{FF2B5EF4-FFF2-40B4-BE49-F238E27FC236}">
+              <a16:creationId xmlns:a16="http://schemas.microsoft.com/office/drawing/2014/main" id="{8A290E10-2542-5AE1-D9DE-830619EB70D3}"/>
+            </a:ext>
+          </a:extLst>
+        </p:cNvPr>
+        <p:cNvGrpSpPr/>
+        <p:nvPr/>
+      </p:nvGrpSpPr>
+      <p:grpSpPr>
+        <a:xfrm>
+          <a:off x="0" y="0"/>
+          <a:ext cx="0" cy="0"/>
+          <a:chOff x="0" y="0"/>
+          <a:chExt cx="0" cy="0"/>
+        </a:xfrm>
+      </p:grpSpPr>
+      <p:sp>
+        <p:nvSpPr>
+          <p:cNvPr id="2" name="제목 1">
+            <a:extLst>
+              <a:ext uri="{FF2B5EF4-FFF2-40B4-BE49-F238E27FC236}">
+                <a16:creationId xmlns:a16="http://schemas.microsoft.com/office/drawing/2014/main" id="{8A4DC9EC-457C-BC16-89BE-73BDE3A83BED}"/>
+              </a:ext>
+            </a:extLst>
+          </p:cNvPr>
+          <p:cNvSpPr>
+            <a:spLocks noGrp="1"/>
+          </p:cNvSpPr>
+          <p:nvPr>
+            <p:ph type="title"/>
+          </p:nvPr>
+        </p:nvSpPr>
+        <p:spPr/>
+        <p:txBody>
+          <a:bodyPr/>
+          <a:lstStyle/>
+          <a:p>
+            <a:r>
+              <a:rPr lang="ko-KR" altLang="en-US" dirty="0"/>
+              <a:t>일반적 조세제도</a:t>
+            </a:r>
+          </a:p>
+        </p:txBody>
+      </p:sp>
+      <p:sp>
+        <p:nvSpPr>
+          <p:cNvPr id="4" name="슬라이드 번호 개체 틀 3">
+            <a:extLst>
+              <a:ext uri="{FF2B5EF4-FFF2-40B4-BE49-F238E27FC236}">
+                <a16:creationId xmlns:a16="http://schemas.microsoft.com/office/drawing/2014/main" id="{B18F1FB6-A978-6487-18EC-1377D9AF5B8D}"/>
+              </a:ext>
+            </a:extLst>
+          </p:cNvPr>
+          <p:cNvSpPr>
+            <a:spLocks noGrp="1"/>
+          </p:cNvSpPr>
+          <p:nvPr>
+            <p:ph type="sldNum" sz="quarter" idx="12"/>
+          </p:nvPr>
+        </p:nvSpPr>
+        <p:spPr/>
+        <p:txBody>
+          <a:bodyPr/>
+          <a:lstStyle/>
+          <a:p>
+            <a:fld id="{109C872D-39A9-4065-8BF3-6A613116E2A1}" type="slidenum">
+              <a:rPr lang="ko-KR" altLang="en-US" smtClean="0"/>
+              <a:t>33</a:t>
+            </a:fld>
+            <a:endParaRPr lang="ko-KR" altLang="en-US"/>
+          </a:p>
+        </p:txBody>
+      </p:sp>
+      <p:sp>
+        <p:nvSpPr>
+          <p:cNvPr id="3" name="TextBox 2">
+            <a:extLst>
+              <a:ext uri="{FF2B5EF4-FFF2-40B4-BE49-F238E27FC236}">
+                <a16:creationId xmlns:a16="http://schemas.microsoft.com/office/drawing/2014/main" id="{1733921C-1B1E-4481-1DE9-E6AFF2F286E6}"/>
+              </a:ext>
+            </a:extLst>
+          </p:cNvPr>
+          <p:cNvSpPr txBox="1"/>
+          <p:nvPr/>
+        </p:nvSpPr>
+        <p:spPr>
+          <a:xfrm>
+            <a:off x="288790" y="958844"/>
+            <a:ext cx="11250267" cy="5584670"/>
+          </a:xfrm>
+          <a:prstGeom prst="rect">
+            <a:avLst/>
+          </a:prstGeom>
+          <a:noFill/>
+        </p:spPr>
+        <p:txBody>
+          <a:bodyPr wrap="square" rtlCol="0" anchor="t">
+            <a:spAutoFit/>
+          </a:bodyPr>
+          <a:lstStyle/>
+          <a:p>
+            <a:pPr marL="377825" indent="-285750">
+              <a:lnSpc>
+                <a:spcPct val="150000"/>
+              </a:lnSpc>
+              <a:buFont typeface="Arial" panose="020B0604020202020204" pitchFamily="34" charset="0"/>
+              <a:buChar char="•"/>
+            </a:pPr>
+            <a:r>
+              <a:rPr lang="ko-KR" altLang="en-US" sz="1600" spc="-50" dirty="0"/>
+              <a:t>하지만 소득세의 비중이 높아진다고</a:t>
+            </a:r>
+            <a:r>
+              <a:rPr lang="en-US" altLang="ko-KR" sz="1600" spc="-50" dirty="0"/>
+              <a:t>, </a:t>
+            </a:r>
+            <a:r>
+              <a:rPr lang="ko-KR" altLang="en-US" sz="1600" spc="-50" dirty="0"/>
+              <a:t>반드시 조세제도 전반의 누진성이 커진다고 말하기는 힘들다</a:t>
+            </a:r>
+            <a:r>
+              <a:rPr lang="en-US" altLang="ko-KR" sz="1600" spc="-50" dirty="0"/>
+              <a:t>.</a:t>
+            </a:r>
+          </a:p>
+          <a:p>
+            <a:pPr marL="377825" indent="-285750">
+              <a:lnSpc>
+                <a:spcPct val="150000"/>
+              </a:lnSpc>
+              <a:buFont typeface="Arial" panose="020B0604020202020204" pitchFamily="34" charset="0"/>
+              <a:buChar char="•"/>
+            </a:pPr>
+            <a:r>
+              <a:rPr lang="ko-KR" altLang="en-US" sz="1600" spc="-50" dirty="0"/>
+              <a:t>실제로 우리나라를 포함한 대부분의 나라는 소득세율 구조가 겉으로 보기엔 상당한 누진성을 갖고 있다</a:t>
+            </a:r>
+            <a:r>
+              <a:rPr lang="en-US" altLang="ko-KR" sz="1600" spc="-50" dirty="0"/>
+              <a:t>.</a:t>
+            </a:r>
+          </a:p>
+          <a:p>
+            <a:pPr marL="377825" indent="-285750">
+              <a:lnSpc>
+                <a:spcPct val="150000"/>
+              </a:lnSpc>
+              <a:buFont typeface="Arial" panose="020B0604020202020204" pitchFamily="34" charset="0"/>
+              <a:buChar char="•"/>
+            </a:pPr>
+            <a:endParaRPr lang="en-US" altLang="ko-KR" sz="1600" spc="-50" dirty="0"/>
+          </a:p>
+          <a:p>
+            <a:pPr marL="377825" indent="-285750">
+              <a:lnSpc>
+                <a:spcPct val="150000"/>
+              </a:lnSpc>
+              <a:buFont typeface="Arial" panose="020B0604020202020204" pitchFamily="34" charset="0"/>
+              <a:buChar char="•"/>
+            </a:pPr>
+            <a:endParaRPr lang="en-US" altLang="ko-KR" sz="1600" spc="-50" dirty="0"/>
+          </a:p>
+          <a:p>
+            <a:pPr marL="377825" indent="-285750">
+              <a:lnSpc>
+                <a:spcPct val="150000"/>
+              </a:lnSpc>
+              <a:buFont typeface="Arial" panose="020B0604020202020204" pitchFamily="34" charset="0"/>
+              <a:buChar char="•"/>
+            </a:pPr>
+            <a:endParaRPr lang="en-US" altLang="ko-KR" sz="1600" spc="-50" dirty="0"/>
+          </a:p>
+          <a:p>
+            <a:pPr marL="377825" indent="-285750">
+              <a:lnSpc>
+                <a:spcPct val="150000"/>
+              </a:lnSpc>
+              <a:buFont typeface="Arial" panose="020B0604020202020204" pitchFamily="34" charset="0"/>
+              <a:buChar char="•"/>
+            </a:pPr>
+            <a:endParaRPr lang="en-US" altLang="ko-KR" sz="1600" spc="-50" dirty="0"/>
+          </a:p>
+          <a:p>
+            <a:pPr marL="377825" indent="-285750">
+              <a:lnSpc>
+                <a:spcPct val="150000"/>
+              </a:lnSpc>
+              <a:buFont typeface="Arial" panose="020B0604020202020204" pitchFamily="34" charset="0"/>
+              <a:buChar char="•"/>
+            </a:pPr>
+            <a:endParaRPr lang="en-US" altLang="ko-KR" sz="1600" spc="-50" dirty="0"/>
+          </a:p>
+          <a:p>
+            <a:pPr marL="377825" indent="-285750">
+              <a:lnSpc>
+                <a:spcPct val="150000"/>
+              </a:lnSpc>
+              <a:buFont typeface="Arial" panose="020B0604020202020204" pitchFamily="34" charset="0"/>
+              <a:buChar char="•"/>
+            </a:pPr>
+            <a:endParaRPr lang="en-US" altLang="ko-KR" sz="1600" spc="-50" dirty="0"/>
+          </a:p>
+          <a:p>
+            <a:pPr marL="835025" lvl="1" indent="-285750">
+              <a:lnSpc>
+                <a:spcPct val="150000"/>
+              </a:lnSpc>
+              <a:buFont typeface="Wingdings" panose="05000000000000000000" pitchFamily="2" charset="2"/>
+              <a:buChar char="ü"/>
+            </a:pPr>
+            <a:r>
+              <a:rPr lang="ko-KR" altLang="en-US" sz="1600" spc="-50" dirty="0"/>
+              <a:t>그러나 실제 소득세 부담은 소득세의 세율 뿐만 아니라 공제제도에 의해서도 영향을 많이 받는다</a:t>
+            </a:r>
+            <a:r>
+              <a:rPr lang="en-US" altLang="ko-KR" sz="1600" spc="-50" dirty="0"/>
+              <a:t>.</a:t>
+            </a:r>
+          </a:p>
+          <a:p>
+            <a:pPr marL="1292225" lvl="2" indent="-285750">
+              <a:lnSpc>
+                <a:spcPct val="150000"/>
+              </a:lnSpc>
+              <a:buFont typeface="Wingdings" panose="05000000000000000000" pitchFamily="2" charset="2"/>
+              <a:buChar char="Ø"/>
+            </a:pPr>
+            <a:r>
+              <a:rPr lang="ko-KR" altLang="en-US" sz="1600" spc="-50" dirty="0"/>
+              <a:t>부유층은 조세를 회피할 수 있는 수단이 많기 때문에</a:t>
+            </a:r>
+            <a:r>
+              <a:rPr lang="en-US" altLang="ko-KR" sz="1600" spc="-50" dirty="0"/>
+              <a:t>, </a:t>
+            </a:r>
+            <a:r>
+              <a:rPr lang="ko-KR" altLang="en-US" sz="1600" spc="-50" dirty="0"/>
+              <a:t>실제로 소득세 부담의 분배는 보통 누진적이지 않다</a:t>
+            </a:r>
+            <a:r>
+              <a:rPr lang="en-US" altLang="ko-KR" sz="1600" spc="-50" dirty="0"/>
+              <a:t>.</a:t>
+            </a:r>
+          </a:p>
+          <a:p>
+            <a:pPr marL="377825" indent="-285750">
+              <a:lnSpc>
+                <a:spcPct val="150000"/>
+              </a:lnSpc>
+              <a:buFont typeface="Arial" panose="020B0604020202020204" pitchFamily="34" charset="0"/>
+              <a:buChar char="•"/>
+            </a:pPr>
+            <a:r>
+              <a:rPr lang="ko-KR" altLang="en-US" sz="1600" spc="-50" dirty="0"/>
+              <a:t>우리나라의 경우</a:t>
+            </a:r>
+            <a:r>
+              <a:rPr lang="en-US" altLang="ko-KR" sz="1600" spc="-50" dirty="0"/>
+              <a:t>, </a:t>
+            </a:r>
+            <a:r>
+              <a:rPr lang="ko-KR" altLang="en-US" sz="1600" spc="-50" dirty="0"/>
+              <a:t>근로소득자들만 세금을 충실히 납부하며</a:t>
+            </a:r>
+            <a:r>
+              <a:rPr lang="en-US" altLang="ko-KR" sz="1600" spc="-50" dirty="0"/>
+              <a:t>, </a:t>
+            </a:r>
+            <a:r>
+              <a:rPr lang="ko-KR" altLang="en-US" sz="1600" spc="-50" dirty="0"/>
+              <a:t>다른 유형의 소득을 얻는 사람들은 탈세하는 정도가 크다고 알려져 있다</a:t>
+            </a:r>
+            <a:r>
+              <a:rPr lang="en-US" altLang="ko-KR" sz="1600" spc="-50" dirty="0"/>
+              <a:t>.</a:t>
+            </a:r>
+          </a:p>
+          <a:p>
+            <a:pPr marL="835025" lvl="1" indent="-285750">
+              <a:lnSpc>
+                <a:spcPct val="150000"/>
+              </a:lnSpc>
+              <a:buFont typeface="Wingdings" panose="05000000000000000000" pitchFamily="2" charset="2"/>
+              <a:buChar char="ü"/>
+            </a:pPr>
+            <a:r>
+              <a:rPr lang="ko-KR" altLang="en-US" sz="1600" spc="-50" dirty="0"/>
+              <a:t>이들 대부분이 부유층이라는 사실을 고려하면</a:t>
+            </a:r>
+            <a:r>
+              <a:rPr lang="en-US" altLang="ko-KR" sz="1600" spc="-50" dirty="0"/>
+              <a:t>, </a:t>
+            </a:r>
+            <a:r>
+              <a:rPr lang="ko-KR" altLang="en-US" sz="1600" spc="-50" dirty="0"/>
+              <a:t>소득세의 누진성은 실질적으로 크지 않다고 볼 수 있다</a:t>
+            </a:r>
+            <a:r>
+              <a:rPr lang="en-US" altLang="ko-KR" sz="1600" spc="-50" dirty="0"/>
+              <a:t>.</a:t>
+            </a:r>
+          </a:p>
+          <a:p>
+            <a:pPr marL="377825" indent="-285750">
+              <a:lnSpc>
+                <a:spcPct val="150000"/>
+              </a:lnSpc>
+              <a:buFont typeface="Arial" panose="020B0604020202020204" pitchFamily="34" charset="0"/>
+              <a:buChar char="•"/>
+            </a:pPr>
+            <a:r>
+              <a:rPr lang="ko-KR" altLang="en-US" sz="1600" spc="-50" dirty="0"/>
+              <a:t>뿐만 아니라 전체 세수에서 소득세가 차지하는 비중이 </a:t>
+            </a:r>
+            <a:r>
+              <a:rPr lang="en-US" altLang="ko-KR" sz="1600" spc="-50" dirty="0"/>
+              <a:t>35%</a:t>
+            </a:r>
+            <a:r>
+              <a:rPr lang="ko-KR" altLang="en-US" sz="1600" spc="-50" dirty="0"/>
+              <a:t>에도 못 미치고 있어</a:t>
+            </a:r>
+            <a:r>
+              <a:rPr lang="en-US" altLang="ko-KR" sz="1600" spc="-50" dirty="0"/>
+              <a:t>, </a:t>
+            </a:r>
+            <a:r>
+              <a:rPr lang="ko-KR" altLang="en-US" sz="1600" spc="-50" dirty="0"/>
+              <a:t>조세제도 전반의 누진성은 그리 크지 못한 실정이다</a:t>
+            </a:r>
+            <a:r>
+              <a:rPr lang="en-US" altLang="ko-KR" sz="1600" spc="-50" dirty="0"/>
+              <a:t>.</a:t>
+            </a:r>
+          </a:p>
+        </p:txBody>
+      </p:sp>
+      <p:pic>
+        <p:nvPicPr>
+          <p:cNvPr id="6" name="그림 5">
+            <a:extLst>
+              <a:ext uri="{FF2B5EF4-FFF2-40B4-BE49-F238E27FC236}">
+                <a16:creationId xmlns:a16="http://schemas.microsoft.com/office/drawing/2014/main" id="{AE8C1D82-B3A8-5F1E-5714-BF87AD4F521E}"/>
+              </a:ext>
+            </a:extLst>
+          </p:cNvPr>
+          <p:cNvPicPr>
+            <a:picLocks noChangeAspect="1"/>
+          </p:cNvPicPr>
+          <p:nvPr/>
+        </p:nvPicPr>
+        <p:blipFill>
+          <a:blip r:embed="rId2"/>
+          <a:stretch>
+            <a:fillRect/>
+          </a:stretch>
+        </p:blipFill>
+        <p:spPr>
+          <a:xfrm>
+            <a:off x="2431781" y="1841679"/>
+            <a:ext cx="5209849" cy="1689426"/>
+          </a:xfrm>
+          <a:prstGeom prst="rect">
+            <a:avLst/>
+          </a:prstGeom>
+        </p:spPr>
+      </p:pic>
+      <p:sp>
+        <p:nvSpPr>
+          <p:cNvPr id="8" name="TextBox 7">
+            <a:extLst>
+              <a:ext uri="{FF2B5EF4-FFF2-40B4-BE49-F238E27FC236}">
+                <a16:creationId xmlns:a16="http://schemas.microsoft.com/office/drawing/2014/main" id="{E06DD46B-01CB-9203-93AF-9438509617C5}"/>
+              </a:ext>
+            </a:extLst>
+          </p:cNvPr>
+          <p:cNvSpPr txBox="1"/>
+          <p:nvPr/>
+        </p:nvSpPr>
+        <p:spPr>
+          <a:xfrm>
+            <a:off x="2431781" y="3537692"/>
+            <a:ext cx="4030014" cy="215444"/>
+          </a:xfrm>
+          <a:prstGeom prst="rect">
+            <a:avLst/>
+          </a:prstGeom>
+          <a:noFill/>
+        </p:spPr>
+        <p:txBody>
+          <a:bodyPr wrap="square">
+            <a:spAutoFit/>
+          </a:bodyPr>
+          <a:lstStyle/>
+          <a:p>
+            <a:r>
+              <a:rPr lang="ko-KR" altLang="en-US" sz="800" dirty="0"/>
+              <a:t>출처</a:t>
+            </a:r>
+            <a:r>
+              <a:rPr lang="en-US" altLang="ko-KR" sz="800" dirty="0"/>
+              <a:t>: </a:t>
+            </a:r>
+            <a:r>
+              <a:rPr lang="ko-KR" altLang="en-US" sz="800" dirty="0"/>
+              <a:t>https://www.nts.go.kr/nts/cm/cntnts/cntntsView.do?mi=2227&amp;cntntsId=7667</a:t>
+            </a:r>
+          </a:p>
+        </p:txBody>
+      </p:sp>
+    </p:spTree>
+    <p:extLst>
+      <p:ext uri="{BB962C8B-B14F-4D97-AF65-F5344CB8AC3E}">
+        <p14:creationId xmlns:p14="http://schemas.microsoft.com/office/powerpoint/2010/main" val="3629519005"/>
+      </p:ext>
+    </p:extLst>
+  </p:cSld>
+  <p:clrMapOvr>
+    <a:masterClrMapping/>
+  </p:clrMapOvr>
+</p:sld>
+</file>
+
+<file path=ppt/slides/slide34.xml><?xml version="1.0" encoding="utf-8"?>
+<p:sld xmlns:a="http://schemas.openxmlformats.org/drawingml/2006/main" xmlns:r="http://schemas.openxmlformats.org/officeDocument/2006/relationships" xmlns:p="http://schemas.openxmlformats.org/presentationml/2006/main">
+  <p:cSld>
+    <p:spTree>
+      <p:nvGrpSpPr>
+        <p:cNvPr id="1" name="">
+          <a:extLst>
+            <a:ext uri="{FF2B5EF4-FFF2-40B4-BE49-F238E27FC236}">
               <a16:creationId xmlns:a16="http://schemas.microsoft.com/office/drawing/2014/main" id="{E9D8E7BB-1BBD-5ACE-3661-E82C8BF70648}"/>
             </a:ext>
           </a:extLst>
@@ -13109,7 +15683,7 @@
           <a:p>
             <a:fld id="{109C872D-39A9-4065-8BF3-6A613116E2A1}" type="slidenum">
               <a:rPr lang="ko-KR" altLang="en-US" smtClean="0"/>
-              <a:t>30</a:t>
+              <a:t>34</a:t>
             </a:fld>
             <a:endParaRPr lang="ko-KR" altLang="en-US"/>
           </a:p>
@@ -13475,7 +16049,7 @@
 </p:sld>
 </file>
 
-<file path=ppt/slides/slide31.xml><?xml version="1.0" encoding="utf-8"?>
+<file path=ppt/slides/slide35.xml><?xml version="1.0" encoding="utf-8"?>
 <p:sld xmlns:a="http://schemas.openxmlformats.org/drawingml/2006/main" xmlns:r="http://schemas.openxmlformats.org/officeDocument/2006/relationships" xmlns:p="http://schemas.openxmlformats.org/presentationml/2006/main">
   <p:cSld>
     <p:spTree>
@@ -13549,7 +16123,7 @@
           <a:p>
             <a:fld id="{109C872D-39A9-4065-8BF3-6A613116E2A1}" type="slidenum">
               <a:rPr lang="ko-KR" altLang="en-US" smtClean="0"/>
-              <a:t>31</a:t>
+              <a:t>35</a:t>
             </a:fld>
             <a:endParaRPr lang="ko-KR" altLang="en-US"/>
           </a:p>
@@ -13921,7 +16495,7 @@
 </p:sld>
 </file>
 
-<file path=ppt/slides/slide32.xml><?xml version="1.0" encoding="utf-8"?>
+<file path=ppt/slides/slide36.xml><?xml version="1.0" encoding="utf-8"?>
 <p:sld xmlns:a="http://schemas.openxmlformats.org/drawingml/2006/main" xmlns:r="http://schemas.openxmlformats.org/officeDocument/2006/relationships" xmlns:p="http://schemas.openxmlformats.org/presentationml/2006/main">
   <p:cSld>
     <p:spTree>
@@ -13995,7 +16569,7 @@
           <a:p>
             <a:fld id="{109C872D-39A9-4065-8BF3-6A613116E2A1}" type="slidenum">
               <a:rPr lang="ko-KR" altLang="en-US" smtClean="0"/>
-              <a:t>32</a:t>
+              <a:t>36</a:t>
             </a:fld>
             <a:endParaRPr lang="ko-KR" altLang="en-US"/>
           </a:p>
@@ -14474,7 +17048,7 @@
 </p:sld>
 </file>
 
-<file path=ppt/slides/slide33.xml><?xml version="1.0" encoding="utf-8"?>
+<file path=ppt/slides/slide37.xml><?xml version="1.0" encoding="utf-8"?>
 <p:sld xmlns:a="http://schemas.openxmlformats.org/drawingml/2006/main" xmlns:r="http://schemas.openxmlformats.org/officeDocument/2006/relationships" xmlns:p="http://schemas.openxmlformats.org/presentationml/2006/main">
   <p:cSld>
     <p:spTree>
@@ -14548,7 +17122,7 @@
           <a:p>
             <a:fld id="{109C872D-39A9-4065-8BF3-6A613116E2A1}" type="slidenum">
               <a:rPr lang="ko-KR" altLang="en-US" smtClean="0"/>
-              <a:t>33</a:t>
+              <a:t>37</a:t>
             </a:fld>
             <a:endParaRPr lang="ko-KR" altLang="en-US"/>
           </a:p>
@@ -14781,7 +17355,7 @@
 </p:sld>
 </file>
 
-<file path=ppt/slides/slide34.xml><?xml version="1.0" encoding="utf-8"?>
+<file path=ppt/slides/slide38.xml><?xml version="1.0" encoding="utf-8"?>
 <p:sld xmlns:a="http://schemas.openxmlformats.org/drawingml/2006/main" xmlns:r="http://schemas.openxmlformats.org/officeDocument/2006/relationships" xmlns:p="http://schemas.openxmlformats.org/presentationml/2006/main">
   <p:cSld>
     <p:spTree>
@@ -14855,7 +17429,7 @@
           <a:p>
             <a:fld id="{109C872D-39A9-4065-8BF3-6A613116E2A1}" type="slidenum">
               <a:rPr lang="ko-KR" altLang="en-US" smtClean="0"/>
-              <a:t>34</a:t>
+              <a:t>38</a:t>
             </a:fld>
             <a:endParaRPr lang="ko-KR" altLang="en-US"/>
           </a:p>
@@ -15765,7 +18339,7 @@
 </p:sld>
 </file>
 
-<file path=ppt/slides/slide35.xml><?xml version="1.0" encoding="utf-8"?>
+<file path=ppt/slides/slide39.xml><?xml version="1.0" encoding="utf-8"?>
 <p:sld xmlns:a="http://schemas.openxmlformats.org/drawingml/2006/main" xmlns:r="http://schemas.openxmlformats.org/officeDocument/2006/relationships" xmlns:p="http://schemas.openxmlformats.org/presentationml/2006/main">
   <p:cSld>
     <p:spTree>
@@ -15839,7 +18413,7 @@
           <a:p>
             <a:fld id="{109C872D-39A9-4065-8BF3-6A613116E2A1}" type="slidenum">
               <a:rPr lang="ko-KR" altLang="en-US" smtClean="0"/>
-              <a:t>35</a:t>
+              <a:t>39</a:t>
             </a:fld>
             <a:endParaRPr lang="ko-KR" altLang="en-US"/>
           </a:p>
@@ -16135,7 +18709,447 @@
 </p:sld>
 </file>
 
-<file path=ppt/slides/slide36.xml><?xml version="1.0" encoding="utf-8"?>
+<file path=ppt/slides/slide4.xml><?xml version="1.0" encoding="utf-8"?>
+<p:sld xmlns:a="http://schemas.openxmlformats.org/drawingml/2006/main" xmlns:r="http://schemas.openxmlformats.org/officeDocument/2006/relationships" xmlns:p="http://schemas.openxmlformats.org/presentationml/2006/main">
+  <p:cSld>
+    <p:spTree>
+      <p:nvGrpSpPr>
+        <p:cNvPr id="1" name="">
+          <a:extLst>
+            <a:ext uri="{FF2B5EF4-FFF2-40B4-BE49-F238E27FC236}">
+              <a16:creationId xmlns:a16="http://schemas.microsoft.com/office/drawing/2014/main" id="{7E764ACB-B8A0-8B8E-50AE-F6949A866C73}"/>
+            </a:ext>
+          </a:extLst>
+        </p:cNvPr>
+        <p:cNvGrpSpPr/>
+        <p:nvPr/>
+      </p:nvGrpSpPr>
+      <p:grpSpPr>
+        <a:xfrm>
+          <a:off x="0" y="0"/>
+          <a:ext cx="0" cy="0"/>
+          <a:chOff x="0" y="0"/>
+          <a:chExt cx="0" cy="0"/>
+        </a:xfrm>
+      </p:grpSpPr>
+      <p:sp>
+        <p:nvSpPr>
+          <p:cNvPr id="2" name="제목 1">
+            <a:extLst>
+              <a:ext uri="{FF2B5EF4-FFF2-40B4-BE49-F238E27FC236}">
+                <a16:creationId xmlns:a16="http://schemas.microsoft.com/office/drawing/2014/main" id="{3B730496-A872-5CFB-3130-C4429F8285BC}"/>
+              </a:ext>
+            </a:extLst>
+          </p:cNvPr>
+          <p:cNvSpPr>
+            <a:spLocks noGrp="1"/>
+          </p:cNvSpPr>
+          <p:nvPr>
+            <p:ph type="title"/>
+          </p:nvPr>
+        </p:nvSpPr>
+        <p:spPr/>
+        <p:txBody>
+          <a:bodyPr/>
+          <a:lstStyle/>
+          <a:p>
+            <a:r>
+              <a:rPr lang="ko-KR" altLang="en-US" dirty="0"/>
+              <a:t>사회보험제도의 의미</a:t>
+            </a:r>
+          </a:p>
+        </p:txBody>
+      </p:sp>
+      <p:sp>
+        <p:nvSpPr>
+          <p:cNvPr id="4" name="슬라이드 번호 개체 틀 3">
+            <a:extLst>
+              <a:ext uri="{FF2B5EF4-FFF2-40B4-BE49-F238E27FC236}">
+                <a16:creationId xmlns:a16="http://schemas.microsoft.com/office/drawing/2014/main" id="{CBD72302-C21E-82F3-1317-6A67EB8523B7}"/>
+              </a:ext>
+            </a:extLst>
+          </p:cNvPr>
+          <p:cNvSpPr>
+            <a:spLocks noGrp="1"/>
+          </p:cNvSpPr>
+          <p:nvPr>
+            <p:ph type="sldNum" sz="quarter" idx="12"/>
+          </p:nvPr>
+        </p:nvSpPr>
+        <p:spPr/>
+        <p:txBody>
+          <a:bodyPr/>
+          <a:lstStyle/>
+          <a:p>
+            <a:fld id="{109C872D-39A9-4065-8BF3-6A613116E2A1}" type="slidenum">
+              <a:rPr lang="ko-KR" altLang="en-US" smtClean="0"/>
+              <a:t>4</a:t>
+            </a:fld>
+            <a:endParaRPr lang="ko-KR" altLang="en-US"/>
+          </a:p>
+        </p:txBody>
+      </p:sp>
+      <p:sp>
+        <p:nvSpPr>
+          <p:cNvPr id="3" name="TextBox 2">
+            <a:extLst>
+              <a:ext uri="{FF2B5EF4-FFF2-40B4-BE49-F238E27FC236}">
+                <a16:creationId xmlns:a16="http://schemas.microsoft.com/office/drawing/2014/main" id="{7331E4DF-D5A4-61E7-1307-371A5A496859}"/>
+              </a:ext>
+            </a:extLst>
+          </p:cNvPr>
+          <p:cNvSpPr txBox="1"/>
+          <p:nvPr/>
+        </p:nvSpPr>
+        <p:spPr>
+          <a:xfrm>
+            <a:off x="288790" y="958844"/>
+            <a:ext cx="11250267" cy="5584670"/>
+          </a:xfrm>
+          <a:prstGeom prst="rect">
+            <a:avLst/>
+          </a:prstGeom>
+          <a:noFill/>
+        </p:spPr>
+        <p:txBody>
+          <a:bodyPr wrap="square" rtlCol="0" anchor="t">
+            <a:spAutoFit/>
+          </a:bodyPr>
+          <a:lstStyle/>
+          <a:p>
+            <a:pPr marL="377825" indent="-285750">
+              <a:lnSpc>
+                <a:spcPct val="150000"/>
+              </a:lnSpc>
+              <a:buFont typeface="Arial" panose="020B0604020202020204" pitchFamily="34" charset="0"/>
+              <a:buChar char="•"/>
+            </a:pPr>
+            <a:r>
+              <a:rPr lang="ko-KR" altLang="en-US" sz="1600" spc="-50" dirty="0"/>
+              <a:t>우리는 경제생활을 하면서</a:t>
+            </a:r>
+            <a:r>
+              <a:rPr lang="en-US" altLang="ko-KR" sz="1600" spc="-50" dirty="0"/>
+              <a:t>, </a:t>
+            </a:r>
+            <a:r>
+              <a:rPr lang="ko-KR" altLang="en-US" sz="1600" spc="-50" dirty="0"/>
+              <a:t>크고 작은 여러 위험에 노출되어 있다</a:t>
+            </a:r>
+            <a:r>
+              <a:rPr lang="en-US" altLang="ko-KR" sz="1600" spc="-50" dirty="0"/>
+              <a:t>.</a:t>
+            </a:r>
+          </a:p>
+          <a:p>
+            <a:pPr marL="835025" lvl="1" indent="-285750">
+              <a:lnSpc>
+                <a:spcPct val="150000"/>
+              </a:lnSpc>
+              <a:buFont typeface="Wingdings" panose="05000000000000000000" pitchFamily="2" charset="2"/>
+              <a:buChar char="ü"/>
+            </a:pPr>
+            <a:r>
+              <a:rPr lang="ko-KR" altLang="en-US" sz="1600" spc="-50" dirty="0"/>
+              <a:t>나이가 많아져 더 이상 일을 할 수 없거나</a:t>
+            </a:r>
+            <a:r>
+              <a:rPr lang="en-US" altLang="ko-KR" sz="1600" spc="-50" dirty="0"/>
+              <a:t>, </a:t>
+            </a:r>
+            <a:r>
+              <a:rPr lang="ko-KR" altLang="en-US" sz="1600" spc="-50" dirty="0"/>
+              <a:t>갑작스럽게 병이 생기거나</a:t>
+            </a:r>
+            <a:r>
+              <a:rPr lang="en-US" altLang="ko-KR" sz="1600" spc="-50" dirty="0"/>
+              <a:t>, </a:t>
+            </a:r>
+            <a:r>
+              <a:rPr lang="ko-KR" altLang="en-US" sz="1600" spc="-50" dirty="0"/>
+              <a:t>직장에서 부상을 당하는 등의 위험이 있다</a:t>
+            </a:r>
+            <a:r>
+              <a:rPr lang="en-US" altLang="ko-KR" sz="1600" spc="-50" dirty="0"/>
+              <a:t>.</a:t>
+            </a:r>
+          </a:p>
+          <a:p>
+            <a:pPr marL="377825" indent="-285750">
+              <a:lnSpc>
+                <a:spcPct val="150000"/>
+              </a:lnSpc>
+              <a:buFont typeface="Arial" panose="020B0604020202020204" pitchFamily="34" charset="0"/>
+              <a:buChar char="•"/>
+            </a:pPr>
+            <a:r>
+              <a:rPr lang="ko-KR" altLang="en-US" sz="1600" spc="-50" dirty="0"/>
+              <a:t>이런 위험에 대해 정부가 보험을 제공하는 것이 사회보험제도이다</a:t>
+            </a:r>
+            <a:r>
+              <a:rPr lang="en-US" altLang="ko-KR" sz="1600" spc="-50" dirty="0"/>
+              <a:t>.</a:t>
+            </a:r>
+          </a:p>
+          <a:p>
+            <a:pPr marL="835025" lvl="1" indent="-285750">
+              <a:lnSpc>
+                <a:spcPct val="150000"/>
+              </a:lnSpc>
+              <a:buFont typeface="Wingdings" panose="05000000000000000000" pitchFamily="2" charset="2"/>
+              <a:buChar char="ü"/>
+            </a:pPr>
+            <a:r>
+              <a:rPr lang="ko-KR" altLang="en-US" sz="1600" spc="-50" dirty="0"/>
+              <a:t>사회보장기본법에는 </a:t>
+            </a:r>
+            <a:r>
+              <a:rPr lang="en-US" altLang="ko-KR" sz="1600" spc="-50" dirty="0"/>
+              <a:t>“</a:t>
+            </a:r>
+            <a:r>
+              <a:rPr lang="ko-KR" altLang="en-US" sz="1600" spc="-50" dirty="0"/>
+              <a:t>국민에게 발생하는 사회적 위험을 보험의 방식으로 대처함으로써 국민의 건강과 소득을 보장하는 제도</a:t>
+            </a:r>
+            <a:r>
+              <a:rPr lang="en-US" altLang="ko-KR" sz="1600" spc="-50" dirty="0"/>
+              <a:t>“ </a:t>
+            </a:r>
+            <a:r>
+              <a:rPr lang="ko-KR" altLang="en-US" sz="1600" spc="-50" dirty="0"/>
+              <a:t>라고 정의되어 있다</a:t>
+            </a:r>
+            <a:r>
+              <a:rPr lang="en-US" altLang="ko-KR" sz="1600" spc="-50" dirty="0"/>
+              <a:t>.</a:t>
+            </a:r>
+          </a:p>
+          <a:p>
+            <a:pPr marL="835025" lvl="1" indent="-285750">
+              <a:lnSpc>
+                <a:spcPct val="150000"/>
+              </a:lnSpc>
+              <a:buFont typeface="Wingdings" panose="05000000000000000000" pitchFamily="2" charset="2"/>
+              <a:buChar char="ü"/>
+            </a:pPr>
+            <a:r>
+              <a:rPr lang="ko-KR" altLang="en-US" sz="1600" spc="-50" dirty="0"/>
+              <a:t>아래와 같이</a:t>
+            </a:r>
+            <a:r>
+              <a:rPr lang="en-US" altLang="ko-KR" sz="1600" spc="-50" dirty="0"/>
+              <a:t>, </a:t>
+            </a:r>
+            <a:r>
+              <a:rPr lang="ko-KR" altLang="en-US" sz="1600" spc="-50" dirty="0"/>
+              <a:t>여러가지 이유로 민간부문에서의 보험시장이 완벽하지 못하여</a:t>
+            </a:r>
+            <a:r>
+              <a:rPr lang="en-US" altLang="ko-KR" sz="1600" spc="-50" dirty="0"/>
+              <a:t>, </a:t>
+            </a:r>
+            <a:r>
+              <a:rPr lang="ko-KR" altLang="en-US" sz="1600" spc="-50" dirty="0"/>
+              <a:t>정부가</a:t>
+            </a:r>
+            <a:r>
+              <a:rPr lang="en-US" altLang="ko-KR" sz="1600" spc="-50" dirty="0"/>
+              <a:t> </a:t>
+            </a:r>
+            <a:r>
+              <a:rPr lang="ko-KR" altLang="en-US" sz="1600" spc="-50" dirty="0"/>
+              <a:t>개입할 필요가 생긴다</a:t>
+            </a:r>
+            <a:r>
+              <a:rPr lang="en-US" altLang="ko-KR" sz="1600" spc="-50" dirty="0"/>
+              <a:t>.</a:t>
+            </a:r>
+          </a:p>
+          <a:p>
+            <a:pPr marL="835025" lvl="1" indent="-285750">
+              <a:lnSpc>
+                <a:spcPct val="150000"/>
+              </a:lnSpc>
+              <a:buFont typeface="Wingdings" panose="05000000000000000000" pitchFamily="2" charset="2"/>
+              <a:buChar char="ü"/>
+            </a:pPr>
+            <a:endParaRPr lang="en-US" altLang="ko-KR" sz="1600" spc="-50" dirty="0"/>
+          </a:p>
+          <a:p>
+            <a:pPr marL="434975" indent="-342900">
+              <a:lnSpc>
+                <a:spcPct val="150000"/>
+              </a:lnSpc>
+              <a:buFont typeface="+mj-lt"/>
+              <a:buAutoNum type="arabicPeriod"/>
+            </a:pPr>
+            <a:r>
+              <a:rPr lang="ko-KR" altLang="en-US" sz="1600" spc="-50" dirty="0"/>
+              <a:t>보험시장은 정보의 비대칭성을 전형적으로 갖고 있어</a:t>
+            </a:r>
+            <a:r>
+              <a:rPr lang="en-US" altLang="ko-KR" sz="1600" spc="-50" dirty="0"/>
+              <a:t>, </a:t>
+            </a:r>
+            <a:r>
+              <a:rPr lang="ko-KR" altLang="en-US" sz="1600" spc="-50" dirty="0"/>
+              <a:t>역선택과 도덕적 해이 문제가 필연적으로 나타난다</a:t>
+            </a:r>
+            <a:r>
+              <a:rPr lang="en-US" altLang="ko-KR" sz="1600" spc="-50" dirty="0"/>
+              <a:t>.</a:t>
+            </a:r>
+          </a:p>
+          <a:p>
+            <a:pPr marL="835025" lvl="1" indent="-285750">
+              <a:lnSpc>
+                <a:spcPct val="150000"/>
+              </a:lnSpc>
+              <a:buFont typeface="Wingdings" panose="05000000000000000000" pitchFamily="2" charset="2"/>
+              <a:buChar char="ü"/>
+            </a:pPr>
+            <a:r>
+              <a:rPr lang="ko-KR" altLang="en-US" sz="1600" spc="-50" dirty="0"/>
+              <a:t>완벽한 보험이란 일어날 수 있는 모든 가능성에 대해 완벽한 대비를 할 수 있게끔 만들어주는 것을 뜻한다</a:t>
+            </a:r>
+            <a:r>
+              <a:rPr lang="en-US" altLang="ko-KR" sz="1600" spc="-50" dirty="0"/>
+              <a:t>.</a:t>
+            </a:r>
+          </a:p>
+          <a:p>
+            <a:pPr marL="835025" lvl="1" indent="-285750">
+              <a:lnSpc>
+                <a:spcPct val="150000"/>
+              </a:lnSpc>
+              <a:buFont typeface="Wingdings" panose="05000000000000000000" pitchFamily="2" charset="2"/>
+              <a:buChar char="ü"/>
+            </a:pPr>
+            <a:r>
+              <a:rPr lang="ko-KR" altLang="en-US" sz="1600" spc="-50" dirty="0"/>
+              <a:t>이 때</a:t>
+            </a:r>
+            <a:r>
+              <a:rPr lang="en-US" altLang="ko-KR" sz="1600" spc="-50" dirty="0"/>
+              <a:t>, </a:t>
+            </a:r>
+            <a:r>
+              <a:rPr lang="ko-KR" altLang="en-US" sz="1600" spc="-50" dirty="0"/>
+              <a:t>역선택과 도덕적 해이는 완벽한 보험을 제공할 수 없게 한다</a:t>
+            </a:r>
+            <a:r>
+              <a:rPr lang="en-US" altLang="ko-KR" sz="1600" spc="-50" dirty="0"/>
+              <a:t>.</a:t>
+            </a:r>
+          </a:p>
+          <a:p>
+            <a:pPr marL="835025" lvl="1" indent="-285750">
+              <a:lnSpc>
+                <a:spcPct val="150000"/>
+              </a:lnSpc>
+              <a:buFont typeface="Wingdings" panose="05000000000000000000" pitchFamily="2" charset="2"/>
+              <a:buChar char="ü"/>
+            </a:pPr>
+            <a:r>
+              <a:rPr lang="ko-KR" altLang="en-US" sz="1600" spc="-50" dirty="0"/>
+              <a:t>다시 말하면</a:t>
+            </a:r>
+            <a:r>
+              <a:rPr lang="en-US" altLang="ko-KR" sz="1600" spc="-50" dirty="0"/>
+              <a:t>, </a:t>
+            </a:r>
+            <a:r>
+              <a:rPr lang="ko-KR" altLang="en-US" sz="1600" spc="-50" dirty="0"/>
+              <a:t>완벽한 보험을 제공하는 보험회사가 있다면 수익성 악화로 문을 닫게 된다</a:t>
+            </a:r>
+            <a:r>
+              <a:rPr lang="en-US" altLang="ko-KR" sz="1600" spc="-50" dirty="0"/>
+              <a:t>.</a:t>
+            </a:r>
+          </a:p>
+          <a:p>
+            <a:pPr marL="434975" indent="-342900">
+              <a:lnSpc>
+                <a:spcPct val="150000"/>
+              </a:lnSpc>
+              <a:buFont typeface="+mj-lt"/>
+              <a:buAutoNum type="arabicPeriod"/>
+            </a:pPr>
+            <a:r>
+              <a:rPr lang="ko-KR" altLang="en-US" sz="1600" spc="-50" dirty="0"/>
+              <a:t>위험의 종류에 따라 적절한 보험상품을 제공하는 것이 불가능한 경우가 있다</a:t>
+            </a:r>
+            <a:r>
+              <a:rPr lang="en-US" altLang="ko-KR" sz="1600" spc="-50" dirty="0"/>
+              <a:t>.</a:t>
+            </a:r>
+          </a:p>
+          <a:p>
+            <a:pPr marL="835025" lvl="1" indent="-285750">
+              <a:lnSpc>
+                <a:spcPct val="150000"/>
+              </a:lnSpc>
+              <a:buFont typeface="Wingdings" panose="05000000000000000000" pitchFamily="2" charset="2"/>
+              <a:buChar char="ü"/>
+            </a:pPr>
+            <a:r>
+              <a:rPr lang="ko-KR" altLang="en-US" sz="1600" spc="-50" dirty="0"/>
+              <a:t>민간 보험사 입장에서</a:t>
+            </a:r>
+            <a:r>
+              <a:rPr lang="en-US" altLang="ko-KR" sz="1600" spc="-50" dirty="0"/>
+              <a:t>, </a:t>
+            </a:r>
+            <a:r>
+              <a:rPr lang="ko-KR" altLang="en-US" sz="1600" spc="-50" dirty="0"/>
+              <a:t>노후의 생계를 위해 </a:t>
+            </a:r>
+            <a:r>
+              <a:rPr lang="ko-KR" altLang="en-US" sz="1600" spc="-50" dirty="0" err="1"/>
+              <a:t>저축하고자하는</a:t>
+            </a:r>
+            <a:r>
+              <a:rPr lang="ko-KR" altLang="en-US" sz="1600" spc="-50" dirty="0"/>
+              <a:t> 사람에게 실질가치가 보장되는 연금보험 상품을 제공하는 것은 어려운 일이다</a:t>
+            </a:r>
+            <a:r>
+              <a:rPr lang="en-US" altLang="ko-KR" sz="1600" spc="-50" dirty="0"/>
+              <a:t>.</a:t>
+            </a:r>
+          </a:p>
+          <a:p>
+            <a:pPr marL="1292225" lvl="2" indent="-285750">
+              <a:lnSpc>
+                <a:spcPct val="150000"/>
+              </a:lnSpc>
+              <a:buFont typeface="Wingdings" panose="05000000000000000000" pitchFamily="2" charset="2"/>
+              <a:buChar char="Ø"/>
+            </a:pPr>
+            <a:r>
+              <a:rPr lang="ko-KR" altLang="en-US" sz="1600" spc="-50" dirty="0"/>
+              <a:t>물가가 오를 때 세금을 더 많이 거둘 수 있는 것도 아니므로 실질가치 보장이 불가능하다</a:t>
+            </a:r>
+            <a:r>
+              <a:rPr lang="en-US" altLang="ko-KR" sz="1600" spc="-50" dirty="0"/>
+              <a:t>.</a:t>
+            </a:r>
+          </a:p>
+        </p:txBody>
+      </p:sp>
+    </p:spTree>
+    <p:extLst>
+      <p:ext uri="{BB962C8B-B14F-4D97-AF65-F5344CB8AC3E}">
+        <p14:creationId xmlns:p14="http://schemas.microsoft.com/office/powerpoint/2010/main" val="1152434456"/>
+      </p:ext>
+    </p:extLst>
+  </p:cSld>
+  <p:clrMapOvr>
+    <a:masterClrMapping/>
+  </p:clrMapOvr>
+</p:sld>
+</file>
+
+<file path=ppt/slides/slide40.xml><?xml version="1.0" encoding="utf-8"?>
 <p:sld xmlns:a="http://schemas.openxmlformats.org/drawingml/2006/main" xmlns:r="http://schemas.openxmlformats.org/officeDocument/2006/relationships" xmlns:p="http://schemas.openxmlformats.org/presentationml/2006/main">
   <p:cSld>
     <p:spTree>
@@ -16209,7 +19223,7 @@
           <a:p>
             <a:fld id="{109C872D-39A9-4065-8BF3-6A613116E2A1}" type="slidenum">
               <a:rPr lang="ko-KR" altLang="en-US" smtClean="0"/>
-              <a:t>36</a:t>
+              <a:t>40</a:t>
             </a:fld>
             <a:endParaRPr lang="ko-KR" altLang="en-US"/>
           </a:p>
@@ -16434,7 +19448,7 @@
 </p:sld>
 </file>
 
-<file path=ppt/slides/slide37.xml><?xml version="1.0" encoding="utf-8"?>
+<file path=ppt/slides/slide41.xml><?xml version="1.0" encoding="utf-8"?>
 <p:sld xmlns:a="http://schemas.openxmlformats.org/drawingml/2006/main" xmlns:r="http://schemas.openxmlformats.org/officeDocument/2006/relationships" xmlns:p="http://schemas.openxmlformats.org/presentationml/2006/main">
   <p:cSld>
     <p:spTree>
@@ -16508,7 +19522,7 @@
           <a:p>
             <a:fld id="{109C872D-39A9-4065-8BF3-6A613116E2A1}" type="slidenum">
               <a:rPr lang="ko-KR" altLang="en-US" smtClean="0"/>
-              <a:t>37</a:t>
+              <a:t>41</a:t>
             </a:fld>
             <a:endParaRPr lang="ko-KR" altLang="en-US"/>
           </a:p>
@@ -16889,7 +19903,7 @@
 </p:sld>
 </file>
 
-<file path=ppt/slides/slide38.xml><?xml version="1.0" encoding="utf-8"?>
+<file path=ppt/slides/slide42.xml><?xml version="1.0" encoding="utf-8"?>
 <p:sld xmlns:a="http://schemas.openxmlformats.org/drawingml/2006/main" xmlns:r="http://schemas.openxmlformats.org/officeDocument/2006/relationships" xmlns:p="http://schemas.openxmlformats.org/presentationml/2006/main">
   <p:cSld>
     <p:spTree>
@@ -16963,7 +19977,7 @@
           <a:p>
             <a:fld id="{109C872D-39A9-4065-8BF3-6A613116E2A1}" type="slidenum">
               <a:rPr lang="ko-KR" altLang="en-US" smtClean="0"/>
-              <a:t>38</a:t>
+              <a:t>42</a:t>
             </a:fld>
             <a:endParaRPr lang="ko-KR" altLang="en-US"/>
           </a:p>
@@ -17518,7 +20532,7 @@
 </p:sld>
 </file>
 
-<file path=ppt/slides/slide39.xml><?xml version="1.0" encoding="utf-8"?>
+<file path=ppt/slides/slide43.xml><?xml version="1.0" encoding="utf-8"?>
 <p:sld xmlns:a="http://schemas.openxmlformats.org/drawingml/2006/main" xmlns:r="http://schemas.openxmlformats.org/officeDocument/2006/relationships" xmlns:p="http://schemas.openxmlformats.org/presentationml/2006/main">
   <p:cSld>
     <p:spTree>
@@ -17629,7 +20643,7 @@
           <a:p>
             <a:fld id="{109C872D-39A9-4065-8BF3-6A613116E2A1}" type="slidenum">
               <a:rPr lang="ko-KR" altLang="en-US" smtClean="0"/>
-              <a:t>39</a:t>
+              <a:t>43</a:t>
             </a:fld>
             <a:endParaRPr lang="ko-KR" altLang="en-US"/>
           </a:p>
@@ -18435,447 +21449,7 @@
 </p:sld>
 </file>
 
-<file path=ppt/slides/slide4.xml><?xml version="1.0" encoding="utf-8"?>
-<p:sld xmlns:a="http://schemas.openxmlformats.org/drawingml/2006/main" xmlns:r="http://schemas.openxmlformats.org/officeDocument/2006/relationships" xmlns:p="http://schemas.openxmlformats.org/presentationml/2006/main">
-  <p:cSld>
-    <p:spTree>
-      <p:nvGrpSpPr>
-        <p:cNvPr id="1" name="">
-          <a:extLst>
-            <a:ext uri="{FF2B5EF4-FFF2-40B4-BE49-F238E27FC236}">
-              <a16:creationId xmlns:a16="http://schemas.microsoft.com/office/drawing/2014/main" id="{7E764ACB-B8A0-8B8E-50AE-F6949A866C73}"/>
-            </a:ext>
-          </a:extLst>
-        </p:cNvPr>
-        <p:cNvGrpSpPr/>
-        <p:nvPr/>
-      </p:nvGrpSpPr>
-      <p:grpSpPr>
-        <a:xfrm>
-          <a:off x="0" y="0"/>
-          <a:ext cx="0" cy="0"/>
-          <a:chOff x="0" y="0"/>
-          <a:chExt cx="0" cy="0"/>
-        </a:xfrm>
-      </p:grpSpPr>
-      <p:sp>
-        <p:nvSpPr>
-          <p:cNvPr id="2" name="제목 1">
-            <a:extLst>
-              <a:ext uri="{FF2B5EF4-FFF2-40B4-BE49-F238E27FC236}">
-                <a16:creationId xmlns:a16="http://schemas.microsoft.com/office/drawing/2014/main" id="{3B730496-A872-5CFB-3130-C4429F8285BC}"/>
-              </a:ext>
-            </a:extLst>
-          </p:cNvPr>
-          <p:cNvSpPr>
-            <a:spLocks noGrp="1"/>
-          </p:cNvSpPr>
-          <p:nvPr>
-            <p:ph type="title"/>
-          </p:nvPr>
-        </p:nvSpPr>
-        <p:spPr/>
-        <p:txBody>
-          <a:bodyPr/>
-          <a:lstStyle/>
-          <a:p>
-            <a:r>
-              <a:rPr lang="ko-KR" altLang="en-US" dirty="0"/>
-              <a:t>사회보험제도의 의미</a:t>
-            </a:r>
-          </a:p>
-        </p:txBody>
-      </p:sp>
-      <p:sp>
-        <p:nvSpPr>
-          <p:cNvPr id="4" name="슬라이드 번호 개체 틀 3">
-            <a:extLst>
-              <a:ext uri="{FF2B5EF4-FFF2-40B4-BE49-F238E27FC236}">
-                <a16:creationId xmlns:a16="http://schemas.microsoft.com/office/drawing/2014/main" id="{CBD72302-C21E-82F3-1317-6A67EB8523B7}"/>
-              </a:ext>
-            </a:extLst>
-          </p:cNvPr>
-          <p:cNvSpPr>
-            <a:spLocks noGrp="1"/>
-          </p:cNvSpPr>
-          <p:nvPr>
-            <p:ph type="sldNum" sz="quarter" idx="12"/>
-          </p:nvPr>
-        </p:nvSpPr>
-        <p:spPr/>
-        <p:txBody>
-          <a:bodyPr/>
-          <a:lstStyle/>
-          <a:p>
-            <a:fld id="{109C872D-39A9-4065-8BF3-6A613116E2A1}" type="slidenum">
-              <a:rPr lang="ko-KR" altLang="en-US" smtClean="0"/>
-              <a:t>4</a:t>
-            </a:fld>
-            <a:endParaRPr lang="ko-KR" altLang="en-US"/>
-          </a:p>
-        </p:txBody>
-      </p:sp>
-      <p:sp>
-        <p:nvSpPr>
-          <p:cNvPr id="3" name="TextBox 2">
-            <a:extLst>
-              <a:ext uri="{FF2B5EF4-FFF2-40B4-BE49-F238E27FC236}">
-                <a16:creationId xmlns:a16="http://schemas.microsoft.com/office/drawing/2014/main" id="{7331E4DF-D5A4-61E7-1307-371A5A496859}"/>
-              </a:ext>
-            </a:extLst>
-          </p:cNvPr>
-          <p:cNvSpPr txBox="1"/>
-          <p:nvPr/>
-        </p:nvSpPr>
-        <p:spPr>
-          <a:xfrm>
-            <a:off x="288790" y="958844"/>
-            <a:ext cx="11250267" cy="5584670"/>
-          </a:xfrm>
-          <a:prstGeom prst="rect">
-            <a:avLst/>
-          </a:prstGeom>
-          <a:noFill/>
-        </p:spPr>
-        <p:txBody>
-          <a:bodyPr wrap="square" rtlCol="0" anchor="t">
-            <a:spAutoFit/>
-          </a:bodyPr>
-          <a:lstStyle/>
-          <a:p>
-            <a:pPr marL="377825" indent="-285750">
-              <a:lnSpc>
-                <a:spcPct val="150000"/>
-              </a:lnSpc>
-              <a:buFont typeface="Arial" panose="020B0604020202020204" pitchFamily="34" charset="0"/>
-              <a:buChar char="•"/>
-            </a:pPr>
-            <a:r>
-              <a:rPr lang="ko-KR" altLang="en-US" sz="1600" spc="-50" dirty="0"/>
-              <a:t>우리는 경제생활을 하면서</a:t>
-            </a:r>
-            <a:r>
-              <a:rPr lang="en-US" altLang="ko-KR" sz="1600" spc="-50" dirty="0"/>
-              <a:t>, </a:t>
-            </a:r>
-            <a:r>
-              <a:rPr lang="ko-KR" altLang="en-US" sz="1600" spc="-50" dirty="0"/>
-              <a:t>크고 작은 여러 위험에 노출되어 있다</a:t>
-            </a:r>
-            <a:r>
-              <a:rPr lang="en-US" altLang="ko-KR" sz="1600" spc="-50" dirty="0"/>
-              <a:t>.</a:t>
-            </a:r>
-          </a:p>
-          <a:p>
-            <a:pPr marL="835025" lvl="1" indent="-285750">
-              <a:lnSpc>
-                <a:spcPct val="150000"/>
-              </a:lnSpc>
-              <a:buFont typeface="Wingdings" panose="05000000000000000000" pitchFamily="2" charset="2"/>
-              <a:buChar char="ü"/>
-            </a:pPr>
-            <a:r>
-              <a:rPr lang="ko-KR" altLang="en-US" sz="1600" spc="-50" dirty="0"/>
-              <a:t>나이가 많아져 더 이상 일을 할 수 없거나</a:t>
-            </a:r>
-            <a:r>
-              <a:rPr lang="en-US" altLang="ko-KR" sz="1600" spc="-50" dirty="0"/>
-              <a:t>, </a:t>
-            </a:r>
-            <a:r>
-              <a:rPr lang="ko-KR" altLang="en-US" sz="1600" spc="-50" dirty="0"/>
-              <a:t>갑작스럽게 병이 생기거나</a:t>
-            </a:r>
-            <a:r>
-              <a:rPr lang="en-US" altLang="ko-KR" sz="1600" spc="-50" dirty="0"/>
-              <a:t>, </a:t>
-            </a:r>
-            <a:r>
-              <a:rPr lang="ko-KR" altLang="en-US" sz="1600" spc="-50" dirty="0"/>
-              <a:t>직장에서 부상을 당하는 등의 위험이 있다</a:t>
-            </a:r>
-            <a:r>
-              <a:rPr lang="en-US" altLang="ko-KR" sz="1600" spc="-50" dirty="0"/>
-              <a:t>.</a:t>
-            </a:r>
-          </a:p>
-          <a:p>
-            <a:pPr marL="377825" indent="-285750">
-              <a:lnSpc>
-                <a:spcPct val="150000"/>
-              </a:lnSpc>
-              <a:buFont typeface="Arial" panose="020B0604020202020204" pitchFamily="34" charset="0"/>
-              <a:buChar char="•"/>
-            </a:pPr>
-            <a:r>
-              <a:rPr lang="ko-KR" altLang="en-US" sz="1600" spc="-50" dirty="0"/>
-              <a:t>이런 위험에 대해 정부가 보험을 제공하는 것이 사회보험제도이다</a:t>
-            </a:r>
-            <a:r>
-              <a:rPr lang="en-US" altLang="ko-KR" sz="1600" spc="-50" dirty="0"/>
-              <a:t>.</a:t>
-            </a:r>
-          </a:p>
-          <a:p>
-            <a:pPr marL="835025" lvl="1" indent="-285750">
-              <a:lnSpc>
-                <a:spcPct val="150000"/>
-              </a:lnSpc>
-              <a:buFont typeface="Wingdings" panose="05000000000000000000" pitchFamily="2" charset="2"/>
-              <a:buChar char="ü"/>
-            </a:pPr>
-            <a:r>
-              <a:rPr lang="ko-KR" altLang="en-US" sz="1600" spc="-50" dirty="0"/>
-              <a:t>사회보장기본법에는 </a:t>
-            </a:r>
-            <a:r>
-              <a:rPr lang="en-US" altLang="ko-KR" sz="1600" spc="-50" dirty="0"/>
-              <a:t>“</a:t>
-            </a:r>
-            <a:r>
-              <a:rPr lang="ko-KR" altLang="en-US" sz="1600" spc="-50" dirty="0"/>
-              <a:t>국민에게 발생하는 사회적 위험을 보험의 방식으로 대처함으로써 국민의 건강과 소득을 보장하는 제도</a:t>
-            </a:r>
-            <a:r>
-              <a:rPr lang="en-US" altLang="ko-KR" sz="1600" spc="-50" dirty="0"/>
-              <a:t>“ </a:t>
-            </a:r>
-            <a:r>
-              <a:rPr lang="ko-KR" altLang="en-US" sz="1600" spc="-50" dirty="0"/>
-              <a:t>라고 정의되어 있다</a:t>
-            </a:r>
-            <a:r>
-              <a:rPr lang="en-US" altLang="ko-KR" sz="1600" spc="-50" dirty="0"/>
-              <a:t>.</a:t>
-            </a:r>
-          </a:p>
-          <a:p>
-            <a:pPr marL="835025" lvl="1" indent="-285750">
-              <a:lnSpc>
-                <a:spcPct val="150000"/>
-              </a:lnSpc>
-              <a:buFont typeface="Wingdings" panose="05000000000000000000" pitchFamily="2" charset="2"/>
-              <a:buChar char="ü"/>
-            </a:pPr>
-            <a:r>
-              <a:rPr lang="ko-KR" altLang="en-US" sz="1600" spc="-50" dirty="0"/>
-              <a:t>아래와 같이</a:t>
-            </a:r>
-            <a:r>
-              <a:rPr lang="en-US" altLang="ko-KR" sz="1600" spc="-50" dirty="0"/>
-              <a:t>, </a:t>
-            </a:r>
-            <a:r>
-              <a:rPr lang="ko-KR" altLang="en-US" sz="1600" spc="-50" dirty="0"/>
-              <a:t>여러가지 이유로 민간부문에서의 보험시장이 완벽하지 못하여</a:t>
-            </a:r>
-            <a:r>
-              <a:rPr lang="en-US" altLang="ko-KR" sz="1600" spc="-50" dirty="0"/>
-              <a:t>, </a:t>
-            </a:r>
-            <a:r>
-              <a:rPr lang="ko-KR" altLang="en-US" sz="1600" spc="-50" dirty="0"/>
-              <a:t>정부가</a:t>
-            </a:r>
-            <a:r>
-              <a:rPr lang="en-US" altLang="ko-KR" sz="1600" spc="-50" dirty="0"/>
-              <a:t> </a:t>
-            </a:r>
-            <a:r>
-              <a:rPr lang="ko-KR" altLang="en-US" sz="1600" spc="-50" dirty="0"/>
-              <a:t>개입할 필요가 생긴다</a:t>
-            </a:r>
-            <a:r>
-              <a:rPr lang="en-US" altLang="ko-KR" sz="1600" spc="-50" dirty="0"/>
-              <a:t>.</a:t>
-            </a:r>
-          </a:p>
-          <a:p>
-            <a:pPr marL="835025" lvl="1" indent="-285750">
-              <a:lnSpc>
-                <a:spcPct val="150000"/>
-              </a:lnSpc>
-              <a:buFont typeface="Wingdings" panose="05000000000000000000" pitchFamily="2" charset="2"/>
-              <a:buChar char="ü"/>
-            </a:pPr>
-            <a:endParaRPr lang="en-US" altLang="ko-KR" sz="1600" spc="-50" dirty="0"/>
-          </a:p>
-          <a:p>
-            <a:pPr marL="434975" indent="-342900">
-              <a:lnSpc>
-                <a:spcPct val="150000"/>
-              </a:lnSpc>
-              <a:buFont typeface="+mj-lt"/>
-              <a:buAutoNum type="arabicPeriod"/>
-            </a:pPr>
-            <a:r>
-              <a:rPr lang="ko-KR" altLang="en-US" sz="1600" spc="-50" dirty="0"/>
-              <a:t>보험시장은 정보의 비대칭성을 전형적으로 갖고 있어</a:t>
-            </a:r>
-            <a:r>
-              <a:rPr lang="en-US" altLang="ko-KR" sz="1600" spc="-50" dirty="0"/>
-              <a:t>, </a:t>
-            </a:r>
-            <a:r>
-              <a:rPr lang="ko-KR" altLang="en-US" sz="1600" spc="-50" dirty="0"/>
-              <a:t>역선택과 도덕적 해이 문제가 필연적으로 나타난다</a:t>
-            </a:r>
-            <a:r>
-              <a:rPr lang="en-US" altLang="ko-KR" sz="1600" spc="-50" dirty="0"/>
-              <a:t>.</a:t>
-            </a:r>
-          </a:p>
-          <a:p>
-            <a:pPr marL="835025" lvl="1" indent="-285750">
-              <a:lnSpc>
-                <a:spcPct val="150000"/>
-              </a:lnSpc>
-              <a:buFont typeface="Wingdings" panose="05000000000000000000" pitchFamily="2" charset="2"/>
-              <a:buChar char="ü"/>
-            </a:pPr>
-            <a:r>
-              <a:rPr lang="ko-KR" altLang="en-US" sz="1600" spc="-50" dirty="0"/>
-              <a:t>완벽한 보험이란 일어날 수 있는 모든 가능성에 대해 완벽한 대비를 할 수 있게끔 만들어주는 것을 뜻한다</a:t>
-            </a:r>
-            <a:r>
-              <a:rPr lang="en-US" altLang="ko-KR" sz="1600" spc="-50" dirty="0"/>
-              <a:t>.</a:t>
-            </a:r>
-          </a:p>
-          <a:p>
-            <a:pPr marL="835025" lvl="1" indent="-285750">
-              <a:lnSpc>
-                <a:spcPct val="150000"/>
-              </a:lnSpc>
-              <a:buFont typeface="Wingdings" panose="05000000000000000000" pitchFamily="2" charset="2"/>
-              <a:buChar char="ü"/>
-            </a:pPr>
-            <a:r>
-              <a:rPr lang="ko-KR" altLang="en-US" sz="1600" spc="-50" dirty="0"/>
-              <a:t>이 때</a:t>
-            </a:r>
-            <a:r>
-              <a:rPr lang="en-US" altLang="ko-KR" sz="1600" spc="-50" dirty="0"/>
-              <a:t>, </a:t>
-            </a:r>
-            <a:r>
-              <a:rPr lang="ko-KR" altLang="en-US" sz="1600" spc="-50" dirty="0"/>
-              <a:t>역선택과 도덕적 해이는 완벽한 보험을 제공할 수 없게 한다</a:t>
-            </a:r>
-            <a:r>
-              <a:rPr lang="en-US" altLang="ko-KR" sz="1600" spc="-50" dirty="0"/>
-              <a:t>.</a:t>
-            </a:r>
-          </a:p>
-          <a:p>
-            <a:pPr marL="835025" lvl="1" indent="-285750">
-              <a:lnSpc>
-                <a:spcPct val="150000"/>
-              </a:lnSpc>
-              <a:buFont typeface="Wingdings" panose="05000000000000000000" pitchFamily="2" charset="2"/>
-              <a:buChar char="ü"/>
-            </a:pPr>
-            <a:r>
-              <a:rPr lang="ko-KR" altLang="en-US" sz="1600" spc="-50" dirty="0"/>
-              <a:t>다시 말하면</a:t>
-            </a:r>
-            <a:r>
-              <a:rPr lang="en-US" altLang="ko-KR" sz="1600" spc="-50" dirty="0"/>
-              <a:t>, </a:t>
-            </a:r>
-            <a:r>
-              <a:rPr lang="ko-KR" altLang="en-US" sz="1600" spc="-50" dirty="0"/>
-              <a:t>완벽한 보험을 제공하는 보험회사가 있다면 수익성 악화로 문을 닫게 된다</a:t>
-            </a:r>
-            <a:r>
-              <a:rPr lang="en-US" altLang="ko-KR" sz="1600" spc="-50" dirty="0"/>
-              <a:t>.</a:t>
-            </a:r>
-          </a:p>
-          <a:p>
-            <a:pPr marL="434975" indent="-342900">
-              <a:lnSpc>
-                <a:spcPct val="150000"/>
-              </a:lnSpc>
-              <a:buFont typeface="+mj-lt"/>
-              <a:buAutoNum type="arabicPeriod"/>
-            </a:pPr>
-            <a:r>
-              <a:rPr lang="ko-KR" altLang="en-US" sz="1600" spc="-50" dirty="0"/>
-              <a:t>위험의 종류에 따라 적절한 보험상품을 제공하는 것이 불가능한 경우가 있다</a:t>
-            </a:r>
-            <a:r>
-              <a:rPr lang="en-US" altLang="ko-KR" sz="1600" spc="-50" dirty="0"/>
-              <a:t>.</a:t>
-            </a:r>
-          </a:p>
-          <a:p>
-            <a:pPr marL="835025" lvl="1" indent="-285750">
-              <a:lnSpc>
-                <a:spcPct val="150000"/>
-              </a:lnSpc>
-              <a:buFont typeface="Wingdings" panose="05000000000000000000" pitchFamily="2" charset="2"/>
-              <a:buChar char="ü"/>
-            </a:pPr>
-            <a:r>
-              <a:rPr lang="ko-KR" altLang="en-US" sz="1600" spc="-50" dirty="0"/>
-              <a:t>민간 보험사 입장에서</a:t>
-            </a:r>
-            <a:r>
-              <a:rPr lang="en-US" altLang="ko-KR" sz="1600" spc="-50" dirty="0"/>
-              <a:t>, </a:t>
-            </a:r>
-            <a:r>
-              <a:rPr lang="ko-KR" altLang="en-US" sz="1600" spc="-50" dirty="0"/>
-              <a:t>노후의 생계를 위해 </a:t>
-            </a:r>
-            <a:r>
-              <a:rPr lang="ko-KR" altLang="en-US" sz="1600" spc="-50" dirty="0" err="1"/>
-              <a:t>저축하고자하는</a:t>
-            </a:r>
-            <a:r>
-              <a:rPr lang="ko-KR" altLang="en-US" sz="1600" spc="-50" dirty="0"/>
-              <a:t> 사람에게 실질가치가 보장되는 연금보험 상품을 제공하는 것은 어려운 일이다</a:t>
-            </a:r>
-            <a:r>
-              <a:rPr lang="en-US" altLang="ko-KR" sz="1600" spc="-50" dirty="0"/>
-              <a:t>.</a:t>
-            </a:r>
-          </a:p>
-          <a:p>
-            <a:pPr marL="1292225" lvl="2" indent="-285750">
-              <a:lnSpc>
-                <a:spcPct val="150000"/>
-              </a:lnSpc>
-              <a:buFont typeface="Wingdings" panose="05000000000000000000" pitchFamily="2" charset="2"/>
-              <a:buChar char="Ø"/>
-            </a:pPr>
-            <a:r>
-              <a:rPr lang="ko-KR" altLang="en-US" sz="1600" spc="-50" dirty="0"/>
-              <a:t>물가가 오를 때 세금을 더 많이 거둘 수 있는 것도 아니므로 실질가치 보장이 불가능하다</a:t>
-            </a:r>
-            <a:r>
-              <a:rPr lang="en-US" altLang="ko-KR" sz="1600" spc="-50" dirty="0"/>
-              <a:t>.</a:t>
-            </a:r>
-          </a:p>
-        </p:txBody>
-      </p:sp>
-    </p:spTree>
-    <p:extLst>
-      <p:ext uri="{BB962C8B-B14F-4D97-AF65-F5344CB8AC3E}">
-        <p14:creationId xmlns:p14="http://schemas.microsoft.com/office/powerpoint/2010/main" val="1152434456"/>
-      </p:ext>
-    </p:extLst>
-  </p:cSld>
-  <p:clrMapOvr>
-    <a:masterClrMapping/>
-  </p:clrMapOvr>
-</p:sld>
-</file>
-
-<file path=ppt/slides/slide40.xml><?xml version="1.0" encoding="utf-8"?>
+<file path=ppt/slides/slide44.xml><?xml version="1.0" encoding="utf-8"?>
 <p:sld xmlns:a="http://schemas.openxmlformats.org/drawingml/2006/main" xmlns:r="http://schemas.openxmlformats.org/officeDocument/2006/relationships" xmlns:p="http://schemas.openxmlformats.org/presentationml/2006/main">
   <p:cSld>
     <p:spTree>
@@ -18949,7 +21523,7 @@
           <a:p>
             <a:fld id="{109C872D-39A9-4065-8BF3-6A613116E2A1}" type="slidenum">
               <a:rPr lang="ko-KR" altLang="en-US" smtClean="0"/>
-              <a:t>40</a:t>
+              <a:t>44</a:t>
             </a:fld>
             <a:endParaRPr lang="ko-KR" altLang="en-US"/>
           </a:p>
@@ -19236,7 +21810,7 @@
 </p:sld>
 </file>
 
-<file path=ppt/slides/slide41.xml><?xml version="1.0" encoding="utf-8"?>
+<file path=ppt/slides/slide45.xml><?xml version="1.0" encoding="utf-8"?>
 <p:sld xmlns:a="http://schemas.openxmlformats.org/drawingml/2006/main" xmlns:r="http://schemas.openxmlformats.org/officeDocument/2006/relationships" xmlns:p="http://schemas.openxmlformats.org/presentationml/2006/main">
   <p:cSld>
     <p:spTree>
@@ -19310,7 +21884,7 @@
           <a:p>
             <a:fld id="{109C872D-39A9-4065-8BF3-6A613116E2A1}" type="slidenum">
               <a:rPr lang="ko-KR" altLang="en-US" smtClean="0"/>
-              <a:t>41</a:t>
+              <a:t>45</a:t>
             </a:fld>
             <a:endParaRPr lang="ko-KR" altLang="en-US"/>
           </a:p>
@@ -19474,7 +22048,7 @@
 </p:sld>
 </file>
 
-<file path=ppt/slides/slide42.xml><?xml version="1.0" encoding="utf-8"?>
+<file path=ppt/slides/slide46.xml><?xml version="1.0" encoding="utf-8"?>
 <p:sld xmlns:a="http://schemas.openxmlformats.org/drawingml/2006/main" xmlns:r="http://schemas.openxmlformats.org/officeDocument/2006/relationships" xmlns:p="http://schemas.openxmlformats.org/presentationml/2006/main">
   <p:cSld>
     <p:spTree>
@@ -19557,7 +22131,7 @@
           <a:p>
             <a:fld id="{109C872D-39A9-4065-8BF3-6A613116E2A1}" type="slidenum">
               <a:rPr lang="ko-KR" altLang="en-US" smtClean="0"/>
-              <a:t>42</a:t>
+              <a:t>46</a:t>
             </a:fld>
             <a:endParaRPr lang="ko-KR" altLang="en-US"/>
           </a:p>
@@ -19617,7 +22191,7 @@
 </p:sld>
 </file>
 
-<file path=ppt/slides/slide43.xml><?xml version="1.0" encoding="utf-8"?>
+<file path=ppt/slides/slide47.xml><?xml version="1.0" encoding="utf-8"?>
 <p:sld xmlns:a="http://schemas.openxmlformats.org/drawingml/2006/main" xmlns:r="http://schemas.openxmlformats.org/officeDocument/2006/relationships" xmlns:p="http://schemas.openxmlformats.org/presentationml/2006/main">
   <p:cSld>
     <p:spTree>
@@ -19691,7 +22265,7 @@
           <a:p>
             <a:fld id="{109C872D-39A9-4065-8BF3-6A613116E2A1}" type="slidenum">
               <a:rPr lang="ko-KR" altLang="en-US" smtClean="0"/>
-              <a:t>43</a:t>
+              <a:t>47</a:t>
             </a:fld>
             <a:endParaRPr lang="ko-KR" altLang="en-US"/>
           </a:p>
@@ -19955,7 +22529,7 @@
 </p:sld>
 </file>
 
-<file path=ppt/slides/slide44.xml><?xml version="1.0" encoding="utf-8"?>
+<file path=ppt/slides/slide48.xml><?xml version="1.0" encoding="utf-8"?>
 <p:sld xmlns:a="http://schemas.openxmlformats.org/drawingml/2006/main" xmlns:r="http://schemas.openxmlformats.org/officeDocument/2006/relationships" xmlns:p="http://schemas.openxmlformats.org/presentationml/2006/main">
   <p:cSld>
     <p:spTree>
@@ -20029,7 +22603,7 @@
           <a:p>
             <a:fld id="{109C872D-39A9-4065-8BF3-6A613116E2A1}" type="slidenum">
               <a:rPr lang="ko-KR" altLang="en-US" smtClean="0"/>
-              <a:t>44</a:t>
+              <a:t>48</a:t>
             </a:fld>
             <a:endParaRPr lang="ko-KR" altLang="en-US"/>
           </a:p>
@@ -20521,7 +23095,7 @@
 </p:sld>
 </file>
 
-<file path=ppt/slides/slide45.xml><?xml version="1.0" encoding="utf-8"?>
+<file path=ppt/slides/slide49.xml><?xml version="1.0" encoding="utf-8"?>
 <p:sld xmlns:a="http://schemas.openxmlformats.org/drawingml/2006/main" xmlns:r="http://schemas.openxmlformats.org/officeDocument/2006/relationships" xmlns:p="http://schemas.openxmlformats.org/presentationml/2006/main">
   <p:cSld>
     <p:spTree>
@@ -20595,7 +23169,7 @@
           <a:p>
             <a:fld id="{109C872D-39A9-4065-8BF3-6A613116E2A1}" type="slidenum">
               <a:rPr lang="ko-KR" altLang="en-US" smtClean="0"/>
-              <a:t>45</a:t>
+              <a:t>49</a:t>
             </a:fld>
             <a:endParaRPr lang="ko-KR" altLang="en-US"/>
           </a:p>
@@ -20784,7 +23358,376 @@
 </p:sld>
 </file>
 
-<file path=ppt/slides/slide46.xml><?xml version="1.0" encoding="utf-8"?>
+<file path=ppt/slides/slide5.xml><?xml version="1.0" encoding="utf-8"?>
+<p:sld xmlns:a="http://schemas.openxmlformats.org/drawingml/2006/main" xmlns:r="http://schemas.openxmlformats.org/officeDocument/2006/relationships" xmlns:p="http://schemas.openxmlformats.org/presentationml/2006/main">
+  <p:cSld>
+    <p:spTree>
+      <p:nvGrpSpPr>
+        <p:cNvPr id="1" name="">
+          <a:extLst>
+            <a:ext uri="{FF2B5EF4-FFF2-40B4-BE49-F238E27FC236}">
+              <a16:creationId xmlns:a16="http://schemas.microsoft.com/office/drawing/2014/main" id="{2A6177E6-2BE2-8810-F89F-48E53629EB8A}"/>
+            </a:ext>
+          </a:extLst>
+        </p:cNvPr>
+        <p:cNvGrpSpPr/>
+        <p:nvPr/>
+      </p:nvGrpSpPr>
+      <p:grpSpPr>
+        <a:xfrm>
+          <a:off x="0" y="0"/>
+          <a:ext cx="0" cy="0"/>
+          <a:chOff x="0" y="0"/>
+          <a:chExt cx="0" cy="0"/>
+        </a:xfrm>
+      </p:grpSpPr>
+      <p:sp>
+        <p:nvSpPr>
+          <p:cNvPr id="2" name="제목 1">
+            <a:extLst>
+              <a:ext uri="{FF2B5EF4-FFF2-40B4-BE49-F238E27FC236}">
+                <a16:creationId xmlns:a16="http://schemas.microsoft.com/office/drawing/2014/main" id="{BFA7A44D-A761-673A-4E43-DE33CE276613}"/>
+              </a:ext>
+            </a:extLst>
+          </p:cNvPr>
+          <p:cNvSpPr>
+            <a:spLocks noGrp="1"/>
+          </p:cNvSpPr>
+          <p:nvPr>
+            <p:ph type="title"/>
+          </p:nvPr>
+        </p:nvSpPr>
+        <p:spPr/>
+        <p:txBody>
+          <a:bodyPr/>
+          <a:lstStyle/>
+          <a:p>
+            <a:r>
+              <a:rPr lang="ko-KR" altLang="en-US" dirty="0"/>
+              <a:t>사회보험제도의 의미</a:t>
+            </a:r>
+          </a:p>
+        </p:txBody>
+      </p:sp>
+      <p:sp>
+        <p:nvSpPr>
+          <p:cNvPr id="4" name="슬라이드 번호 개체 틀 3">
+            <a:extLst>
+              <a:ext uri="{FF2B5EF4-FFF2-40B4-BE49-F238E27FC236}">
+                <a16:creationId xmlns:a16="http://schemas.microsoft.com/office/drawing/2014/main" id="{692F3803-4273-D729-E62C-66D07D9E6ABA}"/>
+              </a:ext>
+            </a:extLst>
+          </p:cNvPr>
+          <p:cNvSpPr>
+            <a:spLocks noGrp="1"/>
+          </p:cNvSpPr>
+          <p:nvPr>
+            <p:ph type="sldNum" sz="quarter" idx="12"/>
+          </p:nvPr>
+        </p:nvSpPr>
+        <p:spPr/>
+        <p:txBody>
+          <a:bodyPr/>
+          <a:lstStyle/>
+          <a:p>
+            <a:fld id="{109C872D-39A9-4065-8BF3-6A613116E2A1}" type="slidenum">
+              <a:rPr lang="ko-KR" altLang="en-US" smtClean="0"/>
+              <a:t>5</a:t>
+            </a:fld>
+            <a:endParaRPr lang="ko-KR" altLang="en-US"/>
+          </a:p>
+        </p:txBody>
+      </p:sp>
+      <p:sp>
+        <p:nvSpPr>
+          <p:cNvPr id="3" name="TextBox 2">
+            <a:extLst>
+              <a:ext uri="{FF2B5EF4-FFF2-40B4-BE49-F238E27FC236}">
+                <a16:creationId xmlns:a16="http://schemas.microsoft.com/office/drawing/2014/main" id="{91DCF3A8-8A08-DF37-1A5B-CD577B183587}"/>
+              </a:ext>
+            </a:extLst>
+          </p:cNvPr>
+          <p:cNvSpPr txBox="1"/>
+          <p:nvPr/>
+        </p:nvSpPr>
+        <p:spPr>
+          <a:xfrm>
+            <a:off x="288790" y="958844"/>
+            <a:ext cx="11250267" cy="5215338"/>
+          </a:xfrm>
+          <a:prstGeom prst="rect">
+            <a:avLst/>
+          </a:prstGeom>
+          <a:noFill/>
+        </p:spPr>
+        <p:txBody>
+          <a:bodyPr wrap="square" rtlCol="0" anchor="t">
+            <a:spAutoFit/>
+          </a:bodyPr>
+          <a:lstStyle/>
+          <a:p>
+            <a:pPr marL="434975" indent="-342900">
+              <a:lnSpc>
+                <a:spcPct val="150000"/>
+              </a:lnSpc>
+              <a:buFont typeface="+mj-lt"/>
+              <a:buAutoNum type="arabicPeriod" startAt="3"/>
+            </a:pPr>
+            <a:r>
+              <a:rPr lang="ko-KR" altLang="en-US" sz="1600" spc="-50" dirty="0"/>
+              <a:t>보험시장이 잘 작동한다 하더라도</a:t>
+            </a:r>
+            <a:r>
+              <a:rPr lang="en-US" altLang="ko-KR" sz="1600" spc="-50" dirty="0"/>
+              <a:t>, </a:t>
+            </a:r>
+            <a:r>
+              <a:rPr lang="ko-KR" altLang="en-US" sz="1600" spc="-50" dirty="0"/>
+              <a:t>사람들이 근시안적으로 행동하여 위험에 대한 대비가 소홀해질 수 있다</a:t>
+            </a:r>
+            <a:r>
+              <a:rPr lang="en-US" altLang="ko-KR" sz="1600" spc="-50" dirty="0"/>
+              <a:t>.</a:t>
+            </a:r>
+          </a:p>
+          <a:p>
+            <a:pPr marL="835025" lvl="1" indent="-285750">
+              <a:lnSpc>
+                <a:spcPct val="150000"/>
+              </a:lnSpc>
+              <a:buFont typeface="Wingdings" panose="05000000000000000000" pitchFamily="2" charset="2"/>
+              <a:buChar char="ü"/>
+            </a:pPr>
+            <a:r>
+              <a:rPr lang="ko-KR" altLang="en-US" sz="1600" spc="-50" dirty="0"/>
+              <a:t>사람들은 위험에 직면하게 될 것을 짐작함에도 불구하고</a:t>
+            </a:r>
+            <a:r>
+              <a:rPr lang="en-US" altLang="ko-KR" sz="1600" spc="-50" dirty="0"/>
+              <a:t>, </a:t>
+            </a:r>
+            <a:r>
+              <a:rPr lang="ko-KR" altLang="en-US" sz="1600" spc="-50" dirty="0"/>
+              <a:t>당장 보험료가 아까워 보험에 가입하지 않을 수 있다</a:t>
+            </a:r>
+            <a:r>
+              <a:rPr lang="en-US" altLang="ko-KR" sz="1600" spc="-50" dirty="0"/>
+              <a:t>.</a:t>
+            </a:r>
+          </a:p>
+          <a:p>
+            <a:pPr marL="1292225" lvl="2" indent="-285750">
+              <a:lnSpc>
+                <a:spcPct val="150000"/>
+              </a:lnSpc>
+              <a:buFont typeface="Wingdings" panose="05000000000000000000" pitchFamily="2" charset="2"/>
+              <a:buChar char="Ø"/>
+            </a:pPr>
+            <a:r>
+              <a:rPr lang="ko-KR" altLang="en-US" sz="1600" spc="-50" dirty="0"/>
+              <a:t>사소한 경우라면 무방할 수 있지만</a:t>
+            </a:r>
+            <a:r>
+              <a:rPr lang="en-US" altLang="ko-KR" sz="1600" spc="-50" dirty="0"/>
+              <a:t>, </a:t>
+            </a:r>
+            <a:r>
+              <a:rPr lang="ko-KR" altLang="en-US" sz="1600" spc="-50" dirty="0"/>
+              <a:t>생계 자체가 위협을 받게 되는 위험이라면 정부가 개입할 필요가 생긴다</a:t>
+            </a:r>
+            <a:r>
+              <a:rPr lang="en-US" altLang="ko-KR" sz="1600" spc="-50" dirty="0"/>
+              <a:t>.</a:t>
+            </a:r>
+          </a:p>
+          <a:p>
+            <a:pPr marL="434975" indent="-342900">
+              <a:lnSpc>
+                <a:spcPct val="150000"/>
+              </a:lnSpc>
+              <a:buFont typeface="+mj-lt"/>
+              <a:buAutoNum type="arabicPeriod" startAt="3"/>
+            </a:pPr>
+            <a:r>
+              <a:rPr lang="ko-KR" altLang="en-US" sz="1600" spc="-50" dirty="0"/>
+              <a:t>어떤 상품의 경우에는 모든 국민이 고루 누릴 수 있어야 하는 상품 평등주의 관점에서 정부가 개입할 필요가 있다</a:t>
+            </a:r>
+            <a:r>
+              <a:rPr lang="en-US" altLang="ko-KR" sz="1600" spc="-50" dirty="0"/>
+              <a:t>.</a:t>
+            </a:r>
+          </a:p>
+          <a:p>
+            <a:pPr marL="892175" lvl="1" indent="-342900">
+              <a:lnSpc>
+                <a:spcPct val="150000"/>
+              </a:lnSpc>
+              <a:buFont typeface="Wingdings" panose="05000000000000000000" pitchFamily="2" charset="2"/>
+              <a:buChar char="ü"/>
+            </a:pPr>
+            <a:r>
+              <a:rPr lang="ko-KR" altLang="en-US" sz="1600" spc="-50" dirty="0"/>
+              <a:t>아픈 사람은 소득과 관계없이 의료서비스 혜택을 누릴 수 있어야 한다</a:t>
+            </a:r>
+            <a:r>
+              <a:rPr lang="en-US" altLang="ko-KR" sz="1600" spc="-50" dirty="0"/>
+              <a:t>.</a:t>
+            </a:r>
+          </a:p>
+          <a:p>
+            <a:pPr marL="1349375" lvl="2" indent="-342900">
+              <a:lnSpc>
+                <a:spcPct val="150000"/>
+              </a:lnSpc>
+              <a:buFont typeface="Wingdings" panose="05000000000000000000" pitchFamily="2" charset="2"/>
+              <a:buChar char="Ø"/>
+            </a:pPr>
+            <a:r>
+              <a:rPr lang="ko-KR" altLang="en-US" sz="1600" spc="-50" dirty="0"/>
+              <a:t>민간부문이 모든 의료보험을 운영하고 있다면</a:t>
+            </a:r>
+            <a:r>
+              <a:rPr lang="en-US" altLang="ko-KR" sz="1600" spc="-50" dirty="0"/>
+              <a:t>, </a:t>
+            </a:r>
+            <a:r>
+              <a:rPr lang="ko-KR" altLang="en-US" sz="1600" spc="-50" dirty="0"/>
+              <a:t>돈이 없어서 치료 받지 못하는 사람이 생길 수 있다</a:t>
+            </a:r>
+            <a:r>
+              <a:rPr lang="en-US" altLang="ko-KR" sz="1600" spc="-50" dirty="0"/>
+              <a:t>.</a:t>
+            </a:r>
+          </a:p>
+          <a:p>
+            <a:pPr marL="1349375" lvl="2" indent="-342900">
+              <a:lnSpc>
+                <a:spcPct val="150000"/>
+              </a:lnSpc>
+              <a:buFont typeface="Wingdings" panose="05000000000000000000" pitchFamily="2" charset="2"/>
+              <a:buChar char="Ø"/>
+            </a:pPr>
+            <a:endParaRPr lang="en-US" altLang="ko-KR" sz="1600" spc="-50" dirty="0"/>
+          </a:p>
+          <a:p>
+            <a:pPr marL="434975" indent="-342900">
+              <a:lnSpc>
+                <a:spcPct val="150000"/>
+              </a:lnSpc>
+              <a:buFont typeface="Arial" panose="020B0604020202020204" pitchFamily="34" charset="0"/>
+              <a:buChar char="•"/>
+            </a:pPr>
+            <a:r>
+              <a:rPr lang="ko-KR" altLang="en-US" sz="1600" spc="-50" dirty="0"/>
+              <a:t>정부가 운영하는 사회보험은 민간부문의 보험과 여러 측면에서 차이를 갖는다</a:t>
+            </a:r>
+            <a:r>
+              <a:rPr lang="en-US" altLang="ko-KR" sz="1600" spc="-50" dirty="0"/>
+              <a:t>.</a:t>
+            </a:r>
+          </a:p>
+          <a:p>
+            <a:pPr marL="892175" lvl="1" indent="-342900">
+              <a:lnSpc>
+                <a:spcPct val="150000"/>
+              </a:lnSpc>
+              <a:buFont typeface="Wingdings" panose="05000000000000000000" pitchFamily="2" charset="2"/>
+              <a:buChar char="ü"/>
+            </a:pPr>
+            <a:r>
+              <a:rPr lang="ko-KR" altLang="en-US" sz="1600" spc="-50" dirty="0"/>
+              <a:t>사회보험은 강제성을 가진다</a:t>
+            </a:r>
+            <a:endParaRPr lang="en-US" altLang="ko-KR" sz="1600" spc="-50" dirty="0"/>
+          </a:p>
+          <a:p>
+            <a:pPr marL="1349375" lvl="2" indent="-342900">
+              <a:lnSpc>
+                <a:spcPct val="150000"/>
+              </a:lnSpc>
+              <a:buFont typeface="Wingdings" panose="05000000000000000000" pitchFamily="2" charset="2"/>
+              <a:buChar char="Ø"/>
+            </a:pPr>
+            <a:r>
+              <a:rPr lang="ko-KR" altLang="en-US" sz="1600" spc="-50" dirty="0"/>
+              <a:t>일정한 조건을 갖춘 국민이면 반드시 사회보험에 가입하도록 되어 있다</a:t>
+            </a:r>
+            <a:r>
+              <a:rPr lang="en-US" altLang="ko-KR" sz="1600" spc="-50" dirty="0"/>
+              <a:t>.</a:t>
+            </a:r>
+          </a:p>
+          <a:p>
+            <a:pPr marL="892175" lvl="1" indent="-342900">
+              <a:lnSpc>
+                <a:spcPct val="150000"/>
+              </a:lnSpc>
+              <a:buFont typeface="Wingdings" panose="05000000000000000000" pitchFamily="2" charset="2"/>
+              <a:buChar char="ü"/>
+            </a:pPr>
+            <a:r>
+              <a:rPr lang="ko-KR" altLang="en-US" sz="1600" spc="-50" dirty="0"/>
+              <a:t>민간보험과는 달리 사회보험은 본인 외에도 고용주와 정부가 비용의 일부를 부담한다</a:t>
+            </a:r>
+            <a:r>
+              <a:rPr lang="en-US" altLang="ko-KR" sz="1600" spc="-50" dirty="0"/>
+              <a:t>.</a:t>
+            </a:r>
+          </a:p>
+          <a:p>
+            <a:pPr marL="892175" lvl="1" indent="-342900">
+              <a:lnSpc>
+                <a:spcPct val="150000"/>
+              </a:lnSpc>
+              <a:buFont typeface="Wingdings" panose="05000000000000000000" pitchFamily="2" charset="2"/>
+              <a:buChar char="ü"/>
+            </a:pPr>
+            <a:r>
+              <a:rPr lang="ko-KR" altLang="en-US" sz="1600" spc="-50" dirty="0"/>
+              <a:t>민간보험은 가입자가 낸 보험료와 혜택이 밀접한 관련을 갖는데 반해</a:t>
+            </a:r>
+            <a:r>
+              <a:rPr lang="en-US" altLang="ko-KR" sz="1600" spc="-50" dirty="0"/>
+              <a:t>, </a:t>
+            </a:r>
+            <a:r>
+              <a:rPr lang="ko-KR" altLang="en-US" sz="1600" spc="-50" dirty="0"/>
+              <a:t>사회보험은 소득의 재분배적 성격이 가미되어 사회적 정합성과 개인적 공평성을 고려한다</a:t>
+            </a:r>
+            <a:r>
+              <a:rPr lang="en-US" altLang="ko-KR" sz="1600" spc="-50" dirty="0"/>
+              <a:t>.</a:t>
+            </a:r>
+          </a:p>
+          <a:p>
+            <a:pPr marL="892175" lvl="1" indent="-342900">
+              <a:lnSpc>
+                <a:spcPct val="150000"/>
+              </a:lnSpc>
+              <a:buFont typeface="Wingdings" panose="05000000000000000000" pitchFamily="2" charset="2"/>
+              <a:buChar char="ü"/>
+            </a:pPr>
+            <a:r>
+              <a:rPr lang="en-US" altLang="ko-KR" sz="1600" spc="-50" dirty="0"/>
+              <a:t>https://www.4insure.or.kr/pbiz/feii/sinsDefIntroView.do</a:t>
+            </a:r>
+          </a:p>
+        </p:txBody>
+      </p:sp>
+    </p:spTree>
+    <p:extLst>
+      <p:ext uri="{BB962C8B-B14F-4D97-AF65-F5344CB8AC3E}">
+        <p14:creationId xmlns:p14="http://schemas.microsoft.com/office/powerpoint/2010/main" val="2724108605"/>
+      </p:ext>
+    </p:extLst>
+  </p:cSld>
+  <p:clrMapOvr>
+    <a:masterClrMapping/>
+  </p:clrMapOvr>
+</p:sld>
+</file>
+
+<file path=ppt/slides/slide50.xml><?xml version="1.0" encoding="utf-8"?>
 <p:sld xmlns:a="http://schemas.openxmlformats.org/drawingml/2006/main" xmlns:r="http://schemas.openxmlformats.org/officeDocument/2006/relationships" xmlns:p="http://schemas.openxmlformats.org/presentationml/2006/main">
   <p:cSld>
     <p:spTree>
@@ -20858,7 +23801,7 @@
           <a:p>
             <a:fld id="{109C872D-39A9-4065-8BF3-6A613116E2A1}" type="slidenum">
               <a:rPr lang="ko-KR" altLang="en-US" smtClean="0"/>
-              <a:t>46</a:t>
+              <a:t>50</a:t>
             </a:fld>
             <a:endParaRPr lang="ko-KR" altLang="en-US"/>
           </a:p>
@@ -21052,7 +23995,7 @@
 </p:sld>
 </file>
 
-<file path=ppt/slides/slide47.xml><?xml version="1.0" encoding="utf-8"?>
+<file path=ppt/slides/slide51.xml><?xml version="1.0" encoding="utf-8"?>
 <p:sld xmlns:a="http://schemas.openxmlformats.org/drawingml/2006/main" xmlns:r="http://schemas.openxmlformats.org/officeDocument/2006/relationships" xmlns:p="http://schemas.openxmlformats.org/presentationml/2006/main">
   <p:cSld>
     <p:spTree>
@@ -21126,7 +24069,7 @@
           <a:p>
             <a:fld id="{109C872D-39A9-4065-8BF3-6A613116E2A1}" type="slidenum">
               <a:rPr lang="ko-KR" altLang="en-US" smtClean="0"/>
-              <a:t>47</a:t>
+              <a:t>51</a:t>
             </a:fld>
             <a:endParaRPr lang="ko-KR" altLang="en-US"/>
           </a:p>
@@ -21316,7 +24259,7 @@
 </p:sld>
 </file>
 
-<file path=ppt/slides/slide48.xml><?xml version="1.0" encoding="utf-8"?>
+<file path=ppt/slides/slide52.xml><?xml version="1.0" encoding="utf-8"?>
 <p:sld xmlns:a="http://schemas.openxmlformats.org/drawingml/2006/main" xmlns:r="http://schemas.openxmlformats.org/officeDocument/2006/relationships" xmlns:p="http://schemas.openxmlformats.org/presentationml/2006/main">
   <p:cSld>
     <p:spTree>
@@ -21399,7 +24342,7 @@
           <a:p>
             <a:fld id="{109C872D-39A9-4065-8BF3-6A613116E2A1}" type="slidenum">
               <a:rPr lang="ko-KR" altLang="en-US" smtClean="0"/>
-              <a:t>48</a:t>
+              <a:t>52</a:t>
             </a:fld>
             <a:endParaRPr lang="ko-KR" altLang="en-US"/>
           </a:p>
@@ -21463,7 +24406,7 @@
 </p:sld>
 </file>
 
-<file path=ppt/slides/slide49.xml><?xml version="1.0" encoding="utf-8"?>
+<file path=ppt/slides/slide53.xml><?xml version="1.0" encoding="utf-8"?>
 <p:sld xmlns:a="http://schemas.openxmlformats.org/drawingml/2006/main" xmlns:r="http://schemas.openxmlformats.org/officeDocument/2006/relationships" xmlns:p="http://schemas.openxmlformats.org/presentationml/2006/main">
   <p:cSld>
     <p:spTree>
@@ -21537,7 +24480,7 @@
           <a:p>
             <a:fld id="{109C872D-39A9-4065-8BF3-6A613116E2A1}" type="slidenum">
               <a:rPr lang="ko-KR" altLang="en-US" smtClean="0"/>
-              <a:t>49</a:t>
+              <a:t>53</a:t>
             </a:fld>
             <a:endParaRPr lang="ko-KR" altLang="en-US"/>
           </a:p>
@@ -21867,376 +24810,7 @@
 </p:sld>
 </file>
 
-<file path=ppt/slides/slide5.xml><?xml version="1.0" encoding="utf-8"?>
-<p:sld xmlns:a="http://schemas.openxmlformats.org/drawingml/2006/main" xmlns:r="http://schemas.openxmlformats.org/officeDocument/2006/relationships" xmlns:p="http://schemas.openxmlformats.org/presentationml/2006/main">
-  <p:cSld>
-    <p:spTree>
-      <p:nvGrpSpPr>
-        <p:cNvPr id="1" name="">
-          <a:extLst>
-            <a:ext uri="{FF2B5EF4-FFF2-40B4-BE49-F238E27FC236}">
-              <a16:creationId xmlns:a16="http://schemas.microsoft.com/office/drawing/2014/main" id="{2A6177E6-2BE2-8810-F89F-48E53629EB8A}"/>
-            </a:ext>
-          </a:extLst>
-        </p:cNvPr>
-        <p:cNvGrpSpPr/>
-        <p:nvPr/>
-      </p:nvGrpSpPr>
-      <p:grpSpPr>
-        <a:xfrm>
-          <a:off x="0" y="0"/>
-          <a:ext cx="0" cy="0"/>
-          <a:chOff x="0" y="0"/>
-          <a:chExt cx="0" cy="0"/>
-        </a:xfrm>
-      </p:grpSpPr>
-      <p:sp>
-        <p:nvSpPr>
-          <p:cNvPr id="2" name="제목 1">
-            <a:extLst>
-              <a:ext uri="{FF2B5EF4-FFF2-40B4-BE49-F238E27FC236}">
-                <a16:creationId xmlns:a16="http://schemas.microsoft.com/office/drawing/2014/main" id="{BFA7A44D-A761-673A-4E43-DE33CE276613}"/>
-              </a:ext>
-            </a:extLst>
-          </p:cNvPr>
-          <p:cNvSpPr>
-            <a:spLocks noGrp="1"/>
-          </p:cNvSpPr>
-          <p:nvPr>
-            <p:ph type="title"/>
-          </p:nvPr>
-        </p:nvSpPr>
-        <p:spPr/>
-        <p:txBody>
-          <a:bodyPr/>
-          <a:lstStyle/>
-          <a:p>
-            <a:r>
-              <a:rPr lang="ko-KR" altLang="en-US" dirty="0"/>
-              <a:t>사회보험제도의 의미</a:t>
-            </a:r>
-          </a:p>
-        </p:txBody>
-      </p:sp>
-      <p:sp>
-        <p:nvSpPr>
-          <p:cNvPr id="4" name="슬라이드 번호 개체 틀 3">
-            <a:extLst>
-              <a:ext uri="{FF2B5EF4-FFF2-40B4-BE49-F238E27FC236}">
-                <a16:creationId xmlns:a16="http://schemas.microsoft.com/office/drawing/2014/main" id="{692F3803-4273-D729-E62C-66D07D9E6ABA}"/>
-              </a:ext>
-            </a:extLst>
-          </p:cNvPr>
-          <p:cNvSpPr>
-            <a:spLocks noGrp="1"/>
-          </p:cNvSpPr>
-          <p:nvPr>
-            <p:ph type="sldNum" sz="quarter" idx="12"/>
-          </p:nvPr>
-        </p:nvSpPr>
-        <p:spPr/>
-        <p:txBody>
-          <a:bodyPr/>
-          <a:lstStyle/>
-          <a:p>
-            <a:fld id="{109C872D-39A9-4065-8BF3-6A613116E2A1}" type="slidenum">
-              <a:rPr lang="ko-KR" altLang="en-US" smtClean="0"/>
-              <a:t>5</a:t>
-            </a:fld>
-            <a:endParaRPr lang="ko-KR" altLang="en-US"/>
-          </a:p>
-        </p:txBody>
-      </p:sp>
-      <p:sp>
-        <p:nvSpPr>
-          <p:cNvPr id="3" name="TextBox 2">
-            <a:extLst>
-              <a:ext uri="{FF2B5EF4-FFF2-40B4-BE49-F238E27FC236}">
-                <a16:creationId xmlns:a16="http://schemas.microsoft.com/office/drawing/2014/main" id="{91DCF3A8-8A08-DF37-1A5B-CD577B183587}"/>
-              </a:ext>
-            </a:extLst>
-          </p:cNvPr>
-          <p:cNvSpPr txBox="1"/>
-          <p:nvPr/>
-        </p:nvSpPr>
-        <p:spPr>
-          <a:xfrm>
-            <a:off x="288790" y="958844"/>
-            <a:ext cx="11250267" cy="5215338"/>
-          </a:xfrm>
-          <a:prstGeom prst="rect">
-            <a:avLst/>
-          </a:prstGeom>
-          <a:noFill/>
-        </p:spPr>
-        <p:txBody>
-          <a:bodyPr wrap="square" rtlCol="0" anchor="t">
-            <a:spAutoFit/>
-          </a:bodyPr>
-          <a:lstStyle/>
-          <a:p>
-            <a:pPr marL="434975" indent="-342900">
-              <a:lnSpc>
-                <a:spcPct val="150000"/>
-              </a:lnSpc>
-              <a:buFont typeface="+mj-lt"/>
-              <a:buAutoNum type="arabicPeriod" startAt="3"/>
-            </a:pPr>
-            <a:r>
-              <a:rPr lang="ko-KR" altLang="en-US" sz="1600" spc="-50" dirty="0"/>
-              <a:t>보험시장이 잘 작동한다 하더라도</a:t>
-            </a:r>
-            <a:r>
-              <a:rPr lang="en-US" altLang="ko-KR" sz="1600" spc="-50" dirty="0"/>
-              <a:t>, </a:t>
-            </a:r>
-            <a:r>
-              <a:rPr lang="ko-KR" altLang="en-US" sz="1600" spc="-50" dirty="0"/>
-              <a:t>사람들이 근시안적으로 행동하여 위험에 대한 대비가 소홀해질 수 있다</a:t>
-            </a:r>
-            <a:r>
-              <a:rPr lang="en-US" altLang="ko-KR" sz="1600" spc="-50" dirty="0"/>
-              <a:t>.</a:t>
-            </a:r>
-          </a:p>
-          <a:p>
-            <a:pPr marL="835025" lvl="1" indent="-285750">
-              <a:lnSpc>
-                <a:spcPct val="150000"/>
-              </a:lnSpc>
-              <a:buFont typeface="Wingdings" panose="05000000000000000000" pitchFamily="2" charset="2"/>
-              <a:buChar char="ü"/>
-            </a:pPr>
-            <a:r>
-              <a:rPr lang="ko-KR" altLang="en-US" sz="1600" spc="-50" dirty="0"/>
-              <a:t>사람들은 위험에 직면하게 될 것을 짐작함에도 불구하고</a:t>
-            </a:r>
-            <a:r>
-              <a:rPr lang="en-US" altLang="ko-KR" sz="1600" spc="-50" dirty="0"/>
-              <a:t>, </a:t>
-            </a:r>
-            <a:r>
-              <a:rPr lang="ko-KR" altLang="en-US" sz="1600" spc="-50" dirty="0"/>
-              <a:t>당장 보험료가 아까워 보험에 가입하지 않을 수 있다</a:t>
-            </a:r>
-            <a:r>
-              <a:rPr lang="en-US" altLang="ko-KR" sz="1600" spc="-50" dirty="0"/>
-              <a:t>.</a:t>
-            </a:r>
-          </a:p>
-          <a:p>
-            <a:pPr marL="1292225" lvl="2" indent="-285750">
-              <a:lnSpc>
-                <a:spcPct val="150000"/>
-              </a:lnSpc>
-              <a:buFont typeface="Wingdings" panose="05000000000000000000" pitchFamily="2" charset="2"/>
-              <a:buChar char="Ø"/>
-            </a:pPr>
-            <a:r>
-              <a:rPr lang="ko-KR" altLang="en-US" sz="1600" spc="-50" dirty="0"/>
-              <a:t>사소한 경우라면 무방할 수 있지만</a:t>
-            </a:r>
-            <a:r>
-              <a:rPr lang="en-US" altLang="ko-KR" sz="1600" spc="-50" dirty="0"/>
-              <a:t>, </a:t>
-            </a:r>
-            <a:r>
-              <a:rPr lang="ko-KR" altLang="en-US" sz="1600" spc="-50" dirty="0"/>
-              <a:t>생계 자체가 위협을 받게 되는 위험이라면 정부가 개입할 필요가 생긴다</a:t>
-            </a:r>
-            <a:r>
-              <a:rPr lang="en-US" altLang="ko-KR" sz="1600" spc="-50" dirty="0"/>
-              <a:t>.</a:t>
-            </a:r>
-          </a:p>
-          <a:p>
-            <a:pPr marL="434975" indent="-342900">
-              <a:lnSpc>
-                <a:spcPct val="150000"/>
-              </a:lnSpc>
-              <a:buFont typeface="+mj-lt"/>
-              <a:buAutoNum type="arabicPeriod" startAt="3"/>
-            </a:pPr>
-            <a:r>
-              <a:rPr lang="ko-KR" altLang="en-US" sz="1600" spc="-50" dirty="0"/>
-              <a:t>어떤 상품의 경우에는 모든 국민이 고루 누릴 수 있어야 하는 상품 평등주의 관점에서 정부가 개입할 필요가 있다</a:t>
-            </a:r>
-            <a:r>
-              <a:rPr lang="en-US" altLang="ko-KR" sz="1600" spc="-50" dirty="0"/>
-              <a:t>.</a:t>
-            </a:r>
-          </a:p>
-          <a:p>
-            <a:pPr marL="892175" lvl="1" indent="-342900">
-              <a:lnSpc>
-                <a:spcPct val="150000"/>
-              </a:lnSpc>
-              <a:buFont typeface="Wingdings" panose="05000000000000000000" pitchFamily="2" charset="2"/>
-              <a:buChar char="ü"/>
-            </a:pPr>
-            <a:r>
-              <a:rPr lang="ko-KR" altLang="en-US" sz="1600" spc="-50" dirty="0"/>
-              <a:t>아픈 사람은 소득과 관계없이 의료서비스 혜택을 누릴 수 있어야 한다</a:t>
-            </a:r>
-            <a:r>
-              <a:rPr lang="en-US" altLang="ko-KR" sz="1600" spc="-50" dirty="0"/>
-              <a:t>.</a:t>
-            </a:r>
-          </a:p>
-          <a:p>
-            <a:pPr marL="1349375" lvl="2" indent="-342900">
-              <a:lnSpc>
-                <a:spcPct val="150000"/>
-              </a:lnSpc>
-              <a:buFont typeface="Wingdings" panose="05000000000000000000" pitchFamily="2" charset="2"/>
-              <a:buChar char="Ø"/>
-            </a:pPr>
-            <a:r>
-              <a:rPr lang="ko-KR" altLang="en-US" sz="1600" spc="-50" dirty="0"/>
-              <a:t>민간부문이 모든 의료보험을 운영하고 있다면</a:t>
-            </a:r>
-            <a:r>
-              <a:rPr lang="en-US" altLang="ko-KR" sz="1600" spc="-50" dirty="0"/>
-              <a:t>, </a:t>
-            </a:r>
-            <a:r>
-              <a:rPr lang="ko-KR" altLang="en-US" sz="1600" spc="-50" dirty="0"/>
-              <a:t>돈이 없어서 치료 받지 못하는 사람이 생길 수 있다</a:t>
-            </a:r>
-            <a:r>
-              <a:rPr lang="en-US" altLang="ko-KR" sz="1600" spc="-50" dirty="0"/>
-              <a:t>.</a:t>
-            </a:r>
-          </a:p>
-          <a:p>
-            <a:pPr marL="1349375" lvl="2" indent="-342900">
-              <a:lnSpc>
-                <a:spcPct val="150000"/>
-              </a:lnSpc>
-              <a:buFont typeface="Wingdings" panose="05000000000000000000" pitchFamily="2" charset="2"/>
-              <a:buChar char="Ø"/>
-            </a:pPr>
-            <a:endParaRPr lang="en-US" altLang="ko-KR" sz="1600" spc="-50" dirty="0"/>
-          </a:p>
-          <a:p>
-            <a:pPr marL="434975" indent="-342900">
-              <a:lnSpc>
-                <a:spcPct val="150000"/>
-              </a:lnSpc>
-              <a:buFont typeface="Arial" panose="020B0604020202020204" pitchFamily="34" charset="0"/>
-              <a:buChar char="•"/>
-            </a:pPr>
-            <a:r>
-              <a:rPr lang="ko-KR" altLang="en-US" sz="1600" spc="-50" dirty="0"/>
-              <a:t>정부가 운영하는 사회보험은 민간부문의 보험과 여러 측면에서 차이를 갖는다</a:t>
-            </a:r>
-            <a:r>
-              <a:rPr lang="en-US" altLang="ko-KR" sz="1600" spc="-50" dirty="0"/>
-              <a:t>.</a:t>
-            </a:r>
-          </a:p>
-          <a:p>
-            <a:pPr marL="892175" lvl="1" indent="-342900">
-              <a:lnSpc>
-                <a:spcPct val="150000"/>
-              </a:lnSpc>
-              <a:buFont typeface="Wingdings" panose="05000000000000000000" pitchFamily="2" charset="2"/>
-              <a:buChar char="ü"/>
-            </a:pPr>
-            <a:r>
-              <a:rPr lang="ko-KR" altLang="en-US" sz="1600" spc="-50" dirty="0"/>
-              <a:t>사회보험은 강제성을 가진다</a:t>
-            </a:r>
-            <a:endParaRPr lang="en-US" altLang="ko-KR" sz="1600" spc="-50" dirty="0"/>
-          </a:p>
-          <a:p>
-            <a:pPr marL="1349375" lvl="2" indent="-342900">
-              <a:lnSpc>
-                <a:spcPct val="150000"/>
-              </a:lnSpc>
-              <a:buFont typeface="Wingdings" panose="05000000000000000000" pitchFamily="2" charset="2"/>
-              <a:buChar char="Ø"/>
-            </a:pPr>
-            <a:r>
-              <a:rPr lang="ko-KR" altLang="en-US" sz="1600" spc="-50" dirty="0"/>
-              <a:t>일정한 조건을 갖춘 국민이면 반드시 사회보험에 가입하도록 되어 있다</a:t>
-            </a:r>
-            <a:r>
-              <a:rPr lang="en-US" altLang="ko-KR" sz="1600" spc="-50" dirty="0"/>
-              <a:t>.</a:t>
-            </a:r>
-          </a:p>
-          <a:p>
-            <a:pPr marL="892175" lvl="1" indent="-342900">
-              <a:lnSpc>
-                <a:spcPct val="150000"/>
-              </a:lnSpc>
-              <a:buFont typeface="Wingdings" panose="05000000000000000000" pitchFamily="2" charset="2"/>
-              <a:buChar char="ü"/>
-            </a:pPr>
-            <a:r>
-              <a:rPr lang="ko-KR" altLang="en-US" sz="1600" spc="-50" dirty="0"/>
-              <a:t>민간보험과는 달리 사회보험은 본인 외에도 고용주와 정부가 비용의 일부를 부담한다</a:t>
-            </a:r>
-            <a:r>
-              <a:rPr lang="en-US" altLang="ko-KR" sz="1600" spc="-50" dirty="0"/>
-              <a:t>.</a:t>
-            </a:r>
-          </a:p>
-          <a:p>
-            <a:pPr marL="892175" lvl="1" indent="-342900">
-              <a:lnSpc>
-                <a:spcPct val="150000"/>
-              </a:lnSpc>
-              <a:buFont typeface="Wingdings" panose="05000000000000000000" pitchFamily="2" charset="2"/>
-              <a:buChar char="ü"/>
-            </a:pPr>
-            <a:r>
-              <a:rPr lang="ko-KR" altLang="en-US" sz="1600" spc="-50" dirty="0"/>
-              <a:t>민간보험은 가입자가 낸 보험료와 혜택이 밀접한 관련을 갖는데 반해</a:t>
-            </a:r>
-            <a:r>
-              <a:rPr lang="en-US" altLang="ko-KR" sz="1600" spc="-50" dirty="0"/>
-              <a:t>, </a:t>
-            </a:r>
-            <a:r>
-              <a:rPr lang="ko-KR" altLang="en-US" sz="1600" spc="-50" dirty="0"/>
-              <a:t>사회보험은 소득의 재분배적 성격이 가미되어 사회적 정합성과 개인적 공평성을 고려한다</a:t>
-            </a:r>
-            <a:r>
-              <a:rPr lang="en-US" altLang="ko-KR" sz="1600" spc="-50" dirty="0"/>
-              <a:t>.</a:t>
-            </a:r>
-          </a:p>
-          <a:p>
-            <a:pPr marL="892175" lvl="1" indent="-342900">
-              <a:lnSpc>
-                <a:spcPct val="150000"/>
-              </a:lnSpc>
-              <a:buFont typeface="Wingdings" panose="05000000000000000000" pitchFamily="2" charset="2"/>
-              <a:buChar char="ü"/>
-            </a:pPr>
-            <a:r>
-              <a:rPr lang="en-US" altLang="ko-KR" sz="1600" spc="-50" dirty="0"/>
-              <a:t>https://www.4insure.or.kr/pbiz/feii/sinsDefIntroView.do</a:t>
-            </a:r>
-          </a:p>
-        </p:txBody>
-      </p:sp>
-    </p:spTree>
-    <p:extLst>
-      <p:ext uri="{BB962C8B-B14F-4D97-AF65-F5344CB8AC3E}">
-        <p14:creationId xmlns:p14="http://schemas.microsoft.com/office/powerpoint/2010/main" val="2724108605"/>
-      </p:ext>
-    </p:extLst>
-  </p:cSld>
-  <p:clrMapOvr>
-    <a:masterClrMapping/>
-  </p:clrMapOvr>
-</p:sld>
-</file>
-
-<file path=ppt/slides/slide50.xml><?xml version="1.0" encoding="utf-8"?>
+<file path=ppt/slides/slide54.xml><?xml version="1.0" encoding="utf-8"?>
 <p:sld xmlns:a="http://schemas.openxmlformats.org/drawingml/2006/main" xmlns:r="http://schemas.openxmlformats.org/officeDocument/2006/relationships" xmlns:p="http://schemas.openxmlformats.org/presentationml/2006/main">
   <p:cSld>
     <p:spTree>
@@ -22364,7 +24938,7 @@
           <a:p>
             <a:fld id="{109C872D-39A9-4065-8BF3-6A613116E2A1}" type="slidenum">
               <a:rPr lang="ko-KR" altLang="en-US" smtClean="0"/>
-              <a:t>50</a:t>
+              <a:t>54</a:t>
             </a:fld>
             <a:endParaRPr lang="ko-KR" altLang="en-US"/>
           </a:p>
@@ -23077,8 +25651,8 @@
           </a:p>
         </p:txBody>
       </p:sp>
-      <mc:AlternateContent xmlns:mc="http://schemas.openxmlformats.org/markup-compatibility/2006">
-        <mc:Choice xmlns:a14="http://schemas.microsoft.com/office/drawing/2010/main" Requires="a14">
+      <mc:AlternateContent xmlns:mc="http://schemas.openxmlformats.org/markup-compatibility/2006" xmlns:a14="http://schemas.microsoft.com/office/drawing/2010/main">
+        <mc:Choice Requires="a14">
           <p:sp>
             <p:nvSpPr>
               <p:cNvPr id="3" name="TextBox 2">
@@ -23503,7 +26077,7 @@
             </p:txBody>
           </p:sp>
         </mc:Choice>
-        <mc:Fallback>
+        <mc:Fallback xmlns="">
           <p:sp>
             <p:nvSpPr>
               <p:cNvPr id="3" name="TextBox 2">

--- a/재정학/01_Lectures/재정학_Chapter_10.pptx
+++ b/재정학/01_Lectures/재정학_Chapter_10.pptx
@@ -5,7 +5,7 @@
     <p:sldMasterId id="2147483648" r:id="rId1"/>
   </p:sldMasterIdLst>
   <p:notesMasterIdLst>
-    <p:notesMasterId r:id="rId56"/>
+    <p:notesMasterId r:id="rId60"/>
   </p:notesMasterIdLst>
   <p:sldIdLst>
     <p:sldId id="375" r:id="rId2"/>
@@ -32,36 +32,40 @@
     <p:sldId id="773" r:id="rId23"/>
     <p:sldId id="774" r:id="rId24"/>
     <p:sldId id="754" r:id="rId25"/>
-    <p:sldId id="755" r:id="rId26"/>
-    <p:sldId id="756" r:id="rId27"/>
-    <p:sldId id="757" r:id="rId28"/>
-    <p:sldId id="729" r:id="rId29"/>
-    <p:sldId id="730" r:id="rId30"/>
-    <p:sldId id="731" r:id="rId31"/>
-    <p:sldId id="726" r:id="rId32"/>
-    <p:sldId id="732" r:id="rId33"/>
-    <p:sldId id="733" r:id="rId34"/>
-    <p:sldId id="734" r:id="rId35"/>
-    <p:sldId id="735" r:id="rId36"/>
-    <p:sldId id="736" r:id="rId37"/>
-    <p:sldId id="737" r:id="rId38"/>
-    <p:sldId id="738" r:id="rId39"/>
-    <p:sldId id="739" r:id="rId40"/>
-    <p:sldId id="740" r:id="rId41"/>
-    <p:sldId id="741" r:id="rId42"/>
-    <p:sldId id="742" r:id="rId43"/>
-    <p:sldId id="743" r:id="rId44"/>
-    <p:sldId id="744" r:id="rId45"/>
-    <p:sldId id="745" r:id="rId46"/>
-    <p:sldId id="727" r:id="rId47"/>
-    <p:sldId id="746" r:id="rId48"/>
-    <p:sldId id="747" r:id="rId49"/>
-    <p:sldId id="748" r:id="rId50"/>
-    <p:sldId id="749" r:id="rId51"/>
-    <p:sldId id="750" r:id="rId52"/>
-    <p:sldId id="728" r:id="rId53"/>
-    <p:sldId id="751" r:id="rId54"/>
-    <p:sldId id="364" r:id="rId55"/>
+    <p:sldId id="775" r:id="rId26"/>
+    <p:sldId id="776" r:id="rId27"/>
+    <p:sldId id="778" r:id="rId28"/>
+    <p:sldId id="755" r:id="rId29"/>
+    <p:sldId id="779" r:id="rId30"/>
+    <p:sldId id="756" r:id="rId31"/>
+    <p:sldId id="757" r:id="rId32"/>
+    <p:sldId id="729" r:id="rId33"/>
+    <p:sldId id="730" r:id="rId34"/>
+    <p:sldId id="731" r:id="rId35"/>
+    <p:sldId id="726" r:id="rId36"/>
+    <p:sldId id="732" r:id="rId37"/>
+    <p:sldId id="733" r:id="rId38"/>
+    <p:sldId id="734" r:id="rId39"/>
+    <p:sldId id="735" r:id="rId40"/>
+    <p:sldId id="736" r:id="rId41"/>
+    <p:sldId id="737" r:id="rId42"/>
+    <p:sldId id="738" r:id="rId43"/>
+    <p:sldId id="739" r:id="rId44"/>
+    <p:sldId id="740" r:id="rId45"/>
+    <p:sldId id="741" r:id="rId46"/>
+    <p:sldId id="742" r:id="rId47"/>
+    <p:sldId id="743" r:id="rId48"/>
+    <p:sldId id="744" r:id="rId49"/>
+    <p:sldId id="745" r:id="rId50"/>
+    <p:sldId id="727" r:id="rId51"/>
+    <p:sldId id="746" r:id="rId52"/>
+    <p:sldId id="747" r:id="rId53"/>
+    <p:sldId id="748" r:id="rId54"/>
+    <p:sldId id="749" r:id="rId55"/>
+    <p:sldId id="750" r:id="rId56"/>
+    <p:sldId id="728" r:id="rId57"/>
+    <p:sldId id="751" r:id="rId58"/>
+    <p:sldId id="364" r:id="rId59"/>
   </p:sldIdLst>
   <p:sldSz cx="12192000" cy="6858000"/>
   <p:notesSz cx="6858000" cy="9144000"/>
@@ -272,7 +276,7 @@
           <a:p>
             <a:fld id="{4A5E00EF-AEA4-43E2-9451-8F9C59A39471}" type="datetimeFigureOut">
               <a:rPr lang="ko-KR" altLang="en-US" smtClean="0"/>
-              <a:t>2026-04-02</a:t>
+              <a:t>2026-04-07</a:t>
             </a:fld>
             <a:endParaRPr lang="ko-KR" altLang="en-US"/>
           </a:p>
@@ -694,7 +698,7 @@
           <a:p>
             <a:fld id="{CD32C56F-BD27-4999-9E6D-D4EACE3DA9F4}" type="datetime1">
               <a:rPr lang="ko-KR" altLang="en-US" smtClean="0"/>
-              <a:t>2026-04-02</a:t>
+              <a:t>2026-04-07</a:t>
             </a:fld>
             <a:endParaRPr lang="ko-KR" altLang="en-US"/>
           </a:p>
@@ -908,7 +912,7 @@
           <a:p>
             <a:fld id="{8EF4A19C-72C8-45CA-8E3F-68A7FA345D6C}" type="datetime1">
               <a:rPr lang="ko-KR" altLang="en-US" smtClean="0"/>
-              <a:t>2026-04-02</a:t>
+              <a:t>2026-04-07</a:t>
             </a:fld>
             <a:endParaRPr lang="ko-KR" altLang="en-US"/>
           </a:p>
@@ -1132,7 +1136,7 @@
           <a:p>
             <a:fld id="{56A175B2-010B-4341-954C-5F8F5C70B124}" type="datetime1">
               <a:rPr lang="ko-KR" altLang="en-US" smtClean="0"/>
-              <a:t>2026-04-02</a:t>
+              <a:t>2026-04-07</a:t>
             </a:fld>
             <a:endParaRPr lang="ko-KR" altLang="en-US"/>
           </a:p>
@@ -1346,7 +1350,7 @@
           <a:p>
             <a:fld id="{16B83F9E-22C9-45CA-9E85-070F1D3EF530}" type="datetime1">
               <a:rPr lang="ko-KR" altLang="en-US" smtClean="0"/>
-              <a:t>2026-04-02</a:t>
+              <a:t>2026-04-07</a:t>
             </a:fld>
             <a:endParaRPr lang="ko-KR" altLang="en-US"/>
           </a:p>
@@ -1637,7 +1641,7 @@
           <a:p>
             <a:fld id="{03278F45-FB3C-4C4D-B89A-7BC3F5F229F6}" type="datetime1">
               <a:rPr lang="ko-KR" altLang="en-US" smtClean="0"/>
-              <a:t>2026-04-02</a:t>
+              <a:t>2026-04-07</a:t>
             </a:fld>
             <a:endParaRPr lang="ko-KR" altLang="en-US"/>
           </a:p>
@@ -2030,7 +2034,7 @@
           <a:p>
             <a:fld id="{38FDAC3C-35A6-415C-9F03-738A6AC328B1}" type="datetime1">
               <a:rPr lang="ko-KR" altLang="en-US" smtClean="0"/>
-              <a:t>2026-04-02</a:t>
+              <a:t>2026-04-07</a:t>
             </a:fld>
             <a:endParaRPr lang="ko-KR" altLang="en-US"/>
           </a:p>
@@ -3624,7 +3628,7 @@
           <a:p>
             <a:fld id="{507A0DF1-AEE6-4B0D-89D2-351E7B3EF65C}" type="datetime1">
               <a:rPr lang="ko-KR" altLang="en-US" smtClean="0"/>
-              <a:t>2026-04-02</a:t>
+              <a:t>2026-04-07</a:t>
             </a:fld>
             <a:endParaRPr lang="ko-KR" altLang="en-US"/>
           </a:p>
@@ -4052,7 +4056,7 @@
           <a:p>
             <a:fld id="{CA93B8C9-630F-4D57-944D-04FD37CECCD3}" type="datetime1">
               <a:rPr lang="ko-KR" altLang="en-US" smtClean="0"/>
-              <a:t>2026-04-02</a:t>
+              <a:t>2026-04-07</a:t>
             </a:fld>
             <a:endParaRPr lang="ko-KR" altLang="en-US"/>
           </a:p>
@@ -4209,7 +4213,7 @@
           <a:p>
             <a:fld id="{E986165A-AC43-4902-9541-874ECD310BA3}" type="datetime1">
               <a:rPr lang="ko-KR" altLang="en-US" smtClean="0"/>
-              <a:t>2026-04-02</a:t>
+              <a:t>2026-04-07</a:t>
             </a:fld>
             <a:endParaRPr lang="ko-KR" altLang="en-US"/>
           </a:p>
@@ -4536,7 +4540,7 @@
           <a:p>
             <a:fld id="{47E6EE6D-2B0E-43A9-87A2-7354CDB998F4}" type="datetime1">
               <a:rPr lang="ko-KR" altLang="en-US" smtClean="0"/>
-              <a:t>2026-04-02</a:t>
+              <a:t>2026-04-07</a:t>
             </a:fld>
             <a:endParaRPr lang="ko-KR" altLang="en-US"/>
           </a:p>
@@ -4840,7 +4844,7 @@
           <a:p>
             <a:fld id="{5CC5944E-0BC8-4FAA-9F94-6B4B05834E10}" type="datetime1">
               <a:rPr lang="ko-KR" altLang="en-US" smtClean="0"/>
-              <a:t>2026-04-02</a:t>
+              <a:t>2026-04-07</a:t>
             </a:fld>
             <a:endParaRPr lang="ko-KR" altLang="en-US"/>
           </a:p>
@@ -10115,8 +10119,8 @@
           </a:p>
         </p:txBody>
       </p:sp>
-      <mc:AlternateContent xmlns:mc="http://schemas.openxmlformats.org/markup-compatibility/2006">
-        <mc:Choice xmlns:a14="http://schemas.microsoft.com/office/drawing/2010/main" Requires="a14">
+      <mc:AlternateContent xmlns:mc="http://schemas.openxmlformats.org/markup-compatibility/2006" xmlns:a14="http://schemas.microsoft.com/office/drawing/2010/main">
+        <mc:Choice Requires="a14">
           <p:sp>
             <p:nvSpPr>
               <p:cNvPr id="3" name="TextBox 2">
@@ -10536,7 +10540,7 @@
             </p:txBody>
           </p:sp>
         </mc:Choice>
-        <mc:Fallback>
+        <mc:Fallback xmlns="">
           <p:sp>
             <p:nvSpPr>
               <p:cNvPr id="3" name="TextBox 2">
@@ -10581,8 +10585,8 @@
           </p:sp>
         </mc:Fallback>
       </mc:AlternateContent>
-      <mc:AlternateContent xmlns:mc="http://schemas.openxmlformats.org/markup-compatibility/2006">
-        <mc:Choice xmlns:a14="http://schemas.microsoft.com/office/drawing/2010/main" Requires="a14">
+      <mc:AlternateContent xmlns:mc="http://schemas.openxmlformats.org/markup-compatibility/2006" xmlns:a14="http://schemas.microsoft.com/office/drawing/2010/main">
+        <mc:Choice Requires="a14">
           <p:sp>
             <p:nvSpPr>
               <p:cNvPr id="5" name="TextBox 4">
@@ -10611,6 +10615,7 @@
               </a:bodyPr>
               <a:lstStyle/>
               <a:p>
+                <a:pPr/>
                 <a14:m>
                   <m:oMathPara xmlns:m="http://schemas.openxmlformats.org/officeDocument/2006/math">
                     <m:oMathParaPr>
@@ -10741,7 +10746,7 @@
             </p:txBody>
           </p:sp>
         </mc:Choice>
-        <mc:Fallback>
+        <mc:Fallback xmlns="">
           <p:sp>
             <p:nvSpPr>
               <p:cNvPr id="5" name="TextBox 4">
@@ -10786,8 +10791,8 @@
           </p:sp>
         </mc:Fallback>
       </mc:AlternateContent>
-      <mc:AlternateContent xmlns:mc="http://schemas.openxmlformats.org/markup-compatibility/2006">
-        <mc:Choice xmlns:a14="http://schemas.microsoft.com/office/drawing/2010/main" Requires="a14">
+      <mc:AlternateContent xmlns:mc="http://schemas.openxmlformats.org/markup-compatibility/2006" xmlns:a14="http://schemas.microsoft.com/office/drawing/2010/main">
+        <mc:Choice Requires="a14">
           <p:sp>
             <p:nvSpPr>
               <p:cNvPr id="6" name="TextBox 5">
@@ -10816,6 +10821,7 @@
               </a:bodyPr>
               <a:lstStyle/>
               <a:p>
+                <a:pPr/>
                 <a14:m>
                   <m:oMathPara xmlns:m="http://schemas.openxmlformats.org/officeDocument/2006/math">
                     <m:oMathParaPr>
@@ -10960,7 +10966,7 @@
             </p:txBody>
           </p:sp>
         </mc:Choice>
-        <mc:Fallback>
+        <mc:Fallback xmlns="">
           <p:sp>
             <p:nvSpPr>
               <p:cNvPr id="6" name="TextBox 5">
@@ -11247,8 +11253,8 @@
           </a:p>
         </p:txBody>
       </p:sp>
-      <mc:AlternateContent xmlns:mc="http://schemas.openxmlformats.org/markup-compatibility/2006">
-        <mc:Choice xmlns:a14="http://schemas.microsoft.com/office/drawing/2010/main" Requires="a14">
+      <mc:AlternateContent xmlns:mc="http://schemas.openxmlformats.org/markup-compatibility/2006" xmlns:a14="http://schemas.microsoft.com/office/drawing/2010/main">
+        <mc:Choice Requires="a14">
           <p:sp>
             <p:nvSpPr>
               <p:cNvPr id="3" name="TextBox 2">
@@ -11693,7 +11699,7 @@
             </p:txBody>
           </p:sp>
         </mc:Choice>
-        <mc:Fallback>
+        <mc:Fallback xmlns="">
           <p:sp>
             <p:nvSpPr>
               <p:cNvPr id="3" name="TextBox 2">
@@ -11738,8 +11744,8 @@
           </p:sp>
         </mc:Fallback>
       </mc:AlternateContent>
-      <mc:AlternateContent xmlns:mc="http://schemas.openxmlformats.org/markup-compatibility/2006">
-        <mc:Choice xmlns:a14="http://schemas.microsoft.com/office/drawing/2010/main" Requires="a14">
+      <mc:AlternateContent xmlns:mc="http://schemas.openxmlformats.org/markup-compatibility/2006" xmlns:a14="http://schemas.microsoft.com/office/drawing/2010/main">
+        <mc:Choice Requires="a14">
           <p:sp>
             <p:nvSpPr>
               <p:cNvPr id="6" name="TextBox 5">
@@ -11768,6 +11774,7 @@
               </a:bodyPr>
               <a:lstStyle/>
               <a:p>
+                <a:pPr/>
                 <a14:m>
                   <m:oMathPara xmlns:m="http://schemas.openxmlformats.org/officeDocument/2006/math">
                     <m:oMathParaPr>
@@ -11912,7 +11919,7 @@
             </p:txBody>
           </p:sp>
         </mc:Choice>
-        <mc:Fallback>
+        <mc:Fallback xmlns="">
           <p:sp>
             <p:nvSpPr>
               <p:cNvPr id="6" name="TextBox 5">
@@ -13053,6 +13060,1163 @@
         <p:cNvPr id="1" name="">
           <a:extLst>
             <a:ext uri="{FF2B5EF4-FFF2-40B4-BE49-F238E27FC236}">
+              <a16:creationId xmlns:a16="http://schemas.microsoft.com/office/drawing/2014/main" id="{F87A671A-FAA7-E5AA-12BD-45342FAB359F}"/>
+            </a:ext>
+          </a:extLst>
+        </p:cNvPr>
+        <p:cNvGrpSpPr/>
+        <p:nvPr/>
+      </p:nvGrpSpPr>
+      <p:grpSpPr>
+        <a:xfrm>
+          <a:off x="0" y="0"/>
+          <a:ext cx="0" cy="0"/>
+          <a:chOff x="0" y="0"/>
+          <a:chExt cx="0" cy="0"/>
+        </a:xfrm>
+      </p:grpSpPr>
+      <p:sp>
+        <p:nvSpPr>
+          <p:cNvPr id="2" name="제목 1">
+            <a:extLst>
+              <a:ext uri="{FF2B5EF4-FFF2-40B4-BE49-F238E27FC236}">
+                <a16:creationId xmlns:a16="http://schemas.microsoft.com/office/drawing/2014/main" id="{8755EA36-73F9-DA21-47F6-1584F45D1207}"/>
+              </a:ext>
+            </a:extLst>
+          </p:cNvPr>
+          <p:cNvSpPr>
+            <a:spLocks noGrp="1"/>
+          </p:cNvSpPr>
+          <p:nvPr>
+            <p:ph type="title"/>
+          </p:nvPr>
+        </p:nvSpPr>
+        <p:spPr/>
+        <p:txBody>
+          <a:bodyPr/>
+          <a:lstStyle/>
+          <a:p>
+            <a:r>
+              <a:rPr lang="ko-KR" altLang="en-US" dirty="0"/>
+              <a:t>저축행위에 미치는 영향</a:t>
+            </a:r>
+          </a:p>
+        </p:txBody>
+      </p:sp>
+      <p:sp>
+        <p:nvSpPr>
+          <p:cNvPr id="4" name="슬라이드 번호 개체 틀 3">
+            <a:extLst>
+              <a:ext uri="{FF2B5EF4-FFF2-40B4-BE49-F238E27FC236}">
+                <a16:creationId xmlns:a16="http://schemas.microsoft.com/office/drawing/2014/main" id="{F46635AF-EC17-17CF-F3FD-A26A34BFB2D8}"/>
+              </a:ext>
+            </a:extLst>
+          </p:cNvPr>
+          <p:cNvSpPr>
+            <a:spLocks noGrp="1"/>
+          </p:cNvSpPr>
+          <p:nvPr>
+            <p:ph type="sldNum" sz="quarter" idx="12"/>
+          </p:nvPr>
+        </p:nvSpPr>
+        <p:spPr/>
+        <p:txBody>
+          <a:bodyPr/>
+          <a:lstStyle/>
+          <a:p>
+            <a:fld id="{109C872D-39A9-4065-8BF3-6A613116E2A1}" type="slidenum">
+              <a:rPr lang="ko-KR" altLang="en-US" smtClean="0"/>
+              <a:t>25</a:t>
+            </a:fld>
+            <a:endParaRPr lang="ko-KR" altLang="en-US"/>
+          </a:p>
+        </p:txBody>
+      </p:sp>
+      <p:sp>
+        <p:nvSpPr>
+          <p:cNvPr id="3" name="TextBox 2">
+            <a:extLst>
+              <a:ext uri="{FF2B5EF4-FFF2-40B4-BE49-F238E27FC236}">
+                <a16:creationId xmlns:a16="http://schemas.microsoft.com/office/drawing/2014/main" id="{BAE195FE-E67F-26A3-44A3-0217297114CC}"/>
+              </a:ext>
+            </a:extLst>
+          </p:cNvPr>
+          <p:cNvSpPr txBox="1"/>
+          <p:nvPr/>
+        </p:nvSpPr>
+        <p:spPr>
+          <a:xfrm>
+            <a:off x="288790" y="958844"/>
+            <a:ext cx="11250267" cy="5215338"/>
+          </a:xfrm>
+          <a:prstGeom prst="rect">
+            <a:avLst/>
+          </a:prstGeom>
+          <a:noFill/>
+        </p:spPr>
+        <p:txBody>
+          <a:bodyPr wrap="square" rtlCol="0" anchor="t">
+            <a:spAutoFit/>
+          </a:bodyPr>
+          <a:lstStyle/>
+          <a:p>
+            <a:pPr marL="377825" indent="-285750">
+              <a:lnSpc>
+                <a:spcPct val="150000"/>
+              </a:lnSpc>
+              <a:buFont typeface="Arial" panose="020B0604020202020204" pitchFamily="34" charset="0"/>
+              <a:buChar char="•"/>
+            </a:pPr>
+            <a:r>
+              <a:rPr lang="ko-KR" altLang="en-US" sz="1600" spc="-50" dirty="0"/>
+              <a:t>국민연금 운용규모는 국내총생산의 </a:t>
+            </a:r>
+            <a:r>
+              <a:rPr lang="en-US" altLang="ko-KR" sz="1600" spc="-50" dirty="0"/>
+              <a:t>50%</a:t>
+            </a:r>
+            <a:r>
+              <a:rPr lang="ko-KR" altLang="en-US" sz="1600" spc="-50" dirty="0"/>
+              <a:t>에 근접할 정도로 크게 성장하였고</a:t>
+            </a:r>
+            <a:r>
+              <a:rPr lang="en-US" altLang="ko-KR" sz="1600" spc="-50" dirty="0"/>
+              <a:t>, </a:t>
+            </a:r>
+            <a:r>
+              <a:rPr lang="ko-KR" altLang="en-US" sz="1600" spc="-50" dirty="0"/>
+              <a:t>따라서 민간부문의 여러 가지 경제활동에 영향을 주게 된다</a:t>
+            </a:r>
+            <a:r>
+              <a:rPr lang="en-US" altLang="ko-KR" sz="1600" spc="-50" dirty="0"/>
+              <a:t>.</a:t>
+            </a:r>
+          </a:p>
+          <a:p>
+            <a:pPr marL="835025" lvl="1" indent="-285750">
+              <a:lnSpc>
+                <a:spcPct val="150000"/>
+              </a:lnSpc>
+              <a:buFont typeface="Wingdings" panose="05000000000000000000" pitchFamily="2" charset="2"/>
+              <a:buChar char="ü"/>
+            </a:pPr>
+            <a:r>
+              <a:rPr lang="ko-KR" altLang="en-US" sz="1600" spc="-50" dirty="0"/>
+              <a:t>특히 사람들의 저축과 노동공급 행위에 큰 영향을 미친다</a:t>
+            </a:r>
+            <a:r>
+              <a:rPr lang="en-US" altLang="ko-KR" sz="1600" spc="-50" dirty="0"/>
+              <a:t>.</a:t>
+            </a:r>
+          </a:p>
+          <a:p>
+            <a:pPr marL="377825" indent="-285750">
+              <a:lnSpc>
+                <a:spcPct val="150000"/>
+              </a:lnSpc>
+              <a:buFont typeface="Arial" panose="020B0604020202020204" pitchFamily="34" charset="0"/>
+              <a:buChar char="•"/>
+            </a:pPr>
+            <a:endParaRPr lang="en-US" altLang="ko-KR" sz="1600" spc="-50" dirty="0"/>
+          </a:p>
+          <a:p>
+            <a:pPr marL="377825" indent="-285750">
+              <a:lnSpc>
+                <a:spcPct val="150000"/>
+              </a:lnSpc>
+              <a:buFont typeface="Arial" panose="020B0604020202020204" pitchFamily="34" charset="0"/>
+              <a:buChar char="•"/>
+            </a:pPr>
+            <a:r>
+              <a:rPr lang="ko-KR" altLang="en-US" sz="1600" spc="-50" dirty="0"/>
+              <a:t>국민연금제도는 다음의 경로를 통해 저축행위에 영향을 줄 수 있다</a:t>
+            </a:r>
+            <a:r>
+              <a:rPr lang="en-US" altLang="ko-KR" sz="1600" spc="-50" dirty="0"/>
+              <a:t>.</a:t>
+            </a:r>
+          </a:p>
+          <a:p>
+            <a:pPr marL="835025" lvl="1" indent="-285750">
+              <a:lnSpc>
+                <a:spcPct val="150000"/>
+              </a:lnSpc>
+              <a:buFont typeface="Wingdings" panose="05000000000000000000" pitchFamily="2" charset="2"/>
+              <a:buChar char="ü"/>
+            </a:pPr>
+            <a:r>
+              <a:rPr lang="ko-KR" altLang="en-US" sz="1600" spc="-50" dirty="0"/>
+              <a:t>첫째는 재산대체효과 인데</a:t>
+            </a:r>
+            <a:r>
+              <a:rPr lang="en-US" altLang="ko-KR" sz="1600" spc="-50" dirty="0"/>
+              <a:t>, </a:t>
+            </a:r>
+            <a:r>
+              <a:rPr lang="ko-KR" altLang="en-US" sz="1600" spc="-50" dirty="0"/>
+              <a:t>정부의 강제저축 프로그램 때문에 자발적인 저축의 필요성이 줄어드는 것을 의미한다</a:t>
+            </a:r>
+            <a:r>
+              <a:rPr lang="en-US" altLang="ko-KR" sz="1600" spc="-50" dirty="0"/>
+              <a:t>.</a:t>
+            </a:r>
+          </a:p>
+          <a:p>
+            <a:pPr marL="1292225" lvl="2" indent="-285750">
+              <a:lnSpc>
+                <a:spcPct val="150000"/>
+              </a:lnSpc>
+              <a:buFont typeface="Wingdings" panose="05000000000000000000" pitchFamily="2" charset="2"/>
+              <a:buChar char="Ø"/>
+            </a:pPr>
+            <a:r>
+              <a:rPr lang="ko-KR" altLang="en-US" sz="1600" spc="-50" dirty="0"/>
+              <a:t>사람들이 강제저축에 의해 형성된 재산을 개인 재산의 대체물로 인식하고 자발적인 저축을 줄인다고 의미에서 이런 이름이 붙여졌다</a:t>
+            </a:r>
+            <a:r>
+              <a:rPr lang="en-US" altLang="ko-KR" sz="1600" spc="-50" dirty="0"/>
+              <a:t>.</a:t>
+            </a:r>
+          </a:p>
+          <a:p>
+            <a:pPr marL="1292225" lvl="2" indent="-285750">
+              <a:lnSpc>
+                <a:spcPct val="150000"/>
+              </a:lnSpc>
+              <a:buFont typeface="Wingdings" panose="05000000000000000000" pitchFamily="2" charset="2"/>
+              <a:buChar char="Ø"/>
+            </a:pPr>
+            <a:r>
+              <a:rPr lang="ko-KR" altLang="en-US" sz="1600" spc="-50" dirty="0"/>
+              <a:t>앞에서 살펴봤듯이</a:t>
+            </a:r>
+            <a:r>
+              <a:rPr lang="en-US" altLang="ko-KR" sz="1600" spc="-50" dirty="0"/>
+              <a:t>, </a:t>
+            </a:r>
+            <a:r>
+              <a:rPr lang="ko-KR" altLang="en-US" sz="1600" spc="-50" dirty="0"/>
+              <a:t>완전한 적립방식을 채택하고 있다면 민간의 저축 감소가 정부의 저축 증가로 상쇄될 수 있을 것이다</a:t>
+            </a:r>
+            <a:r>
+              <a:rPr lang="en-US" altLang="ko-KR" sz="1600" spc="-50" dirty="0"/>
+              <a:t>. </a:t>
+            </a:r>
+            <a:r>
+              <a:rPr lang="ko-KR" altLang="en-US" sz="1600" spc="-50" dirty="0"/>
+              <a:t>하지만 올해 거둔 세금으로 올해 연금을 지급하는 부과방식에서는 민간의 저축이 줄어들기만 한다</a:t>
+            </a:r>
+            <a:r>
+              <a:rPr lang="en-US" altLang="ko-KR" sz="1600" spc="-50" dirty="0"/>
+              <a:t>.</a:t>
+            </a:r>
+          </a:p>
+          <a:p>
+            <a:pPr marL="835025" lvl="1" indent="-285750">
+              <a:lnSpc>
+                <a:spcPct val="150000"/>
+              </a:lnSpc>
+              <a:buFont typeface="Wingdings" panose="05000000000000000000" pitchFamily="2" charset="2"/>
+              <a:buChar char="ü"/>
+            </a:pPr>
+            <a:r>
+              <a:rPr lang="ko-KR" altLang="en-US" sz="1600" spc="-50" dirty="0"/>
+              <a:t>둘째는 은퇴효과 인데</a:t>
+            </a:r>
+            <a:r>
+              <a:rPr lang="en-US" altLang="ko-KR" sz="1600" spc="-50" dirty="0"/>
+              <a:t>, </a:t>
+            </a:r>
+            <a:r>
+              <a:rPr lang="ko-KR" altLang="en-US" sz="1600" spc="-50" dirty="0"/>
+              <a:t>국민연금제도의 도입이 퇴직상태에 있는 기간의 연장을 가져올 수 있음을 의미한다</a:t>
+            </a:r>
+            <a:r>
+              <a:rPr lang="en-US" altLang="ko-KR" sz="1600" spc="-50" dirty="0"/>
+              <a:t>.</a:t>
+            </a:r>
+          </a:p>
+          <a:p>
+            <a:pPr marL="1292225" lvl="2" indent="-285750">
+              <a:lnSpc>
+                <a:spcPct val="150000"/>
+              </a:lnSpc>
+              <a:buFont typeface="Wingdings" panose="05000000000000000000" pitchFamily="2" charset="2"/>
+              <a:buChar char="Ø"/>
+            </a:pPr>
+            <a:r>
+              <a:rPr lang="ko-KR" altLang="en-US" sz="1600" spc="-50" dirty="0"/>
+              <a:t>국민연금제도 도입이 사람들로 하여금 보다 빨리 은퇴하도록 만들고</a:t>
+            </a:r>
+            <a:r>
+              <a:rPr lang="en-US" altLang="ko-KR" sz="1600" spc="-50" dirty="0"/>
+              <a:t>, </a:t>
+            </a:r>
+            <a:r>
+              <a:rPr lang="ko-KR" altLang="en-US" sz="1600" spc="-50" dirty="0"/>
+              <a:t>은퇴상태의 기간이 길어지면 더 많은 저축을 필요로 하게 되어</a:t>
+            </a:r>
+            <a:r>
+              <a:rPr lang="en-US" altLang="ko-KR" sz="1600" spc="-50" dirty="0"/>
+              <a:t>, </a:t>
+            </a:r>
+            <a:r>
+              <a:rPr lang="ko-KR" altLang="en-US" sz="1600" spc="-50" dirty="0"/>
+              <a:t>자발적인 저축이 증가하는 것을 은퇴효과라 부른다</a:t>
+            </a:r>
+            <a:r>
+              <a:rPr lang="en-US" altLang="ko-KR" sz="1600" spc="-50" dirty="0"/>
+              <a:t>.</a:t>
+            </a:r>
+          </a:p>
+          <a:p>
+            <a:pPr marL="1292225" lvl="2" indent="-285750">
+              <a:lnSpc>
+                <a:spcPct val="150000"/>
+              </a:lnSpc>
+              <a:buFont typeface="Wingdings" panose="05000000000000000000" pitchFamily="2" charset="2"/>
+              <a:buChar char="Ø"/>
+            </a:pPr>
+            <a:endParaRPr lang="en-US" altLang="ko-KR" sz="1600" spc="-50" dirty="0"/>
+          </a:p>
+        </p:txBody>
+      </p:sp>
+    </p:spTree>
+    <p:extLst>
+      <p:ext uri="{BB962C8B-B14F-4D97-AF65-F5344CB8AC3E}">
+        <p14:creationId xmlns:p14="http://schemas.microsoft.com/office/powerpoint/2010/main" val="1081285162"/>
+      </p:ext>
+    </p:extLst>
+  </p:cSld>
+  <p:clrMapOvr>
+    <a:masterClrMapping/>
+  </p:clrMapOvr>
+</p:sld>
+</file>
+
+<file path=ppt/slides/slide26.xml><?xml version="1.0" encoding="utf-8"?>
+<p:sld xmlns:a="http://schemas.openxmlformats.org/drawingml/2006/main" xmlns:r="http://schemas.openxmlformats.org/officeDocument/2006/relationships" xmlns:p="http://schemas.openxmlformats.org/presentationml/2006/main">
+  <p:cSld>
+    <p:spTree>
+      <p:nvGrpSpPr>
+        <p:cNvPr id="1" name="">
+          <a:extLst>
+            <a:ext uri="{FF2B5EF4-FFF2-40B4-BE49-F238E27FC236}">
+              <a16:creationId xmlns:a16="http://schemas.microsoft.com/office/drawing/2014/main" id="{8F5F2171-FD49-659E-30E9-A600D143D0B4}"/>
+            </a:ext>
+          </a:extLst>
+        </p:cNvPr>
+        <p:cNvGrpSpPr/>
+        <p:nvPr/>
+      </p:nvGrpSpPr>
+      <p:grpSpPr>
+        <a:xfrm>
+          <a:off x="0" y="0"/>
+          <a:ext cx="0" cy="0"/>
+          <a:chOff x="0" y="0"/>
+          <a:chExt cx="0" cy="0"/>
+        </a:xfrm>
+      </p:grpSpPr>
+      <p:sp>
+        <p:nvSpPr>
+          <p:cNvPr id="2" name="제목 1">
+            <a:extLst>
+              <a:ext uri="{FF2B5EF4-FFF2-40B4-BE49-F238E27FC236}">
+                <a16:creationId xmlns:a16="http://schemas.microsoft.com/office/drawing/2014/main" id="{32BCD445-B3E9-22C7-707C-3D003623E70E}"/>
+              </a:ext>
+            </a:extLst>
+          </p:cNvPr>
+          <p:cNvSpPr>
+            <a:spLocks noGrp="1"/>
+          </p:cNvSpPr>
+          <p:nvPr>
+            <p:ph type="title"/>
+          </p:nvPr>
+        </p:nvSpPr>
+        <p:spPr/>
+        <p:txBody>
+          <a:bodyPr/>
+          <a:lstStyle/>
+          <a:p>
+            <a:r>
+              <a:rPr lang="ko-KR" altLang="en-US" dirty="0"/>
+              <a:t>저축행위에 미치는 영향</a:t>
+            </a:r>
+          </a:p>
+        </p:txBody>
+      </p:sp>
+      <p:sp>
+        <p:nvSpPr>
+          <p:cNvPr id="4" name="슬라이드 번호 개체 틀 3">
+            <a:extLst>
+              <a:ext uri="{FF2B5EF4-FFF2-40B4-BE49-F238E27FC236}">
+                <a16:creationId xmlns:a16="http://schemas.microsoft.com/office/drawing/2014/main" id="{983E1A8A-B043-6383-521C-72EF6764734E}"/>
+              </a:ext>
+            </a:extLst>
+          </p:cNvPr>
+          <p:cNvSpPr>
+            <a:spLocks noGrp="1"/>
+          </p:cNvSpPr>
+          <p:nvPr>
+            <p:ph type="sldNum" sz="quarter" idx="12"/>
+          </p:nvPr>
+        </p:nvSpPr>
+        <p:spPr/>
+        <p:txBody>
+          <a:bodyPr/>
+          <a:lstStyle/>
+          <a:p>
+            <a:fld id="{109C872D-39A9-4065-8BF3-6A613116E2A1}" type="slidenum">
+              <a:rPr lang="ko-KR" altLang="en-US" smtClean="0"/>
+              <a:t>26</a:t>
+            </a:fld>
+            <a:endParaRPr lang="ko-KR" altLang="en-US"/>
+          </a:p>
+        </p:txBody>
+      </p:sp>
+      <p:sp>
+        <p:nvSpPr>
+          <p:cNvPr id="3" name="TextBox 2">
+            <a:extLst>
+              <a:ext uri="{FF2B5EF4-FFF2-40B4-BE49-F238E27FC236}">
+                <a16:creationId xmlns:a16="http://schemas.microsoft.com/office/drawing/2014/main" id="{CA1ACA24-69C9-FE2A-3104-FD5212B87040}"/>
+              </a:ext>
+            </a:extLst>
+          </p:cNvPr>
+          <p:cNvSpPr txBox="1"/>
+          <p:nvPr/>
+        </p:nvSpPr>
+        <p:spPr>
+          <a:xfrm>
+            <a:off x="288790" y="958844"/>
+            <a:ext cx="11250267" cy="5215338"/>
+          </a:xfrm>
+          <a:prstGeom prst="rect">
+            <a:avLst/>
+          </a:prstGeom>
+          <a:noFill/>
+        </p:spPr>
+        <p:txBody>
+          <a:bodyPr wrap="square" rtlCol="0" anchor="t">
+            <a:spAutoFit/>
+          </a:bodyPr>
+          <a:lstStyle/>
+          <a:p>
+            <a:pPr marL="835025" lvl="1" indent="-285750">
+              <a:lnSpc>
+                <a:spcPct val="150000"/>
+              </a:lnSpc>
+              <a:buFont typeface="Wingdings" panose="05000000000000000000" pitchFamily="2" charset="2"/>
+              <a:buChar char="ü"/>
+            </a:pPr>
+            <a:r>
+              <a:rPr lang="ko-KR" altLang="en-US" sz="1600" spc="-50" dirty="0"/>
+              <a:t>셋째는 </a:t>
+            </a:r>
+            <a:r>
+              <a:rPr lang="ko-KR" altLang="en-US" sz="1600" spc="-50" dirty="0" err="1"/>
+              <a:t>상속효과인데</a:t>
+            </a:r>
+            <a:r>
+              <a:rPr lang="en-US" altLang="ko-KR" sz="1600" spc="-50" dirty="0"/>
+              <a:t>, </a:t>
+            </a:r>
+            <a:r>
+              <a:rPr lang="ko-KR" altLang="en-US" sz="1600" spc="-50" dirty="0"/>
+              <a:t>국민연금제도로 인해</a:t>
+            </a:r>
+            <a:r>
+              <a:rPr lang="en-US" altLang="ko-KR" sz="1600" spc="-50" dirty="0"/>
+              <a:t>, </a:t>
+            </a:r>
+            <a:r>
+              <a:rPr lang="ko-KR" altLang="en-US" sz="1600" spc="-50" dirty="0"/>
+              <a:t>자식들의 처분가능소득 감소를 야기한다고 예상하는 부모들은 이를 상쇄하고자 더 많은 재산을 상속해주려고 노력할 것이다</a:t>
+            </a:r>
+            <a:r>
+              <a:rPr lang="en-US" altLang="ko-KR" sz="1600" spc="-50" dirty="0"/>
+              <a:t>.</a:t>
+            </a:r>
+          </a:p>
+          <a:p>
+            <a:pPr marL="1292225" lvl="2" indent="-285750">
+              <a:lnSpc>
+                <a:spcPct val="150000"/>
+              </a:lnSpc>
+              <a:buFont typeface="Wingdings" panose="05000000000000000000" pitchFamily="2" charset="2"/>
+              <a:buChar char="Ø"/>
+            </a:pPr>
+            <a:r>
+              <a:rPr lang="ko-KR" altLang="en-US" sz="1600" spc="-50" dirty="0"/>
+              <a:t>많은 재산을 상속해주기 위해서</a:t>
+            </a:r>
+            <a:r>
+              <a:rPr lang="en-US" altLang="ko-KR" sz="1600" spc="-50" dirty="0"/>
+              <a:t>,</a:t>
+            </a:r>
+            <a:r>
+              <a:rPr lang="ko-KR" altLang="en-US" sz="1600" spc="-50" dirty="0"/>
+              <a:t> 저축을 늘려야 할 것이므로 상속효과는 저축을 증가시키는 방향으로 작용한다</a:t>
+            </a:r>
+            <a:r>
+              <a:rPr lang="en-US" altLang="ko-KR" sz="1600" spc="-50" dirty="0"/>
+              <a:t>.</a:t>
+            </a:r>
+          </a:p>
+          <a:p>
+            <a:pPr marL="835025" lvl="1" indent="-285750">
+              <a:lnSpc>
+                <a:spcPct val="150000"/>
+              </a:lnSpc>
+              <a:buFont typeface="Arial" panose="020B0604020202020204" pitchFamily="34" charset="0"/>
+              <a:buChar char="•"/>
+            </a:pPr>
+            <a:endParaRPr lang="en-US" altLang="ko-KR" sz="1600" spc="-50" dirty="0"/>
+          </a:p>
+          <a:p>
+            <a:pPr marL="377825" indent="-285750">
+              <a:lnSpc>
+                <a:spcPct val="150000"/>
+              </a:lnSpc>
+              <a:buFont typeface="Arial" panose="020B0604020202020204" pitchFamily="34" charset="0"/>
+              <a:buChar char="•"/>
+            </a:pPr>
+            <a:r>
+              <a:rPr lang="ko-KR" altLang="en-US" sz="1600" spc="-50" dirty="0"/>
+              <a:t>논의를 종합해보면</a:t>
+            </a:r>
+            <a:r>
+              <a:rPr lang="en-US" altLang="ko-KR" sz="1600" spc="-50" dirty="0"/>
+              <a:t>, </a:t>
+            </a:r>
+            <a:r>
+              <a:rPr lang="ko-KR" altLang="en-US" sz="1600" spc="-50" dirty="0"/>
+              <a:t>자산대체효과만 저축을 줄이는 방향으로</a:t>
+            </a:r>
+            <a:r>
+              <a:rPr lang="en-US" altLang="ko-KR" sz="1600" spc="-50" dirty="0"/>
+              <a:t>, </a:t>
+            </a:r>
+            <a:r>
+              <a:rPr lang="ko-KR" altLang="en-US" sz="1600" spc="-50" dirty="0"/>
+              <a:t>다른 두 가지는 저축을 증가시키는 방향으로 영향을 준다</a:t>
+            </a:r>
+            <a:r>
+              <a:rPr lang="en-US" altLang="ko-KR" sz="1600" spc="-50" dirty="0"/>
+              <a:t>.</a:t>
+            </a:r>
+          </a:p>
+          <a:p>
+            <a:pPr marL="835025" lvl="1" indent="-285750">
+              <a:lnSpc>
+                <a:spcPct val="150000"/>
+              </a:lnSpc>
+              <a:buFont typeface="Wingdings" panose="05000000000000000000" pitchFamily="2" charset="2"/>
+              <a:buChar char="ü"/>
+            </a:pPr>
+            <a:r>
+              <a:rPr lang="ko-KR" altLang="en-US" sz="1600" spc="-50" dirty="0"/>
+              <a:t>저축의 절대적인 </a:t>
+            </a:r>
+            <a:r>
+              <a:rPr lang="ko-KR" altLang="en-US" sz="1600" spc="-50" dirty="0" err="1"/>
+              <a:t>변화량를</a:t>
+            </a:r>
+            <a:r>
+              <a:rPr lang="ko-KR" altLang="en-US" sz="1600" spc="-50" dirty="0"/>
+              <a:t> 기준으로 보면 재산대체효과가 다른 두 효과보다 더 클 가능성도 있으므로</a:t>
+            </a:r>
+            <a:r>
+              <a:rPr lang="en-US" altLang="ko-KR" sz="1600" spc="-50" dirty="0"/>
+              <a:t>, </a:t>
+            </a:r>
+            <a:r>
+              <a:rPr lang="ko-KR" altLang="en-US" sz="1600" spc="-50" dirty="0"/>
+              <a:t>실증연구에 의해 밝혀져야 한다</a:t>
+            </a:r>
+            <a:r>
+              <a:rPr lang="en-US" altLang="ko-KR" sz="1600" spc="-50" dirty="0"/>
+              <a:t>.</a:t>
+            </a:r>
+          </a:p>
+          <a:p>
+            <a:pPr marL="377825" indent="-285750">
+              <a:lnSpc>
+                <a:spcPct val="150000"/>
+              </a:lnSpc>
+              <a:buFont typeface="Arial" panose="020B0604020202020204" pitchFamily="34" charset="0"/>
+              <a:buChar char="•"/>
+            </a:pPr>
+            <a:r>
+              <a:rPr lang="ko-KR" altLang="en-US" sz="1600" spc="-50" dirty="0" err="1"/>
+              <a:t>펠드스타인</a:t>
+            </a:r>
+            <a:r>
+              <a:rPr lang="en-US" altLang="ko-KR" sz="1600" spc="-50" dirty="0"/>
+              <a:t>(</a:t>
+            </a:r>
+            <a:r>
+              <a:rPr lang="en-US" altLang="ko-KR" sz="1600" spc="-50" dirty="0" err="1"/>
+              <a:t>M.Feldstein</a:t>
+            </a:r>
+            <a:r>
+              <a:rPr lang="en-US" altLang="ko-KR" sz="1600" spc="-50" dirty="0"/>
+              <a:t>, 1974)</a:t>
+            </a:r>
+            <a:r>
+              <a:rPr lang="ko-KR" altLang="en-US" sz="1600" spc="-50" dirty="0"/>
+              <a:t>은 미국의 경우 사회보장제도 도입이 저축을 현저하게 줄이는 결과를 가져왔다는 실증연구 결과를 발표한 바 있다</a:t>
+            </a:r>
+            <a:r>
+              <a:rPr lang="en-US" altLang="ko-KR" sz="1600" spc="-50" dirty="0"/>
+              <a:t>.</a:t>
+            </a:r>
+          </a:p>
+          <a:p>
+            <a:pPr marL="835025" lvl="1" indent="-285750">
+              <a:lnSpc>
+                <a:spcPct val="150000"/>
+              </a:lnSpc>
+              <a:buFont typeface="Wingdings" panose="05000000000000000000" pitchFamily="2" charset="2"/>
+              <a:buChar char="ü"/>
+            </a:pPr>
+            <a:r>
+              <a:rPr lang="en-US" altLang="ko-KR" sz="1600" spc="-50" dirty="0"/>
+              <a:t>1971</a:t>
+            </a:r>
+            <a:r>
+              <a:rPr lang="ko-KR" altLang="en-US" sz="1600" spc="-50" dirty="0"/>
+              <a:t>년 기준</a:t>
+            </a:r>
+            <a:r>
+              <a:rPr lang="en-US" altLang="ko-KR" sz="1600" spc="-50" dirty="0"/>
+              <a:t>, </a:t>
+            </a:r>
+            <a:r>
+              <a:rPr lang="ko-KR" altLang="en-US" sz="1600" spc="-50" dirty="0"/>
+              <a:t>사회보장제도의 도입이 개인저축을 반으로 줄어들게 했고</a:t>
+            </a:r>
+            <a:r>
+              <a:rPr lang="en-US" altLang="ko-KR" sz="1600" spc="-50" dirty="0"/>
+              <a:t>, </a:t>
+            </a:r>
+            <a:r>
+              <a:rPr lang="ko-KR" altLang="en-US" sz="1600" spc="-50" dirty="0"/>
+              <a:t>경제 전체의 총저축을 </a:t>
+            </a:r>
+            <a:r>
+              <a:rPr lang="en-US" altLang="ko-KR" sz="1600" spc="-50" dirty="0"/>
+              <a:t>38% </a:t>
+            </a:r>
+            <a:r>
+              <a:rPr lang="ko-KR" altLang="en-US" sz="1600" spc="-50" dirty="0"/>
+              <a:t>감소시키는 결과를 가져왔다고 한다</a:t>
+            </a:r>
+            <a:r>
+              <a:rPr lang="en-US" altLang="ko-KR" sz="1600" spc="-50" dirty="0"/>
+              <a:t>.</a:t>
+            </a:r>
+          </a:p>
+          <a:p>
+            <a:pPr marL="377825" indent="-285750">
+              <a:lnSpc>
+                <a:spcPct val="150000"/>
+              </a:lnSpc>
+              <a:buFont typeface="Arial" panose="020B0604020202020204" pitchFamily="34" charset="0"/>
+              <a:buChar char="•"/>
+            </a:pPr>
+            <a:r>
+              <a:rPr lang="ko-KR" altLang="en-US" sz="1600" spc="-50" dirty="0"/>
+              <a:t>이후 다른 경제학자들이 </a:t>
+            </a:r>
+            <a:r>
+              <a:rPr lang="ko-KR" altLang="en-US" sz="1600" spc="-50" dirty="0" err="1"/>
+              <a:t>펠드스타인의</a:t>
+            </a:r>
+            <a:r>
+              <a:rPr lang="ko-KR" altLang="en-US" sz="1600" spc="-50" dirty="0"/>
+              <a:t> 연구에서 잘못된 부분을 지적하며</a:t>
+            </a:r>
+            <a:r>
+              <a:rPr lang="en-US" altLang="ko-KR" sz="1600" spc="-50" dirty="0"/>
+              <a:t>, </a:t>
+            </a:r>
+            <a:r>
+              <a:rPr lang="ko-KR" altLang="en-US" sz="1600" spc="-50" dirty="0"/>
+              <a:t>논란이 지금까지도 이어지고 있다</a:t>
+            </a:r>
+            <a:r>
+              <a:rPr lang="en-US" altLang="ko-KR" sz="1600" spc="-50" dirty="0"/>
+              <a:t>.</a:t>
+            </a:r>
+          </a:p>
+          <a:p>
+            <a:pPr marL="377825" indent="-285750">
+              <a:lnSpc>
+                <a:spcPct val="150000"/>
+              </a:lnSpc>
+              <a:buFont typeface="Arial" panose="020B0604020202020204" pitchFamily="34" charset="0"/>
+              <a:buChar char="•"/>
+            </a:pPr>
+            <a:r>
+              <a:rPr lang="ko-KR" altLang="en-US" sz="1600" spc="-50" dirty="0"/>
+              <a:t>현재는 대부분의 경제학자들은 사회보장제도 도입이 저축을 어느정도 감소시키는 하지만 </a:t>
+            </a:r>
+            <a:r>
+              <a:rPr lang="ko-KR" altLang="en-US" sz="1600" spc="-50" dirty="0" err="1"/>
+              <a:t>펠드스타인의</a:t>
+            </a:r>
+            <a:r>
+              <a:rPr lang="ko-KR" altLang="en-US" sz="1600" spc="-50" dirty="0"/>
+              <a:t> 연구처럼 현저한 감소라고 생각하는 사람은 소수에 지나지 않는다</a:t>
+            </a:r>
+            <a:r>
+              <a:rPr lang="en-US" altLang="ko-KR" sz="1600" spc="-50" dirty="0"/>
+              <a:t>.</a:t>
+            </a:r>
+          </a:p>
+        </p:txBody>
+      </p:sp>
+    </p:spTree>
+    <p:extLst>
+      <p:ext uri="{BB962C8B-B14F-4D97-AF65-F5344CB8AC3E}">
+        <p14:creationId xmlns:p14="http://schemas.microsoft.com/office/powerpoint/2010/main" val="486411735"/>
+      </p:ext>
+    </p:extLst>
+  </p:cSld>
+  <p:clrMapOvr>
+    <a:masterClrMapping/>
+  </p:clrMapOvr>
+</p:sld>
+</file>
+
+<file path=ppt/slides/slide27.xml><?xml version="1.0" encoding="utf-8"?>
+<p:sld xmlns:a="http://schemas.openxmlformats.org/drawingml/2006/main" xmlns:r="http://schemas.openxmlformats.org/officeDocument/2006/relationships" xmlns:p="http://schemas.openxmlformats.org/presentationml/2006/main">
+  <p:cSld>
+    <p:spTree>
+      <p:nvGrpSpPr>
+        <p:cNvPr id="1" name="">
+          <a:extLst>
+            <a:ext uri="{FF2B5EF4-FFF2-40B4-BE49-F238E27FC236}">
+              <a16:creationId xmlns:a16="http://schemas.microsoft.com/office/drawing/2014/main" id="{256DC130-69FF-95FD-4A23-6C4D7F04797F}"/>
+            </a:ext>
+          </a:extLst>
+        </p:cNvPr>
+        <p:cNvGrpSpPr/>
+        <p:nvPr/>
+      </p:nvGrpSpPr>
+      <p:grpSpPr>
+        <a:xfrm>
+          <a:off x="0" y="0"/>
+          <a:ext cx="0" cy="0"/>
+          <a:chOff x="0" y="0"/>
+          <a:chExt cx="0" cy="0"/>
+        </a:xfrm>
+      </p:grpSpPr>
+      <p:sp>
+        <p:nvSpPr>
+          <p:cNvPr id="2" name="제목 1">
+            <a:extLst>
+              <a:ext uri="{FF2B5EF4-FFF2-40B4-BE49-F238E27FC236}">
+                <a16:creationId xmlns:a16="http://schemas.microsoft.com/office/drawing/2014/main" id="{521172AB-8EAA-7D37-3712-BE94FC478359}"/>
+              </a:ext>
+            </a:extLst>
+          </p:cNvPr>
+          <p:cNvSpPr>
+            <a:spLocks noGrp="1"/>
+          </p:cNvSpPr>
+          <p:nvPr>
+            <p:ph type="title"/>
+          </p:nvPr>
+        </p:nvSpPr>
+        <p:spPr/>
+        <p:txBody>
+          <a:bodyPr/>
+          <a:lstStyle/>
+          <a:p>
+            <a:r>
+              <a:rPr lang="ko-KR" altLang="en-US" dirty="0"/>
+              <a:t>노동공급에 미치는 영향</a:t>
+            </a:r>
+          </a:p>
+        </p:txBody>
+      </p:sp>
+      <p:sp>
+        <p:nvSpPr>
+          <p:cNvPr id="4" name="슬라이드 번호 개체 틀 3">
+            <a:extLst>
+              <a:ext uri="{FF2B5EF4-FFF2-40B4-BE49-F238E27FC236}">
+                <a16:creationId xmlns:a16="http://schemas.microsoft.com/office/drawing/2014/main" id="{5A590AF7-2416-2A1D-748C-91C5A6409693}"/>
+              </a:ext>
+            </a:extLst>
+          </p:cNvPr>
+          <p:cNvSpPr>
+            <a:spLocks noGrp="1"/>
+          </p:cNvSpPr>
+          <p:nvPr>
+            <p:ph type="sldNum" sz="quarter" idx="12"/>
+          </p:nvPr>
+        </p:nvSpPr>
+        <p:spPr/>
+        <p:txBody>
+          <a:bodyPr/>
+          <a:lstStyle/>
+          <a:p>
+            <a:fld id="{109C872D-39A9-4065-8BF3-6A613116E2A1}" type="slidenum">
+              <a:rPr lang="ko-KR" altLang="en-US" smtClean="0"/>
+              <a:t>27</a:t>
+            </a:fld>
+            <a:endParaRPr lang="ko-KR" altLang="en-US"/>
+          </a:p>
+        </p:txBody>
+      </p:sp>
+      <p:sp>
+        <p:nvSpPr>
+          <p:cNvPr id="3" name="TextBox 2">
+            <a:extLst>
+              <a:ext uri="{FF2B5EF4-FFF2-40B4-BE49-F238E27FC236}">
+                <a16:creationId xmlns:a16="http://schemas.microsoft.com/office/drawing/2014/main" id="{73B96A24-7649-C9A2-3798-C090F6CBAB04}"/>
+              </a:ext>
+            </a:extLst>
+          </p:cNvPr>
+          <p:cNvSpPr txBox="1"/>
+          <p:nvPr/>
+        </p:nvSpPr>
+        <p:spPr>
+          <a:xfrm>
+            <a:off x="288790" y="958844"/>
+            <a:ext cx="11250267" cy="5584670"/>
+          </a:xfrm>
+          <a:prstGeom prst="rect">
+            <a:avLst/>
+          </a:prstGeom>
+          <a:noFill/>
+        </p:spPr>
+        <p:txBody>
+          <a:bodyPr wrap="square" rtlCol="0" anchor="t">
+            <a:spAutoFit/>
+          </a:bodyPr>
+          <a:lstStyle/>
+          <a:p>
+            <a:pPr marL="377825" indent="-285750">
+              <a:lnSpc>
+                <a:spcPct val="150000"/>
+              </a:lnSpc>
+              <a:buFont typeface="Arial" panose="020B0604020202020204" pitchFamily="34" charset="0"/>
+              <a:buChar char="•"/>
+            </a:pPr>
+            <a:r>
+              <a:rPr lang="ko-KR" altLang="en-US" sz="1600" spc="-50" dirty="0"/>
+              <a:t>국민연금제도가 노동공급에 미치는 영향은 소득효과와 대체효과의 틀 안에서 분석할 수 있다</a:t>
+            </a:r>
+            <a:r>
+              <a:rPr lang="en-US" altLang="ko-KR" sz="1600" spc="-50" dirty="0"/>
+              <a:t>.</a:t>
+            </a:r>
+          </a:p>
+          <a:p>
+            <a:pPr marL="377825" indent="-285750">
+              <a:lnSpc>
+                <a:spcPct val="150000"/>
+              </a:lnSpc>
+              <a:buFont typeface="Arial" panose="020B0604020202020204" pitchFamily="34" charset="0"/>
+              <a:buChar char="•"/>
+            </a:pPr>
+            <a:endParaRPr lang="en-US" altLang="ko-KR" sz="1600" spc="-50" dirty="0"/>
+          </a:p>
+          <a:p>
+            <a:pPr marL="377825" indent="-285750">
+              <a:lnSpc>
+                <a:spcPct val="150000"/>
+              </a:lnSpc>
+              <a:buFont typeface="Arial" panose="020B0604020202020204" pitchFamily="34" charset="0"/>
+              <a:buChar char="•"/>
+            </a:pPr>
+            <a:r>
+              <a:rPr lang="ko-KR" altLang="en-US" sz="1600" spc="-50" dirty="0"/>
+              <a:t>우선</a:t>
+            </a:r>
+            <a:r>
+              <a:rPr lang="en-US" altLang="ko-KR" sz="1600" spc="-50" dirty="0"/>
+              <a:t>, </a:t>
+            </a:r>
+            <a:r>
+              <a:rPr lang="ko-KR" altLang="en-US" sz="1600" spc="-50" dirty="0"/>
+              <a:t>소득효과는 사람들의 생애에 걸친 소득을 증가시키므로</a:t>
+            </a:r>
+            <a:r>
+              <a:rPr lang="en-US" altLang="ko-KR" sz="1600" spc="-50" dirty="0"/>
+              <a:t>, </a:t>
+            </a:r>
+            <a:r>
+              <a:rPr lang="ko-KR" altLang="en-US" sz="1600" spc="-50" dirty="0"/>
+              <a:t>보통 노동시간을 줄이는 방향으로 영향을 준다</a:t>
+            </a:r>
+            <a:r>
+              <a:rPr lang="en-US" altLang="ko-KR" sz="1600" spc="-50" dirty="0"/>
+              <a:t>.</a:t>
+            </a:r>
+          </a:p>
+          <a:p>
+            <a:pPr marL="835025" lvl="1" indent="-285750">
+              <a:lnSpc>
+                <a:spcPct val="150000"/>
+              </a:lnSpc>
+              <a:buFont typeface="Wingdings" panose="05000000000000000000" pitchFamily="2" charset="2"/>
+              <a:buChar char="ü"/>
+            </a:pPr>
+            <a:r>
+              <a:rPr lang="ko-KR" altLang="en-US" sz="1600" spc="-50" dirty="0"/>
+              <a:t>사람들이 일할 때 더 큰 조세부담을 지는 대신 은퇴 후에는 보다 더 큰 연금 혜택을 받는 것이 보통이다</a:t>
+            </a:r>
+            <a:r>
+              <a:rPr lang="en-US" altLang="ko-KR" sz="1600" spc="-50" dirty="0"/>
+              <a:t>.</a:t>
+            </a:r>
+          </a:p>
+          <a:p>
+            <a:pPr marL="835025" lvl="1" indent="-285750">
+              <a:lnSpc>
+                <a:spcPct val="150000"/>
+              </a:lnSpc>
+              <a:buFont typeface="Wingdings" panose="05000000000000000000" pitchFamily="2" charset="2"/>
+              <a:buChar char="ü"/>
+            </a:pPr>
+            <a:r>
+              <a:rPr lang="ko-KR" altLang="en-US" sz="1600" spc="-50" dirty="0"/>
+              <a:t>따라서 사람들의 순자산 혹은 실질소득 증가를 가져오므로</a:t>
+            </a:r>
+            <a:r>
+              <a:rPr lang="en-US" altLang="ko-KR" sz="1600" spc="-50" dirty="0"/>
+              <a:t>, </a:t>
+            </a:r>
+            <a:r>
+              <a:rPr lang="ko-KR" altLang="en-US" sz="1600" spc="-50" dirty="0"/>
+              <a:t>사람들이 더 많은 여가소비를 즐기도록 만든다</a:t>
+            </a:r>
+            <a:r>
+              <a:rPr lang="en-US" altLang="ko-KR" sz="1600" spc="-50" dirty="0"/>
+              <a:t>.</a:t>
+            </a:r>
+          </a:p>
+          <a:p>
+            <a:pPr marL="377825" indent="-285750">
+              <a:lnSpc>
+                <a:spcPct val="150000"/>
+              </a:lnSpc>
+              <a:buFont typeface="Arial" panose="020B0604020202020204" pitchFamily="34" charset="0"/>
+              <a:buChar char="•"/>
+            </a:pPr>
+            <a:endParaRPr lang="en-US" altLang="ko-KR" sz="1600" spc="-50" dirty="0"/>
+          </a:p>
+          <a:p>
+            <a:pPr marL="377825" indent="-285750">
+              <a:lnSpc>
+                <a:spcPct val="150000"/>
+              </a:lnSpc>
+              <a:buFont typeface="Arial" panose="020B0604020202020204" pitchFamily="34" charset="0"/>
+              <a:buChar char="•"/>
+            </a:pPr>
+            <a:r>
+              <a:rPr lang="ko-KR" altLang="en-US" sz="1600" spc="-50" dirty="0"/>
+              <a:t>대체효과는 국민연금 도입으로 인해 여가의 기회비용에 어떤 변화가 </a:t>
+            </a:r>
+            <a:r>
+              <a:rPr lang="ko-KR" altLang="en-US" sz="1600" spc="-50" dirty="0" err="1"/>
+              <a:t>생기는지와</a:t>
+            </a:r>
+            <a:r>
+              <a:rPr lang="ko-KR" altLang="en-US" sz="1600" spc="-50" dirty="0"/>
+              <a:t> 관련이 있다</a:t>
+            </a:r>
+            <a:r>
+              <a:rPr lang="en-US" altLang="ko-KR" sz="1600" spc="-50" dirty="0"/>
+              <a:t>.</a:t>
+            </a:r>
+          </a:p>
+          <a:p>
+            <a:pPr marL="835025" lvl="1" indent="-285750">
+              <a:lnSpc>
+                <a:spcPct val="150000"/>
+              </a:lnSpc>
+              <a:buFont typeface="Wingdings" panose="05000000000000000000" pitchFamily="2" charset="2"/>
+              <a:buChar char="ü"/>
+            </a:pPr>
+            <a:r>
+              <a:rPr lang="ko-KR" altLang="en-US" sz="1600" spc="-50" dirty="0"/>
+              <a:t>한 시간 더 일할 때 얻을 수 있는 순소득이 어떻게 변화하는지를 살펴봐야 한다</a:t>
+            </a:r>
+            <a:r>
+              <a:rPr lang="en-US" altLang="ko-KR" sz="1600" spc="-50" dirty="0"/>
+              <a:t>.</a:t>
+            </a:r>
+          </a:p>
+          <a:p>
+            <a:pPr marL="835025" lvl="1" indent="-285750">
+              <a:lnSpc>
+                <a:spcPct val="150000"/>
+              </a:lnSpc>
+              <a:buFont typeface="Wingdings" panose="05000000000000000000" pitchFamily="2" charset="2"/>
+              <a:buChar char="ü"/>
+            </a:pPr>
+            <a:r>
+              <a:rPr lang="ko-KR" altLang="en-US" sz="1600" spc="-50" dirty="0"/>
+              <a:t>우선</a:t>
+            </a:r>
+            <a:r>
+              <a:rPr lang="en-US" altLang="ko-KR" sz="1600" spc="-50" dirty="0"/>
+              <a:t>, </a:t>
+            </a:r>
+            <a:r>
+              <a:rPr lang="ko-KR" altLang="en-US" sz="1600" spc="-50" dirty="0"/>
+              <a:t>국민연금 제도의 도입은 노동을 한시간 더 할 때 얻는 순소득에서 새로운 조세부담이 생긴다는 것을 뜻한다</a:t>
+            </a:r>
+            <a:r>
+              <a:rPr lang="en-US" altLang="ko-KR" sz="1600" spc="-50" dirty="0"/>
+              <a:t>.</a:t>
+            </a:r>
+          </a:p>
+          <a:p>
+            <a:pPr marL="1292225" lvl="2" indent="-285750">
+              <a:lnSpc>
+                <a:spcPct val="150000"/>
+              </a:lnSpc>
+              <a:buFont typeface="Wingdings" panose="05000000000000000000" pitchFamily="2" charset="2"/>
+              <a:buChar char="Ø"/>
+            </a:pPr>
+            <a:r>
+              <a:rPr lang="ko-KR" altLang="en-US" sz="1600" spc="-50" dirty="0"/>
+              <a:t>여가의 기회비용 감소를 의미하고</a:t>
+            </a:r>
+            <a:r>
+              <a:rPr lang="en-US" altLang="ko-KR" sz="1600" spc="-50" dirty="0"/>
+              <a:t>, </a:t>
+            </a:r>
+            <a:r>
+              <a:rPr lang="ko-KR" altLang="en-US" sz="1600" spc="-50" dirty="0"/>
+              <a:t>이는 노동의 공급량을 줄이는 방향으로 작용하게 된다</a:t>
+            </a:r>
+            <a:r>
+              <a:rPr lang="en-US" altLang="ko-KR" sz="1600" spc="-50" dirty="0"/>
+              <a:t>.</a:t>
+            </a:r>
+          </a:p>
+          <a:p>
+            <a:pPr marL="835025" lvl="1" indent="-285750">
+              <a:lnSpc>
+                <a:spcPct val="150000"/>
+              </a:lnSpc>
+              <a:buFont typeface="Wingdings" panose="05000000000000000000" pitchFamily="2" charset="2"/>
+              <a:buChar char="ü"/>
+            </a:pPr>
+            <a:r>
+              <a:rPr lang="ko-KR" altLang="en-US" sz="1600" spc="-50" dirty="0"/>
+              <a:t>하지만 사람들이 이 세금은 나중에 은퇴하고</a:t>
+            </a:r>
+            <a:r>
+              <a:rPr lang="en-US" altLang="ko-KR" sz="1600" spc="-50" dirty="0"/>
+              <a:t>,</a:t>
+            </a:r>
+            <a:r>
+              <a:rPr lang="ko-KR" altLang="en-US" sz="1600" spc="-50" dirty="0"/>
+              <a:t> 다시 연금으로 되돌려 받는다는 사실을 알고 의사결정을 한다면 대체효과는 다른 방향으로 작용할 수 있다</a:t>
+            </a:r>
+            <a:r>
+              <a:rPr lang="en-US" altLang="ko-KR" sz="1600" spc="-50" dirty="0"/>
+              <a:t>.</a:t>
+            </a:r>
+          </a:p>
+          <a:p>
+            <a:pPr marL="1292225" lvl="2" indent="-285750">
+              <a:lnSpc>
+                <a:spcPct val="150000"/>
+              </a:lnSpc>
+              <a:buFont typeface="Wingdings" panose="05000000000000000000" pitchFamily="2" charset="2"/>
+              <a:buChar char="Ø"/>
+            </a:pPr>
+            <a:r>
+              <a:rPr lang="ko-KR" altLang="en-US" sz="1600" spc="-50" dirty="0"/>
+              <a:t>국민연금제도 도입이 여가의 기회비용을 상승시킨 셈으로</a:t>
+            </a:r>
+            <a:r>
+              <a:rPr lang="en-US" altLang="ko-KR" sz="1600" spc="-50" dirty="0"/>
+              <a:t>, </a:t>
+            </a:r>
+            <a:r>
+              <a:rPr lang="ko-KR" altLang="en-US" sz="1600" spc="-50" dirty="0"/>
+              <a:t>노동의 공급량을 증가시키는 방향으로 작용한다</a:t>
+            </a:r>
+            <a:r>
+              <a:rPr lang="en-US" altLang="ko-KR" sz="1600" spc="-50" dirty="0"/>
+              <a:t>.</a:t>
+            </a:r>
+          </a:p>
+          <a:p>
+            <a:pPr marL="377825" indent="-285750">
+              <a:lnSpc>
+                <a:spcPct val="150000"/>
+              </a:lnSpc>
+              <a:buFont typeface="Arial" panose="020B0604020202020204" pitchFamily="34" charset="0"/>
+              <a:buChar char="•"/>
+            </a:pPr>
+            <a:endParaRPr lang="en-US" altLang="ko-KR" sz="1600" spc="-50" dirty="0"/>
+          </a:p>
+          <a:p>
+            <a:pPr marL="377825" indent="-285750">
+              <a:lnSpc>
+                <a:spcPct val="150000"/>
+              </a:lnSpc>
+              <a:buFont typeface="Arial" panose="020B0604020202020204" pitchFamily="34" charset="0"/>
+              <a:buChar char="•"/>
+            </a:pPr>
+            <a:r>
+              <a:rPr lang="ko-KR" altLang="en-US" sz="1600" spc="-50" dirty="0"/>
+              <a:t>소득효과는 명백히 노동을 줄이고</a:t>
+            </a:r>
+            <a:r>
+              <a:rPr lang="en-US" altLang="ko-KR" sz="1600" spc="-50" dirty="0"/>
+              <a:t>, </a:t>
+            </a:r>
+            <a:r>
+              <a:rPr lang="ko-KR" altLang="en-US" sz="1600" spc="-50" dirty="0"/>
+              <a:t>대체효과는 그 효과의 방향이 분명하지 않아</a:t>
+            </a:r>
+            <a:r>
+              <a:rPr lang="en-US" altLang="ko-KR" sz="1600" spc="-50" dirty="0"/>
+              <a:t>, </a:t>
+            </a:r>
+            <a:r>
+              <a:rPr lang="ko-KR" altLang="en-US" sz="1600" spc="-50" dirty="0"/>
+              <a:t>지금까지 명백한 해답은 없다</a:t>
+            </a:r>
+            <a:r>
+              <a:rPr lang="en-US" altLang="ko-KR" sz="1600" spc="-50" dirty="0"/>
+              <a:t>.</a:t>
+            </a:r>
+          </a:p>
+        </p:txBody>
+      </p:sp>
+    </p:spTree>
+    <p:extLst>
+      <p:ext uri="{BB962C8B-B14F-4D97-AF65-F5344CB8AC3E}">
+        <p14:creationId xmlns:p14="http://schemas.microsoft.com/office/powerpoint/2010/main" val="988459605"/>
+      </p:ext>
+    </p:extLst>
+  </p:cSld>
+  <p:clrMapOvr>
+    <a:masterClrMapping/>
+  </p:clrMapOvr>
+</p:sld>
+</file>
+
+<file path=ppt/slides/slide28.xml><?xml version="1.0" encoding="utf-8"?>
+<p:sld xmlns:a="http://schemas.openxmlformats.org/drawingml/2006/main" xmlns:r="http://schemas.openxmlformats.org/officeDocument/2006/relationships" xmlns:p="http://schemas.openxmlformats.org/presentationml/2006/main">
+  <p:cSld>
+    <p:spTree>
+      <p:nvGrpSpPr>
+        <p:cNvPr id="1" name="">
+          <a:extLst>
+            <a:ext uri="{FF2B5EF4-FFF2-40B4-BE49-F238E27FC236}">
               <a16:creationId xmlns:a16="http://schemas.microsoft.com/office/drawing/2014/main" id="{200D4CD8-D4E5-79CF-7C73-EBCD33FF1DC0}"/>
             </a:ext>
           </a:extLst>
@@ -13128,7 +14292,7 @@
           <a:p>
             <a:fld id="{109C872D-39A9-4065-8BF3-6A613116E2A1}" type="slidenum">
               <a:rPr lang="ko-KR" altLang="en-US" smtClean="0"/>
-              <a:t>25</a:t>
+              <a:t>28</a:t>
             </a:fld>
             <a:endParaRPr lang="ko-KR" altLang="en-US"/>
           </a:p>
@@ -13188,7 +14352,7 @@
 </p:sld>
 </file>
 
-<file path=ppt/slides/slide26.xml><?xml version="1.0" encoding="utf-8"?>
+<file path=ppt/slides/slide29.xml><?xml version="1.0" encoding="utf-8"?>
 <p:sld xmlns:a="http://schemas.openxmlformats.org/drawingml/2006/main" xmlns:r="http://schemas.openxmlformats.org/officeDocument/2006/relationships" xmlns:p="http://schemas.openxmlformats.org/presentationml/2006/main">
   <p:cSld>
     <p:spTree>
@@ -13196,293 +14360,7 @@
         <p:cNvPr id="1" name="">
           <a:extLst>
             <a:ext uri="{FF2B5EF4-FFF2-40B4-BE49-F238E27FC236}">
-              <a16:creationId xmlns:a16="http://schemas.microsoft.com/office/drawing/2014/main" id="{8EA7EF4E-B5E0-3A1D-111F-8C3807B2C633}"/>
-            </a:ext>
-          </a:extLst>
-        </p:cNvPr>
-        <p:cNvGrpSpPr/>
-        <p:nvPr/>
-      </p:nvGrpSpPr>
-      <p:grpSpPr>
-        <a:xfrm>
-          <a:off x="0" y="0"/>
-          <a:ext cx="0" cy="0"/>
-          <a:chOff x="0" y="0"/>
-          <a:chExt cx="0" cy="0"/>
-        </a:xfrm>
-      </p:grpSpPr>
-      <p:pic>
-        <p:nvPicPr>
-          <p:cNvPr id="6" name="그림 5" descr="텍스트, 로고, 원, 폰트이(가) 표시된 사진&#10;&#10;AI 생성 콘텐츠는 정확하지 않을 수 있습니다.">
-            <a:extLst>
-              <a:ext uri="{FF2B5EF4-FFF2-40B4-BE49-F238E27FC236}">
-                <a16:creationId xmlns:a16="http://schemas.microsoft.com/office/drawing/2014/main" id="{8874C330-8ACD-3363-687A-E20C99E8F966}"/>
-              </a:ext>
-            </a:extLst>
-          </p:cNvPr>
-          <p:cNvPicPr>
-            <a:picLocks noChangeAspect="1"/>
-          </p:cNvPicPr>
-          <p:nvPr/>
-        </p:nvPicPr>
-        <p:blipFill>
-          <a:blip r:embed="rId2">
-            <a:alphaModFix amt="20000"/>
-            <a:extLst>
-              <a:ext uri="{28A0092B-C50C-407E-A947-70E740481C1C}">
-                <a14:useLocalDpi xmlns:a14="http://schemas.microsoft.com/office/drawing/2010/main" val="0"/>
-              </a:ext>
-            </a:extLst>
-          </a:blip>
-          <a:stretch>
-            <a:fillRect/>
-          </a:stretch>
-        </p:blipFill>
-        <p:spPr>
-          <a:xfrm>
-            <a:off x="4012070" y="1673061"/>
-            <a:ext cx="4167861" cy="4167861"/>
-          </a:xfrm>
-          <a:prstGeom prst="rect">
-            <a:avLst/>
-          </a:prstGeom>
-        </p:spPr>
-      </p:pic>
-      <p:sp>
-        <p:nvSpPr>
-          <p:cNvPr id="4" name="슬라이드 번호 개체 틀 3">
-            <a:extLst>
-              <a:ext uri="{FF2B5EF4-FFF2-40B4-BE49-F238E27FC236}">
-                <a16:creationId xmlns:a16="http://schemas.microsoft.com/office/drawing/2014/main" id="{004AB3A2-801B-F0F4-9ABE-28BF0BC7E562}"/>
-              </a:ext>
-            </a:extLst>
-          </p:cNvPr>
-          <p:cNvSpPr>
-            <a:spLocks noGrp="1"/>
-          </p:cNvSpPr>
-          <p:nvPr>
-            <p:ph type="sldNum" sz="quarter" idx="12"/>
-          </p:nvPr>
-        </p:nvSpPr>
-        <p:spPr/>
-        <p:txBody>
-          <a:bodyPr/>
-          <a:lstStyle/>
-          <a:p>
-            <a:fld id="{109C872D-39A9-4065-8BF3-6A613116E2A1}" type="slidenum">
-              <a:rPr lang="ko-KR" altLang="en-US" smtClean="0"/>
-              <a:t>26</a:t>
-            </a:fld>
-            <a:endParaRPr lang="ko-KR" altLang="en-US"/>
-          </a:p>
-        </p:txBody>
-      </p:sp>
-      <p:sp>
-        <p:nvSpPr>
-          <p:cNvPr id="7" name="제목 1">
-            <a:extLst>
-              <a:ext uri="{FF2B5EF4-FFF2-40B4-BE49-F238E27FC236}">
-                <a16:creationId xmlns:a16="http://schemas.microsoft.com/office/drawing/2014/main" id="{59B23D82-89C3-EE4E-1C72-E7278FA1DEAB}"/>
-              </a:ext>
-            </a:extLst>
-          </p:cNvPr>
-          <p:cNvSpPr>
-            <a:spLocks noGrp="1"/>
-          </p:cNvSpPr>
-          <p:nvPr>
-            <p:ph type="title"/>
-          </p:nvPr>
-        </p:nvSpPr>
-        <p:spPr>
-          <a:xfrm>
-            <a:off x="831850" y="3765550"/>
-            <a:ext cx="11150600" cy="652818"/>
-          </a:xfrm>
-          <a:effectLst>
-            <a:reflection blurRad="50800" stA="45000" endPos="44000" dir="5400000" sy="-100000" algn="bl" rotWithShape="0"/>
-          </a:effectLst>
-        </p:spPr>
-        <p:txBody>
-          <a:bodyPr anchor="b"/>
-          <a:lstStyle/>
-          <a:p>
-            <a:r>
-              <a:rPr lang="en-US" altLang="ko-KR" sz="4000" b="1" i="0" spc="150" dirty="0"/>
-              <a:t>Section 6. </a:t>
-            </a:r>
-            <a:r>
-              <a:rPr lang="ko-KR" altLang="en-US" sz="4000" b="1" i="0" spc="150" dirty="0"/>
-              <a:t>건강보험제도의 기본성격</a:t>
-            </a:r>
-            <a:endParaRPr lang="ko-KR" altLang="en-US" sz="3600" i="0" spc="150" dirty="0"/>
-          </a:p>
-        </p:txBody>
-      </p:sp>
-    </p:spTree>
-    <p:extLst>
-      <p:ext uri="{BB962C8B-B14F-4D97-AF65-F5344CB8AC3E}">
-        <p14:creationId xmlns:p14="http://schemas.microsoft.com/office/powerpoint/2010/main" val="797057951"/>
-      </p:ext>
-    </p:extLst>
-  </p:cSld>
-  <p:clrMapOvr>
-    <a:masterClrMapping/>
-  </p:clrMapOvr>
-</p:sld>
-</file>
-
-<file path=ppt/slides/slide27.xml><?xml version="1.0" encoding="utf-8"?>
-<p:sld xmlns:a="http://schemas.openxmlformats.org/drawingml/2006/main" xmlns:r="http://schemas.openxmlformats.org/officeDocument/2006/relationships" xmlns:p="http://schemas.openxmlformats.org/presentationml/2006/main">
-  <p:cSld>
-    <p:spTree>
-      <p:nvGrpSpPr>
-        <p:cNvPr id="1" name="">
-          <a:extLst>
-            <a:ext uri="{FF2B5EF4-FFF2-40B4-BE49-F238E27FC236}">
-              <a16:creationId xmlns:a16="http://schemas.microsoft.com/office/drawing/2014/main" id="{C688FAAE-F208-7323-0B7B-79314966BFC0}"/>
-            </a:ext>
-          </a:extLst>
-        </p:cNvPr>
-        <p:cNvGrpSpPr/>
-        <p:nvPr/>
-      </p:nvGrpSpPr>
-      <p:grpSpPr>
-        <a:xfrm>
-          <a:off x="0" y="0"/>
-          <a:ext cx="0" cy="0"/>
-          <a:chOff x="0" y="0"/>
-          <a:chExt cx="0" cy="0"/>
-        </a:xfrm>
-      </p:grpSpPr>
-      <p:pic>
-        <p:nvPicPr>
-          <p:cNvPr id="6" name="그림 5" descr="텍스트, 로고, 원, 폰트이(가) 표시된 사진&#10;&#10;AI 생성 콘텐츠는 정확하지 않을 수 있습니다.">
-            <a:extLst>
-              <a:ext uri="{FF2B5EF4-FFF2-40B4-BE49-F238E27FC236}">
-                <a16:creationId xmlns:a16="http://schemas.microsoft.com/office/drawing/2014/main" id="{861D89AF-D865-CF91-B0A0-E9B2EBC2C6FB}"/>
-              </a:ext>
-            </a:extLst>
-          </p:cNvPr>
-          <p:cNvPicPr>
-            <a:picLocks noChangeAspect="1"/>
-          </p:cNvPicPr>
-          <p:nvPr/>
-        </p:nvPicPr>
-        <p:blipFill>
-          <a:blip r:embed="rId2">
-            <a:alphaModFix amt="20000"/>
-            <a:extLst>
-              <a:ext uri="{28A0092B-C50C-407E-A947-70E740481C1C}">
-                <a14:useLocalDpi xmlns:a14="http://schemas.microsoft.com/office/drawing/2010/main" val="0"/>
-              </a:ext>
-            </a:extLst>
-          </a:blip>
-          <a:stretch>
-            <a:fillRect/>
-          </a:stretch>
-        </p:blipFill>
-        <p:spPr>
-          <a:xfrm>
-            <a:off x="4012070" y="1673061"/>
-            <a:ext cx="4167861" cy="4167861"/>
-          </a:xfrm>
-          <a:prstGeom prst="rect">
-            <a:avLst/>
-          </a:prstGeom>
-        </p:spPr>
-      </p:pic>
-      <p:sp>
-        <p:nvSpPr>
-          <p:cNvPr id="4" name="슬라이드 번호 개체 틀 3">
-            <a:extLst>
-              <a:ext uri="{FF2B5EF4-FFF2-40B4-BE49-F238E27FC236}">
-                <a16:creationId xmlns:a16="http://schemas.microsoft.com/office/drawing/2014/main" id="{EB428E16-A285-ADD2-098D-FFC7DEC11265}"/>
-              </a:ext>
-            </a:extLst>
-          </p:cNvPr>
-          <p:cNvSpPr>
-            <a:spLocks noGrp="1"/>
-          </p:cNvSpPr>
-          <p:nvPr>
-            <p:ph type="sldNum" sz="quarter" idx="12"/>
-          </p:nvPr>
-        </p:nvSpPr>
-        <p:spPr/>
-        <p:txBody>
-          <a:bodyPr/>
-          <a:lstStyle/>
-          <a:p>
-            <a:fld id="{109C872D-39A9-4065-8BF3-6A613116E2A1}" type="slidenum">
-              <a:rPr lang="ko-KR" altLang="en-US" smtClean="0"/>
-              <a:t>27</a:t>
-            </a:fld>
-            <a:endParaRPr lang="ko-KR" altLang="en-US"/>
-          </a:p>
-        </p:txBody>
-      </p:sp>
-      <p:sp>
-        <p:nvSpPr>
-          <p:cNvPr id="7" name="제목 1">
-            <a:extLst>
-              <a:ext uri="{FF2B5EF4-FFF2-40B4-BE49-F238E27FC236}">
-                <a16:creationId xmlns:a16="http://schemas.microsoft.com/office/drawing/2014/main" id="{80C8B4D5-4027-0895-6282-01FB061A2E7B}"/>
-              </a:ext>
-            </a:extLst>
-          </p:cNvPr>
-          <p:cNvSpPr>
-            <a:spLocks noGrp="1"/>
-          </p:cNvSpPr>
-          <p:nvPr>
-            <p:ph type="title"/>
-          </p:nvPr>
-        </p:nvSpPr>
-        <p:spPr>
-          <a:xfrm>
-            <a:off x="831850" y="3765550"/>
-            <a:ext cx="11150600" cy="652818"/>
-          </a:xfrm>
-          <a:effectLst>
-            <a:reflection blurRad="50800" stA="45000" endPos="44000" dir="5400000" sy="-100000" algn="bl" rotWithShape="0"/>
-          </a:effectLst>
-        </p:spPr>
-        <p:txBody>
-          <a:bodyPr anchor="b"/>
-          <a:lstStyle/>
-          <a:p>
-            <a:r>
-              <a:rPr lang="en-US" altLang="ko-KR" sz="4000" b="1" i="0" spc="150" dirty="0"/>
-              <a:t>Section 7. </a:t>
-            </a:r>
-            <a:r>
-              <a:rPr lang="ko-KR" altLang="en-US" sz="4000" b="1" i="0" spc="150" dirty="0"/>
-              <a:t>우리나라의 국민건강보험제도</a:t>
-            </a:r>
-            <a:endParaRPr lang="ko-KR" altLang="en-US" sz="3600" i="0" spc="150" dirty="0"/>
-          </a:p>
-        </p:txBody>
-      </p:sp>
-    </p:spTree>
-    <p:extLst>
-      <p:ext uri="{BB962C8B-B14F-4D97-AF65-F5344CB8AC3E}">
-        <p14:creationId xmlns:p14="http://schemas.microsoft.com/office/powerpoint/2010/main" val="1606299614"/>
-      </p:ext>
-    </p:extLst>
-  </p:cSld>
-  <p:clrMapOvr>
-    <a:masterClrMapping/>
-  </p:clrMapOvr>
-</p:sld>
-</file>
-
-<file path=ppt/slides/slide28.xml><?xml version="1.0" encoding="utf-8"?>
-<p:sld xmlns:a="http://schemas.openxmlformats.org/drawingml/2006/main" xmlns:r="http://schemas.openxmlformats.org/officeDocument/2006/relationships" xmlns:p="http://schemas.openxmlformats.org/presentationml/2006/main">
-  <p:cSld>
-    <p:spTree>
-      <p:nvGrpSpPr>
-        <p:cNvPr id="1" name="">
-          <a:extLst>
-            <a:ext uri="{FF2B5EF4-FFF2-40B4-BE49-F238E27FC236}">
-              <a16:creationId xmlns:a16="http://schemas.microsoft.com/office/drawing/2014/main" id="{AFAF4B43-09B4-0ECF-E26D-84F2E26EB223}"/>
+              <a16:creationId xmlns:a16="http://schemas.microsoft.com/office/drawing/2014/main" id="{9BC45EE0-7E49-3928-B6D5-90F5F5ADE278}"/>
             </a:ext>
           </a:extLst>
         </p:cNvPr>
@@ -13502,7 +14380,7 @@
           <p:cNvPr id="2" name="제목 1">
             <a:extLst>
               <a:ext uri="{FF2B5EF4-FFF2-40B4-BE49-F238E27FC236}">
-                <a16:creationId xmlns:a16="http://schemas.microsoft.com/office/drawing/2014/main" id="{A597A1CD-38FF-A245-BBC6-B324884256AD}"/>
+                <a16:creationId xmlns:a16="http://schemas.microsoft.com/office/drawing/2014/main" id="{740B6116-93D0-0C6F-AB49-7BADF59C0077}"/>
               </a:ext>
             </a:extLst>
           </p:cNvPr>
@@ -13520,7 +14398,7 @@
           <a:p>
             <a:r>
               <a:rPr lang="ko-KR" altLang="en-US" dirty="0"/>
-              <a:t>재분배정책에 대한 찬반의견</a:t>
+              <a:t>적용대상</a:t>
             </a:r>
           </a:p>
         </p:txBody>
@@ -13530,7 +14408,7 @@
           <p:cNvPr id="4" name="슬라이드 번호 개체 틀 3">
             <a:extLst>
               <a:ext uri="{FF2B5EF4-FFF2-40B4-BE49-F238E27FC236}">
-                <a16:creationId xmlns:a16="http://schemas.microsoft.com/office/drawing/2014/main" id="{B6041E48-F037-1375-FF0E-BBDBC755A752}"/>
+                <a16:creationId xmlns:a16="http://schemas.microsoft.com/office/drawing/2014/main" id="{4644F25C-41BE-AD1F-5EE1-FF336034F04D}"/>
               </a:ext>
             </a:extLst>
           </p:cNvPr>
@@ -13548,7 +14426,7 @@
           <a:p>
             <a:fld id="{109C872D-39A9-4065-8BF3-6A613116E2A1}" type="slidenum">
               <a:rPr lang="ko-KR" altLang="en-US" smtClean="0"/>
-              <a:t>28</a:t>
+              <a:t>29</a:t>
             </a:fld>
             <a:endParaRPr lang="ko-KR" altLang="en-US"/>
           </a:p>
@@ -13559,7 +14437,7 @@
           <p:cNvPr id="3" name="TextBox 2">
             <a:extLst>
               <a:ext uri="{FF2B5EF4-FFF2-40B4-BE49-F238E27FC236}">
-                <a16:creationId xmlns:a16="http://schemas.microsoft.com/office/drawing/2014/main" id="{1E9FC4E3-47A9-296B-4B15-F3F3798E39D7}"/>
+                <a16:creationId xmlns:a16="http://schemas.microsoft.com/office/drawing/2014/main" id="{67A4A242-BB4C-59B7-3A6E-B5AABCFED15E}"/>
               </a:ext>
             </a:extLst>
           </p:cNvPr>
@@ -13569,7 +14447,7 @@
         <p:spPr>
           <a:xfrm>
             <a:off x="288790" y="958844"/>
-            <a:ext cx="11250267" cy="4476675"/>
+            <a:ext cx="11250267" cy="1522020"/>
           </a:xfrm>
           <a:prstGeom prst="rect">
             <a:avLst/>
@@ -13582,24 +14460,32 @@
           </a:bodyPr>
           <a:lstStyle/>
           <a:p>
-            <a:pPr marL="434975" indent="-342900">
-              <a:lnSpc>
-                <a:spcPct val="150000"/>
-              </a:lnSpc>
-              <a:buFont typeface="+mj-lt"/>
-              <a:buAutoNum type="arabicPeriod" startAt="2"/>
-            </a:pPr>
-            <a:r>
-              <a:rPr lang="ko-KR" altLang="en-US" sz="1600" b="1" spc="-50" dirty="0"/>
-              <a:t>효율성에 대한 부정적 영향</a:t>
-            </a:r>
-            <a:r>
-              <a:rPr lang="en-US" altLang="ko-KR" sz="1600" spc="-50" dirty="0"/>
-              <a:t>: </a:t>
-            </a:r>
-            <a:r>
-              <a:rPr lang="ko-KR" altLang="en-US" sz="1600" spc="-50" dirty="0"/>
-              <a:t>재분배정책이 효율적 자원배분을 저해하는 결과를 가져올 것이라는 점을 들어 반대한다</a:t>
+            <a:pPr marL="377825" indent="-285750">
+              <a:lnSpc>
+                <a:spcPct val="150000"/>
+              </a:lnSpc>
+              <a:buFont typeface="Arial" panose="020B0604020202020204" pitchFamily="34" charset="0"/>
+              <a:buChar char="•"/>
+            </a:pPr>
+            <a:r>
+              <a:rPr lang="ko-KR" altLang="en-US" sz="1600" spc="-50" dirty="0"/>
+              <a:t>우리나라에 국민연금제도가 처음 도입된 것은 </a:t>
+            </a:r>
+            <a:r>
+              <a:rPr lang="en-US" altLang="ko-KR" sz="1600" spc="-50" dirty="0"/>
+              <a:t>1988</a:t>
+            </a:r>
+            <a:r>
+              <a:rPr lang="ko-KR" altLang="en-US" sz="1600" spc="-50" dirty="0"/>
+              <a:t>년으로</a:t>
+            </a:r>
+            <a:r>
+              <a:rPr lang="en-US" altLang="ko-KR" sz="1600" spc="-50" dirty="0"/>
+              <a:t>, </a:t>
+            </a:r>
+            <a:r>
+              <a:rPr lang="ko-KR" altLang="en-US" sz="1600" spc="-50" dirty="0"/>
+              <a:t>그 역사가 길지 않다</a:t>
             </a:r>
             <a:r>
               <a:rPr lang="en-US" altLang="ko-KR" sz="1600" spc="-50" dirty="0"/>
@@ -13616,15 +14502,15 @@
             </a:pPr>
             <a:r>
               <a:rPr lang="ko-KR" altLang="en-US" sz="1600" spc="-50" dirty="0"/>
-              <a:t>예컨대</a:t>
-            </a:r>
-            <a:r>
-              <a:rPr lang="en-US" altLang="ko-KR" sz="1600" spc="-50" dirty="0"/>
-              <a:t>, </a:t>
-            </a:r>
-            <a:r>
-              <a:rPr lang="ko-KR" altLang="en-US" sz="1600" spc="-50" dirty="0"/>
-              <a:t>재분배효과를 크게 하기 위해 급격한 누진적 조세제도를 도입하면 사람들은 더 많이 일하는 동기가 감소할 것이다</a:t>
+              <a:t>모든 국민이 가입할 수 있고</a:t>
+            </a:r>
+            <a:r>
+              <a:rPr lang="en-US" altLang="ko-KR" sz="1600" spc="-50" dirty="0"/>
+              <a:t>, 1,200</a:t>
+            </a:r>
+            <a:r>
+              <a:rPr lang="ko-KR" altLang="en-US" sz="1600" spc="-50" dirty="0"/>
+              <a:t>조원이 넘는 기금을 확보한 중요한 재정 프로그램으로 정착하였다</a:t>
             </a:r>
             <a:r>
               <a:rPr lang="en-US" altLang="ko-KR" sz="1600" spc="-50" dirty="0"/>
@@ -13639,22 +14525,7 @@
               <a:buFont typeface="Wingdings" panose="05000000000000000000" pitchFamily="2" charset="2"/>
               <a:buChar char="ü"/>
             </a:pPr>
-            <a:r>
-              <a:rPr lang="ko-KR" altLang="en-US" sz="1600" spc="-50" dirty="0"/>
-              <a:t>또</a:t>
-            </a:r>
-            <a:r>
-              <a:rPr lang="en-US" altLang="ko-KR" sz="1600" spc="-50" dirty="0"/>
-              <a:t>, </a:t>
-            </a:r>
-            <a:r>
-              <a:rPr lang="ko-KR" altLang="en-US" sz="1600" spc="-50" dirty="0"/>
-              <a:t>빈곤층에 대한 소득보조 프로그램은 가난한 사람들의 근로 의욕을 감소시킬 수도 있다</a:t>
-            </a:r>
-            <a:r>
-              <a:rPr lang="en-US" altLang="ko-KR" sz="1600" spc="-50" dirty="0"/>
-              <a:t>.</a:t>
-            </a:r>
+            <a:endParaRPr lang="en-US" altLang="ko-KR" sz="1600" spc="-50"/>
           </a:p>
           <a:p>
             <a:pPr marL="377825" indent="-285750">
@@ -13664,577 +14535,14 @@
               <a:buFont typeface="Arial" panose="020B0604020202020204" pitchFamily="34" charset="0"/>
               <a:buChar char="•"/>
             </a:pPr>
-            <a:r>
-              <a:rPr lang="ko-KR" altLang="en-US" sz="1600" spc="-50" dirty="0"/>
-              <a:t>그러나 </a:t>
-            </a:r>
-            <a:r>
-              <a:rPr lang="ko-KR" altLang="en-US" sz="1600" spc="-50" dirty="0" err="1"/>
-              <a:t>아직까지는</a:t>
-            </a:r>
-            <a:r>
-              <a:rPr lang="ko-KR" altLang="en-US" sz="1600" spc="-50" dirty="0"/>
-              <a:t> 재분배정책이 효율성 감소에 어느정도 영향을 미치는지 정확히 알고 있지 못하다</a:t>
-            </a:r>
-            <a:r>
-              <a:rPr lang="en-US" altLang="ko-KR" sz="1600" spc="-50" dirty="0"/>
-              <a:t>.</a:t>
-            </a:r>
-          </a:p>
-          <a:p>
-            <a:pPr marL="377825" indent="-285750">
-              <a:lnSpc>
-                <a:spcPct val="150000"/>
-              </a:lnSpc>
-              <a:buFont typeface="Arial" panose="020B0604020202020204" pitchFamily="34" charset="0"/>
-              <a:buChar char="•"/>
-            </a:pPr>
             <a:endParaRPr lang="en-US" altLang="ko-KR" sz="1600" spc="-50" dirty="0"/>
-          </a:p>
-          <a:p>
-            <a:pPr marL="434975" indent="-342900">
-              <a:lnSpc>
-                <a:spcPct val="150000"/>
-              </a:lnSpc>
-              <a:buFont typeface="+mj-lt"/>
-              <a:buAutoNum type="arabicPeriod" startAt="3"/>
-            </a:pPr>
-            <a:r>
-              <a:rPr lang="ko-KR" altLang="en-US" sz="1600" b="1" spc="-50" dirty="0"/>
-              <a:t>정치적 현실의 관점</a:t>
-            </a:r>
-            <a:r>
-              <a:rPr lang="en-US" altLang="ko-KR" sz="1600" b="1" spc="-50" dirty="0"/>
-              <a:t>:</a:t>
-            </a:r>
-            <a:r>
-              <a:rPr lang="en-US" altLang="ko-KR" sz="1600" spc="-50" dirty="0"/>
-              <a:t> </a:t>
-            </a:r>
-            <a:r>
-              <a:rPr lang="ko-KR" altLang="en-US" sz="1600" spc="-50" dirty="0"/>
-              <a:t>정치기구가 과연 재분배작업을 성공적으로 해낼 수 있는지 의문을 가지고 반대한다</a:t>
-            </a:r>
-            <a:r>
-              <a:rPr lang="en-US" altLang="ko-KR" sz="1600" spc="-50" dirty="0"/>
-              <a:t>.</a:t>
-            </a:r>
-          </a:p>
-          <a:p>
-            <a:pPr marL="892175" lvl="1" indent="-342900">
-              <a:lnSpc>
-                <a:spcPct val="150000"/>
-              </a:lnSpc>
-              <a:buFont typeface="Wingdings" panose="05000000000000000000" pitchFamily="2" charset="2"/>
-              <a:buChar char="ü"/>
-            </a:pPr>
-            <a:r>
-              <a:rPr lang="ko-KR" altLang="en-US" sz="1600" spc="-50" dirty="0"/>
-              <a:t>재분배작업을 </a:t>
-            </a:r>
-            <a:r>
-              <a:rPr lang="ko-KR" altLang="en-US" sz="1600" spc="-50" dirty="0" err="1"/>
-              <a:t>담당해야하는</a:t>
-            </a:r>
-            <a:r>
-              <a:rPr lang="ko-KR" altLang="en-US" sz="1600" spc="-50" dirty="0"/>
-              <a:t> 정치기구 역시 여러 집단의 이익이 복잡하게 </a:t>
-            </a:r>
-            <a:r>
-              <a:rPr lang="ko-KR" altLang="en-US" sz="1600" spc="-50" dirty="0" err="1"/>
-              <a:t>얽혀있기</a:t>
-            </a:r>
-            <a:r>
-              <a:rPr lang="ko-KR" altLang="en-US" sz="1600" spc="-50" dirty="0"/>
-              <a:t> 때문에</a:t>
-            </a:r>
-            <a:r>
-              <a:rPr lang="en-US" altLang="ko-KR" sz="1600" spc="-50" dirty="0"/>
-              <a:t>, </a:t>
-            </a:r>
-            <a:r>
-              <a:rPr lang="ko-KR" altLang="en-US" sz="1600" spc="-50" dirty="0"/>
-              <a:t>공평한 재분배를 수행하기 힘든 것이 사실이다</a:t>
-            </a:r>
-            <a:r>
-              <a:rPr lang="en-US" altLang="ko-KR" sz="1600" spc="-50" dirty="0"/>
-              <a:t>.</a:t>
-            </a:r>
-          </a:p>
-          <a:p>
-            <a:pPr marL="434975" indent="-342900">
-              <a:lnSpc>
-                <a:spcPct val="150000"/>
-              </a:lnSpc>
-              <a:buFont typeface="Arial" panose="020B0604020202020204" pitchFamily="34" charset="0"/>
-              <a:buChar char="•"/>
-            </a:pPr>
-            <a:r>
-              <a:rPr lang="ko-KR" altLang="en-US" sz="1600" spc="-50" dirty="0"/>
-              <a:t>또 한가지 반대 논리는 재분배정책이 </a:t>
-            </a:r>
-            <a:r>
-              <a:rPr lang="ko-KR" altLang="en-US" sz="1600" spc="-50" dirty="0" err="1"/>
-              <a:t>계층간의</a:t>
-            </a:r>
-            <a:r>
-              <a:rPr lang="ko-KR" altLang="en-US" sz="1600" spc="-50" dirty="0"/>
-              <a:t> 갈등을 조장함으로써 정치과정에 심각한 긴장을 일으킨다는 것이다</a:t>
-            </a:r>
-            <a:r>
-              <a:rPr lang="en-US" altLang="ko-KR" sz="1600" spc="-50" dirty="0"/>
-              <a:t>.</a:t>
-            </a:r>
-          </a:p>
-          <a:p>
-            <a:pPr marL="892175" lvl="1" indent="-342900">
-              <a:lnSpc>
-                <a:spcPct val="150000"/>
-              </a:lnSpc>
-              <a:buFont typeface="Wingdings" panose="05000000000000000000" pitchFamily="2" charset="2"/>
-              <a:buChar char="ü"/>
-            </a:pPr>
-            <a:r>
-              <a:rPr lang="ko-KR" altLang="en-US" sz="1600" spc="-50" dirty="0"/>
-              <a:t>재분배라는 것이 어떤 사람으로부터 경제적 자원을 거두어 다른 사람에게 넘겨주는 것이기 때문에 이러한 주장에 일리가 있긴 하지만</a:t>
-            </a:r>
-            <a:r>
-              <a:rPr lang="en-US" altLang="ko-KR" sz="1600" spc="-50" dirty="0"/>
-              <a:t>, </a:t>
-            </a:r>
-            <a:r>
-              <a:rPr lang="ko-KR" altLang="en-US" sz="1600" spc="-50" dirty="0"/>
-              <a:t>재분배가 이루어지지 않을 때 </a:t>
-            </a:r>
-            <a:r>
-              <a:rPr lang="ko-KR" altLang="en-US" sz="1600" spc="-50" dirty="0" err="1"/>
-              <a:t>계층간의</a:t>
-            </a:r>
-            <a:r>
-              <a:rPr lang="ko-KR" altLang="en-US" sz="1600" spc="-50" dirty="0"/>
-              <a:t> 긴장과 갈등이 더 심해질 수도 있는 것이 사실이다</a:t>
-            </a:r>
-            <a:r>
-              <a:rPr lang="en-US" altLang="ko-KR" sz="1600" spc="-50" dirty="0"/>
-              <a:t>.</a:t>
-            </a:r>
           </a:p>
         </p:txBody>
       </p:sp>
     </p:spTree>
     <p:extLst>
       <p:ext uri="{BB962C8B-B14F-4D97-AF65-F5344CB8AC3E}">
-        <p14:creationId xmlns:p14="http://schemas.microsoft.com/office/powerpoint/2010/main" val="1620952806"/>
-      </p:ext>
-    </p:extLst>
-  </p:cSld>
-  <p:clrMapOvr>
-    <a:masterClrMapping/>
-  </p:clrMapOvr>
-</p:sld>
-</file>
-
-<file path=ppt/slides/slide29.xml><?xml version="1.0" encoding="utf-8"?>
-<p:sld xmlns:a="http://schemas.openxmlformats.org/drawingml/2006/main" xmlns:r="http://schemas.openxmlformats.org/officeDocument/2006/relationships" xmlns:p="http://schemas.openxmlformats.org/presentationml/2006/main">
-  <p:cSld>
-    <p:spTree>
-      <p:nvGrpSpPr>
-        <p:cNvPr id="1" name="">
-          <a:extLst>
-            <a:ext uri="{FF2B5EF4-FFF2-40B4-BE49-F238E27FC236}">
-              <a16:creationId xmlns:a16="http://schemas.microsoft.com/office/drawing/2014/main" id="{BA30D0EF-168D-4D0B-382A-14535921A395}"/>
-            </a:ext>
-          </a:extLst>
-        </p:cNvPr>
-        <p:cNvGrpSpPr/>
-        <p:nvPr/>
-      </p:nvGrpSpPr>
-      <p:grpSpPr>
-        <a:xfrm>
-          <a:off x="0" y="0"/>
-          <a:ext cx="0" cy="0"/>
-          <a:chOff x="0" y="0"/>
-          <a:chExt cx="0" cy="0"/>
-        </a:xfrm>
-      </p:grpSpPr>
-      <p:sp>
-        <p:nvSpPr>
-          <p:cNvPr id="2" name="제목 1">
-            <a:extLst>
-              <a:ext uri="{FF2B5EF4-FFF2-40B4-BE49-F238E27FC236}">
-                <a16:creationId xmlns:a16="http://schemas.microsoft.com/office/drawing/2014/main" id="{81A04DD1-B821-23EA-0CFC-B188679FBE93}"/>
-              </a:ext>
-            </a:extLst>
-          </p:cNvPr>
-          <p:cNvSpPr>
-            <a:spLocks noGrp="1"/>
-          </p:cNvSpPr>
-          <p:nvPr>
-            <p:ph type="title"/>
-          </p:nvPr>
-        </p:nvSpPr>
-        <p:spPr/>
-        <p:txBody>
-          <a:bodyPr/>
-          <a:lstStyle/>
-          <a:p>
-            <a:r>
-              <a:rPr lang="ko-KR" altLang="en-US" dirty="0"/>
-              <a:t>재분배정책에 대한 찬반의견</a:t>
-            </a:r>
-          </a:p>
-        </p:txBody>
-      </p:sp>
-      <p:sp>
-        <p:nvSpPr>
-          <p:cNvPr id="4" name="슬라이드 번호 개체 틀 3">
-            <a:extLst>
-              <a:ext uri="{FF2B5EF4-FFF2-40B4-BE49-F238E27FC236}">
-                <a16:creationId xmlns:a16="http://schemas.microsoft.com/office/drawing/2014/main" id="{1B8262B7-878F-30FB-81A2-6AAD48AC247A}"/>
-              </a:ext>
-            </a:extLst>
-          </p:cNvPr>
-          <p:cNvSpPr>
-            <a:spLocks noGrp="1"/>
-          </p:cNvSpPr>
-          <p:nvPr>
-            <p:ph type="sldNum" sz="quarter" idx="12"/>
-          </p:nvPr>
-        </p:nvSpPr>
-        <p:spPr/>
-        <p:txBody>
-          <a:bodyPr/>
-          <a:lstStyle/>
-          <a:p>
-            <a:fld id="{109C872D-39A9-4065-8BF3-6A613116E2A1}" type="slidenum">
-              <a:rPr lang="ko-KR" altLang="en-US" smtClean="0"/>
-              <a:t>29</a:t>
-            </a:fld>
-            <a:endParaRPr lang="ko-KR" altLang="en-US"/>
-          </a:p>
-        </p:txBody>
-      </p:sp>
-      <p:sp>
-        <p:nvSpPr>
-          <p:cNvPr id="3" name="TextBox 2">
-            <a:extLst>
-              <a:ext uri="{FF2B5EF4-FFF2-40B4-BE49-F238E27FC236}">
-                <a16:creationId xmlns:a16="http://schemas.microsoft.com/office/drawing/2014/main" id="{D40ABBB2-5E06-7126-F790-E2C507B57338}"/>
-              </a:ext>
-            </a:extLst>
-          </p:cNvPr>
-          <p:cNvSpPr txBox="1"/>
-          <p:nvPr/>
-        </p:nvSpPr>
-        <p:spPr>
-          <a:xfrm>
-            <a:off x="288790" y="958844"/>
-            <a:ext cx="11250267" cy="5261505"/>
-          </a:xfrm>
-          <a:prstGeom prst="rect">
-            <a:avLst/>
-          </a:prstGeom>
-          <a:noFill/>
-        </p:spPr>
-        <p:txBody>
-          <a:bodyPr wrap="square" rtlCol="0" anchor="t">
-            <a:spAutoFit/>
-          </a:bodyPr>
-          <a:lstStyle/>
-          <a:p>
-            <a:pPr>
-              <a:lnSpc>
-                <a:spcPct val="150000"/>
-              </a:lnSpc>
-            </a:pPr>
-            <a:r>
-              <a:rPr lang="ko-KR" altLang="en-US" u="sng" dirty="0">
-                <a:ln w="3175">
-                  <a:noFill/>
-                </a:ln>
-                <a:latin typeface="HY헤드라인M" panose="02030600000101010101" pitchFamily="18" charset="-127"/>
-                <a:ea typeface="HY헤드라인M" panose="02030600000101010101" pitchFamily="18" charset="-127"/>
-              </a:rPr>
-              <a:t>찬성의 논리</a:t>
-            </a:r>
-            <a:endParaRPr lang="en-US" altLang="ko-KR" sz="400" u="sng" dirty="0">
-              <a:ln w="3175">
-                <a:noFill/>
-              </a:ln>
-              <a:latin typeface="HY헤드라인M" panose="02030600000101010101" pitchFamily="18" charset="-127"/>
-              <a:ea typeface="HY헤드라인M" panose="02030600000101010101" pitchFamily="18" charset="-127"/>
-            </a:endParaRPr>
-          </a:p>
-          <a:p>
-            <a:pPr marL="434975" indent="-342900">
-              <a:lnSpc>
-                <a:spcPct val="150000"/>
-              </a:lnSpc>
-              <a:buFont typeface="+mj-lt"/>
-              <a:buAutoNum type="arabicPeriod"/>
-            </a:pPr>
-            <a:r>
-              <a:rPr lang="ko-KR" altLang="en-US" sz="1600" b="1" spc="-50" dirty="0"/>
-              <a:t>윤리적 관점</a:t>
-            </a:r>
-            <a:r>
-              <a:rPr lang="en-US" altLang="ko-KR" sz="1600" spc="-50" dirty="0"/>
-              <a:t>: </a:t>
-            </a:r>
-            <a:r>
-              <a:rPr lang="ko-KR" altLang="en-US" sz="1600" spc="-50" dirty="0"/>
-              <a:t>평등주의자들은 분배상태가 평등하지 못하면 이를 시정하려는 노력이 따라야 한다고 주장한다</a:t>
-            </a:r>
-            <a:r>
-              <a:rPr lang="en-US" altLang="ko-KR" sz="1600" spc="-50" dirty="0"/>
-              <a:t>.</a:t>
-            </a:r>
-          </a:p>
-          <a:p>
-            <a:pPr marL="835025" lvl="1" indent="-285750">
-              <a:lnSpc>
-                <a:spcPct val="150000"/>
-              </a:lnSpc>
-              <a:buFont typeface="Wingdings" panose="05000000000000000000" pitchFamily="2" charset="2"/>
-              <a:buChar char="ü"/>
-            </a:pPr>
-            <a:r>
-              <a:rPr lang="ko-KR" altLang="en-US" sz="1600" spc="-50" dirty="0"/>
-              <a:t>평등주의 뿐 아니라 공리주의자도 재분배를 위한 개입을 지지한다</a:t>
-            </a:r>
-            <a:r>
-              <a:rPr lang="en-US" altLang="ko-KR" sz="1600" spc="-50" dirty="0"/>
-              <a:t>.</a:t>
-            </a:r>
-          </a:p>
-          <a:p>
-            <a:pPr marL="1292225" lvl="2" indent="-285750">
-              <a:lnSpc>
-                <a:spcPct val="150000"/>
-              </a:lnSpc>
-              <a:buFont typeface="Wingdings" panose="05000000000000000000" pitchFamily="2" charset="2"/>
-              <a:buChar char="Ø"/>
-            </a:pPr>
-            <a:r>
-              <a:rPr lang="ko-KR" altLang="en-US" sz="1600" spc="-50" dirty="0"/>
-              <a:t>다만 공리의 원칙은 단순히 사회적 후생의 총합이 극대화되는 분배상태를 요구할 뿐이지만</a:t>
-            </a:r>
-            <a:r>
-              <a:rPr lang="en-US" altLang="ko-KR" sz="1600" spc="-50" dirty="0"/>
-              <a:t>, </a:t>
-            </a:r>
-            <a:r>
-              <a:rPr lang="ko-KR" altLang="en-US" sz="1600" spc="-50" dirty="0"/>
-              <a:t>공리주의자들이 일반적으로 설정하는 상황에서는 재분배를 통한 평등화가 사회 전체의 후생을 증진시키기 때문이다</a:t>
-            </a:r>
-            <a:r>
-              <a:rPr lang="en-US" altLang="ko-KR" sz="1600" spc="-50" dirty="0"/>
-              <a:t>.</a:t>
-            </a:r>
-          </a:p>
-          <a:p>
-            <a:pPr marL="1292225" lvl="2" indent="-285750">
-              <a:lnSpc>
-                <a:spcPct val="150000"/>
-              </a:lnSpc>
-              <a:buFont typeface="Wingdings" panose="05000000000000000000" pitchFamily="2" charset="2"/>
-              <a:buChar char="Ø"/>
-            </a:pPr>
-            <a:endParaRPr lang="en-US" altLang="ko-KR" sz="1600" spc="-50" dirty="0"/>
-          </a:p>
-          <a:p>
-            <a:pPr marL="434975" indent="-342900">
-              <a:lnSpc>
-                <a:spcPct val="150000"/>
-              </a:lnSpc>
-              <a:buFont typeface="+mj-lt"/>
-              <a:buAutoNum type="arabicPeriod"/>
-            </a:pPr>
-            <a:r>
-              <a:rPr lang="ko-KR" altLang="en-US" sz="1600" b="1" spc="-50" dirty="0" err="1"/>
-              <a:t>공공재로서의</a:t>
-            </a:r>
-            <a:r>
-              <a:rPr lang="ko-KR" altLang="en-US" sz="1600" b="1" spc="-50" dirty="0"/>
-              <a:t> 공평한분배</a:t>
-            </a:r>
-            <a:r>
-              <a:rPr lang="en-US" altLang="ko-KR" sz="1600" spc="-50" dirty="0"/>
-              <a:t>: </a:t>
-            </a:r>
-            <a:r>
-              <a:rPr lang="ko-KR" altLang="en-US" sz="1600" spc="-50" dirty="0"/>
-              <a:t>재분배가 </a:t>
-            </a:r>
-            <a:r>
-              <a:rPr lang="ko-KR" altLang="en-US" sz="1600" spc="-50" dirty="0" err="1"/>
-              <a:t>가져다주는</a:t>
-            </a:r>
-            <a:r>
-              <a:rPr lang="ko-KR" altLang="en-US" sz="1600" spc="-50" dirty="0"/>
-              <a:t> 사회적 이득</a:t>
-            </a:r>
-            <a:r>
-              <a:rPr lang="en-US" altLang="ko-KR" sz="1600" spc="-50" dirty="0"/>
-              <a:t>(</a:t>
-            </a:r>
-            <a:r>
-              <a:rPr lang="ko-KR" altLang="en-US" sz="1600" spc="-50" dirty="0"/>
-              <a:t>범죄 감소</a:t>
-            </a:r>
-            <a:r>
-              <a:rPr lang="en-US" altLang="ko-KR" sz="1600" spc="-50" dirty="0"/>
-              <a:t>, </a:t>
-            </a:r>
-            <a:r>
-              <a:rPr lang="ko-KR" altLang="en-US" sz="1600" spc="-50" dirty="0"/>
-              <a:t>사회적 안정성 증대</a:t>
-            </a:r>
-            <a:r>
-              <a:rPr lang="en-US" altLang="ko-KR" sz="1600" spc="-50" dirty="0"/>
-              <a:t>)</a:t>
-            </a:r>
-            <a:r>
-              <a:rPr lang="ko-KR" altLang="en-US" sz="1600" spc="-50" dirty="0"/>
-              <a:t>이 마치 공공재와 같은 성격을 갖는다고 주장한다</a:t>
-            </a:r>
-            <a:r>
-              <a:rPr lang="en-US" altLang="ko-KR" sz="1600" spc="-50" dirty="0"/>
-              <a:t>.</a:t>
-            </a:r>
-          </a:p>
-          <a:p>
-            <a:pPr marL="835025" lvl="1" indent="-285750">
-              <a:lnSpc>
-                <a:spcPct val="150000"/>
-              </a:lnSpc>
-              <a:buFont typeface="Wingdings" panose="05000000000000000000" pitchFamily="2" charset="2"/>
-              <a:buChar char="ü"/>
-            </a:pPr>
-            <a:r>
-              <a:rPr lang="ko-KR" altLang="en-US" sz="1600" spc="-50" dirty="0"/>
-              <a:t>그 혜택을 누구나 누릴 수 있어 </a:t>
-            </a:r>
-            <a:r>
-              <a:rPr lang="ko-KR" altLang="en-US" sz="1600" spc="-50" dirty="0" err="1"/>
-              <a:t>배제불가능하며</a:t>
-            </a:r>
-            <a:r>
-              <a:rPr lang="en-US" altLang="ko-KR" sz="1600" spc="-50" dirty="0"/>
-              <a:t>, </a:t>
-            </a:r>
-            <a:r>
-              <a:rPr lang="ko-KR" altLang="en-US" sz="1600" spc="-50" dirty="0"/>
-              <a:t>또 누군가 혜택을 누린다고 해서 다른 사람이 얻는 혜택이 줄어들지 않는다는 점에서 비경합성도 갖고 있다고 주장한다</a:t>
-            </a:r>
-            <a:r>
-              <a:rPr lang="en-US" altLang="ko-KR" sz="1600" spc="-50" dirty="0"/>
-              <a:t>.</a:t>
-            </a:r>
-          </a:p>
-          <a:p>
-            <a:pPr marL="835025" lvl="1" indent="-285750">
-              <a:lnSpc>
-                <a:spcPct val="150000"/>
-              </a:lnSpc>
-              <a:buFont typeface="Wingdings" panose="05000000000000000000" pitchFamily="2" charset="2"/>
-              <a:buChar char="ü"/>
-            </a:pPr>
-            <a:r>
-              <a:rPr lang="ko-KR" altLang="en-US" sz="1600" spc="-50" dirty="0"/>
-              <a:t>재분배로부터의 사회적 이득이 공공재 성격을 갖는다면</a:t>
-            </a:r>
-            <a:r>
-              <a:rPr lang="en-US" altLang="ko-KR" sz="1600" spc="-50" dirty="0"/>
-              <a:t>, </a:t>
-            </a:r>
-            <a:r>
-              <a:rPr lang="ko-KR" altLang="en-US" sz="1600" spc="-50" dirty="0"/>
-              <a:t>정부가 재분배를 위해 개입해야 할 필요가 생긴다</a:t>
-            </a:r>
-            <a:r>
-              <a:rPr lang="en-US" altLang="ko-KR" sz="1600" spc="-50" dirty="0"/>
-              <a:t>.</a:t>
-            </a:r>
-          </a:p>
-          <a:p>
-            <a:pPr marL="1292225" lvl="2" indent="-285750">
-              <a:lnSpc>
-                <a:spcPct val="150000"/>
-              </a:lnSpc>
-              <a:buFont typeface="Wingdings" panose="05000000000000000000" pitchFamily="2" charset="2"/>
-              <a:buChar char="Ø"/>
-            </a:pPr>
-            <a:r>
-              <a:rPr lang="en-US" altLang="ko-KR" sz="1600" spc="-50" dirty="0"/>
-              <a:t>4</a:t>
-            </a:r>
-            <a:r>
-              <a:rPr lang="ko-KR" altLang="en-US" sz="1600" spc="-50" dirty="0"/>
-              <a:t>장 </a:t>
-            </a:r>
-            <a:r>
-              <a:rPr lang="en-US" altLang="ko-KR" sz="1600" spc="-50" dirty="0"/>
-              <a:t>(</a:t>
-            </a:r>
-            <a:r>
-              <a:rPr lang="ko-KR" altLang="en-US" sz="1600" spc="-50" dirty="0"/>
-              <a:t>공공재</a:t>
-            </a:r>
-            <a:r>
-              <a:rPr lang="en-US" altLang="ko-KR" sz="1600" spc="-50" dirty="0"/>
-              <a:t>)</a:t>
-            </a:r>
-            <a:r>
-              <a:rPr lang="ko-KR" altLang="en-US" sz="1600" spc="-50" dirty="0"/>
-              <a:t>에서 배웠듯이 공공재의 경우 무임승차 문제가 발생할 수 있기 때문이다</a:t>
-            </a:r>
-            <a:r>
-              <a:rPr lang="en-US" altLang="ko-KR" sz="1600" spc="-50" dirty="0"/>
-              <a:t>.</a:t>
-            </a:r>
-          </a:p>
-          <a:p>
-            <a:pPr marL="1292225" lvl="2" indent="-285750">
-              <a:lnSpc>
-                <a:spcPct val="150000"/>
-              </a:lnSpc>
-              <a:buFont typeface="Wingdings" panose="05000000000000000000" pitchFamily="2" charset="2"/>
-              <a:buChar char="Ø"/>
-            </a:pPr>
-            <a:r>
-              <a:rPr lang="ko-KR" altLang="en-US" sz="1600" spc="-50" dirty="0"/>
-              <a:t>부유한 사람들이 빈곤한 사람에게 소득을 나누어 주지 않고</a:t>
-            </a:r>
-            <a:r>
-              <a:rPr lang="en-US" altLang="ko-KR" sz="1600" spc="-50" dirty="0"/>
-              <a:t>, </a:t>
-            </a:r>
-            <a:r>
-              <a:rPr lang="ko-KR" altLang="en-US" sz="1600" spc="-50" dirty="0"/>
-              <a:t>다른 부유한 사람들에게 그 일을 떠맡기는 것이다</a:t>
-            </a:r>
-            <a:r>
-              <a:rPr lang="en-US" altLang="ko-KR" sz="1600" spc="-50" dirty="0"/>
-              <a:t>.</a:t>
-            </a:r>
-          </a:p>
-          <a:p>
-            <a:pPr marL="835025" lvl="1" indent="-285750">
-              <a:lnSpc>
-                <a:spcPct val="150000"/>
-              </a:lnSpc>
-              <a:buFont typeface="Wingdings" panose="05000000000000000000" pitchFamily="2" charset="2"/>
-              <a:buChar char="ü"/>
-            </a:pPr>
-            <a:endParaRPr lang="en-US" altLang="ko-KR" sz="1600" spc="-50" dirty="0"/>
-          </a:p>
-        </p:txBody>
-      </p:sp>
-    </p:spTree>
-    <p:extLst>
-      <p:ext uri="{BB962C8B-B14F-4D97-AF65-F5344CB8AC3E}">
-        <p14:creationId xmlns:p14="http://schemas.microsoft.com/office/powerpoint/2010/main" val="1769245089"/>
+        <p14:creationId xmlns:p14="http://schemas.microsoft.com/office/powerpoint/2010/main" val="2365058993"/>
       </p:ext>
     </p:extLst>
   </p:cSld>
@@ -14395,6 +14703,1062 @@
         <p:cNvPr id="1" name="">
           <a:extLst>
             <a:ext uri="{FF2B5EF4-FFF2-40B4-BE49-F238E27FC236}">
+              <a16:creationId xmlns:a16="http://schemas.microsoft.com/office/drawing/2014/main" id="{8EA7EF4E-B5E0-3A1D-111F-8C3807B2C633}"/>
+            </a:ext>
+          </a:extLst>
+        </p:cNvPr>
+        <p:cNvGrpSpPr/>
+        <p:nvPr/>
+      </p:nvGrpSpPr>
+      <p:grpSpPr>
+        <a:xfrm>
+          <a:off x="0" y="0"/>
+          <a:ext cx="0" cy="0"/>
+          <a:chOff x="0" y="0"/>
+          <a:chExt cx="0" cy="0"/>
+        </a:xfrm>
+      </p:grpSpPr>
+      <p:pic>
+        <p:nvPicPr>
+          <p:cNvPr id="6" name="그림 5" descr="텍스트, 로고, 원, 폰트이(가) 표시된 사진&#10;&#10;AI 생성 콘텐츠는 정확하지 않을 수 있습니다.">
+            <a:extLst>
+              <a:ext uri="{FF2B5EF4-FFF2-40B4-BE49-F238E27FC236}">
+                <a16:creationId xmlns:a16="http://schemas.microsoft.com/office/drawing/2014/main" id="{8874C330-8ACD-3363-687A-E20C99E8F966}"/>
+              </a:ext>
+            </a:extLst>
+          </p:cNvPr>
+          <p:cNvPicPr>
+            <a:picLocks noChangeAspect="1"/>
+          </p:cNvPicPr>
+          <p:nvPr/>
+        </p:nvPicPr>
+        <p:blipFill>
+          <a:blip r:embed="rId2">
+            <a:alphaModFix amt="20000"/>
+            <a:extLst>
+              <a:ext uri="{28A0092B-C50C-407E-A947-70E740481C1C}">
+                <a14:useLocalDpi xmlns:a14="http://schemas.microsoft.com/office/drawing/2010/main" val="0"/>
+              </a:ext>
+            </a:extLst>
+          </a:blip>
+          <a:stretch>
+            <a:fillRect/>
+          </a:stretch>
+        </p:blipFill>
+        <p:spPr>
+          <a:xfrm>
+            <a:off x="4012070" y="1673061"/>
+            <a:ext cx="4167861" cy="4167861"/>
+          </a:xfrm>
+          <a:prstGeom prst="rect">
+            <a:avLst/>
+          </a:prstGeom>
+        </p:spPr>
+      </p:pic>
+      <p:sp>
+        <p:nvSpPr>
+          <p:cNvPr id="4" name="슬라이드 번호 개체 틀 3">
+            <a:extLst>
+              <a:ext uri="{FF2B5EF4-FFF2-40B4-BE49-F238E27FC236}">
+                <a16:creationId xmlns:a16="http://schemas.microsoft.com/office/drawing/2014/main" id="{004AB3A2-801B-F0F4-9ABE-28BF0BC7E562}"/>
+              </a:ext>
+            </a:extLst>
+          </p:cNvPr>
+          <p:cNvSpPr>
+            <a:spLocks noGrp="1"/>
+          </p:cNvSpPr>
+          <p:nvPr>
+            <p:ph type="sldNum" sz="quarter" idx="12"/>
+          </p:nvPr>
+        </p:nvSpPr>
+        <p:spPr/>
+        <p:txBody>
+          <a:bodyPr/>
+          <a:lstStyle/>
+          <a:p>
+            <a:fld id="{109C872D-39A9-4065-8BF3-6A613116E2A1}" type="slidenum">
+              <a:rPr lang="ko-KR" altLang="en-US" smtClean="0"/>
+              <a:t>30</a:t>
+            </a:fld>
+            <a:endParaRPr lang="ko-KR" altLang="en-US"/>
+          </a:p>
+        </p:txBody>
+      </p:sp>
+      <p:sp>
+        <p:nvSpPr>
+          <p:cNvPr id="7" name="제목 1">
+            <a:extLst>
+              <a:ext uri="{FF2B5EF4-FFF2-40B4-BE49-F238E27FC236}">
+                <a16:creationId xmlns:a16="http://schemas.microsoft.com/office/drawing/2014/main" id="{59B23D82-89C3-EE4E-1C72-E7278FA1DEAB}"/>
+              </a:ext>
+            </a:extLst>
+          </p:cNvPr>
+          <p:cNvSpPr>
+            <a:spLocks noGrp="1"/>
+          </p:cNvSpPr>
+          <p:nvPr>
+            <p:ph type="title"/>
+          </p:nvPr>
+        </p:nvSpPr>
+        <p:spPr>
+          <a:xfrm>
+            <a:off x="831850" y="3765550"/>
+            <a:ext cx="11150600" cy="652818"/>
+          </a:xfrm>
+          <a:effectLst>
+            <a:reflection blurRad="50800" stA="45000" endPos="44000" dir="5400000" sy="-100000" algn="bl" rotWithShape="0"/>
+          </a:effectLst>
+        </p:spPr>
+        <p:txBody>
+          <a:bodyPr anchor="b"/>
+          <a:lstStyle/>
+          <a:p>
+            <a:r>
+              <a:rPr lang="en-US" altLang="ko-KR" sz="4000" b="1" i="0" spc="150" dirty="0"/>
+              <a:t>Section 6. </a:t>
+            </a:r>
+            <a:r>
+              <a:rPr lang="ko-KR" altLang="en-US" sz="4000" b="1" i="0" spc="150" dirty="0"/>
+              <a:t>건강보험제도의 기본성격</a:t>
+            </a:r>
+            <a:endParaRPr lang="ko-KR" altLang="en-US" sz="3600" i="0" spc="150" dirty="0"/>
+          </a:p>
+        </p:txBody>
+      </p:sp>
+    </p:spTree>
+    <p:extLst>
+      <p:ext uri="{BB962C8B-B14F-4D97-AF65-F5344CB8AC3E}">
+        <p14:creationId xmlns:p14="http://schemas.microsoft.com/office/powerpoint/2010/main" val="797057951"/>
+      </p:ext>
+    </p:extLst>
+  </p:cSld>
+  <p:clrMapOvr>
+    <a:masterClrMapping/>
+  </p:clrMapOvr>
+</p:sld>
+</file>
+
+<file path=ppt/slides/slide31.xml><?xml version="1.0" encoding="utf-8"?>
+<p:sld xmlns:a="http://schemas.openxmlformats.org/drawingml/2006/main" xmlns:r="http://schemas.openxmlformats.org/officeDocument/2006/relationships" xmlns:p="http://schemas.openxmlformats.org/presentationml/2006/main">
+  <p:cSld>
+    <p:spTree>
+      <p:nvGrpSpPr>
+        <p:cNvPr id="1" name="">
+          <a:extLst>
+            <a:ext uri="{FF2B5EF4-FFF2-40B4-BE49-F238E27FC236}">
+              <a16:creationId xmlns:a16="http://schemas.microsoft.com/office/drawing/2014/main" id="{C688FAAE-F208-7323-0B7B-79314966BFC0}"/>
+            </a:ext>
+          </a:extLst>
+        </p:cNvPr>
+        <p:cNvGrpSpPr/>
+        <p:nvPr/>
+      </p:nvGrpSpPr>
+      <p:grpSpPr>
+        <a:xfrm>
+          <a:off x="0" y="0"/>
+          <a:ext cx="0" cy="0"/>
+          <a:chOff x="0" y="0"/>
+          <a:chExt cx="0" cy="0"/>
+        </a:xfrm>
+      </p:grpSpPr>
+      <p:pic>
+        <p:nvPicPr>
+          <p:cNvPr id="6" name="그림 5" descr="텍스트, 로고, 원, 폰트이(가) 표시된 사진&#10;&#10;AI 생성 콘텐츠는 정확하지 않을 수 있습니다.">
+            <a:extLst>
+              <a:ext uri="{FF2B5EF4-FFF2-40B4-BE49-F238E27FC236}">
+                <a16:creationId xmlns:a16="http://schemas.microsoft.com/office/drawing/2014/main" id="{861D89AF-D865-CF91-B0A0-E9B2EBC2C6FB}"/>
+              </a:ext>
+            </a:extLst>
+          </p:cNvPr>
+          <p:cNvPicPr>
+            <a:picLocks noChangeAspect="1"/>
+          </p:cNvPicPr>
+          <p:nvPr/>
+        </p:nvPicPr>
+        <p:blipFill>
+          <a:blip r:embed="rId2">
+            <a:alphaModFix amt="20000"/>
+            <a:extLst>
+              <a:ext uri="{28A0092B-C50C-407E-A947-70E740481C1C}">
+                <a14:useLocalDpi xmlns:a14="http://schemas.microsoft.com/office/drawing/2010/main" val="0"/>
+              </a:ext>
+            </a:extLst>
+          </a:blip>
+          <a:stretch>
+            <a:fillRect/>
+          </a:stretch>
+        </p:blipFill>
+        <p:spPr>
+          <a:xfrm>
+            <a:off x="4012070" y="1673061"/>
+            <a:ext cx="4167861" cy="4167861"/>
+          </a:xfrm>
+          <a:prstGeom prst="rect">
+            <a:avLst/>
+          </a:prstGeom>
+        </p:spPr>
+      </p:pic>
+      <p:sp>
+        <p:nvSpPr>
+          <p:cNvPr id="4" name="슬라이드 번호 개체 틀 3">
+            <a:extLst>
+              <a:ext uri="{FF2B5EF4-FFF2-40B4-BE49-F238E27FC236}">
+                <a16:creationId xmlns:a16="http://schemas.microsoft.com/office/drawing/2014/main" id="{EB428E16-A285-ADD2-098D-FFC7DEC11265}"/>
+              </a:ext>
+            </a:extLst>
+          </p:cNvPr>
+          <p:cNvSpPr>
+            <a:spLocks noGrp="1"/>
+          </p:cNvSpPr>
+          <p:nvPr>
+            <p:ph type="sldNum" sz="quarter" idx="12"/>
+          </p:nvPr>
+        </p:nvSpPr>
+        <p:spPr/>
+        <p:txBody>
+          <a:bodyPr/>
+          <a:lstStyle/>
+          <a:p>
+            <a:fld id="{109C872D-39A9-4065-8BF3-6A613116E2A1}" type="slidenum">
+              <a:rPr lang="ko-KR" altLang="en-US" smtClean="0"/>
+              <a:t>31</a:t>
+            </a:fld>
+            <a:endParaRPr lang="ko-KR" altLang="en-US"/>
+          </a:p>
+        </p:txBody>
+      </p:sp>
+      <p:sp>
+        <p:nvSpPr>
+          <p:cNvPr id="7" name="제목 1">
+            <a:extLst>
+              <a:ext uri="{FF2B5EF4-FFF2-40B4-BE49-F238E27FC236}">
+                <a16:creationId xmlns:a16="http://schemas.microsoft.com/office/drawing/2014/main" id="{80C8B4D5-4027-0895-6282-01FB061A2E7B}"/>
+              </a:ext>
+            </a:extLst>
+          </p:cNvPr>
+          <p:cNvSpPr>
+            <a:spLocks noGrp="1"/>
+          </p:cNvSpPr>
+          <p:nvPr>
+            <p:ph type="title"/>
+          </p:nvPr>
+        </p:nvSpPr>
+        <p:spPr>
+          <a:xfrm>
+            <a:off x="831850" y="3765550"/>
+            <a:ext cx="11150600" cy="652818"/>
+          </a:xfrm>
+          <a:effectLst>
+            <a:reflection blurRad="50800" stA="45000" endPos="44000" dir="5400000" sy="-100000" algn="bl" rotWithShape="0"/>
+          </a:effectLst>
+        </p:spPr>
+        <p:txBody>
+          <a:bodyPr anchor="b"/>
+          <a:lstStyle/>
+          <a:p>
+            <a:r>
+              <a:rPr lang="en-US" altLang="ko-KR" sz="4000" b="1" i="0" spc="150" dirty="0"/>
+              <a:t>Section 7. </a:t>
+            </a:r>
+            <a:r>
+              <a:rPr lang="ko-KR" altLang="en-US" sz="4000" b="1" i="0" spc="150" dirty="0"/>
+              <a:t>우리나라의 국민건강보험제도</a:t>
+            </a:r>
+            <a:endParaRPr lang="ko-KR" altLang="en-US" sz="3600" i="0" spc="150" dirty="0"/>
+          </a:p>
+        </p:txBody>
+      </p:sp>
+    </p:spTree>
+    <p:extLst>
+      <p:ext uri="{BB962C8B-B14F-4D97-AF65-F5344CB8AC3E}">
+        <p14:creationId xmlns:p14="http://schemas.microsoft.com/office/powerpoint/2010/main" val="1606299614"/>
+      </p:ext>
+    </p:extLst>
+  </p:cSld>
+  <p:clrMapOvr>
+    <a:masterClrMapping/>
+  </p:clrMapOvr>
+</p:sld>
+</file>
+
+<file path=ppt/slides/slide32.xml><?xml version="1.0" encoding="utf-8"?>
+<p:sld xmlns:a="http://schemas.openxmlformats.org/drawingml/2006/main" xmlns:r="http://schemas.openxmlformats.org/officeDocument/2006/relationships" xmlns:p="http://schemas.openxmlformats.org/presentationml/2006/main">
+  <p:cSld>
+    <p:spTree>
+      <p:nvGrpSpPr>
+        <p:cNvPr id="1" name="">
+          <a:extLst>
+            <a:ext uri="{FF2B5EF4-FFF2-40B4-BE49-F238E27FC236}">
+              <a16:creationId xmlns:a16="http://schemas.microsoft.com/office/drawing/2014/main" id="{AFAF4B43-09B4-0ECF-E26D-84F2E26EB223}"/>
+            </a:ext>
+          </a:extLst>
+        </p:cNvPr>
+        <p:cNvGrpSpPr/>
+        <p:nvPr/>
+      </p:nvGrpSpPr>
+      <p:grpSpPr>
+        <a:xfrm>
+          <a:off x="0" y="0"/>
+          <a:ext cx="0" cy="0"/>
+          <a:chOff x="0" y="0"/>
+          <a:chExt cx="0" cy="0"/>
+        </a:xfrm>
+      </p:grpSpPr>
+      <p:sp>
+        <p:nvSpPr>
+          <p:cNvPr id="2" name="제목 1">
+            <a:extLst>
+              <a:ext uri="{FF2B5EF4-FFF2-40B4-BE49-F238E27FC236}">
+                <a16:creationId xmlns:a16="http://schemas.microsoft.com/office/drawing/2014/main" id="{A597A1CD-38FF-A245-BBC6-B324884256AD}"/>
+              </a:ext>
+            </a:extLst>
+          </p:cNvPr>
+          <p:cNvSpPr>
+            <a:spLocks noGrp="1"/>
+          </p:cNvSpPr>
+          <p:nvPr>
+            <p:ph type="title"/>
+          </p:nvPr>
+        </p:nvSpPr>
+        <p:spPr/>
+        <p:txBody>
+          <a:bodyPr/>
+          <a:lstStyle/>
+          <a:p>
+            <a:r>
+              <a:rPr lang="ko-KR" altLang="en-US" dirty="0"/>
+              <a:t>재분배정책에 대한 찬반의견</a:t>
+            </a:r>
+          </a:p>
+        </p:txBody>
+      </p:sp>
+      <p:sp>
+        <p:nvSpPr>
+          <p:cNvPr id="4" name="슬라이드 번호 개체 틀 3">
+            <a:extLst>
+              <a:ext uri="{FF2B5EF4-FFF2-40B4-BE49-F238E27FC236}">
+                <a16:creationId xmlns:a16="http://schemas.microsoft.com/office/drawing/2014/main" id="{B6041E48-F037-1375-FF0E-BBDBC755A752}"/>
+              </a:ext>
+            </a:extLst>
+          </p:cNvPr>
+          <p:cNvSpPr>
+            <a:spLocks noGrp="1"/>
+          </p:cNvSpPr>
+          <p:nvPr>
+            <p:ph type="sldNum" sz="quarter" idx="12"/>
+          </p:nvPr>
+        </p:nvSpPr>
+        <p:spPr/>
+        <p:txBody>
+          <a:bodyPr/>
+          <a:lstStyle/>
+          <a:p>
+            <a:fld id="{109C872D-39A9-4065-8BF3-6A613116E2A1}" type="slidenum">
+              <a:rPr lang="ko-KR" altLang="en-US" smtClean="0"/>
+              <a:t>32</a:t>
+            </a:fld>
+            <a:endParaRPr lang="ko-KR" altLang="en-US"/>
+          </a:p>
+        </p:txBody>
+      </p:sp>
+      <p:sp>
+        <p:nvSpPr>
+          <p:cNvPr id="3" name="TextBox 2">
+            <a:extLst>
+              <a:ext uri="{FF2B5EF4-FFF2-40B4-BE49-F238E27FC236}">
+                <a16:creationId xmlns:a16="http://schemas.microsoft.com/office/drawing/2014/main" id="{1E9FC4E3-47A9-296B-4B15-F3F3798E39D7}"/>
+              </a:ext>
+            </a:extLst>
+          </p:cNvPr>
+          <p:cNvSpPr txBox="1"/>
+          <p:nvPr/>
+        </p:nvSpPr>
+        <p:spPr>
+          <a:xfrm>
+            <a:off x="288790" y="958844"/>
+            <a:ext cx="11250267" cy="4476675"/>
+          </a:xfrm>
+          <a:prstGeom prst="rect">
+            <a:avLst/>
+          </a:prstGeom>
+          <a:noFill/>
+        </p:spPr>
+        <p:txBody>
+          <a:bodyPr wrap="square" rtlCol="0" anchor="t">
+            <a:spAutoFit/>
+          </a:bodyPr>
+          <a:lstStyle/>
+          <a:p>
+            <a:pPr marL="434975" indent="-342900">
+              <a:lnSpc>
+                <a:spcPct val="150000"/>
+              </a:lnSpc>
+              <a:buFont typeface="+mj-lt"/>
+              <a:buAutoNum type="arabicPeriod" startAt="2"/>
+            </a:pPr>
+            <a:r>
+              <a:rPr lang="ko-KR" altLang="en-US" sz="1600" b="1" spc="-50" dirty="0"/>
+              <a:t>효율성에 대한 부정적 영향</a:t>
+            </a:r>
+            <a:r>
+              <a:rPr lang="en-US" altLang="ko-KR" sz="1600" spc="-50" dirty="0"/>
+              <a:t>: </a:t>
+            </a:r>
+            <a:r>
+              <a:rPr lang="ko-KR" altLang="en-US" sz="1600" spc="-50" dirty="0"/>
+              <a:t>재분배정책이 효율적 자원배분을 저해하는 결과를 가져올 것이라는 점을 들어 반대한다</a:t>
+            </a:r>
+            <a:r>
+              <a:rPr lang="en-US" altLang="ko-KR" sz="1600" spc="-50" dirty="0"/>
+              <a:t>.</a:t>
+            </a:r>
+          </a:p>
+          <a:p>
+            <a:pPr marL="835025" lvl="1" indent="-285750">
+              <a:lnSpc>
+                <a:spcPct val="150000"/>
+              </a:lnSpc>
+              <a:buFont typeface="Wingdings" panose="05000000000000000000" pitchFamily="2" charset="2"/>
+              <a:buChar char="ü"/>
+            </a:pPr>
+            <a:r>
+              <a:rPr lang="ko-KR" altLang="en-US" sz="1600" spc="-50" dirty="0"/>
+              <a:t>예컨대</a:t>
+            </a:r>
+            <a:r>
+              <a:rPr lang="en-US" altLang="ko-KR" sz="1600" spc="-50" dirty="0"/>
+              <a:t>, </a:t>
+            </a:r>
+            <a:r>
+              <a:rPr lang="ko-KR" altLang="en-US" sz="1600" spc="-50" dirty="0"/>
+              <a:t>재분배효과를 크게 하기 위해 급격한 누진적 조세제도를 도입하면 사람들은 더 많이 일하는 동기가 감소할 것이다</a:t>
+            </a:r>
+            <a:r>
+              <a:rPr lang="en-US" altLang="ko-KR" sz="1600" spc="-50" dirty="0"/>
+              <a:t>.</a:t>
+            </a:r>
+          </a:p>
+          <a:p>
+            <a:pPr marL="835025" lvl="1" indent="-285750">
+              <a:lnSpc>
+                <a:spcPct val="150000"/>
+              </a:lnSpc>
+              <a:buFont typeface="Wingdings" panose="05000000000000000000" pitchFamily="2" charset="2"/>
+              <a:buChar char="ü"/>
+            </a:pPr>
+            <a:r>
+              <a:rPr lang="ko-KR" altLang="en-US" sz="1600" spc="-50" dirty="0"/>
+              <a:t>또</a:t>
+            </a:r>
+            <a:r>
+              <a:rPr lang="en-US" altLang="ko-KR" sz="1600" spc="-50" dirty="0"/>
+              <a:t>, </a:t>
+            </a:r>
+            <a:r>
+              <a:rPr lang="ko-KR" altLang="en-US" sz="1600" spc="-50" dirty="0"/>
+              <a:t>빈곤층에 대한 소득보조 프로그램은 가난한 사람들의 근로 의욕을 감소시킬 수도 있다</a:t>
+            </a:r>
+            <a:r>
+              <a:rPr lang="en-US" altLang="ko-KR" sz="1600" spc="-50" dirty="0"/>
+              <a:t>.</a:t>
+            </a:r>
+          </a:p>
+          <a:p>
+            <a:pPr marL="377825" indent="-285750">
+              <a:lnSpc>
+                <a:spcPct val="150000"/>
+              </a:lnSpc>
+              <a:buFont typeface="Arial" panose="020B0604020202020204" pitchFamily="34" charset="0"/>
+              <a:buChar char="•"/>
+            </a:pPr>
+            <a:r>
+              <a:rPr lang="ko-KR" altLang="en-US" sz="1600" spc="-50" dirty="0"/>
+              <a:t>그러나 </a:t>
+            </a:r>
+            <a:r>
+              <a:rPr lang="ko-KR" altLang="en-US" sz="1600" spc="-50" dirty="0" err="1"/>
+              <a:t>아직까지는</a:t>
+            </a:r>
+            <a:r>
+              <a:rPr lang="ko-KR" altLang="en-US" sz="1600" spc="-50" dirty="0"/>
+              <a:t> 재분배정책이 효율성 감소에 어느정도 영향을 미치는지 정확히 알고 있지 못하다</a:t>
+            </a:r>
+            <a:r>
+              <a:rPr lang="en-US" altLang="ko-KR" sz="1600" spc="-50" dirty="0"/>
+              <a:t>.</a:t>
+            </a:r>
+          </a:p>
+          <a:p>
+            <a:pPr marL="377825" indent="-285750">
+              <a:lnSpc>
+                <a:spcPct val="150000"/>
+              </a:lnSpc>
+              <a:buFont typeface="Arial" panose="020B0604020202020204" pitchFamily="34" charset="0"/>
+              <a:buChar char="•"/>
+            </a:pPr>
+            <a:endParaRPr lang="en-US" altLang="ko-KR" sz="1600" spc="-50" dirty="0"/>
+          </a:p>
+          <a:p>
+            <a:pPr marL="434975" indent="-342900">
+              <a:lnSpc>
+                <a:spcPct val="150000"/>
+              </a:lnSpc>
+              <a:buFont typeface="+mj-lt"/>
+              <a:buAutoNum type="arabicPeriod" startAt="3"/>
+            </a:pPr>
+            <a:r>
+              <a:rPr lang="ko-KR" altLang="en-US" sz="1600" b="1" spc="-50" dirty="0"/>
+              <a:t>정치적 현실의 관점</a:t>
+            </a:r>
+            <a:r>
+              <a:rPr lang="en-US" altLang="ko-KR" sz="1600" b="1" spc="-50" dirty="0"/>
+              <a:t>:</a:t>
+            </a:r>
+            <a:r>
+              <a:rPr lang="en-US" altLang="ko-KR" sz="1600" spc="-50" dirty="0"/>
+              <a:t> </a:t>
+            </a:r>
+            <a:r>
+              <a:rPr lang="ko-KR" altLang="en-US" sz="1600" spc="-50" dirty="0"/>
+              <a:t>정치기구가 과연 재분배작업을 성공적으로 해낼 수 있는지 의문을 가지고 반대한다</a:t>
+            </a:r>
+            <a:r>
+              <a:rPr lang="en-US" altLang="ko-KR" sz="1600" spc="-50" dirty="0"/>
+              <a:t>.</a:t>
+            </a:r>
+          </a:p>
+          <a:p>
+            <a:pPr marL="892175" lvl="1" indent="-342900">
+              <a:lnSpc>
+                <a:spcPct val="150000"/>
+              </a:lnSpc>
+              <a:buFont typeface="Wingdings" panose="05000000000000000000" pitchFamily="2" charset="2"/>
+              <a:buChar char="ü"/>
+            </a:pPr>
+            <a:r>
+              <a:rPr lang="ko-KR" altLang="en-US" sz="1600" spc="-50" dirty="0"/>
+              <a:t>재분배작업을 </a:t>
+            </a:r>
+            <a:r>
+              <a:rPr lang="ko-KR" altLang="en-US" sz="1600" spc="-50" dirty="0" err="1"/>
+              <a:t>담당해야하는</a:t>
+            </a:r>
+            <a:r>
+              <a:rPr lang="ko-KR" altLang="en-US" sz="1600" spc="-50" dirty="0"/>
+              <a:t> 정치기구 역시 여러 집단의 이익이 복잡하게 </a:t>
+            </a:r>
+            <a:r>
+              <a:rPr lang="ko-KR" altLang="en-US" sz="1600" spc="-50" dirty="0" err="1"/>
+              <a:t>얽혀있기</a:t>
+            </a:r>
+            <a:r>
+              <a:rPr lang="ko-KR" altLang="en-US" sz="1600" spc="-50" dirty="0"/>
+              <a:t> 때문에</a:t>
+            </a:r>
+            <a:r>
+              <a:rPr lang="en-US" altLang="ko-KR" sz="1600" spc="-50" dirty="0"/>
+              <a:t>, </a:t>
+            </a:r>
+            <a:r>
+              <a:rPr lang="ko-KR" altLang="en-US" sz="1600" spc="-50" dirty="0"/>
+              <a:t>공평한 재분배를 수행하기 힘든 것이 사실이다</a:t>
+            </a:r>
+            <a:r>
+              <a:rPr lang="en-US" altLang="ko-KR" sz="1600" spc="-50" dirty="0"/>
+              <a:t>.</a:t>
+            </a:r>
+          </a:p>
+          <a:p>
+            <a:pPr marL="434975" indent="-342900">
+              <a:lnSpc>
+                <a:spcPct val="150000"/>
+              </a:lnSpc>
+              <a:buFont typeface="Arial" panose="020B0604020202020204" pitchFamily="34" charset="0"/>
+              <a:buChar char="•"/>
+            </a:pPr>
+            <a:r>
+              <a:rPr lang="ko-KR" altLang="en-US" sz="1600" spc="-50" dirty="0"/>
+              <a:t>또 한가지 반대 논리는 재분배정책이 </a:t>
+            </a:r>
+            <a:r>
+              <a:rPr lang="ko-KR" altLang="en-US" sz="1600" spc="-50" dirty="0" err="1"/>
+              <a:t>계층간의</a:t>
+            </a:r>
+            <a:r>
+              <a:rPr lang="ko-KR" altLang="en-US" sz="1600" spc="-50" dirty="0"/>
+              <a:t> 갈등을 조장함으로써 정치과정에 심각한 긴장을 일으킨다는 것이다</a:t>
+            </a:r>
+            <a:r>
+              <a:rPr lang="en-US" altLang="ko-KR" sz="1600" spc="-50" dirty="0"/>
+              <a:t>.</a:t>
+            </a:r>
+          </a:p>
+          <a:p>
+            <a:pPr marL="892175" lvl="1" indent="-342900">
+              <a:lnSpc>
+                <a:spcPct val="150000"/>
+              </a:lnSpc>
+              <a:buFont typeface="Wingdings" panose="05000000000000000000" pitchFamily="2" charset="2"/>
+              <a:buChar char="ü"/>
+            </a:pPr>
+            <a:r>
+              <a:rPr lang="ko-KR" altLang="en-US" sz="1600" spc="-50" dirty="0"/>
+              <a:t>재분배라는 것이 어떤 사람으로부터 경제적 자원을 거두어 다른 사람에게 넘겨주는 것이기 때문에 이러한 주장에 일리가 있긴 하지만</a:t>
+            </a:r>
+            <a:r>
+              <a:rPr lang="en-US" altLang="ko-KR" sz="1600" spc="-50" dirty="0"/>
+              <a:t>, </a:t>
+            </a:r>
+            <a:r>
+              <a:rPr lang="ko-KR" altLang="en-US" sz="1600" spc="-50" dirty="0"/>
+              <a:t>재분배가 이루어지지 않을 때 </a:t>
+            </a:r>
+            <a:r>
+              <a:rPr lang="ko-KR" altLang="en-US" sz="1600" spc="-50" dirty="0" err="1"/>
+              <a:t>계층간의</a:t>
+            </a:r>
+            <a:r>
+              <a:rPr lang="ko-KR" altLang="en-US" sz="1600" spc="-50" dirty="0"/>
+              <a:t> 긴장과 갈등이 더 심해질 수도 있는 것이 사실이다</a:t>
+            </a:r>
+            <a:r>
+              <a:rPr lang="en-US" altLang="ko-KR" sz="1600" spc="-50" dirty="0"/>
+              <a:t>.</a:t>
+            </a:r>
+          </a:p>
+        </p:txBody>
+      </p:sp>
+    </p:spTree>
+    <p:extLst>
+      <p:ext uri="{BB962C8B-B14F-4D97-AF65-F5344CB8AC3E}">
+        <p14:creationId xmlns:p14="http://schemas.microsoft.com/office/powerpoint/2010/main" val="1620952806"/>
+      </p:ext>
+    </p:extLst>
+  </p:cSld>
+  <p:clrMapOvr>
+    <a:masterClrMapping/>
+  </p:clrMapOvr>
+</p:sld>
+</file>
+
+<file path=ppt/slides/slide33.xml><?xml version="1.0" encoding="utf-8"?>
+<p:sld xmlns:a="http://schemas.openxmlformats.org/drawingml/2006/main" xmlns:r="http://schemas.openxmlformats.org/officeDocument/2006/relationships" xmlns:p="http://schemas.openxmlformats.org/presentationml/2006/main">
+  <p:cSld>
+    <p:spTree>
+      <p:nvGrpSpPr>
+        <p:cNvPr id="1" name="">
+          <a:extLst>
+            <a:ext uri="{FF2B5EF4-FFF2-40B4-BE49-F238E27FC236}">
+              <a16:creationId xmlns:a16="http://schemas.microsoft.com/office/drawing/2014/main" id="{BA30D0EF-168D-4D0B-382A-14535921A395}"/>
+            </a:ext>
+          </a:extLst>
+        </p:cNvPr>
+        <p:cNvGrpSpPr/>
+        <p:nvPr/>
+      </p:nvGrpSpPr>
+      <p:grpSpPr>
+        <a:xfrm>
+          <a:off x="0" y="0"/>
+          <a:ext cx="0" cy="0"/>
+          <a:chOff x="0" y="0"/>
+          <a:chExt cx="0" cy="0"/>
+        </a:xfrm>
+      </p:grpSpPr>
+      <p:sp>
+        <p:nvSpPr>
+          <p:cNvPr id="2" name="제목 1">
+            <a:extLst>
+              <a:ext uri="{FF2B5EF4-FFF2-40B4-BE49-F238E27FC236}">
+                <a16:creationId xmlns:a16="http://schemas.microsoft.com/office/drawing/2014/main" id="{81A04DD1-B821-23EA-0CFC-B188679FBE93}"/>
+              </a:ext>
+            </a:extLst>
+          </p:cNvPr>
+          <p:cNvSpPr>
+            <a:spLocks noGrp="1"/>
+          </p:cNvSpPr>
+          <p:nvPr>
+            <p:ph type="title"/>
+          </p:nvPr>
+        </p:nvSpPr>
+        <p:spPr/>
+        <p:txBody>
+          <a:bodyPr/>
+          <a:lstStyle/>
+          <a:p>
+            <a:r>
+              <a:rPr lang="ko-KR" altLang="en-US" dirty="0"/>
+              <a:t>재분배정책에 대한 찬반의견</a:t>
+            </a:r>
+          </a:p>
+        </p:txBody>
+      </p:sp>
+      <p:sp>
+        <p:nvSpPr>
+          <p:cNvPr id="4" name="슬라이드 번호 개체 틀 3">
+            <a:extLst>
+              <a:ext uri="{FF2B5EF4-FFF2-40B4-BE49-F238E27FC236}">
+                <a16:creationId xmlns:a16="http://schemas.microsoft.com/office/drawing/2014/main" id="{1B8262B7-878F-30FB-81A2-6AAD48AC247A}"/>
+              </a:ext>
+            </a:extLst>
+          </p:cNvPr>
+          <p:cNvSpPr>
+            <a:spLocks noGrp="1"/>
+          </p:cNvSpPr>
+          <p:nvPr>
+            <p:ph type="sldNum" sz="quarter" idx="12"/>
+          </p:nvPr>
+        </p:nvSpPr>
+        <p:spPr/>
+        <p:txBody>
+          <a:bodyPr/>
+          <a:lstStyle/>
+          <a:p>
+            <a:fld id="{109C872D-39A9-4065-8BF3-6A613116E2A1}" type="slidenum">
+              <a:rPr lang="ko-KR" altLang="en-US" smtClean="0"/>
+              <a:t>33</a:t>
+            </a:fld>
+            <a:endParaRPr lang="ko-KR" altLang="en-US"/>
+          </a:p>
+        </p:txBody>
+      </p:sp>
+      <p:sp>
+        <p:nvSpPr>
+          <p:cNvPr id="3" name="TextBox 2">
+            <a:extLst>
+              <a:ext uri="{FF2B5EF4-FFF2-40B4-BE49-F238E27FC236}">
+                <a16:creationId xmlns:a16="http://schemas.microsoft.com/office/drawing/2014/main" id="{D40ABBB2-5E06-7126-F790-E2C507B57338}"/>
+              </a:ext>
+            </a:extLst>
+          </p:cNvPr>
+          <p:cNvSpPr txBox="1"/>
+          <p:nvPr/>
+        </p:nvSpPr>
+        <p:spPr>
+          <a:xfrm>
+            <a:off x="288790" y="958844"/>
+            <a:ext cx="11250267" cy="5261505"/>
+          </a:xfrm>
+          <a:prstGeom prst="rect">
+            <a:avLst/>
+          </a:prstGeom>
+          <a:noFill/>
+        </p:spPr>
+        <p:txBody>
+          <a:bodyPr wrap="square" rtlCol="0" anchor="t">
+            <a:spAutoFit/>
+          </a:bodyPr>
+          <a:lstStyle/>
+          <a:p>
+            <a:pPr>
+              <a:lnSpc>
+                <a:spcPct val="150000"/>
+              </a:lnSpc>
+            </a:pPr>
+            <a:r>
+              <a:rPr lang="ko-KR" altLang="en-US" u="sng" dirty="0">
+                <a:ln w="3175">
+                  <a:noFill/>
+                </a:ln>
+                <a:latin typeface="HY헤드라인M" panose="02030600000101010101" pitchFamily="18" charset="-127"/>
+                <a:ea typeface="HY헤드라인M" panose="02030600000101010101" pitchFamily="18" charset="-127"/>
+              </a:rPr>
+              <a:t>찬성의 논리</a:t>
+            </a:r>
+            <a:endParaRPr lang="en-US" altLang="ko-KR" sz="400" u="sng" dirty="0">
+              <a:ln w="3175">
+                <a:noFill/>
+              </a:ln>
+              <a:latin typeface="HY헤드라인M" panose="02030600000101010101" pitchFamily="18" charset="-127"/>
+              <a:ea typeface="HY헤드라인M" panose="02030600000101010101" pitchFamily="18" charset="-127"/>
+            </a:endParaRPr>
+          </a:p>
+          <a:p>
+            <a:pPr marL="434975" indent="-342900">
+              <a:lnSpc>
+                <a:spcPct val="150000"/>
+              </a:lnSpc>
+              <a:buFont typeface="+mj-lt"/>
+              <a:buAutoNum type="arabicPeriod"/>
+            </a:pPr>
+            <a:r>
+              <a:rPr lang="ko-KR" altLang="en-US" sz="1600" b="1" spc="-50" dirty="0"/>
+              <a:t>윤리적 관점</a:t>
+            </a:r>
+            <a:r>
+              <a:rPr lang="en-US" altLang="ko-KR" sz="1600" spc="-50" dirty="0"/>
+              <a:t>: </a:t>
+            </a:r>
+            <a:r>
+              <a:rPr lang="ko-KR" altLang="en-US" sz="1600" spc="-50" dirty="0"/>
+              <a:t>평등주의자들은 분배상태가 평등하지 못하면 이를 시정하려는 노력이 따라야 한다고 주장한다</a:t>
+            </a:r>
+            <a:r>
+              <a:rPr lang="en-US" altLang="ko-KR" sz="1600" spc="-50" dirty="0"/>
+              <a:t>.</a:t>
+            </a:r>
+          </a:p>
+          <a:p>
+            <a:pPr marL="835025" lvl="1" indent="-285750">
+              <a:lnSpc>
+                <a:spcPct val="150000"/>
+              </a:lnSpc>
+              <a:buFont typeface="Wingdings" panose="05000000000000000000" pitchFamily="2" charset="2"/>
+              <a:buChar char="ü"/>
+            </a:pPr>
+            <a:r>
+              <a:rPr lang="ko-KR" altLang="en-US" sz="1600" spc="-50" dirty="0"/>
+              <a:t>평등주의 뿐 아니라 공리주의자도 재분배를 위한 개입을 지지한다</a:t>
+            </a:r>
+            <a:r>
+              <a:rPr lang="en-US" altLang="ko-KR" sz="1600" spc="-50" dirty="0"/>
+              <a:t>.</a:t>
+            </a:r>
+          </a:p>
+          <a:p>
+            <a:pPr marL="1292225" lvl="2" indent="-285750">
+              <a:lnSpc>
+                <a:spcPct val="150000"/>
+              </a:lnSpc>
+              <a:buFont typeface="Wingdings" panose="05000000000000000000" pitchFamily="2" charset="2"/>
+              <a:buChar char="Ø"/>
+            </a:pPr>
+            <a:r>
+              <a:rPr lang="ko-KR" altLang="en-US" sz="1600" spc="-50" dirty="0"/>
+              <a:t>다만 공리의 원칙은 단순히 사회적 후생의 총합이 극대화되는 분배상태를 요구할 뿐이지만</a:t>
+            </a:r>
+            <a:r>
+              <a:rPr lang="en-US" altLang="ko-KR" sz="1600" spc="-50" dirty="0"/>
+              <a:t>, </a:t>
+            </a:r>
+            <a:r>
+              <a:rPr lang="ko-KR" altLang="en-US" sz="1600" spc="-50" dirty="0"/>
+              <a:t>공리주의자들이 일반적으로 설정하는 상황에서는 재분배를 통한 평등화가 사회 전체의 후생을 증진시키기 때문이다</a:t>
+            </a:r>
+            <a:r>
+              <a:rPr lang="en-US" altLang="ko-KR" sz="1600" spc="-50" dirty="0"/>
+              <a:t>.</a:t>
+            </a:r>
+          </a:p>
+          <a:p>
+            <a:pPr marL="1292225" lvl="2" indent="-285750">
+              <a:lnSpc>
+                <a:spcPct val="150000"/>
+              </a:lnSpc>
+              <a:buFont typeface="Wingdings" panose="05000000000000000000" pitchFamily="2" charset="2"/>
+              <a:buChar char="Ø"/>
+            </a:pPr>
+            <a:endParaRPr lang="en-US" altLang="ko-KR" sz="1600" spc="-50" dirty="0"/>
+          </a:p>
+          <a:p>
+            <a:pPr marL="434975" indent="-342900">
+              <a:lnSpc>
+                <a:spcPct val="150000"/>
+              </a:lnSpc>
+              <a:buFont typeface="+mj-lt"/>
+              <a:buAutoNum type="arabicPeriod"/>
+            </a:pPr>
+            <a:r>
+              <a:rPr lang="ko-KR" altLang="en-US" sz="1600" b="1" spc="-50" dirty="0" err="1"/>
+              <a:t>공공재로서의</a:t>
+            </a:r>
+            <a:r>
+              <a:rPr lang="ko-KR" altLang="en-US" sz="1600" b="1" spc="-50" dirty="0"/>
+              <a:t> 공평한분배</a:t>
+            </a:r>
+            <a:r>
+              <a:rPr lang="en-US" altLang="ko-KR" sz="1600" spc="-50" dirty="0"/>
+              <a:t>: </a:t>
+            </a:r>
+            <a:r>
+              <a:rPr lang="ko-KR" altLang="en-US" sz="1600" spc="-50" dirty="0"/>
+              <a:t>재분배가 </a:t>
+            </a:r>
+            <a:r>
+              <a:rPr lang="ko-KR" altLang="en-US" sz="1600" spc="-50" dirty="0" err="1"/>
+              <a:t>가져다주는</a:t>
+            </a:r>
+            <a:r>
+              <a:rPr lang="ko-KR" altLang="en-US" sz="1600" spc="-50" dirty="0"/>
+              <a:t> 사회적 이득</a:t>
+            </a:r>
+            <a:r>
+              <a:rPr lang="en-US" altLang="ko-KR" sz="1600" spc="-50" dirty="0"/>
+              <a:t>(</a:t>
+            </a:r>
+            <a:r>
+              <a:rPr lang="ko-KR" altLang="en-US" sz="1600" spc="-50" dirty="0"/>
+              <a:t>범죄 감소</a:t>
+            </a:r>
+            <a:r>
+              <a:rPr lang="en-US" altLang="ko-KR" sz="1600" spc="-50" dirty="0"/>
+              <a:t>, </a:t>
+            </a:r>
+            <a:r>
+              <a:rPr lang="ko-KR" altLang="en-US" sz="1600" spc="-50" dirty="0"/>
+              <a:t>사회적 안정성 증대</a:t>
+            </a:r>
+            <a:r>
+              <a:rPr lang="en-US" altLang="ko-KR" sz="1600" spc="-50" dirty="0"/>
+              <a:t>)</a:t>
+            </a:r>
+            <a:r>
+              <a:rPr lang="ko-KR" altLang="en-US" sz="1600" spc="-50" dirty="0"/>
+              <a:t>이 마치 공공재와 같은 성격을 갖는다고 주장한다</a:t>
+            </a:r>
+            <a:r>
+              <a:rPr lang="en-US" altLang="ko-KR" sz="1600" spc="-50" dirty="0"/>
+              <a:t>.</a:t>
+            </a:r>
+          </a:p>
+          <a:p>
+            <a:pPr marL="835025" lvl="1" indent="-285750">
+              <a:lnSpc>
+                <a:spcPct val="150000"/>
+              </a:lnSpc>
+              <a:buFont typeface="Wingdings" panose="05000000000000000000" pitchFamily="2" charset="2"/>
+              <a:buChar char="ü"/>
+            </a:pPr>
+            <a:r>
+              <a:rPr lang="ko-KR" altLang="en-US" sz="1600" spc="-50" dirty="0"/>
+              <a:t>그 혜택을 누구나 누릴 수 있어 </a:t>
+            </a:r>
+            <a:r>
+              <a:rPr lang="ko-KR" altLang="en-US" sz="1600" spc="-50" dirty="0" err="1"/>
+              <a:t>배제불가능하며</a:t>
+            </a:r>
+            <a:r>
+              <a:rPr lang="en-US" altLang="ko-KR" sz="1600" spc="-50" dirty="0"/>
+              <a:t>, </a:t>
+            </a:r>
+            <a:r>
+              <a:rPr lang="ko-KR" altLang="en-US" sz="1600" spc="-50" dirty="0"/>
+              <a:t>또 누군가 혜택을 누린다고 해서 다른 사람이 얻는 혜택이 줄어들지 않는다는 점에서 비경합성도 갖고 있다고 주장한다</a:t>
+            </a:r>
+            <a:r>
+              <a:rPr lang="en-US" altLang="ko-KR" sz="1600" spc="-50" dirty="0"/>
+              <a:t>.</a:t>
+            </a:r>
+          </a:p>
+          <a:p>
+            <a:pPr marL="835025" lvl="1" indent="-285750">
+              <a:lnSpc>
+                <a:spcPct val="150000"/>
+              </a:lnSpc>
+              <a:buFont typeface="Wingdings" panose="05000000000000000000" pitchFamily="2" charset="2"/>
+              <a:buChar char="ü"/>
+            </a:pPr>
+            <a:r>
+              <a:rPr lang="ko-KR" altLang="en-US" sz="1600" spc="-50" dirty="0"/>
+              <a:t>재분배로부터의 사회적 이득이 공공재 성격을 갖는다면</a:t>
+            </a:r>
+            <a:r>
+              <a:rPr lang="en-US" altLang="ko-KR" sz="1600" spc="-50" dirty="0"/>
+              <a:t>, </a:t>
+            </a:r>
+            <a:r>
+              <a:rPr lang="ko-KR" altLang="en-US" sz="1600" spc="-50" dirty="0"/>
+              <a:t>정부가 재분배를 위해 개입해야 할 필요가 생긴다</a:t>
+            </a:r>
+            <a:r>
+              <a:rPr lang="en-US" altLang="ko-KR" sz="1600" spc="-50" dirty="0"/>
+              <a:t>.</a:t>
+            </a:r>
+          </a:p>
+          <a:p>
+            <a:pPr marL="1292225" lvl="2" indent="-285750">
+              <a:lnSpc>
+                <a:spcPct val="150000"/>
+              </a:lnSpc>
+              <a:buFont typeface="Wingdings" panose="05000000000000000000" pitchFamily="2" charset="2"/>
+              <a:buChar char="Ø"/>
+            </a:pPr>
+            <a:r>
+              <a:rPr lang="en-US" altLang="ko-KR" sz="1600" spc="-50" dirty="0"/>
+              <a:t>4</a:t>
+            </a:r>
+            <a:r>
+              <a:rPr lang="ko-KR" altLang="en-US" sz="1600" spc="-50" dirty="0"/>
+              <a:t>장 </a:t>
+            </a:r>
+            <a:r>
+              <a:rPr lang="en-US" altLang="ko-KR" sz="1600" spc="-50" dirty="0"/>
+              <a:t>(</a:t>
+            </a:r>
+            <a:r>
+              <a:rPr lang="ko-KR" altLang="en-US" sz="1600" spc="-50" dirty="0"/>
+              <a:t>공공재</a:t>
+            </a:r>
+            <a:r>
+              <a:rPr lang="en-US" altLang="ko-KR" sz="1600" spc="-50" dirty="0"/>
+              <a:t>)</a:t>
+            </a:r>
+            <a:r>
+              <a:rPr lang="ko-KR" altLang="en-US" sz="1600" spc="-50" dirty="0"/>
+              <a:t>에서 배웠듯이 공공재의 경우 무임승차 문제가 발생할 수 있기 때문이다</a:t>
+            </a:r>
+            <a:r>
+              <a:rPr lang="en-US" altLang="ko-KR" sz="1600" spc="-50" dirty="0"/>
+              <a:t>.</a:t>
+            </a:r>
+          </a:p>
+          <a:p>
+            <a:pPr marL="1292225" lvl="2" indent="-285750">
+              <a:lnSpc>
+                <a:spcPct val="150000"/>
+              </a:lnSpc>
+              <a:buFont typeface="Wingdings" panose="05000000000000000000" pitchFamily="2" charset="2"/>
+              <a:buChar char="Ø"/>
+            </a:pPr>
+            <a:r>
+              <a:rPr lang="ko-KR" altLang="en-US" sz="1600" spc="-50" dirty="0"/>
+              <a:t>부유한 사람들이 빈곤한 사람에게 소득을 나누어 주지 않고</a:t>
+            </a:r>
+            <a:r>
+              <a:rPr lang="en-US" altLang="ko-KR" sz="1600" spc="-50" dirty="0"/>
+              <a:t>, </a:t>
+            </a:r>
+            <a:r>
+              <a:rPr lang="ko-KR" altLang="en-US" sz="1600" spc="-50" dirty="0"/>
+              <a:t>다른 부유한 사람들에게 그 일을 떠맡기는 것이다</a:t>
+            </a:r>
+            <a:r>
+              <a:rPr lang="en-US" altLang="ko-KR" sz="1600" spc="-50" dirty="0"/>
+              <a:t>.</a:t>
+            </a:r>
+          </a:p>
+          <a:p>
+            <a:pPr marL="835025" lvl="1" indent="-285750">
+              <a:lnSpc>
+                <a:spcPct val="150000"/>
+              </a:lnSpc>
+              <a:buFont typeface="Wingdings" panose="05000000000000000000" pitchFamily="2" charset="2"/>
+              <a:buChar char="ü"/>
+            </a:pPr>
+            <a:endParaRPr lang="en-US" altLang="ko-KR" sz="1600" spc="-50" dirty="0"/>
+          </a:p>
+        </p:txBody>
+      </p:sp>
+    </p:spTree>
+    <p:extLst>
+      <p:ext uri="{BB962C8B-B14F-4D97-AF65-F5344CB8AC3E}">
+        <p14:creationId xmlns:p14="http://schemas.microsoft.com/office/powerpoint/2010/main" val="1769245089"/>
+      </p:ext>
+    </p:extLst>
+  </p:cSld>
+  <p:clrMapOvr>
+    <a:masterClrMapping/>
+  </p:clrMapOvr>
+</p:sld>
+</file>
+
+<file path=ppt/slides/slide34.xml><?xml version="1.0" encoding="utf-8"?>
+<p:sld xmlns:a="http://schemas.openxmlformats.org/drawingml/2006/main" xmlns:r="http://schemas.openxmlformats.org/officeDocument/2006/relationships" xmlns:p="http://schemas.openxmlformats.org/presentationml/2006/main">
+  <p:cSld>
+    <p:spTree>
+      <p:nvGrpSpPr>
+        <p:cNvPr id="1" name="">
+          <a:extLst>
+            <a:ext uri="{FF2B5EF4-FFF2-40B4-BE49-F238E27FC236}">
               <a16:creationId xmlns:a16="http://schemas.microsoft.com/office/drawing/2014/main" id="{075FB47C-3726-C9E0-C9E7-FFDDE3209977}"/>
             </a:ext>
           </a:extLst>
@@ -14461,7 +15825,7 @@
           <a:p>
             <a:fld id="{109C872D-39A9-4065-8BF3-6A613116E2A1}" type="slidenum">
               <a:rPr lang="ko-KR" altLang="en-US" smtClean="0"/>
-              <a:t>30</a:t>
+              <a:t>34</a:t>
             </a:fld>
             <a:endParaRPr lang="ko-KR" altLang="en-US"/>
           </a:p>
@@ -14649,7 +16013,7 @@
 </p:sld>
 </file>
 
-<file path=ppt/slides/slide31.xml><?xml version="1.0" encoding="utf-8"?>
+<file path=ppt/slides/slide35.xml><?xml version="1.0" encoding="utf-8"?>
 <p:sld xmlns:a="http://schemas.openxmlformats.org/drawingml/2006/main" xmlns:r="http://schemas.openxmlformats.org/officeDocument/2006/relationships" xmlns:p="http://schemas.openxmlformats.org/presentationml/2006/main">
   <p:cSld>
     <p:spTree>
@@ -14732,7 +16096,7 @@
           <a:p>
             <a:fld id="{109C872D-39A9-4065-8BF3-6A613116E2A1}" type="slidenum">
               <a:rPr lang="ko-KR" altLang="en-US" smtClean="0"/>
-              <a:t>31</a:t>
+              <a:t>35</a:t>
             </a:fld>
             <a:endParaRPr lang="ko-KR" altLang="en-US"/>
           </a:p>
@@ -14792,7 +16156,7 @@
 </p:sld>
 </file>
 
-<file path=ppt/slides/slide32.xml><?xml version="1.0" encoding="utf-8"?>
+<file path=ppt/slides/slide36.xml><?xml version="1.0" encoding="utf-8"?>
 <p:sld xmlns:a="http://schemas.openxmlformats.org/drawingml/2006/main" xmlns:r="http://schemas.openxmlformats.org/officeDocument/2006/relationships" xmlns:p="http://schemas.openxmlformats.org/presentationml/2006/main">
   <p:cSld>
     <p:spTree>
@@ -14866,7 +16230,7 @@
           <a:p>
             <a:fld id="{109C872D-39A9-4065-8BF3-6A613116E2A1}" type="slidenum">
               <a:rPr lang="ko-KR" altLang="en-US" smtClean="0"/>
-              <a:t>32</a:t>
+              <a:t>36</a:t>
             </a:fld>
             <a:endParaRPr lang="ko-KR" altLang="en-US"/>
           </a:p>
@@ -15179,7 +16543,7 @@
 </p:sld>
 </file>
 
-<file path=ppt/slides/slide33.xml><?xml version="1.0" encoding="utf-8"?>
+<file path=ppt/slides/slide37.xml><?xml version="1.0" encoding="utf-8"?>
 <p:sld xmlns:a="http://schemas.openxmlformats.org/drawingml/2006/main" xmlns:r="http://schemas.openxmlformats.org/officeDocument/2006/relationships" xmlns:p="http://schemas.openxmlformats.org/presentationml/2006/main">
   <p:cSld>
     <p:spTree>
@@ -15253,7 +16617,7 @@
           <a:p>
             <a:fld id="{109C872D-39A9-4065-8BF3-6A613116E2A1}" type="slidenum">
               <a:rPr lang="ko-KR" altLang="en-US" smtClean="0"/>
-              <a:t>33</a:t>
+              <a:t>37</a:t>
             </a:fld>
             <a:endParaRPr lang="ko-KR" altLang="en-US"/>
           </a:p>
@@ -15609,7 +16973,7 @@
 </p:sld>
 </file>
 
-<file path=ppt/slides/slide34.xml><?xml version="1.0" encoding="utf-8"?>
+<file path=ppt/slides/slide38.xml><?xml version="1.0" encoding="utf-8"?>
 <p:sld xmlns:a="http://schemas.openxmlformats.org/drawingml/2006/main" xmlns:r="http://schemas.openxmlformats.org/officeDocument/2006/relationships" xmlns:p="http://schemas.openxmlformats.org/presentationml/2006/main">
   <p:cSld>
     <p:spTree>
@@ -15683,7 +17047,7 @@
           <a:p>
             <a:fld id="{109C872D-39A9-4065-8BF3-6A613116E2A1}" type="slidenum">
               <a:rPr lang="ko-KR" altLang="en-US" smtClean="0"/>
-              <a:t>34</a:t>
+              <a:t>38</a:t>
             </a:fld>
             <a:endParaRPr lang="ko-KR" altLang="en-US"/>
           </a:p>
@@ -16049,7 +17413,7 @@
 </p:sld>
 </file>
 
-<file path=ppt/slides/slide35.xml><?xml version="1.0" encoding="utf-8"?>
+<file path=ppt/slides/slide39.xml><?xml version="1.0" encoding="utf-8"?>
 <p:sld xmlns:a="http://schemas.openxmlformats.org/drawingml/2006/main" xmlns:r="http://schemas.openxmlformats.org/officeDocument/2006/relationships" xmlns:p="http://schemas.openxmlformats.org/presentationml/2006/main">
   <p:cSld>
     <p:spTree>
@@ -16123,7 +17487,7 @@
           <a:p>
             <a:fld id="{109C872D-39A9-4065-8BF3-6A613116E2A1}" type="slidenum">
               <a:rPr lang="ko-KR" altLang="en-US" smtClean="0"/>
-              <a:t>35</a:t>
+              <a:t>39</a:t>
             </a:fld>
             <a:endParaRPr lang="ko-KR" altLang="en-US"/>
           </a:p>
@@ -16495,7 +17859,447 @@
 </p:sld>
 </file>
 
-<file path=ppt/slides/slide36.xml><?xml version="1.0" encoding="utf-8"?>
+<file path=ppt/slides/slide4.xml><?xml version="1.0" encoding="utf-8"?>
+<p:sld xmlns:a="http://schemas.openxmlformats.org/drawingml/2006/main" xmlns:r="http://schemas.openxmlformats.org/officeDocument/2006/relationships" xmlns:p="http://schemas.openxmlformats.org/presentationml/2006/main">
+  <p:cSld>
+    <p:spTree>
+      <p:nvGrpSpPr>
+        <p:cNvPr id="1" name="">
+          <a:extLst>
+            <a:ext uri="{FF2B5EF4-FFF2-40B4-BE49-F238E27FC236}">
+              <a16:creationId xmlns:a16="http://schemas.microsoft.com/office/drawing/2014/main" id="{7E764ACB-B8A0-8B8E-50AE-F6949A866C73}"/>
+            </a:ext>
+          </a:extLst>
+        </p:cNvPr>
+        <p:cNvGrpSpPr/>
+        <p:nvPr/>
+      </p:nvGrpSpPr>
+      <p:grpSpPr>
+        <a:xfrm>
+          <a:off x="0" y="0"/>
+          <a:ext cx="0" cy="0"/>
+          <a:chOff x="0" y="0"/>
+          <a:chExt cx="0" cy="0"/>
+        </a:xfrm>
+      </p:grpSpPr>
+      <p:sp>
+        <p:nvSpPr>
+          <p:cNvPr id="2" name="제목 1">
+            <a:extLst>
+              <a:ext uri="{FF2B5EF4-FFF2-40B4-BE49-F238E27FC236}">
+                <a16:creationId xmlns:a16="http://schemas.microsoft.com/office/drawing/2014/main" id="{3B730496-A872-5CFB-3130-C4429F8285BC}"/>
+              </a:ext>
+            </a:extLst>
+          </p:cNvPr>
+          <p:cNvSpPr>
+            <a:spLocks noGrp="1"/>
+          </p:cNvSpPr>
+          <p:nvPr>
+            <p:ph type="title"/>
+          </p:nvPr>
+        </p:nvSpPr>
+        <p:spPr/>
+        <p:txBody>
+          <a:bodyPr/>
+          <a:lstStyle/>
+          <a:p>
+            <a:r>
+              <a:rPr lang="ko-KR" altLang="en-US" dirty="0"/>
+              <a:t>사회보험제도의 의미</a:t>
+            </a:r>
+          </a:p>
+        </p:txBody>
+      </p:sp>
+      <p:sp>
+        <p:nvSpPr>
+          <p:cNvPr id="4" name="슬라이드 번호 개체 틀 3">
+            <a:extLst>
+              <a:ext uri="{FF2B5EF4-FFF2-40B4-BE49-F238E27FC236}">
+                <a16:creationId xmlns:a16="http://schemas.microsoft.com/office/drawing/2014/main" id="{CBD72302-C21E-82F3-1317-6A67EB8523B7}"/>
+              </a:ext>
+            </a:extLst>
+          </p:cNvPr>
+          <p:cNvSpPr>
+            <a:spLocks noGrp="1"/>
+          </p:cNvSpPr>
+          <p:nvPr>
+            <p:ph type="sldNum" sz="quarter" idx="12"/>
+          </p:nvPr>
+        </p:nvSpPr>
+        <p:spPr/>
+        <p:txBody>
+          <a:bodyPr/>
+          <a:lstStyle/>
+          <a:p>
+            <a:fld id="{109C872D-39A9-4065-8BF3-6A613116E2A1}" type="slidenum">
+              <a:rPr lang="ko-KR" altLang="en-US" smtClean="0"/>
+              <a:t>4</a:t>
+            </a:fld>
+            <a:endParaRPr lang="ko-KR" altLang="en-US"/>
+          </a:p>
+        </p:txBody>
+      </p:sp>
+      <p:sp>
+        <p:nvSpPr>
+          <p:cNvPr id="3" name="TextBox 2">
+            <a:extLst>
+              <a:ext uri="{FF2B5EF4-FFF2-40B4-BE49-F238E27FC236}">
+                <a16:creationId xmlns:a16="http://schemas.microsoft.com/office/drawing/2014/main" id="{7331E4DF-D5A4-61E7-1307-371A5A496859}"/>
+              </a:ext>
+            </a:extLst>
+          </p:cNvPr>
+          <p:cNvSpPr txBox="1"/>
+          <p:nvPr/>
+        </p:nvSpPr>
+        <p:spPr>
+          <a:xfrm>
+            <a:off x="288790" y="958844"/>
+            <a:ext cx="11250267" cy="5584670"/>
+          </a:xfrm>
+          <a:prstGeom prst="rect">
+            <a:avLst/>
+          </a:prstGeom>
+          <a:noFill/>
+        </p:spPr>
+        <p:txBody>
+          <a:bodyPr wrap="square" rtlCol="0" anchor="t">
+            <a:spAutoFit/>
+          </a:bodyPr>
+          <a:lstStyle/>
+          <a:p>
+            <a:pPr marL="377825" indent="-285750">
+              <a:lnSpc>
+                <a:spcPct val="150000"/>
+              </a:lnSpc>
+              <a:buFont typeface="Arial" panose="020B0604020202020204" pitchFamily="34" charset="0"/>
+              <a:buChar char="•"/>
+            </a:pPr>
+            <a:r>
+              <a:rPr lang="ko-KR" altLang="en-US" sz="1600" spc="-50" dirty="0"/>
+              <a:t>우리는 경제생활을 하면서</a:t>
+            </a:r>
+            <a:r>
+              <a:rPr lang="en-US" altLang="ko-KR" sz="1600" spc="-50" dirty="0"/>
+              <a:t>, </a:t>
+            </a:r>
+            <a:r>
+              <a:rPr lang="ko-KR" altLang="en-US" sz="1600" spc="-50" dirty="0"/>
+              <a:t>크고 작은 여러 위험에 노출되어 있다</a:t>
+            </a:r>
+            <a:r>
+              <a:rPr lang="en-US" altLang="ko-KR" sz="1600" spc="-50" dirty="0"/>
+              <a:t>.</a:t>
+            </a:r>
+          </a:p>
+          <a:p>
+            <a:pPr marL="835025" lvl="1" indent="-285750">
+              <a:lnSpc>
+                <a:spcPct val="150000"/>
+              </a:lnSpc>
+              <a:buFont typeface="Wingdings" panose="05000000000000000000" pitchFamily="2" charset="2"/>
+              <a:buChar char="ü"/>
+            </a:pPr>
+            <a:r>
+              <a:rPr lang="ko-KR" altLang="en-US" sz="1600" spc="-50" dirty="0"/>
+              <a:t>나이가 많아져 더 이상 일을 할 수 없거나</a:t>
+            </a:r>
+            <a:r>
+              <a:rPr lang="en-US" altLang="ko-KR" sz="1600" spc="-50" dirty="0"/>
+              <a:t>, </a:t>
+            </a:r>
+            <a:r>
+              <a:rPr lang="ko-KR" altLang="en-US" sz="1600" spc="-50" dirty="0"/>
+              <a:t>갑작스럽게 병이 생기거나</a:t>
+            </a:r>
+            <a:r>
+              <a:rPr lang="en-US" altLang="ko-KR" sz="1600" spc="-50" dirty="0"/>
+              <a:t>, </a:t>
+            </a:r>
+            <a:r>
+              <a:rPr lang="ko-KR" altLang="en-US" sz="1600" spc="-50" dirty="0"/>
+              <a:t>직장에서 부상을 당하는 등의 위험이 있다</a:t>
+            </a:r>
+            <a:r>
+              <a:rPr lang="en-US" altLang="ko-KR" sz="1600" spc="-50" dirty="0"/>
+              <a:t>.</a:t>
+            </a:r>
+          </a:p>
+          <a:p>
+            <a:pPr marL="377825" indent="-285750">
+              <a:lnSpc>
+                <a:spcPct val="150000"/>
+              </a:lnSpc>
+              <a:buFont typeface="Arial" panose="020B0604020202020204" pitchFamily="34" charset="0"/>
+              <a:buChar char="•"/>
+            </a:pPr>
+            <a:r>
+              <a:rPr lang="ko-KR" altLang="en-US" sz="1600" spc="-50" dirty="0"/>
+              <a:t>이런 위험에 대해 정부가 보험을 제공하는 것이 사회보험제도이다</a:t>
+            </a:r>
+            <a:r>
+              <a:rPr lang="en-US" altLang="ko-KR" sz="1600" spc="-50" dirty="0"/>
+              <a:t>.</a:t>
+            </a:r>
+          </a:p>
+          <a:p>
+            <a:pPr marL="835025" lvl="1" indent="-285750">
+              <a:lnSpc>
+                <a:spcPct val="150000"/>
+              </a:lnSpc>
+              <a:buFont typeface="Wingdings" panose="05000000000000000000" pitchFamily="2" charset="2"/>
+              <a:buChar char="ü"/>
+            </a:pPr>
+            <a:r>
+              <a:rPr lang="ko-KR" altLang="en-US" sz="1600" spc="-50" dirty="0"/>
+              <a:t>사회보장기본법에는 </a:t>
+            </a:r>
+            <a:r>
+              <a:rPr lang="en-US" altLang="ko-KR" sz="1600" spc="-50" dirty="0"/>
+              <a:t>“</a:t>
+            </a:r>
+            <a:r>
+              <a:rPr lang="ko-KR" altLang="en-US" sz="1600" spc="-50" dirty="0"/>
+              <a:t>국민에게 발생하는 사회적 위험을 보험의 방식으로 대처함으로써 국민의 건강과 소득을 보장하는 제도</a:t>
+            </a:r>
+            <a:r>
+              <a:rPr lang="en-US" altLang="ko-KR" sz="1600" spc="-50" dirty="0"/>
+              <a:t>“ </a:t>
+            </a:r>
+            <a:r>
+              <a:rPr lang="ko-KR" altLang="en-US" sz="1600" spc="-50" dirty="0"/>
+              <a:t>라고 정의되어 있다</a:t>
+            </a:r>
+            <a:r>
+              <a:rPr lang="en-US" altLang="ko-KR" sz="1600" spc="-50" dirty="0"/>
+              <a:t>.</a:t>
+            </a:r>
+          </a:p>
+          <a:p>
+            <a:pPr marL="835025" lvl="1" indent="-285750">
+              <a:lnSpc>
+                <a:spcPct val="150000"/>
+              </a:lnSpc>
+              <a:buFont typeface="Wingdings" panose="05000000000000000000" pitchFamily="2" charset="2"/>
+              <a:buChar char="ü"/>
+            </a:pPr>
+            <a:r>
+              <a:rPr lang="ko-KR" altLang="en-US" sz="1600" spc="-50" dirty="0"/>
+              <a:t>아래와 같이</a:t>
+            </a:r>
+            <a:r>
+              <a:rPr lang="en-US" altLang="ko-KR" sz="1600" spc="-50" dirty="0"/>
+              <a:t>, </a:t>
+            </a:r>
+            <a:r>
+              <a:rPr lang="ko-KR" altLang="en-US" sz="1600" spc="-50" dirty="0"/>
+              <a:t>여러가지 이유로 민간부문에서의 보험시장이 완벽하지 못하여</a:t>
+            </a:r>
+            <a:r>
+              <a:rPr lang="en-US" altLang="ko-KR" sz="1600" spc="-50" dirty="0"/>
+              <a:t>, </a:t>
+            </a:r>
+            <a:r>
+              <a:rPr lang="ko-KR" altLang="en-US" sz="1600" spc="-50" dirty="0"/>
+              <a:t>정부가</a:t>
+            </a:r>
+            <a:r>
+              <a:rPr lang="en-US" altLang="ko-KR" sz="1600" spc="-50" dirty="0"/>
+              <a:t> </a:t>
+            </a:r>
+            <a:r>
+              <a:rPr lang="ko-KR" altLang="en-US" sz="1600" spc="-50" dirty="0"/>
+              <a:t>개입할 필요가 생긴다</a:t>
+            </a:r>
+            <a:r>
+              <a:rPr lang="en-US" altLang="ko-KR" sz="1600" spc="-50" dirty="0"/>
+              <a:t>.</a:t>
+            </a:r>
+          </a:p>
+          <a:p>
+            <a:pPr marL="835025" lvl="1" indent="-285750">
+              <a:lnSpc>
+                <a:spcPct val="150000"/>
+              </a:lnSpc>
+              <a:buFont typeface="Wingdings" panose="05000000000000000000" pitchFamily="2" charset="2"/>
+              <a:buChar char="ü"/>
+            </a:pPr>
+            <a:endParaRPr lang="en-US" altLang="ko-KR" sz="1600" spc="-50" dirty="0"/>
+          </a:p>
+          <a:p>
+            <a:pPr marL="434975" indent="-342900">
+              <a:lnSpc>
+                <a:spcPct val="150000"/>
+              </a:lnSpc>
+              <a:buFont typeface="+mj-lt"/>
+              <a:buAutoNum type="arabicPeriod"/>
+            </a:pPr>
+            <a:r>
+              <a:rPr lang="ko-KR" altLang="en-US" sz="1600" spc="-50" dirty="0"/>
+              <a:t>보험시장은 정보의 비대칭성을 전형적으로 갖고 있어</a:t>
+            </a:r>
+            <a:r>
+              <a:rPr lang="en-US" altLang="ko-KR" sz="1600" spc="-50" dirty="0"/>
+              <a:t>, </a:t>
+            </a:r>
+            <a:r>
+              <a:rPr lang="ko-KR" altLang="en-US" sz="1600" spc="-50" dirty="0"/>
+              <a:t>역선택과 도덕적 해이 문제가 필연적으로 나타난다</a:t>
+            </a:r>
+            <a:r>
+              <a:rPr lang="en-US" altLang="ko-KR" sz="1600" spc="-50" dirty="0"/>
+              <a:t>.</a:t>
+            </a:r>
+          </a:p>
+          <a:p>
+            <a:pPr marL="835025" lvl="1" indent="-285750">
+              <a:lnSpc>
+                <a:spcPct val="150000"/>
+              </a:lnSpc>
+              <a:buFont typeface="Wingdings" panose="05000000000000000000" pitchFamily="2" charset="2"/>
+              <a:buChar char="ü"/>
+            </a:pPr>
+            <a:r>
+              <a:rPr lang="ko-KR" altLang="en-US" sz="1600" spc="-50" dirty="0"/>
+              <a:t>완벽한 보험이란 일어날 수 있는 모든 가능성에 대해 완벽한 대비를 할 수 있게끔 만들어주는 것을 뜻한다</a:t>
+            </a:r>
+            <a:r>
+              <a:rPr lang="en-US" altLang="ko-KR" sz="1600" spc="-50" dirty="0"/>
+              <a:t>.</a:t>
+            </a:r>
+          </a:p>
+          <a:p>
+            <a:pPr marL="835025" lvl="1" indent="-285750">
+              <a:lnSpc>
+                <a:spcPct val="150000"/>
+              </a:lnSpc>
+              <a:buFont typeface="Wingdings" panose="05000000000000000000" pitchFamily="2" charset="2"/>
+              <a:buChar char="ü"/>
+            </a:pPr>
+            <a:r>
+              <a:rPr lang="ko-KR" altLang="en-US" sz="1600" spc="-50" dirty="0"/>
+              <a:t>이 때</a:t>
+            </a:r>
+            <a:r>
+              <a:rPr lang="en-US" altLang="ko-KR" sz="1600" spc="-50" dirty="0"/>
+              <a:t>, </a:t>
+            </a:r>
+            <a:r>
+              <a:rPr lang="ko-KR" altLang="en-US" sz="1600" spc="-50" dirty="0"/>
+              <a:t>역선택과 도덕적 해이는 완벽한 보험을 제공할 수 없게 한다</a:t>
+            </a:r>
+            <a:r>
+              <a:rPr lang="en-US" altLang="ko-KR" sz="1600" spc="-50" dirty="0"/>
+              <a:t>.</a:t>
+            </a:r>
+          </a:p>
+          <a:p>
+            <a:pPr marL="835025" lvl="1" indent="-285750">
+              <a:lnSpc>
+                <a:spcPct val="150000"/>
+              </a:lnSpc>
+              <a:buFont typeface="Wingdings" panose="05000000000000000000" pitchFamily="2" charset="2"/>
+              <a:buChar char="ü"/>
+            </a:pPr>
+            <a:r>
+              <a:rPr lang="ko-KR" altLang="en-US" sz="1600" spc="-50" dirty="0"/>
+              <a:t>다시 말하면</a:t>
+            </a:r>
+            <a:r>
+              <a:rPr lang="en-US" altLang="ko-KR" sz="1600" spc="-50" dirty="0"/>
+              <a:t>, </a:t>
+            </a:r>
+            <a:r>
+              <a:rPr lang="ko-KR" altLang="en-US" sz="1600" spc="-50" dirty="0"/>
+              <a:t>완벽한 보험을 제공하는 보험회사가 있다면 수익성 악화로 문을 닫게 된다</a:t>
+            </a:r>
+            <a:r>
+              <a:rPr lang="en-US" altLang="ko-KR" sz="1600" spc="-50" dirty="0"/>
+              <a:t>.</a:t>
+            </a:r>
+          </a:p>
+          <a:p>
+            <a:pPr marL="434975" indent="-342900">
+              <a:lnSpc>
+                <a:spcPct val="150000"/>
+              </a:lnSpc>
+              <a:buFont typeface="+mj-lt"/>
+              <a:buAutoNum type="arabicPeriod"/>
+            </a:pPr>
+            <a:r>
+              <a:rPr lang="ko-KR" altLang="en-US" sz="1600" spc="-50" dirty="0"/>
+              <a:t>위험의 종류에 따라 적절한 보험상품을 제공하는 것이 불가능한 경우가 있다</a:t>
+            </a:r>
+            <a:r>
+              <a:rPr lang="en-US" altLang="ko-KR" sz="1600" spc="-50" dirty="0"/>
+              <a:t>.</a:t>
+            </a:r>
+          </a:p>
+          <a:p>
+            <a:pPr marL="835025" lvl="1" indent="-285750">
+              <a:lnSpc>
+                <a:spcPct val="150000"/>
+              </a:lnSpc>
+              <a:buFont typeface="Wingdings" panose="05000000000000000000" pitchFamily="2" charset="2"/>
+              <a:buChar char="ü"/>
+            </a:pPr>
+            <a:r>
+              <a:rPr lang="ko-KR" altLang="en-US" sz="1600" spc="-50" dirty="0"/>
+              <a:t>민간 보험사 입장에서</a:t>
+            </a:r>
+            <a:r>
+              <a:rPr lang="en-US" altLang="ko-KR" sz="1600" spc="-50" dirty="0"/>
+              <a:t>, </a:t>
+            </a:r>
+            <a:r>
+              <a:rPr lang="ko-KR" altLang="en-US" sz="1600" spc="-50" dirty="0"/>
+              <a:t>노후의 생계를 위해 </a:t>
+            </a:r>
+            <a:r>
+              <a:rPr lang="ko-KR" altLang="en-US" sz="1600" spc="-50" dirty="0" err="1"/>
+              <a:t>저축하고자하는</a:t>
+            </a:r>
+            <a:r>
+              <a:rPr lang="ko-KR" altLang="en-US" sz="1600" spc="-50" dirty="0"/>
+              <a:t> 사람에게 실질가치가 보장되는 연금보험 상품을 제공하는 것은 어려운 일이다</a:t>
+            </a:r>
+            <a:r>
+              <a:rPr lang="en-US" altLang="ko-KR" sz="1600" spc="-50" dirty="0"/>
+              <a:t>.</a:t>
+            </a:r>
+          </a:p>
+          <a:p>
+            <a:pPr marL="1292225" lvl="2" indent="-285750">
+              <a:lnSpc>
+                <a:spcPct val="150000"/>
+              </a:lnSpc>
+              <a:buFont typeface="Wingdings" panose="05000000000000000000" pitchFamily="2" charset="2"/>
+              <a:buChar char="Ø"/>
+            </a:pPr>
+            <a:r>
+              <a:rPr lang="ko-KR" altLang="en-US" sz="1600" spc="-50" dirty="0"/>
+              <a:t>물가가 오를 때 세금을 더 많이 거둘 수 있는 것도 아니므로 실질가치 보장이 불가능하다</a:t>
+            </a:r>
+            <a:r>
+              <a:rPr lang="en-US" altLang="ko-KR" sz="1600" spc="-50" dirty="0"/>
+              <a:t>.</a:t>
+            </a:r>
+          </a:p>
+        </p:txBody>
+      </p:sp>
+    </p:spTree>
+    <p:extLst>
+      <p:ext uri="{BB962C8B-B14F-4D97-AF65-F5344CB8AC3E}">
+        <p14:creationId xmlns:p14="http://schemas.microsoft.com/office/powerpoint/2010/main" val="1152434456"/>
+      </p:ext>
+    </p:extLst>
+  </p:cSld>
+  <p:clrMapOvr>
+    <a:masterClrMapping/>
+  </p:clrMapOvr>
+</p:sld>
+</file>
+
+<file path=ppt/slides/slide40.xml><?xml version="1.0" encoding="utf-8"?>
 <p:sld xmlns:a="http://schemas.openxmlformats.org/drawingml/2006/main" xmlns:r="http://schemas.openxmlformats.org/officeDocument/2006/relationships" xmlns:p="http://schemas.openxmlformats.org/presentationml/2006/main">
   <p:cSld>
     <p:spTree>
@@ -16569,7 +18373,7 @@
           <a:p>
             <a:fld id="{109C872D-39A9-4065-8BF3-6A613116E2A1}" type="slidenum">
               <a:rPr lang="ko-KR" altLang="en-US" smtClean="0"/>
-              <a:t>36</a:t>
+              <a:t>40</a:t>
             </a:fld>
             <a:endParaRPr lang="ko-KR" altLang="en-US"/>
           </a:p>
@@ -17048,7 +18852,7 @@
 </p:sld>
 </file>
 
-<file path=ppt/slides/slide37.xml><?xml version="1.0" encoding="utf-8"?>
+<file path=ppt/slides/slide41.xml><?xml version="1.0" encoding="utf-8"?>
 <p:sld xmlns:a="http://schemas.openxmlformats.org/drawingml/2006/main" xmlns:r="http://schemas.openxmlformats.org/officeDocument/2006/relationships" xmlns:p="http://schemas.openxmlformats.org/presentationml/2006/main">
   <p:cSld>
     <p:spTree>
@@ -17122,7 +18926,7 @@
           <a:p>
             <a:fld id="{109C872D-39A9-4065-8BF3-6A613116E2A1}" type="slidenum">
               <a:rPr lang="ko-KR" altLang="en-US" smtClean="0"/>
-              <a:t>37</a:t>
+              <a:t>41</a:t>
             </a:fld>
             <a:endParaRPr lang="ko-KR" altLang="en-US"/>
           </a:p>
@@ -17355,7 +19159,7 @@
 </p:sld>
 </file>
 
-<file path=ppt/slides/slide38.xml><?xml version="1.0" encoding="utf-8"?>
+<file path=ppt/slides/slide42.xml><?xml version="1.0" encoding="utf-8"?>
 <p:sld xmlns:a="http://schemas.openxmlformats.org/drawingml/2006/main" xmlns:r="http://schemas.openxmlformats.org/officeDocument/2006/relationships" xmlns:p="http://schemas.openxmlformats.org/presentationml/2006/main">
   <p:cSld>
     <p:spTree>
@@ -17429,7 +19233,7 @@
           <a:p>
             <a:fld id="{109C872D-39A9-4065-8BF3-6A613116E2A1}" type="slidenum">
               <a:rPr lang="ko-KR" altLang="en-US" smtClean="0"/>
-              <a:t>38</a:t>
+              <a:t>42</a:t>
             </a:fld>
             <a:endParaRPr lang="ko-KR" altLang="en-US"/>
           </a:p>
@@ -18339,7 +20143,7 @@
 </p:sld>
 </file>
 
-<file path=ppt/slides/slide39.xml><?xml version="1.0" encoding="utf-8"?>
+<file path=ppt/slides/slide43.xml><?xml version="1.0" encoding="utf-8"?>
 <p:sld xmlns:a="http://schemas.openxmlformats.org/drawingml/2006/main" xmlns:r="http://schemas.openxmlformats.org/officeDocument/2006/relationships" xmlns:p="http://schemas.openxmlformats.org/presentationml/2006/main">
   <p:cSld>
     <p:spTree>
@@ -18413,7 +20217,7 @@
           <a:p>
             <a:fld id="{109C872D-39A9-4065-8BF3-6A613116E2A1}" type="slidenum">
               <a:rPr lang="ko-KR" altLang="en-US" smtClean="0"/>
-              <a:t>39</a:t>
+              <a:t>43</a:t>
             </a:fld>
             <a:endParaRPr lang="ko-KR" altLang="en-US"/>
           </a:p>
@@ -18709,447 +20513,7 @@
 </p:sld>
 </file>
 
-<file path=ppt/slides/slide4.xml><?xml version="1.0" encoding="utf-8"?>
-<p:sld xmlns:a="http://schemas.openxmlformats.org/drawingml/2006/main" xmlns:r="http://schemas.openxmlformats.org/officeDocument/2006/relationships" xmlns:p="http://schemas.openxmlformats.org/presentationml/2006/main">
-  <p:cSld>
-    <p:spTree>
-      <p:nvGrpSpPr>
-        <p:cNvPr id="1" name="">
-          <a:extLst>
-            <a:ext uri="{FF2B5EF4-FFF2-40B4-BE49-F238E27FC236}">
-              <a16:creationId xmlns:a16="http://schemas.microsoft.com/office/drawing/2014/main" id="{7E764ACB-B8A0-8B8E-50AE-F6949A866C73}"/>
-            </a:ext>
-          </a:extLst>
-        </p:cNvPr>
-        <p:cNvGrpSpPr/>
-        <p:nvPr/>
-      </p:nvGrpSpPr>
-      <p:grpSpPr>
-        <a:xfrm>
-          <a:off x="0" y="0"/>
-          <a:ext cx="0" cy="0"/>
-          <a:chOff x="0" y="0"/>
-          <a:chExt cx="0" cy="0"/>
-        </a:xfrm>
-      </p:grpSpPr>
-      <p:sp>
-        <p:nvSpPr>
-          <p:cNvPr id="2" name="제목 1">
-            <a:extLst>
-              <a:ext uri="{FF2B5EF4-FFF2-40B4-BE49-F238E27FC236}">
-                <a16:creationId xmlns:a16="http://schemas.microsoft.com/office/drawing/2014/main" id="{3B730496-A872-5CFB-3130-C4429F8285BC}"/>
-              </a:ext>
-            </a:extLst>
-          </p:cNvPr>
-          <p:cNvSpPr>
-            <a:spLocks noGrp="1"/>
-          </p:cNvSpPr>
-          <p:nvPr>
-            <p:ph type="title"/>
-          </p:nvPr>
-        </p:nvSpPr>
-        <p:spPr/>
-        <p:txBody>
-          <a:bodyPr/>
-          <a:lstStyle/>
-          <a:p>
-            <a:r>
-              <a:rPr lang="ko-KR" altLang="en-US" dirty="0"/>
-              <a:t>사회보험제도의 의미</a:t>
-            </a:r>
-          </a:p>
-        </p:txBody>
-      </p:sp>
-      <p:sp>
-        <p:nvSpPr>
-          <p:cNvPr id="4" name="슬라이드 번호 개체 틀 3">
-            <a:extLst>
-              <a:ext uri="{FF2B5EF4-FFF2-40B4-BE49-F238E27FC236}">
-                <a16:creationId xmlns:a16="http://schemas.microsoft.com/office/drawing/2014/main" id="{CBD72302-C21E-82F3-1317-6A67EB8523B7}"/>
-              </a:ext>
-            </a:extLst>
-          </p:cNvPr>
-          <p:cNvSpPr>
-            <a:spLocks noGrp="1"/>
-          </p:cNvSpPr>
-          <p:nvPr>
-            <p:ph type="sldNum" sz="quarter" idx="12"/>
-          </p:nvPr>
-        </p:nvSpPr>
-        <p:spPr/>
-        <p:txBody>
-          <a:bodyPr/>
-          <a:lstStyle/>
-          <a:p>
-            <a:fld id="{109C872D-39A9-4065-8BF3-6A613116E2A1}" type="slidenum">
-              <a:rPr lang="ko-KR" altLang="en-US" smtClean="0"/>
-              <a:t>4</a:t>
-            </a:fld>
-            <a:endParaRPr lang="ko-KR" altLang="en-US"/>
-          </a:p>
-        </p:txBody>
-      </p:sp>
-      <p:sp>
-        <p:nvSpPr>
-          <p:cNvPr id="3" name="TextBox 2">
-            <a:extLst>
-              <a:ext uri="{FF2B5EF4-FFF2-40B4-BE49-F238E27FC236}">
-                <a16:creationId xmlns:a16="http://schemas.microsoft.com/office/drawing/2014/main" id="{7331E4DF-D5A4-61E7-1307-371A5A496859}"/>
-              </a:ext>
-            </a:extLst>
-          </p:cNvPr>
-          <p:cNvSpPr txBox="1"/>
-          <p:nvPr/>
-        </p:nvSpPr>
-        <p:spPr>
-          <a:xfrm>
-            <a:off x="288790" y="958844"/>
-            <a:ext cx="11250267" cy="5584670"/>
-          </a:xfrm>
-          <a:prstGeom prst="rect">
-            <a:avLst/>
-          </a:prstGeom>
-          <a:noFill/>
-        </p:spPr>
-        <p:txBody>
-          <a:bodyPr wrap="square" rtlCol="0" anchor="t">
-            <a:spAutoFit/>
-          </a:bodyPr>
-          <a:lstStyle/>
-          <a:p>
-            <a:pPr marL="377825" indent="-285750">
-              <a:lnSpc>
-                <a:spcPct val="150000"/>
-              </a:lnSpc>
-              <a:buFont typeface="Arial" panose="020B0604020202020204" pitchFamily="34" charset="0"/>
-              <a:buChar char="•"/>
-            </a:pPr>
-            <a:r>
-              <a:rPr lang="ko-KR" altLang="en-US" sz="1600" spc="-50" dirty="0"/>
-              <a:t>우리는 경제생활을 하면서</a:t>
-            </a:r>
-            <a:r>
-              <a:rPr lang="en-US" altLang="ko-KR" sz="1600" spc="-50" dirty="0"/>
-              <a:t>, </a:t>
-            </a:r>
-            <a:r>
-              <a:rPr lang="ko-KR" altLang="en-US" sz="1600" spc="-50" dirty="0"/>
-              <a:t>크고 작은 여러 위험에 노출되어 있다</a:t>
-            </a:r>
-            <a:r>
-              <a:rPr lang="en-US" altLang="ko-KR" sz="1600" spc="-50" dirty="0"/>
-              <a:t>.</a:t>
-            </a:r>
-          </a:p>
-          <a:p>
-            <a:pPr marL="835025" lvl="1" indent="-285750">
-              <a:lnSpc>
-                <a:spcPct val="150000"/>
-              </a:lnSpc>
-              <a:buFont typeface="Wingdings" panose="05000000000000000000" pitchFamily="2" charset="2"/>
-              <a:buChar char="ü"/>
-            </a:pPr>
-            <a:r>
-              <a:rPr lang="ko-KR" altLang="en-US" sz="1600" spc="-50" dirty="0"/>
-              <a:t>나이가 많아져 더 이상 일을 할 수 없거나</a:t>
-            </a:r>
-            <a:r>
-              <a:rPr lang="en-US" altLang="ko-KR" sz="1600" spc="-50" dirty="0"/>
-              <a:t>, </a:t>
-            </a:r>
-            <a:r>
-              <a:rPr lang="ko-KR" altLang="en-US" sz="1600" spc="-50" dirty="0"/>
-              <a:t>갑작스럽게 병이 생기거나</a:t>
-            </a:r>
-            <a:r>
-              <a:rPr lang="en-US" altLang="ko-KR" sz="1600" spc="-50" dirty="0"/>
-              <a:t>, </a:t>
-            </a:r>
-            <a:r>
-              <a:rPr lang="ko-KR" altLang="en-US" sz="1600" spc="-50" dirty="0"/>
-              <a:t>직장에서 부상을 당하는 등의 위험이 있다</a:t>
-            </a:r>
-            <a:r>
-              <a:rPr lang="en-US" altLang="ko-KR" sz="1600" spc="-50" dirty="0"/>
-              <a:t>.</a:t>
-            </a:r>
-          </a:p>
-          <a:p>
-            <a:pPr marL="377825" indent="-285750">
-              <a:lnSpc>
-                <a:spcPct val="150000"/>
-              </a:lnSpc>
-              <a:buFont typeface="Arial" panose="020B0604020202020204" pitchFamily="34" charset="0"/>
-              <a:buChar char="•"/>
-            </a:pPr>
-            <a:r>
-              <a:rPr lang="ko-KR" altLang="en-US" sz="1600" spc="-50" dirty="0"/>
-              <a:t>이런 위험에 대해 정부가 보험을 제공하는 것이 사회보험제도이다</a:t>
-            </a:r>
-            <a:r>
-              <a:rPr lang="en-US" altLang="ko-KR" sz="1600" spc="-50" dirty="0"/>
-              <a:t>.</a:t>
-            </a:r>
-          </a:p>
-          <a:p>
-            <a:pPr marL="835025" lvl="1" indent="-285750">
-              <a:lnSpc>
-                <a:spcPct val="150000"/>
-              </a:lnSpc>
-              <a:buFont typeface="Wingdings" panose="05000000000000000000" pitchFamily="2" charset="2"/>
-              <a:buChar char="ü"/>
-            </a:pPr>
-            <a:r>
-              <a:rPr lang="ko-KR" altLang="en-US" sz="1600" spc="-50" dirty="0"/>
-              <a:t>사회보장기본법에는 </a:t>
-            </a:r>
-            <a:r>
-              <a:rPr lang="en-US" altLang="ko-KR" sz="1600" spc="-50" dirty="0"/>
-              <a:t>“</a:t>
-            </a:r>
-            <a:r>
-              <a:rPr lang="ko-KR" altLang="en-US" sz="1600" spc="-50" dirty="0"/>
-              <a:t>국민에게 발생하는 사회적 위험을 보험의 방식으로 대처함으로써 국민의 건강과 소득을 보장하는 제도</a:t>
-            </a:r>
-            <a:r>
-              <a:rPr lang="en-US" altLang="ko-KR" sz="1600" spc="-50" dirty="0"/>
-              <a:t>“ </a:t>
-            </a:r>
-            <a:r>
-              <a:rPr lang="ko-KR" altLang="en-US" sz="1600" spc="-50" dirty="0"/>
-              <a:t>라고 정의되어 있다</a:t>
-            </a:r>
-            <a:r>
-              <a:rPr lang="en-US" altLang="ko-KR" sz="1600" spc="-50" dirty="0"/>
-              <a:t>.</a:t>
-            </a:r>
-          </a:p>
-          <a:p>
-            <a:pPr marL="835025" lvl="1" indent="-285750">
-              <a:lnSpc>
-                <a:spcPct val="150000"/>
-              </a:lnSpc>
-              <a:buFont typeface="Wingdings" panose="05000000000000000000" pitchFamily="2" charset="2"/>
-              <a:buChar char="ü"/>
-            </a:pPr>
-            <a:r>
-              <a:rPr lang="ko-KR" altLang="en-US" sz="1600" spc="-50" dirty="0"/>
-              <a:t>아래와 같이</a:t>
-            </a:r>
-            <a:r>
-              <a:rPr lang="en-US" altLang="ko-KR" sz="1600" spc="-50" dirty="0"/>
-              <a:t>, </a:t>
-            </a:r>
-            <a:r>
-              <a:rPr lang="ko-KR" altLang="en-US" sz="1600" spc="-50" dirty="0"/>
-              <a:t>여러가지 이유로 민간부문에서의 보험시장이 완벽하지 못하여</a:t>
-            </a:r>
-            <a:r>
-              <a:rPr lang="en-US" altLang="ko-KR" sz="1600" spc="-50" dirty="0"/>
-              <a:t>, </a:t>
-            </a:r>
-            <a:r>
-              <a:rPr lang="ko-KR" altLang="en-US" sz="1600" spc="-50" dirty="0"/>
-              <a:t>정부가</a:t>
-            </a:r>
-            <a:r>
-              <a:rPr lang="en-US" altLang="ko-KR" sz="1600" spc="-50" dirty="0"/>
-              <a:t> </a:t>
-            </a:r>
-            <a:r>
-              <a:rPr lang="ko-KR" altLang="en-US" sz="1600" spc="-50" dirty="0"/>
-              <a:t>개입할 필요가 생긴다</a:t>
-            </a:r>
-            <a:r>
-              <a:rPr lang="en-US" altLang="ko-KR" sz="1600" spc="-50" dirty="0"/>
-              <a:t>.</a:t>
-            </a:r>
-          </a:p>
-          <a:p>
-            <a:pPr marL="835025" lvl="1" indent="-285750">
-              <a:lnSpc>
-                <a:spcPct val="150000"/>
-              </a:lnSpc>
-              <a:buFont typeface="Wingdings" panose="05000000000000000000" pitchFamily="2" charset="2"/>
-              <a:buChar char="ü"/>
-            </a:pPr>
-            <a:endParaRPr lang="en-US" altLang="ko-KR" sz="1600" spc="-50" dirty="0"/>
-          </a:p>
-          <a:p>
-            <a:pPr marL="434975" indent="-342900">
-              <a:lnSpc>
-                <a:spcPct val="150000"/>
-              </a:lnSpc>
-              <a:buFont typeface="+mj-lt"/>
-              <a:buAutoNum type="arabicPeriod"/>
-            </a:pPr>
-            <a:r>
-              <a:rPr lang="ko-KR" altLang="en-US" sz="1600" spc="-50" dirty="0"/>
-              <a:t>보험시장은 정보의 비대칭성을 전형적으로 갖고 있어</a:t>
-            </a:r>
-            <a:r>
-              <a:rPr lang="en-US" altLang="ko-KR" sz="1600" spc="-50" dirty="0"/>
-              <a:t>, </a:t>
-            </a:r>
-            <a:r>
-              <a:rPr lang="ko-KR" altLang="en-US" sz="1600" spc="-50" dirty="0"/>
-              <a:t>역선택과 도덕적 해이 문제가 필연적으로 나타난다</a:t>
-            </a:r>
-            <a:r>
-              <a:rPr lang="en-US" altLang="ko-KR" sz="1600" spc="-50" dirty="0"/>
-              <a:t>.</a:t>
-            </a:r>
-          </a:p>
-          <a:p>
-            <a:pPr marL="835025" lvl="1" indent="-285750">
-              <a:lnSpc>
-                <a:spcPct val="150000"/>
-              </a:lnSpc>
-              <a:buFont typeface="Wingdings" panose="05000000000000000000" pitchFamily="2" charset="2"/>
-              <a:buChar char="ü"/>
-            </a:pPr>
-            <a:r>
-              <a:rPr lang="ko-KR" altLang="en-US" sz="1600" spc="-50" dirty="0"/>
-              <a:t>완벽한 보험이란 일어날 수 있는 모든 가능성에 대해 완벽한 대비를 할 수 있게끔 만들어주는 것을 뜻한다</a:t>
-            </a:r>
-            <a:r>
-              <a:rPr lang="en-US" altLang="ko-KR" sz="1600" spc="-50" dirty="0"/>
-              <a:t>.</a:t>
-            </a:r>
-          </a:p>
-          <a:p>
-            <a:pPr marL="835025" lvl="1" indent="-285750">
-              <a:lnSpc>
-                <a:spcPct val="150000"/>
-              </a:lnSpc>
-              <a:buFont typeface="Wingdings" panose="05000000000000000000" pitchFamily="2" charset="2"/>
-              <a:buChar char="ü"/>
-            </a:pPr>
-            <a:r>
-              <a:rPr lang="ko-KR" altLang="en-US" sz="1600" spc="-50" dirty="0"/>
-              <a:t>이 때</a:t>
-            </a:r>
-            <a:r>
-              <a:rPr lang="en-US" altLang="ko-KR" sz="1600" spc="-50" dirty="0"/>
-              <a:t>, </a:t>
-            </a:r>
-            <a:r>
-              <a:rPr lang="ko-KR" altLang="en-US" sz="1600" spc="-50" dirty="0"/>
-              <a:t>역선택과 도덕적 해이는 완벽한 보험을 제공할 수 없게 한다</a:t>
-            </a:r>
-            <a:r>
-              <a:rPr lang="en-US" altLang="ko-KR" sz="1600" spc="-50" dirty="0"/>
-              <a:t>.</a:t>
-            </a:r>
-          </a:p>
-          <a:p>
-            <a:pPr marL="835025" lvl="1" indent="-285750">
-              <a:lnSpc>
-                <a:spcPct val="150000"/>
-              </a:lnSpc>
-              <a:buFont typeface="Wingdings" panose="05000000000000000000" pitchFamily="2" charset="2"/>
-              <a:buChar char="ü"/>
-            </a:pPr>
-            <a:r>
-              <a:rPr lang="ko-KR" altLang="en-US" sz="1600" spc="-50" dirty="0"/>
-              <a:t>다시 말하면</a:t>
-            </a:r>
-            <a:r>
-              <a:rPr lang="en-US" altLang="ko-KR" sz="1600" spc="-50" dirty="0"/>
-              <a:t>, </a:t>
-            </a:r>
-            <a:r>
-              <a:rPr lang="ko-KR" altLang="en-US" sz="1600" spc="-50" dirty="0"/>
-              <a:t>완벽한 보험을 제공하는 보험회사가 있다면 수익성 악화로 문을 닫게 된다</a:t>
-            </a:r>
-            <a:r>
-              <a:rPr lang="en-US" altLang="ko-KR" sz="1600" spc="-50" dirty="0"/>
-              <a:t>.</a:t>
-            </a:r>
-          </a:p>
-          <a:p>
-            <a:pPr marL="434975" indent="-342900">
-              <a:lnSpc>
-                <a:spcPct val="150000"/>
-              </a:lnSpc>
-              <a:buFont typeface="+mj-lt"/>
-              <a:buAutoNum type="arabicPeriod"/>
-            </a:pPr>
-            <a:r>
-              <a:rPr lang="ko-KR" altLang="en-US" sz="1600" spc="-50" dirty="0"/>
-              <a:t>위험의 종류에 따라 적절한 보험상품을 제공하는 것이 불가능한 경우가 있다</a:t>
-            </a:r>
-            <a:r>
-              <a:rPr lang="en-US" altLang="ko-KR" sz="1600" spc="-50" dirty="0"/>
-              <a:t>.</a:t>
-            </a:r>
-          </a:p>
-          <a:p>
-            <a:pPr marL="835025" lvl="1" indent="-285750">
-              <a:lnSpc>
-                <a:spcPct val="150000"/>
-              </a:lnSpc>
-              <a:buFont typeface="Wingdings" panose="05000000000000000000" pitchFamily="2" charset="2"/>
-              <a:buChar char="ü"/>
-            </a:pPr>
-            <a:r>
-              <a:rPr lang="ko-KR" altLang="en-US" sz="1600" spc="-50" dirty="0"/>
-              <a:t>민간 보험사 입장에서</a:t>
-            </a:r>
-            <a:r>
-              <a:rPr lang="en-US" altLang="ko-KR" sz="1600" spc="-50" dirty="0"/>
-              <a:t>, </a:t>
-            </a:r>
-            <a:r>
-              <a:rPr lang="ko-KR" altLang="en-US" sz="1600" spc="-50" dirty="0"/>
-              <a:t>노후의 생계를 위해 </a:t>
-            </a:r>
-            <a:r>
-              <a:rPr lang="ko-KR" altLang="en-US" sz="1600" spc="-50" dirty="0" err="1"/>
-              <a:t>저축하고자하는</a:t>
-            </a:r>
-            <a:r>
-              <a:rPr lang="ko-KR" altLang="en-US" sz="1600" spc="-50" dirty="0"/>
-              <a:t> 사람에게 실질가치가 보장되는 연금보험 상품을 제공하는 것은 어려운 일이다</a:t>
-            </a:r>
-            <a:r>
-              <a:rPr lang="en-US" altLang="ko-KR" sz="1600" spc="-50" dirty="0"/>
-              <a:t>.</a:t>
-            </a:r>
-          </a:p>
-          <a:p>
-            <a:pPr marL="1292225" lvl="2" indent="-285750">
-              <a:lnSpc>
-                <a:spcPct val="150000"/>
-              </a:lnSpc>
-              <a:buFont typeface="Wingdings" panose="05000000000000000000" pitchFamily="2" charset="2"/>
-              <a:buChar char="Ø"/>
-            </a:pPr>
-            <a:r>
-              <a:rPr lang="ko-KR" altLang="en-US" sz="1600" spc="-50" dirty="0"/>
-              <a:t>물가가 오를 때 세금을 더 많이 거둘 수 있는 것도 아니므로 실질가치 보장이 불가능하다</a:t>
-            </a:r>
-            <a:r>
-              <a:rPr lang="en-US" altLang="ko-KR" sz="1600" spc="-50" dirty="0"/>
-              <a:t>.</a:t>
-            </a:r>
-          </a:p>
-        </p:txBody>
-      </p:sp>
-    </p:spTree>
-    <p:extLst>
-      <p:ext uri="{BB962C8B-B14F-4D97-AF65-F5344CB8AC3E}">
-        <p14:creationId xmlns:p14="http://schemas.microsoft.com/office/powerpoint/2010/main" val="1152434456"/>
-      </p:ext>
-    </p:extLst>
-  </p:cSld>
-  <p:clrMapOvr>
-    <a:masterClrMapping/>
-  </p:clrMapOvr>
-</p:sld>
-</file>
-
-<file path=ppt/slides/slide40.xml><?xml version="1.0" encoding="utf-8"?>
+<file path=ppt/slides/slide44.xml><?xml version="1.0" encoding="utf-8"?>
 <p:sld xmlns:a="http://schemas.openxmlformats.org/drawingml/2006/main" xmlns:r="http://schemas.openxmlformats.org/officeDocument/2006/relationships" xmlns:p="http://schemas.openxmlformats.org/presentationml/2006/main">
   <p:cSld>
     <p:spTree>
@@ -19223,7 +20587,7 @@
           <a:p>
             <a:fld id="{109C872D-39A9-4065-8BF3-6A613116E2A1}" type="slidenum">
               <a:rPr lang="ko-KR" altLang="en-US" smtClean="0"/>
-              <a:t>40</a:t>
+              <a:t>44</a:t>
             </a:fld>
             <a:endParaRPr lang="ko-KR" altLang="en-US"/>
           </a:p>
@@ -19448,7 +20812,7 @@
 </p:sld>
 </file>
 
-<file path=ppt/slides/slide41.xml><?xml version="1.0" encoding="utf-8"?>
+<file path=ppt/slides/slide45.xml><?xml version="1.0" encoding="utf-8"?>
 <p:sld xmlns:a="http://schemas.openxmlformats.org/drawingml/2006/main" xmlns:r="http://schemas.openxmlformats.org/officeDocument/2006/relationships" xmlns:p="http://schemas.openxmlformats.org/presentationml/2006/main">
   <p:cSld>
     <p:spTree>
@@ -19522,7 +20886,7 @@
           <a:p>
             <a:fld id="{109C872D-39A9-4065-8BF3-6A613116E2A1}" type="slidenum">
               <a:rPr lang="ko-KR" altLang="en-US" smtClean="0"/>
-              <a:t>41</a:t>
+              <a:t>45</a:t>
             </a:fld>
             <a:endParaRPr lang="ko-KR" altLang="en-US"/>
           </a:p>
@@ -19903,7 +21267,7 @@
 </p:sld>
 </file>
 
-<file path=ppt/slides/slide42.xml><?xml version="1.0" encoding="utf-8"?>
+<file path=ppt/slides/slide46.xml><?xml version="1.0" encoding="utf-8"?>
 <p:sld xmlns:a="http://schemas.openxmlformats.org/drawingml/2006/main" xmlns:r="http://schemas.openxmlformats.org/officeDocument/2006/relationships" xmlns:p="http://schemas.openxmlformats.org/presentationml/2006/main">
   <p:cSld>
     <p:spTree>
@@ -19977,7 +21341,7 @@
           <a:p>
             <a:fld id="{109C872D-39A9-4065-8BF3-6A613116E2A1}" type="slidenum">
               <a:rPr lang="ko-KR" altLang="en-US" smtClean="0"/>
-              <a:t>42</a:t>
+              <a:t>46</a:t>
             </a:fld>
             <a:endParaRPr lang="ko-KR" altLang="en-US"/>
           </a:p>
@@ -20532,7 +21896,7 @@
 </p:sld>
 </file>
 
-<file path=ppt/slides/slide43.xml><?xml version="1.0" encoding="utf-8"?>
+<file path=ppt/slides/slide47.xml><?xml version="1.0" encoding="utf-8"?>
 <p:sld xmlns:a="http://schemas.openxmlformats.org/drawingml/2006/main" xmlns:r="http://schemas.openxmlformats.org/officeDocument/2006/relationships" xmlns:p="http://schemas.openxmlformats.org/presentationml/2006/main">
   <p:cSld>
     <p:spTree>
@@ -20643,7 +22007,7 @@
           <a:p>
             <a:fld id="{109C872D-39A9-4065-8BF3-6A613116E2A1}" type="slidenum">
               <a:rPr lang="ko-KR" altLang="en-US" smtClean="0"/>
-              <a:t>43</a:t>
+              <a:t>47</a:t>
             </a:fld>
             <a:endParaRPr lang="ko-KR" altLang="en-US"/>
           </a:p>
@@ -21449,7 +22813,7 @@
 </p:sld>
 </file>
 
-<file path=ppt/slides/slide44.xml><?xml version="1.0" encoding="utf-8"?>
+<file path=ppt/slides/slide48.xml><?xml version="1.0" encoding="utf-8"?>
 <p:sld xmlns:a="http://schemas.openxmlformats.org/drawingml/2006/main" xmlns:r="http://schemas.openxmlformats.org/officeDocument/2006/relationships" xmlns:p="http://schemas.openxmlformats.org/presentationml/2006/main">
   <p:cSld>
     <p:spTree>
@@ -21523,7 +22887,7 @@
           <a:p>
             <a:fld id="{109C872D-39A9-4065-8BF3-6A613116E2A1}" type="slidenum">
               <a:rPr lang="ko-KR" altLang="en-US" smtClean="0"/>
-              <a:t>44</a:t>
+              <a:t>48</a:t>
             </a:fld>
             <a:endParaRPr lang="ko-KR" altLang="en-US"/>
           </a:p>
@@ -21810,7 +23174,7 @@
 </p:sld>
 </file>
 
-<file path=ppt/slides/slide45.xml><?xml version="1.0" encoding="utf-8"?>
+<file path=ppt/slides/slide49.xml><?xml version="1.0" encoding="utf-8"?>
 <p:sld xmlns:a="http://schemas.openxmlformats.org/drawingml/2006/main" xmlns:r="http://schemas.openxmlformats.org/officeDocument/2006/relationships" xmlns:p="http://schemas.openxmlformats.org/presentationml/2006/main">
   <p:cSld>
     <p:spTree>
@@ -21884,7 +23248,7 @@
           <a:p>
             <a:fld id="{109C872D-39A9-4065-8BF3-6A613116E2A1}" type="slidenum">
               <a:rPr lang="ko-KR" altLang="en-US" smtClean="0"/>
-              <a:t>45</a:t>
+              <a:t>49</a:t>
             </a:fld>
             <a:endParaRPr lang="ko-KR" altLang="en-US"/>
           </a:p>
@@ -22048,7 +23412,376 @@
 </p:sld>
 </file>
 
-<file path=ppt/slides/slide46.xml><?xml version="1.0" encoding="utf-8"?>
+<file path=ppt/slides/slide5.xml><?xml version="1.0" encoding="utf-8"?>
+<p:sld xmlns:a="http://schemas.openxmlformats.org/drawingml/2006/main" xmlns:r="http://schemas.openxmlformats.org/officeDocument/2006/relationships" xmlns:p="http://schemas.openxmlformats.org/presentationml/2006/main">
+  <p:cSld>
+    <p:spTree>
+      <p:nvGrpSpPr>
+        <p:cNvPr id="1" name="">
+          <a:extLst>
+            <a:ext uri="{FF2B5EF4-FFF2-40B4-BE49-F238E27FC236}">
+              <a16:creationId xmlns:a16="http://schemas.microsoft.com/office/drawing/2014/main" id="{2A6177E6-2BE2-8810-F89F-48E53629EB8A}"/>
+            </a:ext>
+          </a:extLst>
+        </p:cNvPr>
+        <p:cNvGrpSpPr/>
+        <p:nvPr/>
+      </p:nvGrpSpPr>
+      <p:grpSpPr>
+        <a:xfrm>
+          <a:off x="0" y="0"/>
+          <a:ext cx="0" cy="0"/>
+          <a:chOff x="0" y="0"/>
+          <a:chExt cx="0" cy="0"/>
+        </a:xfrm>
+      </p:grpSpPr>
+      <p:sp>
+        <p:nvSpPr>
+          <p:cNvPr id="2" name="제목 1">
+            <a:extLst>
+              <a:ext uri="{FF2B5EF4-FFF2-40B4-BE49-F238E27FC236}">
+                <a16:creationId xmlns:a16="http://schemas.microsoft.com/office/drawing/2014/main" id="{BFA7A44D-A761-673A-4E43-DE33CE276613}"/>
+              </a:ext>
+            </a:extLst>
+          </p:cNvPr>
+          <p:cNvSpPr>
+            <a:spLocks noGrp="1"/>
+          </p:cNvSpPr>
+          <p:nvPr>
+            <p:ph type="title"/>
+          </p:nvPr>
+        </p:nvSpPr>
+        <p:spPr/>
+        <p:txBody>
+          <a:bodyPr/>
+          <a:lstStyle/>
+          <a:p>
+            <a:r>
+              <a:rPr lang="ko-KR" altLang="en-US" dirty="0"/>
+              <a:t>사회보험제도의 의미</a:t>
+            </a:r>
+          </a:p>
+        </p:txBody>
+      </p:sp>
+      <p:sp>
+        <p:nvSpPr>
+          <p:cNvPr id="4" name="슬라이드 번호 개체 틀 3">
+            <a:extLst>
+              <a:ext uri="{FF2B5EF4-FFF2-40B4-BE49-F238E27FC236}">
+                <a16:creationId xmlns:a16="http://schemas.microsoft.com/office/drawing/2014/main" id="{692F3803-4273-D729-E62C-66D07D9E6ABA}"/>
+              </a:ext>
+            </a:extLst>
+          </p:cNvPr>
+          <p:cNvSpPr>
+            <a:spLocks noGrp="1"/>
+          </p:cNvSpPr>
+          <p:nvPr>
+            <p:ph type="sldNum" sz="quarter" idx="12"/>
+          </p:nvPr>
+        </p:nvSpPr>
+        <p:spPr/>
+        <p:txBody>
+          <a:bodyPr/>
+          <a:lstStyle/>
+          <a:p>
+            <a:fld id="{109C872D-39A9-4065-8BF3-6A613116E2A1}" type="slidenum">
+              <a:rPr lang="ko-KR" altLang="en-US" smtClean="0"/>
+              <a:t>5</a:t>
+            </a:fld>
+            <a:endParaRPr lang="ko-KR" altLang="en-US"/>
+          </a:p>
+        </p:txBody>
+      </p:sp>
+      <p:sp>
+        <p:nvSpPr>
+          <p:cNvPr id="3" name="TextBox 2">
+            <a:extLst>
+              <a:ext uri="{FF2B5EF4-FFF2-40B4-BE49-F238E27FC236}">
+                <a16:creationId xmlns:a16="http://schemas.microsoft.com/office/drawing/2014/main" id="{91DCF3A8-8A08-DF37-1A5B-CD577B183587}"/>
+              </a:ext>
+            </a:extLst>
+          </p:cNvPr>
+          <p:cNvSpPr txBox="1"/>
+          <p:nvPr/>
+        </p:nvSpPr>
+        <p:spPr>
+          <a:xfrm>
+            <a:off x="288790" y="958844"/>
+            <a:ext cx="11250267" cy="5215338"/>
+          </a:xfrm>
+          <a:prstGeom prst="rect">
+            <a:avLst/>
+          </a:prstGeom>
+          <a:noFill/>
+        </p:spPr>
+        <p:txBody>
+          <a:bodyPr wrap="square" rtlCol="0" anchor="t">
+            <a:spAutoFit/>
+          </a:bodyPr>
+          <a:lstStyle/>
+          <a:p>
+            <a:pPr marL="434975" indent="-342900">
+              <a:lnSpc>
+                <a:spcPct val="150000"/>
+              </a:lnSpc>
+              <a:buFont typeface="+mj-lt"/>
+              <a:buAutoNum type="arabicPeriod" startAt="3"/>
+            </a:pPr>
+            <a:r>
+              <a:rPr lang="ko-KR" altLang="en-US" sz="1600" spc="-50" dirty="0"/>
+              <a:t>보험시장이 잘 작동한다 하더라도</a:t>
+            </a:r>
+            <a:r>
+              <a:rPr lang="en-US" altLang="ko-KR" sz="1600" spc="-50" dirty="0"/>
+              <a:t>, </a:t>
+            </a:r>
+            <a:r>
+              <a:rPr lang="ko-KR" altLang="en-US" sz="1600" spc="-50" dirty="0"/>
+              <a:t>사람들이 근시안적으로 행동하여 위험에 대한 대비가 소홀해질 수 있다</a:t>
+            </a:r>
+            <a:r>
+              <a:rPr lang="en-US" altLang="ko-KR" sz="1600" spc="-50" dirty="0"/>
+              <a:t>.</a:t>
+            </a:r>
+          </a:p>
+          <a:p>
+            <a:pPr marL="835025" lvl="1" indent="-285750">
+              <a:lnSpc>
+                <a:spcPct val="150000"/>
+              </a:lnSpc>
+              <a:buFont typeface="Wingdings" panose="05000000000000000000" pitchFamily="2" charset="2"/>
+              <a:buChar char="ü"/>
+            </a:pPr>
+            <a:r>
+              <a:rPr lang="ko-KR" altLang="en-US" sz="1600" spc="-50" dirty="0"/>
+              <a:t>사람들은 위험에 직면하게 될 것을 짐작함에도 불구하고</a:t>
+            </a:r>
+            <a:r>
+              <a:rPr lang="en-US" altLang="ko-KR" sz="1600" spc="-50" dirty="0"/>
+              <a:t>, </a:t>
+            </a:r>
+            <a:r>
+              <a:rPr lang="ko-KR" altLang="en-US" sz="1600" spc="-50" dirty="0"/>
+              <a:t>당장 보험료가 아까워 보험에 가입하지 않을 수 있다</a:t>
+            </a:r>
+            <a:r>
+              <a:rPr lang="en-US" altLang="ko-KR" sz="1600" spc="-50" dirty="0"/>
+              <a:t>.</a:t>
+            </a:r>
+          </a:p>
+          <a:p>
+            <a:pPr marL="1292225" lvl="2" indent="-285750">
+              <a:lnSpc>
+                <a:spcPct val="150000"/>
+              </a:lnSpc>
+              <a:buFont typeface="Wingdings" panose="05000000000000000000" pitchFamily="2" charset="2"/>
+              <a:buChar char="Ø"/>
+            </a:pPr>
+            <a:r>
+              <a:rPr lang="ko-KR" altLang="en-US" sz="1600" spc="-50" dirty="0"/>
+              <a:t>사소한 경우라면 무방할 수 있지만</a:t>
+            </a:r>
+            <a:r>
+              <a:rPr lang="en-US" altLang="ko-KR" sz="1600" spc="-50" dirty="0"/>
+              <a:t>, </a:t>
+            </a:r>
+            <a:r>
+              <a:rPr lang="ko-KR" altLang="en-US" sz="1600" spc="-50" dirty="0"/>
+              <a:t>생계 자체가 위협을 받게 되는 위험이라면 정부가 개입할 필요가 생긴다</a:t>
+            </a:r>
+            <a:r>
+              <a:rPr lang="en-US" altLang="ko-KR" sz="1600" spc="-50" dirty="0"/>
+              <a:t>.</a:t>
+            </a:r>
+          </a:p>
+          <a:p>
+            <a:pPr marL="434975" indent="-342900">
+              <a:lnSpc>
+                <a:spcPct val="150000"/>
+              </a:lnSpc>
+              <a:buFont typeface="+mj-lt"/>
+              <a:buAutoNum type="arabicPeriod" startAt="3"/>
+            </a:pPr>
+            <a:r>
+              <a:rPr lang="ko-KR" altLang="en-US" sz="1600" spc="-50" dirty="0"/>
+              <a:t>어떤 상품의 경우에는 모든 국민이 고루 누릴 수 있어야 하는 상품 평등주의 관점에서 정부가 개입할 필요가 있다</a:t>
+            </a:r>
+            <a:r>
+              <a:rPr lang="en-US" altLang="ko-KR" sz="1600" spc="-50" dirty="0"/>
+              <a:t>.</a:t>
+            </a:r>
+          </a:p>
+          <a:p>
+            <a:pPr marL="892175" lvl="1" indent="-342900">
+              <a:lnSpc>
+                <a:spcPct val="150000"/>
+              </a:lnSpc>
+              <a:buFont typeface="Wingdings" panose="05000000000000000000" pitchFamily="2" charset="2"/>
+              <a:buChar char="ü"/>
+            </a:pPr>
+            <a:r>
+              <a:rPr lang="ko-KR" altLang="en-US" sz="1600" spc="-50" dirty="0"/>
+              <a:t>아픈 사람은 소득과 관계없이 의료서비스 혜택을 누릴 수 있어야 한다</a:t>
+            </a:r>
+            <a:r>
+              <a:rPr lang="en-US" altLang="ko-KR" sz="1600" spc="-50" dirty="0"/>
+              <a:t>.</a:t>
+            </a:r>
+          </a:p>
+          <a:p>
+            <a:pPr marL="1349375" lvl="2" indent="-342900">
+              <a:lnSpc>
+                <a:spcPct val="150000"/>
+              </a:lnSpc>
+              <a:buFont typeface="Wingdings" panose="05000000000000000000" pitchFamily="2" charset="2"/>
+              <a:buChar char="Ø"/>
+            </a:pPr>
+            <a:r>
+              <a:rPr lang="ko-KR" altLang="en-US" sz="1600" spc="-50" dirty="0"/>
+              <a:t>민간부문이 모든 의료보험을 운영하고 있다면</a:t>
+            </a:r>
+            <a:r>
+              <a:rPr lang="en-US" altLang="ko-KR" sz="1600" spc="-50" dirty="0"/>
+              <a:t>, </a:t>
+            </a:r>
+            <a:r>
+              <a:rPr lang="ko-KR" altLang="en-US" sz="1600" spc="-50" dirty="0"/>
+              <a:t>돈이 없어서 치료 받지 못하는 사람이 생길 수 있다</a:t>
+            </a:r>
+            <a:r>
+              <a:rPr lang="en-US" altLang="ko-KR" sz="1600" spc="-50" dirty="0"/>
+              <a:t>.</a:t>
+            </a:r>
+          </a:p>
+          <a:p>
+            <a:pPr marL="1349375" lvl="2" indent="-342900">
+              <a:lnSpc>
+                <a:spcPct val="150000"/>
+              </a:lnSpc>
+              <a:buFont typeface="Wingdings" panose="05000000000000000000" pitchFamily="2" charset="2"/>
+              <a:buChar char="Ø"/>
+            </a:pPr>
+            <a:endParaRPr lang="en-US" altLang="ko-KR" sz="1600" spc="-50" dirty="0"/>
+          </a:p>
+          <a:p>
+            <a:pPr marL="434975" indent="-342900">
+              <a:lnSpc>
+                <a:spcPct val="150000"/>
+              </a:lnSpc>
+              <a:buFont typeface="Arial" panose="020B0604020202020204" pitchFamily="34" charset="0"/>
+              <a:buChar char="•"/>
+            </a:pPr>
+            <a:r>
+              <a:rPr lang="ko-KR" altLang="en-US" sz="1600" spc="-50" dirty="0"/>
+              <a:t>정부가 운영하는 사회보험은 민간부문의 보험과 여러 측면에서 차이를 갖는다</a:t>
+            </a:r>
+            <a:r>
+              <a:rPr lang="en-US" altLang="ko-KR" sz="1600" spc="-50" dirty="0"/>
+              <a:t>.</a:t>
+            </a:r>
+          </a:p>
+          <a:p>
+            <a:pPr marL="892175" lvl="1" indent="-342900">
+              <a:lnSpc>
+                <a:spcPct val="150000"/>
+              </a:lnSpc>
+              <a:buFont typeface="Wingdings" panose="05000000000000000000" pitchFamily="2" charset="2"/>
+              <a:buChar char="ü"/>
+            </a:pPr>
+            <a:r>
+              <a:rPr lang="ko-KR" altLang="en-US" sz="1600" spc="-50" dirty="0"/>
+              <a:t>사회보험은 강제성을 가진다</a:t>
+            </a:r>
+            <a:endParaRPr lang="en-US" altLang="ko-KR" sz="1600" spc="-50" dirty="0"/>
+          </a:p>
+          <a:p>
+            <a:pPr marL="1349375" lvl="2" indent="-342900">
+              <a:lnSpc>
+                <a:spcPct val="150000"/>
+              </a:lnSpc>
+              <a:buFont typeface="Wingdings" panose="05000000000000000000" pitchFamily="2" charset="2"/>
+              <a:buChar char="Ø"/>
+            </a:pPr>
+            <a:r>
+              <a:rPr lang="ko-KR" altLang="en-US" sz="1600" spc="-50" dirty="0"/>
+              <a:t>일정한 조건을 갖춘 국민이면 반드시 사회보험에 가입하도록 되어 있다</a:t>
+            </a:r>
+            <a:r>
+              <a:rPr lang="en-US" altLang="ko-KR" sz="1600" spc="-50" dirty="0"/>
+              <a:t>.</a:t>
+            </a:r>
+          </a:p>
+          <a:p>
+            <a:pPr marL="892175" lvl="1" indent="-342900">
+              <a:lnSpc>
+                <a:spcPct val="150000"/>
+              </a:lnSpc>
+              <a:buFont typeface="Wingdings" panose="05000000000000000000" pitchFamily="2" charset="2"/>
+              <a:buChar char="ü"/>
+            </a:pPr>
+            <a:r>
+              <a:rPr lang="ko-KR" altLang="en-US" sz="1600" spc="-50" dirty="0"/>
+              <a:t>민간보험과는 달리 사회보험은 본인 외에도 고용주와 정부가 비용의 일부를 부담한다</a:t>
+            </a:r>
+            <a:r>
+              <a:rPr lang="en-US" altLang="ko-KR" sz="1600" spc="-50" dirty="0"/>
+              <a:t>.</a:t>
+            </a:r>
+          </a:p>
+          <a:p>
+            <a:pPr marL="892175" lvl="1" indent="-342900">
+              <a:lnSpc>
+                <a:spcPct val="150000"/>
+              </a:lnSpc>
+              <a:buFont typeface="Wingdings" panose="05000000000000000000" pitchFamily="2" charset="2"/>
+              <a:buChar char="ü"/>
+            </a:pPr>
+            <a:r>
+              <a:rPr lang="ko-KR" altLang="en-US" sz="1600" spc="-50" dirty="0"/>
+              <a:t>민간보험은 가입자가 낸 보험료와 혜택이 밀접한 관련을 갖는데 반해</a:t>
+            </a:r>
+            <a:r>
+              <a:rPr lang="en-US" altLang="ko-KR" sz="1600" spc="-50" dirty="0"/>
+              <a:t>, </a:t>
+            </a:r>
+            <a:r>
+              <a:rPr lang="ko-KR" altLang="en-US" sz="1600" spc="-50" dirty="0"/>
+              <a:t>사회보험은 소득의 재분배적 성격이 가미되어 사회적 정합성과 개인적 공평성을 고려한다</a:t>
+            </a:r>
+            <a:r>
+              <a:rPr lang="en-US" altLang="ko-KR" sz="1600" spc="-50" dirty="0"/>
+              <a:t>.</a:t>
+            </a:r>
+          </a:p>
+          <a:p>
+            <a:pPr marL="892175" lvl="1" indent="-342900">
+              <a:lnSpc>
+                <a:spcPct val="150000"/>
+              </a:lnSpc>
+              <a:buFont typeface="Wingdings" panose="05000000000000000000" pitchFamily="2" charset="2"/>
+              <a:buChar char="ü"/>
+            </a:pPr>
+            <a:r>
+              <a:rPr lang="en-US" altLang="ko-KR" sz="1600" spc="-50" dirty="0"/>
+              <a:t>https://www.4insure.or.kr/pbiz/feii/sinsDefIntroView.do</a:t>
+            </a:r>
+          </a:p>
+        </p:txBody>
+      </p:sp>
+    </p:spTree>
+    <p:extLst>
+      <p:ext uri="{BB962C8B-B14F-4D97-AF65-F5344CB8AC3E}">
+        <p14:creationId xmlns:p14="http://schemas.microsoft.com/office/powerpoint/2010/main" val="2724108605"/>
+      </p:ext>
+    </p:extLst>
+  </p:cSld>
+  <p:clrMapOvr>
+    <a:masterClrMapping/>
+  </p:clrMapOvr>
+</p:sld>
+</file>
+
+<file path=ppt/slides/slide50.xml><?xml version="1.0" encoding="utf-8"?>
 <p:sld xmlns:a="http://schemas.openxmlformats.org/drawingml/2006/main" xmlns:r="http://schemas.openxmlformats.org/officeDocument/2006/relationships" xmlns:p="http://schemas.openxmlformats.org/presentationml/2006/main">
   <p:cSld>
     <p:spTree>
@@ -22131,7 +23864,7 @@
           <a:p>
             <a:fld id="{109C872D-39A9-4065-8BF3-6A613116E2A1}" type="slidenum">
               <a:rPr lang="ko-KR" altLang="en-US" smtClean="0"/>
-              <a:t>46</a:t>
+              <a:t>50</a:t>
             </a:fld>
             <a:endParaRPr lang="ko-KR" altLang="en-US"/>
           </a:p>
@@ -22191,7 +23924,7 @@
 </p:sld>
 </file>
 
-<file path=ppt/slides/slide47.xml><?xml version="1.0" encoding="utf-8"?>
+<file path=ppt/slides/slide51.xml><?xml version="1.0" encoding="utf-8"?>
 <p:sld xmlns:a="http://schemas.openxmlformats.org/drawingml/2006/main" xmlns:r="http://schemas.openxmlformats.org/officeDocument/2006/relationships" xmlns:p="http://schemas.openxmlformats.org/presentationml/2006/main">
   <p:cSld>
     <p:spTree>
@@ -22265,7 +23998,7 @@
           <a:p>
             <a:fld id="{109C872D-39A9-4065-8BF3-6A613116E2A1}" type="slidenum">
               <a:rPr lang="ko-KR" altLang="en-US" smtClean="0"/>
-              <a:t>47</a:t>
+              <a:t>51</a:t>
             </a:fld>
             <a:endParaRPr lang="ko-KR" altLang="en-US"/>
           </a:p>
@@ -22529,7 +24262,7 @@
 </p:sld>
 </file>
 
-<file path=ppt/slides/slide48.xml><?xml version="1.0" encoding="utf-8"?>
+<file path=ppt/slides/slide52.xml><?xml version="1.0" encoding="utf-8"?>
 <p:sld xmlns:a="http://schemas.openxmlformats.org/drawingml/2006/main" xmlns:r="http://schemas.openxmlformats.org/officeDocument/2006/relationships" xmlns:p="http://schemas.openxmlformats.org/presentationml/2006/main">
   <p:cSld>
     <p:spTree>
@@ -22603,7 +24336,7 @@
           <a:p>
             <a:fld id="{109C872D-39A9-4065-8BF3-6A613116E2A1}" type="slidenum">
               <a:rPr lang="ko-KR" altLang="en-US" smtClean="0"/>
-              <a:t>48</a:t>
+              <a:t>52</a:t>
             </a:fld>
             <a:endParaRPr lang="ko-KR" altLang="en-US"/>
           </a:p>
@@ -23095,7 +24828,7 @@
 </p:sld>
 </file>
 
-<file path=ppt/slides/slide49.xml><?xml version="1.0" encoding="utf-8"?>
+<file path=ppt/slides/slide53.xml><?xml version="1.0" encoding="utf-8"?>
 <p:sld xmlns:a="http://schemas.openxmlformats.org/drawingml/2006/main" xmlns:r="http://schemas.openxmlformats.org/officeDocument/2006/relationships" xmlns:p="http://schemas.openxmlformats.org/presentationml/2006/main">
   <p:cSld>
     <p:spTree>
@@ -23169,7 +24902,7 @@
           <a:p>
             <a:fld id="{109C872D-39A9-4065-8BF3-6A613116E2A1}" type="slidenum">
               <a:rPr lang="ko-KR" altLang="en-US" smtClean="0"/>
-              <a:t>49</a:t>
+              <a:t>53</a:t>
             </a:fld>
             <a:endParaRPr lang="ko-KR" altLang="en-US"/>
           </a:p>
@@ -23358,376 +25091,7 @@
 </p:sld>
 </file>
 
-<file path=ppt/slides/slide5.xml><?xml version="1.0" encoding="utf-8"?>
-<p:sld xmlns:a="http://schemas.openxmlformats.org/drawingml/2006/main" xmlns:r="http://schemas.openxmlformats.org/officeDocument/2006/relationships" xmlns:p="http://schemas.openxmlformats.org/presentationml/2006/main">
-  <p:cSld>
-    <p:spTree>
-      <p:nvGrpSpPr>
-        <p:cNvPr id="1" name="">
-          <a:extLst>
-            <a:ext uri="{FF2B5EF4-FFF2-40B4-BE49-F238E27FC236}">
-              <a16:creationId xmlns:a16="http://schemas.microsoft.com/office/drawing/2014/main" id="{2A6177E6-2BE2-8810-F89F-48E53629EB8A}"/>
-            </a:ext>
-          </a:extLst>
-        </p:cNvPr>
-        <p:cNvGrpSpPr/>
-        <p:nvPr/>
-      </p:nvGrpSpPr>
-      <p:grpSpPr>
-        <a:xfrm>
-          <a:off x="0" y="0"/>
-          <a:ext cx="0" cy="0"/>
-          <a:chOff x="0" y="0"/>
-          <a:chExt cx="0" cy="0"/>
-        </a:xfrm>
-      </p:grpSpPr>
-      <p:sp>
-        <p:nvSpPr>
-          <p:cNvPr id="2" name="제목 1">
-            <a:extLst>
-              <a:ext uri="{FF2B5EF4-FFF2-40B4-BE49-F238E27FC236}">
-                <a16:creationId xmlns:a16="http://schemas.microsoft.com/office/drawing/2014/main" id="{BFA7A44D-A761-673A-4E43-DE33CE276613}"/>
-              </a:ext>
-            </a:extLst>
-          </p:cNvPr>
-          <p:cNvSpPr>
-            <a:spLocks noGrp="1"/>
-          </p:cNvSpPr>
-          <p:nvPr>
-            <p:ph type="title"/>
-          </p:nvPr>
-        </p:nvSpPr>
-        <p:spPr/>
-        <p:txBody>
-          <a:bodyPr/>
-          <a:lstStyle/>
-          <a:p>
-            <a:r>
-              <a:rPr lang="ko-KR" altLang="en-US" dirty="0"/>
-              <a:t>사회보험제도의 의미</a:t>
-            </a:r>
-          </a:p>
-        </p:txBody>
-      </p:sp>
-      <p:sp>
-        <p:nvSpPr>
-          <p:cNvPr id="4" name="슬라이드 번호 개체 틀 3">
-            <a:extLst>
-              <a:ext uri="{FF2B5EF4-FFF2-40B4-BE49-F238E27FC236}">
-                <a16:creationId xmlns:a16="http://schemas.microsoft.com/office/drawing/2014/main" id="{692F3803-4273-D729-E62C-66D07D9E6ABA}"/>
-              </a:ext>
-            </a:extLst>
-          </p:cNvPr>
-          <p:cNvSpPr>
-            <a:spLocks noGrp="1"/>
-          </p:cNvSpPr>
-          <p:nvPr>
-            <p:ph type="sldNum" sz="quarter" idx="12"/>
-          </p:nvPr>
-        </p:nvSpPr>
-        <p:spPr/>
-        <p:txBody>
-          <a:bodyPr/>
-          <a:lstStyle/>
-          <a:p>
-            <a:fld id="{109C872D-39A9-4065-8BF3-6A613116E2A1}" type="slidenum">
-              <a:rPr lang="ko-KR" altLang="en-US" smtClean="0"/>
-              <a:t>5</a:t>
-            </a:fld>
-            <a:endParaRPr lang="ko-KR" altLang="en-US"/>
-          </a:p>
-        </p:txBody>
-      </p:sp>
-      <p:sp>
-        <p:nvSpPr>
-          <p:cNvPr id="3" name="TextBox 2">
-            <a:extLst>
-              <a:ext uri="{FF2B5EF4-FFF2-40B4-BE49-F238E27FC236}">
-                <a16:creationId xmlns:a16="http://schemas.microsoft.com/office/drawing/2014/main" id="{91DCF3A8-8A08-DF37-1A5B-CD577B183587}"/>
-              </a:ext>
-            </a:extLst>
-          </p:cNvPr>
-          <p:cNvSpPr txBox="1"/>
-          <p:nvPr/>
-        </p:nvSpPr>
-        <p:spPr>
-          <a:xfrm>
-            <a:off x="288790" y="958844"/>
-            <a:ext cx="11250267" cy="5215338"/>
-          </a:xfrm>
-          <a:prstGeom prst="rect">
-            <a:avLst/>
-          </a:prstGeom>
-          <a:noFill/>
-        </p:spPr>
-        <p:txBody>
-          <a:bodyPr wrap="square" rtlCol="0" anchor="t">
-            <a:spAutoFit/>
-          </a:bodyPr>
-          <a:lstStyle/>
-          <a:p>
-            <a:pPr marL="434975" indent="-342900">
-              <a:lnSpc>
-                <a:spcPct val="150000"/>
-              </a:lnSpc>
-              <a:buFont typeface="+mj-lt"/>
-              <a:buAutoNum type="arabicPeriod" startAt="3"/>
-            </a:pPr>
-            <a:r>
-              <a:rPr lang="ko-KR" altLang="en-US" sz="1600" spc="-50" dirty="0"/>
-              <a:t>보험시장이 잘 작동한다 하더라도</a:t>
-            </a:r>
-            <a:r>
-              <a:rPr lang="en-US" altLang="ko-KR" sz="1600" spc="-50" dirty="0"/>
-              <a:t>, </a:t>
-            </a:r>
-            <a:r>
-              <a:rPr lang="ko-KR" altLang="en-US" sz="1600" spc="-50" dirty="0"/>
-              <a:t>사람들이 근시안적으로 행동하여 위험에 대한 대비가 소홀해질 수 있다</a:t>
-            </a:r>
-            <a:r>
-              <a:rPr lang="en-US" altLang="ko-KR" sz="1600" spc="-50" dirty="0"/>
-              <a:t>.</a:t>
-            </a:r>
-          </a:p>
-          <a:p>
-            <a:pPr marL="835025" lvl="1" indent="-285750">
-              <a:lnSpc>
-                <a:spcPct val="150000"/>
-              </a:lnSpc>
-              <a:buFont typeface="Wingdings" panose="05000000000000000000" pitchFamily="2" charset="2"/>
-              <a:buChar char="ü"/>
-            </a:pPr>
-            <a:r>
-              <a:rPr lang="ko-KR" altLang="en-US" sz="1600" spc="-50" dirty="0"/>
-              <a:t>사람들은 위험에 직면하게 될 것을 짐작함에도 불구하고</a:t>
-            </a:r>
-            <a:r>
-              <a:rPr lang="en-US" altLang="ko-KR" sz="1600" spc="-50" dirty="0"/>
-              <a:t>, </a:t>
-            </a:r>
-            <a:r>
-              <a:rPr lang="ko-KR" altLang="en-US" sz="1600" spc="-50" dirty="0"/>
-              <a:t>당장 보험료가 아까워 보험에 가입하지 않을 수 있다</a:t>
-            </a:r>
-            <a:r>
-              <a:rPr lang="en-US" altLang="ko-KR" sz="1600" spc="-50" dirty="0"/>
-              <a:t>.</a:t>
-            </a:r>
-          </a:p>
-          <a:p>
-            <a:pPr marL="1292225" lvl="2" indent="-285750">
-              <a:lnSpc>
-                <a:spcPct val="150000"/>
-              </a:lnSpc>
-              <a:buFont typeface="Wingdings" panose="05000000000000000000" pitchFamily="2" charset="2"/>
-              <a:buChar char="Ø"/>
-            </a:pPr>
-            <a:r>
-              <a:rPr lang="ko-KR" altLang="en-US" sz="1600" spc="-50" dirty="0"/>
-              <a:t>사소한 경우라면 무방할 수 있지만</a:t>
-            </a:r>
-            <a:r>
-              <a:rPr lang="en-US" altLang="ko-KR" sz="1600" spc="-50" dirty="0"/>
-              <a:t>, </a:t>
-            </a:r>
-            <a:r>
-              <a:rPr lang="ko-KR" altLang="en-US" sz="1600" spc="-50" dirty="0"/>
-              <a:t>생계 자체가 위협을 받게 되는 위험이라면 정부가 개입할 필요가 생긴다</a:t>
-            </a:r>
-            <a:r>
-              <a:rPr lang="en-US" altLang="ko-KR" sz="1600" spc="-50" dirty="0"/>
-              <a:t>.</a:t>
-            </a:r>
-          </a:p>
-          <a:p>
-            <a:pPr marL="434975" indent="-342900">
-              <a:lnSpc>
-                <a:spcPct val="150000"/>
-              </a:lnSpc>
-              <a:buFont typeface="+mj-lt"/>
-              <a:buAutoNum type="arabicPeriod" startAt="3"/>
-            </a:pPr>
-            <a:r>
-              <a:rPr lang="ko-KR" altLang="en-US" sz="1600" spc="-50" dirty="0"/>
-              <a:t>어떤 상품의 경우에는 모든 국민이 고루 누릴 수 있어야 하는 상품 평등주의 관점에서 정부가 개입할 필요가 있다</a:t>
-            </a:r>
-            <a:r>
-              <a:rPr lang="en-US" altLang="ko-KR" sz="1600" spc="-50" dirty="0"/>
-              <a:t>.</a:t>
-            </a:r>
-          </a:p>
-          <a:p>
-            <a:pPr marL="892175" lvl="1" indent="-342900">
-              <a:lnSpc>
-                <a:spcPct val="150000"/>
-              </a:lnSpc>
-              <a:buFont typeface="Wingdings" panose="05000000000000000000" pitchFamily="2" charset="2"/>
-              <a:buChar char="ü"/>
-            </a:pPr>
-            <a:r>
-              <a:rPr lang="ko-KR" altLang="en-US" sz="1600" spc="-50" dirty="0"/>
-              <a:t>아픈 사람은 소득과 관계없이 의료서비스 혜택을 누릴 수 있어야 한다</a:t>
-            </a:r>
-            <a:r>
-              <a:rPr lang="en-US" altLang="ko-KR" sz="1600" spc="-50" dirty="0"/>
-              <a:t>.</a:t>
-            </a:r>
-          </a:p>
-          <a:p>
-            <a:pPr marL="1349375" lvl="2" indent="-342900">
-              <a:lnSpc>
-                <a:spcPct val="150000"/>
-              </a:lnSpc>
-              <a:buFont typeface="Wingdings" panose="05000000000000000000" pitchFamily="2" charset="2"/>
-              <a:buChar char="Ø"/>
-            </a:pPr>
-            <a:r>
-              <a:rPr lang="ko-KR" altLang="en-US" sz="1600" spc="-50" dirty="0"/>
-              <a:t>민간부문이 모든 의료보험을 운영하고 있다면</a:t>
-            </a:r>
-            <a:r>
-              <a:rPr lang="en-US" altLang="ko-KR" sz="1600" spc="-50" dirty="0"/>
-              <a:t>, </a:t>
-            </a:r>
-            <a:r>
-              <a:rPr lang="ko-KR" altLang="en-US" sz="1600" spc="-50" dirty="0"/>
-              <a:t>돈이 없어서 치료 받지 못하는 사람이 생길 수 있다</a:t>
-            </a:r>
-            <a:r>
-              <a:rPr lang="en-US" altLang="ko-KR" sz="1600" spc="-50" dirty="0"/>
-              <a:t>.</a:t>
-            </a:r>
-          </a:p>
-          <a:p>
-            <a:pPr marL="1349375" lvl="2" indent="-342900">
-              <a:lnSpc>
-                <a:spcPct val="150000"/>
-              </a:lnSpc>
-              <a:buFont typeface="Wingdings" panose="05000000000000000000" pitchFamily="2" charset="2"/>
-              <a:buChar char="Ø"/>
-            </a:pPr>
-            <a:endParaRPr lang="en-US" altLang="ko-KR" sz="1600" spc="-50" dirty="0"/>
-          </a:p>
-          <a:p>
-            <a:pPr marL="434975" indent="-342900">
-              <a:lnSpc>
-                <a:spcPct val="150000"/>
-              </a:lnSpc>
-              <a:buFont typeface="Arial" panose="020B0604020202020204" pitchFamily="34" charset="0"/>
-              <a:buChar char="•"/>
-            </a:pPr>
-            <a:r>
-              <a:rPr lang="ko-KR" altLang="en-US" sz="1600" spc="-50" dirty="0"/>
-              <a:t>정부가 운영하는 사회보험은 민간부문의 보험과 여러 측면에서 차이를 갖는다</a:t>
-            </a:r>
-            <a:r>
-              <a:rPr lang="en-US" altLang="ko-KR" sz="1600" spc="-50" dirty="0"/>
-              <a:t>.</a:t>
-            </a:r>
-          </a:p>
-          <a:p>
-            <a:pPr marL="892175" lvl="1" indent="-342900">
-              <a:lnSpc>
-                <a:spcPct val="150000"/>
-              </a:lnSpc>
-              <a:buFont typeface="Wingdings" panose="05000000000000000000" pitchFamily="2" charset="2"/>
-              <a:buChar char="ü"/>
-            </a:pPr>
-            <a:r>
-              <a:rPr lang="ko-KR" altLang="en-US" sz="1600" spc="-50" dirty="0"/>
-              <a:t>사회보험은 강제성을 가진다</a:t>
-            </a:r>
-            <a:endParaRPr lang="en-US" altLang="ko-KR" sz="1600" spc="-50" dirty="0"/>
-          </a:p>
-          <a:p>
-            <a:pPr marL="1349375" lvl="2" indent="-342900">
-              <a:lnSpc>
-                <a:spcPct val="150000"/>
-              </a:lnSpc>
-              <a:buFont typeface="Wingdings" panose="05000000000000000000" pitchFamily="2" charset="2"/>
-              <a:buChar char="Ø"/>
-            </a:pPr>
-            <a:r>
-              <a:rPr lang="ko-KR" altLang="en-US" sz="1600" spc="-50" dirty="0"/>
-              <a:t>일정한 조건을 갖춘 국민이면 반드시 사회보험에 가입하도록 되어 있다</a:t>
-            </a:r>
-            <a:r>
-              <a:rPr lang="en-US" altLang="ko-KR" sz="1600" spc="-50" dirty="0"/>
-              <a:t>.</a:t>
-            </a:r>
-          </a:p>
-          <a:p>
-            <a:pPr marL="892175" lvl="1" indent="-342900">
-              <a:lnSpc>
-                <a:spcPct val="150000"/>
-              </a:lnSpc>
-              <a:buFont typeface="Wingdings" panose="05000000000000000000" pitchFamily="2" charset="2"/>
-              <a:buChar char="ü"/>
-            </a:pPr>
-            <a:r>
-              <a:rPr lang="ko-KR" altLang="en-US" sz="1600" spc="-50" dirty="0"/>
-              <a:t>민간보험과는 달리 사회보험은 본인 외에도 고용주와 정부가 비용의 일부를 부담한다</a:t>
-            </a:r>
-            <a:r>
-              <a:rPr lang="en-US" altLang="ko-KR" sz="1600" spc="-50" dirty="0"/>
-              <a:t>.</a:t>
-            </a:r>
-          </a:p>
-          <a:p>
-            <a:pPr marL="892175" lvl="1" indent="-342900">
-              <a:lnSpc>
-                <a:spcPct val="150000"/>
-              </a:lnSpc>
-              <a:buFont typeface="Wingdings" panose="05000000000000000000" pitchFamily="2" charset="2"/>
-              <a:buChar char="ü"/>
-            </a:pPr>
-            <a:r>
-              <a:rPr lang="ko-KR" altLang="en-US" sz="1600" spc="-50" dirty="0"/>
-              <a:t>민간보험은 가입자가 낸 보험료와 혜택이 밀접한 관련을 갖는데 반해</a:t>
-            </a:r>
-            <a:r>
-              <a:rPr lang="en-US" altLang="ko-KR" sz="1600" spc="-50" dirty="0"/>
-              <a:t>, </a:t>
-            </a:r>
-            <a:r>
-              <a:rPr lang="ko-KR" altLang="en-US" sz="1600" spc="-50" dirty="0"/>
-              <a:t>사회보험은 소득의 재분배적 성격이 가미되어 사회적 정합성과 개인적 공평성을 고려한다</a:t>
-            </a:r>
-            <a:r>
-              <a:rPr lang="en-US" altLang="ko-KR" sz="1600" spc="-50" dirty="0"/>
-              <a:t>.</a:t>
-            </a:r>
-          </a:p>
-          <a:p>
-            <a:pPr marL="892175" lvl="1" indent="-342900">
-              <a:lnSpc>
-                <a:spcPct val="150000"/>
-              </a:lnSpc>
-              <a:buFont typeface="Wingdings" panose="05000000000000000000" pitchFamily="2" charset="2"/>
-              <a:buChar char="ü"/>
-            </a:pPr>
-            <a:r>
-              <a:rPr lang="en-US" altLang="ko-KR" sz="1600" spc="-50" dirty="0"/>
-              <a:t>https://www.4insure.or.kr/pbiz/feii/sinsDefIntroView.do</a:t>
-            </a:r>
-          </a:p>
-        </p:txBody>
-      </p:sp>
-    </p:spTree>
-    <p:extLst>
-      <p:ext uri="{BB962C8B-B14F-4D97-AF65-F5344CB8AC3E}">
-        <p14:creationId xmlns:p14="http://schemas.microsoft.com/office/powerpoint/2010/main" val="2724108605"/>
-      </p:ext>
-    </p:extLst>
-  </p:cSld>
-  <p:clrMapOvr>
-    <a:masterClrMapping/>
-  </p:clrMapOvr>
-</p:sld>
-</file>
-
-<file path=ppt/slides/slide50.xml><?xml version="1.0" encoding="utf-8"?>
+<file path=ppt/slides/slide54.xml><?xml version="1.0" encoding="utf-8"?>
 <p:sld xmlns:a="http://schemas.openxmlformats.org/drawingml/2006/main" xmlns:r="http://schemas.openxmlformats.org/officeDocument/2006/relationships" xmlns:p="http://schemas.openxmlformats.org/presentationml/2006/main">
   <p:cSld>
     <p:spTree>
@@ -23801,7 +25165,7 @@
           <a:p>
             <a:fld id="{109C872D-39A9-4065-8BF3-6A613116E2A1}" type="slidenum">
               <a:rPr lang="ko-KR" altLang="en-US" smtClean="0"/>
-              <a:t>50</a:t>
+              <a:t>54</a:t>
             </a:fld>
             <a:endParaRPr lang="ko-KR" altLang="en-US"/>
           </a:p>
@@ -23995,7 +25359,7 @@
 </p:sld>
 </file>
 
-<file path=ppt/slides/slide51.xml><?xml version="1.0" encoding="utf-8"?>
+<file path=ppt/slides/slide55.xml><?xml version="1.0" encoding="utf-8"?>
 <p:sld xmlns:a="http://schemas.openxmlformats.org/drawingml/2006/main" xmlns:r="http://schemas.openxmlformats.org/officeDocument/2006/relationships" xmlns:p="http://schemas.openxmlformats.org/presentationml/2006/main">
   <p:cSld>
     <p:spTree>
@@ -24069,7 +25433,7 @@
           <a:p>
             <a:fld id="{109C872D-39A9-4065-8BF3-6A613116E2A1}" type="slidenum">
               <a:rPr lang="ko-KR" altLang="en-US" smtClean="0"/>
-              <a:t>51</a:t>
+              <a:t>55</a:t>
             </a:fld>
             <a:endParaRPr lang="ko-KR" altLang="en-US"/>
           </a:p>
@@ -24259,7 +25623,7 @@
 </p:sld>
 </file>
 
-<file path=ppt/slides/slide52.xml><?xml version="1.0" encoding="utf-8"?>
+<file path=ppt/slides/slide56.xml><?xml version="1.0" encoding="utf-8"?>
 <p:sld xmlns:a="http://schemas.openxmlformats.org/drawingml/2006/main" xmlns:r="http://schemas.openxmlformats.org/officeDocument/2006/relationships" xmlns:p="http://schemas.openxmlformats.org/presentationml/2006/main">
   <p:cSld>
     <p:spTree>
@@ -24342,7 +25706,7 @@
           <a:p>
             <a:fld id="{109C872D-39A9-4065-8BF3-6A613116E2A1}" type="slidenum">
               <a:rPr lang="ko-KR" altLang="en-US" smtClean="0"/>
-              <a:t>52</a:t>
+              <a:t>56</a:t>
             </a:fld>
             <a:endParaRPr lang="ko-KR" altLang="en-US"/>
           </a:p>
@@ -24406,7 +25770,7 @@
 </p:sld>
 </file>
 
-<file path=ppt/slides/slide53.xml><?xml version="1.0" encoding="utf-8"?>
+<file path=ppt/slides/slide57.xml><?xml version="1.0" encoding="utf-8"?>
 <p:sld xmlns:a="http://schemas.openxmlformats.org/drawingml/2006/main" xmlns:r="http://schemas.openxmlformats.org/officeDocument/2006/relationships" xmlns:p="http://schemas.openxmlformats.org/presentationml/2006/main">
   <p:cSld>
     <p:spTree>
@@ -24480,7 +25844,7 @@
           <a:p>
             <a:fld id="{109C872D-39A9-4065-8BF3-6A613116E2A1}" type="slidenum">
               <a:rPr lang="ko-KR" altLang="en-US" smtClean="0"/>
-              <a:t>53</a:t>
+              <a:t>57</a:t>
             </a:fld>
             <a:endParaRPr lang="ko-KR" altLang="en-US"/>
           </a:p>
@@ -24810,7 +26174,7 @@
 </p:sld>
 </file>
 
-<file path=ppt/slides/slide54.xml><?xml version="1.0" encoding="utf-8"?>
+<file path=ppt/slides/slide58.xml><?xml version="1.0" encoding="utf-8"?>
 <p:sld xmlns:a="http://schemas.openxmlformats.org/drawingml/2006/main" xmlns:r="http://schemas.openxmlformats.org/officeDocument/2006/relationships" xmlns:p="http://schemas.openxmlformats.org/presentationml/2006/main">
   <p:cSld>
     <p:spTree>
@@ -24938,7 +26302,7 @@
           <a:p>
             <a:fld id="{109C872D-39A9-4065-8BF3-6A613116E2A1}" type="slidenum">
               <a:rPr lang="ko-KR" altLang="en-US" smtClean="0"/>
-              <a:t>54</a:t>
+              <a:t>58</a:t>
             </a:fld>
             <a:endParaRPr lang="ko-KR" altLang="en-US"/>
           </a:p>

--- a/재정학/01_Lectures/재정학_Chapter_10.pptx
+++ b/재정학/01_Lectures/재정학_Chapter_10.pptx
@@ -5,7 +5,7 @@
     <p:sldMasterId id="2147483648" r:id="rId1"/>
   </p:sldMasterIdLst>
   <p:notesMasterIdLst>
-    <p:notesMasterId r:id="rId60"/>
+    <p:notesMasterId r:id="rId63"/>
   </p:notesMasterIdLst>
   <p:sldIdLst>
     <p:sldId id="375" r:id="rId2"/>
@@ -37,35 +37,38 @@
     <p:sldId id="778" r:id="rId28"/>
     <p:sldId id="755" r:id="rId29"/>
     <p:sldId id="779" r:id="rId30"/>
-    <p:sldId id="756" r:id="rId31"/>
-    <p:sldId id="757" r:id="rId32"/>
-    <p:sldId id="729" r:id="rId33"/>
-    <p:sldId id="730" r:id="rId34"/>
-    <p:sldId id="731" r:id="rId35"/>
-    <p:sldId id="726" r:id="rId36"/>
-    <p:sldId id="732" r:id="rId37"/>
-    <p:sldId id="733" r:id="rId38"/>
-    <p:sldId id="734" r:id="rId39"/>
-    <p:sldId id="735" r:id="rId40"/>
-    <p:sldId id="736" r:id="rId41"/>
-    <p:sldId id="737" r:id="rId42"/>
-    <p:sldId id="738" r:id="rId43"/>
-    <p:sldId id="739" r:id="rId44"/>
-    <p:sldId id="740" r:id="rId45"/>
-    <p:sldId id="741" r:id="rId46"/>
-    <p:sldId id="742" r:id="rId47"/>
-    <p:sldId id="743" r:id="rId48"/>
-    <p:sldId id="744" r:id="rId49"/>
-    <p:sldId id="745" r:id="rId50"/>
-    <p:sldId id="727" r:id="rId51"/>
-    <p:sldId id="746" r:id="rId52"/>
-    <p:sldId id="747" r:id="rId53"/>
-    <p:sldId id="748" r:id="rId54"/>
-    <p:sldId id="749" r:id="rId55"/>
-    <p:sldId id="750" r:id="rId56"/>
-    <p:sldId id="728" r:id="rId57"/>
-    <p:sldId id="751" r:id="rId58"/>
-    <p:sldId id="364" r:id="rId59"/>
+    <p:sldId id="780" r:id="rId31"/>
+    <p:sldId id="781" r:id="rId32"/>
+    <p:sldId id="782" r:id="rId33"/>
+    <p:sldId id="756" r:id="rId34"/>
+    <p:sldId id="757" r:id="rId35"/>
+    <p:sldId id="729" r:id="rId36"/>
+    <p:sldId id="730" r:id="rId37"/>
+    <p:sldId id="731" r:id="rId38"/>
+    <p:sldId id="726" r:id="rId39"/>
+    <p:sldId id="732" r:id="rId40"/>
+    <p:sldId id="733" r:id="rId41"/>
+    <p:sldId id="734" r:id="rId42"/>
+    <p:sldId id="735" r:id="rId43"/>
+    <p:sldId id="736" r:id="rId44"/>
+    <p:sldId id="737" r:id="rId45"/>
+    <p:sldId id="738" r:id="rId46"/>
+    <p:sldId id="739" r:id="rId47"/>
+    <p:sldId id="740" r:id="rId48"/>
+    <p:sldId id="741" r:id="rId49"/>
+    <p:sldId id="742" r:id="rId50"/>
+    <p:sldId id="743" r:id="rId51"/>
+    <p:sldId id="744" r:id="rId52"/>
+    <p:sldId id="745" r:id="rId53"/>
+    <p:sldId id="727" r:id="rId54"/>
+    <p:sldId id="746" r:id="rId55"/>
+    <p:sldId id="747" r:id="rId56"/>
+    <p:sldId id="748" r:id="rId57"/>
+    <p:sldId id="749" r:id="rId58"/>
+    <p:sldId id="750" r:id="rId59"/>
+    <p:sldId id="728" r:id="rId60"/>
+    <p:sldId id="751" r:id="rId61"/>
+    <p:sldId id="364" r:id="rId62"/>
   </p:sldIdLst>
   <p:sldSz cx="12192000" cy="6858000"/>
   <p:notesSz cx="6858000" cy="9144000"/>
@@ -276,7 +279,7 @@
           <a:p>
             <a:fld id="{4A5E00EF-AEA4-43E2-9451-8F9C59A39471}" type="datetimeFigureOut">
               <a:rPr lang="ko-KR" altLang="en-US" smtClean="0"/>
-              <a:t>2026-04-07</a:t>
+              <a:t>2026-05-20</a:t>
             </a:fld>
             <a:endParaRPr lang="ko-KR" altLang="en-US"/>
           </a:p>
@@ -543,6 +546,306 @@
 </p:notesMaster>
 </file>
 
+<file path=ppt/notesSlides/notesSlide1.xml><?xml version="1.0" encoding="utf-8"?>
+<p:notes xmlns:a="http://schemas.openxmlformats.org/drawingml/2006/main" xmlns:r="http://schemas.openxmlformats.org/officeDocument/2006/relationships" xmlns:p="http://schemas.openxmlformats.org/presentationml/2006/main">
+  <p:cSld>
+    <p:spTree>
+      <p:nvGrpSpPr>
+        <p:cNvPr id="1" name=""/>
+        <p:cNvGrpSpPr/>
+        <p:nvPr/>
+      </p:nvGrpSpPr>
+      <p:grpSpPr>
+        <a:xfrm>
+          <a:off x="0" y="0"/>
+          <a:ext cx="0" cy="0"/>
+          <a:chOff x="0" y="0"/>
+          <a:chExt cx="0" cy="0"/>
+        </a:xfrm>
+      </p:grpSpPr>
+      <p:sp>
+        <p:nvSpPr>
+          <p:cNvPr id="2" name="슬라이드 이미지 개체 틀 1"/>
+          <p:cNvSpPr>
+            <a:spLocks noGrp="1" noRot="1" noChangeAspect="1"/>
+          </p:cNvSpPr>
+          <p:nvPr>
+            <p:ph type="sldImg"/>
+          </p:nvPr>
+        </p:nvSpPr>
+        <p:spPr/>
+      </p:sp>
+      <p:sp>
+        <p:nvSpPr>
+          <p:cNvPr id="3" name="슬라이드 노트 개체 틀 2"/>
+          <p:cNvSpPr>
+            <a:spLocks noGrp="1"/>
+          </p:cNvSpPr>
+          <p:nvPr>
+            <p:ph type="body" idx="1"/>
+          </p:nvPr>
+        </p:nvSpPr>
+        <p:spPr/>
+        <p:txBody>
+          <a:bodyPr/>
+          <a:lstStyle/>
+          <a:p>
+            <a:endParaRPr lang="ko-KR" altLang="en-US" dirty="0"/>
+          </a:p>
+        </p:txBody>
+      </p:sp>
+      <p:sp>
+        <p:nvSpPr>
+          <p:cNvPr id="4" name="슬라이드 번호 개체 틀 3"/>
+          <p:cNvSpPr>
+            <a:spLocks noGrp="1"/>
+          </p:cNvSpPr>
+          <p:nvPr>
+            <p:ph type="sldNum" sz="quarter" idx="5"/>
+          </p:nvPr>
+        </p:nvSpPr>
+        <p:spPr/>
+        <p:txBody>
+          <a:bodyPr/>
+          <a:lstStyle/>
+          <a:p>
+            <a:fld id="{D6183C86-FCDD-4CD4-A668-4DF0BEDE3EB5}" type="slidenum">
+              <a:rPr lang="ko-KR" altLang="en-US" smtClean="0"/>
+              <a:t>30</a:t>
+            </a:fld>
+            <a:endParaRPr lang="ko-KR" altLang="en-US"/>
+          </a:p>
+        </p:txBody>
+      </p:sp>
+    </p:spTree>
+    <p:extLst>
+      <p:ext uri="{BB962C8B-B14F-4D97-AF65-F5344CB8AC3E}">
+        <p14:creationId xmlns:p14="http://schemas.microsoft.com/office/powerpoint/2010/main" val="1461159588"/>
+      </p:ext>
+    </p:extLst>
+  </p:cSld>
+  <p:clrMapOvr>
+    <a:masterClrMapping/>
+  </p:clrMapOvr>
+</p:notes>
+</file>
+
+<file path=ppt/notesSlides/notesSlide2.xml><?xml version="1.0" encoding="utf-8"?>
+<p:notes xmlns:a="http://schemas.openxmlformats.org/drawingml/2006/main" xmlns:r="http://schemas.openxmlformats.org/officeDocument/2006/relationships" xmlns:p="http://schemas.openxmlformats.org/presentationml/2006/main">
+  <p:cSld>
+    <p:spTree>
+      <p:nvGrpSpPr>
+        <p:cNvPr id="1" name="">
+          <a:extLst>
+            <a:ext uri="{FF2B5EF4-FFF2-40B4-BE49-F238E27FC236}">
+              <a16:creationId xmlns:a16="http://schemas.microsoft.com/office/drawing/2014/main" id="{84F1ECDA-1170-E0DC-18EB-393978A3CCB9}"/>
+            </a:ext>
+          </a:extLst>
+        </p:cNvPr>
+        <p:cNvGrpSpPr/>
+        <p:nvPr/>
+      </p:nvGrpSpPr>
+      <p:grpSpPr>
+        <a:xfrm>
+          <a:off x="0" y="0"/>
+          <a:ext cx="0" cy="0"/>
+          <a:chOff x="0" y="0"/>
+          <a:chExt cx="0" cy="0"/>
+        </a:xfrm>
+      </p:grpSpPr>
+      <p:sp>
+        <p:nvSpPr>
+          <p:cNvPr id="2" name="슬라이드 이미지 개체 틀 1">
+            <a:extLst>
+              <a:ext uri="{FF2B5EF4-FFF2-40B4-BE49-F238E27FC236}">
+                <a16:creationId xmlns:a16="http://schemas.microsoft.com/office/drawing/2014/main" id="{986AE6AC-0AE5-31E3-E057-50C7BF7BE91D}"/>
+              </a:ext>
+            </a:extLst>
+          </p:cNvPr>
+          <p:cNvSpPr>
+            <a:spLocks noGrp="1" noRot="1" noChangeAspect="1"/>
+          </p:cNvSpPr>
+          <p:nvPr>
+            <p:ph type="sldImg"/>
+          </p:nvPr>
+        </p:nvSpPr>
+        <p:spPr/>
+      </p:sp>
+      <p:sp>
+        <p:nvSpPr>
+          <p:cNvPr id="3" name="슬라이드 노트 개체 틀 2">
+            <a:extLst>
+              <a:ext uri="{FF2B5EF4-FFF2-40B4-BE49-F238E27FC236}">
+                <a16:creationId xmlns:a16="http://schemas.microsoft.com/office/drawing/2014/main" id="{D2CEBE2D-87CC-2D85-0BDE-402B795B2C33}"/>
+              </a:ext>
+            </a:extLst>
+          </p:cNvPr>
+          <p:cNvSpPr>
+            <a:spLocks noGrp="1"/>
+          </p:cNvSpPr>
+          <p:nvPr>
+            <p:ph type="body" idx="1"/>
+          </p:nvPr>
+        </p:nvSpPr>
+        <p:spPr/>
+        <p:txBody>
+          <a:bodyPr/>
+          <a:lstStyle/>
+          <a:p>
+            <a:endParaRPr lang="ko-KR" altLang="en-US" dirty="0"/>
+          </a:p>
+        </p:txBody>
+      </p:sp>
+      <p:sp>
+        <p:nvSpPr>
+          <p:cNvPr id="4" name="슬라이드 번호 개체 틀 3">
+            <a:extLst>
+              <a:ext uri="{FF2B5EF4-FFF2-40B4-BE49-F238E27FC236}">
+                <a16:creationId xmlns:a16="http://schemas.microsoft.com/office/drawing/2014/main" id="{DFCCDC17-813B-259A-29C4-D45934ADB95F}"/>
+              </a:ext>
+            </a:extLst>
+          </p:cNvPr>
+          <p:cNvSpPr>
+            <a:spLocks noGrp="1"/>
+          </p:cNvSpPr>
+          <p:nvPr>
+            <p:ph type="sldNum" sz="quarter" idx="5"/>
+          </p:nvPr>
+        </p:nvSpPr>
+        <p:spPr/>
+        <p:txBody>
+          <a:bodyPr/>
+          <a:lstStyle/>
+          <a:p>
+            <a:fld id="{D6183C86-FCDD-4CD4-A668-4DF0BEDE3EB5}" type="slidenum">
+              <a:rPr lang="ko-KR" altLang="en-US" smtClean="0"/>
+              <a:t>31</a:t>
+            </a:fld>
+            <a:endParaRPr lang="ko-KR" altLang="en-US"/>
+          </a:p>
+        </p:txBody>
+      </p:sp>
+    </p:spTree>
+    <p:extLst>
+      <p:ext uri="{BB962C8B-B14F-4D97-AF65-F5344CB8AC3E}">
+        <p14:creationId xmlns:p14="http://schemas.microsoft.com/office/powerpoint/2010/main" val="856198472"/>
+      </p:ext>
+    </p:extLst>
+  </p:cSld>
+  <p:clrMapOvr>
+    <a:masterClrMapping/>
+  </p:clrMapOvr>
+</p:notes>
+</file>
+
+<file path=ppt/notesSlides/notesSlide3.xml><?xml version="1.0" encoding="utf-8"?>
+<p:notes xmlns:a="http://schemas.openxmlformats.org/drawingml/2006/main" xmlns:r="http://schemas.openxmlformats.org/officeDocument/2006/relationships" xmlns:p="http://schemas.openxmlformats.org/presentationml/2006/main">
+  <p:cSld>
+    <p:spTree>
+      <p:nvGrpSpPr>
+        <p:cNvPr id="1" name="">
+          <a:extLst>
+            <a:ext uri="{FF2B5EF4-FFF2-40B4-BE49-F238E27FC236}">
+              <a16:creationId xmlns:a16="http://schemas.microsoft.com/office/drawing/2014/main" id="{F632BA03-DA04-13B3-8550-BA1E2F82ECF7}"/>
+            </a:ext>
+          </a:extLst>
+        </p:cNvPr>
+        <p:cNvGrpSpPr/>
+        <p:nvPr/>
+      </p:nvGrpSpPr>
+      <p:grpSpPr>
+        <a:xfrm>
+          <a:off x="0" y="0"/>
+          <a:ext cx="0" cy="0"/>
+          <a:chOff x="0" y="0"/>
+          <a:chExt cx="0" cy="0"/>
+        </a:xfrm>
+      </p:grpSpPr>
+      <p:sp>
+        <p:nvSpPr>
+          <p:cNvPr id="2" name="슬라이드 이미지 개체 틀 1">
+            <a:extLst>
+              <a:ext uri="{FF2B5EF4-FFF2-40B4-BE49-F238E27FC236}">
+                <a16:creationId xmlns:a16="http://schemas.microsoft.com/office/drawing/2014/main" id="{DB190253-2E7A-09AA-C55A-19C58099F321}"/>
+              </a:ext>
+            </a:extLst>
+          </p:cNvPr>
+          <p:cNvSpPr>
+            <a:spLocks noGrp="1" noRot="1" noChangeAspect="1"/>
+          </p:cNvSpPr>
+          <p:nvPr>
+            <p:ph type="sldImg"/>
+          </p:nvPr>
+        </p:nvSpPr>
+        <p:spPr/>
+      </p:sp>
+      <p:sp>
+        <p:nvSpPr>
+          <p:cNvPr id="3" name="슬라이드 노트 개체 틀 2">
+            <a:extLst>
+              <a:ext uri="{FF2B5EF4-FFF2-40B4-BE49-F238E27FC236}">
+                <a16:creationId xmlns:a16="http://schemas.microsoft.com/office/drawing/2014/main" id="{02C59E29-782A-A96F-19CA-2C375632E583}"/>
+              </a:ext>
+            </a:extLst>
+          </p:cNvPr>
+          <p:cNvSpPr>
+            <a:spLocks noGrp="1"/>
+          </p:cNvSpPr>
+          <p:nvPr>
+            <p:ph type="body" idx="1"/>
+          </p:nvPr>
+        </p:nvSpPr>
+        <p:spPr/>
+        <p:txBody>
+          <a:bodyPr/>
+          <a:lstStyle/>
+          <a:p>
+            <a:endParaRPr lang="ko-KR" altLang="en-US" dirty="0"/>
+          </a:p>
+        </p:txBody>
+      </p:sp>
+      <p:sp>
+        <p:nvSpPr>
+          <p:cNvPr id="4" name="슬라이드 번호 개체 틀 3">
+            <a:extLst>
+              <a:ext uri="{FF2B5EF4-FFF2-40B4-BE49-F238E27FC236}">
+                <a16:creationId xmlns:a16="http://schemas.microsoft.com/office/drawing/2014/main" id="{B53FE328-F92A-2CA0-15CA-AEDCBE44900E}"/>
+              </a:ext>
+            </a:extLst>
+          </p:cNvPr>
+          <p:cNvSpPr>
+            <a:spLocks noGrp="1"/>
+          </p:cNvSpPr>
+          <p:nvPr>
+            <p:ph type="sldNum" sz="quarter" idx="5"/>
+          </p:nvPr>
+        </p:nvSpPr>
+        <p:spPr/>
+        <p:txBody>
+          <a:bodyPr/>
+          <a:lstStyle/>
+          <a:p>
+            <a:fld id="{D6183C86-FCDD-4CD4-A668-4DF0BEDE3EB5}" type="slidenum">
+              <a:rPr lang="ko-KR" altLang="en-US" smtClean="0"/>
+              <a:t>32</a:t>
+            </a:fld>
+            <a:endParaRPr lang="ko-KR" altLang="en-US"/>
+          </a:p>
+        </p:txBody>
+      </p:sp>
+    </p:spTree>
+    <p:extLst>
+      <p:ext uri="{BB962C8B-B14F-4D97-AF65-F5344CB8AC3E}">
+        <p14:creationId xmlns:p14="http://schemas.microsoft.com/office/powerpoint/2010/main" val="2541434599"/>
+      </p:ext>
+    </p:extLst>
+  </p:cSld>
+  <p:clrMapOvr>
+    <a:masterClrMapping/>
+  </p:clrMapOvr>
+</p:notes>
+</file>
+
 <file path=ppt/slideLayouts/slideLayout1.xml><?xml version="1.0" encoding="utf-8"?>
 <p:sldLayout xmlns:a="http://schemas.openxmlformats.org/drawingml/2006/main" xmlns:r="http://schemas.openxmlformats.org/officeDocument/2006/relationships" xmlns:p="http://schemas.openxmlformats.org/presentationml/2006/main" showMasterSp="0" type="title" preserve="1">
   <p:cSld name="제목 슬라이드">
@@ -698,7 +1001,7 @@
           <a:p>
             <a:fld id="{CD32C56F-BD27-4999-9E6D-D4EACE3DA9F4}" type="datetime1">
               <a:rPr lang="ko-KR" altLang="en-US" smtClean="0"/>
-              <a:t>2026-04-07</a:t>
+              <a:t>2026-05-20</a:t>
             </a:fld>
             <a:endParaRPr lang="ko-KR" altLang="en-US"/>
           </a:p>
@@ -912,7 +1215,7 @@
           <a:p>
             <a:fld id="{8EF4A19C-72C8-45CA-8E3F-68A7FA345D6C}" type="datetime1">
               <a:rPr lang="ko-KR" altLang="en-US" smtClean="0"/>
-              <a:t>2026-04-07</a:t>
+              <a:t>2026-05-20</a:t>
             </a:fld>
             <a:endParaRPr lang="ko-KR" altLang="en-US"/>
           </a:p>
@@ -1136,7 +1439,7 @@
           <a:p>
             <a:fld id="{56A175B2-010B-4341-954C-5F8F5C70B124}" type="datetime1">
               <a:rPr lang="ko-KR" altLang="en-US" smtClean="0"/>
-              <a:t>2026-04-07</a:t>
+              <a:t>2026-05-20</a:t>
             </a:fld>
             <a:endParaRPr lang="ko-KR" altLang="en-US"/>
           </a:p>
@@ -1350,7 +1653,7 @@
           <a:p>
             <a:fld id="{16B83F9E-22C9-45CA-9E85-070F1D3EF530}" type="datetime1">
               <a:rPr lang="ko-KR" altLang="en-US" smtClean="0"/>
-              <a:t>2026-04-07</a:t>
+              <a:t>2026-05-20</a:t>
             </a:fld>
             <a:endParaRPr lang="ko-KR" altLang="en-US"/>
           </a:p>
@@ -1641,7 +1944,7 @@
           <a:p>
             <a:fld id="{03278F45-FB3C-4C4D-B89A-7BC3F5F229F6}" type="datetime1">
               <a:rPr lang="ko-KR" altLang="en-US" smtClean="0"/>
-              <a:t>2026-04-07</a:t>
+              <a:t>2026-05-20</a:t>
             </a:fld>
             <a:endParaRPr lang="ko-KR" altLang="en-US"/>
           </a:p>
@@ -2034,7 +2337,7 @@
           <a:p>
             <a:fld id="{38FDAC3C-35A6-415C-9F03-738A6AC328B1}" type="datetime1">
               <a:rPr lang="ko-KR" altLang="en-US" smtClean="0"/>
-              <a:t>2026-04-07</a:t>
+              <a:t>2026-05-20</a:t>
             </a:fld>
             <a:endParaRPr lang="ko-KR" altLang="en-US"/>
           </a:p>
@@ -3628,7 +3931,7 @@
           <a:p>
             <a:fld id="{507A0DF1-AEE6-4B0D-89D2-351E7B3EF65C}" type="datetime1">
               <a:rPr lang="ko-KR" altLang="en-US" smtClean="0"/>
-              <a:t>2026-04-07</a:t>
+              <a:t>2026-05-20</a:t>
             </a:fld>
             <a:endParaRPr lang="ko-KR" altLang="en-US"/>
           </a:p>
@@ -4056,7 +4359,7 @@
           <a:p>
             <a:fld id="{CA93B8C9-630F-4D57-944D-04FD37CECCD3}" type="datetime1">
               <a:rPr lang="ko-KR" altLang="en-US" smtClean="0"/>
-              <a:t>2026-04-07</a:t>
+              <a:t>2026-05-20</a:t>
             </a:fld>
             <a:endParaRPr lang="ko-KR" altLang="en-US"/>
           </a:p>
@@ -4213,7 +4516,7 @@
           <a:p>
             <a:fld id="{E986165A-AC43-4902-9541-874ECD310BA3}" type="datetime1">
               <a:rPr lang="ko-KR" altLang="en-US" smtClean="0"/>
-              <a:t>2026-04-07</a:t>
+              <a:t>2026-05-20</a:t>
             </a:fld>
             <a:endParaRPr lang="ko-KR" altLang="en-US"/>
           </a:p>
@@ -4540,7 +4843,7 @@
           <a:p>
             <a:fld id="{47E6EE6D-2B0E-43A9-87A2-7354CDB998F4}" type="datetime1">
               <a:rPr lang="ko-KR" altLang="en-US" smtClean="0"/>
-              <a:t>2026-04-07</a:t>
+              <a:t>2026-05-20</a:t>
             </a:fld>
             <a:endParaRPr lang="ko-KR" altLang="en-US"/>
           </a:p>
@@ -4844,7 +5147,7 @@
           <a:p>
             <a:fld id="{5CC5944E-0BC8-4FAA-9F94-6B4B05834E10}" type="datetime1">
               <a:rPr lang="ko-KR" altLang="en-US" smtClean="0"/>
-              <a:t>2026-04-07</a:t>
+              <a:t>2026-05-20</a:t>
             </a:fld>
             <a:endParaRPr lang="ko-KR" altLang="en-US"/>
           </a:p>
@@ -14447,7 +14750,7 @@
         <p:spPr>
           <a:xfrm>
             <a:off x="288790" y="958844"/>
-            <a:ext cx="11250267" cy="1522020"/>
+            <a:ext cx="11250267" cy="5584670"/>
           </a:xfrm>
           <a:prstGeom prst="rect">
             <a:avLst/>
@@ -14518,6 +14821,49 @@
             </a:r>
           </a:p>
           <a:p>
+            <a:pPr marL="377825" indent="-285750">
+              <a:lnSpc>
+                <a:spcPct val="150000"/>
+              </a:lnSpc>
+              <a:buFont typeface="Arial" panose="020B0604020202020204" pitchFamily="34" charset="0"/>
+              <a:buChar char="•"/>
+            </a:pPr>
+            <a:endParaRPr lang="en-US" altLang="ko-KR" sz="1600" spc="-50" dirty="0"/>
+          </a:p>
+          <a:p>
+            <a:pPr marL="377825" indent="-285750">
+              <a:lnSpc>
+                <a:spcPct val="150000"/>
+              </a:lnSpc>
+              <a:buFont typeface="Arial" panose="020B0604020202020204" pitchFamily="34" charset="0"/>
+              <a:buChar char="•"/>
+            </a:pPr>
+            <a:r>
+              <a:rPr lang="ko-KR" altLang="en-US" sz="1600" spc="-50" dirty="0"/>
+              <a:t>우리나라의 국민연금제도는 국내에 거주하는 </a:t>
+            </a:r>
+            <a:r>
+              <a:rPr lang="en-US" altLang="ko-KR" sz="1600" spc="-50" dirty="0"/>
+              <a:t>18</a:t>
+            </a:r>
+            <a:r>
+              <a:rPr lang="ko-KR" altLang="en-US" sz="1600" spc="-50" dirty="0"/>
+              <a:t>세 이상</a:t>
+            </a:r>
+            <a:r>
+              <a:rPr lang="en-US" altLang="ko-KR" sz="1600" spc="-50" dirty="0"/>
+              <a:t>, 60</a:t>
+            </a:r>
+            <a:r>
+              <a:rPr lang="ko-KR" altLang="en-US" sz="1600" spc="-50" dirty="0"/>
+              <a:t>세 미만의 국민이면 누구나 다 가입할 수 있다</a:t>
+            </a:r>
+            <a:r>
+              <a:rPr lang="en-US" altLang="ko-KR" sz="1600" spc="-50" dirty="0"/>
+              <a:t>.</a:t>
+            </a:r>
+          </a:p>
+          <a:p>
             <a:pPr marL="835025" lvl="1" indent="-285750">
               <a:lnSpc>
                 <a:spcPct val="150000"/>
@@ -14525,7 +14871,107 @@
               <a:buFont typeface="Wingdings" panose="05000000000000000000" pitchFamily="2" charset="2"/>
               <a:buChar char="ü"/>
             </a:pPr>
-            <a:endParaRPr lang="en-US" altLang="ko-KR" sz="1600" spc="-50"/>
+            <a:r>
+              <a:rPr lang="ko-KR" altLang="en-US" sz="1600" spc="-50" dirty="0"/>
+              <a:t>가입자는 사업장가입자와 지역가입자</a:t>
+            </a:r>
+            <a:r>
+              <a:rPr lang="en-US" altLang="ko-KR" sz="1600" spc="-50" dirty="0"/>
+              <a:t>, </a:t>
+            </a:r>
+            <a:r>
+              <a:rPr lang="ko-KR" altLang="en-US" sz="1600" spc="-50" dirty="0"/>
+              <a:t>두 범주로 나눌 수 있다</a:t>
+            </a:r>
+            <a:r>
+              <a:rPr lang="en-US" altLang="ko-KR" sz="1600" spc="-50" dirty="0"/>
+              <a:t>.</a:t>
+            </a:r>
+          </a:p>
+          <a:p>
+            <a:pPr marL="1292225" lvl="2" indent="-285750">
+              <a:lnSpc>
+                <a:spcPct val="150000"/>
+              </a:lnSpc>
+              <a:buFont typeface="Wingdings" panose="05000000000000000000" pitchFamily="2" charset="2"/>
+              <a:buChar char="Ø"/>
+            </a:pPr>
+            <a:r>
+              <a:rPr lang="ko-KR" altLang="en-US" sz="1600" spc="-50" dirty="0"/>
+              <a:t>사업장가입자는 직장을 통해 제도에 가입한 사람을 의미한다</a:t>
+            </a:r>
+            <a:r>
+              <a:rPr lang="en-US" altLang="ko-KR" sz="1600" spc="-50" dirty="0"/>
+              <a:t>.</a:t>
+            </a:r>
+          </a:p>
+          <a:p>
+            <a:pPr marL="1292225" lvl="2" indent="-285750">
+              <a:lnSpc>
+                <a:spcPct val="150000"/>
+              </a:lnSpc>
+              <a:buFont typeface="Wingdings" panose="05000000000000000000" pitchFamily="2" charset="2"/>
+              <a:buChar char="Ø"/>
+            </a:pPr>
+            <a:r>
+              <a:rPr lang="ko-KR" altLang="en-US" sz="1600" spc="-50" dirty="0"/>
+              <a:t>지역가입자는 도시자영업자</a:t>
+            </a:r>
+            <a:r>
+              <a:rPr lang="en-US" altLang="ko-KR" sz="1600" spc="-50" dirty="0"/>
+              <a:t>, </a:t>
+            </a:r>
+            <a:r>
+              <a:rPr lang="ko-KR" altLang="en-US" sz="1600" spc="-50" dirty="0"/>
+              <a:t>농어민의 신분으로 국민연금제도에 가입한 사람을 의미한다</a:t>
+            </a:r>
+            <a:r>
+              <a:rPr lang="en-US" altLang="ko-KR" sz="1600" spc="-50" dirty="0"/>
+              <a:t>.</a:t>
+            </a:r>
+          </a:p>
+          <a:p>
+            <a:pPr marL="835025" lvl="1" indent="-285750">
+              <a:lnSpc>
+                <a:spcPct val="150000"/>
+              </a:lnSpc>
+              <a:buFont typeface="Wingdings" panose="05000000000000000000" pitchFamily="2" charset="2"/>
+              <a:buChar char="ü"/>
+            </a:pPr>
+            <a:r>
+              <a:rPr lang="ko-KR" altLang="en-US" sz="1600" spc="-50" dirty="0"/>
+              <a:t>공무원</a:t>
+            </a:r>
+            <a:r>
+              <a:rPr lang="en-US" altLang="ko-KR" sz="1600" spc="-50" dirty="0"/>
+              <a:t>, </a:t>
+            </a:r>
+            <a:r>
+              <a:rPr lang="ko-KR" altLang="en-US" sz="1600" spc="-50" dirty="0"/>
+              <a:t>군인</a:t>
+            </a:r>
+            <a:r>
+              <a:rPr lang="en-US" altLang="ko-KR" sz="1600" spc="-50" dirty="0"/>
+              <a:t>, </a:t>
+            </a:r>
+            <a:r>
+              <a:rPr lang="ko-KR" altLang="en-US" sz="1600" spc="-50" dirty="0"/>
+              <a:t>사립학교 교직원은 자체의 연금 프로그램을 갖고 있으므로 제외하고 있다</a:t>
+            </a:r>
+            <a:r>
+              <a:rPr lang="en-US" altLang="ko-KR" sz="1600" spc="-50" dirty="0"/>
+              <a:t>.</a:t>
+            </a:r>
+          </a:p>
+          <a:p>
+            <a:pPr marL="835025" lvl="1" indent="-285750">
+              <a:lnSpc>
+                <a:spcPct val="150000"/>
+              </a:lnSpc>
+              <a:buFont typeface="Wingdings" panose="05000000000000000000" pitchFamily="2" charset="2"/>
+              <a:buChar char="ü"/>
+            </a:pPr>
+            <a:endParaRPr lang="en-US" altLang="ko-KR" sz="1600" spc="-50" dirty="0"/>
           </a:p>
           <a:p>
             <a:pPr marL="377825" indent="-285750">
@@ -14535,7 +14981,105 @@
               <a:buFont typeface="Arial" panose="020B0604020202020204" pitchFamily="34" charset="0"/>
               <a:buChar char="•"/>
             </a:pPr>
-            <a:endParaRPr lang="en-US" altLang="ko-KR" sz="1600" spc="-50" dirty="0"/>
+            <a:r>
+              <a:rPr lang="ko-KR" altLang="en-US" sz="1600" spc="-50" dirty="0"/>
+              <a:t>사업장가입자와 지역가입자는 의무적으로 국민연금제도에 가입한 경우지만</a:t>
+            </a:r>
+            <a:r>
+              <a:rPr lang="en-US" altLang="ko-KR" sz="1600" spc="-50" dirty="0"/>
+              <a:t>, </a:t>
+            </a:r>
+            <a:r>
+              <a:rPr lang="ko-KR" altLang="en-US" sz="1600" spc="-50" dirty="0"/>
+              <a:t>가입해야 할 의무가 없는데도 본인이 원해서 가입자가 되는 경우</a:t>
+            </a:r>
+            <a:r>
+              <a:rPr lang="en-US" altLang="ko-KR" sz="1600" spc="-50" dirty="0"/>
+              <a:t>(</a:t>
+            </a:r>
+            <a:r>
+              <a:rPr lang="ko-KR" altLang="en-US" sz="1600" spc="-50" dirty="0"/>
+              <a:t>임의가입자 혹은 </a:t>
+            </a:r>
+            <a:r>
+              <a:rPr lang="ko-KR" altLang="en-US" sz="1600" spc="-50" dirty="0" err="1"/>
+              <a:t>임의계속가입자</a:t>
+            </a:r>
+            <a:r>
+              <a:rPr lang="en-US" altLang="ko-KR" sz="1600" spc="-50" dirty="0"/>
+              <a:t>)</a:t>
+            </a:r>
+            <a:r>
+              <a:rPr lang="ko-KR" altLang="en-US" sz="1600" spc="-50" dirty="0"/>
+              <a:t>도 있다</a:t>
+            </a:r>
+            <a:r>
+              <a:rPr lang="en-US" altLang="ko-KR" sz="1600" spc="-50" dirty="0"/>
+              <a:t>.</a:t>
+            </a:r>
+          </a:p>
+          <a:p>
+            <a:pPr marL="835025" lvl="1" indent="-285750">
+              <a:lnSpc>
+                <a:spcPct val="150000"/>
+              </a:lnSpc>
+              <a:buFont typeface="Wingdings" panose="05000000000000000000" pitchFamily="2" charset="2"/>
+              <a:buChar char="ü"/>
+            </a:pPr>
+            <a:r>
+              <a:rPr lang="ko-KR" altLang="en-US" sz="1600" spc="-50" dirty="0"/>
+              <a:t>임의가입자는 전업주부처럼 근로소득이 없는 사람 중 국민연금 혜택을 받고 싶어 가입한 사람을 의미한다</a:t>
+            </a:r>
+            <a:r>
+              <a:rPr lang="en-US" altLang="ko-KR" sz="1600" spc="-50" dirty="0"/>
+              <a:t>.</a:t>
+            </a:r>
+          </a:p>
+          <a:p>
+            <a:pPr marL="835025" lvl="1" indent="-285750">
+              <a:lnSpc>
+                <a:spcPct val="150000"/>
+              </a:lnSpc>
+              <a:buFont typeface="Wingdings" panose="05000000000000000000" pitchFamily="2" charset="2"/>
+              <a:buChar char="ü"/>
+            </a:pPr>
+            <a:r>
+              <a:rPr lang="ko-KR" altLang="en-US" sz="1600" spc="-50" dirty="0" err="1"/>
+              <a:t>임의계속가입자는</a:t>
+            </a:r>
+            <a:r>
+              <a:rPr lang="ko-KR" altLang="en-US" sz="1600" spc="-50" dirty="0"/>
+              <a:t> 나이가 많거나 혹은 늦게 가입하여 최소가입연수를 채우지 못하여 임의로 연장해 가입한 사람을 의미한다</a:t>
+            </a:r>
+            <a:r>
+              <a:rPr lang="en-US" altLang="ko-KR" sz="1600" spc="-50" dirty="0"/>
+              <a:t>.</a:t>
+            </a:r>
+          </a:p>
+          <a:p>
+            <a:pPr marL="835025" lvl="1" indent="-285750">
+              <a:lnSpc>
+                <a:spcPct val="150000"/>
+              </a:lnSpc>
+              <a:buFont typeface="Wingdings" panose="05000000000000000000" pitchFamily="2" charset="2"/>
+              <a:buChar char="ü"/>
+            </a:pPr>
+            <a:r>
+              <a:rPr lang="ko-KR" altLang="en-US" sz="1600" spc="-50" dirty="0"/>
+              <a:t>임의가입자와 </a:t>
+            </a:r>
+            <a:r>
+              <a:rPr lang="ko-KR" altLang="en-US" sz="1600" spc="-50" dirty="0" err="1"/>
+              <a:t>임의계속가입자의</a:t>
+            </a:r>
+            <a:r>
+              <a:rPr lang="ko-KR" altLang="en-US" sz="1600" spc="-50" dirty="0"/>
+              <a:t> 비중은 매우 낮은 편이다</a:t>
+            </a:r>
+            <a:r>
+              <a:rPr lang="en-US" altLang="ko-KR" sz="1600" spc="-50" dirty="0"/>
+              <a:t>.</a:t>
+            </a:r>
           </a:p>
         </p:txBody>
       </p:sp>
@@ -14703,6 +15247,1562 @@
         <p:cNvPr id="1" name="">
           <a:extLst>
             <a:ext uri="{FF2B5EF4-FFF2-40B4-BE49-F238E27FC236}">
+              <a16:creationId xmlns:a16="http://schemas.microsoft.com/office/drawing/2014/main" id="{5578D145-88B0-21C8-D558-DB8693D4C7EA}"/>
+            </a:ext>
+          </a:extLst>
+        </p:cNvPr>
+        <p:cNvGrpSpPr/>
+        <p:nvPr/>
+      </p:nvGrpSpPr>
+      <p:grpSpPr>
+        <a:xfrm>
+          <a:off x="0" y="0"/>
+          <a:ext cx="0" cy="0"/>
+          <a:chOff x="0" y="0"/>
+          <a:chExt cx="0" cy="0"/>
+        </a:xfrm>
+      </p:grpSpPr>
+      <p:sp>
+        <p:nvSpPr>
+          <p:cNvPr id="2" name="제목 1">
+            <a:extLst>
+              <a:ext uri="{FF2B5EF4-FFF2-40B4-BE49-F238E27FC236}">
+                <a16:creationId xmlns:a16="http://schemas.microsoft.com/office/drawing/2014/main" id="{2859BA62-3AD2-2CD0-882C-B519705FA19D}"/>
+              </a:ext>
+            </a:extLst>
+          </p:cNvPr>
+          <p:cNvSpPr>
+            <a:spLocks noGrp="1"/>
+          </p:cNvSpPr>
+          <p:nvPr>
+            <p:ph type="title"/>
+          </p:nvPr>
+        </p:nvSpPr>
+        <p:spPr/>
+        <p:txBody>
+          <a:bodyPr/>
+          <a:lstStyle/>
+          <a:p>
+            <a:r>
+              <a:rPr lang="ko-KR" altLang="en-US" dirty="0"/>
+              <a:t>보험료</a:t>
+            </a:r>
+          </a:p>
+        </p:txBody>
+      </p:sp>
+      <p:sp>
+        <p:nvSpPr>
+          <p:cNvPr id="4" name="슬라이드 번호 개체 틀 3">
+            <a:extLst>
+              <a:ext uri="{FF2B5EF4-FFF2-40B4-BE49-F238E27FC236}">
+                <a16:creationId xmlns:a16="http://schemas.microsoft.com/office/drawing/2014/main" id="{AF520C5C-BE95-C7C4-2F10-26987E12D1F1}"/>
+              </a:ext>
+            </a:extLst>
+          </p:cNvPr>
+          <p:cNvSpPr>
+            <a:spLocks noGrp="1"/>
+          </p:cNvSpPr>
+          <p:nvPr>
+            <p:ph type="sldNum" sz="quarter" idx="12"/>
+          </p:nvPr>
+        </p:nvSpPr>
+        <p:spPr/>
+        <p:txBody>
+          <a:bodyPr/>
+          <a:lstStyle/>
+          <a:p>
+            <a:fld id="{109C872D-39A9-4065-8BF3-6A613116E2A1}" type="slidenum">
+              <a:rPr lang="ko-KR" altLang="en-US" smtClean="0"/>
+              <a:t>30</a:t>
+            </a:fld>
+            <a:endParaRPr lang="ko-KR" altLang="en-US"/>
+          </a:p>
+        </p:txBody>
+      </p:sp>
+      <p:sp>
+        <p:nvSpPr>
+          <p:cNvPr id="3" name="TextBox 2">
+            <a:extLst>
+              <a:ext uri="{FF2B5EF4-FFF2-40B4-BE49-F238E27FC236}">
+                <a16:creationId xmlns:a16="http://schemas.microsoft.com/office/drawing/2014/main" id="{7988A1C5-7533-92BD-3A81-E61C54ED1A86}"/>
+              </a:ext>
+            </a:extLst>
+          </p:cNvPr>
+          <p:cNvSpPr txBox="1"/>
+          <p:nvPr/>
+        </p:nvSpPr>
+        <p:spPr>
+          <a:xfrm>
+            <a:off x="288790" y="958844"/>
+            <a:ext cx="11250267" cy="5215338"/>
+          </a:xfrm>
+          <a:prstGeom prst="rect">
+            <a:avLst/>
+          </a:prstGeom>
+          <a:noFill/>
+        </p:spPr>
+        <p:txBody>
+          <a:bodyPr wrap="square" rtlCol="0" anchor="t">
+            <a:spAutoFit/>
+          </a:bodyPr>
+          <a:lstStyle/>
+          <a:p>
+            <a:pPr marL="377825" indent="-285750">
+              <a:lnSpc>
+                <a:spcPct val="150000"/>
+              </a:lnSpc>
+              <a:buFont typeface="Arial" panose="020B0604020202020204" pitchFamily="34" charset="0"/>
+              <a:buChar char="•"/>
+            </a:pPr>
+            <a:r>
+              <a:rPr lang="ko-KR" altLang="en-US" sz="1600" spc="-50" dirty="0"/>
+              <a:t>우리나라는 국민연금제도를 적립방식으로 운영하고 있다</a:t>
+            </a:r>
+            <a:r>
+              <a:rPr lang="en-US" altLang="ko-KR" sz="1600" spc="-50" dirty="0"/>
+              <a:t>.</a:t>
+            </a:r>
+          </a:p>
+          <a:p>
+            <a:pPr marL="835025" lvl="1" indent="-285750">
+              <a:lnSpc>
+                <a:spcPct val="150000"/>
+              </a:lnSpc>
+              <a:buFont typeface="Wingdings" panose="05000000000000000000" pitchFamily="2" charset="2"/>
+              <a:buChar char="ü"/>
+            </a:pPr>
+            <a:r>
+              <a:rPr lang="ko-KR" altLang="en-US" sz="1600" spc="-50" dirty="0"/>
+              <a:t>가입자가 납부한 보험료는 국민연금기금의 조성에 투입되고</a:t>
+            </a:r>
+            <a:r>
+              <a:rPr lang="en-US" altLang="ko-KR" sz="1600" spc="-50" dirty="0"/>
+              <a:t>, </a:t>
+            </a:r>
+            <a:r>
+              <a:rPr lang="ko-KR" altLang="en-US" sz="1600" spc="-50" dirty="0"/>
+              <a:t>이 기금으로부터 은퇴 후 지급되는 연금이 나온다</a:t>
+            </a:r>
+            <a:r>
+              <a:rPr lang="en-US" altLang="ko-KR" sz="1600" spc="-50" dirty="0"/>
+              <a:t>.</a:t>
+            </a:r>
+          </a:p>
+          <a:p>
+            <a:pPr marL="835025" lvl="1" indent="-285750">
+              <a:lnSpc>
+                <a:spcPct val="150000"/>
+              </a:lnSpc>
+              <a:buFont typeface="Wingdings" panose="05000000000000000000" pitchFamily="2" charset="2"/>
+              <a:buChar char="ü"/>
+            </a:pPr>
+            <a:r>
+              <a:rPr lang="ko-KR" altLang="en-US" sz="1600" spc="-50" dirty="0"/>
+              <a:t>보험료는 국민연금의 주된 재원이고</a:t>
+            </a:r>
+            <a:r>
+              <a:rPr lang="en-US" altLang="ko-KR" sz="1600" spc="-50" dirty="0"/>
+              <a:t>, </a:t>
+            </a:r>
+            <a:r>
+              <a:rPr lang="ko-KR" altLang="en-US" sz="1600" spc="-50" dirty="0"/>
+              <a:t>가입자들은 보험료를 납부하지 않으면 정부가 강제</a:t>
+            </a:r>
+            <a:r>
+              <a:rPr lang="en-US" altLang="ko-KR" sz="1600" spc="-50" dirty="0"/>
+              <a:t>(</a:t>
+            </a:r>
+            <a:r>
+              <a:rPr lang="ko-KR" altLang="en-US" sz="1600" spc="-50" dirty="0"/>
+              <a:t>압류</a:t>
+            </a:r>
+            <a:r>
+              <a:rPr lang="en-US" altLang="ko-KR" sz="1600" spc="-50" dirty="0"/>
+              <a:t>)</a:t>
+            </a:r>
+            <a:r>
+              <a:rPr lang="ko-KR" altLang="en-US" sz="1600" spc="-50" dirty="0"/>
+              <a:t>로 징수할 수 있다</a:t>
+            </a:r>
+            <a:r>
+              <a:rPr lang="en-US" altLang="ko-KR" sz="1600" spc="-50" dirty="0"/>
+              <a:t>.</a:t>
+            </a:r>
+          </a:p>
+          <a:p>
+            <a:pPr marL="377825" indent="-285750">
+              <a:lnSpc>
+                <a:spcPct val="150000"/>
+              </a:lnSpc>
+              <a:buFont typeface="Arial" panose="020B0604020202020204" pitchFamily="34" charset="0"/>
+              <a:buChar char="•"/>
+            </a:pPr>
+            <a:endParaRPr lang="en-US" altLang="ko-KR" sz="1600" spc="-50" dirty="0"/>
+          </a:p>
+          <a:p>
+            <a:pPr marL="377825" indent="-285750">
+              <a:lnSpc>
+                <a:spcPct val="150000"/>
+              </a:lnSpc>
+              <a:buFont typeface="Arial" panose="020B0604020202020204" pitchFamily="34" charset="0"/>
+              <a:buChar char="•"/>
+            </a:pPr>
+            <a:r>
+              <a:rPr lang="ko-KR" altLang="en-US" sz="1600" spc="-50" dirty="0"/>
+              <a:t>국민연금의 보험료는 가입자의 </a:t>
+            </a:r>
+            <a:r>
+              <a:rPr lang="ko-KR" altLang="en-US" sz="1600" spc="-50" dirty="0" err="1"/>
+              <a:t>기준소득월액에</a:t>
+            </a:r>
+            <a:r>
+              <a:rPr lang="ko-KR" altLang="en-US" sz="1600" spc="-50" dirty="0"/>
+              <a:t> 보험료율을 곱하여 산정한다</a:t>
+            </a:r>
+            <a:r>
+              <a:rPr lang="en-US" altLang="ko-KR" sz="1600" spc="-50" dirty="0"/>
+              <a:t>.</a:t>
+            </a:r>
+          </a:p>
+          <a:p>
+            <a:pPr marL="835025" lvl="1" indent="-285750">
+              <a:lnSpc>
+                <a:spcPct val="150000"/>
+              </a:lnSpc>
+              <a:buFont typeface="Wingdings" panose="05000000000000000000" pitchFamily="2" charset="2"/>
+              <a:buChar char="ü"/>
+            </a:pPr>
+            <a:r>
+              <a:rPr lang="ko-KR" altLang="en-US" sz="1600" spc="-50" dirty="0" err="1"/>
+              <a:t>기준소득월액</a:t>
+            </a:r>
+            <a:r>
+              <a:rPr lang="ko-KR" altLang="en-US" sz="1600" spc="-50" dirty="0"/>
+              <a:t> 은 국민연금제도에서 규정하고 있는 가입자의 한 달 소득이다</a:t>
+            </a:r>
+            <a:r>
+              <a:rPr lang="en-US" altLang="ko-KR" sz="1600" spc="-50" dirty="0"/>
+              <a:t>.</a:t>
+            </a:r>
+          </a:p>
+          <a:p>
+            <a:pPr marL="1292225" lvl="2" indent="-285750">
+              <a:lnSpc>
+                <a:spcPct val="150000"/>
+              </a:lnSpc>
+              <a:buFont typeface="Wingdings" panose="05000000000000000000" pitchFamily="2" charset="2"/>
+              <a:buChar char="Ø"/>
+            </a:pPr>
+            <a:r>
+              <a:rPr lang="ko-KR" altLang="en-US" sz="1600" spc="-50" dirty="0"/>
+              <a:t>단순 월 소득이라고 표현하지 않는 이유는</a:t>
+            </a:r>
+            <a:r>
+              <a:rPr lang="en-US" altLang="ko-KR" sz="1600" spc="-50" dirty="0"/>
+              <a:t>, </a:t>
+            </a:r>
+            <a:r>
+              <a:rPr lang="ko-KR" altLang="en-US" sz="1600" spc="-50" dirty="0"/>
+              <a:t>소득의 일부는 보험료 징수대상에서 제외되기 때문이다</a:t>
+            </a:r>
+            <a:r>
+              <a:rPr lang="en-US" altLang="ko-KR" sz="1600" spc="-50" dirty="0"/>
+              <a:t>.</a:t>
+            </a:r>
+          </a:p>
+          <a:p>
+            <a:pPr marL="1292225" lvl="2" indent="-285750">
+              <a:lnSpc>
+                <a:spcPct val="150000"/>
+              </a:lnSpc>
+              <a:buFont typeface="Wingdings" panose="05000000000000000000" pitchFamily="2" charset="2"/>
+              <a:buChar char="Ø"/>
+            </a:pPr>
+            <a:r>
+              <a:rPr lang="en-US" altLang="ko-KR" sz="1600" spc="-50" dirty="0"/>
+              <a:t>2025</a:t>
+            </a:r>
+            <a:r>
+              <a:rPr lang="ko-KR" altLang="en-US" sz="1600" spc="-50" dirty="0"/>
+              <a:t>년 기준</a:t>
+            </a:r>
+            <a:r>
+              <a:rPr lang="en-US" altLang="ko-KR" sz="1600" spc="-50" dirty="0"/>
+              <a:t>, </a:t>
+            </a:r>
+            <a:r>
+              <a:rPr lang="ko-KR" altLang="en-US" sz="1600" spc="-50" dirty="0"/>
+              <a:t>보험료 부과대상이 되는 소득에 </a:t>
+            </a:r>
+            <a:r>
+              <a:rPr lang="en-US" altLang="ko-KR" sz="1600" spc="-50" dirty="0"/>
+              <a:t>40</a:t>
+            </a:r>
+            <a:r>
+              <a:rPr lang="ko-KR" altLang="en-US" sz="1600" spc="-50" dirty="0"/>
+              <a:t>만원의 하한과 </a:t>
+            </a:r>
+            <a:r>
+              <a:rPr lang="en-US" altLang="ko-KR" sz="1600" spc="-50" dirty="0"/>
+              <a:t>637</a:t>
+            </a:r>
+            <a:r>
+              <a:rPr lang="ko-KR" altLang="en-US" sz="1600" spc="-50" dirty="0"/>
+              <a:t>만원의 상한이 설정되어 있다</a:t>
+            </a:r>
+            <a:r>
+              <a:rPr lang="en-US" altLang="ko-KR" sz="1600" spc="-50" dirty="0"/>
+              <a:t>.</a:t>
+            </a:r>
+          </a:p>
+          <a:p>
+            <a:pPr marL="1292225" lvl="2" indent="-285750">
+              <a:lnSpc>
+                <a:spcPct val="150000"/>
+              </a:lnSpc>
+              <a:buFont typeface="Wingdings" panose="05000000000000000000" pitchFamily="2" charset="2"/>
+              <a:buChar char="Ø"/>
+            </a:pPr>
+            <a:r>
+              <a:rPr lang="ko-KR" altLang="en-US" sz="1600" spc="-50" dirty="0"/>
+              <a:t>상한과 하한 사이의 소득만 보험료 징수대상이 되는데</a:t>
+            </a:r>
+            <a:r>
+              <a:rPr lang="en-US" altLang="ko-KR" sz="1600" spc="-50" dirty="0"/>
+              <a:t>, </a:t>
+            </a:r>
+            <a:r>
+              <a:rPr lang="ko-KR" altLang="en-US" sz="1600" spc="-50" dirty="0"/>
+              <a:t>이는 부담 분배의 역진성을 발생시킨다</a:t>
+            </a:r>
+            <a:r>
+              <a:rPr lang="en-US" altLang="ko-KR" sz="1600" spc="-50" dirty="0"/>
+              <a:t>.</a:t>
+            </a:r>
+          </a:p>
+          <a:p>
+            <a:pPr marL="377825" indent="-285750">
+              <a:lnSpc>
+                <a:spcPct val="150000"/>
+              </a:lnSpc>
+              <a:buFont typeface="Arial" panose="020B0604020202020204" pitchFamily="34" charset="0"/>
+              <a:buChar char="•"/>
+            </a:pPr>
+            <a:endParaRPr lang="en-US" altLang="ko-KR" sz="1600" spc="-50" dirty="0"/>
+          </a:p>
+          <a:p>
+            <a:pPr marL="377825" indent="-285750">
+              <a:lnSpc>
+                <a:spcPct val="150000"/>
+              </a:lnSpc>
+              <a:buFont typeface="Arial" panose="020B0604020202020204" pitchFamily="34" charset="0"/>
+              <a:buChar char="•"/>
+            </a:pPr>
+            <a:r>
+              <a:rPr lang="en-US" altLang="ko-KR" sz="1600" spc="-50" dirty="0"/>
+              <a:t>2025</a:t>
+            </a:r>
+            <a:r>
+              <a:rPr lang="ko-KR" altLang="en-US" sz="1600" spc="-50" dirty="0"/>
+              <a:t>년 사업장가입자 혹은 지역가입자에게 적용되는 국민연금 보험료율은 </a:t>
+            </a:r>
+            <a:r>
+              <a:rPr lang="en-US" altLang="ko-KR" sz="1600" spc="-50" dirty="0"/>
+              <a:t>9%</a:t>
+            </a:r>
+            <a:r>
+              <a:rPr lang="ko-KR" altLang="en-US" sz="1600" spc="-50" dirty="0"/>
+              <a:t>이다</a:t>
+            </a:r>
+            <a:r>
+              <a:rPr lang="en-US" altLang="ko-KR" sz="1600" spc="-50" dirty="0"/>
+              <a:t>.</a:t>
+            </a:r>
+          </a:p>
+          <a:p>
+            <a:pPr marL="835025" lvl="1" indent="-285750">
+              <a:lnSpc>
+                <a:spcPct val="150000"/>
+              </a:lnSpc>
+              <a:buFont typeface="Wingdings" panose="05000000000000000000" pitchFamily="2" charset="2"/>
+              <a:buChar char="ü"/>
+            </a:pPr>
+            <a:r>
+              <a:rPr lang="ko-KR" altLang="en-US" sz="1600" spc="-50" dirty="0"/>
+              <a:t>실제 납부방식은 가입자 유형에 따라 다르다</a:t>
+            </a:r>
+            <a:r>
+              <a:rPr lang="en-US" altLang="ko-KR" sz="1600" spc="-50" dirty="0"/>
+              <a:t>.</a:t>
+            </a:r>
+          </a:p>
+          <a:p>
+            <a:pPr marL="1292225" lvl="2" indent="-285750">
+              <a:lnSpc>
+                <a:spcPct val="150000"/>
+              </a:lnSpc>
+              <a:buFont typeface="Wingdings" panose="05000000000000000000" pitchFamily="2" charset="2"/>
+              <a:buChar char="Ø"/>
+            </a:pPr>
+            <a:r>
+              <a:rPr lang="ko-KR" altLang="en-US" sz="1600" spc="-50" dirty="0"/>
+              <a:t>사업장가입자의 경우</a:t>
+            </a:r>
+            <a:r>
+              <a:rPr lang="en-US" altLang="ko-KR" sz="1600" spc="-50" dirty="0"/>
+              <a:t>, </a:t>
+            </a:r>
+            <a:r>
+              <a:rPr lang="ko-KR" altLang="en-US" sz="1600" spc="-50" dirty="0"/>
+              <a:t>가입자와 고용주가 절반씩 부담 </a:t>
+            </a:r>
+            <a:r>
+              <a:rPr lang="en-US" altLang="ko-KR" sz="1600" spc="-50" dirty="0"/>
+              <a:t>(</a:t>
+            </a:r>
+            <a:r>
+              <a:rPr lang="ko-KR" altLang="en-US" sz="1600" spc="-50" dirty="0"/>
+              <a:t>가입자의 </a:t>
+            </a:r>
+            <a:r>
+              <a:rPr lang="ko-KR" altLang="en-US" sz="1600" spc="-50" dirty="0" err="1"/>
+              <a:t>기준소득월액의</a:t>
+            </a:r>
+            <a:r>
+              <a:rPr lang="ko-KR" altLang="en-US" sz="1600" spc="-50" dirty="0"/>
+              <a:t> </a:t>
+            </a:r>
+            <a:r>
+              <a:rPr lang="en-US" altLang="ko-KR" sz="1600" spc="-50" dirty="0"/>
+              <a:t>4.5%</a:t>
+            </a:r>
+            <a:r>
+              <a:rPr lang="ko-KR" altLang="en-US" sz="1600" spc="-50" dirty="0"/>
+              <a:t>씩</a:t>
+            </a:r>
+            <a:r>
+              <a:rPr lang="en-US" altLang="ko-KR" sz="1600" spc="-50" dirty="0"/>
+              <a:t>)</a:t>
+            </a:r>
+          </a:p>
+          <a:p>
+            <a:pPr marL="1292225" lvl="2" indent="-285750">
+              <a:lnSpc>
+                <a:spcPct val="150000"/>
+              </a:lnSpc>
+              <a:buFont typeface="Wingdings" panose="05000000000000000000" pitchFamily="2" charset="2"/>
+              <a:buChar char="Ø"/>
+            </a:pPr>
+            <a:r>
+              <a:rPr lang="ko-KR" altLang="en-US" sz="1600" spc="-50" dirty="0"/>
+              <a:t>지역가입자의 경우</a:t>
+            </a:r>
+            <a:r>
+              <a:rPr lang="en-US" altLang="ko-KR" sz="1600" spc="-50" dirty="0"/>
+              <a:t>, </a:t>
+            </a:r>
+            <a:r>
+              <a:rPr lang="ko-KR" altLang="en-US" sz="1600" spc="-50" dirty="0"/>
+              <a:t>본인이 보험료를 전액 부담</a:t>
+            </a:r>
+            <a:r>
+              <a:rPr lang="en-US" altLang="ko-KR" sz="1600" spc="-50" dirty="0"/>
+              <a:t>.</a:t>
+            </a:r>
+          </a:p>
+        </p:txBody>
+      </p:sp>
+    </p:spTree>
+    <p:extLst>
+      <p:ext uri="{BB962C8B-B14F-4D97-AF65-F5344CB8AC3E}">
+        <p14:creationId xmlns:p14="http://schemas.microsoft.com/office/powerpoint/2010/main" val="4059508673"/>
+      </p:ext>
+    </p:extLst>
+  </p:cSld>
+  <p:clrMapOvr>
+    <a:masterClrMapping/>
+  </p:clrMapOvr>
+</p:sld>
+</file>
+
+<file path=ppt/slides/slide31.xml><?xml version="1.0" encoding="utf-8"?>
+<p:sld xmlns:a="http://schemas.openxmlformats.org/drawingml/2006/main" xmlns:r="http://schemas.openxmlformats.org/officeDocument/2006/relationships" xmlns:p="http://schemas.openxmlformats.org/presentationml/2006/main">
+  <p:cSld>
+    <p:spTree>
+      <p:nvGrpSpPr>
+        <p:cNvPr id="1" name="">
+          <a:extLst>
+            <a:ext uri="{FF2B5EF4-FFF2-40B4-BE49-F238E27FC236}">
+              <a16:creationId xmlns:a16="http://schemas.microsoft.com/office/drawing/2014/main" id="{EFCDE6B9-00AB-2F55-33B1-7D357E6FAAF6}"/>
+            </a:ext>
+          </a:extLst>
+        </p:cNvPr>
+        <p:cNvGrpSpPr/>
+        <p:nvPr/>
+      </p:nvGrpSpPr>
+      <p:grpSpPr>
+        <a:xfrm>
+          <a:off x="0" y="0"/>
+          <a:ext cx="0" cy="0"/>
+          <a:chOff x="0" y="0"/>
+          <a:chExt cx="0" cy="0"/>
+        </a:xfrm>
+      </p:grpSpPr>
+      <p:sp>
+        <p:nvSpPr>
+          <p:cNvPr id="2" name="제목 1">
+            <a:extLst>
+              <a:ext uri="{FF2B5EF4-FFF2-40B4-BE49-F238E27FC236}">
+                <a16:creationId xmlns:a16="http://schemas.microsoft.com/office/drawing/2014/main" id="{6A5157A2-D3CC-CF0A-1B28-BCFF3E45EA51}"/>
+              </a:ext>
+            </a:extLst>
+          </p:cNvPr>
+          <p:cNvSpPr>
+            <a:spLocks noGrp="1"/>
+          </p:cNvSpPr>
+          <p:nvPr>
+            <p:ph type="title"/>
+          </p:nvPr>
+        </p:nvSpPr>
+        <p:spPr/>
+        <p:txBody>
+          <a:bodyPr/>
+          <a:lstStyle/>
+          <a:p>
+            <a:r>
+              <a:rPr lang="ko-KR" altLang="en-US" dirty="0"/>
+              <a:t>보험료</a:t>
+            </a:r>
+          </a:p>
+        </p:txBody>
+      </p:sp>
+      <p:sp>
+        <p:nvSpPr>
+          <p:cNvPr id="4" name="슬라이드 번호 개체 틀 3">
+            <a:extLst>
+              <a:ext uri="{FF2B5EF4-FFF2-40B4-BE49-F238E27FC236}">
+                <a16:creationId xmlns:a16="http://schemas.microsoft.com/office/drawing/2014/main" id="{1AFCD16D-A0C1-0304-8ABC-07596AD2550D}"/>
+              </a:ext>
+            </a:extLst>
+          </p:cNvPr>
+          <p:cNvSpPr>
+            <a:spLocks noGrp="1"/>
+          </p:cNvSpPr>
+          <p:nvPr>
+            <p:ph type="sldNum" sz="quarter" idx="12"/>
+          </p:nvPr>
+        </p:nvSpPr>
+        <p:spPr/>
+        <p:txBody>
+          <a:bodyPr/>
+          <a:lstStyle/>
+          <a:p>
+            <a:fld id="{109C872D-39A9-4065-8BF3-6A613116E2A1}" type="slidenum">
+              <a:rPr lang="ko-KR" altLang="en-US" smtClean="0"/>
+              <a:t>31</a:t>
+            </a:fld>
+            <a:endParaRPr lang="ko-KR" altLang="en-US"/>
+          </a:p>
+        </p:txBody>
+      </p:sp>
+      <p:sp>
+        <p:nvSpPr>
+          <p:cNvPr id="3" name="TextBox 2">
+            <a:extLst>
+              <a:ext uri="{FF2B5EF4-FFF2-40B4-BE49-F238E27FC236}">
+                <a16:creationId xmlns:a16="http://schemas.microsoft.com/office/drawing/2014/main" id="{8107896C-935A-7260-8D1B-98F4C9FDDFAD}"/>
+              </a:ext>
+            </a:extLst>
+          </p:cNvPr>
+          <p:cNvSpPr txBox="1"/>
+          <p:nvPr/>
+        </p:nvSpPr>
+        <p:spPr>
+          <a:xfrm>
+            <a:off x="288790" y="958844"/>
+            <a:ext cx="11250267" cy="3738011"/>
+          </a:xfrm>
+          <a:prstGeom prst="rect">
+            <a:avLst/>
+          </a:prstGeom>
+          <a:noFill/>
+        </p:spPr>
+        <p:txBody>
+          <a:bodyPr wrap="square" rtlCol="0" anchor="t">
+            <a:spAutoFit/>
+          </a:bodyPr>
+          <a:lstStyle/>
+          <a:p>
+            <a:pPr marL="377825" indent="-285750">
+              <a:lnSpc>
+                <a:spcPct val="150000"/>
+              </a:lnSpc>
+              <a:buFont typeface="Arial" panose="020B0604020202020204" pitchFamily="34" charset="0"/>
+              <a:buChar char="•"/>
+            </a:pPr>
+            <a:r>
+              <a:rPr lang="ko-KR" altLang="en-US" sz="1600" spc="-50" dirty="0"/>
+              <a:t>우리나라는 국민연금제도 도입 초기에 보험료율을 </a:t>
+            </a:r>
+            <a:r>
+              <a:rPr lang="en-US" altLang="ko-KR" sz="1600" spc="-50" dirty="0"/>
+              <a:t>3%</a:t>
+            </a:r>
+            <a:r>
+              <a:rPr lang="ko-KR" altLang="en-US" sz="1600" spc="-50" dirty="0"/>
+              <a:t>라는 낮은 수준으로 설정했기 때문에</a:t>
+            </a:r>
+            <a:r>
+              <a:rPr lang="en-US" altLang="ko-KR" sz="1600" spc="-50" dirty="0"/>
+              <a:t>, </a:t>
+            </a:r>
+            <a:r>
+              <a:rPr lang="ko-KR" altLang="en-US" sz="1600" spc="-50" dirty="0"/>
+              <a:t>제도의 안정적 운영을 위해 보험료율을 인상해야 한다는 주장이 계속 제기되어 왔다</a:t>
+            </a:r>
+            <a:r>
+              <a:rPr lang="en-US" altLang="ko-KR" sz="1600" spc="-50" dirty="0"/>
+              <a:t>.</a:t>
+            </a:r>
+          </a:p>
+          <a:p>
+            <a:pPr marL="835025" lvl="1" indent="-285750">
+              <a:lnSpc>
+                <a:spcPct val="150000"/>
+              </a:lnSpc>
+              <a:buFont typeface="Wingdings" panose="05000000000000000000" pitchFamily="2" charset="2"/>
+              <a:buChar char="ü"/>
+            </a:pPr>
+            <a:r>
+              <a:rPr lang="en-US" altLang="ko-KR" sz="1600" spc="-50" dirty="0"/>
+              <a:t>1998</a:t>
+            </a:r>
+            <a:r>
+              <a:rPr lang="ko-KR" altLang="en-US" sz="1600" spc="-50" dirty="0"/>
+              <a:t>년에 보험료율을 </a:t>
+            </a:r>
+            <a:r>
+              <a:rPr lang="en-US" altLang="ko-KR" sz="1600" spc="-50" dirty="0"/>
+              <a:t>9%</a:t>
+            </a:r>
+            <a:r>
+              <a:rPr lang="ko-KR" altLang="en-US" sz="1600" spc="-50" dirty="0"/>
+              <a:t>로 상향조정하고</a:t>
+            </a:r>
+            <a:r>
+              <a:rPr lang="en-US" altLang="ko-KR" sz="1600" spc="-50" dirty="0"/>
+              <a:t>, </a:t>
+            </a:r>
+            <a:r>
+              <a:rPr lang="ko-KR" altLang="en-US" sz="1600" spc="-50" dirty="0"/>
+              <a:t>그 이후에는 별다른 조정이 없었다</a:t>
+            </a:r>
+            <a:r>
+              <a:rPr lang="en-US" altLang="ko-KR" sz="1600" spc="-50" dirty="0"/>
+              <a:t>.</a:t>
+            </a:r>
+          </a:p>
+          <a:p>
+            <a:pPr marL="835025" lvl="1" indent="-285750">
+              <a:lnSpc>
+                <a:spcPct val="150000"/>
+              </a:lnSpc>
+              <a:buFont typeface="Wingdings" panose="05000000000000000000" pitchFamily="2" charset="2"/>
+              <a:buChar char="ü"/>
+            </a:pPr>
+            <a:r>
+              <a:rPr lang="en-US" altLang="ko-KR" sz="1600" spc="-50" dirty="0"/>
+              <a:t>2025</a:t>
+            </a:r>
+            <a:r>
+              <a:rPr lang="ko-KR" altLang="en-US" sz="1600" spc="-50" dirty="0"/>
+              <a:t>년에 보험료율을 </a:t>
+            </a:r>
+            <a:r>
+              <a:rPr lang="en-US" altLang="ko-KR" sz="1600" spc="-50" dirty="0"/>
+              <a:t>2033</a:t>
+            </a:r>
+            <a:r>
+              <a:rPr lang="ko-KR" altLang="en-US" sz="1600" spc="-50" dirty="0"/>
+              <a:t>년까지 </a:t>
+            </a:r>
+            <a:r>
+              <a:rPr lang="en-US" altLang="ko-KR" sz="1600" spc="-50" dirty="0"/>
+              <a:t>13%</a:t>
+            </a:r>
+            <a:r>
+              <a:rPr lang="ko-KR" altLang="en-US" sz="1600" spc="-50" dirty="0"/>
+              <a:t> 수준에 도달하는 단계적 인상 방안을 마련하였다</a:t>
+            </a:r>
+            <a:r>
+              <a:rPr lang="en-US" altLang="ko-KR" sz="1600" spc="-50" dirty="0"/>
+              <a:t>.</a:t>
+            </a:r>
+          </a:p>
+          <a:p>
+            <a:pPr marL="835025" lvl="1" indent="-285750">
+              <a:lnSpc>
+                <a:spcPct val="150000"/>
+              </a:lnSpc>
+              <a:buFont typeface="Wingdings" panose="05000000000000000000" pitchFamily="2" charset="2"/>
+              <a:buChar char="ü"/>
+            </a:pPr>
+            <a:endParaRPr lang="en-US" altLang="ko-KR" sz="1600" spc="-50" dirty="0"/>
+          </a:p>
+          <a:p>
+            <a:pPr marL="377825" indent="-285750">
+              <a:lnSpc>
+                <a:spcPct val="150000"/>
+              </a:lnSpc>
+              <a:buFont typeface="Arial" panose="020B0604020202020204" pitchFamily="34" charset="0"/>
+              <a:buChar char="•"/>
+            </a:pPr>
+            <a:r>
+              <a:rPr lang="ko-KR" altLang="en-US" sz="1600" spc="-50" dirty="0"/>
+              <a:t>향후 국민연금 보험료율이 인상되더라도</a:t>
+            </a:r>
+            <a:r>
+              <a:rPr lang="en-US" altLang="ko-KR" sz="1600" spc="-50" dirty="0"/>
+              <a:t>, </a:t>
+            </a:r>
+            <a:r>
+              <a:rPr lang="ko-KR" altLang="en-US" sz="1600" spc="-50" dirty="0"/>
+              <a:t>다른 나라와 비교하면 여전히 낮은 수준일 가능성이 크다</a:t>
+            </a:r>
+            <a:r>
+              <a:rPr lang="en-US" altLang="ko-KR" sz="1600" spc="-50" dirty="0"/>
+              <a:t>.</a:t>
+            </a:r>
+          </a:p>
+          <a:p>
+            <a:pPr marL="835025" lvl="1" indent="-285750">
+              <a:lnSpc>
+                <a:spcPct val="150000"/>
+              </a:lnSpc>
+              <a:buFont typeface="Wingdings" panose="05000000000000000000" pitchFamily="2" charset="2"/>
+              <a:buChar char="ü"/>
+            </a:pPr>
+            <a:r>
+              <a:rPr lang="ko-KR" altLang="en-US" sz="1600" spc="-50" dirty="0"/>
+              <a:t>이탈리아</a:t>
+            </a:r>
+            <a:r>
+              <a:rPr lang="en-US" altLang="ko-KR" sz="1600" spc="-50" dirty="0"/>
+              <a:t>, </a:t>
+            </a:r>
+            <a:r>
+              <a:rPr lang="ko-KR" altLang="en-US" sz="1600" spc="-50" dirty="0"/>
+              <a:t>네덜란드</a:t>
+            </a:r>
+            <a:r>
+              <a:rPr lang="en-US" altLang="ko-KR" sz="1600" spc="-50" dirty="0"/>
+              <a:t>, </a:t>
+            </a:r>
+            <a:r>
+              <a:rPr lang="ko-KR" altLang="en-US" sz="1600" spc="-50" dirty="0"/>
+              <a:t>프랑스 등의 연금 보험료율은 </a:t>
+            </a:r>
+            <a:r>
+              <a:rPr lang="en-US" altLang="ko-KR" sz="1600" spc="-50" dirty="0"/>
+              <a:t>25% </a:t>
+            </a:r>
+            <a:r>
+              <a:rPr lang="ko-KR" altLang="en-US" sz="1600" spc="-50" dirty="0"/>
+              <a:t>수준이 넘고</a:t>
+            </a:r>
+            <a:r>
+              <a:rPr lang="en-US" altLang="ko-KR" sz="1600" spc="-50" dirty="0"/>
+              <a:t>, OECD </a:t>
+            </a:r>
+            <a:r>
+              <a:rPr lang="ko-KR" altLang="en-US" sz="1600" spc="-50" dirty="0"/>
+              <a:t>평균은 </a:t>
+            </a:r>
+            <a:r>
+              <a:rPr lang="en-US" altLang="ko-KR" sz="1600" spc="-50" dirty="0"/>
+              <a:t>18%</a:t>
+            </a:r>
+            <a:r>
+              <a:rPr lang="ko-KR" altLang="en-US" sz="1600" spc="-50" dirty="0"/>
+              <a:t>에 달한다</a:t>
+            </a:r>
+            <a:r>
+              <a:rPr lang="en-US" altLang="ko-KR" sz="1600" spc="-50" dirty="0"/>
+              <a:t>.</a:t>
+            </a:r>
+          </a:p>
+          <a:p>
+            <a:pPr marL="835025" lvl="1" indent="-285750">
+              <a:lnSpc>
+                <a:spcPct val="150000"/>
+              </a:lnSpc>
+              <a:buFont typeface="Wingdings" panose="05000000000000000000" pitchFamily="2" charset="2"/>
+              <a:buChar char="ü"/>
+            </a:pPr>
+            <a:r>
+              <a:rPr lang="ko-KR" altLang="en-US" sz="1600" spc="-50" dirty="0"/>
+              <a:t>보험료율의 높고 낮음에 정답은 없지만</a:t>
+            </a:r>
+            <a:r>
+              <a:rPr lang="en-US" altLang="ko-KR" sz="1600" spc="-50" dirty="0"/>
+              <a:t>, </a:t>
+            </a:r>
+            <a:r>
+              <a:rPr lang="ko-KR" altLang="en-US" sz="1600" spc="-50" dirty="0"/>
+              <a:t>낮은 보험료율로 인해 우리나라 연금의 재정은 근본적으로 취약성을 가질 수 밖에 없다</a:t>
+            </a:r>
+            <a:r>
+              <a:rPr lang="en-US" altLang="ko-KR" sz="1600" spc="-50" dirty="0"/>
+              <a:t>.</a:t>
+            </a:r>
+          </a:p>
+          <a:p>
+            <a:pPr marL="835025" lvl="1" indent="-285750">
+              <a:lnSpc>
+                <a:spcPct val="150000"/>
+              </a:lnSpc>
+              <a:buFont typeface="Wingdings" panose="05000000000000000000" pitchFamily="2" charset="2"/>
+              <a:buChar char="ü"/>
+            </a:pPr>
+            <a:endParaRPr lang="en-US" altLang="ko-KR" sz="1600" spc="-50" dirty="0"/>
+          </a:p>
+        </p:txBody>
+      </p:sp>
+    </p:spTree>
+    <p:extLst>
+      <p:ext uri="{BB962C8B-B14F-4D97-AF65-F5344CB8AC3E}">
+        <p14:creationId xmlns:p14="http://schemas.microsoft.com/office/powerpoint/2010/main" val="3061192483"/>
+      </p:ext>
+    </p:extLst>
+  </p:cSld>
+  <p:clrMapOvr>
+    <a:masterClrMapping/>
+  </p:clrMapOvr>
+</p:sld>
+</file>
+
+<file path=ppt/slides/slide32.xml><?xml version="1.0" encoding="utf-8"?>
+<p:sld xmlns:a="http://schemas.openxmlformats.org/drawingml/2006/main" xmlns:r="http://schemas.openxmlformats.org/officeDocument/2006/relationships" xmlns:p="http://schemas.openxmlformats.org/presentationml/2006/main">
+  <p:cSld>
+    <p:spTree>
+      <p:nvGrpSpPr>
+        <p:cNvPr id="1" name="">
+          <a:extLst>
+            <a:ext uri="{FF2B5EF4-FFF2-40B4-BE49-F238E27FC236}">
+              <a16:creationId xmlns:a16="http://schemas.microsoft.com/office/drawing/2014/main" id="{9E43C92B-6A23-9B2C-673E-0B2C9E48D53F}"/>
+            </a:ext>
+          </a:extLst>
+        </p:cNvPr>
+        <p:cNvGrpSpPr/>
+        <p:nvPr/>
+      </p:nvGrpSpPr>
+      <p:grpSpPr>
+        <a:xfrm>
+          <a:off x="0" y="0"/>
+          <a:ext cx="0" cy="0"/>
+          <a:chOff x="0" y="0"/>
+          <a:chExt cx="0" cy="0"/>
+        </a:xfrm>
+      </p:grpSpPr>
+      <p:sp>
+        <p:nvSpPr>
+          <p:cNvPr id="2" name="제목 1">
+            <a:extLst>
+              <a:ext uri="{FF2B5EF4-FFF2-40B4-BE49-F238E27FC236}">
+                <a16:creationId xmlns:a16="http://schemas.microsoft.com/office/drawing/2014/main" id="{A00FA525-9A48-4544-62A9-FCCDA4FEEDA9}"/>
+              </a:ext>
+            </a:extLst>
+          </p:cNvPr>
+          <p:cNvSpPr>
+            <a:spLocks noGrp="1"/>
+          </p:cNvSpPr>
+          <p:nvPr>
+            <p:ph type="title"/>
+          </p:nvPr>
+        </p:nvSpPr>
+        <p:spPr/>
+        <p:txBody>
+          <a:bodyPr/>
+          <a:lstStyle/>
+          <a:p>
+            <a:r>
+              <a:rPr lang="ko-KR" altLang="en-US" dirty="0"/>
+              <a:t>연금의 급여</a:t>
+            </a:r>
+          </a:p>
+        </p:txBody>
+      </p:sp>
+      <p:sp>
+        <p:nvSpPr>
+          <p:cNvPr id="4" name="슬라이드 번호 개체 틀 3">
+            <a:extLst>
+              <a:ext uri="{FF2B5EF4-FFF2-40B4-BE49-F238E27FC236}">
+                <a16:creationId xmlns:a16="http://schemas.microsoft.com/office/drawing/2014/main" id="{8F8AFA4E-7996-0549-009E-A15AC1B165B0}"/>
+              </a:ext>
+            </a:extLst>
+          </p:cNvPr>
+          <p:cNvSpPr>
+            <a:spLocks noGrp="1"/>
+          </p:cNvSpPr>
+          <p:nvPr>
+            <p:ph type="sldNum" sz="quarter" idx="12"/>
+          </p:nvPr>
+        </p:nvSpPr>
+        <p:spPr/>
+        <p:txBody>
+          <a:bodyPr/>
+          <a:lstStyle/>
+          <a:p>
+            <a:fld id="{109C872D-39A9-4065-8BF3-6A613116E2A1}" type="slidenum">
+              <a:rPr lang="ko-KR" altLang="en-US" smtClean="0"/>
+              <a:t>32</a:t>
+            </a:fld>
+            <a:endParaRPr lang="ko-KR" altLang="en-US"/>
+          </a:p>
+        </p:txBody>
+      </p:sp>
+      <mc:AlternateContent xmlns:mc="http://schemas.openxmlformats.org/markup-compatibility/2006">
+        <mc:Choice xmlns:a14="http://schemas.microsoft.com/office/drawing/2010/main" Requires="a14">
+          <p:sp>
+            <p:nvSpPr>
+              <p:cNvPr id="3" name="TextBox 2">
+                <a:extLst>
+                  <a:ext uri="{FF2B5EF4-FFF2-40B4-BE49-F238E27FC236}">
+                    <a16:creationId xmlns:a16="http://schemas.microsoft.com/office/drawing/2014/main" id="{B90851E6-BD04-8186-DBBF-87351589802E}"/>
+                  </a:ext>
+                </a:extLst>
+              </p:cNvPr>
+              <p:cNvSpPr txBox="1"/>
+              <p:nvPr/>
+            </p:nvSpPr>
+            <p:spPr>
+              <a:xfrm>
+                <a:off x="288790" y="958844"/>
+                <a:ext cx="11250267" cy="4847609"/>
+              </a:xfrm>
+              <a:prstGeom prst="rect">
+                <a:avLst/>
+              </a:prstGeom>
+              <a:noFill/>
+            </p:spPr>
+            <p:txBody>
+              <a:bodyPr wrap="square" rtlCol="0" anchor="t">
+                <a:spAutoFit/>
+              </a:bodyPr>
+              <a:lstStyle/>
+              <a:p>
+                <a:pPr marL="377825" indent="-285750">
+                  <a:lnSpc>
+                    <a:spcPct val="150000"/>
+                  </a:lnSpc>
+                  <a:buFont typeface="Arial" panose="020B0604020202020204" pitchFamily="34" charset="0"/>
+                  <a:buChar char="•"/>
+                </a:pPr>
+                <a:r>
+                  <a:rPr lang="ko-KR" altLang="en-US" sz="1600" spc="-50" dirty="0"/>
+                  <a:t>국민연금제도에서 지급하는 급여의 종류에는 노령연금</a:t>
+                </a:r>
+                <a:r>
+                  <a:rPr lang="en-US" altLang="ko-KR" sz="1600" spc="-50" dirty="0"/>
+                  <a:t>, </a:t>
+                </a:r>
+                <a:r>
+                  <a:rPr lang="ko-KR" altLang="en-US" sz="1600" spc="-50" dirty="0"/>
+                  <a:t>장애연금</a:t>
+                </a:r>
+                <a:r>
+                  <a:rPr lang="en-US" altLang="ko-KR" sz="1600" spc="-50" dirty="0"/>
+                  <a:t>, </a:t>
+                </a:r>
+                <a:r>
+                  <a:rPr lang="ko-KR" altLang="en-US" sz="1600" spc="-50" dirty="0"/>
+                  <a:t>유족연금이 있다</a:t>
+                </a:r>
+                <a:r>
+                  <a:rPr lang="en-US" altLang="ko-KR" sz="1600" spc="-50" dirty="0"/>
+                  <a:t>.</a:t>
+                </a:r>
+              </a:p>
+              <a:p>
+                <a:pPr marL="835025" lvl="1" indent="-285750">
+                  <a:lnSpc>
+                    <a:spcPct val="150000"/>
+                  </a:lnSpc>
+                  <a:buFont typeface="Wingdings" panose="05000000000000000000" pitchFamily="2" charset="2"/>
+                  <a:buChar char="ü"/>
+                </a:pPr>
+                <a:r>
+                  <a:rPr lang="ko-KR" altLang="en-US" sz="1600" spc="-50" dirty="0"/>
+                  <a:t>노령연금이 가장 기본적인 연금으로</a:t>
+                </a:r>
+                <a:r>
+                  <a:rPr lang="en-US" altLang="ko-KR" sz="1600" spc="-50" dirty="0"/>
+                  <a:t>, </a:t>
+                </a:r>
+                <a:r>
+                  <a:rPr lang="ko-KR" altLang="en-US" sz="1600" spc="-50" dirty="0"/>
+                  <a:t>가입기간이 </a:t>
+                </a:r>
+                <a:r>
+                  <a:rPr lang="en-US" altLang="ko-KR" sz="1600" spc="-50" dirty="0"/>
+                  <a:t>10</a:t>
+                </a:r>
+                <a:r>
+                  <a:rPr lang="ko-KR" altLang="en-US" sz="1600" spc="-50" dirty="0"/>
+                  <a:t>년이 넘고</a:t>
+                </a:r>
+                <a:r>
+                  <a:rPr lang="en-US" altLang="ko-KR" sz="1600" spc="-50" dirty="0"/>
+                  <a:t>, 60</a:t>
+                </a:r>
+                <a:r>
+                  <a:rPr lang="ko-KR" altLang="en-US" sz="1600" spc="-50" dirty="0"/>
+                  <a:t>세에 도달한 사람이 받게 되는 연금이다</a:t>
+                </a:r>
+                <a:r>
+                  <a:rPr lang="en-US" altLang="ko-KR" sz="1600" spc="-50" dirty="0"/>
+                  <a:t>.</a:t>
+                </a:r>
+              </a:p>
+              <a:p>
+                <a:pPr marL="1292225" lvl="2" indent="-285750">
+                  <a:lnSpc>
+                    <a:spcPct val="150000"/>
+                  </a:lnSpc>
+                  <a:buFont typeface="Wingdings" panose="05000000000000000000" pitchFamily="2" charset="2"/>
+                  <a:buChar char="Ø"/>
+                </a:pPr>
+                <a:r>
+                  <a:rPr lang="ko-KR" altLang="en-US" sz="1600" spc="-50" dirty="0"/>
+                  <a:t>소득이 있는 업무에 종사하지 않는 경우는 </a:t>
+                </a:r>
+                <a:r>
+                  <a:rPr lang="en-US" altLang="ko-KR" sz="1600" spc="-50" dirty="0"/>
+                  <a:t>55</a:t>
+                </a:r>
+                <a:r>
+                  <a:rPr lang="ko-KR" altLang="en-US" sz="1600" spc="-50" dirty="0"/>
+                  <a:t>세를 기준으로 한다</a:t>
+                </a:r>
+                <a:r>
+                  <a:rPr lang="en-US" altLang="ko-KR" sz="1600" spc="-50" dirty="0"/>
+                  <a:t>.</a:t>
+                </a:r>
+              </a:p>
+              <a:p>
+                <a:pPr marL="1292225" lvl="2" indent="-285750">
+                  <a:lnSpc>
+                    <a:spcPct val="150000"/>
+                  </a:lnSpc>
+                  <a:buFont typeface="Wingdings" panose="05000000000000000000" pitchFamily="2" charset="2"/>
+                  <a:buChar char="Ø"/>
+                </a:pPr>
+                <a:endParaRPr lang="en-US" altLang="ko-KR" sz="1600" spc="-50" dirty="0"/>
+              </a:p>
+              <a:p>
+                <a:pPr marL="377825" indent="-285750">
+                  <a:lnSpc>
+                    <a:spcPct val="150000"/>
+                  </a:lnSpc>
+                  <a:buFont typeface="Arial" panose="020B0604020202020204" pitchFamily="34" charset="0"/>
+                  <a:buChar char="•"/>
+                </a:pPr>
+                <a:r>
+                  <a:rPr lang="ko-KR" altLang="en-US" sz="1600" spc="-50" dirty="0"/>
+                  <a:t>가입자가 받게 되는 노령연금의 금액은 아래와 같은 방식으로 결정된다</a:t>
+                </a:r>
+                <a:r>
+                  <a:rPr lang="en-US" altLang="ko-KR" sz="1600" spc="-50" dirty="0"/>
+                  <a:t>.</a:t>
+                </a:r>
+              </a:p>
+              <a:p>
+                <a:pPr marL="835025" lvl="1" indent="-285750">
+                  <a:lnSpc>
+                    <a:spcPct val="150000"/>
+                  </a:lnSpc>
+                  <a:buFont typeface="Wingdings" panose="05000000000000000000" pitchFamily="2" charset="2"/>
+                  <a:buChar char="ü"/>
+                </a:pPr>
+                <a:r>
+                  <a:rPr lang="ko-KR" altLang="en-US" sz="1600" spc="-50" dirty="0"/>
+                  <a:t>각 가입자가 얼마나 오랜 기간동안</a:t>
+                </a:r>
+                <a:r>
+                  <a:rPr lang="en-US" altLang="ko-KR" sz="1600" spc="-50" dirty="0"/>
+                  <a:t>, </a:t>
+                </a:r>
+                <a:r>
+                  <a:rPr lang="ko-KR" altLang="en-US" sz="1600" spc="-50" dirty="0"/>
+                  <a:t>얼마의 보험료를 </a:t>
+                </a:r>
+                <a:r>
+                  <a:rPr lang="ko-KR" altLang="en-US" sz="1600" spc="-50" dirty="0" err="1"/>
+                  <a:t>납부했느냐에</a:t>
+                </a:r>
+                <a:r>
+                  <a:rPr lang="ko-KR" altLang="en-US" sz="1600" spc="-50" dirty="0"/>
+                  <a:t> 따라 그가 받을 기본연금액이 결정된다</a:t>
+                </a:r>
+                <a:r>
+                  <a:rPr lang="en-US" altLang="ko-KR" sz="1600" spc="-50" dirty="0"/>
+                  <a:t>.</a:t>
+                </a:r>
+              </a:p>
+              <a:p>
+                <a:pPr marL="835025" lvl="1" indent="-285750">
+                  <a:lnSpc>
+                    <a:spcPct val="150000"/>
+                  </a:lnSpc>
+                  <a:buFont typeface="Wingdings" panose="05000000000000000000" pitchFamily="2" charset="2"/>
+                  <a:buChar char="ü"/>
+                </a:pPr>
+                <a:r>
+                  <a:rPr lang="en-US" altLang="ko-KR" sz="1600" spc="-50" dirty="0"/>
+                  <a:t>1</a:t>
+                </a:r>
+                <a:r>
+                  <a:rPr lang="ko-KR" altLang="en-US" sz="1600" spc="-50" dirty="0" err="1"/>
+                  <a:t>년동안의</a:t>
+                </a:r>
+                <a:r>
+                  <a:rPr lang="ko-KR" altLang="en-US" sz="1600" spc="-50" dirty="0"/>
+                  <a:t> 기본연금액을 산정하는 공식은 아래와 같다</a:t>
+                </a:r>
+                <a:r>
+                  <a:rPr lang="en-US" altLang="ko-KR" sz="1600" spc="-50" dirty="0"/>
+                  <a:t>.</a:t>
+                </a:r>
+              </a:p>
+              <a:p>
+                <a:pPr marL="835025" lvl="1" indent="-285750">
+                  <a:lnSpc>
+                    <a:spcPct val="150000"/>
+                  </a:lnSpc>
+                  <a:buFont typeface="Wingdings" panose="05000000000000000000" pitchFamily="2" charset="2"/>
+                  <a:buChar char="ü"/>
+                </a:pPr>
+                <a:endParaRPr lang="en-US" altLang="ko-KR" sz="1600" spc="-50" dirty="0"/>
+              </a:p>
+              <a:p>
+                <a:pPr marL="835025" lvl="1" indent="-285750">
+                  <a:lnSpc>
+                    <a:spcPct val="150000"/>
+                  </a:lnSpc>
+                  <a:buFont typeface="Wingdings" panose="05000000000000000000" pitchFamily="2" charset="2"/>
+                  <a:buChar char="ü"/>
+                </a:pPr>
+                <a:endParaRPr lang="en-US" altLang="ko-KR" sz="1600" spc="-50" dirty="0"/>
+              </a:p>
+              <a:p>
+                <a:pPr marL="835025" lvl="1" indent="-285750">
+                  <a:lnSpc>
+                    <a:spcPct val="150000"/>
+                  </a:lnSpc>
+                  <a:buFont typeface="Wingdings" panose="05000000000000000000" pitchFamily="2" charset="2"/>
+                  <a:buChar char="ü"/>
+                </a:pPr>
+                <a14:m>
+                  <m:oMath xmlns:m="http://schemas.openxmlformats.org/officeDocument/2006/math">
+                    <m:r>
+                      <a:rPr lang="en-US" altLang="ko-KR" sz="1600" i="1">
+                        <a:latin typeface="Cambria Math" panose="02040503050406030204" pitchFamily="18" charset="0"/>
+                      </a:rPr>
+                      <m:t>𝐴</m:t>
+                    </m:r>
+                  </m:oMath>
+                </a14:m>
+                <a:r>
+                  <a:rPr lang="ko-KR" altLang="en-US" sz="1600" spc="-50" dirty="0"/>
+                  <a:t>는 연금수급 직전 </a:t>
+                </a:r>
+                <a:r>
+                  <a:rPr lang="en-US" altLang="ko-KR" sz="1600" spc="-50" dirty="0"/>
+                  <a:t>3</a:t>
+                </a:r>
+                <a:r>
+                  <a:rPr lang="ko-KR" altLang="en-US" sz="1600" spc="-50" dirty="0"/>
+                  <a:t>년 동안의 전체 가입자의 월 평균보수</a:t>
+                </a:r>
+                <a:endParaRPr lang="en-US" altLang="ko-KR" sz="1600" spc="-50" dirty="0"/>
+              </a:p>
+              <a:p>
+                <a:pPr marL="835025" lvl="1" indent="-285750">
+                  <a:lnSpc>
+                    <a:spcPct val="150000"/>
+                  </a:lnSpc>
+                  <a:buFont typeface="Wingdings" panose="05000000000000000000" pitchFamily="2" charset="2"/>
+                  <a:buChar char="ü"/>
+                </a:pPr>
+                <a14:m>
+                  <m:oMath xmlns:m="http://schemas.openxmlformats.org/officeDocument/2006/math">
+                    <m:r>
+                      <a:rPr lang="en-US" altLang="ko-KR" sz="1600" i="1">
+                        <a:latin typeface="Cambria Math" panose="02040503050406030204" pitchFamily="18" charset="0"/>
+                      </a:rPr>
+                      <m:t>𝐵</m:t>
+                    </m:r>
+                  </m:oMath>
+                </a14:m>
+                <a:r>
+                  <a:rPr lang="ko-KR" altLang="en-US" sz="1600" spc="-50" dirty="0"/>
+                  <a:t>는 가입자 개인의 가입기간 중 월 평균보수</a:t>
+                </a:r>
+                <a:endParaRPr lang="en-US" altLang="ko-KR" sz="1600" spc="-50" dirty="0"/>
+              </a:p>
+              <a:p>
+                <a:pPr marL="835025" lvl="1" indent="-285750">
+                  <a:lnSpc>
+                    <a:spcPct val="150000"/>
+                  </a:lnSpc>
+                  <a:buFont typeface="Wingdings" panose="05000000000000000000" pitchFamily="2" charset="2"/>
+                  <a:buChar char="ü"/>
+                </a:pPr>
+                <a14:m>
+                  <m:oMath xmlns:m="http://schemas.openxmlformats.org/officeDocument/2006/math">
+                    <m:r>
+                      <a:rPr lang="en-US" altLang="ko-KR" sz="1600" i="1">
+                        <a:latin typeface="Cambria Math" panose="02040503050406030204" pitchFamily="18" charset="0"/>
+                        <a:ea typeface="Cambria Math" panose="02040503050406030204" pitchFamily="18" charset="0"/>
+                      </a:rPr>
+                      <m:t>𝑦</m:t>
+                    </m:r>
+                  </m:oMath>
+                </a14:m>
+                <a:r>
+                  <a:rPr lang="ko-KR" altLang="en-US" sz="1600" spc="-50" dirty="0"/>
+                  <a:t>는 </a:t>
+                </a:r>
+                <a:r>
+                  <a:rPr lang="en-US" altLang="ko-KR" sz="1600" spc="-50" dirty="0"/>
+                  <a:t>20</a:t>
+                </a:r>
+                <a:r>
+                  <a:rPr lang="ko-KR" altLang="en-US" sz="1600" spc="-50" dirty="0"/>
+                  <a:t>년을 초과하는 가입연수</a:t>
+                </a:r>
+                <a:endParaRPr lang="en-US" altLang="ko-KR" sz="1600" spc="-50" dirty="0"/>
+              </a:p>
+              <a:p>
+                <a:pPr marL="835025" lvl="1" indent="-285750">
+                  <a:lnSpc>
+                    <a:spcPct val="150000"/>
+                  </a:lnSpc>
+                  <a:buFont typeface="Wingdings" panose="05000000000000000000" pitchFamily="2" charset="2"/>
+                  <a:buChar char="ü"/>
+                </a:pPr>
+                <a14:m>
+                  <m:oMath xmlns:m="http://schemas.openxmlformats.org/officeDocument/2006/math">
+                    <m:r>
+                      <a:rPr lang="ko-KR" altLang="en-US" sz="1600" i="1">
+                        <a:latin typeface="Cambria Math" panose="02040503050406030204" pitchFamily="18" charset="0"/>
+                      </a:rPr>
+                      <m:t>𝛼</m:t>
+                    </m:r>
+                  </m:oMath>
+                </a14:m>
+                <a:r>
+                  <a:rPr lang="ko-KR" altLang="en-US" sz="1600" dirty="0">
+                    <a:latin typeface="Cambria Math" panose="02040503050406030204" pitchFamily="18" charset="0"/>
+                  </a:rPr>
+                  <a:t>는 소득대체율과</a:t>
+                </a:r>
+                <a:r>
+                  <a:rPr lang="en-US" altLang="ko-KR" sz="1600" spc="-50" dirty="0">
+                    <a:latin typeface="Cambria Math" panose="02040503050406030204" pitchFamily="18" charset="0"/>
+                  </a:rPr>
+                  <a:t> </a:t>
+                </a:r>
+                <a:r>
+                  <a:rPr lang="ko-KR" altLang="en-US" sz="1600" spc="-50" dirty="0">
+                    <a:latin typeface="Cambria Math" panose="02040503050406030204" pitchFamily="18" charset="0"/>
+                  </a:rPr>
+                  <a:t>관련된 상수로</a:t>
+                </a:r>
+                <a:r>
+                  <a:rPr lang="en-US" altLang="ko-KR" sz="1600" spc="-50" dirty="0">
+                    <a:latin typeface="Cambria Math" panose="02040503050406030204" pitchFamily="18" charset="0"/>
+                  </a:rPr>
+                  <a:t>, </a:t>
+                </a:r>
+                <a:r>
+                  <a:rPr lang="ko-KR" altLang="en-US" sz="1600" spc="-50" dirty="0">
+                    <a:latin typeface="Cambria Math" panose="02040503050406030204" pitchFamily="18" charset="0"/>
+                  </a:rPr>
+                  <a:t>이는 제도의 변화로 인해 가입자가 언제 </a:t>
+                </a:r>
+                <a:r>
+                  <a:rPr lang="ko-KR" altLang="en-US" sz="1600" spc="-50" dirty="0" err="1">
+                    <a:latin typeface="Cambria Math" panose="02040503050406030204" pitchFamily="18" charset="0"/>
+                  </a:rPr>
+                  <a:t>가입했느냐에</a:t>
+                </a:r>
+                <a:r>
+                  <a:rPr lang="ko-KR" altLang="en-US" sz="1600" spc="-50" dirty="0">
+                    <a:latin typeface="Cambria Math" panose="02040503050406030204" pitchFamily="18" charset="0"/>
+                  </a:rPr>
+                  <a:t> 따라 다른 값을 갖는다</a:t>
+                </a:r>
+                <a:r>
+                  <a:rPr lang="en-US" altLang="ko-KR" sz="1600" spc="-50">
+                    <a:latin typeface="Cambria Math" panose="02040503050406030204" pitchFamily="18" charset="0"/>
+                  </a:rPr>
+                  <a:t>.</a:t>
+                </a:r>
+                <a:endParaRPr lang="en-US" altLang="ko-KR" sz="1600" dirty="0">
+                  <a:latin typeface="Cambria Math" panose="02040503050406030204" pitchFamily="18" charset="0"/>
+                </a:endParaRPr>
+              </a:p>
+            </p:txBody>
+          </p:sp>
+        </mc:Choice>
+        <mc:Fallback>
+          <p:sp>
+            <p:nvSpPr>
+              <p:cNvPr id="3" name="TextBox 2">
+                <a:extLst>
+                  <a:ext uri="{FF2B5EF4-FFF2-40B4-BE49-F238E27FC236}">
+                    <a16:creationId xmlns:a16="http://schemas.microsoft.com/office/drawing/2014/main" id="{B90851E6-BD04-8186-DBBF-87351589802E}"/>
+                  </a:ext>
+                </a:extLst>
+              </p:cNvPr>
+              <p:cNvSpPr txBox="1">
+                <a:spLocks noRot="1" noChangeAspect="1" noMove="1" noResize="1" noEditPoints="1" noAdjustHandles="1" noChangeArrowheads="1" noChangeShapeType="1" noTextEdit="1"/>
+              </p:cNvSpPr>
+              <p:nvPr/>
+            </p:nvSpPr>
+            <p:spPr>
+              <a:xfrm>
+                <a:off x="288790" y="958844"/>
+                <a:ext cx="11250267" cy="4847609"/>
+              </a:xfrm>
+              <a:prstGeom prst="rect">
+                <a:avLst/>
+              </a:prstGeom>
+              <a:blipFill>
+                <a:blip r:embed="rId3"/>
+                <a:stretch>
+                  <a:fillRect b="-503"/>
+                </a:stretch>
+              </a:blipFill>
+            </p:spPr>
+            <p:txBody>
+              <a:bodyPr/>
+              <a:lstStyle/>
+              <a:p>
+                <a:r>
+                  <a:rPr lang="ko-KR" altLang="en-US">
+                    <a:noFill/>
+                  </a:rPr>
+                  <a:t> </a:t>
+                </a:r>
+              </a:p>
+            </p:txBody>
+          </p:sp>
+        </mc:Fallback>
+      </mc:AlternateContent>
+      <mc:AlternateContent xmlns:mc="http://schemas.openxmlformats.org/markup-compatibility/2006">
+        <mc:Choice xmlns:a14="http://schemas.microsoft.com/office/drawing/2010/main" Requires="a14">
+          <p:sp>
+            <p:nvSpPr>
+              <p:cNvPr id="5" name="TextBox 4">
+                <a:extLst>
+                  <a:ext uri="{FF2B5EF4-FFF2-40B4-BE49-F238E27FC236}">
+                    <a16:creationId xmlns:a16="http://schemas.microsoft.com/office/drawing/2014/main" id="{6B2076AF-AD77-7700-37DB-7D967903178F}"/>
+                  </a:ext>
+                </a:extLst>
+              </p:cNvPr>
+              <p:cNvSpPr txBox="1"/>
+              <p:nvPr/>
+            </p:nvSpPr>
+            <p:spPr>
+              <a:xfrm>
+                <a:off x="1369503" y="3812796"/>
+                <a:ext cx="4010713" cy="282193"/>
+              </a:xfrm>
+              <a:prstGeom prst="rect">
+                <a:avLst/>
+              </a:prstGeom>
+              <a:noFill/>
+            </p:spPr>
+            <p:txBody>
+              <a:bodyPr wrap="none" lIns="0" tIns="0" rIns="0" bIns="0" rtlCol="0">
+                <a:spAutoFit/>
+              </a:bodyPr>
+              <a:lstStyle/>
+              <a:p>
+                <a14:m>
+                  <m:oMathPara xmlns:m="http://schemas.openxmlformats.org/officeDocument/2006/math">
+                    <m:oMathParaPr>
+                      <m:jc m:val="centerGroup"/>
+                    </m:oMathParaPr>
+                    <m:oMath xmlns:m="http://schemas.openxmlformats.org/officeDocument/2006/math">
+                      <m:r>
+                        <a:rPr lang="ko-KR" altLang="en-US" i="1">
+                          <a:latin typeface="Cambria Math" panose="02040503050406030204" pitchFamily="18" charset="0"/>
+                        </a:rPr>
+                        <m:t>기</m:t>
+                      </m:r>
+                      <m:r>
+                        <a:rPr lang="ko-KR" altLang="en-US" i="1" smtClean="0">
+                          <a:latin typeface="Cambria Math" panose="02040503050406030204" pitchFamily="18" charset="0"/>
+                        </a:rPr>
+                        <m:t>본</m:t>
+                      </m:r>
+                      <m:r>
+                        <a:rPr lang="ko-KR" altLang="en-US" i="1">
+                          <a:latin typeface="Cambria Math" panose="02040503050406030204" pitchFamily="18" charset="0"/>
+                        </a:rPr>
+                        <m:t>연</m:t>
+                      </m:r>
+                      <m:r>
+                        <a:rPr lang="ko-KR" altLang="en-US" i="1" smtClean="0">
+                          <a:latin typeface="Cambria Math" panose="02040503050406030204" pitchFamily="18" charset="0"/>
+                        </a:rPr>
+                        <m:t>금</m:t>
+                      </m:r>
+                      <m:r>
+                        <a:rPr lang="ko-KR" altLang="en-US" i="1">
+                          <a:latin typeface="Cambria Math" panose="02040503050406030204" pitchFamily="18" charset="0"/>
+                        </a:rPr>
+                        <m:t>액</m:t>
+                      </m:r>
+                      <m:r>
+                        <a:rPr lang="en-US" altLang="ko-KR" b="0" i="1" smtClean="0">
+                          <a:latin typeface="Cambria Math" panose="02040503050406030204" pitchFamily="18" charset="0"/>
+                        </a:rPr>
+                        <m:t>=</m:t>
+                      </m:r>
+                      <m:r>
+                        <a:rPr lang="ko-KR" altLang="en-US" b="0" i="1" smtClean="0">
+                          <a:latin typeface="Cambria Math" panose="02040503050406030204" pitchFamily="18" charset="0"/>
+                        </a:rPr>
+                        <m:t>𝛼</m:t>
+                      </m:r>
+                      <m:d>
+                        <m:dPr>
+                          <m:ctrlPr>
+                            <a:rPr lang="en-US" altLang="ko-KR" b="0" i="1" smtClean="0">
+                              <a:latin typeface="Cambria Math" panose="02040503050406030204" pitchFamily="18" charset="0"/>
+                            </a:rPr>
+                          </m:ctrlPr>
+                        </m:dPr>
+                        <m:e>
+                          <m:r>
+                            <a:rPr lang="en-US" altLang="ko-KR" b="0" i="1" smtClean="0">
+                              <a:latin typeface="Cambria Math" panose="02040503050406030204" pitchFamily="18" charset="0"/>
+                            </a:rPr>
+                            <m:t>𝐴</m:t>
+                          </m:r>
+                          <m:r>
+                            <a:rPr lang="en-US" altLang="ko-KR" b="0" i="1" smtClean="0">
+                              <a:latin typeface="Cambria Math" panose="02040503050406030204" pitchFamily="18" charset="0"/>
+                            </a:rPr>
+                            <m:t>+</m:t>
+                          </m:r>
+                          <m:r>
+                            <a:rPr lang="en-US" altLang="ko-KR" b="0" i="1" smtClean="0">
+                              <a:latin typeface="Cambria Math" panose="02040503050406030204" pitchFamily="18" charset="0"/>
+                            </a:rPr>
+                            <m:t>𝐵</m:t>
+                          </m:r>
+                        </m:e>
+                      </m:d>
+                      <m:r>
+                        <a:rPr lang="en-US" altLang="ko-KR" b="0" i="1" smtClean="0">
+                          <a:latin typeface="Cambria Math" panose="02040503050406030204" pitchFamily="18" charset="0"/>
+                          <a:ea typeface="Cambria Math" panose="02040503050406030204" pitchFamily="18" charset="0"/>
+                        </a:rPr>
+                        <m:t>×(1+0.05</m:t>
+                      </m:r>
+                      <m:r>
+                        <a:rPr lang="en-US" altLang="ko-KR" b="0" i="1" smtClean="0">
+                          <a:latin typeface="Cambria Math" panose="02040503050406030204" pitchFamily="18" charset="0"/>
+                          <a:ea typeface="Cambria Math" panose="02040503050406030204" pitchFamily="18" charset="0"/>
+                        </a:rPr>
+                        <m:t>𝑦</m:t>
+                      </m:r>
+                      <m:r>
+                        <a:rPr lang="en-US" altLang="ko-KR" b="0" i="1" smtClean="0">
+                          <a:latin typeface="Cambria Math" panose="02040503050406030204" pitchFamily="18" charset="0"/>
+                          <a:ea typeface="Cambria Math" panose="02040503050406030204" pitchFamily="18" charset="0"/>
+                        </a:rPr>
+                        <m:t>)</m:t>
+                      </m:r>
+                    </m:oMath>
+                  </m:oMathPara>
+                </a14:m>
+                <a:endParaRPr lang="ko-KR" altLang="en-US" dirty="0"/>
+              </a:p>
+            </p:txBody>
+          </p:sp>
+        </mc:Choice>
+        <mc:Fallback>
+          <p:sp>
+            <p:nvSpPr>
+              <p:cNvPr id="5" name="TextBox 4">
+                <a:extLst>
+                  <a:ext uri="{FF2B5EF4-FFF2-40B4-BE49-F238E27FC236}">
+                    <a16:creationId xmlns:a16="http://schemas.microsoft.com/office/drawing/2014/main" id="{6B2076AF-AD77-7700-37DB-7D967903178F}"/>
+                  </a:ext>
+                </a:extLst>
+              </p:cNvPr>
+              <p:cNvSpPr txBox="1">
+                <a:spLocks noRot="1" noChangeAspect="1" noMove="1" noResize="1" noEditPoints="1" noAdjustHandles="1" noChangeArrowheads="1" noChangeShapeType="1" noTextEdit="1"/>
+              </p:cNvSpPr>
+              <p:nvPr/>
+            </p:nvSpPr>
+            <p:spPr>
+              <a:xfrm>
+                <a:off x="1369503" y="3812796"/>
+                <a:ext cx="4010713" cy="282193"/>
+              </a:xfrm>
+              <a:prstGeom prst="rect">
+                <a:avLst/>
+              </a:prstGeom>
+              <a:blipFill>
+                <a:blip r:embed="rId4"/>
+                <a:stretch>
+                  <a:fillRect t="-6383" b="-36170"/>
+                </a:stretch>
+              </a:blipFill>
+            </p:spPr>
+            <p:txBody>
+              <a:bodyPr/>
+              <a:lstStyle/>
+              <a:p>
+                <a:r>
+                  <a:rPr lang="ko-KR" altLang="en-US">
+                    <a:noFill/>
+                  </a:rPr>
+                  <a:t> </a:t>
+                </a:r>
+              </a:p>
+            </p:txBody>
+          </p:sp>
+        </mc:Fallback>
+      </mc:AlternateContent>
+    </p:spTree>
+    <p:extLst>
+      <p:ext uri="{BB962C8B-B14F-4D97-AF65-F5344CB8AC3E}">
+        <p14:creationId xmlns:p14="http://schemas.microsoft.com/office/powerpoint/2010/main" val="3135953836"/>
+      </p:ext>
+    </p:extLst>
+  </p:cSld>
+  <p:clrMapOvr>
+    <a:masterClrMapping/>
+  </p:clrMapOvr>
+</p:sld>
+</file>
+
+<file path=ppt/slides/slide33.xml><?xml version="1.0" encoding="utf-8"?>
+<p:sld xmlns:a="http://schemas.openxmlformats.org/drawingml/2006/main" xmlns:r="http://schemas.openxmlformats.org/officeDocument/2006/relationships" xmlns:p="http://schemas.openxmlformats.org/presentationml/2006/main">
+  <p:cSld>
+    <p:spTree>
+      <p:nvGrpSpPr>
+        <p:cNvPr id="1" name="">
+          <a:extLst>
+            <a:ext uri="{FF2B5EF4-FFF2-40B4-BE49-F238E27FC236}">
               <a16:creationId xmlns:a16="http://schemas.microsoft.com/office/drawing/2014/main" id="{8EA7EF4E-B5E0-3A1D-111F-8C3807B2C633}"/>
             </a:ext>
           </a:extLst>
@@ -14778,7 +16878,7 @@
           <a:p>
             <a:fld id="{109C872D-39A9-4065-8BF3-6A613116E2A1}" type="slidenum">
               <a:rPr lang="ko-KR" altLang="en-US" smtClean="0"/>
-              <a:t>30</a:t>
+              <a:t>33</a:t>
             </a:fld>
             <a:endParaRPr lang="ko-KR" altLang="en-US"/>
           </a:p>
@@ -14838,7 +16938,7 @@
 </p:sld>
 </file>
 
-<file path=ppt/slides/slide31.xml><?xml version="1.0" encoding="utf-8"?>
+<file path=ppt/slides/slide34.xml><?xml version="1.0" encoding="utf-8"?>
 <p:sld xmlns:a="http://schemas.openxmlformats.org/drawingml/2006/main" xmlns:r="http://schemas.openxmlformats.org/officeDocument/2006/relationships" xmlns:p="http://schemas.openxmlformats.org/presentationml/2006/main">
   <p:cSld>
     <p:spTree>
@@ -14921,7 +17021,7 @@
           <a:p>
             <a:fld id="{109C872D-39A9-4065-8BF3-6A613116E2A1}" type="slidenum">
               <a:rPr lang="ko-KR" altLang="en-US" smtClean="0"/>
-              <a:t>31</a:t>
+              <a:t>34</a:t>
             </a:fld>
             <a:endParaRPr lang="ko-KR" altLang="en-US"/>
           </a:p>
@@ -14981,7 +17081,7 @@
 </p:sld>
 </file>
 
-<file path=ppt/slides/slide32.xml><?xml version="1.0" encoding="utf-8"?>
+<file path=ppt/slides/slide35.xml><?xml version="1.0" encoding="utf-8"?>
 <p:sld xmlns:a="http://schemas.openxmlformats.org/drawingml/2006/main" xmlns:r="http://schemas.openxmlformats.org/officeDocument/2006/relationships" xmlns:p="http://schemas.openxmlformats.org/presentationml/2006/main">
   <p:cSld>
     <p:spTree>
@@ -15055,7 +17155,7 @@
           <a:p>
             <a:fld id="{109C872D-39A9-4065-8BF3-6A613116E2A1}" type="slidenum">
               <a:rPr lang="ko-KR" altLang="en-US" smtClean="0"/>
-              <a:t>32</a:t>
+              <a:t>35</a:t>
             </a:fld>
             <a:endParaRPr lang="ko-KR" altLang="en-US"/>
           </a:p>
@@ -15341,7 +17441,7 @@
 </p:sld>
 </file>
 
-<file path=ppt/slides/slide33.xml><?xml version="1.0" encoding="utf-8"?>
+<file path=ppt/slides/slide36.xml><?xml version="1.0" encoding="utf-8"?>
 <p:sld xmlns:a="http://schemas.openxmlformats.org/drawingml/2006/main" xmlns:r="http://schemas.openxmlformats.org/officeDocument/2006/relationships" xmlns:p="http://schemas.openxmlformats.org/presentationml/2006/main">
   <p:cSld>
     <p:spTree>
@@ -15415,7 +17515,7 @@
           <a:p>
             <a:fld id="{109C872D-39A9-4065-8BF3-6A613116E2A1}" type="slidenum">
               <a:rPr lang="ko-KR" altLang="en-US" smtClean="0"/>
-              <a:t>33</a:t>
+              <a:t>36</a:t>
             </a:fld>
             <a:endParaRPr lang="ko-KR" altLang="en-US"/>
           </a:p>
@@ -15751,7 +17851,7 @@
 </p:sld>
 </file>
 
-<file path=ppt/slides/slide34.xml><?xml version="1.0" encoding="utf-8"?>
+<file path=ppt/slides/slide37.xml><?xml version="1.0" encoding="utf-8"?>
 <p:sld xmlns:a="http://schemas.openxmlformats.org/drawingml/2006/main" xmlns:r="http://schemas.openxmlformats.org/officeDocument/2006/relationships" xmlns:p="http://schemas.openxmlformats.org/presentationml/2006/main">
   <p:cSld>
     <p:spTree>
@@ -15825,7 +17925,7 @@
           <a:p>
             <a:fld id="{109C872D-39A9-4065-8BF3-6A613116E2A1}" type="slidenum">
               <a:rPr lang="ko-KR" altLang="en-US" smtClean="0"/>
-              <a:t>34</a:t>
+              <a:t>37</a:t>
             </a:fld>
             <a:endParaRPr lang="ko-KR" altLang="en-US"/>
           </a:p>
@@ -16013,7 +18113,7 @@
 </p:sld>
 </file>
 
-<file path=ppt/slides/slide35.xml><?xml version="1.0" encoding="utf-8"?>
+<file path=ppt/slides/slide38.xml><?xml version="1.0" encoding="utf-8"?>
 <p:sld xmlns:a="http://schemas.openxmlformats.org/drawingml/2006/main" xmlns:r="http://schemas.openxmlformats.org/officeDocument/2006/relationships" xmlns:p="http://schemas.openxmlformats.org/presentationml/2006/main">
   <p:cSld>
     <p:spTree>
@@ -16096,7 +18196,7 @@
           <a:p>
             <a:fld id="{109C872D-39A9-4065-8BF3-6A613116E2A1}" type="slidenum">
               <a:rPr lang="ko-KR" altLang="en-US" smtClean="0"/>
-              <a:t>35</a:t>
+              <a:t>38</a:t>
             </a:fld>
             <a:endParaRPr lang="ko-KR" altLang="en-US"/>
           </a:p>
@@ -16156,7 +18256,7 @@
 </p:sld>
 </file>
 
-<file path=ppt/slides/slide36.xml><?xml version="1.0" encoding="utf-8"?>
+<file path=ppt/slides/slide39.xml><?xml version="1.0" encoding="utf-8"?>
 <p:sld xmlns:a="http://schemas.openxmlformats.org/drawingml/2006/main" xmlns:r="http://schemas.openxmlformats.org/officeDocument/2006/relationships" xmlns:p="http://schemas.openxmlformats.org/presentationml/2006/main">
   <p:cSld>
     <p:spTree>
@@ -16230,7 +18330,7 @@
           <a:p>
             <a:fld id="{109C872D-39A9-4065-8BF3-6A613116E2A1}" type="slidenum">
               <a:rPr lang="ko-KR" altLang="en-US" smtClean="0"/>
-              <a:t>36</a:t>
+              <a:t>39</a:t>
             </a:fld>
             <a:endParaRPr lang="ko-KR" altLang="en-US"/>
           </a:p>
@@ -16543,7 +18643,447 @@
 </p:sld>
 </file>
 
-<file path=ppt/slides/slide37.xml><?xml version="1.0" encoding="utf-8"?>
+<file path=ppt/slides/slide4.xml><?xml version="1.0" encoding="utf-8"?>
+<p:sld xmlns:a="http://schemas.openxmlformats.org/drawingml/2006/main" xmlns:r="http://schemas.openxmlformats.org/officeDocument/2006/relationships" xmlns:p="http://schemas.openxmlformats.org/presentationml/2006/main">
+  <p:cSld>
+    <p:spTree>
+      <p:nvGrpSpPr>
+        <p:cNvPr id="1" name="">
+          <a:extLst>
+            <a:ext uri="{FF2B5EF4-FFF2-40B4-BE49-F238E27FC236}">
+              <a16:creationId xmlns:a16="http://schemas.microsoft.com/office/drawing/2014/main" id="{7E764ACB-B8A0-8B8E-50AE-F6949A866C73}"/>
+            </a:ext>
+          </a:extLst>
+        </p:cNvPr>
+        <p:cNvGrpSpPr/>
+        <p:nvPr/>
+      </p:nvGrpSpPr>
+      <p:grpSpPr>
+        <a:xfrm>
+          <a:off x="0" y="0"/>
+          <a:ext cx="0" cy="0"/>
+          <a:chOff x="0" y="0"/>
+          <a:chExt cx="0" cy="0"/>
+        </a:xfrm>
+      </p:grpSpPr>
+      <p:sp>
+        <p:nvSpPr>
+          <p:cNvPr id="2" name="제목 1">
+            <a:extLst>
+              <a:ext uri="{FF2B5EF4-FFF2-40B4-BE49-F238E27FC236}">
+                <a16:creationId xmlns:a16="http://schemas.microsoft.com/office/drawing/2014/main" id="{3B730496-A872-5CFB-3130-C4429F8285BC}"/>
+              </a:ext>
+            </a:extLst>
+          </p:cNvPr>
+          <p:cNvSpPr>
+            <a:spLocks noGrp="1"/>
+          </p:cNvSpPr>
+          <p:nvPr>
+            <p:ph type="title"/>
+          </p:nvPr>
+        </p:nvSpPr>
+        <p:spPr/>
+        <p:txBody>
+          <a:bodyPr/>
+          <a:lstStyle/>
+          <a:p>
+            <a:r>
+              <a:rPr lang="ko-KR" altLang="en-US" dirty="0"/>
+              <a:t>사회보험제도의 의미</a:t>
+            </a:r>
+          </a:p>
+        </p:txBody>
+      </p:sp>
+      <p:sp>
+        <p:nvSpPr>
+          <p:cNvPr id="4" name="슬라이드 번호 개체 틀 3">
+            <a:extLst>
+              <a:ext uri="{FF2B5EF4-FFF2-40B4-BE49-F238E27FC236}">
+                <a16:creationId xmlns:a16="http://schemas.microsoft.com/office/drawing/2014/main" id="{CBD72302-C21E-82F3-1317-6A67EB8523B7}"/>
+              </a:ext>
+            </a:extLst>
+          </p:cNvPr>
+          <p:cNvSpPr>
+            <a:spLocks noGrp="1"/>
+          </p:cNvSpPr>
+          <p:nvPr>
+            <p:ph type="sldNum" sz="quarter" idx="12"/>
+          </p:nvPr>
+        </p:nvSpPr>
+        <p:spPr/>
+        <p:txBody>
+          <a:bodyPr/>
+          <a:lstStyle/>
+          <a:p>
+            <a:fld id="{109C872D-39A9-4065-8BF3-6A613116E2A1}" type="slidenum">
+              <a:rPr lang="ko-KR" altLang="en-US" smtClean="0"/>
+              <a:t>4</a:t>
+            </a:fld>
+            <a:endParaRPr lang="ko-KR" altLang="en-US"/>
+          </a:p>
+        </p:txBody>
+      </p:sp>
+      <p:sp>
+        <p:nvSpPr>
+          <p:cNvPr id="3" name="TextBox 2">
+            <a:extLst>
+              <a:ext uri="{FF2B5EF4-FFF2-40B4-BE49-F238E27FC236}">
+                <a16:creationId xmlns:a16="http://schemas.microsoft.com/office/drawing/2014/main" id="{7331E4DF-D5A4-61E7-1307-371A5A496859}"/>
+              </a:ext>
+            </a:extLst>
+          </p:cNvPr>
+          <p:cNvSpPr txBox="1"/>
+          <p:nvPr/>
+        </p:nvSpPr>
+        <p:spPr>
+          <a:xfrm>
+            <a:off x="288790" y="958844"/>
+            <a:ext cx="11250267" cy="5584670"/>
+          </a:xfrm>
+          <a:prstGeom prst="rect">
+            <a:avLst/>
+          </a:prstGeom>
+          <a:noFill/>
+        </p:spPr>
+        <p:txBody>
+          <a:bodyPr wrap="square" rtlCol="0" anchor="t">
+            <a:spAutoFit/>
+          </a:bodyPr>
+          <a:lstStyle/>
+          <a:p>
+            <a:pPr marL="377825" indent="-285750">
+              <a:lnSpc>
+                <a:spcPct val="150000"/>
+              </a:lnSpc>
+              <a:buFont typeface="Arial" panose="020B0604020202020204" pitchFamily="34" charset="0"/>
+              <a:buChar char="•"/>
+            </a:pPr>
+            <a:r>
+              <a:rPr lang="ko-KR" altLang="en-US" sz="1600" spc="-50" dirty="0"/>
+              <a:t>우리는 경제생활을 하면서</a:t>
+            </a:r>
+            <a:r>
+              <a:rPr lang="en-US" altLang="ko-KR" sz="1600" spc="-50" dirty="0"/>
+              <a:t>, </a:t>
+            </a:r>
+            <a:r>
+              <a:rPr lang="ko-KR" altLang="en-US" sz="1600" spc="-50" dirty="0"/>
+              <a:t>크고 작은 여러 위험에 노출되어 있다</a:t>
+            </a:r>
+            <a:r>
+              <a:rPr lang="en-US" altLang="ko-KR" sz="1600" spc="-50" dirty="0"/>
+              <a:t>.</a:t>
+            </a:r>
+          </a:p>
+          <a:p>
+            <a:pPr marL="835025" lvl="1" indent="-285750">
+              <a:lnSpc>
+                <a:spcPct val="150000"/>
+              </a:lnSpc>
+              <a:buFont typeface="Wingdings" panose="05000000000000000000" pitchFamily="2" charset="2"/>
+              <a:buChar char="ü"/>
+            </a:pPr>
+            <a:r>
+              <a:rPr lang="ko-KR" altLang="en-US" sz="1600" spc="-50" dirty="0"/>
+              <a:t>나이가 많아져 더 이상 일을 할 수 없거나</a:t>
+            </a:r>
+            <a:r>
+              <a:rPr lang="en-US" altLang="ko-KR" sz="1600" spc="-50" dirty="0"/>
+              <a:t>, </a:t>
+            </a:r>
+            <a:r>
+              <a:rPr lang="ko-KR" altLang="en-US" sz="1600" spc="-50" dirty="0"/>
+              <a:t>갑작스럽게 병이 생기거나</a:t>
+            </a:r>
+            <a:r>
+              <a:rPr lang="en-US" altLang="ko-KR" sz="1600" spc="-50" dirty="0"/>
+              <a:t>, </a:t>
+            </a:r>
+            <a:r>
+              <a:rPr lang="ko-KR" altLang="en-US" sz="1600" spc="-50" dirty="0"/>
+              <a:t>직장에서 부상을 당하는 등의 위험이 있다</a:t>
+            </a:r>
+            <a:r>
+              <a:rPr lang="en-US" altLang="ko-KR" sz="1600" spc="-50" dirty="0"/>
+              <a:t>.</a:t>
+            </a:r>
+          </a:p>
+          <a:p>
+            <a:pPr marL="377825" indent="-285750">
+              <a:lnSpc>
+                <a:spcPct val="150000"/>
+              </a:lnSpc>
+              <a:buFont typeface="Arial" panose="020B0604020202020204" pitchFamily="34" charset="0"/>
+              <a:buChar char="•"/>
+            </a:pPr>
+            <a:r>
+              <a:rPr lang="ko-KR" altLang="en-US" sz="1600" spc="-50" dirty="0"/>
+              <a:t>이런 위험에 대해 정부가 보험을 제공하는 것이 사회보험제도이다</a:t>
+            </a:r>
+            <a:r>
+              <a:rPr lang="en-US" altLang="ko-KR" sz="1600" spc="-50" dirty="0"/>
+              <a:t>.</a:t>
+            </a:r>
+          </a:p>
+          <a:p>
+            <a:pPr marL="835025" lvl="1" indent="-285750">
+              <a:lnSpc>
+                <a:spcPct val="150000"/>
+              </a:lnSpc>
+              <a:buFont typeface="Wingdings" panose="05000000000000000000" pitchFamily="2" charset="2"/>
+              <a:buChar char="ü"/>
+            </a:pPr>
+            <a:r>
+              <a:rPr lang="ko-KR" altLang="en-US" sz="1600" spc="-50" dirty="0"/>
+              <a:t>사회보장기본법에는 </a:t>
+            </a:r>
+            <a:r>
+              <a:rPr lang="en-US" altLang="ko-KR" sz="1600" spc="-50" dirty="0"/>
+              <a:t>“</a:t>
+            </a:r>
+            <a:r>
+              <a:rPr lang="ko-KR" altLang="en-US" sz="1600" spc="-50" dirty="0"/>
+              <a:t>국민에게 발생하는 사회적 위험을 보험의 방식으로 대처함으로써 국민의 건강과 소득을 보장하는 제도</a:t>
+            </a:r>
+            <a:r>
+              <a:rPr lang="en-US" altLang="ko-KR" sz="1600" spc="-50" dirty="0"/>
+              <a:t>“ </a:t>
+            </a:r>
+            <a:r>
+              <a:rPr lang="ko-KR" altLang="en-US" sz="1600" spc="-50" dirty="0"/>
+              <a:t>라고 정의되어 있다</a:t>
+            </a:r>
+            <a:r>
+              <a:rPr lang="en-US" altLang="ko-KR" sz="1600" spc="-50" dirty="0"/>
+              <a:t>.</a:t>
+            </a:r>
+          </a:p>
+          <a:p>
+            <a:pPr marL="835025" lvl="1" indent="-285750">
+              <a:lnSpc>
+                <a:spcPct val="150000"/>
+              </a:lnSpc>
+              <a:buFont typeface="Wingdings" panose="05000000000000000000" pitchFamily="2" charset="2"/>
+              <a:buChar char="ü"/>
+            </a:pPr>
+            <a:r>
+              <a:rPr lang="ko-KR" altLang="en-US" sz="1600" spc="-50" dirty="0"/>
+              <a:t>아래와 같이</a:t>
+            </a:r>
+            <a:r>
+              <a:rPr lang="en-US" altLang="ko-KR" sz="1600" spc="-50" dirty="0"/>
+              <a:t>, </a:t>
+            </a:r>
+            <a:r>
+              <a:rPr lang="ko-KR" altLang="en-US" sz="1600" spc="-50" dirty="0"/>
+              <a:t>여러가지 이유로 민간부문에서의 보험시장이 완벽하지 못하여</a:t>
+            </a:r>
+            <a:r>
+              <a:rPr lang="en-US" altLang="ko-KR" sz="1600" spc="-50" dirty="0"/>
+              <a:t>, </a:t>
+            </a:r>
+            <a:r>
+              <a:rPr lang="ko-KR" altLang="en-US" sz="1600" spc="-50" dirty="0"/>
+              <a:t>정부가</a:t>
+            </a:r>
+            <a:r>
+              <a:rPr lang="en-US" altLang="ko-KR" sz="1600" spc="-50" dirty="0"/>
+              <a:t> </a:t>
+            </a:r>
+            <a:r>
+              <a:rPr lang="ko-KR" altLang="en-US" sz="1600" spc="-50" dirty="0"/>
+              <a:t>개입할 필요가 생긴다</a:t>
+            </a:r>
+            <a:r>
+              <a:rPr lang="en-US" altLang="ko-KR" sz="1600" spc="-50" dirty="0"/>
+              <a:t>.</a:t>
+            </a:r>
+          </a:p>
+          <a:p>
+            <a:pPr marL="835025" lvl="1" indent="-285750">
+              <a:lnSpc>
+                <a:spcPct val="150000"/>
+              </a:lnSpc>
+              <a:buFont typeface="Wingdings" panose="05000000000000000000" pitchFamily="2" charset="2"/>
+              <a:buChar char="ü"/>
+            </a:pPr>
+            <a:endParaRPr lang="en-US" altLang="ko-KR" sz="1600" spc="-50" dirty="0"/>
+          </a:p>
+          <a:p>
+            <a:pPr marL="434975" indent="-342900">
+              <a:lnSpc>
+                <a:spcPct val="150000"/>
+              </a:lnSpc>
+              <a:buFont typeface="+mj-lt"/>
+              <a:buAutoNum type="arabicPeriod"/>
+            </a:pPr>
+            <a:r>
+              <a:rPr lang="ko-KR" altLang="en-US" sz="1600" spc="-50" dirty="0"/>
+              <a:t>보험시장은 정보의 비대칭성을 전형적으로 갖고 있어</a:t>
+            </a:r>
+            <a:r>
+              <a:rPr lang="en-US" altLang="ko-KR" sz="1600" spc="-50" dirty="0"/>
+              <a:t>, </a:t>
+            </a:r>
+            <a:r>
+              <a:rPr lang="ko-KR" altLang="en-US" sz="1600" spc="-50" dirty="0"/>
+              <a:t>역선택과 도덕적 해이 문제가 필연적으로 나타난다</a:t>
+            </a:r>
+            <a:r>
+              <a:rPr lang="en-US" altLang="ko-KR" sz="1600" spc="-50" dirty="0"/>
+              <a:t>.</a:t>
+            </a:r>
+          </a:p>
+          <a:p>
+            <a:pPr marL="835025" lvl="1" indent="-285750">
+              <a:lnSpc>
+                <a:spcPct val="150000"/>
+              </a:lnSpc>
+              <a:buFont typeface="Wingdings" panose="05000000000000000000" pitchFamily="2" charset="2"/>
+              <a:buChar char="ü"/>
+            </a:pPr>
+            <a:r>
+              <a:rPr lang="ko-KR" altLang="en-US" sz="1600" spc="-50" dirty="0"/>
+              <a:t>완벽한 보험이란 일어날 수 있는 모든 가능성에 대해 완벽한 대비를 할 수 있게끔 만들어주는 것을 뜻한다</a:t>
+            </a:r>
+            <a:r>
+              <a:rPr lang="en-US" altLang="ko-KR" sz="1600" spc="-50" dirty="0"/>
+              <a:t>.</a:t>
+            </a:r>
+          </a:p>
+          <a:p>
+            <a:pPr marL="835025" lvl="1" indent="-285750">
+              <a:lnSpc>
+                <a:spcPct val="150000"/>
+              </a:lnSpc>
+              <a:buFont typeface="Wingdings" panose="05000000000000000000" pitchFamily="2" charset="2"/>
+              <a:buChar char="ü"/>
+            </a:pPr>
+            <a:r>
+              <a:rPr lang="ko-KR" altLang="en-US" sz="1600" spc="-50" dirty="0"/>
+              <a:t>이 때</a:t>
+            </a:r>
+            <a:r>
+              <a:rPr lang="en-US" altLang="ko-KR" sz="1600" spc="-50" dirty="0"/>
+              <a:t>, </a:t>
+            </a:r>
+            <a:r>
+              <a:rPr lang="ko-KR" altLang="en-US" sz="1600" spc="-50" dirty="0"/>
+              <a:t>역선택과 도덕적 해이는 완벽한 보험을 제공할 수 없게 한다</a:t>
+            </a:r>
+            <a:r>
+              <a:rPr lang="en-US" altLang="ko-KR" sz="1600" spc="-50" dirty="0"/>
+              <a:t>.</a:t>
+            </a:r>
+          </a:p>
+          <a:p>
+            <a:pPr marL="835025" lvl="1" indent="-285750">
+              <a:lnSpc>
+                <a:spcPct val="150000"/>
+              </a:lnSpc>
+              <a:buFont typeface="Wingdings" panose="05000000000000000000" pitchFamily="2" charset="2"/>
+              <a:buChar char="ü"/>
+            </a:pPr>
+            <a:r>
+              <a:rPr lang="ko-KR" altLang="en-US" sz="1600" spc="-50" dirty="0"/>
+              <a:t>다시 말하면</a:t>
+            </a:r>
+            <a:r>
+              <a:rPr lang="en-US" altLang="ko-KR" sz="1600" spc="-50" dirty="0"/>
+              <a:t>, </a:t>
+            </a:r>
+            <a:r>
+              <a:rPr lang="ko-KR" altLang="en-US" sz="1600" spc="-50" dirty="0"/>
+              <a:t>완벽한 보험을 제공하는 보험회사가 있다면 수익성 악화로 문을 닫게 된다</a:t>
+            </a:r>
+            <a:r>
+              <a:rPr lang="en-US" altLang="ko-KR" sz="1600" spc="-50" dirty="0"/>
+              <a:t>.</a:t>
+            </a:r>
+          </a:p>
+          <a:p>
+            <a:pPr marL="434975" indent="-342900">
+              <a:lnSpc>
+                <a:spcPct val="150000"/>
+              </a:lnSpc>
+              <a:buFont typeface="+mj-lt"/>
+              <a:buAutoNum type="arabicPeriod"/>
+            </a:pPr>
+            <a:r>
+              <a:rPr lang="ko-KR" altLang="en-US" sz="1600" spc="-50" dirty="0"/>
+              <a:t>위험의 종류에 따라 적절한 보험상품을 제공하는 것이 불가능한 경우가 있다</a:t>
+            </a:r>
+            <a:r>
+              <a:rPr lang="en-US" altLang="ko-KR" sz="1600" spc="-50" dirty="0"/>
+              <a:t>.</a:t>
+            </a:r>
+          </a:p>
+          <a:p>
+            <a:pPr marL="835025" lvl="1" indent="-285750">
+              <a:lnSpc>
+                <a:spcPct val="150000"/>
+              </a:lnSpc>
+              <a:buFont typeface="Wingdings" panose="05000000000000000000" pitchFamily="2" charset="2"/>
+              <a:buChar char="ü"/>
+            </a:pPr>
+            <a:r>
+              <a:rPr lang="ko-KR" altLang="en-US" sz="1600" spc="-50" dirty="0"/>
+              <a:t>민간 보험사 입장에서</a:t>
+            </a:r>
+            <a:r>
+              <a:rPr lang="en-US" altLang="ko-KR" sz="1600" spc="-50" dirty="0"/>
+              <a:t>, </a:t>
+            </a:r>
+            <a:r>
+              <a:rPr lang="ko-KR" altLang="en-US" sz="1600" spc="-50" dirty="0"/>
+              <a:t>노후의 생계를 위해 </a:t>
+            </a:r>
+            <a:r>
+              <a:rPr lang="ko-KR" altLang="en-US" sz="1600" spc="-50" dirty="0" err="1"/>
+              <a:t>저축하고자하는</a:t>
+            </a:r>
+            <a:r>
+              <a:rPr lang="ko-KR" altLang="en-US" sz="1600" spc="-50" dirty="0"/>
+              <a:t> 사람에게 실질가치가 보장되는 연금보험 상품을 제공하는 것은 어려운 일이다</a:t>
+            </a:r>
+            <a:r>
+              <a:rPr lang="en-US" altLang="ko-KR" sz="1600" spc="-50" dirty="0"/>
+              <a:t>.</a:t>
+            </a:r>
+          </a:p>
+          <a:p>
+            <a:pPr marL="1292225" lvl="2" indent="-285750">
+              <a:lnSpc>
+                <a:spcPct val="150000"/>
+              </a:lnSpc>
+              <a:buFont typeface="Wingdings" panose="05000000000000000000" pitchFamily="2" charset="2"/>
+              <a:buChar char="Ø"/>
+            </a:pPr>
+            <a:r>
+              <a:rPr lang="ko-KR" altLang="en-US" sz="1600" spc="-50" dirty="0"/>
+              <a:t>물가가 오를 때 세금을 더 많이 거둘 수 있는 것도 아니므로 실질가치 보장이 불가능하다</a:t>
+            </a:r>
+            <a:r>
+              <a:rPr lang="en-US" altLang="ko-KR" sz="1600" spc="-50" dirty="0"/>
+              <a:t>.</a:t>
+            </a:r>
+          </a:p>
+        </p:txBody>
+      </p:sp>
+    </p:spTree>
+    <p:extLst>
+      <p:ext uri="{BB962C8B-B14F-4D97-AF65-F5344CB8AC3E}">
+        <p14:creationId xmlns:p14="http://schemas.microsoft.com/office/powerpoint/2010/main" val="1152434456"/>
+      </p:ext>
+    </p:extLst>
+  </p:cSld>
+  <p:clrMapOvr>
+    <a:masterClrMapping/>
+  </p:clrMapOvr>
+</p:sld>
+</file>
+
+<file path=ppt/slides/slide40.xml><?xml version="1.0" encoding="utf-8"?>
 <p:sld xmlns:a="http://schemas.openxmlformats.org/drawingml/2006/main" xmlns:r="http://schemas.openxmlformats.org/officeDocument/2006/relationships" xmlns:p="http://schemas.openxmlformats.org/presentationml/2006/main">
   <p:cSld>
     <p:spTree>
@@ -16617,7 +19157,7 @@
           <a:p>
             <a:fld id="{109C872D-39A9-4065-8BF3-6A613116E2A1}" type="slidenum">
               <a:rPr lang="ko-KR" altLang="en-US" smtClean="0"/>
-              <a:t>37</a:t>
+              <a:t>40</a:t>
             </a:fld>
             <a:endParaRPr lang="ko-KR" altLang="en-US"/>
           </a:p>
@@ -16973,7 +19513,7 @@
 </p:sld>
 </file>
 
-<file path=ppt/slides/slide38.xml><?xml version="1.0" encoding="utf-8"?>
+<file path=ppt/slides/slide41.xml><?xml version="1.0" encoding="utf-8"?>
 <p:sld xmlns:a="http://schemas.openxmlformats.org/drawingml/2006/main" xmlns:r="http://schemas.openxmlformats.org/officeDocument/2006/relationships" xmlns:p="http://schemas.openxmlformats.org/presentationml/2006/main">
   <p:cSld>
     <p:spTree>
@@ -17047,7 +19587,7 @@
           <a:p>
             <a:fld id="{109C872D-39A9-4065-8BF3-6A613116E2A1}" type="slidenum">
               <a:rPr lang="ko-KR" altLang="en-US" smtClean="0"/>
-              <a:t>38</a:t>
+              <a:t>41</a:t>
             </a:fld>
             <a:endParaRPr lang="ko-KR" altLang="en-US"/>
           </a:p>
@@ -17413,7 +19953,7 @@
 </p:sld>
 </file>
 
-<file path=ppt/slides/slide39.xml><?xml version="1.0" encoding="utf-8"?>
+<file path=ppt/slides/slide42.xml><?xml version="1.0" encoding="utf-8"?>
 <p:sld xmlns:a="http://schemas.openxmlformats.org/drawingml/2006/main" xmlns:r="http://schemas.openxmlformats.org/officeDocument/2006/relationships" xmlns:p="http://schemas.openxmlformats.org/presentationml/2006/main">
   <p:cSld>
     <p:spTree>
@@ -17487,7 +20027,7 @@
           <a:p>
             <a:fld id="{109C872D-39A9-4065-8BF3-6A613116E2A1}" type="slidenum">
               <a:rPr lang="ko-KR" altLang="en-US" smtClean="0"/>
-              <a:t>39</a:t>
+              <a:t>42</a:t>
             </a:fld>
             <a:endParaRPr lang="ko-KR" altLang="en-US"/>
           </a:p>
@@ -17859,447 +20399,7 @@
 </p:sld>
 </file>
 
-<file path=ppt/slides/slide4.xml><?xml version="1.0" encoding="utf-8"?>
-<p:sld xmlns:a="http://schemas.openxmlformats.org/drawingml/2006/main" xmlns:r="http://schemas.openxmlformats.org/officeDocument/2006/relationships" xmlns:p="http://schemas.openxmlformats.org/presentationml/2006/main">
-  <p:cSld>
-    <p:spTree>
-      <p:nvGrpSpPr>
-        <p:cNvPr id="1" name="">
-          <a:extLst>
-            <a:ext uri="{FF2B5EF4-FFF2-40B4-BE49-F238E27FC236}">
-              <a16:creationId xmlns:a16="http://schemas.microsoft.com/office/drawing/2014/main" id="{7E764ACB-B8A0-8B8E-50AE-F6949A866C73}"/>
-            </a:ext>
-          </a:extLst>
-        </p:cNvPr>
-        <p:cNvGrpSpPr/>
-        <p:nvPr/>
-      </p:nvGrpSpPr>
-      <p:grpSpPr>
-        <a:xfrm>
-          <a:off x="0" y="0"/>
-          <a:ext cx="0" cy="0"/>
-          <a:chOff x="0" y="0"/>
-          <a:chExt cx="0" cy="0"/>
-        </a:xfrm>
-      </p:grpSpPr>
-      <p:sp>
-        <p:nvSpPr>
-          <p:cNvPr id="2" name="제목 1">
-            <a:extLst>
-              <a:ext uri="{FF2B5EF4-FFF2-40B4-BE49-F238E27FC236}">
-                <a16:creationId xmlns:a16="http://schemas.microsoft.com/office/drawing/2014/main" id="{3B730496-A872-5CFB-3130-C4429F8285BC}"/>
-              </a:ext>
-            </a:extLst>
-          </p:cNvPr>
-          <p:cNvSpPr>
-            <a:spLocks noGrp="1"/>
-          </p:cNvSpPr>
-          <p:nvPr>
-            <p:ph type="title"/>
-          </p:nvPr>
-        </p:nvSpPr>
-        <p:spPr/>
-        <p:txBody>
-          <a:bodyPr/>
-          <a:lstStyle/>
-          <a:p>
-            <a:r>
-              <a:rPr lang="ko-KR" altLang="en-US" dirty="0"/>
-              <a:t>사회보험제도의 의미</a:t>
-            </a:r>
-          </a:p>
-        </p:txBody>
-      </p:sp>
-      <p:sp>
-        <p:nvSpPr>
-          <p:cNvPr id="4" name="슬라이드 번호 개체 틀 3">
-            <a:extLst>
-              <a:ext uri="{FF2B5EF4-FFF2-40B4-BE49-F238E27FC236}">
-                <a16:creationId xmlns:a16="http://schemas.microsoft.com/office/drawing/2014/main" id="{CBD72302-C21E-82F3-1317-6A67EB8523B7}"/>
-              </a:ext>
-            </a:extLst>
-          </p:cNvPr>
-          <p:cNvSpPr>
-            <a:spLocks noGrp="1"/>
-          </p:cNvSpPr>
-          <p:nvPr>
-            <p:ph type="sldNum" sz="quarter" idx="12"/>
-          </p:nvPr>
-        </p:nvSpPr>
-        <p:spPr/>
-        <p:txBody>
-          <a:bodyPr/>
-          <a:lstStyle/>
-          <a:p>
-            <a:fld id="{109C872D-39A9-4065-8BF3-6A613116E2A1}" type="slidenum">
-              <a:rPr lang="ko-KR" altLang="en-US" smtClean="0"/>
-              <a:t>4</a:t>
-            </a:fld>
-            <a:endParaRPr lang="ko-KR" altLang="en-US"/>
-          </a:p>
-        </p:txBody>
-      </p:sp>
-      <p:sp>
-        <p:nvSpPr>
-          <p:cNvPr id="3" name="TextBox 2">
-            <a:extLst>
-              <a:ext uri="{FF2B5EF4-FFF2-40B4-BE49-F238E27FC236}">
-                <a16:creationId xmlns:a16="http://schemas.microsoft.com/office/drawing/2014/main" id="{7331E4DF-D5A4-61E7-1307-371A5A496859}"/>
-              </a:ext>
-            </a:extLst>
-          </p:cNvPr>
-          <p:cNvSpPr txBox="1"/>
-          <p:nvPr/>
-        </p:nvSpPr>
-        <p:spPr>
-          <a:xfrm>
-            <a:off x="288790" y="958844"/>
-            <a:ext cx="11250267" cy="5584670"/>
-          </a:xfrm>
-          <a:prstGeom prst="rect">
-            <a:avLst/>
-          </a:prstGeom>
-          <a:noFill/>
-        </p:spPr>
-        <p:txBody>
-          <a:bodyPr wrap="square" rtlCol="0" anchor="t">
-            <a:spAutoFit/>
-          </a:bodyPr>
-          <a:lstStyle/>
-          <a:p>
-            <a:pPr marL="377825" indent="-285750">
-              <a:lnSpc>
-                <a:spcPct val="150000"/>
-              </a:lnSpc>
-              <a:buFont typeface="Arial" panose="020B0604020202020204" pitchFamily="34" charset="0"/>
-              <a:buChar char="•"/>
-            </a:pPr>
-            <a:r>
-              <a:rPr lang="ko-KR" altLang="en-US" sz="1600" spc="-50" dirty="0"/>
-              <a:t>우리는 경제생활을 하면서</a:t>
-            </a:r>
-            <a:r>
-              <a:rPr lang="en-US" altLang="ko-KR" sz="1600" spc="-50" dirty="0"/>
-              <a:t>, </a:t>
-            </a:r>
-            <a:r>
-              <a:rPr lang="ko-KR" altLang="en-US" sz="1600" spc="-50" dirty="0"/>
-              <a:t>크고 작은 여러 위험에 노출되어 있다</a:t>
-            </a:r>
-            <a:r>
-              <a:rPr lang="en-US" altLang="ko-KR" sz="1600" spc="-50" dirty="0"/>
-              <a:t>.</a:t>
-            </a:r>
-          </a:p>
-          <a:p>
-            <a:pPr marL="835025" lvl="1" indent="-285750">
-              <a:lnSpc>
-                <a:spcPct val="150000"/>
-              </a:lnSpc>
-              <a:buFont typeface="Wingdings" panose="05000000000000000000" pitchFamily="2" charset="2"/>
-              <a:buChar char="ü"/>
-            </a:pPr>
-            <a:r>
-              <a:rPr lang="ko-KR" altLang="en-US" sz="1600" spc="-50" dirty="0"/>
-              <a:t>나이가 많아져 더 이상 일을 할 수 없거나</a:t>
-            </a:r>
-            <a:r>
-              <a:rPr lang="en-US" altLang="ko-KR" sz="1600" spc="-50" dirty="0"/>
-              <a:t>, </a:t>
-            </a:r>
-            <a:r>
-              <a:rPr lang="ko-KR" altLang="en-US" sz="1600" spc="-50" dirty="0"/>
-              <a:t>갑작스럽게 병이 생기거나</a:t>
-            </a:r>
-            <a:r>
-              <a:rPr lang="en-US" altLang="ko-KR" sz="1600" spc="-50" dirty="0"/>
-              <a:t>, </a:t>
-            </a:r>
-            <a:r>
-              <a:rPr lang="ko-KR" altLang="en-US" sz="1600" spc="-50" dirty="0"/>
-              <a:t>직장에서 부상을 당하는 등의 위험이 있다</a:t>
-            </a:r>
-            <a:r>
-              <a:rPr lang="en-US" altLang="ko-KR" sz="1600" spc="-50" dirty="0"/>
-              <a:t>.</a:t>
-            </a:r>
-          </a:p>
-          <a:p>
-            <a:pPr marL="377825" indent="-285750">
-              <a:lnSpc>
-                <a:spcPct val="150000"/>
-              </a:lnSpc>
-              <a:buFont typeface="Arial" panose="020B0604020202020204" pitchFamily="34" charset="0"/>
-              <a:buChar char="•"/>
-            </a:pPr>
-            <a:r>
-              <a:rPr lang="ko-KR" altLang="en-US" sz="1600" spc="-50" dirty="0"/>
-              <a:t>이런 위험에 대해 정부가 보험을 제공하는 것이 사회보험제도이다</a:t>
-            </a:r>
-            <a:r>
-              <a:rPr lang="en-US" altLang="ko-KR" sz="1600" spc="-50" dirty="0"/>
-              <a:t>.</a:t>
-            </a:r>
-          </a:p>
-          <a:p>
-            <a:pPr marL="835025" lvl="1" indent="-285750">
-              <a:lnSpc>
-                <a:spcPct val="150000"/>
-              </a:lnSpc>
-              <a:buFont typeface="Wingdings" panose="05000000000000000000" pitchFamily="2" charset="2"/>
-              <a:buChar char="ü"/>
-            </a:pPr>
-            <a:r>
-              <a:rPr lang="ko-KR" altLang="en-US" sz="1600" spc="-50" dirty="0"/>
-              <a:t>사회보장기본법에는 </a:t>
-            </a:r>
-            <a:r>
-              <a:rPr lang="en-US" altLang="ko-KR" sz="1600" spc="-50" dirty="0"/>
-              <a:t>“</a:t>
-            </a:r>
-            <a:r>
-              <a:rPr lang="ko-KR" altLang="en-US" sz="1600" spc="-50" dirty="0"/>
-              <a:t>국민에게 발생하는 사회적 위험을 보험의 방식으로 대처함으로써 국민의 건강과 소득을 보장하는 제도</a:t>
-            </a:r>
-            <a:r>
-              <a:rPr lang="en-US" altLang="ko-KR" sz="1600" spc="-50" dirty="0"/>
-              <a:t>“ </a:t>
-            </a:r>
-            <a:r>
-              <a:rPr lang="ko-KR" altLang="en-US" sz="1600" spc="-50" dirty="0"/>
-              <a:t>라고 정의되어 있다</a:t>
-            </a:r>
-            <a:r>
-              <a:rPr lang="en-US" altLang="ko-KR" sz="1600" spc="-50" dirty="0"/>
-              <a:t>.</a:t>
-            </a:r>
-          </a:p>
-          <a:p>
-            <a:pPr marL="835025" lvl="1" indent="-285750">
-              <a:lnSpc>
-                <a:spcPct val="150000"/>
-              </a:lnSpc>
-              <a:buFont typeface="Wingdings" panose="05000000000000000000" pitchFamily="2" charset="2"/>
-              <a:buChar char="ü"/>
-            </a:pPr>
-            <a:r>
-              <a:rPr lang="ko-KR" altLang="en-US" sz="1600" spc="-50" dirty="0"/>
-              <a:t>아래와 같이</a:t>
-            </a:r>
-            <a:r>
-              <a:rPr lang="en-US" altLang="ko-KR" sz="1600" spc="-50" dirty="0"/>
-              <a:t>, </a:t>
-            </a:r>
-            <a:r>
-              <a:rPr lang="ko-KR" altLang="en-US" sz="1600" spc="-50" dirty="0"/>
-              <a:t>여러가지 이유로 민간부문에서의 보험시장이 완벽하지 못하여</a:t>
-            </a:r>
-            <a:r>
-              <a:rPr lang="en-US" altLang="ko-KR" sz="1600" spc="-50" dirty="0"/>
-              <a:t>, </a:t>
-            </a:r>
-            <a:r>
-              <a:rPr lang="ko-KR" altLang="en-US" sz="1600" spc="-50" dirty="0"/>
-              <a:t>정부가</a:t>
-            </a:r>
-            <a:r>
-              <a:rPr lang="en-US" altLang="ko-KR" sz="1600" spc="-50" dirty="0"/>
-              <a:t> </a:t>
-            </a:r>
-            <a:r>
-              <a:rPr lang="ko-KR" altLang="en-US" sz="1600" spc="-50" dirty="0"/>
-              <a:t>개입할 필요가 생긴다</a:t>
-            </a:r>
-            <a:r>
-              <a:rPr lang="en-US" altLang="ko-KR" sz="1600" spc="-50" dirty="0"/>
-              <a:t>.</a:t>
-            </a:r>
-          </a:p>
-          <a:p>
-            <a:pPr marL="835025" lvl="1" indent="-285750">
-              <a:lnSpc>
-                <a:spcPct val="150000"/>
-              </a:lnSpc>
-              <a:buFont typeface="Wingdings" panose="05000000000000000000" pitchFamily="2" charset="2"/>
-              <a:buChar char="ü"/>
-            </a:pPr>
-            <a:endParaRPr lang="en-US" altLang="ko-KR" sz="1600" spc="-50" dirty="0"/>
-          </a:p>
-          <a:p>
-            <a:pPr marL="434975" indent="-342900">
-              <a:lnSpc>
-                <a:spcPct val="150000"/>
-              </a:lnSpc>
-              <a:buFont typeface="+mj-lt"/>
-              <a:buAutoNum type="arabicPeriod"/>
-            </a:pPr>
-            <a:r>
-              <a:rPr lang="ko-KR" altLang="en-US" sz="1600" spc="-50" dirty="0"/>
-              <a:t>보험시장은 정보의 비대칭성을 전형적으로 갖고 있어</a:t>
-            </a:r>
-            <a:r>
-              <a:rPr lang="en-US" altLang="ko-KR" sz="1600" spc="-50" dirty="0"/>
-              <a:t>, </a:t>
-            </a:r>
-            <a:r>
-              <a:rPr lang="ko-KR" altLang="en-US" sz="1600" spc="-50" dirty="0"/>
-              <a:t>역선택과 도덕적 해이 문제가 필연적으로 나타난다</a:t>
-            </a:r>
-            <a:r>
-              <a:rPr lang="en-US" altLang="ko-KR" sz="1600" spc="-50" dirty="0"/>
-              <a:t>.</a:t>
-            </a:r>
-          </a:p>
-          <a:p>
-            <a:pPr marL="835025" lvl="1" indent="-285750">
-              <a:lnSpc>
-                <a:spcPct val="150000"/>
-              </a:lnSpc>
-              <a:buFont typeface="Wingdings" panose="05000000000000000000" pitchFamily="2" charset="2"/>
-              <a:buChar char="ü"/>
-            </a:pPr>
-            <a:r>
-              <a:rPr lang="ko-KR" altLang="en-US" sz="1600" spc="-50" dirty="0"/>
-              <a:t>완벽한 보험이란 일어날 수 있는 모든 가능성에 대해 완벽한 대비를 할 수 있게끔 만들어주는 것을 뜻한다</a:t>
-            </a:r>
-            <a:r>
-              <a:rPr lang="en-US" altLang="ko-KR" sz="1600" spc="-50" dirty="0"/>
-              <a:t>.</a:t>
-            </a:r>
-          </a:p>
-          <a:p>
-            <a:pPr marL="835025" lvl="1" indent="-285750">
-              <a:lnSpc>
-                <a:spcPct val="150000"/>
-              </a:lnSpc>
-              <a:buFont typeface="Wingdings" panose="05000000000000000000" pitchFamily="2" charset="2"/>
-              <a:buChar char="ü"/>
-            </a:pPr>
-            <a:r>
-              <a:rPr lang="ko-KR" altLang="en-US" sz="1600" spc="-50" dirty="0"/>
-              <a:t>이 때</a:t>
-            </a:r>
-            <a:r>
-              <a:rPr lang="en-US" altLang="ko-KR" sz="1600" spc="-50" dirty="0"/>
-              <a:t>, </a:t>
-            </a:r>
-            <a:r>
-              <a:rPr lang="ko-KR" altLang="en-US" sz="1600" spc="-50" dirty="0"/>
-              <a:t>역선택과 도덕적 해이는 완벽한 보험을 제공할 수 없게 한다</a:t>
-            </a:r>
-            <a:r>
-              <a:rPr lang="en-US" altLang="ko-KR" sz="1600" spc="-50" dirty="0"/>
-              <a:t>.</a:t>
-            </a:r>
-          </a:p>
-          <a:p>
-            <a:pPr marL="835025" lvl="1" indent="-285750">
-              <a:lnSpc>
-                <a:spcPct val="150000"/>
-              </a:lnSpc>
-              <a:buFont typeface="Wingdings" panose="05000000000000000000" pitchFamily="2" charset="2"/>
-              <a:buChar char="ü"/>
-            </a:pPr>
-            <a:r>
-              <a:rPr lang="ko-KR" altLang="en-US" sz="1600" spc="-50" dirty="0"/>
-              <a:t>다시 말하면</a:t>
-            </a:r>
-            <a:r>
-              <a:rPr lang="en-US" altLang="ko-KR" sz="1600" spc="-50" dirty="0"/>
-              <a:t>, </a:t>
-            </a:r>
-            <a:r>
-              <a:rPr lang="ko-KR" altLang="en-US" sz="1600" spc="-50" dirty="0"/>
-              <a:t>완벽한 보험을 제공하는 보험회사가 있다면 수익성 악화로 문을 닫게 된다</a:t>
-            </a:r>
-            <a:r>
-              <a:rPr lang="en-US" altLang="ko-KR" sz="1600" spc="-50" dirty="0"/>
-              <a:t>.</a:t>
-            </a:r>
-          </a:p>
-          <a:p>
-            <a:pPr marL="434975" indent="-342900">
-              <a:lnSpc>
-                <a:spcPct val="150000"/>
-              </a:lnSpc>
-              <a:buFont typeface="+mj-lt"/>
-              <a:buAutoNum type="arabicPeriod"/>
-            </a:pPr>
-            <a:r>
-              <a:rPr lang="ko-KR" altLang="en-US" sz="1600" spc="-50" dirty="0"/>
-              <a:t>위험의 종류에 따라 적절한 보험상품을 제공하는 것이 불가능한 경우가 있다</a:t>
-            </a:r>
-            <a:r>
-              <a:rPr lang="en-US" altLang="ko-KR" sz="1600" spc="-50" dirty="0"/>
-              <a:t>.</a:t>
-            </a:r>
-          </a:p>
-          <a:p>
-            <a:pPr marL="835025" lvl="1" indent="-285750">
-              <a:lnSpc>
-                <a:spcPct val="150000"/>
-              </a:lnSpc>
-              <a:buFont typeface="Wingdings" panose="05000000000000000000" pitchFamily="2" charset="2"/>
-              <a:buChar char="ü"/>
-            </a:pPr>
-            <a:r>
-              <a:rPr lang="ko-KR" altLang="en-US" sz="1600" spc="-50" dirty="0"/>
-              <a:t>민간 보험사 입장에서</a:t>
-            </a:r>
-            <a:r>
-              <a:rPr lang="en-US" altLang="ko-KR" sz="1600" spc="-50" dirty="0"/>
-              <a:t>, </a:t>
-            </a:r>
-            <a:r>
-              <a:rPr lang="ko-KR" altLang="en-US" sz="1600" spc="-50" dirty="0"/>
-              <a:t>노후의 생계를 위해 </a:t>
-            </a:r>
-            <a:r>
-              <a:rPr lang="ko-KR" altLang="en-US" sz="1600" spc="-50" dirty="0" err="1"/>
-              <a:t>저축하고자하는</a:t>
-            </a:r>
-            <a:r>
-              <a:rPr lang="ko-KR" altLang="en-US" sz="1600" spc="-50" dirty="0"/>
-              <a:t> 사람에게 실질가치가 보장되는 연금보험 상품을 제공하는 것은 어려운 일이다</a:t>
-            </a:r>
-            <a:r>
-              <a:rPr lang="en-US" altLang="ko-KR" sz="1600" spc="-50" dirty="0"/>
-              <a:t>.</a:t>
-            </a:r>
-          </a:p>
-          <a:p>
-            <a:pPr marL="1292225" lvl="2" indent="-285750">
-              <a:lnSpc>
-                <a:spcPct val="150000"/>
-              </a:lnSpc>
-              <a:buFont typeface="Wingdings" panose="05000000000000000000" pitchFamily="2" charset="2"/>
-              <a:buChar char="Ø"/>
-            </a:pPr>
-            <a:r>
-              <a:rPr lang="ko-KR" altLang="en-US" sz="1600" spc="-50" dirty="0"/>
-              <a:t>물가가 오를 때 세금을 더 많이 거둘 수 있는 것도 아니므로 실질가치 보장이 불가능하다</a:t>
-            </a:r>
-            <a:r>
-              <a:rPr lang="en-US" altLang="ko-KR" sz="1600" spc="-50" dirty="0"/>
-              <a:t>.</a:t>
-            </a:r>
-          </a:p>
-        </p:txBody>
-      </p:sp>
-    </p:spTree>
-    <p:extLst>
-      <p:ext uri="{BB962C8B-B14F-4D97-AF65-F5344CB8AC3E}">
-        <p14:creationId xmlns:p14="http://schemas.microsoft.com/office/powerpoint/2010/main" val="1152434456"/>
-      </p:ext>
-    </p:extLst>
-  </p:cSld>
-  <p:clrMapOvr>
-    <a:masterClrMapping/>
-  </p:clrMapOvr>
-</p:sld>
-</file>
-
-<file path=ppt/slides/slide40.xml><?xml version="1.0" encoding="utf-8"?>
+<file path=ppt/slides/slide43.xml><?xml version="1.0" encoding="utf-8"?>
 <p:sld xmlns:a="http://schemas.openxmlformats.org/drawingml/2006/main" xmlns:r="http://schemas.openxmlformats.org/officeDocument/2006/relationships" xmlns:p="http://schemas.openxmlformats.org/presentationml/2006/main">
   <p:cSld>
     <p:spTree>
@@ -18373,7 +20473,7 @@
           <a:p>
             <a:fld id="{109C872D-39A9-4065-8BF3-6A613116E2A1}" type="slidenum">
               <a:rPr lang="ko-KR" altLang="en-US" smtClean="0"/>
-              <a:t>40</a:t>
+              <a:t>43</a:t>
             </a:fld>
             <a:endParaRPr lang="ko-KR" altLang="en-US"/>
           </a:p>
@@ -18852,7 +20952,7 @@
 </p:sld>
 </file>
 
-<file path=ppt/slides/slide41.xml><?xml version="1.0" encoding="utf-8"?>
+<file path=ppt/slides/slide44.xml><?xml version="1.0" encoding="utf-8"?>
 <p:sld xmlns:a="http://schemas.openxmlformats.org/drawingml/2006/main" xmlns:r="http://schemas.openxmlformats.org/officeDocument/2006/relationships" xmlns:p="http://schemas.openxmlformats.org/presentationml/2006/main">
   <p:cSld>
     <p:spTree>
@@ -18926,7 +21026,7 @@
           <a:p>
             <a:fld id="{109C872D-39A9-4065-8BF3-6A613116E2A1}" type="slidenum">
               <a:rPr lang="ko-KR" altLang="en-US" smtClean="0"/>
-              <a:t>41</a:t>
+              <a:t>44</a:t>
             </a:fld>
             <a:endParaRPr lang="ko-KR" altLang="en-US"/>
           </a:p>
@@ -19159,7 +21259,7 @@
 </p:sld>
 </file>
 
-<file path=ppt/slides/slide42.xml><?xml version="1.0" encoding="utf-8"?>
+<file path=ppt/slides/slide45.xml><?xml version="1.0" encoding="utf-8"?>
 <p:sld xmlns:a="http://schemas.openxmlformats.org/drawingml/2006/main" xmlns:r="http://schemas.openxmlformats.org/officeDocument/2006/relationships" xmlns:p="http://schemas.openxmlformats.org/presentationml/2006/main">
   <p:cSld>
     <p:spTree>
@@ -19233,7 +21333,7 @@
           <a:p>
             <a:fld id="{109C872D-39A9-4065-8BF3-6A613116E2A1}" type="slidenum">
               <a:rPr lang="ko-KR" altLang="en-US" smtClean="0"/>
-              <a:t>42</a:t>
+              <a:t>45</a:t>
             </a:fld>
             <a:endParaRPr lang="ko-KR" altLang="en-US"/>
           </a:p>
@@ -20143,7 +22243,7 @@
 </p:sld>
 </file>
 
-<file path=ppt/slides/slide43.xml><?xml version="1.0" encoding="utf-8"?>
+<file path=ppt/slides/slide46.xml><?xml version="1.0" encoding="utf-8"?>
 <p:sld xmlns:a="http://schemas.openxmlformats.org/drawingml/2006/main" xmlns:r="http://schemas.openxmlformats.org/officeDocument/2006/relationships" xmlns:p="http://schemas.openxmlformats.org/presentationml/2006/main">
   <p:cSld>
     <p:spTree>
@@ -20217,7 +22317,7 @@
           <a:p>
             <a:fld id="{109C872D-39A9-4065-8BF3-6A613116E2A1}" type="slidenum">
               <a:rPr lang="ko-KR" altLang="en-US" smtClean="0"/>
-              <a:t>43</a:t>
+              <a:t>46</a:t>
             </a:fld>
             <a:endParaRPr lang="ko-KR" altLang="en-US"/>
           </a:p>
@@ -20513,7 +22613,7 @@
 </p:sld>
 </file>
 
-<file path=ppt/slides/slide44.xml><?xml version="1.0" encoding="utf-8"?>
+<file path=ppt/slides/slide47.xml><?xml version="1.0" encoding="utf-8"?>
 <p:sld xmlns:a="http://schemas.openxmlformats.org/drawingml/2006/main" xmlns:r="http://schemas.openxmlformats.org/officeDocument/2006/relationships" xmlns:p="http://schemas.openxmlformats.org/presentationml/2006/main">
   <p:cSld>
     <p:spTree>
@@ -20587,7 +22687,7 @@
           <a:p>
             <a:fld id="{109C872D-39A9-4065-8BF3-6A613116E2A1}" type="slidenum">
               <a:rPr lang="ko-KR" altLang="en-US" smtClean="0"/>
-              <a:t>44</a:t>
+              <a:t>47</a:t>
             </a:fld>
             <a:endParaRPr lang="ko-KR" altLang="en-US"/>
           </a:p>
@@ -20812,7 +22912,7 @@
 </p:sld>
 </file>
 
-<file path=ppt/slides/slide45.xml><?xml version="1.0" encoding="utf-8"?>
+<file path=ppt/slides/slide48.xml><?xml version="1.0" encoding="utf-8"?>
 <p:sld xmlns:a="http://schemas.openxmlformats.org/drawingml/2006/main" xmlns:r="http://schemas.openxmlformats.org/officeDocument/2006/relationships" xmlns:p="http://schemas.openxmlformats.org/presentationml/2006/main">
   <p:cSld>
     <p:spTree>
@@ -20886,7 +22986,7 @@
           <a:p>
             <a:fld id="{109C872D-39A9-4065-8BF3-6A613116E2A1}" type="slidenum">
               <a:rPr lang="ko-KR" altLang="en-US" smtClean="0"/>
-              <a:t>45</a:t>
+              <a:t>48</a:t>
             </a:fld>
             <a:endParaRPr lang="ko-KR" altLang="en-US"/>
           </a:p>
@@ -21267,7 +23367,7 @@
 </p:sld>
 </file>
 
-<file path=ppt/slides/slide46.xml><?xml version="1.0" encoding="utf-8"?>
+<file path=ppt/slides/slide49.xml><?xml version="1.0" encoding="utf-8"?>
 <p:sld xmlns:a="http://schemas.openxmlformats.org/drawingml/2006/main" xmlns:r="http://schemas.openxmlformats.org/officeDocument/2006/relationships" xmlns:p="http://schemas.openxmlformats.org/presentationml/2006/main">
   <p:cSld>
     <p:spTree>
@@ -21341,7 +23441,7 @@
           <a:p>
             <a:fld id="{109C872D-39A9-4065-8BF3-6A613116E2A1}" type="slidenum">
               <a:rPr lang="ko-KR" altLang="en-US" smtClean="0"/>
-              <a:t>46</a:t>
+              <a:t>49</a:t>
             </a:fld>
             <a:endParaRPr lang="ko-KR" altLang="en-US"/>
           </a:p>
@@ -21896,7 +23996,376 @@
 </p:sld>
 </file>
 
-<file path=ppt/slides/slide47.xml><?xml version="1.0" encoding="utf-8"?>
+<file path=ppt/slides/slide5.xml><?xml version="1.0" encoding="utf-8"?>
+<p:sld xmlns:a="http://schemas.openxmlformats.org/drawingml/2006/main" xmlns:r="http://schemas.openxmlformats.org/officeDocument/2006/relationships" xmlns:p="http://schemas.openxmlformats.org/presentationml/2006/main">
+  <p:cSld>
+    <p:spTree>
+      <p:nvGrpSpPr>
+        <p:cNvPr id="1" name="">
+          <a:extLst>
+            <a:ext uri="{FF2B5EF4-FFF2-40B4-BE49-F238E27FC236}">
+              <a16:creationId xmlns:a16="http://schemas.microsoft.com/office/drawing/2014/main" id="{2A6177E6-2BE2-8810-F89F-48E53629EB8A}"/>
+            </a:ext>
+          </a:extLst>
+        </p:cNvPr>
+        <p:cNvGrpSpPr/>
+        <p:nvPr/>
+      </p:nvGrpSpPr>
+      <p:grpSpPr>
+        <a:xfrm>
+          <a:off x="0" y="0"/>
+          <a:ext cx="0" cy="0"/>
+          <a:chOff x="0" y="0"/>
+          <a:chExt cx="0" cy="0"/>
+        </a:xfrm>
+      </p:grpSpPr>
+      <p:sp>
+        <p:nvSpPr>
+          <p:cNvPr id="2" name="제목 1">
+            <a:extLst>
+              <a:ext uri="{FF2B5EF4-FFF2-40B4-BE49-F238E27FC236}">
+                <a16:creationId xmlns:a16="http://schemas.microsoft.com/office/drawing/2014/main" id="{BFA7A44D-A761-673A-4E43-DE33CE276613}"/>
+              </a:ext>
+            </a:extLst>
+          </p:cNvPr>
+          <p:cNvSpPr>
+            <a:spLocks noGrp="1"/>
+          </p:cNvSpPr>
+          <p:nvPr>
+            <p:ph type="title"/>
+          </p:nvPr>
+        </p:nvSpPr>
+        <p:spPr/>
+        <p:txBody>
+          <a:bodyPr/>
+          <a:lstStyle/>
+          <a:p>
+            <a:r>
+              <a:rPr lang="ko-KR" altLang="en-US" dirty="0"/>
+              <a:t>사회보험제도의 의미</a:t>
+            </a:r>
+          </a:p>
+        </p:txBody>
+      </p:sp>
+      <p:sp>
+        <p:nvSpPr>
+          <p:cNvPr id="4" name="슬라이드 번호 개체 틀 3">
+            <a:extLst>
+              <a:ext uri="{FF2B5EF4-FFF2-40B4-BE49-F238E27FC236}">
+                <a16:creationId xmlns:a16="http://schemas.microsoft.com/office/drawing/2014/main" id="{692F3803-4273-D729-E62C-66D07D9E6ABA}"/>
+              </a:ext>
+            </a:extLst>
+          </p:cNvPr>
+          <p:cNvSpPr>
+            <a:spLocks noGrp="1"/>
+          </p:cNvSpPr>
+          <p:nvPr>
+            <p:ph type="sldNum" sz="quarter" idx="12"/>
+          </p:nvPr>
+        </p:nvSpPr>
+        <p:spPr/>
+        <p:txBody>
+          <a:bodyPr/>
+          <a:lstStyle/>
+          <a:p>
+            <a:fld id="{109C872D-39A9-4065-8BF3-6A613116E2A1}" type="slidenum">
+              <a:rPr lang="ko-KR" altLang="en-US" smtClean="0"/>
+              <a:t>5</a:t>
+            </a:fld>
+            <a:endParaRPr lang="ko-KR" altLang="en-US"/>
+          </a:p>
+        </p:txBody>
+      </p:sp>
+      <p:sp>
+        <p:nvSpPr>
+          <p:cNvPr id="3" name="TextBox 2">
+            <a:extLst>
+              <a:ext uri="{FF2B5EF4-FFF2-40B4-BE49-F238E27FC236}">
+                <a16:creationId xmlns:a16="http://schemas.microsoft.com/office/drawing/2014/main" id="{91DCF3A8-8A08-DF37-1A5B-CD577B183587}"/>
+              </a:ext>
+            </a:extLst>
+          </p:cNvPr>
+          <p:cNvSpPr txBox="1"/>
+          <p:nvPr/>
+        </p:nvSpPr>
+        <p:spPr>
+          <a:xfrm>
+            <a:off x="288790" y="958844"/>
+            <a:ext cx="11250267" cy="5215338"/>
+          </a:xfrm>
+          <a:prstGeom prst="rect">
+            <a:avLst/>
+          </a:prstGeom>
+          <a:noFill/>
+        </p:spPr>
+        <p:txBody>
+          <a:bodyPr wrap="square" rtlCol="0" anchor="t">
+            <a:spAutoFit/>
+          </a:bodyPr>
+          <a:lstStyle/>
+          <a:p>
+            <a:pPr marL="434975" indent="-342900">
+              <a:lnSpc>
+                <a:spcPct val="150000"/>
+              </a:lnSpc>
+              <a:buFont typeface="+mj-lt"/>
+              <a:buAutoNum type="arabicPeriod" startAt="3"/>
+            </a:pPr>
+            <a:r>
+              <a:rPr lang="ko-KR" altLang="en-US" sz="1600" spc="-50" dirty="0"/>
+              <a:t>보험시장이 잘 작동한다 하더라도</a:t>
+            </a:r>
+            <a:r>
+              <a:rPr lang="en-US" altLang="ko-KR" sz="1600" spc="-50" dirty="0"/>
+              <a:t>, </a:t>
+            </a:r>
+            <a:r>
+              <a:rPr lang="ko-KR" altLang="en-US" sz="1600" spc="-50" dirty="0"/>
+              <a:t>사람들이 근시안적으로 행동하여 위험에 대한 대비가 소홀해질 수 있다</a:t>
+            </a:r>
+            <a:r>
+              <a:rPr lang="en-US" altLang="ko-KR" sz="1600" spc="-50" dirty="0"/>
+              <a:t>.</a:t>
+            </a:r>
+          </a:p>
+          <a:p>
+            <a:pPr marL="835025" lvl="1" indent="-285750">
+              <a:lnSpc>
+                <a:spcPct val="150000"/>
+              </a:lnSpc>
+              <a:buFont typeface="Wingdings" panose="05000000000000000000" pitchFamily="2" charset="2"/>
+              <a:buChar char="ü"/>
+            </a:pPr>
+            <a:r>
+              <a:rPr lang="ko-KR" altLang="en-US" sz="1600" spc="-50" dirty="0"/>
+              <a:t>사람들은 위험에 직면하게 될 것을 짐작함에도 불구하고</a:t>
+            </a:r>
+            <a:r>
+              <a:rPr lang="en-US" altLang="ko-KR" sz="1600" spc="-50" dirty="0"/>
+              <a:t>, </a:t>
+            </a:r>
+            <a:r>
+              <a:rPr lang="ko-KR" altLang="en-US" sz="1600" spc="-50" dirty="0"/>
+              <a:t>당장 보험료가 아까워 보험에 가입하지 않을 수 있다</a:t>
+            </a:r>
+            <a:r>
+              <a:rPr lang="en-US" altLang="ko-KR" sz="1600" spc="-50" dirty="0"/>
+              <a:t>.</a:t>
+            </a:r>
+          </a:p>
+          <a:p>
+            <a:pPr marL="1292225" lvl="2" indent="-285750">
+              <a:lnSpc>
+                <a:spcPct val="150000"/>
+              </a:lnSpc>
+              <a:buFont typeface="Wingdings" panose="05000000000000000000" pitchFamily="2" charset="2"/>
+              <a:buChar char="Ø"/>
+            </a:pPr>
+            <a:r>
+              <a:rPr lang="ko-KR" altLang="en-US" sz="1600" spc="-50" dirty="0"/>
+              <a:t>사소한 경우라면 무방할 수 있지만</a:t>
+            </a:r>
+            <a:r>
+              <a:rPr lang="en-US" altLang="ko-KR" sz="1600" spc="-50" dirty="0"/>
+              <a:t>, </a:t>
+            </a:r>
+            <a:r>
+              <a:rPr lang="ko-KR" altLang="en-US" sz="1600" spc="-50" dirty="0"/>
+              <a:t>생계 자체가 위협을 받게 되는 위험이라면 정부가 개입할 필요가 생긴다</a:t>
+            </a:r>
+            <a:r>
+              <a:rPr lang="en-US" altLang="ko-KR" sz="1600" spc="-50" dirty="0"/>
+              <a:t>.</a:t>
+            </a:r>
+          </a:p>
+          <a:p>
+            <a:pPr marL="434975" indent="-342900">
+              <a:lnSpc>
+                <a:spcPct val="150000"/>
+              </a:lnSpc>
+              <a:buFont typeface="+mj-lt"/>
+              <a:buAutoNum type="arabicPeriod" startAt="3"/>
+            </a:pPr>
+            <a:r>
+              <a:rPr lang="ko-KR" altLang="en-US" sz="1600" spc="-50" dirty="0"/>
+              <a:t>어떤 상품의 경우에는 모든 국민이 고루 누릴 수 있어야 하는 상품 평등주의 관점에서 정부가 개입할 필요가 있다</a:t>
+            </a:r>
+            <a:r>
+              <a:rPr lang="en-US" altLang="ko-KR" sz="1600" spc="-50" dirty="0"/>
+              <a:t>.</a:t>
+            </a:r>
+          </a:p>
+          <a:p>
+            <a:pPr marL="892175" lvl="1" indent="-342900">
+              <a:lnSpc>
+                <a:spcPct val="150000"/>
+              </a:lnSpc>
+              <a:buFont typeface="Wingdings" panose="05000000000000000000" pitchFamily="2" charset="2"/>
+              <a:buChar char="ü"/>
+            </a:pPr>
+            <a:r>
+              <a:rPr lang="ko-KR" altLang="en-US" sz="1600" spc="-50" dirty="0"/>
+              <a:t>아픈 사람은 소득과 관계없이 의료서비스 혜택을 누릴 수 있어야 한다</a:t>
+            </a:r>
+            <a:r>
+              <a:rPr lang="en-US" altLang="ko-KR" sz="1600" spc="-50" dirty="0"/>
+              <a:t>.</a:t>
+            </a:r>
+          </a:p>
+          <a:p>
+            <a:pPr marL="1349375" lvl="2" indent="-342900">
+              <a:lnSpc>
+                <a:spcPct val="150000"/>
+              </a:lnSpc>
+              <a:buFont typeface="Wingdings" panose="05000000000000000000" pitchFamily="2" charset="2"/>
+              <a:buChar char="Ø"/>
+            </a:pPr>
+            <a:r>
+              <a:rPr lang="ko-KR" altLang="en-US" sz="1600" spc="-50" dirty="0"/>
+              <a:t>민간부문이 모든 의료보험을 운영하고 있다면</a:t>
+            </a:r>
+            <a:r>
+              <a:rPr lang="en-US" altLang="ko-KR" sz="1600" spc="-50" dirty="0"/>
+              <a:t>, </a:t>
+            </a:r>
+            <a:r>
+              <a:rPr lang="ko-KR" altLang="en-US" sz="1600" spc="-50" dirty="0"/>
+              <a:t>돈이 없어서 치료 받지 못하는 사람이 생길 수 있다</a:t>
+            </a:r>
+            <a:r>
+              <a:rPr lang="en-US" altLang="ko-KR" sz="1600" spc="-50" dirty="0"/>
+              <a:t>.</a:t>
+            </a:r>
+          </a:p>
+          <a:p>
+            <a:pPr marL="1349375" lvl="2" indent="-342900">
+              <a:lnSpc>
+                <a:spcPct val="150000"/>
+              </a:lnSpc>
+              <a:buFont typeface="Wingdings" panose="05000000000000000000" pitchFamily="2" charset="2"/>
+              <a:buChar char="Ø"/>
+            </a:pPr>
+            <a:endParaRPr lang="en-US" altLang="ko-KR" sz="1600" spc="-50" dirty="0"/>
+          </a:p>
+          <a:p>
+            <a:pPr marL="434975" indent="-342900">
+              <a:lnSpc>
+                <a:spcPct val="150000"/>
+              </a:lnSpc>
+              <a:buFont typeface="Arial" panose="020B0604020202020204" pitchFamily="34" charset="0"/>
+              <a:buChar char="•"/>
+            </a:pPr>
+            <a:r>
+              <a:rPr lang="ko-KR" altLang="en-US" sz="1600" spc="-50" dirty="0"/>
+              <a:t>정부가 운영하는 사회보험은 민간부문의 보험과 여러 측면에서 차이를 갖는다</a:t>
+            </a:r>
+            <a:r>
+              <a:rPr lang="en-US" altLang="ko-KR" sz="1600" spc="-50" dirty="0"/>
+              <a:t>.</a:t>
+            </a:r>
+          </a:p>
+          <a:p>
+            <a:pPr marL="892175" lvl="1" indent="-342900">
+              <a:lnSpc>
+                <a:spcPct val="150000"/>
+              </a:lnSpc>
+              <a:buFont typeface="Wingdings" panose="05000000000000000000" pitchFamily="2" charset="2"/>
+              <a:buChar char="ü"/>
+            </a:pPr>
+            <a:r>
+              <a:rPr lang="ko-KR" altLang="en-US" sz="1600" spc="-50" dirty="0"/>
+              <a:t>사회보험은 강제성을 가진다</a:t>
+            </a:r>
+            <a:endParaRPr lang="en-US" altLang="ko-KR" sz="1600" spc="-50" dirty="0"/>
+          </a:p>
+          <a:p>
+            <a:pPr marL="1349375" lvl="2" indent="-342900">
+              <a:lnSpc>
+                <a:spcPct val="150000"/>
+              </a:lnSpc>
+              <a:buFont typeface="Wingdings" panose="05000000000000000000" pitchFamily="2" charset="2"/>
+              <a:buChar char="Ø"/>
+            </a:pPr>
+            <a:r>
+              <a:rPr lang="ko-KR" altLang="en-US" sz="1600" spc="-50" dirty="0"/>
+              <a:t>일정한 조건을 갖춘 국민이면 반드시 사회보험에 가입하도록 되어 있다</a:t>
+            </a:r>
+            <a:r>
+              <a:rPr lang="en-US" altLang="ko-KR" sz="1600" spc="-50" dirty="0"/>
+              <a:t>.</a:t>
+            </a:r>
+          </a:p>
+          <a:p>
+            <a:pPr marL="892175" lvl="1" indent="-342900">
+              <a:lnSpc>
+                <a:spcPct val="150000"/>
+              </a:lnSpc>
+              <a:buFont typeface="Wingdings" panose="05000000000000000000" pitchFamily="2" charset="2"/>
+              <a:buChar char="ü"/>
+            </a:pPr>
+            <a:r>
+              <a:rPr lang="ko-KR" altLang="en-US" sz="1600" spc="-50" dirty="0"/>
+              <a:t>민간보험과는 달리 사회보험은 본인 외에도 고용주와 정부가 비용의 일부를 부담한다</a:t>
+            </a:r>
+            <a:r>
+              <a:rPr lang="en-US" altLang="ko-KR" sz="1600" spc="-50" dirty="0"/>
+              <a:t>.</a:t>
+            </a:r>
+          </a:p>
+          <a:p>
+            <a:pPr marL="892175" lvl="1" indent="-342900">
+              <a:lnSpc>
+                <a:spcPct val="150000"/>
+              </a:lnSpc>
+              <a:buFont typeface="Wingdings" panose="05000000000000000000" pitchFamily="2" charset="2"/>
+              <a:buChar char="ü"/>
+            </a:pPr>
+            <a:r>
+              <a:rPr lang="ko-KR" altLang="en-US" sz="1600" spc="-50" dirty="0"/>
+              <a:t>민간보험은 가입자가 낸 보험료와 혜택이 밀접한 관련을 갖는데 반해</a:t>
+            </a:r>
+            <a:r>
+              <a:rPr lang="en-US" altLang="ko-KR" sz="1600" spc="-50" dirty="0"/>
+              <a:t>, </a:t>
+            </a:r>
+            <a:r>
+              <a:rPr lang="ko-KR" altLang="en-US" sz="1600" spc="-50" dirty="0"/>
+              <a:t>사회보험은 소득의 재분배적 성격이 가미되어 사회적 정합성과 개인적 공평성을 고려한다</a:t>
+            </a:r>
+            <a:r>
+              <a:rPr lang="en-US" altLang="ko-KR" sz="1600" spc="-50" dirty="0"/>
+              <a:t>.</a:t>
+            </a:r>
+          </a:p>
+          <a:p>
+            <a:pPr marL="892175" lvl="1" indent="-342900">
+              <a:lnSpc>
+                <a:spcPct val="150000"/>
+              </a:lnSpc>
+              <a:buFont typeface="Wingdings" panose="05000000000000000000" pitchFamily="2" charset="2"/>
+              <a:buChar char="ü"/>
+            </a:pPr>
+            <a:r>
+              <a:rPr lang="en-US" altLang="ko-KR" sz="1600" spc="-50" dirty="0"/>
+              <a:t>https://www.4insure.or.kr/pbiz/feii/sinsDefIntroView.do</a:t>
+            </a:r>
+          </a:p>
+        </p:txBody>
+      </p:sp>
+    </p:spTree>
+    <p:extLst>
+      <p:ext uri="{BB962C8B-B14F-4D97-AF65-F5344CB8AC3E}">
+        <p14:creationId xmlns:p14="http://schemas.microsoft.com/office/powerpoint/2010/main" val="2724108605"/>
+      </p:ext>
+    </p:extLst>
+  </p:cSld>
+  <p:clrMapOvr>
+    <a:masterClrMapping/>
+  </p:clrMapOvr>
+</p:sld>
+</file>
+
+<file path=ppt/slides/slide50.xml><?xml version="1.0" encoding="utf-8"?>
 <p:sld xmlns:a="http://schemas.openxmlformats.org/drawingml/2006/main" xmlns:r="http://schemas.openxmlformats.org/officeDocument/2006/relationships" xmlns:p="http://schemas.openxmlformats.org/presentationml/2006/main">
   <p:cSld>
     <p:spTree>
@@ -22007,7 +24476,7 @@
           <a:p>
             <a:fld id="{109C872D-39A9-4065-8BF3-6A613116E2A1}" type="slidenum">
               <a:rPr lang="ko-KR" altLang="en-US" smtClean="0"/>
-              <a:t>47</a:t>
+              <a:t>50</a:t>
             </a:fld>
             <a:endParaRPr lang="ko-KR" altLang="en-US"/>
           </a:p>
@@ -22813,7 +25282,7 @@
 </p:sld>
 </file>
 
-<file path=ppt/slides/slide48.xml><?xml version="1.0" encoding="utf-8"?>
+<file path=ppt/slides/slide51.xml><?xml version="1.0" encoding="utf-8"?>
 <p:sld xmlns:a="http://schemas.openxmlformats.org/drawingml/2006/main" xmlns:r="http://schemas.openxmlformats.org/officeDocument/2006/relationships" xmlns:p="http://schemas.openxmlformats.org/presentationml/2006/main">
   <p:cSld>
     <p:spTree>
@@ -22887,7 +25356,7 @@
           <a:p>
             <a:fld id="{109C872D-39A9-4065-8BF3-6A613116E2A1}" type="slidenum">
               <a:rPr lang="ko-KR" altLang="en-US" smtClean="0"/>
-              <a:t>48</a:t>
+              <a:t>51</a:t>
             </a:fld>
             <a:endParaRPr lang="ko-KR" altLang="en-US"/>
           </a:p>
@@ -23174,7 +25643,7 @@
 </p:sld>
 </file>
 
-<file path=ppt/slides/slide49.xml><?xml version="1.0" encoding="utf-8"?>
+<file path=ppt/slides/slide52.xml><?xml version="1.0" encoding="utf-8"?>
 <p:sld xmlns:a="http://schemas.openxmlformats.org/drawingml/2006/main" xmlns:r="http://schemas.openxmlformats.org/officeDocument/2006/relationships" xmlns:p="http://schemas.openxmlformats.org/presentationml/2006/main">
   <p:cSld>
     <p:spTree>
@@ -23248,7 +25717,7 @@
           <a:p>
             <a:fld id="{109C872D-39A9-4065-8BF3-6A613116E2A1}" type="slidenum">
               <a:rPr lang="ko-KR" altLang="en-US" smtClean="0"/>
-              <a:t>49</a:t>
+              <a:t>52</a:t>
             </a:fld>
             <a:endParaRPr lang="ko-KR" altLang="en-US"/>
           </a:p>
@@ -23412,376 +25881,7 @@
 </p:sld>
 </file>
 
-<file path=ppt/slides/slide5.xml><?xml version="1.0" encoding="utf-8"?>
-<p:sld xmlns:a="http://schemas.openxmlformats.org/drawingml/2006/main" xmlns:r="http://schemas.openxmlformats.org/officeDocument/2006/relationships" xmlns:p="http://schemas.openxmlformats.org/presentationml/2006/main">
-  <p:cSld>
-    <p:spTree>
-      <p:nvGrpSpPr>
-        <p:cNvPr id="1" name="">
-          <a:extLst>
-            <a:ext uri="{FF2B5EF4-FFF2-40B4-BE49-F238E27FC236}">
-              <a16:creationId xmlns:a16="http://schemas.microsoft.com/office/drawing/2014/main" id="{2A6177E6-2BE2-8810-F89F-48E53629EB8A}"/>
-            </a:ext>
-          </a:extLst>
-        </p:cNvPr>
-        <p:cNvGrpSpPr/>
-        <p:nvPr/>
-      </p:nvGrpSpPr>
-      <p:grpSpPr>
-        <a:xfrm>
-          <a:off x="0" y="0"/>
-          <a:ext cx="0" cy="0"/>
-          <a:chOff x="0" y="0"/>
-          <a:chExt cx="0" cy="0"/>
-        </a:xfrm>
-      </p:grpSpPr>
-      <p:sp>
-        <p:nvSpPr>
-          <p:cNvPr id="2" name="제목 1">
-            <a:extLst>
-              <a:ext uri="{FF2B5EF4-FFF2-40B4-BE49-F238E27FC236}">
-                <a16:creationId xmlns:a16="http://schemas.microsoft.com/office/drawing/2014/main" id="{BFA7A44D-A761-673A-4E43-DE33CE276613}"/>
-              </a:ext>
-            </a:extLst>
-          </p:cNvPr>
-          <p:cNvSpPr>
-            <a:spLocks noGrp="1"/>
-          </p:cNvSpPr>
-          <p:nvPr>
-            <p:ph type="title"/>
-          </p:nvPr>
-        </p:nvSpPr>
-        <p:spPr/>
-        <p:txBody>
-          <a:bodyPr/>
-          <a:lstStyle/>
-          <a:p>
-            <a:r>
-              <a:rPr lang="ko-KR" altLang="en-US" dirty="0"/>
-              <a:t>사회보험제도의 의미</a:t>
-            </a:r>
-          </a:p>
-        </p:txBody>
-      </p:sp>
-      <p:sp>
-        <p:nvSpPr>
-          <p:cNvPr id="4" name="슬라이드 번호 개체 틀 3">
-            <a:extLst>
-              <a:ext uri="{FF2B5EF4-FFF2-40B4-BE49-F238E27FC236}">
-                <a16:creationId xmlns:a16="http://schemas.microsoft.com/office/drawing/2014/main" id="{692F3803-4273-D729-E62C-66D07D9E6ABA}"/>
-              </a:ext>
-            </a:extLst>
-          </p:cNvPr>
-          <p:cNvSpPr>
-            <a:spLocks noGrp="1"/>
-          </p:cNvSpPr>
-          <p:nvPr>
-            <p:ph type="sldNum" sz="quarter" idx="12"/>
-          </p:nvPr>
-        </p:nvSpPr>
-        <p:spPr/>
-        <p:txBody>
-          <a:bodyPr/>
-          <a:lstStyle/>
-          <a:p>
-            <a:fld id="{109C872D-39A9-4065-8BF3-6A613116E2A1}" type="slidenum">
-              <a:rPr lang="ko-KR" altLang="en-US" smtClean="0"/>
-              <a:t>5</a:t>
-            </a:fld>
-            <a:endParaRPr lang="ko-KR" altLang="en-US"/>
-          </a:p>
-        </p:txBody>
-      </p:sp>
-      <p:sp>
-        <p:nvSpPr>
-          <p:cNvPr id="3" name="TextBox 2">
-            <a:extLst>
-              <a:ext uri="{FF2B5EF4-FFF2-40B4-BE49-F238E27FC236}">
-                <a16:creationId xmlns:a16="http://schemas.microsoft.com/office/drawing/2014/main" id="{91DCF3A8-8A08-DF37-1A5B-CD577B183587}"/>
-              </a:ext>
-            </a:extLst>
-          </p:cNvPr>
-          <p:cNvSpPr txBox="1"/>
-          <p:nvPr/>
-        </p:nvSpPr>
-        <p:spPr>
-          <a:xfrm>
-            <a:off x="288790" y="958844"/>
-            <a:ext cx="11250267" cy="5215338"/>
-          </a:xfrm>
-          <a:prstGeom prst="rect">
-            <a:avLst/>
-          </a:prstGeom>
-          <a:noFill/>
-        </p:spPr>
-        <p:txBody>
-          <a:bodyPr wrap="square" rtlCol="0" anchor="t">
-            <a:spAutoFit/>
-          </a:bodyPr>
-          <a:lstStyle/>
-          <a:p>
-            <a:pPr marL="434975" indent="-342900">
-              <a:lnSpc>
-                <a:spcPct val="150000"/>
-              </a:lnSpc>
-              <a:buFont typeface="+mj-lt"/>
-              <a:buAutoNum type="arabicPeriod" startAt="3"/>
-            </a:pPr>
-            <a:r>
-              <a:rPr lang="ko-KR" altLang="en-US" sz="1600" spc="-50" dirty="0"/>
-              <a:t>보험시장이 잘 작동한다 하더라도</a:t>
-            </a:r>
-            <a:r>
-              <a:rPr lang="en-US" altLang="ko-KR" sz="1600" spc="-50" dirty="0"/>
-              <a:t>, </a:t>
-            </a:r>
-            <a:r>
-              <a:rPr lang="ko-KR" altLang="en-US" sz="1600" spc="-50" dirty="0"/>
-              <a:t>사람들이 근시안적으로 행동하여 위험에 대한 대비가 소홀해질 수 있다</a:t>
-            </a:r>
-            <a:r>
-              <a:rPr lang="en-US" altLang="ko-KR" sz="1600" spc="-50" dirty="0"/>
-              <a:t>.</a:t>
-            </a:r>
-          </a:p>
-          <a:p>
-            <a:pPr marL="835025" lvl="1" indent="-285750">
-              <a:lnSpc>
-                <a:spcPct val="150000"/>
-              </a:lnSpc>
-              <a:buFont typeface="Wingdings" panose="05000000000000000000" pitchFamily="2" charset="2"/>
-              <a:buChar char="ü"/>
-            </a:pPr>
-            <a:r>
-              <a:rPr lang="ko-KR" altLang="en-US" sz="1600" spc="-50" dirty="0"/>
-              <a:t>사람들은 위험에 직면하게 될 것을 짐작함에도 불구하고</a:t>
-            </a:r>
-            <a:r>
-              <a:rPr lang="en-US" altLang="ko-KR" sz="1600" spc="-50" dirty="0"/>
-              <a:t>, </a:t>
-            </a:r>
-            <a:r>
-              <a:rPr lang="ko-KR" altLang="en-US" sz="1600" spc="-50" dirty="0"/>
-              <a:t>당장 보험료가 아까워 보험에 가입하지 않을 수 있다</a:t>
-            </a:r>
-            <a:r>
-              <a:rPr lang="en-US" altLang="ko-KR" sz="1600" spc="-50" dirty="0"/>
-              <a:t>.</a:t>
-            </a:r>
-          </a:p>
-          <a:p>
-            <a:pPr marL="1292225" lvl="2" indent="-285750">
-              <a:lnSpc>
-                <a:spcPct val="150000"/>
-              </a:lnSpc>
-              <a:buFont typeface="Wingdings" panose="05000000000000000000" pitchFamily="2" charset="2"/>
-              <a:buChar char="Ø"/>
-            </a:pPr>
-            <a:r>
-              <a:rPr lang="ko-KR" altLang="en-US" sz="1600" spc="-50" dirty="0"/>
-              <a:t>사소한 경우라면 무방할 수 있지만</a:t>
-            </a:r>
-            <a:r>
-              <a:rPr lang="en-US" altLang="ko-KR" sz="1600" spc="-50" dirty="0"/>
-              <a:t>, </a:t>
-            </a:r>
-            <a:r>
-              <a:rPr lang="ko-KR" altLang="en-US" sz="1600" spc="-50" dirty="0"/>
-              <a:t>생계 자체가 위협을 받게 되는 위험이라면 정부가 개입할 필요가 생긴다</a:t>
-            </a:r>
-            <a:r>
-              <a:rPr lang="en-US" altLang="ko-KR" sz="1600" spc="-50" dirty="0"/>
-              <a:t>.</a:t>
-            </a:r>
-          </a:p>
-          <a:p>
-            <a:pPr marL="434975" indent="-342900">
-              <a:lnSpc>
-                <a:spcPct val="150000"/>
-              </a:lnSpc>
-              <a:buFont typeface="+mj-lt"/>
-              <a:buAutoNum type="arabicPeriod" startAt="3"/>
-            </a:pPr>
-            <a:r>
-              <a:rPr lang="ko-KR" altLang="en-US" sz="1600" spc="-50" dirty="0"/>
-              <a:t>어떤 상품의 경우에는 모든 국민이 고루 누릴 수 있어야 하는 상품 평등주의 관점에서 정부가 개입할 필요가 있다</a:t>
-            </a:r>
-            <a:r>
-              <a:rPr lang="en-US" altLang="ko-KR" sz="1600" spc="-50" dirty="0"/>
-              <a:t>.</a:t>
-            </a:r>
-          </a:p>
-          <a:p>
-            <a:pPr marL="892175" lvl="1" indent="-342900">
-              <a:lnSpc>
-                <a:spcPct val="150000"/>
-              </a:lnSpc>
-              <a:buFont typeface="Wingdings" panose="05000000000000000000" pitchFamily="2" charset="2"/>
-              <a:buChar char="ü"/>
-            </a:pPr>
-            <a:r>
-              <a:rPr lang="ko-KR" altLang="en-US" sz="1600" spc="-50" dirty="0"/>
-              <a:t>아픈 사람은 소득과 관계없이 의료서비스 혜택을 누릴 수 있어야 한다</a:t>
-            </a:r>
-            <a:r>
-              <a:rPr lang="en-US" altLang="ko-KR" sz="1600" spc="-50" dirty="0"/>
-              <a:t>.</a:t>
-            </a:r>
-          </a:p>
-          <a:p>
-            <a:pPr marL="1349375" lvl="2" indent="-342900">
-              <a:lnSpc>
-                <a:spcPct val="150000"/>
-              </a:lnSpc>
-              <a:buFont typeface="Wingdings" panose="05000000000000000000" pitchFamily="2" charset="2"/>
-              <a:buChar char="Ø"/>
-            </a:pPr>
-            <a:r>
-              <a:rPr lang="ko-KR" altLang="en-US" sz="1600" spc="-50" dirty="0"/>
-              <a:t>민간부문이 모든 의료보험을 운영하고 있다면</a:t>
-            </a:r>
-            <a:r>
-              <a:rPr lang="en-US" altLang="ko-KR" sz="1600" spc="-50" dirty="0"/>
-              <a:t>, </a:t>
-            </a:r>
-            <a:r>
-              <a:rPr lang="ko-KR" altLang="en-US" sz="1600" spc="-50" dirty="0"/>
-              <a:t>돈이 없어서 치료 받지 못하는 사람이 생길 수 있다</a:t>
-            </a:r>
-            <a:r>
-              <a:rPr lang="en-US" altLang="ko-KR" sz="1600" spc="-50" dirty="0"/>
-              <a:t>.</a:t>
-            </a:r>
-          </a:p>
-          <a:p>
-            <a:pPr marL="1349375" lvl="2" indent="-342900">
-              <a:lnSpc>
-                <a:spcPct val="150000"/>
-              </a:lnSpc>
-              <a:buFont typeface="Wingdings" panose="05000000000000000000" pitchFamily="2" charset="2"/>
-              <a:buChar char="Ø"/>
-            </a:pPr>
-            <a:endParaRPr lang="en-US" altLang="ko-KR" sz="1600" spc="-50" dirty="0"/>
-          </a:p>
-          <a:p>
-            <a:pPr marL="434975" indent="-342900">
-              <a:lnSpc>
-                <a:spcPct val="150000"/>
-              </a:lnSpc>
-              <a:buFont typeface="Arial" panose="020B0604020202020204" pitchFamily="34" charset="0"/>
-              <a:buChar char="•"/>
-            </a:pPr>
-            <a:r>
-              <a:rPr lang="ko-KR" altLang="en-US" sz="1600" spc="-50" dirty="0"/>
-              <a:t>정부가 운영하는 사회보험은 민간부문의 보험과 여러 측면에서 차이를 갖는다</a:t>
-            </a:r>
-            <a:r>
-              <a:rPr lang="en-US" altLang="ko-KR" sz="1600" spc="-50" dirty="0"/>
-              <a:t>.</a:t>
-            </a:r>
-          </a:p>
-          <a:p>
-            <a:pPr marL="892175" lvl="1" indent="-342900">
-              <a:lnSpc>
-                <a:spcPct val="150000"/>
-              </a:lnSpc>
-              <a:buFont typeface="Wingdings" panose="05000000000000000000" pitchFamily="2" charset="2"/>
-              <a:buChar char="ü"/>
-            </a:pPr>
-            <a:r>
-              <a:rPr lang="ko-KR" altLang="en-US" sz="1600" spc="-50" dirty="0"/>
-              <a:t>사회보험은 강제성을 가진다</a:t>
-            </a:r>
-            <a:endParaRPr lang="en-US" altLang="ko-KR" sz="1600" spc="-50" dirty="0"/>
-          </a:p>
-          <a:p>
-            <a:pPr marL="1349375" lvl="2" indent="-342900">
-              <a:lnSpc>
-                <a:spcPct val="150000"/>
-              </a:lnSpc>
-              <a:buFont typeface="Wingdings" panose="05000000000000000000" pitchFamily="2" charset="2"/>
-              <a:buChar char="Ø"/>
-            </a:pPr>
-            <a:r>
-              <a:rPr lang="ko-KR" altLang="en-US" sz="1600" spc="-50" dirty="0"/>
-              <a:t>일정한 조건을 갖춘 국민이면 반드시 사회보험에 가입하도록 되어 있다</a:t>
-            </a:r>
-            <a:r>
-              <a:rPr lang="en-US" altLang="ko-KR" sz="1600" spc="-50" dirty="0"/>
-              <a:t>.</a:t>
-            </a:r>
-          </a:p>
-          <a:p>
-            <a:pPr marL="892175" lvl="1" indent="-342900">
-              <a:lnSpc>
-                <a:spcPct val="150000"/>
-              </a:lnSpc>
-              <a:buFont typeface="Wingdings" panose="05000000000000000000" pitchFamily="2" charset="2"/>
-              <a:buChar char="ü"/>
-            </a:pPr>
-            <a:r>
-              <a:rPr lang="ko-KR" altLang="en-US" sz="1600" spc="-50" dirty="0"/>
-              <a:t>민간보험과는 달리 사회보험은 본인 외에도 고용주와 정부가 비용의 일부를 부담한다</a:t>
-            </a:r>
-            <a:r>
-              <a:rPr lang="en-US" altLang="ko-KR" sz="1600" spc="-50" dirty="0"/>
-              <a:t>.</a:t>
-            </a:r>
-          </a:p>
-          <a:p>
-            <a:pPr marL="892175" lvl="1" indent="-342900">
-              <a:lnSpc>
-                <a:spcPct val="150000"/>
-              </a:lnSpc>
-              <a:buFont typeface="Wingdings" panose="05000000000000000000" pitchFamily="2" charset="2"/>
-              <a:buChar char="ü"/>
-            </a:pPr>
-            <a:r>
-              <a:rPr lang="ko-KR" altLang="en-US" sz="1600" spc="-50" dirty="0"/>
-              <a:t>민간보험은 가입자가 낸 보험료와 혜택이 밀접한 관련을 갖는데 반해</a:t>
-            </a:r>
-            <a:r>
-              <a:rPr lang="en-US" altLang="ko-KR" sz="1600" spc="-50" dirty="0"/>
-              <a:t>, </a:t>
-            </a:r>
-            <a:r>
-              <a:rPr lang="ko-KR" altLang="en-US" sz="1600" spc="-50" dirty="0"/>
-              <a:t>사회보험은 소득의 재분배적 성격이 가미되어 사회적 정합성과 개인적 공평성을 고려한다</a:t>
-            </a:r>
-            <a:r>
-              <a:rPr lang="en-US" altLang="ko-KR" sz="1600" spc="-50" dirty="0"/>
-              <a:t>.</a:t>
-            </a:r>
-          </a:p>
-          <a:p>
-            <a:pPr marL="892175" lvl="1" indent="-342900">
-              <a:lnSpc>
-                <a:spcPct val="150000"/>
-              </a:lnSpc>
-              <a:buFont typeface="Wingdings" panose="05000000000000000000" pitchFamily="2" charset="2"/>
-              <a:buChar char="ü"/>
-            </a:pPr>
-            <a:r>
-              <a:rPr lang="en-US" altLang="ko-KR" sz="1600" spc="-50" dirty="0"/>
-              <a:t>https://www.4insure.or.kr/pbiz/feii/sinsDefIntroView.do</a:t>
-            </a:r>
-          </a:p>
-        </p:txBody>
-      </p:sp>
-    </p:spTree>
-    <p:extLst>
-      <p:ext uri="{BB962C8B-B14F-4D97-AF65-F5344CB8AC3E}">
-        <p14:creationId xmlns:p14="http://schemas.microsoft.com/office/powerpoint/2010/main" val="2724108605"/>
-      </p:ext>
-    </p:extLst>
-  </p:cSld>
-  <p:clrMapOvr>
-    <a:masterClrMapping/>
-  </p:clrMapOvr>
-</p:sld>
-</file>
-
-<file path=ppt/slides/slide50.xml><?xml version="1.0" encoding="utf-8"?>
+<file path=ppt/slides/slide53.xml><?xml version="1.0" encoding="utf-8"?>
 <p:sld xmlns:a="http://schemas.openxmlformats.org/drawingml/2006/main" xmlns:r="http://schemas.openxmlformats.org/officeDocument/2006/relationships" xmlns:p="http://schemas.openxmlformats.org/presentationml/2006/main">
   <p:cSld>
     <p:spTree>
@@ -23864,7 +25964,7 @@
           <a:p>
             <a:fld id="{109C872D-39A9-4065-8BF3-6A613116E2A1}" type="slidenum">
               <a:rPr lang="ko-KR" altLang="en-US" smtClean="0"/>
-              <a:t>50</a:t>
+              <a:t>53</a:t>
             </a:fld>
             <a:endParaRPr lang="ko-KR" altLang="en-US"/>
           </a:p>
@@ -23924,7 +26024,7 @@
 </p:sld>
 </file>
 
-<file path=ppt/slides/slide51.xml><?xml version="1.0" encoding="utf-8"?>
+<file path=ppt/slides/slide54.xml><?xml version="1.0" encoding="utf-8"?>
 <p:sld xmlns:a="http://schemas.openxmlformats.org/drawingml/2006/main" xmlns:r="http://schemas.openxmlformats.org/officeDocument/2006/relationships" xmlns:p="http://schemas.openxmlformats.org/presentationml/2006/main">
   <p:cSld>
     <p:spTree>
@@ -23998,7 +26098,7 @@
           <a:p>
             <a:fld id="{109C872D-39A9-4065-8BF3-6A613116E2A1}" type="slidenum">
               <a:rPr lang="ko-KR" altLang="en-US" smtClean="0"/>
-              <a:t>51</a:t>
+              <a:t>54</a:t>
             </a:fld>
             <a:endParaRPr lang="ko-KR" altLang="en-US"/>
           </a:p>
@@ -24262,7 +26362,7 @@
 </p:sld>
 </file>
 
-<file path=ppt/slides/slide52.xml><?xml version="1.0" encoding="utf-8"?>
+<file path=ppt/slides/slide55.xml><?xml version="1.0" encoding="utf-8"?>
 <p:sld xmlns:a="http://schemas.openxmlformats.org/drawingml/2006/main" xmlns:r="http://schemas.openxmlformats.org/officeDocument/2006/relationships" xmlns:p="http://schemas.openxmlformats.org/presentationml/2006/main">
   <p:cSld>
     <p:spTree>
@@ -24336,7 +26436,7 @@
           <a:p>
             <a:fld id="{109C872D-39A9-4065-8BF3-6A613116E2A1}" type="slidenum">
               <a:rPr lang="ko-KR" altLang="en-US" smtClean="0"/>
-              <a:t>52</a:t>
+              <a:t>55</a:t>
             </a:fld>
             <a:endParaRPr lang="ko-KR" altLang="en-US"/>
           </a:p>
@@ -24828,7 +26928,7 @@
 </p:sld>
 </file>
 
-<file path=ppt/slides/slide53.xml><?xml version="1.0" encoding="utf-8"?>
+<file path=ppt/slides/slide56.xml><?xml version="1.0" encoding="utf-8"?>
 <p:sld xmlns:a="http://schemas.openxmlformats.org/drawingml/2006/main" xmlns:r="http://schemas.openxmlformats.org/officeDocument/2006/relationships" xmlns:p="http://schemas.openxmlformats.org/presentationml/2006/main">
   <p:cSld>
     <p:spTree>
@@ -24902,7 +27002,7 @@
           <a:p>
             <a:fld id="{109C872D-39A9-4065-8BF3-6A613116E2A1}" type="slidenum">
               <a:rPr lang="ko-KR" altLang="en-US" smtClean="0"/>
-              <a:t>53</a:t>
+              <a:t>56</a:t>
             </a:fld>
             <a:endParaRPr lang="ko-KR" altLang="en-US"/>
           </a:p>
@@ -25091,7 +27191,7 @@
 </p:sld>
 </file>
 
-<file path=ppt/slides/slide54.xml><?xml version="1.0" encoding="utf-8"?>
+<file path=ppt/slides/slide57.xml><?xml version="1.0" encoding="utf-8"?>
 <p:sld xmlns:a="http://schemas.openxmlformats.org/drawingml/2006/main" xmlns:r="http://schemas.openxmlformats.org/officeDocument/2006/relationships" xmlns:p="http://schemas.openxmlformats.org/presentationml/2006/main">
   <p:cSld>
     <p:spTree>
@@ -25165,7 +27265,7 @@
           <a:p>
             <a:fld id="{109C872D-39A9-4065-8BF3-6A613116E2A1}" type="slidenum">
               <a:rPr lang="ko-KR" altLang="en-US" smtClean="0"/>
-              <a:t>54</a:t>
+              <a:t>57</a:t>
             </a:fld>
             <a:endParaRPr lang="ko-KR" altLang="en-US"/>
           </a:p>
@@ -25359,7 +27459,7 @@
 </p:sld>
 </file>
 
-<file path=ppt/slides/slide55.xml><?xml version="1.0" encoding="utf-8"?>
+<file path=ppt/slides/slide58.xml><?xml version="1.0" encoding="utf-8"?>
 <p:sld xmlns:a="http://schemas.openxmlformats.org/drawingml/2006/main" xmlns:r="http://schemas.openxmlformats.org/officeDocument/2006/relationships" xmlns:p="http://schemas.openxmlformats.org/presentationml/2006/main">
   <p:cSld>
     <p:spTree>
@@ -25433,7 +27533,7 @@
           <a:p>
             <a:fld id="{109C872D-39A9-4065-8BF3-6A613116E2A1}" type="slidenum">
               <a:rPr lang="ko-KR" altLang="en-US" smtClean="0"/>
-              <a:t>55</a:t>
+              <a:t>58</a:t>
             </a:fld>
             <a:endParaRPr lang="ko-KR" altLang="en-US"/>
           </a:p>
@@ -25623,7 +27723,7 @@
 </p:sld>
 </file>
 
-<file path=ppt/slides/slide56.xml><?xml version="1.0" encoding="utf-8"?>
+<file path=ppt/slides/slide59.xml><?xml version="1.0" encoding="utf-8"?>
 <p:sld xmlns:a="http://schemas.openxmlformats.org/drawingml/2006/main" xmlns:r="http://schemas.openxmlformats.org/officeDocument/2006/relationships" xmlns:p="http://schemas.openxmlformats.org/presentationml/2006/main">
   <p:cSld>
     <p:spTree>
@@ -25706,7 +27806,7 @@
           <a:p>
             <a:fld id="{109C872D-39A9-4065-8BF3-6A613116E2A1}" type="slidenum">
               <a:rPr lang="ko-KR" altLang="en-US" smtClean="0"/>
-              <a:t>56</a:t>
+              <a:t>59</a:t>
             </a:fld>
             <a:endParaRPr lang="ko-KR" altLang="en-US"/>
           </a:p>
@@ -25770,7 +27870,478 @@
 </p:sld>
 </file>
 
-<file path=ppt/slides/slide57.xml><?xml version="1.0" encoding="utf-8"?>
+<file path=ppt/slides/slide6.xml><?xml version="1.0" encoding="utf-8"?>
+<p:sld xmlns:a="http://schemas.openxmlformats.org/drawingml/2006/main" xmlns:r="http://schemas.openxmlformats.org/officeDocument/2006/relationships" xmlns:p="http://schemas.openxmlformats.org/presentationml/2006/main">
+  <p:cSld>
+    <p:spTree>
+      <p:nvGrpSpPr>
+        <p:cNvPr id="1" name="">
+          <a:extLst>
+            <a:ext uri="{FF2B5EF4-FFF2-40B4-BE49-F238E27FC236}">
+              <a16:creationId xmlns:a16="http://schemas.microsoft.com/office/drawing/2014/main" id="{C76B5BBC-2173-0A91-45C7-3F99C44AA848}"/>
+            </a:ext>
+          </a:extLst>
+        </p:cNvPr>
+        <p:cNvGrpSpPr/>
+        <p:nvPr/>
+      </p:nvGrpSpPr>
+      <p:grpSpPr>
+        <a:xfrm>
+          <a:off x="0" y="0"/>
+          <a:ext cx="0" cy="0"/>
+          <a:chOff x="0" y="0"/>
+          <a:chExt cx="0" cy="0"/>
+        </a:xfrm>
+      </p:grpSpPr>
+      <p:sp>
+        <p:nvSpPr>
+          <p:cNvPr id="2" name="제목 1">
+            <a:extLst>
+              <a:ext uri="{FF2B5EF4-FFF2-40B4-BE49-F238E27FC236}">
+                <a16:creationId xmlns:a16="http://schemas.microsoft.com/office/drawing/2014/main" id="{DC81F982-0296-CCCD-0C64-398986AF2705}"/>
+              </a:ext>
+            </a:extLst>
+          </p:cNvPr>
+          <p:cNvSpPr>
+            <a:spLocks noGrp="1"/>
+          </p:cNvSpPr>
+          <p:nvPr>
+            <p:ph type="title"/>
+          </p:nvPr>
+        </p:nvSpPr>
+        <p:spPr/>
+        <p:txBody>
+          <a:bodyPr/>
+          <a:lstStyle/>
+          <a:p>
+            <a:r>
+              <a:rPr lang="ko-KR" altLang="en-US" dirty="0"/>
+              <a:t>사회보험제도의 의미</a:t>
+            </a:r>
+          </a:p>
+        </p:txBody>
+      </p:sp>
+      <p:sp>
+        <p:nvSpPr>
+          <p:cNvPr id="4" name="슬라이드 번호 개체 틀 3">
+            <a:extLst>
+              <a:ext uri="{FF2B5EF4-FFF2-40B4-BE49-F238E27FC236}">
+                <a16:creationId xmlns:a16="http://schemas.microsoft.com/office/drawing/2014/main" id="{4CE964F4-122E-78EB-A96C-D340D809A4F5}"/>
+              </a:ext>
+            </a:extLst>
+          </p:cNvPr>
+          <p:cNvSpPr>
+            <a:spLocks noGrp="1"/>
+          </p:cNvSpPr>
+          <p:nvPr>
+            <p:ph type="sldNum" sz="quarter" idx="12"/>
+          </p:nvPr>
+        </p:nvSpPr>
+        <p:spPr/>
+        <p:txBody>
+          <a:bodyPr/>
+          <a:lstStyle/>
+          <a:p>
+            <a:fld id="{109C872D-39A9-4065-8BF3-6A613116E2A1}" type="slidenum">
+              <a:rPr lang="ko-KR" altLang="en-US" smtClean="0"/>
+              <a:t>6</a:t>
+            </a:fld>
+            <a:endParaRPr lang="ko-KR" altLang="en-US"/>
+          </a:p>
+        </p:txBody>
+      </p:sp>
+      <p:sp>
+        <p:nvSpPr>
+          <p:cNvPr id="5" name="TextBox 4">
+            <a:extLst>
+              <a:ext uri="{FF2B5EF4-FFF2-40B4-BE49-F238E27FC236}">
+                <a16:creationId xmlns:a16="http://schemas.microsoft.com/office/drawing/2014/main" id="{EB01E0BF-2701-6A9F-2294-3922ABA0E93C}"/>
+              </a:ext>
+            </a:extLst>
+          </p:cNvPr>
+          <p:cNvSpPr txBox="1"/>
+          <p:nvPr/>
+        </p:nvSpPr>
+        <p:spPr>
+          <a:xfrm>
+            <a:off x="288790" y="958844"/>
+            <a:ext cx="11250267" cy="1891352"/>
+          </a:xfrm>
+          <a:prstGeom prst="rect">
+            <a:avLst/>
+          </a:prstGeom>
+          <a:noFill/>
+        </p:spPr>
+        <p:txBody>
+          <a:bodyPr wrap="square" rtlCol="0" anchor="t">
+            <a:spAutoFit/>
+          </a:bodyPr>
+          <a:lstStyle/>
+          <a:p>
+            <a:pPr marL="377825" indent="-285750">
+              <a:lnSpc>
+                <a:spcPct val="150000"/>
+              </a:lnSpc>
+              <a:buFont typeface="Arial" panose="020B0604020202020204" pitchFamily="34" charset="0"/>
+              <a:buChar char="•"/>
+            </a:pPr>
+            <a:r>
+              <a:rPr lang="ko-KR" altLang="en-US" sz="1600" spc="-50" dirty="0"/>
+              <a:t>앞서 </a:t>
+            </a:r>
+            <a:r>
+              <a:rPr lang="en-US" altLang="ko-KR" sz="1600" spc="-50" dirty="0"/>
+              <a:t>Ch.9</a:t>
+            </a:r>
+            <a:r>
+              <a:rPr lang="ko-KR" altLang="en-US" sz="1600" spc="-50" dirty="0"/>
+              <a:t>에서 사회복지제도 </a:t>
+            </a:r>
+            <a:r>
+              <a:rPr lang="en-US" altLang="ko-KR" sz="1600" spc="-50" dirty="0"/>
+              <a:t>(</a:t>
+            </a:r>
+            <a:r>
+              <a:rPr lang="ko-KR" altLang="en-US" sz="1600" spc="-50" dirty="0"/>
+              <a:t>혹은 사회보장제도</a:t>
+            </a:r>
+            <a:r>
+              <a:rPr lang="en-US" altLang="ko-KR" sz="1600" spc="-50" dirty="0"/>
+              <a:t>)</a:t>
+            </a:r>
+            <a:r>
+              <a:rPr lang="ko-KR" altLang="en-US" sz="1600" spc="-50" dirty="0"/>
+              <a:t>는 사회보험제도와 공공부조 프로그램으로 나누어 볼 수 있다고 하였다</a:t>
+            </a:r>
+            <a:r>
+              <a:rPr lang="en-US" altLang="ko-KR" sz="1600" spc="-50" dirty="0"/>
+              <a:t>.</a:t>
+            </a:r>
+          </a:p>
+          <a:p>
+            <a:pPr marL="835025" lvl="1" indent="-285750">
+              <a:lnSpc>
+                <a:spcPct val="150000"/>
+              </a:lnSpc>
+              <a:buFont typeface="Wingdings" panose="05000000000000000000" pitchFamily="2" charset="2"/>
+              <a:buChar char="ü"/>
+            </a:pPr>
+            <a:r>
+              <a:rPr lang="ko-KR" altLang="en-US" sz="1600" spc="-50" dirty="0"/>
+              <a:t>아래 그림은 사회보험제도를 포함한 우리나라의 전체적인 사회복지제도</a:t>
+            </a:r>
+            <a:r>
+              <a:rPr lang="en-US" altLang="ko-KR" sz="1600" spc="-50" dirty="0"/>
+              <a:t>(</a:t>
+            </a:r>
+            <a:r>
+              <a:rPr lang="ko-KR" altLang="en-US" sz="1600" spc="-50" dirty="0"/>
+              <a:t>혹은 사회보장제도</a:t>
+            </a:r>
+            <a:r>
+              <a:rPr lang="en-US" altLang="ko-KR" sz="1600" spc="-50" dirty="0"/>
+              <a:t>)</a:t>
+            </a:r>
+            <a:r>
+              <a:rPr lang="ko-KR" altLang="en-US" sz="1600" spc="-50" dirty="0"/>
+              <a:t>를 보여주고 있다</a:t>
+            </a:r>
+            <a:r>
+              <a:rPr lang="en-US" altLang="ko-KR" sz="1600" spc="-50" dirty="0"/>
+              <a:t>.</a:t>
+            </a:r>
+            <a:r>
+              <a:rPr lang="ko-KR" altLang="en-US" sz="1600" spc="-50" dirty="0"/>
+              <a:t> </a:t>
+            </a:r>
+            <a:endParaRPr lang="en-US" altLang="ko-KR" sz="1600" spc="-50" dirty="0"/>
+          </a:p>
+          <a:p>
+            <a:pPr marL="377825" indent="-285750">
+              <a:lnSpc>
+                <a:spcPct val="150000"/>
+              </a:lnSpc>
+              <a:buFont typeface="Arial" panose="020B0604020202020204" pitchFamily="34" charset="0"/>
+              <a:buChar char="•"/>
+            </a:pPr>
+            <a:r>
+              <a:rPr lang="ko-KR" altLang="en-US" sz="1600" spc="-50" dirty="0"/>
+              <a:t>현재 우리나라는 사회보험제도 중 대표적으로 </a:t>
+            </a:r>
+            <a:r>
+              <a:rPr lang="en-US" altLang="ko-KR" sz="1600" spc="-50" dirty="0"/>
+              <a:t>4</a:t>
+            </a:r>
+            <a:r>
+              <a:rPr lang="ko-KR" altLang="en-US" sz="1600" spc="-50" dirty="0"/>
+              <a:t>대 보험이라는 것이 있다</a:t>
+            </a:r>
+            <a:r>
+              <a:rPr lang="en-US" altLang="ko-KR" sz="1600" spc="-50" dirty="0"/>
+              <a:t>.</a:t>
+            </a:r>
+          </a:p>
+          <a:p>
+            <a:pPr marL="835025" lvl="1" indent="-285750">
+              <a:lnSpc>
+                <a:spcPct val="150000"/>
+              </a:lnSpc>
+              <a:buFont typeface="Wingdings" panose="05000000000000000000" pitchFamily="2" charset="2"/>
+              <a:buChar char="ü"/>
+            </a:pPr>
+            <a:r>
+              <a:rPr lang="ko-KR" altLang="en-US" sz="1600" spc="-50" dirty="0"/>
+              <a:t>국민연금</a:t>
+            </a:r>
+            <a:r>
+              <a:rPr lang="en-US" altLang="ko-KR" sz="1600" spc="-50" dirty="0"/>
+              <a:t>, </a:t>
+            </a:r>
+            <a:r>
+              <a:rPr lang="ko-KR" altLang="en-US" sz="1600" spc="-50" dirty="0"/>
+              <a:t>건강보험</a:t>
+            </a:r>
+            <a:r>
+              <a:rPr lang="en-US" altLang="ko-KR" sz="1600" spc="-50" dirty="0"/>
+              <a:t>, </a:t>
+            </a:r>
+            <a:r>
+              <a:rPr lang="ko-KR" altLang="en-US" sz="1600" spc="-50" dirty="0"/>
+              <a:t>고용보험</a:t>
+            </a:r>
+            <a:r>
+              <a:rPr lang="en-US" altLang="ko-KR" sz="1600" spc="-50" dirty="0"/>
+              <a:t>, </a:t>
+            </a:r>
+            <a:r>
+              <a:rPr lang="ko-KR" altLang="en-US" sz="1600" spc="-50" dirty="0"/>
+              <a:t>산재보험이다</a:t>
+            </a:r>
+            <a:r>
+              <a:rPr lang="en-US" altLang="ko-KR" sz="1600" spc="-50" dirty="0"/>
+              <a:t>.</a:t>
+            </a:r>
+          </a:p>
+          <a:p>
+            <a:pPr marL="377825" indent="-285750">
+              <a:lnSpc>
+                <a:spcPct val="150000"/>
+              </a:lnSpc>
+              <a:buFont typeface="Arial" panose="020B0604020202020204" pitchFamily="34" charset="0"/>
+              <a:buChar char="•"/>
+            </a:pPr>
+            <a:r>
+              <a:rPr lang="ko-KR" altLang="en-US" sz="1600" spc="-50" dirty="0"/>
+              <a:t>사회보장제도에서 사회보험제도와 어깨를 나란히 하고 있는 것은 공공부조 프로그램인데</a:t>
+            </a:r>
+            <a:r>
+              <a:rPr lang="en-US" altLang="ko-KR" sz="1600" spc="-50" dirty="0"/>
+              <a:t>, </a:t>
+            </a:r>
+            <a:r>
+              <a:rPr lang="ko-KR" altLang="en-US" sz="1600" spc="-50" dirty="0"/>
+              <a:t>그 차이는 아래와 같다</a:t>
+            </a:r>
+            <a:r>
+              <a:rPr lang="en-US" altLang="ko-KR" sz="1600" spc="-50" dirty="0"/>
+              <a:t>.</a:t>
+            </a:r>
+          </a:p>
+        </p:txBody>
+      </p:sp>
+      <p:pic>
+        <p:nvPicPr>
+          <p:cNvPr id="6" name="그림 5">
+            <a:extLst>
+              <a:ext uri="{FF2B5EF4-FFF2-40B4-BE49-F238E27FC236}">
+                <a16:creationId xmlns:a16="http://schemas.microsoft.com/office/drawing/2014/main" id="{F8FB33C6-A189-8615-BF00-081949CE2EC8}"/>
+              </a:ext>
+            </a:extLst>
+          </p:cNvPr>
+          <p:cNvPicPr>
+            <a:picLocks noChangeAspect="1"/>
+          </p:cNvPicPr>
+          <p:nvPr/>
+        </p:nvPicPr>
+        <p:blipFill>
+          <a:blip r:embed="rId2">
+            <a:extLst>
+              <a:ext uri="{28A0092B-C50C-407E-A947-70E740481C1C}">
+                <a14:useLocalDpi xmlns:a14="http://schemas.microsoft.com/office/drawing/2010/main" val="0"/>
+              </a:ext>
+            </a:extLst>
+          </a:blip>
+          <a:srcRect l="10074" t="16241" r="10015" b="16674"/>
+          <a:stretch>
+            <a:fillRect/>
+          </a:stretch>
+        </p:blipFill>
+        <p:spPr>
+          <a:xfrm>
+            <a:off x="7075841" y="4365938"/>
+            <a:ext cx="4601004" cy="2069947"/>
+          </a:xfrm>
+          <a:prstGeom prst="rect">
+            <a:avLst/>
+          </a:prstGeom>
+        </p:spPr>
+      </p:pic>
+      <p:sp>
+        <p:nvSpPr>
+          <p:cNvPr id="7" name="TextBox 6">
+            <a:extLst>
+              <a:ext uri="{FF2B5EF4-FFF2-40B4-BE49-F238E27FC236}">
+                <a16:creationId xmlns:a16="http://schemas.microsoft.com/office/drawing/2014/main" id="{658D2604-068E-9703-EA96-918F4740395F}"/>
+              </a:ext>
+            </a:extLst>
+          </p:cNvPr>
+          <p:cNvSpPr txBox="1"/>
+          <p:nvPr/>
+        </p:nvSpPr>
+        <p:spPr>
+          <a:xfrm>
+            <a:off x="7721177" y="3429000"/>
+            <a:ext cx="2543286" cy="307777"/>
+          </a:xfrm>
+          <a:prstGeom prst="rect">
+            <a:avLst/>
+          </a:prstGeom>
+          <a:noFill/>
+        </p:spPr>
+        <p:txBody>
+          <a:bodyPr wrap="square">
+            <a:spAutoFit/>
+          </a:bodyPr>
+          <a:lstStyle/>
+          <a:p>
+            <a:pPr algn="ctr"/>
+            <a:r>
+              <a:rPr lang="en-US" altLang="ko-KR" sz="1400" spc="-50" dirty="0"/>
+              <a:t>&lt;</a:t>
+            </a:r>
+            <a:r>
+              <a:rPr lang="ko-KR" altLang="en-US" sz="1400" spc="-50" dirty="0"/>
+              <a:t>우리나라의 사회보장제도</a:t>
+            </a:r>
+            <a:r>
+              <a:rPr lang="en-US" altLang="ko-KR" sz="1400" spc="-50" dirty="0"/>
+              <a:t>&gt;</a:t>
+            </a:r>
+            <a:endParaRPr lang="ko-KR" altLang="en-US" sz="1400" dirty="0"/>
+          </a:p>
+        </p:txBody>
+      </p:sp>
+      <p:sp>
+        <p:nvSpPr>
+          <p:cNvPr id="8" name="TextBox 7">
+            <a:extLst>
+              <a:ext uri="{FF2B5EF4-FFF2-40B4-BE49-F238E27FC236}">
+                <a16:creationId xmlns:a16="http://schemas.microsoft.com/office/drawing/2014/main" id="{4D1204B4-142B-1F6B-58AA-3FFCB518699F}"/>
+              </a:ext>
+            </a:extLst>
+          </p:cNvPr>
+          <p:cNvSpPr txBox="1"/>
+          <p:nvPr/>
+        </p:nvSpPr>
+        <p:spPr>
+          <a:xfrm>
+            <a:off x="288790" y="2853326"/>
+            <a:ext cx="7146613" cy="1522020"/>
+          </a:xfrm>
+          <a:prstGeom prst="rect">
+            <a:avLst/>
+          </a:prstGeom>
+          <a:noFill/>
+        </p:spPr>
+        <p:txBody>
+          <a:bodyPr wrap="square" rtlCol="0" anchor="t">
+            <a:spAutoFit/>
+          </a:bodyPr>
+          <a:lstStyle/>
+          <a:p>
+            <a:pPr marL="835025" lvl="1" indent="-285750">
+              <a:lnSpc>
+                <a:spcPct val="150000"/>
+              </a:lnSpc>
+              <a:buFont typeface="Wingdings" panose="05000000000000000000" pitchFamily="2" charset="2"/>
+              <a:buChar char="ü"/>
+            </a:pPr>
+            <a:r>
+              <a:rPr lang="ko-KR" altLang="en-US" sz="1600" spc="-50" dirty="0"/>
+              <a:t>사회보험제도는 가입자들이 낸 보험료에 의해 운영이 된다</a:t>
+            </a:r>
+            <a:r>
+              <a:rPr lang="en-US" altLang="ko-KR" sz="1600" spc="-50" dirty="0"/>
+              <a:t>.</a:t>
+            </a:r>
+          </a:p>
+          <a:p>
+            <a:pPr marL="1292225" lvl="2" indent="-285750">
+              <a:lnSpc>
+                <a:spcPct val="150000"/>
+              </a:lnSpc>
+              <a:buFont typeface="Wingdings" panose="05000000000000000000" pitchFamily="2" charset="2"/>
+              <a:buChar char="Ø"/>
+            </a:pPr>
+            <a:r>
+              <a:rPr lang="ko-KR" altLang="en-US" sz="1600" spc="-50" dirty="0"/>
+              <a:t>공공부조 프로그램은 정부의 일반 예산에서 재원이 충당된다</a:t>
+            </a:r>
+            <a:r>
+              <a:rPr lang="en-US" altLang="ko-KR" sz="1600" spc="-50" dirty="0"/>
+              <a:t>.</a:t>
+            </a:r>
+          </a:p>
+          <a:p>
+            <a:pPr marL="835025" lvl="1" indent="-285750">
+              <a:lnSpc>
+                <a:spcPct val="150000"/>
+              </a:lnSpc>
+              <a:buFont typeface="Wingdings" panose="05000000000000000000" pitchFamily="2" charset="2"/>
+              <a:buChar char="ü"/>
+            </a:pPr>
+            <a:r>
+              <a:rPr lang="ko-KR" altLang="en-US" sz="1600" spc="-50" dirty="0"/>
+              <a:t>사회보험제도는 재분배효과를 적극적으로는 추구하지 못한다</a:t>
+            </a:r>
+            <a:r>
+              <a:rPr lang="en-US" altLang="ko-KR" sz="1600" spc="-50" dirty="0"/>
+              <a:t>.</a:t>
+            </a:r>
+          </a:p>
+          <a:p>
+            <a:pPr marL="1292225" lvl="2" indent="-285750">
+              <a:lnSpc>
+                <a:spcPct val="150000"/>
+              </a:lnSpc>
+              <a:buFont typeface="Wingdings" panose="05000000000000000000" pitchFamily="2" charset="2"/>
+              <a:buChar char="Ø"/>
+            </a:pPr>
+            <a:r>
+              <a:rPr lang="ko-KR" altLang="en-US" sz="1600" spc="-50" dirty="0"/>
+              <a:t>공공부조 프로그램은 명확히 재분배효과를 지향하고 있다</a:t>
+            </a:r>
+            <a:r>
+              <a:rPr lang="en-US" altLang="ko-KR" sz="1600" spc="-50" dirty="0"/>
+              <a:t>.</a:t>
+            </a:r>
+          </a:p>
+        </p:txBody>
+      </p:sp>
+    </p:spTree>
+    <p:extLst>
+      <p:ext uri="{BB962C8B-B14F-4D97-AF65-F5344CB8AC3E}">
+        <p14:creationId xmlns:p14="http://schemas.microsoft.com/office/powerpoint/2010/main" val="3349705944"/>
+      </p:ext>
+    </p:extLst>
+  </p:cSld>
+  <p:clrMapOvr>
+    <a:masterClrMapping/>
+  </p:clrMapOvr>
+</p:sld>
+</file>
+
+<file path=ppt/slides/slide60.xml><?xml version="1.0" encoding="utf-8"?>
 <p:sld xmlns:a="http://schemas.openxmlformats.org/drawingml/2006/main" xmlns:r="http://schemas.openxmlformats.org/officeDocument/2006/relationships" xmlns:p="http://schemas.openxmlformats.org/presentationml/2006/main">
   <p:cSld>
     <p:spTree>
@@ -25844,7 +28415,7 @@
           <a:p>
             <a:fld id="{109C872D-39A9-4065-8BF3-6A613116E2A1}" type="slidenum">
               <a:rPr lang="ko-KR" altLang="en-US" smtClean="0"/>
-              <a:t>57</a:t>
+              <a:t>60</a:t>
             </a:fld>
             <a:endParaRPr lang="ko-KR" altLang="en-US"/>
           </a:p>
@@ -26174,7 +28745,7 @@
 </p:sld>
 </file>
 
-<file path=ppt/slides/slide58.xml><?xml version="1.0" encoding="utf-8"?>
+<file path=ppt/slides/slide61.xml><?xml version="1.0" encoding="utf-8"?>
 <p:sld xmlns:a="http://schemas.openxmlformats.org/drawingml/2006/main" xmlns:r="http://schemas.openxmlformats.org/officeDocument/2006/relationships" xmlns:p="http://schemas.openxmlformats.org/presentationml/2006/main">
   <p:cSld>
     <p:spTree>
@@ -26302,7 +28873,7 @@
           <a:p>
             <a:fld id="{109C872D-39A9-4065-8BF3-6A613116E2A1}" type="slidenum">
               <a:rPr lang="ko-KR" altLang="en-US" smtClean="0"/>
-              <a:t>58</a:t>
+              <a:t>61</a:t>
             </a:fld>
             <a:endParaRPr lang="ko-KR" altLang="en-US"/>
           </a:p>
@@ -26312,477 +28883,6 @@
     <p:extLst>
       <p:ext uri="{BB962C8B-B14F-4D97-AF65-F5344CB8AC3E}">
         <p14:creationId xmlns:p14="http://schemas.microsoft.com/office/powerpoint/2010/main" val="3130404870"/>
-      </p:ext>
-    </p:extLst>
-  </p:cSld>
-  <p:clrMapOvr>
-    <a:masterClrMapping/>
-  </p:clrMapOvr>
-</p:sld>
-</file>
-
-<file path=ppt/slides/slide6.xml><?xml version="1.0" encoding="utf-8"?>
-<p:sld xmlns:a="http://schemas.openxmlformats.org/drawingml/2006/main" xmlns:r="http://schemas.openxmlformats.org/officeDocument/2006/relationships" xmlns:p="http://schemas.openxmlformats.org/presentationml/2006/main">
-  <p:cSld>
-    <p:spTree>
-      <p:nvGrpSpPr>
-        <p:cNvPr id="1" name="">
-          <a:extLst>
-            <a:ext uri="{FF2B5EF4-FFF2-40B4-BE49-F238E27FC236}">
-              <a16:creationId xmlns:a16="http://schemas.microsoft.com/office/drawing/2014/main" id="{C76B5BBC-2173-0A91-45C7-3F99C44AA848}"/>
-            </a:ext>
-          </a:extLst>
-        </p:cNvPr>
-        <p:cNvGrpSpPr/>
-        <p:nvPr/>
-      </p:nvGrpSpPr>
-      <p:grpSpPr>
-        <a:xfrm>
-          <a:off x="0" y="0"/>
-          <a:ext cx="0" cy="0"/>
-          <a:chOff x="0" y="0"/>
-          <a:chExt cx="0" cy="0"/>
-        </a:xfrm>
-      </p:grpSpPr>
-      <p:sp>
-        <p:nvSpPr>
-          <p:cNvPr id="2" name="제목 1">
-            <a:extLst>
-              <a:ext uri="{FF2B5EF4-FFF2-40B4-BE49-F238E27FC236}">
-                <a16:creationId xmlns:a16="http://schemas.microsoft.com/office/drawing/2014/main" id="{DC81F982-0296-CCCD-0C64-398986AF2705}"/>
-              </a:ext>
-            </a:extLst>
-          </p:cNvPr>
-          <p:cNvSpPr>
-            <a:spLocks noGrp="1"/>
-          </p:cNvSpPr>
-          <p:nvPr>
-            <p:ph type="title"/>
-          </p:nvPr>
-        </p:nvSpPr>
-        <p:spPr/>
-        <p:txBody>
-          <a:bodyPr/>
-          <a:lstStyle/>
-          <a:p>
-            <a:r>
-              <a:rPr lang="ko-KR" altLang="en-US" dirty="0"/>
-              <a:t>사회보험제도의 의미</a:t>
-            </a:r>
-          </a:p>
-        </p:txBody>
-      </p:sp>
-      <p:sp>
-        <p:nvSpPr>
-          <p:cNvPr id="4" name="슬라이드 번호 개체 틀 3">
-            <a:extLst>
-              <a:ext uri="{FF2B5EF4-FFF2-40B4-BE49-F238E27FC236}">
-                <a16:creationId xmlns:a16="http://schemas.microsoft.com/office/drawing/2014/main" id="{4CE964F4-122E-78EB-A96C-D340D809A4F5}"/>
-              </a:ext>
-            </a:extLst>
-          </p:cNvPr>
-          <p:cNvSpPr>
-            <a:spLocks noGrp="1"/>
-          </p:cNvSpPr>
-          <p:nvPr>
-            <p:ph type="sldNum" sz="quarter" idx="12"/>
-          </p:nvPr>
-        </p:nvSpPr>
-        <p:spPr/>
-        <p:txBody>
-          <a:bodyPr/>
-          <a:lstStyle/>
-          <a:p>
-            <a:fld id="{109C872D-39A9-4065-8BF3-6A613116E2A1}" type="slidenum">
-              <a:rPr lang="ko-KR" altLang="en-US" smtClean="0"/>
-              <a:t>6</a:t>
-            </a:fld>
-            <a:endParaRPr lang="ko-KR" altLang="en-US"/>
-          </a:p>
-        </p:txBody>
-      </p:sp>
-      <p:sp>
-        <p:nvSpPr>
-          <p:cNvPr id="5" name="TextBox 4">
-            <a:extLst>
-              <a:ext uri="{FF2B5EF4-FFF2-40B4-BE49-F238E27FC236}">
-                <a16:creationId xmlns:a16="http://schemas.microsoft.com/office/drawing/2014/main" id="{EB01E0BF-2701-6A9F-2294-3922ABA0E93C}"/>
-              </a:ext>
-            </a:extLst>
-          </p:cNvPr>
-          <p:cNvSpPr txBox="1"/>
-          <p:nvPr/>
-        </p:nvSpPr>
-        <p:spPr>
-          <a:xfrm>
-            <a:off x="288790" y="958844"/>
-            <a:ext cx="11250267" cy="1891352"/>
-          </a:xfrm>
-          <a:prstGeom prst="rect">
-            <a:avLst/>
-          </a:prstGeom>
-          <a:noFill/>
-        </p:spPr>
-        <p:txBody>
-          <a:bodyPr wrap="square" rtlCol="0" anchor="t">
-            <a:spAutoFit/>
-          </a:bodyPr>
-          <a:lstStyle/>
-          <a:p>
-            <a:pPr marL="377825" indent="-285750">
-              <a:lnSpc>
-                <a:spcPct val="150000"/>
-              </a:lnSpc>
-              <a:buFont typeface="Arial" panose="020B0604020202020204" pitchFamily="34" charset="0"/>
-              <a:buChar char="•"/>
-            </a:pPr>
-            <a:r>
-              <a:rPr lang="ko-KR" altLang="en-US" sz="1600" spc="-50" dirty="0"/>
-              <a:t>앞서 </a:t>
-            </a:r>
-            <a:r>
-              <a:rPr lang="en-US" altLang="ko-KR" sz="1600" spc="-50" dirty="0"/>
-              <a:t>Ch.9</a:t>
-            </a:r>
-            <a:r>
-              <a:rPr lang="ko-KR" altLang="en-US" sz="1600" spc="-50" dirty="0"/>
-              <a:t>에서 사회복지제도 </a:t>
-            </a:r>
-            <a:r>
-              <a:rPr lang="en-US" altLang="ko-KR" sz="1600" spc="-50" dirty="0"/>
-              <a:t>(</a:t>
-            </a:r>
-            <a:r>
-              <a:rPr lang="ko-KR" altLang="en-US" sz="1600" spc="-50" dirty="0"/>
-              <a:t>혹은 사회보장제도</a:t>
-            </a:r>
-            <a:r>
-              <a:rPr lang="en-US" altLang="ko-KR" sz="1600" spc="-50" dirty="0"/>
-              <a:t>)</a:t>
-            </a:r>
-            <a:r>
-              <a:rPr lang="ko-KR" altLang="en-US" sz="1600" spc="-50" dirty="0"/>
-              <a:t>는 사회보험제도와 공공부조 프로그램으로 나누어 볼 수 있다고 하였다</a:t>
-            </a:r>
-            <a:r>
-              <a:rPr lang="en-US" altLang="ko-KR" sz="1600" spc="-50" dirty="0"/>
-              <a:t>.</a:t>
-            </a:r>
-          </a:p>
-          <a:p>
-            <a:pPr marL="835025" lvl="1" indent="-285750">
-              <a:lnSpc>
-                <a:spcPct val="150000"/>
-              </a:lnSpc>
-              <a:buFont typeface="Wingdings" panose="05000000000000000000" pitchFamily="2" charset="2"/>
-              <a:buChar char="ü"/>
-            </a:pPr>
-            <a:r>
-              <a:rPr lang="ko-KR" altLang="en-US" sz="1600" spc="-50" dirty="0"/>
-              <a:t>아래 그림은 사회보험제도를 포함한 우리나라의 전체적인 사회복지제도</a:t>
-            </a:r>
-            <a:r>
-              <a:rPr lang="en-US" altLang="ko-KR" sz="1600" spc="-50" dirty="0"/>
-              <a:t>(</a:t>
-            </a:r>
-            <a:r>
-              <a:rPr lang="ko-KR" altLang="en-US" sz="1600" spc="-50" dirty="0"/>
-              <a:t>혹은 사회보장제도</a:t>
-            </a:r>
-            <a:r>
-              <a:rPr lang="en-US" altLang="ko-KR" sz="1600" spc="-50" dirty="0"/>
-              <a:t>)</a:t>
-            </a:r>
-            <a:r>
-              <a:rPr lang="ko-KR" altLang="en-US" sz="1600" spc="-50" dirty="0"/>
-              <a:t>를 보여주고 있다</a:t>
-            </a:r>
-            <a:r>
-              <a:rPr lang="en-US" altLang="ko-KR" sz="1600" spc="-50" dirty="0"/>
-              <a:t>.</a:t>
-            </a:r>
-            <a:r>
-              <a:rPr lang="ko-KR" altLang="en-US" sz="1600" spc="-50" dirty="0"/>
-              <a:t> </a:t>
-            </a:r>
-            <a:endParaRPr lang="en-US" altLang="ko-KR" sz="1600" spc="-50" dirty="0"/>
-          </a:p>
-          <a:p>
-            <a:pPr marL="377825" indent="-285750">
-              <a:lnSpc>
-                <a:spcPct val="150000"/>
-              </a:lnSpc>
-              <a:buFont typeface="Arial" panose="020B0604020202020204" pitchFamily="34" charset="0"/>
-              <a:buChar char="•"/>
-            </a:pPr>
-            <a:r>
-              <a:rPr lang="ko-KR" altLang="en-US" sz="1600" spc="-50" dirty="0"/>
-              <a:t>현재 우리나라는 사회보험제도 중 대표적으로 </a:t>
-            </a:r>
-            <a:r>
-              <a:rPr lang="en-US" altLang="ko-KR" sz="1600" spc="-50" dirty="0"/>
-              <a:t>4</a:t>
-            </a:r>
-            <a:r>
-              <a:rPr lang="ko-KR" altLang="en-US" sz="1600" spc="-50" dirty="0"/>
-              <a:t>대 보험이라는 것이 있다</a:t>
-            </a:r>
-            <a:r>
-              <a:rPr lang="en-US" altLang="ko-KR" sz="1600" spc="-50" dirty="0"/>
-              <a:t>.</a:t>
-            </a:r>
-          </a:p>
-          <a:p>
-            <a:pPr marL="835025" lvl="1" indent="-285750">
-              <a:lnSpc>
-                <a:spcPct val="150000"/>
-              </a:lnSpc>
-              <a:buFont typeface="Wingdings" panose="05000000000000000000" pitchFamily="2" charset="2"/>
-              <a:buChar char="ü"/>
-            </a:pPr>
-            <a:r>
-              <a:rPr lang="ko-KR" altLang="en-US" sz="1600" spc="-50" dirty="0"/>
-              <a:t>국민연금</a:t>
-            </a:r>
-            <a:r>
-              <a:rPr lang="en-US" altLang="ko-KR" sz="1600" spc="-50" dirty="0"/>
-              <a:t>, </a:t>
-            </a:r>
-            <a:r>
-              <a:rPr lang="ko-KR" altLang="en-US" sz="1600" spc="-50" dirty="0"/>
-              <a:t>건강보험</a:t>
-            </a:r>
-            <a:r>
-              <a:rPr lang="en-US" altLang="ko-KR" sz="1600" spc="-50" dirty="0"/>
-              <a:t>, </a:t>
-            </a:r>
-            <a:r>
-              <a:rPr lang="ko-KR" altLang="en-US" sz="1600" spc="-50" dirty="0"/>
-              <a:t>고용보험</a:t>
-            </a:r>
-            <a:r>
-              <a:rPr lang="en-US" altLang="ko-KR" sz="1600" spc="-50" dirty="0"/>
-              <a:t>, </a:t>
-            </a:r>
-            <a:r>
-              <a:rPr lang="ko-KR" altLang="en-US" sz="1600" spc="-50" dirty="0"/>
-              <a:t>산재보험이다</a:t>
-            </a:r>
-            <a:r>
-              <a:rPr lang="en-US" altLang="ko-KR" sz="1600" spc="-50" dirty="0"/>
-              <a:t>.</a:t>
-            </a:r>
-          </a:p>
-          <a:p>
-            <a:pPr marL="377825" indent="-285750">
-              <a:lnSpc>
-                <a:spcPct val="150000"/>
-              </a:lnSpc>
-              <a:buFont typeface="Arial" panose="020B0604020202020204" pitchFamily="34" charset="0"/>
-              <a:buChar char="•"/>
-            </a:pPr>
-            <a:r>
-              <a:rPr lang="ko-KR" altLang="en-US" sz="1600" spc="-50" dirty="0"/>
-              <a:t>사회보장제도에서 사회보험제도와 어깨를 나란히 하고 있는 것은 공공부조 프로그램인데</a:t>
-            </a:r>
-            <a:r>
-              <a:rPr lang="en-US" altLang="ko-KR" sz="1600" spc="-50" dirty="0"/>
-              <a:t>, </a:t>
-            </a:r>
-            <a:r>
-              <a:rPr lang="ko-KR" altLang="en-US" sz="1600" spc="-50" dirty="0"/>
-              <a:t>그 차이는 아래와 같다</a:t>
-            </a:r>
-            <a:r>
-              <a:rPr lang="en-US" altLang="ko-KR" sz="1600" spc="-50" dirty="0"/>
-              <a:t>.</a:t>
-            </a:r>
-          </a:p>
-        </p:txBody>
-      </p:sp>
-      <p:pic>
-        <p:nvPicPr>
-          <p:cNvPr id="6" name="그림 5">
-            <a:extLst>
-              <a:ext uri="{FF2B5EF4-FFF2-40B4-BE49-F238E27FC236}">
-                <a16:creationId xmlns:a16="http://schemas.microsoft.com/office/drawing/2014/main" id="{F8FB33C6-A189-8615-BF00-081949CE2EC8}"/>
-              </a:ext>
-            </a:extLst>
-          </p:cNvPr>
-          <p:cNvPicPr>
-            <a:picLocks noChangeAspect="1"/>
-          </p:cNvPicPr>
-          <p:nvPr/>
-        </p:nvPicPr>
-        <p:blipFill>
-          <a:blip r:embed="rId2">
-            <a:extLst>
-              <a:ext uri="{28A0092B-C50C-407E-A947-70E740481C1C}">
-                <a14:useLocalDpi xmlns:a14="http://schemas.microsoft.com/office/drawing/2010/main" val="0"/>
-              </a:ext>
-            </a:extLst>
-          </a:blip>
-          <a:srcRect l="10074" t="16241" r="10015" b="16674"/>
-          <a:stretch>
-            <a:fillRect/>
-          </a:stretch>
-        </p:blipFill>
-        <p:spPr>
-          <a:xfrm>
-            <a:off x="7075841" y="4365938"/>
-            <a:ext cx="4601004" cy="2069947"/>
-          </a:xfrm>
-          <a:prstGeom prst="rect">
-            <a:avLst/>
-          </a:prstGeom>
-        </p:spPr>
-      </p:pic>
-      <p:sp>
-        <p:nvSpPr>
-          <p:cNvPr id="7" name="TextBox 6">
-            <a:extLst>
-              <a:ext uri="{FF2B5EF4-FFF2-40B4-BE49-F238E27FC236}">
-                <a16:creationId xmlns:a16="http://schemas.microsoft.com/office/drawing/2014/main" id="{658D2604-068E-9703-EA96-918F4740395F}"/>
-              </a:ext>
-            </a:extLst>
-          </p:cNvPr>
-          <p:cNvSpPr txBox="1"/>
-          <p:nvPr/>
-        </p:nvSpPr>
-        <p:spPr>
-          <a:xfrm>
-            <a:off x="7721177" y="3429000"/>
-            <a:ext cx="2543286" cy="307777"/>
-          </a:xfrm>
-          <a:prstGeom prst="rect">
-            <a:avLst/>
-          </a:prstGeom>
-          <a:noFill/>
-        </p:spPr>
-        <p:txBody>
-          <a:bodyPr wrap="square">
-            <a:spAutoFit/>
-          </a:bodyPr>
-          <a:lstStyle/>
-          <a:p>
-            <a:pPr algn="ctr"/>
-            <a:r>
-              <a:rPr lang="en-US" altLang="ko-KR" sz="1400" spc="-50" dirty="0"/>
-              <a:t>&lt;</a:t>
-            </a:r>
-            <a:r>
-              <a:rPr lang="ko-KR" altLang="en-US" sz="1400" spc="-50" dirty="0"/>
-              <a:t>우리나라의 사회보장제도</a:t>
-            </a:r>
-            <a:r>
-              <a:rPr lang="en-US" altLang="ko-KR" sz="1400" spc="-50" dirty="0"/>
-              <a:t>&gt;</a:t>
-            </a:r>
-            <a:endParaRPr lang="ko-KR" altLang="en-US" sz="1400" dirty="0"/>
-          </a:p>
-        </p:txBody>
-      </p:sp>
-      <p:sp>
-        <p:nvSpPr>
-          <p:cNvPr id="8" name="TextBox 7">
-            <a:extLst>
-              <a:ext uri="{FF2B5EF4-FFF2-40B4-BE49-F238E27FC236}">
-                <a16:creationId xmlns:a16="http://schemas.microsoft.com/office/drawing/2014/main" id="{4D1204B4-142B-1F6B-58AA-3FFCB518699F}"/>
-              </a:ext>
-            </a:extLst>
-          </p:cNvPr>
-          <p:cNvSpPr txBox="1"/>
-          <p:nvPr/>
-        </p:nvSpPr>
-        <p:spPr>
-          <a:xfrm>
-            <a:off x="288790" y="2853326"/>
-            <a:ext cx="7146613" cy="1522020"/>
-          </a:xfrm>
-          <a:prstGeom prst="rect">
-            <a:avLst/>
-          </a:prstGeom>
-          <a:noFill/>
-        </p:spPr>
-        <p:txBody>
-          <a:bodyPr wrap="square" rtlCol="0" anchor="t">
-            <a:spAutoFit/>
-          </a:bodyPr>
-          <a:lstStyle/>
-          <a:p>
-            <a:pPr marL="835025" lvl="1" indent="-285750">
-              <a:lnSpc>
-                <a:spcPct val="150000"/>
-              </a:lnSpc>
-              <a:buFont typeface="Wingdings" panose="05000000000000000000" pitchFamily="2" charset="2"/>
-              <a:buChar char="ü"/>
-            </a:pPr>
-            <a:r>
-              <a:rPr lang="ko-KR" altLang="en-US" sz="1600" spc="-50" dirty="0"/>
-              <a:t>사회보험제도는 가입자들이 낸 보험료에 의해 운영이 된다</a:t>
-            </a:r>
-            <a:r>
-              <a:rPr lang="en-US" altLang="ko-KR" sz="1600" spc="-50" dirty="0"/>
-              <a:t>.</a:t>
-            </a:r>
-          </a:p>
-          <a:p>
-            <a:pPr marL="1292225" lvl="2" indent="-285750">
-              <a:lnSpc>
-                <a:spcPct val="150000"/>
-              </a:lnSpc>
-              <a:buFont typeface="Wingdings" panose="05000000000000000000" pitchFamily="2" charset="2"/>
-              <a:buChar char="Ø"/>
-            </a:pPr>
-            <a:r>
-              <a:rPr lang="ko-KR" altLang="en-US" sz="1600" spc="-50" dirty="0"/>
-              <a:t>공공부조 프로그램은 정부의 일반 예산에서 재원이 충당된다</a:t>
-            </a:r>
-            <a:r>
-              <a:rPr lang="en-US" altLang="ko-KR" sz="1600" spc="-50" dirty="0"/>
-              <a:t>.</a:t>
-            </a:r>
-          </a:p>
-          <a:p>
-            <a:pPr marL="835025" lvl="1" indent="-285750">
-              <a:lnSpc>
-                <a:spcPct val="150000"/>
-              </a:lnSpc>
-              <a:buFont typeface="Wingdings" panose="05000000000000000000" pitchFamily="2" charset="2"/>
-              <a:buChar char="ü"/>
-            </a:pPr>
-            <a:r>
-              <a:rPr lang="ko-KR" altLang="en-US" sz="1600" spc="-50" dirty="0"/>
-              <a:t>사회보험제도는 재분배효과를 적극적으로는 추구하지 못한다</a:t>
-            </a:r>
-            <a:r>
-              <a:rPr lang="en-US" altLang="ko-KR" sz="1600" spc="-50" dirty="0"/>
-              <a:t>.</a:t>
-            </a:r>
-          </a:p>
-          <a:p>
-            <a:pPr marL="1292225" lvl="2" indent="-285750">
-              <a:lnSpc>
-                <a:spcPct val="150000"/>
-              </a:lnSpc>
-              <a:buFont typeface="Wingdings" panose="05000000000000000000" pitchFamily="2" charset="2"/>
-              <a:buChar char="Ø"/>
-            </a:pPr>
-            <a:r>
-              <a:rPr lang="ko-KR" altLang="en-US" sz="1600" spc="-50" dirty="0"/>
-              <a:t>공공부조 프로그램은 명확히 재분배효과를 지향하고 있다</a:t>
-            </a:r>
-            <a:r>
-              <a:rPr lang="en-US" altLang="ko-KR" sz="1600" spc="-50" dirty="0"/>
-              <a:t>.</a:t>
-            </a:r>
-          </a:p>
-        </p:txBody>
-      </p:sp>
-    </p:spTree>
-    <p:extLst>
-      <p:ext uri="{BB962C8B-B14F-4D97-AF65-F5344CB8AC3E}">
-        <p14:creationId xmlns:p14="http://schemas.microsoft.com/office/powerpoint/2010/main" val="3349705944"/>
       </p:ext>
     </p:extLst>
   </p:cSld>

--- a/재정학/01_Lectures/재정학_Chapter_10.pptx
+++ b/재정학/01_Lectures/재정학_Chapter_10.pptx
@@ -268,7 +268,7 @@
           <a:p>
             <a:fld id="{4A5E00EF-AEA4-43E2-9451-8F9C59A39471}" type="datetimeFigureOut">
               <a:rPr lang="ko-KR" altLang="en-US" smtClean="0"/>
-              <a:t>2026-05-21</a:t>
+              <a:t>2026-06-04</a:t>
             </a:fld>
             <a:endParaRPr lang="ko-KR" altLang="en-US"/>
           </a:p>
@@ -2394,7 +2394,7 @@
           <a:p>
             <a:fld id="{CD32C56F-BD27-4999-9E6D-D4EACE3DA9F4}" type="datetime1">
               <a:rPr lang="ko-KR" altLang="en-US" smtClean="0"/>
-              <a:t>2026-05-21</a:t>
+              <a:t>2026-06-04</a:t>
             </a:fld>
             <a:endParaRPr lang="ko-KR" altLang="en-US"/>
           </a:p>
@@ -2608,7 +2608,7 @@
           <a:p>
             <a:fld id="{8EF4A19C-72C8-45CA-8E3F-68A7FA345D6C}" type="datetime1">
               <a:rPr lang="ko-KR" altLang="en-US" smtClean="0"/>
-              <a:t>2026-05-21</a:t>
+              <a:t>2026-06-04</a:t>
             </a:fld>
             <a:endParaRPr lang="ko-KR" altLang="en-US"/>
           </a:p>
@@ -2832,7 +2832,7 @@
           <a:p>
             <a:fld id="{56A175B2-010B-4341-954C-5F8F5C70B124}" type="datetime1">
               <a:rPr lang="ko-KR" altLang="en-US" smtClean="0"/>
-              <a:t>2026-05-21</a:t>
+              <a:t>2026-06-04</a:t>
             </a:fld>
             <a:endParaRPr lang="ko-KR" altLang="en-US"/>
           </a:p>
@@ -3046,7 +3046,7 @@
           <a:p>
             <a:fld id="{16B83F9E-22C9-45CA-9E85-070F1D3EF530}" type="datetime1">
               <a:rPr lang="ko-KR" altLang="en-US" smtClean="0"/>
-              <a:t>2026-05-21</a:t>
+              <a:t>2026-06-04</a:t>
             </a:fld>
             <a:endParaRPr lang="ko-KR" altLang="en-US"/>
           </a:p>
@@ -3337,7 +3337,7 @@
           <a:p>
             <a:fld id="{03278F45-FB3C-4C4D-B89A-7BC3F5F229F6}" type="datetime1">
               <a:rPr lang="ko-KR" altLang="en-US" smtClean="0"/>
-              <a:t>2026-05-21</a:t>
+              <a:t>2026-06-04</a:t>
             </a:fld>
             <a:endParaRPr lang="ko-KR" altLang="en-US"/>
           </a:p>
@@ -3730,7 +3730,7 @@
           <a:p>
             <a:fld id="{38FDAC3C-35A6-415C-9F03-738A6AC328B1}" type="datetime1">
               <a:rPr lang="ko-KR" altLang="en-US" smtClean="0"/>
-              <a:t>2026-05-21</a:t>
+              <a:t>2026-06-04</a:t>
             </a:fld>
             <a:endParaRPr lang="ko-KR" altLang="en-US"/>
           </a:p>
@@ -5324,7 +5324,7 @@
           <a:p>
             <a:fld id="{507A0DF1-AEE6-4B0D-89D2-351E7B3EF65C}" type="datetime1">
               <a:rPr lang="ko-KR" altLang="en-US" smtClean="0"/>
-              <a:t>2026-05-21</a:t>
+              <a:t>2026-06-04</a:t>
             </a:fld>
             <a:endParaRPr lang="ko-KR" altLang="en-US"/>
           </a:p>
@@ -5752,7 +5752,7 @@
           <a:p>
             <a:fld id="{CA93B8C9-630F-4D57-944D-04FD37CECCD3}" type="datetime1">
               <a:rPr lang="ko-KR" altLang="en-US" smtClean="0"/>
-              <a:t>2026-05-21</a:t>
+              <a:t>2026-06-04</a:t>
             </a:fld>
             <a:endParaRPr lang="ko-KR" altLang="en-US"/>
           </a:p>
@@ -5909,7 +5909,7 @@
           <a:p>
             <a:fld id="{E986165A-AC43-4902-9541-874ECD310BA3}" type="datetime1">
               <a:rPr lang="ko-KR" altLang="en-US" smtClean="0"/>
-              <a:t>2026-05-21</a:t>
+              <a:t>2026-06-04</a:t>
             </a:fld>
             <a:endParaRPr lang="ko-KR" altLang="en-US"/>
           </a:p>
@@ -6236,7 +6236,7 @@
           <a:p>
             <a:fld id="{47E6EE6D-2B0E-43A9-87A2-7354CDB998F4}" type="datetime1">
               <a:rPr lang="ko-KR" altLang="en-US" smtClean="0"/>
-              <a:t>2026-05-21</a:t>
+              <a:t>2026-06-04</a:t>
             </a:fld>
             <a:endParaRPr lang="ko-KR" altLang="en-US"/>
           </a:p>
@@ -6540,7 +6540,7 @@
           <a:p>
             <a:fld id="{5CC5944E-0BC8-4FAA-9F94-6B4B05834E10}" type="datetime1">
               <a:rPr lang="ko-KR" altLang="en-US" smtClean="0"/>
-              <a:t>2026-05-21</a:t>
+              <a:t>2026-06-04</a:t>
             </a:fld>
             <a:endParaRPr lang="ko-KR" altLang="en-US"/>
           </a:p>
@@ -21502,15 +21502,7 @@
             </a:r>
             <a:r>
               <a:rPr lang="ko-KR" altLang="en-US" sz="1600" spc="-50" dirty="0"/>
-              <a:t>노후의 생계를 위해 </a:t>
-            </a:r>
-            <a:r>
-              <a:rPr lang="ko-KR" altLang="en-US" sz="1600" spc="-50" dirty="0" err="1"/>
-              <a:t>저축하고자하는</a:t>
-            </a:r>
-            <a:r>
-              <a:rPr lang="ko-KR" altLang="en-US" sz="1600" spc="-50" dirty="0"/>
-              <a:t> 사람에게 실질가치가 보장되는 연금보험 상품을 제공하는 것은 어려운 일이다</a:t>
+              <a:t>노후의 생계를 위해 저축하고자 하는 사람에게 실질가치가 보장되는 연금보험 상품을 제공하는 것은 어려운 일이다</a:t>
             </a:r>
             <a:r>
               <a:rPr lang="en-US" altLang="ko-KR" sz="1600" spc="-50" dirty="0"/>
@@ -21527,7 +21519,7 @@
             </a:pPr>
             <a:r>
               <a:rPr lang="ko-KR" altLang="en-US" sz="1600" spc="-50" dirty="0"/>
-              <a:t>물가가 오를 때 세금을 더 많이 거둘 수 있는 것도 아니므로 실질가치 보장이 불가능하다</a:t>
+              <a:t>정부처럼 물가가 오를 때 세금을 더 많이 거둘 수 있는 것도 아니므로 실질가치 보장이 어렵다</a:t>
             </a:r>
             <a:r>
               <a:rPr lang="en-US" altLang="ko-KR" sz="1600" spc="-50" dirty="0"/>
@@ -25895,8 +25887,8 @@
         </p:blipFill>
         <p:spPr>
           <a:xfrm>
-            <a:off x="7075841" y="4365938"/>
-            <a:ext cx="4601004" cy="2069947"/>
+            <a:off x="6369716" y="4048260"/>
+            <a:ext cx="5307129" cy="2387626"/>
           </a:xfrm>
           <a:prstGeom prst="rect">
             <a:avLst/>

--- a/재정학/01_Lectures/재정학_Chapter_10.pptx
+++ b/재정학/01_Lectures/재정학_Chapter_10.pptx
@@ -268,7 +268,7 @@
           <a:p>
             <a:fld id="{4A5E00EF-AEA4-43E2-9451-8F9C59A39471}" type="datetimeFigureOut">
               <a:rPr lang="ko-KR" altLang="en-US" smtClean="0"/>
-              <a:t>2026-06-04</a:t>
+              <a:t>2026-06-05</a:t>
             </a:fld>
             <a:endParaRPr lang="ko-KR" altLang="en-US"/>
           </a:p>
@@ -2394,7 +2394,7 @@
           <a:p>
             <a:fld id="{CD32C56F-BD27-4999-9E6D-D4EACE3DA9F4}" type="datetime1">
               <a:rPr lang="ko-KR" altLang="en-US" smtClean="0"/>
-              <a:t>2026-06-04</a:t>
+              <a:t>2026-06-05</a:t>
             </a:fld>
             <a:endParaRPr lang="ko-KR" altLang="en-US"/>
           </a:p>
@@ -2608,7 +2608,7 @@
           <a:p>
             <a:fld id="{8EF4A19C-72C8-45CA-8E3F-68A7FA345D6C}" type="datetime1">
               <a:rPr lang="ko-KR" altLang="en-US" smtClean="0"/>
-              <a:t>2026-06-04</a:t>
+              <a:t>2026-06-05</a:t>
             </a:fld>
             <a:endParaRPr lang="ko-KR" altLang="en-US"/>
           </a:p>
@@ -2832,7 +2832,7 @@
           <a:p>
             <a:fld id="{56A175B2-010B-4341-954C-5F8F5C70B124}" type="datetime1">
               <a:rPr lang="ko-KR" altLang="en-US" smtClean="0"/>
-              <a:t>2026-06-04</a:t>
+              <a:t>2026-06-05</a:t>
             </a:fld>
             <a:endParaRPr lang="ko-KR" altLang="en-US"/>
           </a:p>
@@ -3046,7 +3046,7 @@
           <a:p>
             <a:fld id="{16B83F9E-22C9-45CA-9E85-070F1D3EF530}" type="datetime1">
               <a:rPr lang="ko-KR" altLang="en-US" smtClean="0"/>
-              <a:t>2026-06-04</a:t>
+              <a:t>2026-06-05</a:t>
             </a:fld>
             <a:endParaRPr lang="ko-KR" altLang="en-US"/>
           </a:p>
@@ -3337,7 +3337,7 @@
           <a:p>
             <a:fld id="{03278F45-FB3C-4C4D-B89A-7BC3F5F229F6}" type="datetime1">
               <a:rPr lang="ko-KR" altLang="en-US" smtClean="0"/>
-              <a:t>2026-06-04</a:t>
+              <a:t>2026-06-05</a:t>
             </a:fld>
             <a:endParaRPr lang="ko-KR" altLang="en-US"/>
           </a:p>
@@ -3730,7 +3730,7 @@
           <a:p>
             <a:fld id="{38FDAC3C-35A6-415C-9F03-738A6AC328B1}" type="datetime1">
               <a:rPr lang="ko-KR" altLang="en-US" smtClean="0"/>
-              <a:t>2026-06-04</a:t>
+              <a:t>2026-06-05</a:t>
             </a:fld>
             <a:endParaRPr lang="ko-KR" altLang="en-US"/>
           </a:p>
@@ -5324,7 +5324,7 @@
           <a:p>
             <a:fld id="{507A0DF1-AEE6-4B0D-89D2-351E7B3EF65C}" type="datetime1">
               <a:rPr lang="ko-KR" altLang="en-US" smtClean="0"/>
-              <a:t>2026-06-04</a:t>
+              <a:t>2026-06-05</a:t>
             </a:fld>
             <a:endParaRPr lang="ko-KR" altLang="en-US"/>
           </a:p>
@@ -5752,7 +5752,7 @@
           <a:p>
             <a:fld id="{CA93B8C9-630F-4D57-944D-04FD37CECCD3}" type="datetime1">
               <a:rPr lang="ko-KR" altLang="en-US" smtClean="0"/>
-              <a:t>2026-06-04</a:t>
+              <a:t>2026-06-05</a:t>
             </a:fld>
             <a:endParaRPr lang="ko-KR" altLang="en-US"/>
           </a:p>
@@ -5909,7 +5909,7 @@
           <a:p>
             <a:fld id="{E986165A-AC43-4902-9541-874ECD310BA3}" type="datetime1">
               <a:rPr lang="ko-KR" altLang="en-US" smtClean="0"/>
-              <a:t>2026-06-04</a:t>
+              <a:t>2026-06-05</a:t>
             </a:fld>
             <a:endParaRPr lang="ko-KR" altLang="en-US"/>
           </a:p>
@@ -6236,7 +6236,7 @@
           <a:p>
             <a:fld id="{47E6EE6D-2B0E-43A9-87A2-7354CDB998F4}" type="datetime1">
               <a:rPr lang="ko-KR" altLang="en-US" smtClean="0"/>
-              <a:t>2026-06-04</a:t>
+              <a:t>2026-06-05</a:t>
             </a:fld>
             <a:endParaRPr lang="ko-KR" altLang="en-US"/>
           </a:p>
@@ -6540,7 +6540,7 @@
           <a:p>
             <a:fld id="{5CC5944E-0BC8-4FAA-9F94-6B4B05834E10}" type="datetime1">
               <a:rPr lang="ko-KR" altLang="en-US" smtClean="0"/>
-              <a:t>2026-06-04</a:t>
+              <a:t>2026-06-05</a:t>
             </a:fld>
             <a:endParaRPr lang="ko-KR" altLang="en-US"/>
           </a:p>
@@ -18269,8 +18269,8 @@
           </a:p>
         </p:txBody>
       </p:sp>
-      <mc:AlternateContent xmlns:mc="http://schemas.openxmlformats.org/markup-compatibility/2006" xmlns:a14="http://schemas.microsoft.com/office/drawing/2010/main">
-        <mc:Choice Requires="a14">
+      <mc:AlternateContent xmlns:mc="http://schemas.openxmlformats.org/markup-compatibility/2006">
+        <mc:Choice xmlns:a14="http://schemas.microsoft.com/office/drawing/2010/main" Requires="a14">
           <p:sp>
             <p:nvSpPr>
               <p:cNvPr id="3" name="TextBox 2">
@@ -18286,7 +18286,7 @@
             <p:spPr>
               <a:xfrm>
                 <a:off x="288790" y="958844"/>
-                <a:ext cx="11250267" cy="4478277"/>
+                <a:ext cx="11250267" cy="5217326"/>
               </a:xfrm>
               <a:prstGeom prst="rect">
                 <a:avLst/>
@@ -18597,10 +18597,37 @@
                   <a:t>.</a:t>
                 </a:r>
               </a:p>
+              <a:p>
+                <a:pPr marL="835025" lvl="1" indent="-285750">
+                  <a:lnSpc>
+                    <a:spcPct val="150000"/>
+                  </a:lnSpc>
+                  <a:buFont typeface="Wingdings" panose="05000000000000000000" pitchFamily="2" charset="2"/>
+                  <a:buChar char="ü"/>
+                </a:pPr>
+                <a:r>
+                  <a:rPr lang="en-US" altLang="ko-KR" sz="1600" dirty="0">
+                    <a:latin typeface="+mn-ea"/>
+                  </a:rPr>
+                  <a:t>https://www.nps.or.kr/pnsinfo/ntpsklg/getOHAF0048M0.do?menuId=MN24001117</a:t>
+                </a:r>
+              </a:p>
+              <a:p>
+                <a:pPr marL="835025" lvl="1" indent="-285750">
+                  <a:lnSpc>
+                    <a:spcPct val="150000"/>
+                  </a:lnSpc>
+                  <a:buFont typeface="Wingdings" panose="05000000000000000000" pitchFamily="2" charset="2"/>
+                  <a:buChar char="ü"/>
+                </a:pPr>
+                <a:endParaRPr lang="en-US" altLang="ko-KR" sz="1600" dirty="0">
+                  <a:latin typeface="Cambria Math" panose="02040503050406030204" pitchFamily="18" charset="0"/>
+                </a:endParaRPr>
+              </a:p>
             </p:txBody>
           </p:sp>
         </mc:Choice>
-        <mc:Fallback xmlns="">
+        <mc:Fallback>
           <p:sp>
             <p:nvSpPr>
               <p:cNvPr id="3" name="TextBox 2">
@@ -18618,7 +18645,7 @@
             <p:spPr>
               <a:xfrm>
                 <a:off x="288790" y="958844"/>
-                <a:ext cx="11250267" cy="4478277"/>
+                <a:ext cx="11250267" cy="5217326"/>
               </a:xfrm>
               <a:prstGeom prst="rect">
                 <a:avLst/>
@@ -18626,7 +18653,7 @@
               <a:blipFill>
                 <a:blip r:embed="rId3"/>
                 <a:stretch>
-                  <a:fillRect b="-680"/>
+                  <a:fillRect/>
                 </a:stretch>
               </a:blipFill>
             </p:spPr>
@@ -18920,8 +18947,8 @@
           </a:p>
         </p:txBody>
       </p:sp>
-      <mc:AlternateContent xmlns:mc="http://schemas.openxmlformats.org/markup-compatibility/2006" xmlns:a14="http://schemas.microsoft.com/office/drawing/2010/main">
-        <mc:Choice Requires="a14">
+      <mc:AlternateContent xmlns:mc="http://schemas.openxmlformats.org/markup-compatibility/2006">
+        <mc:Choice xmlns:a14="http://schemas.microsoft.com/office/drawing/2010/main" Requires="a14">
           <p:sp>
             <p:nvSpPr>
               <p:cNvPr id="3" name="TextBox 2">
@@ -19401,19 +19428,7 @@
                   <a:rPr lang="ko-KR" altLang="en-US" sz="1600" spc="-100" dirty="0">
                     <a:latin typeface="+mn-ea"/>
                   </a:rPr>
-                  <a:t>하향 조정이 </a:t>
-                </a:r>
-                <a:r>
-                  <a:rPr lang="ko-KR" altLang="en-US" sz="1600" spc="-100" dirty="0" err="1">
-                    <a:latin typeface="+mn-ea"/>
-                  </a:rPr>
-                  <a:t>몇차례</a:t>
-                </a:r>
-                <a:r>
-                  <a:rPr lang="ko-KR" altLang="en-US" sz="1600" spc="-100" dirty="0">
-                    <a:latin typeface="+mn-ea"/>
-                  </a:rPr>
-                  <a:t> 이루어지고 </a:t>
+                  <a:t>하향 조정이 몇 차례 이루어지고 </a:t>
                 </a:r>
                 <a:r>
                   <a:rPr lang="en-US" altLang="ko-KR" sz="1600" spc="-100" dirty="0">
@@ -19533,7 +19548,7 @@
             </p:txBody>
           </p:sp>
         </mc:Choice>
-        <mc:Fallback xmlns="">
+        <mc:Fallback>
           <p:sp>
             <p:nvSpPr>
               <p:cNvPr id="3" name="TextBox 2">

--- a/재정학/01_Lectures/재정학_Chapter_10.pptx
+++ b/재정학/01_Lectures/재정학_Chapter_10.pptx
@@ -9794,15 +9794,7 @@
             </a:pPr>
             <a:r>
               <a:rPr lang="ko-KR" altLang="en-US" sz="1600" spc="-50" dirty="0"/>
-              <a:t>축적된 기금에서 </a:t>
-            </a:r>
-            <a:r>
-              <a:rPr lang="ko-KR" altLang="en-US" sz="1600" spc="-50" dirty="0" err="1"/>
-              <a:t>운여되는</a:t>
-            </a:r>
-            <a:r>
-              <a:rPr lang="ko-KR" altLang="en-US" sz="1600" spc="-50" dirty="0"/>
-              <a:t> 것이 아니라</a:t>
+              <a:t>축적된 기금에서 운영 되는 것이 아니라</a:t>
             </a:r>
             <a:r>
               <a:rPr lang="en-US" altLang="ko-KR" sz="1600" spc="-50" dirty="0"/>
@@ -11928,20 +11920,16 @@
                   <a:buChar char="•"/>
                 </a:pPr>
                 <a:r>
-                  <a:rPr lang="ko-KR" altLang="en-US" sz="1600" spc="-50" dirty="0" err="1"/>
+                  <a:rPr lang="ko-KR" altLang="en-US" sz="1600" spc="-50" err="1"/>
                   <a:t>부과방식하에서</a:t>
                 </a:r>
                 <a:r>
+                  <a:rPr lang="ko-KR" altLang="en-US" sz="1600" spc="-50"/>
+                  <a:t> 국민연금재정의 </a:t>
+                </a:r>
+                <a:r>
                   <a:rPr lang="ko-KR" altLang="en-US" sz="1600" spc="-50" dirty="0"/>
-                  <a:t> </a:t>
-                </a:r>
-                <a:r>
-                  <a:rPr lang="ko-KR" altLang="en-US" sz="1600" spc="-50" dirty="0" err="1"/>
-                  <a:t>국민염금재정의</a:t>
-                </a:r>
-                <a:r>
-                  <a:rPr lang="ko-KR" altLang="en-US" sz="1600" spc="-50" dirty="0"/>
-                  <a:t> 수입과 지출은 아래의 공식에 의해 균형을 이루는데</a:t>
+                  <a:t>수입과 지출은 아래의 공식에 의해 균형을 이루는데</a:t>
                 </a:r>
                 <a:r>
                   <a:rPr lang="en-US" altLang="ko-KR" sz="1600" spc="-50" dirty="0"/>
@@ -18269,8 +18257,8 @@
           </a:p>
         </p:txBody>
       </p:sp>
-      <mc:AlternateContent xmlns:mc="http://schemas.openxmlformats.org/markup-compatibility/2006">
-        <mc:Choice xmlns:a14="http://schemas.microsoft.com/office/drawing/2010/main" Requires="a14">
+      <mc:AlternateContent xmlns:mc="http://schemas.openxmlformats.org/markup-compatibility/2006" xmlns:a14="http://schemas.microsoft.com/office/drawing/2010/main">
+        <mc:Choice Requires="a14">
           <p:sp>
             <p:nvSpPr>
               <p:cNvPr id="3" name="TextBox 2">
@@ -18286,7 +18274,7 @@
             <p:spPr>
               <a:xfrm>
                 <a:off x="288790" y="958844"/>
-                <a:ext cx="11250267" cy="5217326"/>
+                <a:ext cx="11250267" cy="4478277"/>
               </a:xfrm>
               <a:prstGeom prst="rect">
                 <a:avLst/>
@@ -18597,37 +18585,10 @@
                   <a:t>.</a:t>
                 </a:r>
               </a:p>
-              <a:p>
-                <a:pPr marL="835025" lvl="1" indent="-285750">
-                  <a:lnSpc>
-                    <a:spcPct val="150000"/>
-                  </a:lnSpc>
-                  <a:buFont typeface="Wingdings" panose="05000000000000000000" pitchFamily="2" charset="2"/>
-                  <a:buChar char="ü"/>
-                </a:pPr>
-                <a:r>
-                  <a:rPr lang="en-US" altLang="ko-KR" sz="1600" dirty="0">
-                    <a:latin typeface="+mn-ea"/>
-                  </a:rPr>
-                  <a:t>https://www.nps.or.kr/pnsinfo/ntpsklg/getOHAF0048M0.do?menuId=MN24001117</a:t>
-                </a:r>
-              </a:p>
-              <a:p>
-                <a:pPr marL="835025" lvl="1" indent="-285750">
-                  <a:lnSpc>
-                    <a:spcPct val="150000"/>
-                  </a:lnSpc>
-                  <a:buFont typeface="Wingdings" panose="05000000000000000000" pitchFamily="2" charset="2"/>
-                  <a:buChar char="ü"/>
-                </a:pPr>
-                <a:endParaRPr lang="en-US" altLang="ko-KR" sz="1600" dirty="0">
-                  <a:latin typeface="Cambria Math" panose="02040503050406030204" pitchFamily="18" charset="0"/>
-                </a:endParaRPr>
-              </a:p>
             </p:txBody>
           </p:sp>
         </mc:Choice>
-        <mc:Fallback>
+        <mc:Fallback xmlns="">
           <p:sp>
             <p:nvSpPr>
               <p:cNvPr id="3" name="TextBox 2">
@@ -18645,7 +18606,7 @@
             <p:spPr>
               <a:xfrm>
                 <a:off x="288790" y="958844"/>
-                <a:ext cx="11250267" cy="5217326"/>
+                <a:ext cx="11250267" cy="4478277"/>
               </a:xfrm>
               <a:prstGeom prst="rect">
                 <a:avLst/>
@@ -18653,7 +18614,7 @@
               <a:blipFill>
                 <a:blip r:embed="rId3"/>
                 <a:stretch>
-                  <a:fillRect/>
+                  <a:fillRect b="-680"/>
                 </a:stretch>
               </a:blipFill>
             </p:spPr>
@@ -18947,8 +18908,8 @@
           </a:p>
         </p:txBody>
       </p:sp>
-      <mc:AlternateContent xmlns:mc="http://schemas.openxmlformats.org/markup-compatibility/2006">
-        <mc:Choice xmlns:a14="http://schemas.microsoft.com/office/drawing/2010/main" Requires="a14">
+      <mc:AlternateContent xmlns:mc="http://schemas.openxmlformats.org/markup-compatibility/2006" xmlns:a14="http://schemas.microsoft.com/office/drawing/2010/main">
+        <mc:Choice Requires="a14">
           <p:sp>
             <p:nvSpPr>
               <p:cNvPr id="3" name="TextBox 2">
@@ -19428,7 +19389,19 @@
                   <a:rPr lang="ko-KR" altLang="en-US" sz="1600" spc="-100" dirty="0">
                     <a:latin typeface="+mn-ea"/>
                   </a:rPr>
-                  <a:t>하향 조정이 몇 차례 이루어지고 </a:t>
+                  <a:t>하향 조정이 </a:t>
+                </a:r>
+                <a:r>
+                  <a:rPr lang="ko-KR" altLang="en-US" sz="1600" spc="-100" dirty="0" err="1">
+                    <a:latin typeface="+mn-ea"/>
+                  </a:rPr>
+                  <a:t>몇차례</a:t>
+                </a:r>
+                <a:r>
+                  <a:rPr lang="ko-KR" altLang="en-US" sz="1600" spc="-100" dirty="0">
+                    <a:latin typeface="+mn-ea"/>
+                  </a:rPr>
+                  <a:t> 이루어지고 </a:t>
                 </a:r>
                 <a:r>
                   <a:rPr lang="en-US" altLang="ko-KR" sz="1600" spc="-100" dirty="0">
@@ -19548,7 +19521,7 @@
             </p:txBody>
           </p:sp>
         </mc:Choice>
-        <mc:Fallback>
+        <mc:Fallback xmlns="">
           <p:sp>
             <p:nvSpPr>
               <p:cNvPr id="3" name="TextBox 2">
@@ -19841,7 +19814,7 @@
             </a:r>
             <a:r>
               <a:rPr lang="en-US" altLang="ko-KR" sz="1600" spc="-50" dirty="0"/>
-              <a:t>.</a:t>
+              <a:t>.     </a:t>
             </a:r>
           </a:p>
           <a:p>
@@ -20096,7 +20069,7 @@
         <p:spPr>
           <a:xfrm>
             <a:off x="288790" y="958844"/>
-            <a:ext cx="11086682" cy="4107343"/>
+            <a:ext cx="11086682" cy="5584670"/>
           </a:xfrm>
           <a:prstGeom prst="rect">
             <a:avLst/>
@@ -20284,7 +20257,7 @@
             </a:r>
             <a:r>
               <a:rPr lang="en-US" altLang="ko-KR" sz="1600" spc="-50" dirty="0"/>
-              <a:t>2023</a:t>
+              <a:t>2033</a:t>
             </a:r>
             <a:r>
               <a:rPr lang="ko-KR" altLang="en-US" sz="1600" spc="-50" dirty="0"/>
@@ -20358,6 +20331,47 @@
             <a:r>
               <a:rPr lang="en-US" altLang="ko-KR" sz="1600" spc="-50" dirty="0"/>
               <a:t>.</a:t>
+            </a:r>
+          </a:p>
+          <a:p>
+            <a:pPr marL="835025" lvl="1" indent="-285750">
+              <a:lnSpc>
+                <a:spcPct val="150000"/>
+              </a:lnSpc>
+              <a:buFont typeface="Wingdings" panose="05000000000000000000" pitchFamily="2" charset="2"/>
+              <a:buChar char="ü"/>
+            </a:pPr>
+            <a:r>
+              <a:rPr lang="en-US" altLang="ko-KR" sz="1600" spc="-50" dirty="0">
+                <a:hlinkClick r:id="rId3"/>
+              </a:rPr>
+              <a:t>https://www.mohw.go.kr/board.es?act=view&amp;bid=0027&amp;list_no=1485039&amp;mid=a10503010100&amp;nPage=1&amp;tag=&amp;utm_source</a:t>
+            </a:r>
+            <a:endParaRPr lang="en-US" altLang="ko-KR" sz="1600" spc="-50" dirty="0"/>
+          </a:p>
+          <a:p>
+            <a:pPr marL="835025" lvl="1" indent="-285750">
+              <a:lnSpc>
+                <a:spcPct val="150000"/>
+              </a:lnSpc>
+              <a:buFont typeface="Wingdings" panose="05000000000000000000" pitchFamily="2" charset="2"/>
+              <a:buChar char="ü"/>
+            </a:pPr>
+            <a:r>
+              <a:rPr lang="ko-KR" altLang="en-US" sz="1600" spc="-50" dirty="0"/>
+              <a:t>국민연금 구조개혁 방안</a:t>
+            </a:r>
+            <a:endParaRPr lang="en-US" altLang="ko-KR" sz="1600" spc="-50" dirty="0"/>
+          </a:p>
+          <a:p>
+            <a:pPr marL="549275" lvl="1">
+              <a:lnSpc>
+                <a:spcPct val="150000"/>
+              </a:lnSpc>
+            </a:pPr>
+            <a:r>
+              <a:rPr lang="en-US" altLang="ko-KR" sz="1600" spc="-50" dirty="0"/>
+              <a:t>     https://www.kdi.re.kr/research/focusView?pub_no=18231</a:t>
             </a:r>
           </a:p>
         </p:txBody>
@@ -20470,7 +20484,7 @@
         <p:spPr>
           <a:xfrm>
             <a:off x="288790" y="958844"/>
-            <a:ext cx="11086682" cy="4107343"/>
+            <a:ext cx="11086682" cy="4476675"/>
           </a:xfrm>
           <a:prstGeom prst="rect">
             <a:avLst/>
@@ -20658,6 +20672,16 @@
               <a:rPr lang="en-US" altLang="ko-KR" sz="1600" spc="-50" dirty="0"/>
               <a:t>.</a:t>
             </a:r>
+          </a:p>
+          <a:p>
+            <a:pPr marL="835025" lvl="1" indent="-285750">
+              <a:lnSpc>
+                <a:spcPct val="150000"/>
+              </a:lnSpc>
+              <a:buFont typeface="Wingdings" panose="05000000000000000000" pitchFamily="2" charset="2"/>
+              <a:buChar char="ü"/>
+            </a:pPr>
+            <a:endParaRPr lang="en-US" altLang="ko-KR" sz="1600" spc="-50" dirty="0"/>
           </a:p>
         </p:txBody>
       </p:sp>

--- a/재정학/01_Lectures/재정학_Chapter_10.pptx
+++ b/재정학/01_Lectures/재정학_Chapter_10.pptx
@@ -268,7 +268,7 @@
           <a:p>
             <a:fld id="{4A5E00EF-AEA4-43E2-9451-8F9C59A39471}" type="datetimeFigureOut">
               <a:rPr lang="ko-KR" altLang="en-US" smtClean="0"/>
-              <a:t>2026-06-05</a:t>
+              <a:t>2026-06-06</a:t>
             </a:fld>
             <a:endParaRPr lang="ko-KR" altLang="en-US"/>
           </a:p>
@@ -2394,7 +2394,7 @@
           <a:p>
             <a:fld id="{CD32C56F-BD27-4999-9E6D-D4EACE3DA9F4}" type="datetime1">
               <a:rPr lang="ko-KR" altLang="en-US" smtClean="0"/>
-              <a:t>2026-06-05</a:t>
+              <a:t>2026-06-06</a:t>
             </a:fld>
             <a:endParaRPr lang="ko-KR" altLang="en-US"/>
           </a:p>
@@ -2608,7 +2608,7 @@
           <a:p>
             <a:fld id="{8EF4A19C-72C8-45CA-8E3F-68A7FA345D6C}" type="datetime1">
               <a:rPr lang="ko-KR" altLang="en-US" smtClean="0"/>
-              <a:t>2026-06-05</a:t>
+              <a:t>2026-06-06</a:t>
             </a:fld>
             <a:endParaRPr lang="ko-KR" altLang="en-US"/>
           </a:p>
@@ -2832,7 +2832,7 @@
           <a:p>
             <a:fld id="{56A175B2-010B-4341-954C-5F8F5C70B124}" type="datetime1">
               <a:rPr lang="ko-KR" altLang="en-US" smtClean="0"/>
-              <a:t>2026-06-05</a:t>
+              <a:t>2026-06-06</a:t>
             </a:fld>
             <a:endParaRPr lang="ko-KR" altLang="en-US"/>
           </a:p>
@@ -3046,7 +3046,7 @@
           <a:p>
             <a:fld id="{16B83F9E-22C9-45CA-9E85-070F1D3EF530}" type="datetime1">
               <a:rPr lang="ko-KR" altLang="en-US" smtClean="0"/>
-              <a:t>2026-06-05</a:t>
+              <a:t>2026-06-06</a:t>
             </a:fld>
             <a:endParaRPr lang="ko-KR" altLang="en-US"/>
           </a:p>
@@ -3337,7 +3337,7 @@
           <a:p>
             <a:fld id="{03278F45-FB3C-4C4D-B89A-7BC3F5F229F6}" type="datetime1">
               <a:rPr lang="ko-KR" altLang="en-US" smtClean="0"/>
-              <a:t>2026-06-05</a:t>
+              <a:t>2026-06-06</a:t>
             </a:fld>
             <a:endParaRPr lang="ko-KR" altLang="en-US"/>
           </a:p>
@@ -3730,7 +3730,7 @@
           <a:p>
             <a:fld id="{38FDAC3C-35A6-415C-9F03-738A6AC328B1}" type="datetime1">
               <a:rPr lang="ko-KR" altLang="en-US" smtClean="0"/>
-              <a:t>2026-06-05</a:t>
+              <a:t>2026-06-06</a:t>
             </a:fld>
             <a:endParaRPr lang="ko-KR" altLang="en-US"/>
           </a:p>
@@ -5324,7 +5324,7 @@
           <a:p>
             <a:fld id="{507A0DF1-AEE6-4B0D-89D2-351E7B3EF65C}" type="datetime1">
               <a:rPr lang="ko-KR" altLang="en-US" smtClean="0"/>
-              <a:t>2026-06-05</a:t>
+              <a:t>2026-06-06</a:t>
             </a:fld>
             <a:endParaRPr lang="ko-KR" altLang="en-US"/>
           </a:p>
@@ -5752,7 +5752,7 @@
           <a:p>
             <a:fld id="{CA93B8C9-630F-4D57-944D-04FD37CECCD3}" type="datetime1">
               <a:rPr lang="ko-KR" altLang="en-US" smtClean="0"/>
-              <a:t>2026-06-05</a:t>
+              <a:t>2026-06-06</a:t>
             </a:fld>
             <a:endParaRPr lang="ko-KR" altLang="en-US"/>
           </a:p>
@@ -5909,7 +5909,7 @@
           <a:p>
             <a:fld id="{E986165A-AC43-4902-9541-874ECD310BA3}" type="datetime1">
               <a:rPr lang="ko-KR" altLang="en-US" smtClean="0"/>
-              <a:t>2026-06-05</a:t>
+              <a:t>2026-06-06</a:t>
             </a:fld>
             <a:endParaRPr lang="ko-KR" altLang="en-US"/>
           </a:p>
@@ -6236,7 +6236,7 @@
           <a:p>
             <a:fld id="{47E6EE6D-2B0E-43A9-87A2-7354CDB998F4}" type="datetime1">
               <a:rPr lang="ko-KR" altLang="en-US" smtClean="0"/>
-              <a:t>2026-06-05</a:t>
+              <a:t>2026-06-06</a:t>
             </a:fld>
             <a:endParaRPr lang="ko-KR" altLang="en-US"/>
           </a:p>
@@ -6540,7 +6540,7 @@
           <a:p>
             <a:fld id="{5CC5944E-0BC8-4FAA-9F94-6B4B05834E10}" type="datetime1">
               <a:rPr lang="ko-KR" altLang="en-US" smtClean="0"/>
-              <a:t>2026-06-05</a:t>
+              <a:t>2026-06-06</a:t>
             </a:fld>
             <a:endParaRPr lang="ko-KR" altLang="en-US"/>
           </a:p>
@@ -21675,7 +21675,7 @@
         <p:spPr>
           <a:xfrm>
             <a:off x="288790" y="958844"/>
-            <a:ext cx="11086682" cy="4846007"/>
+            <a:ext cx="11086682" cy="5215338"/>
           </a:xfrm>
           <a:prstGeom prst="rect">
             <a:avLst/>
@@ -21775,7 +21775,7 @@
             </a:r>
             <a:r>
               <a:rPr lang="ko-KR" altLang="en-US" sz="1600" spc="-50" dirty="0"/>
-              <a:t> </a:t>
+              <a:t> 민간 보험 혜택을 누리지 못하는 국민들에게는 </a:t>
             </a:r>
             <a:r>
               <a:rPr lang="en-US" altLang="ko-KR" sz="1600" spc="-50" dirty="0"/>
@@ -24922,7 +24922,7 @@
         <p:spPr>
           <a:xfrm>
             <a:off x="288790" y="958844"/>
-            <a:ext cx="11137016" cy="3738011"/>
+            <a:ext cx="11137016" cy="4107343"/>
           </a:xfrm>
           <a:prstGeom prst="rect">
             <a:avLst/>
@@ -24977,15 +24977,24 @@
             </a:pPr>
             <a:r>
               <a:rPr lang="ko-KR" altLang="en-US" sz="1600" spc="-50" dirty="0"/>
-              <a:t>현재는 의료인과 비영리법인만이 의료기관을 설립할 수 있는데</a:t>
-            </a:r>
-            <a:r>
-              <a:rPr lang="en-US" altLang="ko-KR" sz="1600" spc="-50" dirty="0"/>
-              <a:t>, </a:t>
-            </a:r>
-            <a:r>
-              <a:rPr lang="ko-KR" altLang="en-US" sz="1600" spc="-50" dirty="0"/>
-              <a:t>영리법인도 의료기관을 설립할 수 있다는 의미다</a:t>
+              <a:t>현재는 의료인과 비영리법인만이 의료기관을 설립할 수 있다</a:t>
+            </a:r>
+            <a:r>
+              <a:rPr lang="en-US" altLang="ko-KR" sz="1600" spc="-50" dirty="0"/>
+              <a:t>.</a:t>
+            </a:r>
+          </a:p>
+          <a:p>
+            <a:pPr marL="1349375" lvl="2" indent="-342900">
+              <a:lnSpc>
+                <a:spcPct val="150000"/>
+              </a:lnSpc>
+              <a:buFont typeface="Wingdings" panose="05000000000000000000" pitchFamily="2" charset="2"/>
+              <a:buChar char="Ø"/>
+            </a:pPr>
+            <a:r>
+              <a:rPr lang="ko-KR" altLang="en-US" sz="1600" spc="-50" dirty="0"/>
+              <a:t>영리병원이 도입되면 영리법인도 의료기관을 설립할 수 있다는 의미다</a:t>
             </a:r>
             <a:r>
               <a:rPr lang="en-US" altLang="ko-KR" sz="1600" spc="-50" dirty="0"/>

--- a/재정학/01_Lectures/재정학_Chapter_10.pptx
+++ b/재정학/01_Lectures/재정학_Chapter_10.pptx
@@ -268,7 +268,7 @@
           <a:p>
             <a:fld id="{4A5E00EF-AEA4-43E2-9451-8F9C59A39471}" type="datetimeFigureOut">
               <a:rPr lang="ko-KR" altLang="en-US" smtClean="0"/>
-              <a:t>2026-06-06</a:t>
+              <a:t>2026-06-07</a:t>
             </a:fld>
             <a:endParaRPr lang="ko-KR" altLang="en-US"/>
           </a:p>
@@ -2394,7 +2394,7 @@
           <a:p>
             <a:fld id="{CD32C56F-BD27-4999-9E6D-D4EACE3DA9F4}" type="datetime1">
               <a:rPr lang="ko-KR" altLang="en-US" smtClean="0"/>
-              <a:t>2026-06-06</a:t>
+              <a:t>2026-06-07</a:t>
             </a:fld>
             <a:endParaRPr lang="ko-KR" altLang="en-US"/>
           </a:p>
@@ -2608,7 +2608,7 @@
           <a:p>
             <a:fld id="{8EF4A19C-72C8-45CA-8E3F-68A7FA345D6C}" type="datetime1">
               <a:rPr lang="ko-KR" altLang="en-US" smtClean="0"/>
-              <a:t>2026-06-06</a:t>
+              <a:t>2026-06-07</a:t>
             </a:fld>
             <a:endParaRPr lang="ko-KR" altLang="en-US"/>
           </a:p>
@@ -2832,7 +2832,7 @@
           <a:p>
             <a:fld id="{56A175B2-010B-4341-954C-5F8F5C70B124}" type="datetime1">
               <a:rPr lang="ko-KR" altLang="en-US" smtClean="0"/>
-              <a:t>2026-06-06</a:t>
+              <a:t>2026-06-07</a:t>
             </a:fld>
             <a:endParaRPr lang="ko-KR" altLang="en-US"/>
           </a:p>
@@ -3046,7 +3046,7 @@
           <a:p>
             <a:fld id="{16B83F9E-22C9-45CA-9E85-070F1D3EF530}" type="datetime1">
               <a:rPr lang="ko-KR" altLang="en-US" smtClean="0"/>
-              <a:t>2026-06-06</a:t>
+              <a:t>2026-06-07</a:t>
             </a:fld>
             <a:endParaRPr lang="ko-KR" altLang="en-US"/>
           </a:p>
@@ -3337,7 +3337,7 @@
           <a:p>
             <a:fld id="{03278F45-FB3C-4C4D-B89A-7BC3F5F229F6}" type="datetime1">
               <a:rPr lang="ko-KR" altLang="en-US" smtClean="0"/>
-              <a:t>2026-06-06</a:t>
+              <a:t>2026-06-07</a:t>
             </a:fld>
             <a:endParaRPr lang="ko-KR" altLang="en-US"/>
           </a:p>
@@ -3730,7 +3730,7 @@
           <a:p>
             <a:fld id="{38FDAC3C-35A6-415C-9F03-738A6AC328B1}" type="datetime1">
               <a:rPr lang="ko-KR" altLang="en-US" smtClean="0"/>
-              <a:t>2026-06-06</a:t>
+              <a:t>2026-06-07</a:t>
             </a:fld>
             <a:endParaRPr lang="ko-KR" altLang="en-US"/>
           </a:p>
@@ -5324,7 +5324,7 @@
           <a:p>
             <a:fld id="{507A0DF1-AEE6-4B0D-89D2-351E7B3EF65C}" type="datetime1">
               <a:rPr lang="ko-KR" altLang="en-US" smtClean="0"/>
-              <a:t>2026-06-06</a:t>
+              <a:t>2026-06-07</a:t>
             </a:fld>
             <a:endParaRPr lang="ko-KR" altLang="en-US"/>
           </a:p>
@@ -5752,7 +5752,7 @@
           <a:p>
             <a:fld id="{CA93B8C9-630F-4D57-944D-04FD37CECCD3}" type="datetime1">
               <a:rPr lang="ko-KR" altLang="en-US" smtClean="0"/>
-              <a:t>2026-06-06</a:t>
+              <a:t>2026-06-07</a:t>
             </a:fld>
             <a:endParaRPr lang="ko-KR" altLang="en-US"/>
           </a:p>
@@ -5909,7 +5909,7 @@
           <a:p>
             <a:fld id="{E986165A-AC43-4902-9541-874ECD310BA3}" type="datetime1">
               <a:rPr lang="ko-KR" altLang="en-US" smtClean="0"/>
-              <a:t>2026-06-06</a:t>
+              <a:t>2026-06-07</a:t>
             </a:fld>
             <a:endParaRPr lang="ko-KR" altLang="en-US"/>
           </a:p>
@@ -6236,7 +6236,7 @@
           <a:p>
             <a:fld id="{47E6EE6D-2B0E-43A9-87A2-7354CDB998F4}" type="datetime1">
               <a:rPr lang="ko-KR" altLang="en-US" smtClean="0"/>
-              <a:t>2026-06-06</a:t>
+              <a:t>2026-06-07</a:t>
             </a:fld>
             <a:endParaRPr lang="ko-KR" altLang="en-US"/>
           </a:p>
@@ -6540,7 +6540,7 @@
           <a:p>
             <a:fld id="{5CC5944E-0BC8-4FAA-9F94-6B4B05834E10}" type="datetime1">
               <a:rPr lang="ko-KR" altLang="en-US" smtClean="0"/>
-              <a:t>2026-06-06</a:t>
+              <a:t>2026-06-07</a:t>
             </a:fld>
             <a:endParaRPr lang="ko-KR" altLang="en-US"/>
           </a:p>
@@ -11807,8 +11807,8 @@
           </a:p>
         </p:txBody>
       </p:sp>
-      <mc:AlternateContent xmlns:mc="http://schemas.openxmlformats.org/markup-compatibility/2006" xmlns:a14="http://schemas.microsoft.com/office/drawing/2010/main">
-        <mc:Choice Requires="a14">
+      <mc:AlternateContent xmlns:mc="http://schemas.openxmlformats.org/markup-compatibility/2006">
+        <mc:Choice xmlns:a14="http://schemas.microsoft.com/office/drawing/2010/main" Requires="a14">
           <p:sp>
             <p:nvSpPr>
               <p:cNvPr id="3" name="TextBox 2">
@@ -11920,16 +11920,12 @@
                   <a:buChar char="•"/>
                 </a:pPr>
                 <a:r>
-                  <a:rPr lang="ko-KR" altLang="en-US" sz="1600" spc="-50" err="1"/>
+                  <a:rPr lang="ko-KR" altLang="en-US" sz="1600" spc="-50" dirty="0" err="1"/>
                   <a:t>부과방식하에서</a:t>
                 </a:r>
                 <a:r>
-                  <a:rPr lang="ko-KR" altLang="en-US" sz="1600" spc="-50"/>
-                  <a:t> 국민연금재정의 </a:t>
-                </a:r>
-                <a:r>
                   <a:rPr lang="ko-KR" altLang="en-US" sz="1600" spc="-50" dirty="0"/>
-                  <a:t>수입과 지출은 아래의 공식에 의해 균형을 이루는데</a:t>
+                  <a:t> 국민연금재정의 수입과 지출은 아래의 공식에 의해 균형을 이루는데</a:t>
                 </a:r>
                 <a:r>
                   <a:rPr lang="en-US" altLang="ko-KR" sz="1600" spc="-50" dirty="0"/>
@@ -11972,24 +11968,6 @@
                   <a:buFont typeface="Wingdings" panose="05000000000000000000" pitchFamily="2" charset="2"/>
                   <a:buChar char="ü"/>
                 </a:pPr>
-                <a14:m>
-                  <m:oMath xmlns:m="http://schemas.openxmlformats.org/officeDocument/2006/math">
-                    <m:r>
-                      <a:rPr lang="en-US" altLang="ko-KR" sz="1600" i="1">
-                        <a:latin typeface="Cambria Math" panose="02040503050406030204" pitchFamily="18" charset="0"/>
-                      </a:rPr>
-                      <m:t>𝑡</m:t>
-                    </m:r>
-                  </m:oMath>
-                </a14:m>
-                <a:r>
-                  <a:rPr lang="ko-KR" altLang="en-US" sz="1600" spc="-50" dirty="0"/>
-                  <a:t>는 보험료율</a:t>
-                </a:r>
-                <a:r>
-                  <a:rPr lang="en-US" altLang="ko-KR" sz="1600" spc="-50" dirty="0"/>
-                  <a:t>, </a:t>
-                </a:r>
                 <a14:m>
                   <m:oMath xmlns:m="http://schemas.openxmlformats.org/officeDocument/2006/math">
                     <m:sSub>
@@ -12056,7 +12034,37 @@
                 </a14:m>
                 <a:r>
                   <a:rPr lang="ko-KR" altLang="en-US" sz="1600" spc="-50" dirty="0"/>
-                  <a:t>는 평균임금을 나타내고</a:t>
+                  <a:t>는 평균임금</a:t>
+                </a:r>
+                <a:r>
+                  <a:rPr lang="en-US" altLang="ko-KR" sz="1600" spc="-50"/>
+                  <a:t>,</a:t>
+                </a:r>
+                <a:r>
+                  <a:rPr lang="en-US" altLang="ko-KR" sz="1600"/>
+                  <a:t> </a:t>
+                </a:r>
+                <a14:m>
+                  <m:oMath xmlns:m="http://schemas.openxmlformats.org/officeDocument/2006/math">
+                    <m:r>
+                      <a:rPr lang="en-US" altLang="ko-KR" sz="1600" i="1">
+                        <a:latin typeface="Cambria Math" panose="02040503050406030204" pitchFamily="18" charset="0"/>
+                      </a:rPr>
+                      <m:t>𝑡</m:t>
+                    </m:r>
+                  </m:oMath>
+                </a14:m>
+                <a:r>
+                  <a:rPr lang="ko-KR" altLang="en-US" sz="1600" spc="-50" dirty="0"/>
+                  <a:t>는 보험료율</a:t>
+                </a:r>
+                <a:r>
+                  <a:rPr lang="en-US" altLang="ko-KR" sz="1600" spc="-50" dirty="0"/>
+                  <a:t>, </a:t>
+                </a:r>
+                <a:r>
+                  <a:rPr lang="ko-KR" altLang="en-US" sz="1600" spc="-50" dirty="0"/>
+                  <a:t>을 나타내고</a:t>
                 </a:r>
                 <a:r>
                   <a:rPr lang="en-US" altLang="ko-KR" sz="1600" spc="-50" dirty="0"/>
@@ -12224,7 +12232,7 @@
             </p:txBody>
           </p:sp>
         </mc:Choice>
-        <mc:Fallback xmlns="">
+        <mc:Fallback>
           <p:sp>
             <p:nvSpPr>
               <p:cNvPr id="3" name="TextBox 2">
@@ -12269,8 +12277,8 @@
           </p:sp>
         </mc:Fallback>
       </mc:AlternateContent>
-      <mc:AlternateContent xmlns:mc="http://schemas.openxmlformats.org/markup-compatibility/2006" xmlns:a14="http://schemas.microsoft.com/office/drawing/2010/main">
-        <mc:Choice Requires="a14">
+      <mc:AlternateContent xmlns:mc="http://schemas.openxmlformats.org/markup-compatibility/2006">
+        <mc:Choice xmlns:a14="http://schemas.microsoft.com/office/drawing/2010/main" Requires="a14">
           <p:sp>
             <p:nvSpPr>
               <p:cNvPr id="5" name="TextBox 4">
@@ -12286,7 +12294,7 @@
             <p:spPr>
               <a:xfrm>
                 <a:off x="2472743" y="3363532"/>
-                <a:ext cx="2286010" cy="276999"/>
+                <a:ext cx="2337307" cy="276999"/>
               </a:xfrm>
               <a:prstGeom prst="rect">
                 <a:avLst/>
@@ -12306,18 +12314,6 @@
                       <m:jc m:val="centerGroup"/>
                     </m:oMathParaPr>
                     <m:oMath xmlns:m="http://schemas.openxmlformats.org/officeDocument/2006/math">
-                      <m:r>
-                        <a:rPr lang="en-US" altLang="ko-KR" b="0" i="1" smtClean="0">
-                          <a:latin typeface="Cambria Math" panose="02040503050406030204" pitchFamily="18" charset="0"/>
-                        </a:rPr>
-                        <m:t>𝑡</m:t>
-                      </m:r>
-                      <m:r>
-                        <a:rPr lang="en-US" altLang="ko-KR" b="0" i="1" smtClean="0">
-                          <a:latin typeface="Cambria Math" panose="02040503050406030204" pitchFamily="18" charset="0"/>
-                        </a:rPr>
-                        <m:t> ×</m:t>
-                      </m:r>
                       <m:sSub>
                         <m:sSubPr>
                           <m:ctrlPr>
@@ -12378,6 +12374,25 @@
                           <a:latin typeface="Cambria Math" panose="02040503050406030204" pitchFamily="18" charset="0"/>
                           <a:ea typeface="Cambria Math" panose="02040503050406030204" pitchFamily="18" charset="0"/>
                         </a:rPr>
+                        <m:t> </m:t>
+                      </m:r>
+                      <m:r>
+                        <a:rPr lang="en-US" altLang="ko-KR" i="1" smtClean="0">
+                          <a:latin typeface="Cambria Math" panose="02040503050406030204" pitchFamily="18" charset="0"/>
+                        </a:rPr>
+                        <m:t>×</m:t>
+                      </m:r>
+                      <m:r>
+                        <a:rPr lang="en-US" altLang="ko-KR" i="1">
+                          <a:latin typeface="Cambria Math" panose="02040503050406030204" pitchFamily="18" charset="0"/>
+                        </a:rPr>
+                        <m:t>𝑡</m:t>
+                      </m:r>
+                      <m:r>
+                        <a:rPr lang="en-US" altLang="ko-KR" b="0" i="1" smtClean="0">
+                          <a:latin typeface="Cambria Math" panose="02040503050406030204" pitchFamily="18" charset="0"/>
+                          <a:ea typeface="Cambria Math" panose="02040503050406030204" pitchFamily="18" charset="0"/>
+                        </a:rPr>
                         <m:t>= </m:t>
                       </m:r>
                       <m:sSub>
@@ -12430,7 +12445,7 @@
             </p:txBody>
           </p:sp>
         </mc:Choice>
-        <mc:Fallback xmlns="">
+        <mc:Fallback>
           <p:sp>
             <p:nvSpPr>
               <p:cNvPr id="5" name="TextBox 4">
@@ -12448,7 +12463,7 @@
             <p:spPr>
               <a:xfrm>
                 <a:off x="2472743" y="3363532"/>
-                <a:ext cx="2286010" cy="276999"/>
+                <a:ext cx="2337307" cy="276999"/>
               </a:xfrm>
               <a:prstGeom prst="rect">
                 <a:avLst/>
@@ -12456,7 +12471,7 @@
               <a:blipFill>
                 <a:blip r:embed="rId3"/>
                 <a:stretch>
-                  <a:fillRect l="-1333" r="-1067" b="-20000"/>
+                  <a:fillRect l="-261" b="-20000"/>
                 </a:stretch>
               </a:blipFill>
             </p:spPr>
@@ -26002,7 +26017,7 @@
         </p:nvSpPr>
         <p:spPr>
           <a:xfrm>
-            <a:off x="288790" y="2853326"/>
+            <a:off x="288790" y="2819773"/>
             <a:ext cx="7146613" cy="1522020"/>
           </a:xfrm>
           <a:prstGeom prst="rect">
